--- a/slides/Lecture_Chapter04.pptx
+++ b/slides/Lecture_Chapter04.pptx
@@ -340,7 +340,7 @@
           <a:p>
             <a:fld id="{3E22BF2E-04DA-469E-97C5-BB68A0368813}" type="datetimeFigureOut">
               <a:rPr lang="en-US" smtClean="0"/>
-              <a:t>4/9/2026</a:t>
+              <a:t>9/9/2026</a:t>
             </a:fld>
             <a:endParaRPr lang="en-US"/>
           </a:p>
@@ -538,7 +538,7 @@
           <a:p>
             <a:fld id="{3E22BF2E-04DA-469E-97C5-BB68A0368813}" type="datetimeFigureOut">
               <a:rPr lang="en-US" smtClean="0"/>
-              <a:t>4/9/2026</a:t>
+              <a:t>9/9/2026</a:t>
             </a:fld>
             <a:endParaRPr lang="en-US"/>
           </a:p>
@@ -746,7 +746,7 @@
           <a:p>
             <a:fld id="{3E22BF2E-04DA-469E-97C5-BB68A0368813}" type="datetimeFigureOut">
               <a:rPr lang="en-US" smtClean="0"/>
-              <a:t>4/9/2026</a:t>
+              <a:t>9/9/2026</a:t>
             </a:fld>
             <a:endParaRPr lang="en-US"/>
           </a:p>
@@ -954,7 +954,7 @@
           <a:p>
             <a:fld id="{3E22BF2E-04DA-469E-97C5-BB68A0368813}" type="datetimeFigureOut">
               <a:rPr lang="en-US" smtClean="0"/>
-              <a:t>4/9/2026</a:t>
+              <a:t>9/9/2026</a:t>
             </a:fld>
             <a:endParaRPr lang="en-US"/>
           </a:p>
@@ -1229,7 +1229,7 @@
           <a:p>
             <a:fld id="{3E22BF2E-04DA-469E-97C5-BB68A0368813}" type="datetimeFigureOut">
               <a:rPr lang="en-US" smtClean="0"/>
-              <a:t>4/9/2026</a:t>
+              <a:t>9/9/2026</a:t>
             </a:fld>
             <a:endParaRPr lang="en-US"/>
           </a:p>
@@ -1494,7 +1494,7 @@
           <a:p>
             <a:fld id="{3E22BF2E-04DA-469E-97C5-BB68A0368813}" type="datetimeFigureOut">
               <a:rPr lang="en-US" smtClean="0"/>
-              <a:t>4/9/2026</a:t>
+              <a:t>9/9/2026</a:t>
             </a:fld>
             <a:endParaRPr lang="en-US"/>
           </a:p>
@@ -1906,7 +1906,7 @@
           <a:p>
             <a:fld id="{3E22BF2E-04DA-469E-97C5-BB68A0368813}" type="datetimeFigureOut">
               <a:rPr lang="en-US" smtClean="0"/>
-              <a:t>4/9/2026</a:t>
+              <a:t>9/9/2026</a:t>
             </a:fld>
             <a:endParaRPr lang="en-US"/>
           </a:p>
@@ -2047,7 +2047,7 @@
           <a:p>
             <a:fld id="{3E22BF2E-04DA-469E-97C5-BB68A0368813}" type="datetimeFigureOut">
               <a:rPr lang="en-US" smtClean="0"/>
-              <a:t>4/9/2026</a:t>
+              <a:t>9/9/2026</a:t>
             </a:fld>
             <a:endParaRPr lang="en-US"/>
           </a:p>
@@ -2160,7 +2160,7 @@
           <a:p>
             <a:fld id="{3E22BF2E-04DA-469E-97C5-BB68A0368813}" type="datetimeFigureOut">
               <a:rPr lang="en-US" smtClean="0"/>
-              <a:t>4/9/2026</a:t>
+              <a:t>9/9/2026</a:t>
             </a:fld>
             <a:endParaRPr lang="en-US"/>
           </a:p>
@@ -2471,7 +2471,7 @@
           <a:p>
             <a:fld id="{3E22BF2E-04DA-469E-97C5-BB68A0368813}" type="datetimeFigureOut">
               <a:rPr lang="en-US" smtClean="0"/>
-              <a:t>4/9/2026</a:t>
+              <a:t>9/9/2026</a:t>
             </a:fld>
             <a:endParaRPr lang="en-US"/>
           </a:p>
@@ -2759,7 +2759,7 @@
           <a:p>
             <a:fld id="{3E22BF2E-04DA-469E-97C5-BB68A0368813}" type="datetimeFigureOut">
               <a:rPr lang="en-US" smtClean="0"/>
-              <a:t>4/9/2026</a:t>
+              <a:t>9/9/2026</a:t>
             </a:fld>
             <a:endParaRPr lang="en-US"/>
           </a:p>
@@ -3000,7 +3000,7 @@
           <a:p>
             <a:fld id="{3E22BF2E-04DA-469E-97C5-BB68A0368813}" type="datetimeFigureOut">
               <a:rPr lang="en-US" smtClean="0"/>
-              <a:t>4/9/2026</a:t>
+              <a:t>9/9/2026</a:t>
             </a:fld>
             <a:endParaRPr lang="en-US"/>
           </a:p>
@@ -4382,10 +4382,7 @@
                 </a:pPr>
                 <a14:m>
                   <m:oMathPara xmlns:m="http://schemas.openxmlformats.org/officeDocument/2006/math">
-                    <m:oMathParaPr>
-                      <m:jc m:val="centerGroup"/>
-                    </m:oMathParaPr>
-                    <m:oMath xmlns:m="http://schemas.openxmlformats.org/officeDocument/2006/math">
+                    <m:oMath>
                       <m:sSub>
                         <m:sSubPr>
                           <m:ctrlPr>
@@ -4631,7 +4628,7 @@
                         <m:t>]</m:t>
                       </m:r>
                     </m:oMath>
-                    <m:oMath xmlns:m="http://schemas.openxmlformats.org/officeDocument/2006/math">
+                    <m:oMath>
                       <m:r>
                         <m:rPr>
                           <m:aln/>
@@ -5390,10 +5387,7 @@
                     <a:pPr/>
                     <a14:m>
                       <m:oMathPara xmlns:m="http://schemas.openxmlformats.org/officeDocument/2006/math">
-                        <m:oMathParaPr>
-                          <m:jc m:val="centerGroup"/>
-                        </m:oMathParaPr>
-                        <m:oMath xmlns:m="http://schemas.openxmlformats.org/officeDocument/2006/math">
+                        <m:oMath>
                           <m:sSub>
                             <m:sSubPr>
                               <m:ctrlPr>
@@ -6217,10 +6211,7 @@
                     <a:pPr/>
                     <a14:m>
                       <m:oMathPara xmlns:m="http://schemas.openxmlformats.org/officeDocument/2006/math">
-                        <m:oMathParaPr>
-                          <m:jc m:val="centerGroup"/>
-                        </m:oMathParaPr>
-                        <m:oMath xmlns:m="http://schemas.openxmlformats.org/officeDocument/2006/math">
+                        <m:oMath>
                           <m:sSub>
                             <m:sSubPr>
                               <m:ctrlPr>
@@ -6432,10 +6423,7 @@
                     <a:pPr/>
                     <a14:m>
                       <m:oMathPara xmlns:m="http://schemas.openxmlformats.org/officeDocument/2006/math">
-                        <m:oMathParaPr>
-                          <m:jc m:val="centerGroup"/>
-                        </m:oMathParaPr>
-                        <m:oMath xmlns:m="http://schemas.openxmlformats.org/officeDocument/2006/math">
+                        <m:oMath>
                           <m:sSub>
                             <m:sSubPr>
                               <m:ctrlPr>
@@ -7181,10 +7169,7 @@
                 </a:pPr>
                 <a14:m>
                   <m:oMathPara xmlns:m="http://schemas.openxmlformats.org/officeDocument/2006/math">
-                    <m:oMathParaPr>
-                      <m:jc m:val="centerGroup"/>
-                    </m:oMathParaPr>
-                    <m:oMath xmlns:m="http://schemas.openxmlformats.org/officeDocument/2006/math">
+                    <m:oMath>
                       <m:sSup>
                         <m:sSupPr>
                           <m:ctrlPr>
@@ -7623,14 +7608,11 @@
                 </a:pPr>
                 <a14:m>
                   <m:oMathPara xmlns:m="http://schemas.openxmlformats.org/officeDocument/2006/math">
-                    <m:oMathParaPr>
-                      <m:jc m:val="centerGroup"/>
-                    </m:oMathParaPr>
-                    <m:oMath xmlns:m="http://schemas.openxmlformats.org/officeDocument/2006/math">
+                    <m:oMath>
                       <m:sSub>
                         <m:sSubPr>
                           <m:ctrlPr>
-                            <a:rPr lang="en-US" b="0" i="1" smtClean="0">
+                            <a:rPr lang="en-US" i="1" smtClean="0">
                               <a:latin typeface="Cambria Math" panose="02040503050406030204" pitchFamily="18" charset="0"/>
                             </a:rPr>
                           </m:ctrlPr>
@@ -7641,7 +7623,7 @@
                               <m:begChr m:val="‖"/>
                               <m:endChr m:val="‖"/>
                               <m:ctrlPr>
-                                <a:rPr lang="en-US" i="1" smtClean="0">
+                                <a:rPr lang="en-US" b="0" i="1" smtClean="0">
                                   <a:latin typeface="Cambria Math" panose="02040503050406030204" pitchFamily="18" charset="0"/>
                                 </a:rPr>
                               </m:ctrlPr>
@@ -7730,7 +7712,7 @@
                       <m:sSub>
                         <m:sSubPr>
                           <m:ctrlPr>
-                            <a:rPr lang="en-US" i="1">
+                            <a:rPr lang="en-US" b="0" i="1" smtClean="0">
                               <a:latin typeface="Cambria Math" panose="02040503050406030204" pitchFamily="18" charset="0"/>
                             </a:rPr>
                           </m:ctrlPr>
@@ -7747,7 +7729,7 @@
                               <m:begChr m:val="‖"/>
                               <m:endChr m:val="‖"/>
                               <m:ctrlPr>
-                                <a:rPr lang="en-US" i="1">
+                                <a:rPr lang="en-US" b="0" i="1" smtClean="0">
                                   <a:latin typeface="Cambria Math" panose="02040503050406030204" pitchFamily="18" charset="0"/>
                                 </a:rPr>
                               </m:ctrlPr>
@@ -7756,7 +7738,7 @@
                               <m:sSub>
                                 <m:sSubPr>
                                   <m:ctrlPr>
-                                    <a:rPr lang="en-US" b="0" i="1" smtClean="0">
+                                    <a:rPr lang="en-US" i="1">
                                       <a:latin typeface="Cambria Math" panose="02040503050406030204" pitchFamily="18" charset="0"/>
                                     </a:rPr>
                                   </m:ctrlPr>
@@ -7815,43 +7797,7 @@
                         <a:rPr lang="en-US" b="0" i="0" smtClean="0">
                           <a:latin typeface="Cambria Math" panose="02040503050406030204" pitchFamily="18" charset="0"/>
                         </a:rPr>
-                        <m:t> </m:t>
-                      </m:r>
-                      <m:r>
-                        <m:rPr>
-                          <m:nor/>
-                        </m:rPr>
-                        <a:rPr lang="en-US" b="0" i="0" smtClean="0">
-                          <a:latin typeface="Cambria Math" panose="02040503050406030204" pitchFamily="18" charset="0"/>
-                        </a:rPr>
-                        <m:t>for</m:t>
-                      </m:r>
-                      <m:r>
-                        <m:rPr>
-                          <m:nor/>
-                        </m:rPr>
-                        <a:rPr lang="en-US" b="0" i="0" smtClean="0">
-                          <a:latin typeface="Cambria Math" panose="02040503050406030204" pitchFamily="18" charset="0"/>
-                        </a:rPr>
-                        <m:t> </m:t>
-                      </m:r>
-                      <m:r>
-                        <m:rPr>
-                          <m:nor/>
-                        </m:rPr>
-                        <a:rPr lang="en-US" b="0" i="0" smtClean="0">
-                          <a:latin typeface="Cambria Math" panose="02040503050406030204" pitchFamily="18" charset="0"/>
-                        </a:rPr>
-                        <m:t>any</m:t>
-                      </m:r>
-                      <m:r>
-                        <m:rPr>
-                          <m:nor/>
-                        </m:rPr>
-                        <a:rPr lang="en-US" b="0" i="0" smtClean="0">
-                          <a:latin typeface="Cambria Math" panose="02040503050406030204" pitchFamily="18" charset="0"/>
-                        </a:rPr>
-                        <m:t>   </m:t>
+                        <m:t> for any   </m:t>
                       </m:r>
                       <m:r>
                         <a:rPr lang="en-US" b="0" i="1" smtClean="0">
@@ -8376,10 +8322,7 @@
                 <a:pPr/>
                 <a14:m>
                   <m:oMathPara xmlns:m="http://schemas.openxmlformats.org/officeDocument/2006/math">
-                    <m:oMathParaPr>
-                      <m:jc m:val="centerGroup"/>
-                    </m:oMathParaPr>
-                    <m:oMath xmlns:m="http://schemas.openxmlformats.org/officeDocument/2006/math">
+                    <m:oMath>
                       <m:sSub>
                         <m:sSubPr>
                           <m:ctrlPr>
@@ -8736,10 +8679,7 @@
                     <a:pPr/>
                     <a14:m>
                       <m:oMathPara xmlns:m="http://schemas.openxmlformats.org/officeDocument/2006/math">
-                        <m:oMathParaPr>
-                          <m:jc m:val="centerGroup"/>
-                        </m:oMathParaPr>
-                        <m:oMath xmlns:m="http://schemas.openxmlformats.org/officeDocument/2006/math">
+                        <m:oMath>
                           <m:sSub>
                             <m:sSubPr>
                               <m:ctrlPr>
@@ -9563,10 +9503,7 @@
                     <a:pPr/>
                     <a14:m>
                       <m:oMathPara xmlns:m="http://schemas.openxmlformats.org/officeDocument/2006/math">
-                        <m:oMathParaPr>
-                          <m:jc m:val="centerGroup"/>
-                        </m:oMathParaPr>
-                        <m:oMath xmlns:m="http://schemas.openxmlformats.org/officeDocument/2006/math">
+                        <m:oMath>
                           <m:sSub>
                             <m:sSubPr>
                               <m:ctrlPr>
@@ -9778,10 +9715,7 @@
                     <a:pPr/>
                     <a14:m>
                       <m:oMathPara xmlns:m="http://schemas.openxmlformats.org/officeDocument/2006/math">
-                        <m:oMathParaPr>
-                          <m:jc m:val="centerGroup"/>
-                        </m:oMathParaPr>
-                        <m:oMath xmlns:m="http://schemas.openxmlformats.org/officeDocument/2006/math">
+                        <m:oMath>
                           <m:sSub>
                             <m:sSubPr>
                               <m:ctrlPr>
@@ -10585,10 +10519,7 @@
                 </a:br>
                 <a14:m>
                   <m:oMathPara xmlns:m="http://schemas.openxmlformats.org/officeDocument/2006/math">
-                    <m:oMathParaPr>
-                      <m:jc m:val="centerGroup"/>
-                    </m:oMathParaPr>
-                    <m:oMath xmlns:m="http://schemas.openxmlformats.org/officeDocument/2006/math">
+                    <m:oMath>
                       <m:sSub>
                         <m:sSubPr>
                           <m:ctrlPr>
@@ -10792,10 +10723,7 @@
                 </a:br>
                 <a14:m>
                   <m:oMathPara xmlns:m="http://schemas.openxmlformats.org/officeDocument/2006/math">
-                    <m:oMathParaPr>
-                      <m:jc m:val="centerGroup"/>
-                    </m:oMathParaPr>
-                    <m:oMath xmlns:m="http://schemas.openxmlformats.org/officeDocument/2006/math">
+                    <m:oMath>
                       <m:r>
                         <a:rPr lang="en-US" sz="1400" b="0" i="0" smtClean="0">
                           <a:latin typeface="Cambria Math" panose="02040503050406030204" pitchFamily="18" charset="0"/>
@@ -10805,7 +10733,7 @@
                       <m:sSub>
                         <m:sSubPr>
                           <m:ctrlPr>
-                            <a:rPr lang="en-US" sz="1400" b="0" i="1" smtClean="0">
+                            <a:rPr lang="en-US" sz="1400" i="1" smtClean="0">
                               <a:latin typeface="Cambria Math" panose="02040503050406030204" pitchFamily="18" charset="0"/>
                             </a:rPr>
                           </m:ctrlPr>
@@ -10816,7 +10744,7 @@
                               <m:begChr m:val="‖"/>
                               <m:endChr m:val="‖"/>
                               <m:ctrlPr>
-                                <a:rPr lang="en-US" sz="1400" i="1" smtClean="0">
+                                <a:rPr lang="en-US" sz="1400" b="0" i="1" smtClean="0">
                                   <a:latin typeface="Cambria Math" panose="02040503050406030204" pitchFamily="18" charset="0"/>
                                 </a:rPr>
                               </m:ctrlPr>
@@ -10943,14 +10871,11 @@
                 <a:pPr algn="ctr"/>
                 <a14:m>
                   <m:oMathPara xmlns:m="http://schemas.openxmlformats.org/officeDocument/2006/math">
-                    <m:oMathParaPr>
-                      <m:jc m:val="centerGroup"/>
-                    </m:oMathParaPr>
-                    <m:oMath xmlns:m="http://schemas.openxmlformats.org/officeDocument/2006/math">
+                    <m:oMath>
                       <m:sSub>
                         <m:sSubPr>
                           <m:ctrlPr>
-                            <a:rPr lang="en-US" sz="1400" b="0" i="1" smtClean="0">
+                            <a:rPr lang="en-US" sz="1400" i="1" smtClean="0">
                               <a:latin typeface="Cambria Math" panose="02040503050406030204" pitchFamily="18" charset="0"/>
                             </a:rPr>
                           </m:ctrlPr>
@@ -10961,7 +10886,7 @@
                               <m:begChr m:val="‖"/>
                               <m:endChr m:val="‖"/>
                               <m:ctrlPr>
-                                <a:rPr lang="en-US" sz="1400" i="1" smtClean="0">
+                                <a:rPr lang="en-US" sz="1400" b="0" i="1" smtClean="0">
                                   <a:latin typeface="Cambria Math" panose="02040503050406030204" pitchFamily="18" charset="0"/>
                                 </a:rPr>
                               </m:ctrlPr>
@@ -11852,10 +11777,7 @@
                 </a:pPr>
                 <a14:m>
                   <m:oMathPara xmlns:m="http://schemas.openxmlformats.org/officeDocument/2006/math">
-                    <m:oMathParaPr>
-                      <m:jc m:val="centerGroup"/>
-                    </m:oMathParaPr>
-                    <m:oMath xmlns:m="http://schemas.openxmlformats.org/officeDocument/2006/math">
+                    <m:oMath>
                       <m:sSup>
                         <m:sSupPr>
                           <m:ctrlPr>
@@ -11911,7 +11833,7 @@
                           <m:limLow>
                             <m:limLowPr>
                               <m:ctrlPr>
-                                <a:rPr lang="en-US" b="0" i="1" smtClean="0">
+                                <a:rPr lang="en-US" b="0" i="0" smtClean="0">
                                   <a:latin typeface="Cambria Math" panose="02040503050406030204" pitchFamily="18" charset="0"/>
                                 </a:rPr>
                               </m:ctrlPr>
@@ -12163,10 +12085,7 @@
                 <a:pPr/>
                 <a14:m>
                   <m:oMathPara xmlns:m="http://schemas.openxmlformats.org/officeDocument/2006/math">
-                    <m:oMathParaPr>
-                      <m:jc m:val="centerGroup"/>
-                    </m:oMathParaPr>
-                    <m:oMath xmlns:m="http://schemas.openxmlformats.org/officeDocument/2006/math">
+                    <m:oMath>
                       <m:sSub>
                         <m:sSubPr>
                           <m:ctrlPr>
@@ -12340,7 +12259,7 @@
                       <m:sSub>
                         <m:sSubPr>
                           <m:ctrlPr>
-                            <a:rPr lang="en-US" sz="2000" i="1">
+                            <a:rPr lang="en-US" sz="2000" b="0" i="1" smtClean="0">
                               <a:latin typeface="Cambria Math" panose="02040503050406030204" pitchFamily="18" charset="0"/>
                             </a:rPr>
                           </m:ctrlPr>
@@ -12872,10 +12791,7 @@
                 </a:pPr>
                 <a14:m>
                   <m:oMathPara xmlns:m="http://schemas.openxmlformats.org/officeDocument/2006/math">
-                    <m:oMathParaPr>
-                      <m:jc m:val="centerGroup"/>
-                    </m:oMathParaPr>
-                    <m:oMath xmlns:m="http://schemas.openxmlformats.org/officeDocument/2006/math">
+                    <m:oMath>
                       <m:sSub>
                         <m:sSubPr>
                           <m:ctrlPr>
@@ -12904,6 +12820,7 @@
                       <m:groupChr>
                         <m:groupChrPr>
                           <m:chr m:val="→"/>
+                          <m:pos m:val="bot"/>
                           <m:vertJc m:val="bot"/>
                           <m:ctrlPr>
                             <a:rPr lang="en-US" b="0" i="1" smtClean="0">
@@ -12970,6 +12887,7 @@
                       <m:groupChr>
                         <m:groupChrPr>
                           <m:chr m:val="→"/>
+                          <m:pos m:val="bot"/>
                           <m:vertJc m:val="bot"/>
                           <m:ctrlPr>
                             <a:rPr lang="en-US" i="1">
@@ -13017,6 +12935,7 @@
                       <m:groupChr>
                         <m:groupChrPr>
                           <m:chr m:val="→"/>
+                          <m:pos m:val="bot"/>
                           <m:vertJc m:val="bot"/>
                           <m:ctrlPr>
                             <a:rPr lang="en-US" i="1">
@@ -13083,6 +13002,7 @@
                       <m:groupChr>
                         <m:groupChrPr>
                           <m:chr m:val="→"/>
+                          <m:pos m:val="bot"/>
                           <m:vertJc m:val="bot"/>
                           <m:ctrlPr>
                             <a:rPr lang="en-US" i="1">
@@ -13130,6 +13050,7 @@
                       <m:groupChr>
                         <m:groupChrPr>
                           <m:chr m:val="→"/>
+                          <m:pos m:val="bot"/>
                           <m:vertJc m:val="bot"/>
                           <m:ctrlPr>
                             <a:rPr lang="en-US" i="1">
@@ -13196,6 +13117,7 @@
                       <m:groupChr>
                         <m:groupChrPr>
                           <m:chr m:val="→"/>
+                          <m:pos m:val="bot"/>
                           <m:vertJc m:val="bot"/>
                           <m:ctrlPr>
                             <a:rPr lang="en-US" i="1">
@@ -13243,6 +13165,7 @@
                       <m:groupChr>
                         <m:groupChrPr>
                           <m:chr m:val="→"/>
+                          <m:pos m:val="bot"/>
                           <m:vertJc m:val="bot"/>
                           <m:ctrlPr>
                             <a:rPr lang="en-US" i="1">
@@ -13309,6 +13232,7 @@
                       <m:groupChr>
                         <m:groupChrPr>
                           <m:chr m:val="→"/>
+                          <m:pos m:val="bot"/>
                           <m:vertJc m:val="bot"/>
                           <m:ctrlPr>
                             <a:rPr lang="en-US" i="1">
@@ -13362,6 +13286,7 @@
                       <m:groupChr>
                         <m:groupChrPr>
                           <m:chr m:val="→"/>
+                          <m:pos m:val="bot"/>
                           <m:vertJc m:val="bot"/>
                           <m:ctrlPr>
                             <a:rPr lang="en-US" i="1">
@@ -13508,6 +13433,7 @@
                     <m:groupChr>
                       <m:groupChrPr>
                         <m:chr m:val="→"/>
+                        <m:pos m:val="bot"/>
                         <m:vertJc m:val="bot"/>
                         <m:ctrlPr>
                           <a:rPr lang="en-US" sz="1600" b="0" i="1" smtClean="0">
@@ -13555,9 +13481,10 @@
                     <m:groupChr>
                       <m:groupChrPr>
                         <m:chr m:val="→"/>
+                        <m:pos m:val="bot"/>
                         <m:vertJc m:val="bot"/>
                         <m:ctrlPr>
-                          <a:rPr lang="en-US" sz="1600" i="1">
+                          <a:rPr lang="en-US" sz="1600" b="0" i="1" smtClean="0">
                             <a:latin typeface="Cambria Math" panose="02040503050406030204" pitchFamily="18" charset="0"/>
                           </a:rPr>
                         </m:ctrlPr>
@@ -13827,10 +13754,7 @@
                   <a:pPr/>
                   <a14:m>
                     <m:oMathPara xmlns:m="http://schemas.openxmlformats.org/officeDocument/2006/math">
-                      <m:oMathParaPr>
-                        <m:jc m:val="centerGroup"/>
-                      </m:oMathParaPr>
-                      <m:oMath xmlns:m="http://schemas.openxmlformats.org/officeDocument/2006/math">
+                      <m:oMath>
                         <m:sSub>
                           <m:sSubPr>
                             <m:ctrlPr>
@@ -14042,10 +13966,7 @@
                   <a:pPr/>
                   <a14:m>
                     <m:oMathPara xmlns:m="http://schemas.openxmlformats.org/officeDocument/2006/math">
-                      <m:oMathParaPr>
-                        <m:jc m:val="centerGroup"/>
-                      </m:oMathParaPr>
-                      <m:oMath xmlns:m="http://schemas.openxmlformats.org/officeDocument/2006/math">
+                      <m:oMath>
                         <m:sSub>
                           <m:sSubPr>
                             <m:ctrlPr>
@@ -14434,10 +14355,7 @@
                   <a:pPr/>
                   <a14:m>
                     <m:oMathPara xmlns:m="http://schemas.openxmlformats.org/officeDocument/2006/math">
-                      <m:oMathParaPr>
-                        <m:jc m:val="centerGroup"/>
-                      </m:oMathParaPr>
-                      <m:oMath xmlns:m="http://schemas.openxmlformats.org/officeDocument/2006/math">
+                      <m:oMath>
                         <m:sSub>
                           <m:sSubPr>
                             <m:ctrlPr>
@@ -14649,10 +14567,7 @@
                   <a:pPr/>
                   <a14:m>
                     <m:oMathPara xmlns:m="http://schemas.openxmlformats.org/officeDocument/2006/math">
-                      <m:oMathParaPr>
-                        <m:jc m:val="centerGroup"/>
-                      </m:oMathParaPr>
-                      <m:oMath xmlns:m="http://schemas.openxmlformats.org/officeDocument/2006/math">
+                      <m:oMath>
                         <m:sSub>
                           <m:sSubPr>
                             <m:ctrlPr>
@@ -16078,10 +15993,7 @@
                 </a:pPr>
                 <a14:m>
                   <m:oMathPara xmlns:m="http://schemas.openxmlformats.org/officeDocument/2006/math">
-                    <m:oMathParaPr>
-                      <m:jc m:val="centerGroup"/>
-                    </m:oMathParaPr>
-                    <m:oMath xmlns:m="http://schemas.openxmlformats.org/officeDocument/2006/math">
+                    <m:oMath>
                       <m:sSub>
                         <m:sSubPr>
                           <m:ctrlPr>
@@ -16151,7 +16063,7 @@
                           <m:limLow>
                             <m:limLowPr>
                               <m:ctrlPr>
-                                <a:rPr lang="en-US" sz="2400" i="1" smtClean="0">
+                                <a:rPr lang="en-US" sz="2400" i="0" smtClean="0">
                                   <a:latin typeface="Cambria Math" panose="02040503050406030204" pitchFamily="18" charset="0"/>
                                 </a:rPr>
                               </m:ctrlPr>
@@ -16434,7 +16346,7 @@
                         </m:e>
                       </m:func>
                     </m:oMath>
-                    <m:oMath xmlns:m="http://schemas.openxmlformats.org/officeDocument/2006/math">
+                    <m:oMath>
                       <m:r>
                         <m:rPr>
                           <m:aln/>
@@ -16447,7 +16359,7 @@
                       <m:limLow>
                         <m:limLowPr>
                           <m:ctrlPr>
-                            <a:rPr lang="en-US" sz="2400" i="1">
+                            <a:rPr lang="en-US" sz="2400">
                               <a:latin typeface="Cambria Math" panose="02040503050406030204" pitchFamily="18" charset="0"/>
                             </a:rPr>
                           </m:ctrlPr>
@@ -16725,10 +16637,7 @@
                 </a:pPr>
                 <a14:m>
                   <m:oMathPara xmlns:m="http://schemas.openxmlformats.org/officeDocument/2006/math">
-                    <m:oMathParaPr>
-                      <m:jc m:val="centerGroup"/>
-                    </m:oMathParaPr>
-                    <m:oMath xmlns:m="http://schemas.openxmlformats.org/officeDocument/2006/math">
+                    <m:oMath>
                       <m:d>
                         <m:dPr>
                           <m:ctrlPr>
@@ -16797,7 +16706,7 @@
                       <m:limLow>
                         <m:limLowPr>
                           <m:ctrlPr>
-                            <a:rPr lang="en-US" sz="2400" i="1">
+                            <a:rPr lang="en-US" sz="2400">
                               <a:latin typeface="Cambria Math" panose="02040503050406030204" pitchFamily="18" charset="0"/>
                             </a:rPr>
                           </m:ctrlPr>
@@ -17427,10 +17336,7 @@
                     <a:pPr/>
                     <a14:m>
                       <m:oMathPara xmlns:m="http://schemas.openxmlformats.org/officeDocument/2006/math">
-                        <m:oMathParaPr>
-                          <m:jc m:val="centerGroup"/>
-                        </m:oMathParaPr>
-                        <m:oMath xmlns:m="http://schemas.openxmlformats.org/officeDocument/2006/math">
+                        <m:oMath>
                           <m:sSub>
                             <m:sSubPr>
                               <m:ctrlPr>
@@ -18254,10 +18160,7 @@
                     <a:pPr/>
                     <a14:m>
                       <m:oMathPara xmlns:m="http://schemas.openxmlformats.org/officeDocument/2006/math">
-                        <m:oMathParaPr>
-                          <m:jc m:val="centerGroup"/>
-                        </m:oMathParaPr>
-                        <m:oMath xmlns:m="http://schemas.openxmlformats.org/officeDocument/2006/math">
+                        <m:oMath>
                           <m:sSub>
                             <m:sSubPr>
                               <m:ctrlPr>
@@ -18469,10 +18372,7 @@
                     <a:pPr/>
                     <a14:m>
                       <m:oMathPara xmlns:m="http://schemas.openxmlformats.org/officeDocument/2006/math">
-                        <m:oMathParaPr>
-                          <m:jc m:val="centerGroup"/>
-                        </m:oMathParaPr>
-                        <m:oMath xmlns:m="http://schemas.openxmlformats.org/officeDocument/2006/math">
+                        <m:oMath>
                           <m:sSub>
                             <m:sSubPr>
                               <m:ctrlPr>
@@ -19251,7 +19151,7 @@
                     <m:limLow>
                       <m:limLowPr>
                         <m:ctrlPr>
-                          <a:rPr lang="en-US" sz="1600" b="0" i="1" smtClean="0">
+                          <a:rPr lang="en-US" sz="1600" smtClean="0">
                             <a:latin typeface="Cambria Math" panose="02040503050406030204" pitchFamily="18" charset="0"/>
                           </a:rPr>
                         </m:ctrlPr>
@@ -21328,9 +21228,8 @@
                     <m:sSup>
                       <m:sSupPr>
                         <m:ctrlPr>
-                          <a:rPr lang="en-US" i="1" dirty="0">
+                          <a:rPr lang="en-US" i="1">
                             <a:latin typeface="Cambria Math" panose="02040503050406030204" pitchFamily="18" charset="0"/>
-                            <a:ea typeface="Cambria Math" panose="02040503050406030204" pitchFamily="18" charset="0"/>
                           </a:rPr>
                         </m:ctrlPr>
                       </m:sSupPr>
@@ -21464,7 +21363,7 @@
                     <m:sSup>
                       <m:sSupPr>
                         <m:ctrlPr>
-                          <a:rPr lang="en-US" i="1" dirty="0">
+                          <a:rPr lang="en-US" i="1">
                             <a:latin typeface="Cambria Math" panose="02040503050406030204" pitchFamily="18" charset="0"/>
                             <a:ea typeface="Cambria Math" panose="02040503050406030204" pitchFamily="18" charset="0"/>
                           </a:rPr>
@@ -21546,7 +21445,7 @@
                     <m:sSup>
                       <m:sSupPr>
                         <m:ctrlPr>
-                          <a:rPr lang="en-US" b="0" i="1" dirty="0" smtClean="0">
+                          <a:rPr lang="en-US" i="1">
                             <a:latin typeface="Cambria Math" panose="02040503050406030204" pitchFamily="18" charset="0"/>
                             <a:ea typeface="Cambria Math" panose="02040503050406030204" pitchFamily="18" charset="0"/>
                           </a:rPr>
@@ -21633,7 +21532,7 @@
                         <m:begChr m:val="|"/>
                         <m:endChr m:val="|"/>
                         <m:ctrlPr>
-                          <a:rPr lang="en-US" b="0" i="1" smtClean="0">
+                          <a:rPr lang="en-US" i="1" smtClean="0">
                             <a:latin typeface="Cambria Math" panose="02040503050406030204" pitchFamily="18" charset="0"/>
                             <a:ea typeface="Cambria Math" panose="02040503050406030204" pitchFamily="18" charset="0"/>
                           </a:rPr>
@@ -21927,8 +21826,8 @@
           </a:extLst>
         </p:spPr>
       </p:pic>
-      <mc:AlternateContent xmlns:mc="http://schemas.openxmlformats.org/markup-compatibility/2006">
-        <mc:Choice xmlns:a14="http://schemas.microsoft.com/office/drawing/2010/main" Requires="a14">
+      <mc:AlternateContent xmlns:mc="http://schemas.openxmlformats.org/markup-compatibility/2006" xmlns:a14="http://schemas.microsoft.com/office/drawing/2010/main">
+        <mc:Choice Requires="a14">
           <p:sp>
             <p:nvSpPr>
               <p:cNvPr id="3" name="Content Placeholder 2">
@@ -22160,7 +22059,7 @@
             </p:txBody>
           </p:sp>
         </mc:Choice>
-        <mc:Fallback>
+        <mc:Fallback xmlns="">
           <p:sp>
             <p:nvSpPr>
               <p:cNvPr id="3" name="Content Placeholder 2">
@@ -22338,7 +22237,7 @@
                     <m:sSub>
                       <m:sSubPr>
                         <m:ctrlPr>
-                          <a:rPr lang="en-US" sz="1200" i="1" dirty="0" smtClean="0">
+                          <a:rPr lang="en-US" sz="1200" i="1" dirty="0">
                             <a:latin typeface="Cambria Math" panose="02040503050406030204" pitchFamily="18" charset="0"/>
                           </a:rPr>
                         </m:ctrlPr>
@@ -22438,7 +22337,7 @@
                             </a:solidFill>
                             <a:latin typeface="Cambria Math" panose="02040503050406030204" pitchFamily="18" charset="0"/>
                           </a:rPr>
-                          <m:t>h</m:t>
+                          <m:t>ℎ</m:t>
                         </m:r>
                       </m:sub>
                     </m:sSub>
@@ -22482,7 +22381,7 @@
                         </a:solidFill>
                         <a:latin typeface="Cambria Math" panose="02040503050406030204" pitchFamily="18" charset="0"/>
                       </a:rPr>
-                      <m:t>h</m:t>
+                      <m:t>ℎ</m:t>
                     </m:r>
                   </m:oMath>
                 </a14:m>
@@ -23793,7 +23692,7 @@
                     <m:sSub>
                       <m:sSubPr>
                         <m:ctrlPr>
-                          <a:rPr lang="en-US" sz="1200" i="1" dirty="0">
+                          <a:rPr lang="en-US" sz="1200" dirty="0">
                             <a:latin typeface="Cambria Math" panose="02040503050406030204" pitchFamily="18" charset="0"/>
                           </a:rPr>
                         </m:ctrlPr>
@@ -24282,7 +24181,7 @@
                     <m:sSup>
                       <m:sSupPr>
                         <m:ctrlPr>
-                          <a:rPr lang="en-US" sz="1200" b="0" i="1" dirty="0" smtClean="0">
+                          <a:rPr lang="en-US" sz="1200" i="1" dirty="0">
                             <a:latin typeface="Cambria Math" panose="02040503050406030204" pitchFamily="18" charset="0"/>
                             <a:ea typeface="Cambria Math" panose="02040503050406030204" pitchFamily="18" charset="0"/>
                           </a:rPr>
@@ -24447,7 +24346,7 @@
                     <m:sSub>
                       <m:sSubPr>
                         <m:ctrlPr>
-                          <a:rPr lang="en-US" sz="1200" b="0" i="1" dirty="0" smtClean="0">
+                          <a:rPr lang="en-US" sz="1200" i="1" dirty="0" smtClean="0">
                             <a:latin typeface="Cambria Math" panose="02040503050406030204" pitchFamily="18" charset="0"/>
                           </a:rPr>
                         </m:ctrlPr>
@@ -24499,7 +24398,7 @@
                     <m:sSub>
                       <m:sSubPr>
                         <m:ctrlPr>
-                          <a:rPr lang="en-US" sz="1200" b="0" i="1" dirty="0" smtClean="0">
+                          <a:rPr lang="en-US" sz="1200" i="1" dirty="0" smtClean="0">
                             <a:latin typeface="Cambria Math" panose="02040503050406030204" pitchFamily="18" charset="0"/>
                           </a:rPr>
                         </m:ctrlPr>
@@ -24551,7 +24450,7 @@
                     <m:sSub>
                       <m:sSubPr>
                         <m:ctrlPr>
-                          <a:rPr lang="en-US" sz="1200" b="0" i="1" dirty="0" smtClean="0">
+                          <a:rPr lang="en-US" sz="1200" i="1" dirty="0" smtClean="0">
                             <a:latin typeface="Cambria Math" panose="02040503050406030204" pitchFamily="18" charset="0"/>
                           </a:rPr>
                         </m:ctrlPr>
@@ -25463,7 +25362,7 @@
                     <m:sSub>
                       <m:sSubPr>
                         <m:ctrlPr>
-                          <a:rPr lang="en-US" sz="1500" i="1" smtClean="0">
+                          <a:rPr lang="en-US" sz="1500" b="0" i="1" smtClean="0">
                             <a:latin typeface="Cambria Math" panose="02040503050406030204" pitchFamily="18" charset="0"/>
                           </a:rPr>
                         </m:ctrlPr>
@@ -25503,7 +25402,7 @@
                         <m:limLow>
                           <m:limLowPr>
                             <m:ctrlPr>
-                              <a:rPr lang="en-US" sz="1600" i="1">
+                              <a:rPr lang="en-US" sz="1600">
                                 <a:latin typeface="Cambria Math" panose="02040503050406030204" pitchFamily="18" charset="0"/>
                               </a:rPr>
                             </m:ctrlPr>
@@ -25612,10 +25511,7 @@
                 </a:pPr>
                 <a14:m>
                   <m:oMathPara xmlns:m="http://schemas.openxmlformats.org/officeDocument/2006/math">
-                    <m:oMathParaPr>
-                      <m:jc m:val="centerGroup"/>
-                    </m:oMathParaPr>
-                    <m:oMath xmlns:m="http://schemas.openxmlformats.org/officeDocument/2006/math">
+                    <m:oMath>
                       <m:sSub>
                         <m:sSubPr>
                           <m:ctrlPr>
@@ -25681,7 +25577,7 @@
                           <m:limLow>
                             <m:limLowPr>
                               <m:ctrlPr>
-                                <a:rPr lang="en-US" sz="1500" i="1">
+                                <a:rPr lang="en-US" sz="1500">
                                   <a:latin typeface="Cambria Math" panose="02040503050406030204" pitchFamily="18" charset="0"/>
                                 </a:rPr>
                               </m:ctrlPr>
@@ -25986,14 +25882,11 @@
                 </a:pPr>
                 <a14:m>
                   <m:oMathPara xmlns:m="http://schemas.openxmlformats.org/officeDocument/2006/math">
-                    <m:oMathParaPr>
-                      <m:jc m:val="centerGroup"/>
-                    </m:oMathParaPr>
-                    <m:oMath xmlns:m="http://schemas.openxmlformats.org/officeDocument/2006/math">
+                    <m:oMath>
                       <m:sSub>
                         <m:sSubPr>
                           <m:ctrlPr>
-                            <a:rPr lang="en-US" sz="1500" i="1" smtClean="0">
+                            <a:rPr lang="en-US" sz="1500" b="0" i="1" smtClean="0">
                               <a:latin typeface="Cambria Math" panose="02040503050406030204" pitchFamily="18" charset="0"/>
                             </a:rPr>
                           </m:ctrlPr>
@@ -26067,7 +25960,7 @@
                           <m:limLow>
                             <m:limLowPr>
                               <m:ctrlPr>
-                                <a:rPr lang="en-US" sz="1500" i="1">
+                                <a:rPr lang="en-US" sz="1500">
                                   <a:latin typeface="Cambria Math" panose="02040503050406030204" pitchFamily="18" charset="0"/>
                                 </a:rPr>
                               </m:ctrlPr>
@@ -26190,7 +26083,7 @@
                               <m:limLow>
                                 <m:limLowPr>
                                   <m:ctrlPr>
-                                    <a:rPr lang="en-US" sz="1500" i="1" smtClean="0">
+                                    <a:rPr lang="en-US" sz="1500" i="0" smtClean="0">
                                       <a:latin typeface="Cambria Math" panose="02040503050406030204" pitchFamily="18" charset="0"/>
                                       <a:ea typeface="Cambria Math" panose="02040503050406030204" pitchFamily="18" charset="0"/>
                                     </a:rPr>
@@ -26574,10 +26467,7 @@
                 </a:pPr>
                 <a14:m>
                   <m:oMathPara xmlns:m="http://schemas.openxmlformats.org/officeDocument/2006/math">
-                    <m:oMathParaPr>
-                      <m:jc m:val="centerGroup"/>
-                    </m:oMathParaPr>
-                    <m:oMath xmlns:m="http://schemas.openxmlformats.org/officeDocument/2006/math">
+                    <m:oMath>
                       <m:r>
                         <a:rPr lang="en-US" sz="1500" i="1">
                           <a:latin typeface="Cambria Math" panose="02040503050406030204" pitchFamily="18" charset="0"/>
@@ -26606,6 +26496,7 @@
                         <m:groupChrPr>
                           <m:chr m:val="⇔"/>
                           <m:pos m:val="top"/>
+                          <m:vertJc m:val="top"/>
                           <m:ctrlPr>
                             <a:rPr lang="en-US" sz="1500" i="1">
                               <a:latin typeface="Cambria Math" panose="02040503050406030204" pitchFamily="18" charset="0"/>
@@ -26634,7 +26525,7 @@
                           <m:sSup>
                             <m:sSupPr>
                               <m:ctrlPr>
-                                <a:rPr lang="en-US" sz="1500" b="0" i="1" smtClean="0">
+                                <a:rPr lang="en-US" sz="1500" i="1">
                                   <a:latin typeface="Cambria Math" panose="02040503050406030204" pitchFamily="18" charset="0"/>
                                 </a:rPr>
                               </m:ctrlPr>
@@ -26727,7 +26618,7 @@
                         <m:rPr>
                           <m:nor/>
                         </m:rPr>
-                        <a:rPr lang="en-US" sz="1500">
+                        <a:rPr lang="en-US" sz="1500" i="0">
                           <a:latin typeface="Cambria Math" panose="02040503050406030204" pitchFamily="18" charset="0"/>
                         </a:rPr>
                         <m:t> </m:t>
@@ -26745,37 +26636,10 @@
                         <m:rPr>
                           <m:nor/>
                         </m:rPr>
-                        <a:rPr lang="en-US" sz="1500">
+                        <a:rPr lang="en-US" sz="1500" i="0">
                           <a:latin typeface="Cambria Math" panose="02040503050406030204" pitchFamily="18" charset="0"/>
                         </a:rPr>
-                        <m:t> </m:t>
-                      </m:r>
-                      <m:r>
-                        <m:rPr>
-                          <m:nor/>
-                        </m:rPr>
-                        <a:rPr lang="en-US" sz="1500">
-                          <a:latin typeface="Cambria Math" panose="02040503050406030204" pitchFamily="18" charset="0"/>
-                        </a:rPr>
-                        <m:t>for</m:t>
-                      </m:r>
-                      <m:r>
-                        <m:rPr>
-                          <m:nor/>
-                        </m:rPr>
-                        <a:rPr lang="en-US" sz="1500">
-                          <a:latin typeface="Cambria Math" panose="02040503050406030204" pitchFamily="18" charset="0"/>
-                        </a:rPr>
-                        <m:t>  </m:t>
-                      </m:r>
-                      <m:r>
-                        <m:rPr>
-                          <m:nor/>
-                        </m:rPr>
-                        <a:rPr lang="en-US" sz="1500">
-                          <a:latin typeface="Cambria Math" panose="02040503050406030204" pitchFamily="18" charset="0"/>
-                        </a:rPr>
-                        <m:t>all</m:t>
+                        <m:t> for  all</m:t>
                       </m:r>
                       <m:r>
                         <a:rPr lang="en-US" sz="1500" i="1">
@@ -27029,10 +26893,7 @@
                   <a:pPr algn="ctr"/>
                   <a14:m>
                     <m:oMathPara xmlns:m="http://schemas.openxmlformats.org/officeDocument/2006/math">
-                      <m:oMathParaPr>
-                        <m:jc m:val="centerGroup"/>
-                      </m:oMathParaPr>
-                      <m:oMath xmlns:m="http://schemas.openxmlformats.org/officeDocument/2006/math">
+                      <m:oMath>
                         <m:r>
                           <a:rPr lang="en-US" sz="1400" b="0" i="1" dirty="0" smtClean="0">
                             <a:latin typeface="Cambria Math" panose="02040503050406030204" pitchFamily="18" charset="0"/>
@@ -27888,8 +27749,8 @@
           </a:p>
         </p:txBody>
       </p:sp>
-      <mc:AlternateContent xmlns:mc="http://schemas.openxmlformats.org/markup-compatibility/2006" xmlns:a14="http://schemas.microsoft.com/office/drawing/2010/main">
-        <mc:Choice Requires="a14">
+      <mc:AlternateContent xmlns:mc="http://schemas.openxmlformats.org/markup-compatibility/2006">
+        <mc:Choice xmlns:a14="http://schemas.microsoft.com/office/drawing/2010/main" Requires="a14">
           <p:sp>
             <p:nvSpPr>
               <p:cNvPr id="3" name="Content Placeholder 2">
@@ -28025,7 +27886,21 @@
                 </a14:m>
                 <a:r>
                   <a:rPr lang="en-US" dirty="0"/>
-                  <a:t> has </a:t>
+                  <a:t> and deterministic </a:t>
+                </a:r>
+                <a14:m>
+                  <m:oMath xmlns:m="http://schemas.openxmlformats.org/officeDocument/2006/math">
+                    <m:r>
+                      <a:rPr lang="en-US" b="0" i="1" smtClean="0">
+                        <a:latin typeface="Cambria Math" panose="02040503050406030204" pitchFamily="18" charset="0"/>
+                      </a:rPr>
+                      <m:t>𝜋</m:t>
+                    </m:r>
+                  </m:oMath>
+                </a14:m>
+                <a:r>
+                  <a:rPr lang="en-US" dirty="0"/>
+                  <a:t> have </a:t>
                 </a:r>
                 <a14:m>
                   <m:oMath xmlns:m="http://schemas.openxmlformats.org/officeDocument/2006/math">
@@ -28152,7 +28027,7 @@
             </p:txBody>
           </p:sp>
         </mc:Choice>
-        <mc:Fallback xmlns="">
+        <mc:Fallback>
           <p:sp>
             <p:nvSpPr>
               <p:cNvPr id="3" name="Content Placeholder 2">
@@ -28210,7 +28085,7 @@
         </p:nvSpPr>
         <p:spPr>
           <a:xfrm>
-            <a:off x="8838343" y="551826"/>
+            <a:off x="8911619" y="781545"/>
             <a:ext cx="2151600" cy="369332"/>
           </a:xfrm>
           <a:prstGeom prst="rect">
@@ -28340,8 +28215,8 @@
         </p:nvSpPr>
         <p:spPr>
           <a:xfrm>
-            <a:off x="9086691" y="2565864"/>
-            <a:ext cx="1640261" cy="369332"/>
+            <a:off x="9004460" y="2440195"/>
+            <a:ext cx="1965919" cy="338554"/>
           </a:xfrm>
           <a:prstGeom prst="rect">
             <a:avLst/>
@@ -28450,14 +28325,14 @@
           <a:p>
             <a:pPr algn="ctr"/>
             <a:r>
-              <a:rPr lang="en-US" dirty="0"/>
-              <a:t>Q-Table</a:t>
+              <a:rPr lang="en-US" sz="1600" dirty="0"/>
+              <a:t>Q-Value Function</a:t>
             </a:r>
           </a:p>
         </p:txBody>
       </p:sp>
-      <mc:AlternateContent xmlns:mc="http://schemas.openxmlformats.org/markup-compatibility/2006" xmlns:a14="http://schemas.microsoft.com/office/drawing/2010/main">
-        <mc:Choice Requires="a14">
+      <mc:AlternateContent xmlns:mc="http://schemas.openxmlformats.org/markup-compatibility/2006">
+        <mc:Choice xmlns:a14="http://schemas.microsoft.com/office/drawing/2010/main" Requires="a14">
           <p:graphicFrame>
             <p:nvGraphicFramePr>
               <p:cNvPr id="9" name="Table 8">
@@ -28473,14 +28348,409 @@
               <p:nvPr>
                 <p:extLst>
                   <p:ext uri="{D42A27DB-BD31-4B8C-83A1-F6EECF244321}">
-                    <p14:modId xmlns:p14="http://schemas.microsoft.com/office/powerpoint/2010/main" val="3521024740"/>
+                    <p14:modId xmlns:p14="http://schemas.microsoft.com/office/powerpoint/2010/main" val="2985909591"/>
                   </p:ext>
                 </p:extLst>
               </p:nvPr>
             </p:nvGraphicFramePr>
             <p:xfrm>
-              <a:off x="8691416" y="2935196"/>
-              <a:ext cx="2662384" cy="1828800"/>
+              <a:off x="8656227" y="2799490"/>
+              <a:ext cx="2662384" cy="1645920"/>
+            </p:xfrm>
+            <a:graphic>
+              <a:graphicData uri="http://schemas.openxmlformats.org/drawingml/2006/table">
+                <a:tbl>
+                  <a:tblPr firstRow="1" bandRow="1">
+                    <a:tableStyleId>{93296810-A885-4BE3-A3E7-6D5BEEA58F35}</a:tableStyleId>
+                  </a:tblPr>
+                  <a:tblGrid>
+                    <a:gridCol w="816336">
+                      <a:extLst>
+                        <a:ext uri="{9D8B030D-6E8A-4147-A177-3AD203B41FA5}">
+                          <a16:colId xmlns:a16="http://schemas.microsoft.com/office/drawing/2014/main" val="3711460689"/>
+                        </a:ext>
+                      </a:extLst>
+                    </a:gridCol>
+                    <a:gridCol w="685800">
+                      <a:extLst>
+                        <a:ext uri="{9D8B030D-6E8A-4147-A177-3AD203B41FA5}">
+                          <a16:colId xmlns:a16="http://schemas.microsoft.com/office/drawing/2014/main" val="2988890879"/>
+                        </a:ext>
+                      </a:extLst>
+                    </a:gridCol>
+                    <a:gridCol w="1160248">
+                      <a:extLst>
+                        <a:ext uri="{9D8B030D-6E8A-4147-A177-3AD203B41FA5}">
+                          <a16:colId xmlns:a16="http://schemas.microsoft.com/office/drawing/2014/main" val="2080107700"/>
+                        </a:ext>
+                      </a:extLst>
+                    </a:gridCol>
+                  </a:tblGrid>
+                  <a:tr h="182880">
+                    <a:tc>
+                      <a:txBody>
+                        <a:bodyPr/>
+                        <a:lstStyle/>
+                        <a:p>
+                          <a:pPr/>
+                          <a14:m>
+                            <m:oMathPara xmlns:m="http://schemas.openxmlformats.org/officeDocument/2006/math">
+                              <m:oMath>
+                                <m:r>
+                                  <a:rPr lang="en-US" sz="1200" dirty="0" smtClean="0">
+                                    <a:latin typeface="Cambria Math" panose="02040503050406030204" pitchFamily="18" charset="0"/>
+                                  </a:rPr>
+                                  <m:t>𝑠</m:t>
+                                </m:r>
+                              </m:oMath>
+                            </m:oMathPara>
+                          </a14:m>
+                          <a:endParaRPr lang="en-US" sz="1200" dirty="0"/>
+                        </a:p>
+                      </a:txBody>
+                      <a:tcPr/>
+                    </a:tc>
+                    <a:tc>
+                      <a:txBody>
+                        <a:bodyPr/>
+                        <a:lstStyle/>
+                        <a:p>
+                          <a:pPr/>
+                          <a14:m>
+                            <m:oMathPara xmlns:m="http://schemas.openxmlformats.org/officeDocument/2006/math">
+                              <m:oMath>
+                                <m:r>
+                                  <a:rPr lang="en-US" sz="1200" dirty="0" smtClean="0">
+                                    <a:latin typeface="Cambria Math" panose="02040503050406030204" pitchFamily="18" charset="0"/>
+                                  </a:rPr>
+                                  <m:t>𝑎</m:t>
+                                </m:r>
+                              </m:oMath>
+                            </m:oMathPara>
+                          </a14:m>
+                          <a:endParaRPr lang="en-US" sz="1200" dirty="0"/>
+                        </a:p>
+                      </a:txBody>
+                      <a:tcPr/>
+                    </a:tc>
+                    <a:tc>
+                      <a:txBody>
+                        <a:bodyPr/>
+                        <a:lstStyle/>
+                        <a:p>
+                          <a:pPr/>
+                          <a14:m>
+                            <m:oMathPara xmlns:m="http://schemas.openxmlformats.org/officeDocument/2006/math">
+                              <m:oMath>
+                                <m:r>
+                                  <a:rPr lang="en-US" sz="1200" b="0" i="1" dirty="0" smtClean="0">
+                                    <a:latin typeface="Cambria Math" panose="02040503050406030204" pitchFamily="18" charset="0"/>
+                                  </a:rPr>
+                                  <m:t>𝑞</m:t>
+                                </m:r>
+                                <m:r>
+                                  <a:rPr lang="en-US" sz="1200" dirty="0" smtClean="0">
+                                    <a:latin typeface="Cambria Math" panose="02040503050406030204" pitchFamily="18" charset="0"/>
+                                  </a:rPr>
+                                  <m:t>(</m:t>
+                                </m:r>
+                                <m:r>
+                                  <a:rPr lang="en-US" sz="1200" dirty="0" err="1" smtClean="0">
+                                    <a:latin typeface="Cambria Math" panose="02040503050406030204" pitchFamily="18" charset="0"/>
+                                  </a:rPr>
+                                  <m:t>𝑠</m:t>
+                                </m:r>
+                                <m:r>
+                                  <a:rPr lang="en-US" sz="1200" dirty="0" err="1" smtClean="0">
+                                    <a:latin typeface="Cambria Math" panose="02040503050406030204" pitchFamily="18" charset="0"/>
+                                  </a:rPr>
+                                  <m:t>,</m:t>
+                                </m:r>
+                                <m:r>
+                                  <a:rPr lang="en-US" sz="1200" dirty="0" err="1" smtClean="0">
+                                    <a:latin typeface="Cambria Math" panose="02040503050406030204" pitchFamily="18" charset="0"/>
+                                  </a:rPr>
+                                  <m:t>𝑎</m:t>
+                                </m:r>
+                                <m:r>
+                                  <a:rPr lang="en-US" sz="1200" dirty="0" smtClean="0">
+                                    <a:latin typeface="Cambria Math" panose="02040503050406030204" pitchFamily="18" charset="0"/>
+                                  </a:rPr>
+                                  <m:t>)</m:t>
+                                </m:r>
+                              </m:oMath>
+                            </m:oMathPara>
+                          </a14:m>
+                          <a:endParaRPr lang="en-US" sz="1200" dirty="0"/>
+                        </a:p>
+                      </a:txBody>
+                      <a:tcPr/>
+                    </a:tc>
+                    <a:extLst>
+                      <a:ext uri="{0D108BD9-81ED-4DB2-BD59-A6C34878D82A}">
+                        <a16:rowId xmlns:a16="http://schemas.microsoft.com/office/drawing/2014/main" val="2008869826"/>
+                      </a:ext>
+                    </a:extLst>
+                  </a:tr>
+                  <a:tr h="182880">
+                    <a:tc>
+                      <a:txBody>
+                        <a:bodyPr/>
+                        <a:lstStyle/>
+                        <a:p>
+                          <a:r>
+                            <a:rPr lang="en-US" sz="1200" dirty="0"/>
+                            <a:t>(1,1)</a:t>
+                          </a:r>
+                        </a:p>
+                      </a:txBody>
+                      <a:tcPr/>
+                    </a:tc>
+                    <a:tc>
+                      <a:txBody>
+                        <a:bodyPr/>
+                        <a:lstStyle/>
+                        <a:p>
+                          <a:r>
+                            <a:rPr lang="en-US" sz="1200" dirty="0"/>
+                            <a:t>up</a:t>
+                          </a:r>
+                        </a:p>
+                      </a:txBody>
+                      <a:tcPr/>
+                    </a:tc>
+                    <a:tc>
+                      <a:txBody>
+                        <a:bodyPr/>
+                        <a:lstStyle/>
+                        <a:p>
+                          <a:r>
+                            <a:rPr lang="en-US" sz="1200" dirty="0"/>
+                            <a:t>0.7453</a:t>
+                          </a:r>
+                        </a:p>
+                      </a:txBody>
+                      <a:tcPr/>
+                    </a:tc>
+                    <a:extLst>
+                      <a:ext uri="{0D108BD9-81ED-4DB2-BD59-A6C34878D82A}">
+                        <a16:rowId xmlns:a16="http://schemas.microsoft.com/office/drawing/2014/main" val="524805492"/>
+                      </a:ext>
+                    </a:extLst>
+                  </a:tr>
+                  <a:tr h="182880">
+                    <a:tc>
+                      <a:txBody>
+                        <a:bodyPr/>
+                        <a:lstStyle/>
+                        <a:p>
+                          <a:r>
+                            <a:rPr lang="en-US" sz="1200" dirty="0"/>
+                            <a:t>(1,1)</a:t>
+                          </a:r>
+                        </a:p>
+                      </a:txBody>
+                      <a:tcPr/>
+                    </a:tc>
+                    <a:tc>
+                      <a:txBody>
+                        <a:bodyPr/>
+                        <a:lstStyle/>
+                        <a:p>
+                          <a:r>
+                            <a:rPr lang="en-US" sz="1200" dirty="0"/>
+                            <a:t>right</a:t>
+                          </a:r>
+                        </a:p>
+                      </a:txBody>
+                      <a:tcPr/>
+                    </a:tc>
+                    <a:tc>
+                      <a:txBody>
+                        <a:bodyPr/>
+                        <a:lstStyle/>
+                        <a:p>
+                          <a:r>
+                            <a:rPr lang="en-US" sz="1200" dirty="0"/>
+                            <a:t>0.6709</a:t>
+                          </a:r>
+                        </a:p>
+                      </a:txBody>
+                      <a:tcPr/>
+                    </a:tc>
+                    <a:extLst>
+                      <a:ext uri="{0D108BD9-81ED-4DB2-BD59-A6C34878D82A}">
+                        <a16:rowId xmlns:a16="http://schemas.microsoft.com/office/drawing/2014/main" val="3725035416"/>
+                      </a:ext>
+                    </a:extLst>
+                  </a:tr>
+                  <a:tr h="182880">
+                    <a:tc>
+                      <a:txBody>
+                        <a:bodyPr/>
+                        <a:lstStyle/>
+                        <a:p>
+                          <a:r>
+                            <a:rPr lang="en-US" sz="1200" dirty="0"/>
+                            <a:t>(1,1)</a:t>
+                          </a:r>
+                        </a:p>
+                      </a:txBody>
+                      <a:tcPr/>
+                    </a:tc>
+                    <a:tc>
+                      <a:txBody>
+                        <a:bodyPr/>
+                        <a:lstStyle/>
+                        <a:p>
+                          <a:r>
+                            <a:rPr lang="en-US" sz="1200" dirty="0"/>
+                            <a:t>down</a:t>
+                          </a:r>
+                        </a:p>
+                      </a:txBody>
+                      <a:tcPr/>
+                    </a:tc>
+                    <a:tc>
+                      <a:txBody>
+                        <a:bodyPr/>
+                        <a:lstStyle/>
+                        <a:p>
+                          <a:r>
+                            <a:rPr lang="en-US" sz="1200" dirty="0"/>
+                            <a:t>0.7003</a:t>
+                          </a:r>
+                        </a:p>
+                      </a:txBody>
+                      <a:tcPr/>
+                    </a:tc>
+                    <a:extLst>
+                      <a:ext uri="{0D108BD9-81ED-4DB2-BD59-A6C34878D82A}">
+                        <a16:rowId xmlns:a16="http://schemas.microsoft.com/office/drawing/2014/main" val="868402448"/>
+                      </a:ext>
+                    </a:extLst>
+                  </a:tr>
+                  <a:tr h="182880">
+                    <a:tc>
+                      <a:txBody>
+                        <a:bodyPr/>
+                        <a:lstStyle/>
+                        <a:p>
+                          <a:r>
+                            <a:rPr lang="en-US" sz="1200" dirty="0"/>
+                            <a:t>(1,1)</a:t>
+                          </a:r>
+                        </a:p>
+                      </a:txBody>
+                      <a:tcPr/>
+                    </a:tc>
+                    <a:tc>
+                      <a:txBody>
+                        <a:bodyPr/>
+                        <a:lstStyle/>
+                        <a:p>
+                          <a:r>
+                            <a:rPr lang="en-US" sz="1200" dirty="0"/>
+                            <a:t>left</a:t>
+                          </a:r>
+                        </a:p>
+                      </a:txBody>
+                      <a:tcPr/>
+                    </a:tc>
+                    <a:tc>
+                      <a:txBody>
+                        <a:bodyPr/>
+                        <a:lstStyle/>
+                        <a:p>
+                          <a:r>
+                            <a:rPr lang="en-US" sz="1200" dirty="0"/>
+                            <a:t>0.7109</a:t>
+                          </a:r>
+                        </a:p>
+                      </a:txBody>
+                      <a:tcPr/>
+                    </a:tc>
+                    <a:extLst>
+                      <a:ext uri="{0D108BD9-81ED-4DB2-BD59-A6C34878D82A}">
+                        <a16:rowId xmlns:a16="http://schemas.microsoft.com/office/drawing/2014/main" val="460961713"/>
+                      </a:ext>
+                    </a:extLst>
+                  </a:tr>
+                  <a:tr h="182880">
+                    <a:tc>
+                      <a:txBody>
+                        <a:bodyPr/>
+                        <a:lstStyle/>
+                        <a:p>
+                          <a:r>
+                            <a:rPr lang="en-US" sz="1200" dirty="0"/>
+                            <a:t>…</a:t>
+                          </a:r>
+                        </a:p>
+                      </a:txBody>
+                      <a:tcPr/>
+                    </a:tc>
+                    <a:tc>
+                      <a:txBody>
+                        <a:bodyPr/>
+                        <a:lstStyle/>
+                        <a:p>
+                          <a:r>
+                            <a:rPr lang="en-US" sz="1200" dirty="0"/>
+                            <a:t>…</a:t>
+                          </a:r>
+                        </a:p>
+                      </a:txBody>
+                      <a:tcPr/>
+                    </a:tc>
+                    <a:tc>
+                      <a:txBody>
+                        <a:bodyPr/>
+                        <a:lstStyle/>
+                        <a:p>
+                          <a:r>
+                            <a:rPr lang="en-US" sz="1200" dirty="0"/>
+                            <a:t>…</a:t>
+                          </a:r>
+                        </a:p>
+                      </a:txBody>
+                      <a:tcPr/>
+                    </a:tc>
+                    <a:extLst>
+                      <a:ext uri="{0D108BD9-81ED-4DB2-BD59-A6C34878D82A}">
+                        <a16:rowId xmlns:a16="http://schemas.microsoft.com/office/drawing/2014/main" val="3207722718"/>
+                      </a:ext>
+                    </a:extLst>
+                  </a:tr>
+                </a:tbl>
+              </a:graphicData>
+            </a:graphic>
+          </p:graphicFrame>
+        </mc:Choice>
+        <mc:Fallback>
+          <p:graphicFrame>
+            <p:nvGraphicFramePr>
+              <p:cNvPr id="9" name="Table 8">
+                <a:extLst>
+                  <a:ext uri="{FF2B5EF4-FFF2-40B4-BE49-F238E27FC236}">
+                    <a16:creationId xmlns:a16="http://schemas.microsoft.com/office/drawing/2014/main" id="{78248F0E-2FF3-2020-DE60-ADD421262953}"/>
+                  </a:ext>
+                </a:extLst>
+              </p:cNvPr>
+              <p:cNvGraphicFramePr>
+                <a:graphicFrameLocks noGrp="1"/>
+              </p:cNvGraphicFramePr>
+              <p:nvPr>
+                <p:extLst>
+                  <p:ext uri="{D42A27DB-BD31-4B8C-83A1-F6EECF244321}">
+                    <p14:modId xmlns:p14="http://schemas.microsoft.com/office/powerpoint/2010/main" val="2985909591"/>
+                  </p:ext>
+                </p:extLst>
+              </p:nvPr>
+            </p:nvGraphicFramePr>
+            <p:xfrm>
+              <a:off x="8656227" y="2799490"/>
+              <a:ext cx="2662384" cy="1645920"/>
             </p:xfrm>
             <a:graphic>
               <a:graphicData uri="http://schemas.openxmlformats.org/drawingml/2006/table">
@@ -28517,108 +28787,51 @@
                         <a:bodyPr/>
                         <a:lstStyle/>
                         <a:p>
-                          <a:pPr/>
-                          <a14:m>
-                            <m:oMathPara xmlns:m="http://schemas.openxmlformats.org/officeDocument/2006/math">
-                              <m:oMathParaPr>
-                                <m:jc m:val="centerGroup"/>
-                              </m:oMathParaPr>
-                              <m:oMath xmlns:m="http://schemas.openxmlformats.org/officeDocument/2006/math">
-                                <m:r>
-                                  <a:rPr lang="en-US" sz="1400" dirty="0" smtClean="0">
-                                    <a:latin typeface="Cambria Math" panose="02040503050406030204" pitchFamily="18" charset="0"/>
-                                  </a:rPr>
-                                  <m:t>𝑠</m:t>
-                                </m:r>
-                              </m:oMath>
-                            </m:oMathPara>
-                          </a14:m>
-                          <a:endParaRPr lang="en-US" sz="1400" dirty="0"/>
+                          <a:endParaRPr lang="en-US"/>
                         </a:p>
                       </a:txBody>
-                      <a:tcPr/>
+                      <a:tcPr>
+                        <a:blipFill>
+                          <a:blip r:embed="rId3"/>
+                          <a:stretch>
+                            <a:fillRect l="-746" t="-2222" r="-229851" b="-517778"/>
+                          </a:stretch>
+                        </a:blipFill>
+                      </a:tcPr>
                     </a:tc>
                     <a:tc>
                       <a:txBody>
                         <a:bodyPr/>
                         <a:lstStyle/>
                         <a:p>
-                          <a:pPr/>
-                          <a14:m>
-                            <m:oMathPara xmlns:m="http://schemas.openxmlformats.org/officeDocument/2006/math">
-                              <m:oMathParaPr>
-                                <m:jc m:val="centerGroup"/>
-                              </m:oMathParaPr>
-                              <m:oMath xmlns:m="http://schemas.openxmlformats.org/officeDocument/2006/math">
-                                <m:r>
-                                  <a:rPr lang="en-US" sz="1400" dirty="0" smtClean="0">
-                                    <a:latin typeface="Cambria Math" panose="02040503050406030204" pitchFamily="18" charset="0"/>
-                                  </a:rPr>
-                                  <m:t>𝑎</m:t>
-                                </m:r>
-                              </m:oMath>
-                            </m:oMathPara>
-                          </a14:m>
-                          <a:endParaRPr lang="en-US" sz="1400" dirty="0"/>
+                          <a:endParaRPr lang="en-US"/>
                         </a:p>
                       </a:txBody>
-                      <a:tcPr/>
+                      <a:tcPr>
+                        <a:blipFill>
+                          <a:blip r:embed="rId3"/>
+                          <a:stretch>
+                            <a:fillRect l="-119469" t="-2222" r="-172566" b="-517778"/>
+                          </a:stretch>
+                        </a:blipFill>
+                      </a:tcPr>
                     </a:tc>
                     <a:tc>
                       <a:txBody>
                         <a:bodyPr/>
                         <a:lstStyle/>
                         <a:p>
-                          <a:pPr/>
-                          <a14:m>
-                            <m:oMathPara xmlns:m="http://schemas.openxmlformats.org/officeDocument/2006/math">
-                              <m:oMathParaPr>
-                                <m:jc m:val="centerGroup"/>
-                              </m:oMathParaPr>
-                              <m:oMath xmlns:m="http://schemas.openxmlformats.org/officeDocument/2006/math">
-                                <m:r>
-                                  <a:rPr lang="en-US" sz="1400" b="0" i="1" dirty="0" smtClean="0">
-                                    <a:latin typeface="Cambria Math" panose="02040503050406030204" pitchFamily="18" charset="0"/>
-                                  </a:rPr>
-                                  <m:t>𝑞</m:t>
-                                </m:r>
-                                <m:r>
-                                  <a:rPr lang="en-US" sz="1400" dirty="0" smtClean="0">
-                                    <a:latin typeface="Cambria Math" panose="02040503050406030204" pitchFamily="18" charset="0"/>
-                                  </a:rPr>
-                                  <m:t>(</m:t>
-                                </m:r>
-                                <m:r>
-                                  <a:rPr lang="en-US" sz="1400" dirty="0" err="1" smtClean="0">
-                                    <a:latin typeface="Cambria Math" panose="02040503050406030204" pitchFamily="18" charset="0"/>
-                                  </a:rPr>
-                                  <m:t>𝑠</m:t>
-                                </m:r>
-                                <m:r>
-                                  <a:rPr lang="en-US" sz="1400" dirty="0" err="1" smtClean="0">
-                                    <a:latin typeface="Cambria Math" panose="02040503050406030204" pitchFamily="18" charset="0"/>
-                                  </a:rPr>
-                                  <m:t>,</m:t>
-                                </m:r>
-                                <m:r>
-                                  <a:rPr lang="en-US" sz="1400" dirty="0" err="1" smtClean="0">
-                                    <a:latin typeface="Cambria Math" panose="02040503050406030204" pitchFamily="18" charset="0"/>
-                                  </a:rPr>
-                                  <m:t>𝑎</m:t>
-                                </m:r>
-                                <m:r>
-                                  <a:rPr lang="en-US" sz="1400" dirty="0" smtClean="0">
-                                    <a:latin typeface="Cambria Math" panose="02040503050406030204" pitchFamily="18" charset="0"/>
-                                  </a:rPr>
-                                  <m:t>)</m:t>
-                                </m:r>
-                              </m:oMath>
-                            </m:oMathPara>
-                          </a14:m>
-                          <a:endParaRPr lang="en-US" sz="1400" dirty="0"/>
+                          <a:endParaRPr lang="en-US"/>
                         </a:p>
                       </a:txBody>
-                      <a:tcPr/>
+                      <a:tcPr>
+                        <a:blipFill>
+                          <a:blip r:embed="rId3"/>
+                          <a:stretch>
+                            <a:fillRect l="-129843" t="-2222" r="-2094" b="-517778"/>
+                          </a:stretch>
+                        </a:blipFill>
+                      </a:tcPr>
                     </a:tc>
                     <a:extLst>
                       <a:ext uri="{0D108BD9-81ED-4DB2-BD59-A6C34878D82A}">
@@ -28633,7 +28846,7 @@
                         <a:lstStyle/>
                         <a:p>
                           <a:r>
-                            <a:rPr lang="en-US" sz="1400" dirty="0"/>
+                            <a:rPr lang="en-US" sz="1200" dirty="0"/>
                             <a:t>(1,1)</a:t>
                           </a:r>
                         </a:p>
@@ -28646,7 +28859,7 @@
                         <a:lstStyle/>
                         <a:p>
                           <a:r>
-                            <a:rPr lang="en-US" sz="1400" dirty="0"/>
+                            <a:rPr lang="en-US" sz="1200" dirty="0"/>
                             <a:t>up</a:t>
                           </a:r>
                         </a:p>
@@ -28659,7 +28872,7 @@
                         <a:lstStyle/>
                         <a:p>
                           <a:r>
-                            <a:rPr lang="en-US" sz="1400" dirty="0"/>
+                            <a:rPr lang="en-US" sz="1200" dirty="0"/>
                             <a:t>0.7453</a:t>
                           </a:r>
                         </a:p>
@@ -28679,7 +28892,7 @@
                         <a:lstStyle/>
                         <a:p>
                           <a:r>
-                            <a:rPr lang="en-US" sz="1400" dirty="0"/>
+                            <a:rPr lang="en-US" sz="1200" dirty="0"/>
                             <a:t>(1,1)</a:t>
                           </a:r>
                         </a:p>
@@ -28692,7 +28905,7 @@
                         <a:lstStyle/>
                         <a:p>
                           <a:r>
-                            <a:rPr lang="en-US" sz="1400" dirty="0"/>
+                            <a:rPr lang="en-US" sz="1200" dirty="0"/>
                             <a:t>right</a:t>
                           </a:r>
                         </a:p>
@@ -28705,7 +28918,7 @@
                         <a:lstStyle/>
                         <a:p>
                           <a:r>
-                            <a:rPr lang="en-US" sz="1400" dirty="0"/>
+                            <a:rPr lang="en-US" sz="1200" dirty="0"/>
                             <a:t>0.6709</a:t>
                           </a:r>
                         </a:p>
@@ -28725,7 +28938,7 @@
                         <a:lstStyle/>
                         <a:p>
                           <a:r>
-                            <a:rPr lang="en-US" sz="1400" dirty="0"/>
+                            <a:rPr lang="en-US" sz="1200" dirty="0"/>
                             <a:t>(1,1)</a:t>
                           </a:r>
                         </a:p>
@@ -28738,7 +28951,7 @@
                         <a:lstStyle/>
                         <a:p>
                           <a:r>
-                            <a:rPr lang="en-US" sz="1400" dirty="0"/>
+                            <a:rPr lang="en-US" sz="1200" dirty="0"/>
                             <a:t>down</a:t>
                           </a:r>
                         </a:p>
@@ -28751,7 +28964,7 @@
                         <a:lstStyle/>
                         <a:p>
                           <a:r>
-                            <a:rPr lang="en-US" sz="1400" dirty="0"/>
+                            <a:rPr lang="en-US" sz="1200" dirty="0"/>
                             <a:t>0.7003</a:t>
                           </a:r>
                         </a:p>
@@ -28771,7 +28984,7 @@
                         <a:lstStyle/>
                         <a:p>
                           <a:r>
-                            <a:rPr lang="en-US" sz="1400" dirty="0"/>
+                            <a:rPr lang="en-US" sz="1200" dirty="0"/>
                             <a:t>(1,1)</a:t>
                           </a:r>
                         </a:p>
@@ -28784,7 +28997,7 @@
                         <a:lstStyle/>
                         <a:p>
                           <a:r>
-                            <a:rPr lang="en-US" sz="1400" dirty="0"/>
+                            <a:rPr lang="en-US" sz="1200" dirty="0"/>
                             <a:t>left</a:t>
                           </a:r>
                         </a:p>
@@ -28797,7 +29010,7 @@
                         <a:lstStyle/>
                         <a:p>
                           <a:r>
-                            <a:rPr lang="en-US" sz="1400" dirty="0"/>
+                            <a:rPr lang="en-US" sz="1200" dirty="0"/>
                             <a:t>0.7109</a:t>
                           </a:r>
                         </a:p>
@@ -28817,7 +29030,7 @@
                         <a:lstStyle/>
                         <a:p>
                           <a:r>
-                            <a:rPr lang="en-US" sz="1400" dirty="0"/>
+                            <a:rPr lang="en-US" sz="1200" dirty="0"/>
                             <a:t>…</a:t>
                           </a:r>
                         </a:p>
@@ -28830,7 +29043,7 @@
                         <a:lstStyle/>
                         <a:p>
                           <a:r>
-                            <a:rPr lang="en-US" sz="1400" dirty="0"/>
+                            <a:rPr lang="en-US" sz="1200" dirty="0"/>
                             <a:t>…</a:t>
                           </a:r>
                         </a:p>
@@ -28843,354 +29056,7 @@
                         <a:lstStyle/>
                         <a:p>
                           <a:r>
-                            <a:rPr lang="en-US" sz="1400" dirty="0"/>
-                            <a:t>…</a:t>
-                          </a:r>
-                        </a:p>
-                      </a:txBody>
-                      <a:tcPr/>
-                    </a:tc>
-                    <a:extLst>
-                      <a:ext uri="{0D108BD9-81ED-4DB2-BD59-A6C34878D82A}">
-                        <a16:rowId xmlns:a16="http://schemas.microsoft.com/office/drawing/2014/main" val="3207722718"/>
-                      </a:ext>
-                    </a:extLst>
-                  </a:tr>
-                </a:tbl>
-              </a:graphicData>
-            </a:graphic>
-          </p:graphicFrame>
-        </mc:Choice>
-        <mc:Fallback xmlns="">
-          <p:graphicFrame>
-            <p:nvGraphicFramePr>
-              <p:cNvPr id="9" name="Table 8">
-                <a:extLst>
-                  <a:ext uri="{FF2B5EF4-FFF2-40B4-BE49-F238E27FC236}">
-                    <a16:creationId xmlns:a16="http://schemas.microsoft.com/office/drawing/2014/main" id="{78248F0E-2FF3-2020-DE60-ADD421262953}"/>
-                  </a:ext>
-                </a:extLst>
-              </p:cNvPr>
-              <p:cNvGraphicFramePr>
-                <a:graphicFrameLocks noGrp="1"/>
-              </p:cNvGraphicFramePr>
-              <p:nvPr>
-                <p:extLst>
-                  <p:ext uri="{D42A27DB-BD31-4B8C-83A1-F6EECF244321}">
-                    <p14:modId xmlns:p14="http://schemas.microsoft.com/office/powerpoint/2010/main" val="3521024740"/>
-                  </p:ext>
-                </p:extLst>
-              </p:nvPr>
-            </p:nvGraphicFramePr>
-            <p:xfrm>
-              <a:off x="8691416" y="2935196"/>
-              <a:ext cx="2662384" cy="1828800"/>
-            </p:xfrm>
-            <a:graphic>
-              <a:graphicData uri="http://schemas.openxmlformats.org/drawingml/2006/table">
-                <a:tbl>
-                  <a:tblPr firstRow="1" bandRow="1">
-                    <a:tableStyleId>{93296810-A885-4BE3-A3E7-6D5BEEA58F35}</a:tableStyleId>
-                  </a:tblPr>
-                  <a:tblGrid>
-                    <a:gridCol w="816336">
-                      <a:extLst>
-                        <a:ext uri="{9D8B030D-6E8A-4147-A177-3AD203B41FA5}">
-                          <a16:colId xmlns:a16="http://schemas.microsoft.com/office/drawing/2014/main" val="3711460689"/>
-                        </a:ext>
-                      </a:extLst>
-                    </a:gridCol>
-                    <a:gridCol w="685800">
-                      <a:extLst>
-                        <a:ext uri="{9D8B030D-6E8A-4147-A177-3AD203B41FA5}">
-                          <a16:colId xmlns:a16="http://schemas.microsoft.com/office/drawing/2014/main" val="2988890879"/>
-                        </a:ext>
-                      </a:extLst>
-                    </a:gridCol>
-                    <a:gridCol w="1160248">
-                      <a:extLst>
-                        <a:ext uri="{9D8B030D-6E8A-4147-A177-3AD203B41FA5}">
-                          <a16:colId xmlns:a16="http://schemas.microsoft.com/office/drawing/2014/main" val="2080107700"/>
-                        </a:ext>
-                      </a:extLst>
-                    </a:gridCol>
-                  </a:tblGrid>
-                  <a:tr h="304800">
-                    <a:tc>
-                      <a:txBody>
-                        <a:bodyPr/>
-                        <a:lstStyle/>
-                        <a:p>
-                          <a:endParaRPr lang="en-US"/>
-                        </a:p>
-                      </a:txBody>
-                      <a:tcPr>
-                        <a:blipFill>
-                          <a:blip r:embed="rId3"/>
-                          <a:stretch>
-                            <a:fillRect l="-746" t="-2000" r="-229851" b="-522000"/>
-                          </a:stretch>
-                        </a:blipFill>
-                      </a:tcPr>
-                    </a:tc>
-                    <a:tc>
-                      <a:txBody>
-                        <a:bodyPr/>
-                        <a:lstStyle/>
-                        <a:p>
-                          <a:endParaRPr lang="en-US"/>
-                        </a:p>
-                      </a:txBody>
-                      <a:tcPr>
-                        <a:blipFill>
-                          <a:blip r:embed="rId3"/>
-                          <a:stretch>
-                            <a:fillRect l="-119469" t="-2000" r="-172566" b="-522000"/>
-                          </a:stretch>
-                        </a:blipFill>
-                      </a:tcPr>
-                    </a:tc>
-                    <a:tc>
-                      <a:txBody>
-                        <a:bodyPr/>
-                        <a:lstStyle/>
-                        <a:p>
-                          <a:endParaRPr lang="en-US"/>
-                        </a:p>
-                      </a:txBody>
-                      <a:tcPr>
-                        <a:blipFill>
-                          <a:blip r:embed="rId3"/>
-                          <a:stretch>
-                            <a:fillRect l="-129843" t="-2000" r="-2094" b="-522000"/>
-                          </a:stretch>
-                        </a:blipFill>
-                      </a:tcPr>
-                    </a:tc>
-                    <a:extLst>
-                      <a:ext uri="{0D108BD9-81ED-4DB2-BD59-A6C34878D82A}">
-                        <a16:rowId xmlns:a16="http://schemas.microsoft.com/office/drawing/2014/main" val="2008869826"/>
-                      </a:ext>
-                    </a:extLst>
-                  </a:tr>
-                  <a:tr h="304800">
-                    <a:tc>
-                      <a:txBody>
-                        <a:bodyPr/>
-                        <a:lstStyle/>
-                        <a:p>
-                          <a:r>
-                            <a:rPr lang="en-US" sz="1400" dirty="0"/>
-                            <a:t>(1,1)</a:t>
-                          </a:r>
-                        </a:p>
-                      </a:txBody>
-                      <a:tcPr/>
-                    </a:tc>
-                    <a:tc>
-                      <a:txBody>
-                        <a:bodyPr/>
-                        <a:lstStyle/>
-                        <a:p>
-                          <a:r>
-                            <a:rPr lang="en-US" sz="1400" dirty="0"/>
-                            <a:t>up</a:t>
-                          </a:r>
-                        </a:p>
-                      </a:txBody>
-                      <a:tcPr/>
-                    </a:tc>
-                    <a:tc>
-                      <a:txBody>
-                        <a:bodyPr/>
-                        <a:lstStyle/>
-                        <a:p>
-                          <a:r>
-                            <a:rPr lang="en-US" sz="1400" dirty="0"/>
-                            <a:t>0.7453</a:t>
-                          </a:r>
-                        </a:p>
-                      </a:txBody>
-                      <a:tcPr/>
-                    </a:tc>
-                    <a:extLst>
-                      <a:ext uri="{0D108BD9-81ED-4DB2-BD59-A6C34878D82A}">
-                        <a16:rowId xmlns:a16="http://schemas.microsoft.com/office/drawing/2014/main" val="524805492"/>
-                      </a:ext>
-                    </a:extLst>
-                  </a:tr>
-                  <a:tr h="304800">
-                    <a:tc>
-                      <a:txBody>
-                        <a:bodyPr/>
-                        <a:lstStyle/>
-                        <a:p>
-                          <a:r>
-                            <a:rPr lang="en-US" sz="1400" dirty="0"/>
-                            <a:t>(1,1)</a:t>
-                          </a:r>
-                        </a:p>
-                      </a:txBody>
-                      <a:tcPr/>
-                    </a:tc>
-                    <a:tc>
-                      <a:txBody>
-                        <a:bodyPr/>
-                        <a:lstStyle/>
-                        <a:p>
-                          <a:r>
-                            <a:rPr lang="en-US" sz="1400" dirty="0"/>
-                            <a:t>right</a:t>
-                          </a:r>
-                        </a:p>
-                      </a:txBody>
-                      <a:tcPr/>
-                    </a:tc>
-                    <a:tc>
-                      <a:txBody>
-                        <a:bodyPr/>
-                        <a:lstStyle/>
-                        <a:p>
-                          <a:r>
-                            <a:rPr lang="en-US" sz="1400" dirty="0"/>
-                            <a:t>0.6709</a:t>
-                          </a:r>
-                        </a:p>
-                      </a:txBody>
-                      <a:tcPr/>
-                    </a:tc>
-                    <a:extLst>
-                      <a:ext uri="{0D108BD9-81ED-4DB2-BD59-A6C34878D82A}">
-                        <a16:rowId xmlns:a16="http://schemas.microsoft.com/office/drawing/2014/main" val="3725035416"/>
-                      </a:ext>
-                    </a:extLst>
-                  </a:tr>
-                  <a:tr h="304800">
-                    <a:tc>
-                      <a:txBody>
-                        <a:bodyPr/>
-                        <a:lstStyle/>
-                        <a:p>
-                          <a:r>
-                            <a:rPr lang="en-US" sz="1400" dirty="0"/>
-                            <a:t>(1,1)</a:t>
-                          </a:r>
-                        </a:p>
-                      </a:txBody>
-                      <a:tcPr/>
-                    </a:tc>
-                    <a:tc>
-                      <a:txBody>
-                        <a:bodyPr/>
-                        <a:lstStyle/>
-                        <a:p>
-                          <a:r>
-                            <a:rPr lang="en-US" sz="1400" dirty="0"/>
-                            <a:t>down</a:t>
-                          </a:r>
-                        </a:p>
-                      </a:txBody>
-                      <a:tcPr/>
-                    </a:tc>
-                    <a:tc>
-                      <a:txBody>
-                        <a:bodyPr/>
-                        <a:lstStyle/>
-                        <a:p>
-                          <a:r>
-                            <a:rPr lang="en-US" sz="1400" dirty="0"/>
-                            <a:t>0.7003</a:t>
-                          </a:r>
-                        </a:p>
-                      </a:txBody>
-                      <a:tcPr/>
-                    </a:tc>
-                    <a:extLst>
-                      <a:ext uri="{0D108BD9-81ED-4DB2-BD59-A6C34878D82A}">
-                        <a16:rowId xmlns:a16="http://schemas.microsoft.com/office/drawing/2014/main" val="868402448"/>
-                      </a:ext>
-                    </a:extLst>
-                  </a:tr>
-                  <a:tr h="304800">
-                    <a:tc>
-                      <a:txBody>
-                        <a:bodyPr/>
-                        <a:lstStyle/>
-                        <a:p>
-                          <a:r>
-                            <a:rPr lang="en-US" sz="1400" dirty="0"/>
-                            <a:t>(1,1)</a:t>
-                          </a:r>
-                        </a:p>
-                      </a:txBody>
-                      <a:tcPr/>
-                    </a:tc>
-                    <a:tc>
-                      <a:txBody>
-                        <a:bodyPr/>
-                        <a:lstStyle/>
-                        <a:p>
-                          <a:r>
-                            <a:rPr lang="en-US" sz="1400" dirty="0"/>
-                            <a:t>left</a:t>
-                          </a:r>
-                        </a:p>
-                      </a:txBody>
-                      <a:tcPr/>
-                    </a:tc>
-                    <a:tc>
-                      <a:txBody>
-                        <a:bodyPr/>
-                        <a:lstStyle/>
-                        <a:p>
-                          <a:r>
-                            <a:rPr lang="en-US" sz="1400" dirty="0"/>
-                            <a:t>0.7109</a:t>
-                          </a:r>
-                        </a:p>
-                      </a:txBody>
-                      <a:tcPr/>
-                    </a:tc>
-                    <a:extLst>
-                      <a:ext uri="{0D108BD9-81ED-4DB2-BD59-A6C34878D82A}">
-                        <a16:rowId xmlns:a16="http://schemas.microsoft.com/office/drawing/2014/main" val="460961713"/>
-                      </a:ext>
-                    </a:extLst>
-                  </a:tr>
-                  <a:tr h="304800">
-                    <a:tc>
-                      <a:txBody>
-                        <a:bodyPr/>
-                        <a:lstStyle/>
-                        <a:p>
-                          <a:r>
-                            <a:rPr lang="en-US" sz="1400" dirty="0"/>
-                            <a:t>…</a:t>
-                          </a:r>
-                        </a:p>
-                      </a:txBody>
-                      <a:tcPr/>
-                    </a:tc>
-                    <a:tc>
-                      <a:txBody>
-                        <a:bodyPr/>
-                        <a:lstStyle/>
-                        <a:p>
-                          <a:r>
-                            <a:rPr lang="en-US" sz="1400" dirty="0"/>
-                            <a:t>…</a:t>
-                          </a:r>
-                        </a:p>
-                      </a:txBody>
-                      <a:tcPr/>
-                    </a:tc>
-                    <a:tc>
-                      <a:txBody>
-                        <a:bodyPr/>
-                        <a:lstStyle/>
-                        <a:p>
-                          <a:r>
-                            <a:rPr lang="en-US" sz="1400" dirty="0"/>
+                            <a:rPr lang="en-US" sz="1200" dirty="0"/>
                             <a:t>…</a:t>
                           </a:r>
                         </a:p>
@@ -29209,8 +29075,8 @@
           </p:graphicFrame>
         </mc:Fallback>
       </mc:AlternateContent>
-      <mc:AlternateContent xmlns:mc="http://schemas.openxmlformats.org/markup-compatibility/2006" xmlns:a14="http://schemas.microsoft.com/office/drawing/2010/main">
-        <mc:Choice Requires="a14">
+      <mc:AlternateContent xmlns:mc="http://schemas.openxmlformats.org/markup-compatibility/2006">
+        <mc:Choice xmlns:a14="http://schemas.microsoft.com/office/drawing/2010/main" Requires="a14">
           <p:graphicFrame>
             <p:nvGraphicFramePr>
               <p:cNvPr id="10" name="Table 9">
@@ -29226,14 +29092,14 @@
               <p:nvPr>
                 <p:extLst>
                   <p:ext uri="{D42A27DB-BD31-4B8C-83A1-F6EECF244321}">
-                    <p14:modId xmlns:p14="http://schemas.microsoft.com/office/powerpoint/2010/main" val="3493349679"/>
+                    <p14:modId xmlns:p14="http://schemas.microsoft.com/office/powerpoint/2010/main" val="2982476008"/>
                   </p:ext>
                 </p:extLst>
               </p:nvPr>
             </p:nvGraphicFramePr>
             <p:xfrm>
-              <a:off x="8946925" y="901635"/>
-              <a:ext cx="2147634" cy="1483360"/>
+              <a:off x="8913602" y="1131354"/>
+              <a:ext cx="2147634" cy="1097280"/>
             </p:xfrm>
             <a:graphic>
               <a:graphicData uri="http://schemas.openxmlformats.org/drawingml/2006/table">
@@ -29257,7 +29123,7 @@
                       </a:extLst>
                     </a:gridCol>
                   </a:tblGrid>
-                  <a:tr h="370840">
+                  <a:tr h="182880">
                     <a:tc>
                       <a:txBody>
                         <a:bodyPr/>
@@ -29266,12 +29132,9 @@
                           <a:pPr/>
                           <a14:m>
                             <m:oMathPara xmlns:m="http://schemas.openxmlformats.org/officeDocument/2006/math">
-                              <m:oMathParaPr>
-                                <m:jc m:val="centerGroup"/>
-                              </m:oMathParaPr>
-                              <m:oMath xmlns:m="http://schemas.openxmlformats.org/officeDocument/2006/math">
+                              <m:oMath>
                                 <m:r>
-                                  <a:rPr lang="en-US" sz="1400" dirty="0" smtClean="0">
+                                  <a:rPr lang="en-US" sz="1200" dirty="0" smtClean="0">
                                     <a:latin typeface="Cambria Math" panose="02040503050406030204" pitchFamily="18" charset="0"/>
                                   </a:rPr>
                                   <m:t>𝑠</m:t>
@@ -29279,7 +29142,7 @@
                               </m:oMath>
                             </m:oMathPara>
                           </a14:m>
-                          <a:endParaRPr lang="en-US" sz="1400" dirty="0"/>
+                          <a:endParaRPr lang="en-US" sz="1200" dirty="0"/>
                         </a:p>
                       </a:txBody>
                       <a:tcPr/>
@@ -29290,38 +29153,38 @@
                         <a:lstStyle/>
                         <a:p>
                           <a:r>
-                            <a:rPr lang="en-US" sz="1400" b="1" dirty="0"/>
+                            <a:rPr lang="en-US" sz="1200" b="1" dirty="0"/>
                             <a:t>State Value </a:t>
                           </a:r>
                           <a14:m>
                             <m:oMath xmlns:m="http://schemas.openxmlformats.org/officeDocument/2006/math">
                               <m:r>
-                                <a:rPr lang="en-US" sz="1400" b="1" i="1" dirty="0" smtClean="0">
+                                <a:rPr lang="en-US" sz="1200" b="1" i="1" dirty="0" smtClean="0">
                                   <a:latin typeface="Cambria Math" panose="02040503050406030204" pitchFamily="18" charset="0"/>
                                 </a:rPr>
                                 <m:t>𝑽</m:t>
                               </m:r>
                               <m:r>
-                                <a:rPr lang="en-US" sz="1400" dirty="0" smtClean="0">
+                                <a:rPr lang="en-US" sz="1200" dirty="0" smtClean="0">
                                   <a:latin typeface="Cambria Math" panose="02040503050406030204" pitchFamily="18" charset="0"/>
                                 </a:rPr>
                                 <m:t>(</m:t>
                               </m:r>
                               <m:r>
-                                <a:rPr lang="en-US" sz="1400" b="1" i="0" dirty="0" smtClean="0">
+                                <a:rPr lang="en-US" sz="1200" b="1" i="0" dirty="0" smtClean="0">
                                   <a:latin typeface="Cambria Math" panose="02040503050406030204" pitchFamily="18" charset="0"/>
                                 </a:rPr>
                                 <m:t>𝐬</m:t>
                               </m:r>
                               <m:r>
-                                <a:rPr lang="en-US" sz="1400" dirty="0" smtClean="0">
+                                <a:rPr lang="en-US" sz="1200" dirty="0" smtClean="0">
                                   <a:latin typeface="Cambria Math" panose="02040503050406030204" pitchFamily="18" charset="0"/>
                                 </a:rPr>
                                 <m:t>)</m:t>
                               </m:r>
                             </m:oMath>
                           </a14:m>
-                          <a:endParaRPr lang="en-US" sz="1400" dirty="0"/>
+                          <a:endParaRPr lang="en-US" sz="1200" dirty="0"/>
                         </a:p>
                       </a:txBody>
                       <a:tcPr/>
@@ -29332,14 +29195,14 @@
                       </a:ext>
                     </a:extLst>
                   </a:tr>
-                  <a:tr h="370840">
+                  <a:tr h="182880">
                     <a:tc>
                       <a:txBody>
                         <a:bodyPr/>
                         <a:lstStyle/>
                         <a:p>
                           <a:r>
-                            <a:rPr lang="en-US" sz="1400" dirty="0"/>
+                            <a:rPr lang="en-US" sz="1200" dirty="0"/>
                             <a:t>(1,1)</a:t>
                           </a:r>
                         </a:p>
@@ -29352,7 +29215,7 @@
                         <a:lstStyle/>
                         <a:p>
                           <a:r>
-                            <a:rPr lang="en-US" sz="1400" dirty="0"/>
+                            <a:rPr lang="en-US" sz="1200" dirty="0"/>
                             <a:t>0.7453</a:t>
                           </a:r>
                         </a:p>
@@ -29365,14 +29228,14 @@
                       </a:ext>
                     </a:extLst>
                   </a:tr>
-                  <a:tr h="370840">
+                  <a:tr h="182880">
                     <a:tc>
                       <a:txBody>
                         <a:bodyPr/>
                         <a:lstStyle/>
                         <a:p>
                           <a:r>
-                            <a:rPr lang="en-US" sz="1400" dirty="0"/>
+                            <a:rPr lang="en-US" sz="1200" dirty="0"/>
                             <a:t>(1,2)</a:t>
                           </a:r>
                         </a:p>
@@ -29385,7 +29248,7 @@
                         <a:lstStyle/>
                         <a:p>
                           <a:r>
-                            <a:rPr lang="en-US" sz="1400" dirty="0"/>
+                            <a:rPr lang="en-US" sz="1200" dirty="0"/>
                             <a:t>0.8016</a:t>
                           </a:r>
                         </a:p>
@@ -29398,14 +29261,14 @@
                       </a:ext>
                     </a:extLst>
                   </a:tr>
-                  <a:tr h="370840">
+                  <a:tr h="182880">
                     <a:tc>
                       <a:txBody>
                         <a:bodyPr/>
                         <a:lstStyle/>
                         <a:p>
                           <a:r>
-                            <a:rPr lang="en-US" sz="1400" dirty="0"/>
+                            <a:rPr lang="en-US" sz="1200" dirty="0"/>
                             <a:t>…</a:t>
                           </a:r>
                         </a:p>
@@ -29418,7 +29281,7 @@
                         <a:lstStyle/>
                         <a:p>
                           <a:r>
-                            <a:rPr lang="en-US" sz="1400" dirty="0"/>
+                            <a:rPr lang="en-US" sz="1200" dirty="0"/>
                             <a:t>…</a:t>
                           </a:r>
                         </a:p>
@@ -29436,7 +29299,7 @@
             </a:graphic>
           </p:graphicFrame>
         </mc:Choice>
-        <mc:Fallback xmlns="">
+        <mc:Fallback>
           <p:graphicFrame>
             <p:nvGraphicFramePr>
               <p:cNvPr id="10" name="Table 9">
@@ -29452,14 +29315,14 @@
               <p:nvPr>
                 <p:extLst>
                   <p:ext uri="{D42A27DB-BD31-4B8C-83A1-F6EECF244321}">
-                    <p14:modId xmlns:p14="http://schemas.microsoft.com/office/powerpoint/2010/main" val="3493349679"/>
+                    <p14:modId xmlns:p14="http://schemas.microsoft.com/office/powerpoint/2010/main" val="2982476008"/>
                   </p:ext>
                 </p:extLst>
               </p:nvPr>
             </p:nvGraphicFramePr>
             <p:xfrm>
-              <a:off x="8946925" y="901635"/>
-              <a:ext cx="2147634" cy="1483360"/>
+              <a:off x="8913602" y="1131354"/>
+              <a:ext cx="2147634" cy="1097280"/>
             </p:xfrm>
             <a:graphic>
               <a:graphicData uri="http://schemas.openxmlformats.org/drawingml/2006/table">
@@ -29483,7 +29346,7 @@
                       </a:extLst>
                     </a:gridCol>
                   </a:tblGrid>
-                  <a:tr h="370840">
+                  <a:tr h="274320">
                     <a:tc>
                       <a:txBody>
                         <a:bodyPr/>
@@ -29496,7 +29359,7 @@
                         <a:blipFill>
                           <a:blip r:embed="rId4"/>
                           <a:stretch>
-                            <a:fillRect l="-1031" t="-1639" r="-269072" b="-304918"/>
+                            <a:fillRect l="-1031" t="-2222" r="-268041" b="-320000"/>
                           </a:stretch>
                         </a:blipFill>
                       </a:tcPr>
@@ -29513,7 +29376,7 @@
                         <a:blipFill>
                           <a:blip r:embed="rId4"/>
                           <a:stretch>
-                            <a:fillRect l="-38281" t="-1639" r="-1953" b="-304918"/>
+                            <a:fillRect l="-38281" t="-2222" r="-1563" b="-320000"/>
                           </a:stretch>
                         </a:blipFill>
                       </a:tcPr>
@@ -29524,14 +29387,14 @@
                       </a:ext>
                     </a:extLst>
                   </a:tr>
-                  <a:tr h="370840">
+                  <a:tr h="274320">
                     <a:tc>
                       <a:txBody>
                         <a:bodyPr/>
                         <a:lstStyle/>
                         <a:p>
                           <a:r>
-                            <a:rPr lang="en-US" sz="1400" dirty="0"/>
+                            <a:rPr lang="en-US" sz="1200" dirty="0"/>
                             <a:t>(1,1)</a:t>
                           </a:r>
                         </a:p>
@@ -29544,7 +29407,7 @@
                         <a:lstStyle/>
                         <a:p>
                           <a:r>
-                            <a:rPr lang="en-US" sz="1400" dirty="0"/>
+                            <a:rPr lang="en-US" sz="1200" dirty="0"/>
                             <a:t>0.7453</a:t>
                           </a:r>
                         </a:p>
@@ -29557,14 +29420,14 @@
                       </a:ext>
                     </a:extLst>
                   </a:tr>
-                  <a:tr h="370840">
+                  <a:tr h="274320">
                     <a:tc>
                       <a:txBody>
                         <a:bodyPr/>
                         <a:lstStyle/>
                         <a:p>
                           <a:r>
-                            <a:rPr lang="en-US" sz="1400" dirty="0"/>
+                            <a:rPr lang="en-US" sz="1200" dirty="0"/>
                             <a:t>(1,2)</a:t>
                           </a:r>
                         </a:p>
@@ -29577,7 +29440,7 @@
                         <a:lstStyle/>
                         <a:p>
                           <a:r>
-                            <a:rPr lang="en-US" sz="1400" dirty="0"/>
+                            <a:rPr lang="en-US" sz="1200" dirty="0"/>
                             <a:t>0.8016</a:t>
                           </a:r>
                         </a:p>
@@ -29590,14 +29453,14 @@
                       </a:ext>
                     </a:extLst>
                   </a:tr>
-                  <a:tr h="370840">
+                  <a:tr h="274320">
                     <a:tc>
                       <a:txBody>
                         <a:bodyPr/>
                         <a:lstStyle/>
                         <a:p>
                           <a:r>
-                            <a:rPr lang="en-US" sz="1400" dirty="0"/>
+                            <a:rPr lang="en-US" sz="1200" dirty="0"/>
                             <a:t>…</a:t>
                           </a:r>
                         </a:p>
@@ -29610,979 +29473,7 @@
                         <a:lstStyle/>
                         <a:p>
                           <a:r>
-                            <a:rPr lang="en-US" sz="1400" dirty="0"/>
-                            <a:t>…</a:t>
-                          </a:r>
-                        </a:p>
-                      </a:txBody>
-                      <a:tcPr/>
-                    </a:tc>
-                    <a:extLst>
-                      <a:ext uri="{0D108BD9-81ED-4DB2-BD59-A6C34878D82A}">
-                        <a16:rowId xmlns:a16="http://schemas.microsoft.com/office/drawing/2014/main" val="868402448"/>
-                      </a:ext>
-                    </a:extLst>
-                  </a:tr>
-                </a:tbl>
-              </a:graphicData>
-            </a:graphic>
-          </p:graphicFrame>
-        </mc:Fallback>
-      </mc:AlternateContent>
-      <mc:AlternateContent xmlns:mc="http://schemas.openxmlformats.org/markup-compatibility/2006" xmlns:a14="http://schemas.microsoft.com/office/drawing/2010/main">
-        <mc:Choice Requires="a14">
-          <p:graphicFrame>
-            <p:nvGraphicFramePr>
-              <p:cNvPr id="11" name="Table 10">
-                <a:extLst>
-                  <a:ext uri="{FF2B5EF4-FFF2-40B4-BE49-F238E27FC236}">
-                    <a16:creationId xmlns:a16="http://schemas.microsoft.com/office/drawing/2014/main" id="{5E155CE4-C8B8-A7CC-A291-879465D207B0}"/>
-                  </a:ext>
-                  <a:ext uri="{C183D7F6-B498-43B3-948B-1728B52AA6E4}">
-                    <adec:decorative xmlns:adec="http://schemas.microsoft.com/office/drawing/2017/decorative" val="0"/>
-                  </a:ext>
-                </a:extLst>
-              </p:cNvPr>
-              <p:cNvGraphicFramePr>
-                <a:graphicFrameLocks noGrp="1"/>
-              </p:cNvGraphicFramePr>
-              <p:nvPr>
-                <p:extLst>
-                  <p:ext uri="{D42A27DB-BD31-4B8C-83A1-F6EECF244321}">
-                    <p14:modId xmlns:p14="http://schemas.microsoft.com/office/powerpoint/2010/main" val="2802102726"/>
-                  </p:ext>
-                </p:extLst>
-              </p:nvPr>
-            </p:nvGraphicFramePr>
-            <p:xfrm>
-              <a:off x="8410107" y="5060314"/>
-              <a:ext cx="3221267" cy="1219200"/>
-            </p:xfrm>
-            <a:graphic>
-              <a:graphicData uri="http://schemas.openxmlformats.org/drawingml/2006/table">
-                <a:tbl>
-                  <a:tblPr firstRow="1" bandRow="1">
-                    <a:tableStyleId>{93296810-A885-4BE3-A3E7-6D5BEEA58F35}</a:tableStyleId>
-                  </a:tblPr>
-                  <a:tblGrid>
-                    <a:gridCol w="594015">
-                      <a:extLst>
-                        <a:ext uri="{9D8B030D-6E8A-4147-A177-3AD203B41FA5}">
-                          <a16:colId xmlns:a16="http://schemas.microsoft.com/office/drawing/2014/main" val="3711460689"/>
-                        </a:ext>
-                      </a:extLst>
-                    </a:gridCol>
-                    <a:gridCol w="644890">
-                      <a:extLst>
-                        <a:ext uri="{9D8B030D-6E8A-4147-A177-3AD203B41FA5}">
-                          <a16:colId xmlns:a16="http://schemas.microsoft.com/office/drawing/2014/main" val="2080107700"/>
-                        </a:ext>
-                      </a:extLst>
-                    </a:gridCol>
-                    <a:gridCol w="642174">
-                      <a:extLst>
-                        <a:ext uri="{9D8B030D-6E8A-4147-A177-3AD203B41FA5}">
-                          <a16:colId xmlns:a16="http://schemas.microsoft.com/office/drawing/2014/main" val="2654648091"/>
-                        </a:ext>
-                      </a:extLst>
-                    </a:gridCol>
-                    <a:gridCol w="709638">
-                      <a:extLst>
-                        <a:ext uri="{9D8B030D-6E8A-4147-A177-3AD203B41FA5}">
-                          <a16:colId xmlns:a16="http://schemas.microsoft.com/office/drawing/2014/main" val="1830746805"/>
-                        </a:ext>
-                      </a:extLst>
-                    </a:gridCol>
-                    <a:gridCol w="630550">
-                      <a:extLst>
-                        <a:ext uri="{9D8B030D-6E8A-4147-A177-3AD203B41FA5}">
-                          <a16:colId xmlns:a16="http://schemas.microsoft.com/office/drawing/2014/main" val="991393940"/>
-                        </a:ext>
-                      </a:extLst>
-                    </a:gridCol>
-                  </a:tblGrid>
-                  <a:tr h="0">
-                    <a:tc>
-                      <a:txBody>
-                        <a:bodyPr/>
-                        <a:lstStyle/>
-                        <a:p>
-                          <a:endParaRPr lang="en-US" sz="1400" dirty="0"/>
-                        </a:p>
-                      </a:txBody>
-                      <a:tcPr/>
-                    </a:tc>
-                    <a:tc>
-                      <a:txBody>
-                        <a:bodyPr/>
-                        <a:lstStyle/>
-                        <a:p>
-                          <a:r>
-                            <a:rPr lang="en-US" sz="1400" dirty="0"/>
-                            <a:t>up</a:t>
-                          </a:r>
-                        </a:p>
-                      </a:txBody>
-                      <a:tcPr/>
-                    </a:tc>
-                    <a:tc>
-                      <a:txBody>
-                        <a:bodyPr/>
-                        <a:lstStyle/>
-                        <a:p>
-                          <a:r>
-                            <a:rPr lang="en-US" sz="1400" dirty="0"/>
-                            <a:t>right</a:t>
-                          </a:r>
-                        </a:p>
-                      </a:txBody>
-                      <a:tcPr/>
-                    </a:tc>
-                    <a:tc>
-                      <a:txBody>
-                        <a:bodyPr/>
-                        <a:lstStyle/>
-                        <a:p>
-                          <a:r>
-                            <a:rPr lang="en-US" sz="1400" dirty="0"/>
-                            <a:t>down</a:t>
-                          </a:r>
-                        </a:p>
-                      </a:txBody>
-                      <a:tcPr/>
-                    </a:tc>
-                    <a:tc>
-                      <a:txBody>
-                        <a:bodyPr/>
-                        <a:lstStyle/>
-                        <a:p>
-                          <a:r>
-                            <a:rPr lang="en-US" sz="1400" dirty="0"/>
-                            <a:t>left</a:t>
-                          </a:r>
-                        </a:p>
-                      </a:txBody>
-                      <a:tcPr/>
-                    </a:tc>
-                    <a:extLst>
-                      <a:ext uri="{0D108BD9-81ED-4DB2-BD59-A6C34878D82A}">
-                        <a16:rowId xmlns:a16="http://schemas.microsoft.com/office/drawing/2014/main" val="2008869826"/>
-                      </a:ext>
-                    </a:extLst>
-                  </a:tr>
-                  <a:tr h="0">
-                    <a:tc>
-                      <a:txBody>
-                        <a:bodyPr/>
-                        <a:lstStyle/>
-                        <a:p>
-                          <a:r>
-                            <a:rPr lang="en-US" sz="1400" dirty="0"/>
-                            <a:t>(1,1)</a:t>
-                          </a:r>
-                        </a:p>
-                      </a:txBody>
-                      <a:tcPr/>
-                    </a:tc>
-                    <a:tc>
-                      <a:txBody>
-                        <a:bodyPr/>
-                        <a:lstStyle/>
-                        <a:p>
-                          <a:pPr/>
-                          <a14:m>
-                            <m:oMathPara xmlns:m="http://schemas.openxmlformats.org/officeDocument/2006/math">
-                              <m:oMathParaPr>
-                                <m:jc m:val="centerGroup"/>
-                              </m:oMathParaPr>
-                              <m:oMath xmlns:m="http://schemas.openxmlformats.org/officeDocument/2006/math">
-                                <m:r>
-                                  <m:rPr>
-                                    <m:nor/>
-                                  </m:rPr>
-                                  <a:rPr lang="en-US" sz="1400" dirty="0" smtClean="0">
-                                    <a:latin typeface="Cambria Math" panose="02040503050406030204" pitchFamily="18" charset="0"/>
-                                  </a:rPr>
-                                  <m:t>0.7453</m:t>
-                                </m:r>
-                              </m:oMath>
-                            </m:oMathPara>
-                          </a14:m>
-                          <a:endParaRPr lang="en-US" sz="1400" dirty="0"/>
-                        </a:p>
-                      </a:txBody>
-                      <a:tcPr/>
-                    </a:tc>
-                    <a:tc>
-                      <a:txBody>
-                        <a:bodyPr/>
-                        <a:lstStyle/>
-                        <a:p>
-                          <a:pPr marL="0" marR="0" lvl="0" indent="0" algn="l" defTabSz="914400" rtl="0" eaLnBrk="1" fontAlgn="auto" latinLnBrk="0" hangingPunct="1">
-                            <a:lnSpc>
-                              <a:spcPct val="100000"/>
-                            </a:lnSpc>
-                            <a:spcBef>
-                              <a:spcPts val="0"/>
-                            </a:spcBef>
-                            <a:spcAft>
-                              <a:spcPts val="0"/>
-                            </a:spcAft>
-                            <a:buClrTx/>
-                            <a:buSzTx/>
-                            <a:buFontTx/>
-                            <a:buNone/>
-                            <a:tabLst/>
-                            <a:defRPr/>
-                          </a:pPr>
-                          <a14:m>
-                            <m:oMathPara xmlns:m="http://schemas.openxmlformats.org/officeDocument/2006/math">
-                              <m:oMathParaPr>
-                                <m:jc m:val="centerGroup"/>
-                              </m:oMathParaPr>
-                              <m:oMath xmlns:m="http://schemas.openxmlformats.org/officeDocument/2006/math">
-                                <m:r>
-                                  <m:rPr>
-                                    <m:nor/>
-                                  </m:rPr>
-                                  <a:rPr lang="en-US" sz="1400" dirty="0" smtClean="0">
-                                    <a:latin typeface="Cambria Math" panose="02040503050406030204" pitchFamily="18" charset="0"/>
-                                  </a:rPr>
-                                  <m:t>0.6709</m:t>
-                                </m:r>
-                              </m:oMath>
-                            </m:oMathPara>
-                          </a14:m>
-                          <a:endParaRPr lang="en-US" sz="1400" dirty="0"/>
-                        </a:p>
-                      </a:txBody>
-                      <a:tcPr/>
-                    </a:tc>
-                    <a:tc>
-                      <a:txBody>
-                        <a:bodyPr/>
-                        <a:lstStyle/>
-                        <a:p>
-                          <a:pPr/>
-                          <a14:m>
-                            <m:oMathPara xmlns:m="http://schemas.openxmlformats.org/officeDocument/2006/math">
-                              <m:oMathParaPr>
-                                <m:jc m:val="centerGroup"/>
-                              </m:oMathParaPr>
-                              <m:oMath xmlns:m="http://schemas.openxmlformats.org/officeDocument/2006/math">
-                                <m:r>
-                                  <m:rPr>
-                                    <m:nor/>
-                                  </m:rPr>
-                                  <a:rPr lang="en-US" sz="1400" dirty="0" smtClean="0">
-                                    <a:latin typeface="Cambria Math" panose="02040503050406030204" pitchFamily="18" charset="0"/>
-                                  </a:rPr>
-                                  <m:t>0.7003</m:t>
-                                </m:r>
-                              </m:oMath>
-                            </m:oMathPara>
-                          </a14:m>
-                          <a:endParaRPr lang="en-US" sz="1400" dirty="0"/>
-                        </a:p>
-                      </a:txBody>
-                      <a:tcPr/>
-                    </a:tc>
-                    <a:tc>
-                      <a:txBody>
-                        <a:bodyPr/>
-                        <a:lstStyle/>
-                        <a:p>
-                          <a:pPr marL="0" marR="0" lvl="0" indent="0" algn="l" defTabSz="914400" rtl="0" eaLnBrk="1" fontAlgn="auto" latinLnBrk="0" hangingPunct="1">
-                            <a:lnSpc>
-                              <a:spcPct val="100000"/>
-                            </a:lnSpc>
-                            <a:spcBef>
-                              <a:spcPts val="0"/>
-                            </a:spcBef>
-                            <a:spcAft>
-                              <a:spcPts val="0"/>
-                            </a:spcAft>
-                            <a:buClrTx/>
-                            <a:buSzTx/>
-                            <a:buFontTx/>
-                            <a:buNone/>
-                            <a:tabLst/>
-                            <a:defRPr/>
-                          </a:pPr>
-                          <a14:m>
-                            <m:oMathPara xmlns:m="http://schemas.openxmlformats.org/officeDocument/2006/math">
-                              <m:oMathParaPr>
-                                <m:jc m:val="centerGroup"/>
-                              </m:oMathParaPr>
-                              <m:oMath xmlns:m="http://schemas.openxmlformats.org/officeDocument/2006/math">
-                                <m:r>
-                                  <m:rPr>
-                                    <m:nor/>
-                                  </m:rPr>
-                                  <a:rPr lang="en-US" sz="1400" dirty="0" smtClean="0">
-                                    <a:latin typeface="Cambria Math" panose="02040503050406030204" pitchFamily="18" charset="0"/>
-                                  </a:rPr>
-                                  <m:t>0.7109</m:t>
-                                </m:r>
-                              </m:oMath>
-                            </m:oMathPara>
-                          </a14:m>
-                          <a:endParaRPr lang="en-US" sz="1400" dirty="0"/>
-                        </a:p>
-                      </a:txBody>
-                      <a:tcPr/>
-                    </a:tc>
-                    <a:extLst>
-                      <a:ext uri="{0D108BD9-81ED-4DB2-BD59-A6C34878D82A}">
-                        <a16:rowId xmlns:a16="http://schemas.microsoft.com/office/drawing/2014/main" val="524805492"/>
-                      </a:ext>
-                    </a:extLst>
-                  </a:tr>
-                  <a:tr h="0">
-                    <a:tc>
-                      <a:txBody>
-                        <a:bodyPr/>
-                        <a:lstStyle/>
-                        <a:p>
-                          <a:r>
-                            <a:rPr lang="en-US" sz="1400" dirty="0"/>
-                            <a:t>…</a:t>
-                          </a:r>
-                        </a:p>
-                      </a:txBody>
-                      <a:tcPr/>
-                    </a:tc>
-                    <a:tc>
-                      <a:txBody>
-                        <a:bodyPr/>
-                        <a:lstStyle/>
-                        <a:p>
-                          <a:r>
-                            <a:rPr lang="en-US" sz="1400" dirty="0"/>
-                            <a:t>…</a:t>
-                          </a:r>
-                        </a:p>
-                      </a:txBody>
-                      <a:tcPr/>
-                    </a:tc>
-                    <a:tc>
-                      <a:txBody>
-                        <a:bodyPr/>
-                        <a:lstStyle/>
-                        <a:p>
-                          <a:pPr marL="0" marR="0" lvl="0" indent="0" algn="l" defTabSz="914400" rtl="0" eaLnBrk="1" fontAlgn="auto" latinLnBrk="0" hangingPunct="1">
-                            <a:lnSpc>
-                              <a:spcPct val="100000"/>
-                            </a:lnSpc>
-                            <a:spcBef>
-                              <a:spcPts val="0"/>
-                            </a:spcBef>
-                            <a:spcAft>
-                              <a:spcPts val="0"/>
-                            </a:spcAft>
-                            <a:buClrTx/>
-                            <a:buSzTx/>
-                            <a:buFontTx/>
-                            <a:buNone/>
-                            <a:tabLst/>
-                            <a:defRPr/>
-                          </a:pPr>
-                          <a:r>
-                            <a:rPr lang="en-US" sz="1400" dirty="0"/>
-                            <a:t>…</a:t>
-                          </a:r>
-                        </a:p>
-                      </a:txBody>
-                      <a:tcPr/>
-                    </a:tc>
-                    <a:tc>
-                      <a:txBody>
-                        <a:bodyPr/>
-                        <a:lstStyle/>
-                        <a:p>
-                          <a:pPr marL="0" marR="0" lvl="0" indent="0" algn="l" defTabSz="914400" rtl="0" eaLnBrk="1" fontAlgn="auto" latinLnBrk="0" hangingPunct="1">
-                            <a:lnSpc>
-                              <a:spcPct val="100000"/>
-                            </a:lnSpc>
-                            <a:spcBef>
-                              <a:spcPts val="0"/>
-                            </a:spcBef>
-                            <a:spcAft>
-                              <a:spcPts val="0"/>
-                            </a:spcAft>
-                            <a:buClrTx/>
-                            <a:buSzTx/>
-                            <a:buFontTx/>
-                            <a:buNone/>
-                            <a:tabLst/>
-                            <a:defRPr/>
-                          </a:pPr>
-                          <a:r>
-                            <a:rPr lang="en-US" sz="1400" dirty="0"/>
-                            <a:t>…</a:t>
-                          </a:r>
-                        </a:p>
-                      </a:txBody>
-                      <a:tcPr/>
-                    </a:tc>
-                    <a:tc>
-                      <a:txBody>
-                        <a:bodyPr/>
-                        <a:lstStyle/>
-                        <a:p>
-                          <a:r>
-                            <a:rPr lang="en-US" sz="1400" dirty="0"/>
-                            <a:t>…</a:t>
-                          </a:r>
-                        </a:p>
-                      </a:txBody>
-                      <a:tcPr/>
-                    </a:tc>
-                    <a:extLst>
-                      <a:ext uri="{0D108BD9-81ED-4DB2-BD59-A6C34878D82A}">
-                        <a16:rowId xmlns:a16="http://schemas.microsoft.com/office/drawing/2014/main" val="3725035416"/>
-                      </a:ext>
-                    </a:extLst>
-                  </a:tr>
-                  <a:tr h="0">
-                    <a:tc>
-                      <a:txBody>
-                        <a:bodyPr/>
-                        <a:lstStyle/>
-                        <a:p>
-                          <a:r>
-                            <a:rPr lang="en-US" sz="1400" dirty="0"/>
-                            <a:t>…</a:t>
-                          </a:r>
-                        </a:p>
-                      </a:txBody>
-                      <a:tcPr/>
-                    </a:tc>
-                    <a:tc>
-                      <a:txBody>
-                        <a:bodyPr/>
-                        <a:lstStyle/>
-                        <a:p>
-                          <a:r>
-                            <a:rPr lang="en-US" sz="1400" dirty="0"/>
-                            <a:t>…</a:t>
-                          </a:r>
-                        </a:p>
-                      </a:txBody>
-                      <a:tcPr/>
-                    </a:tc>
-                    <a:tc>
-                      <a:txBody>
-                        <a:bodyPr/>
-                        <a:lstStyle/>
-                        <a:p>
-                          <a:pPr marL="0" marR="0" lvl="0" indent="0" algn="l" defTabSz="914400" rtl="0" eaLnBrk="1" fontAlgn="auto" latinLnBrk="0" hangingPunct="1">
-                            <a:lnSpc>
-                              <a:spcPct val="100000"/>
-                            </a:lnSpc>
-                            <a:spcBef>
-                              <a:spcPts val="0"/>
-                            </a:spcBef>
-                            <a:spcAft>
-                              <a:spcPts val="0"/>
-                            </a:spcAft>
-                            <a:buClrTx/>
-                            <a:buSzTx/>
-                            <a:buFontTx/>
-                            <a:buNone/>
-                            <a:tabLst/>
-                            <a:defRPr/>
-                          </a:pPr>
-                          <a:r>
-                            <a:rPr lang="en-US" sz="1400" dirty="0"/>
-                            <a:t>…</a:t>
-                          </a:r>
-                        </a:p>
-                      </a:txBody>
-                      <a:tcPr/>
-                    </a:tc>
-                    <a:tc>
-                      <a:txBody>
-                        <a:bodyPr/>
-                        <a:lstStyle/>
-                        <a:p>
-                          <a:pPr marL="0" marR="0" lvl="0" indent="0" algn="l" defTabSz="914400" rtl="0" eaLnBrk="1" fontAlgn="auto" latinLnBrk="0" hangingPunct="1">
-                            <a:lnSpc>
-                              <a:spcPct val="100000"/>
-                            </a:lnSpc>
-                            <a:spcBef>
-                              <a:spcPts val="0"/>
-                            </a:spcBef>
-                            <a:spcAft>
-                              <a:spcPts val="0"/>
-                            </a:spcAft>
-                            <a:buClrTx/>
-                            <a:buSzTx/>
-                            <a:buFontTx/>
-                            <a:buNone/>
-                            <a:tabLst/>
-                            <a:defRPr/>
-                          </a:pPr>
-                          <a:r>
-                            <a:rPr lang="en-US" sz="1400" dirty="0"/>
-                            <a:t>…</a:t>
-                          </a:r>
-                        </a:p>
-                      </a:txBody>
-                      <a:tcPr/>
-                    </a:tc>
-                    <a:tc>
-                      <a:txBody>
-                        <a:bodyPr/>
-                        <a:lstStyle/>
-                        <a:p>
-                          <a:r>
-                            <a:rPr lang="en-US" sz="1400" dirty="0"/>
-                            <a:t>…</a:t>
-                          </a:r>
-                        </a:p>
-                      </a:txBody>
-                      <a:tcPr/>
-                    </a:tc>
-                    <a:extLst>
-                      <a:ext uri="{0D108BD9-81ED-4DB2-BD59-A6C34878D82A}">
-                        <a16:rowId xmlns:a16="http://schemas.microsoft.com/office/drawing/2014/main" val="868402448"/>
-                      </a:ext>
-                    </a:extLst>
-                  </a:tr>
-                </a:tbl>
-              </a:graphicData>
-            </a:graphic>
-          </p:graphicFrame>
-        </mc:Choice>
-        <mc:Fallback xmlns="">
-          <p:graphicFrame>
-            <p:nvGraphicFramePr>
-              <p:cNvPr id="11" name="Table 10">
-                <a:extLst>
-                  <a:ext uri="{FF2B5EF4-FFF2-40B4-BE49-F238E27FC236}">
-                    <a16:creationId xmlns:a16="http://schemas.microsoft.com/office/drawing/2014/main" id="{5E155CE4-C8B8-A7CC-A291-879465D207B0}"/>
-                  </a:ext>
-                  <a:ext uri="{C183D7F6-B498-43B3-948B-1728B52AA6E4}">
-                    <adec:decorative xmlns:adec="http://schemas.microsoft.com/office/drawing/2017/decorative" val="0"/>
-                  </a:ext>
-                </a:extLst>
-              </p:cNvPr>
-              <p:cNvGraphicFramePr>
-                <a:graphicFrameLocks noGrp="1"/>
-              </p:cNvGraphicFramePr>
-              <p:nvPr>
-                <p:extLst>
-                  <p:ext uri="{D42A27DB-BD31-4B8C-83A1-F6EECF244321}">
-                    <p14:modId xmlns:p14="http://schemas.microsoft.com/office/powerpoint/2010/main" val="2802102726"/>
-                  </p:ext>
-                </p:extLst>
-              </p:nvPr>
-            </p:nvGraphicFramePr>
-            <p:xfrm>
-              <a:off x="8410107" y="5060314"/>
-              <a:ext cx="3221267" cy="1219200"/>
-            </p:xfrm>
-            <a:graphic>
-              <a:graphicData uri="http://schemas.openxmlformats.org/drawingml/2006/table">
-                <a:tbl>
-                  <a:tblPr firstRow="1" bandRow="1">
-                    <a:tableStyleId>{93296810-A885-4BE3-A3E7-6D5BEEA58F35}</a:tableStyleId>
-                  </a:tblPr>
-                  <a:tblGrid>
-                    <a:gridCol w="594015">
-                      <a:extLst>
-                        <a:ext uri="{9D8B030D-6E8A-4147-A177-3AD203B41FA5}">
-                          <a16:colId xmlns:a16="http://schemas.microsoft.com/office/drawing/2014/main" val="3711460689"/>
-                        </a:ext>
-                      </a:extLst>
-                    </a:gridCol>
-                    <a:gridCol w="644890">
-                      <a:extLst>
-                        <a:ext uri="{9D8B030D-6E8A-4147-A177-3AD203B41FA5}">
-                          <a16:colId xmlns:a16="http://schemas.microsoft.com/office/drawing/2014/main" val="2080107700"/>
-                        </a:ext>
-                      </a:extLst>
-                    </a:gridCol>
-                    <a:gridCol w="642174">
-                      <a:extLst>
-                        <a:ext uri="{9D8B030D-6E8A-4147-A177-3AD203B41FA5}">
-                          <a16:colId xmlns:a16="http://schemas.microsoft.com/office/drawing/2014/main" val="2654648091"/>
-                        </a:ext>
-                      </a:extLst>
-                    </a:gridCol>
-                    <a:gridCol w="709638">
-                      <a:extLst>
-                        <a:ext uri="{9D8B030D-6E8A-4147-A177-3AD203B41FA5}">
-                          <a16:colId xmlns:a16="http://schemas.microsoft.com/office/drawing/2014/main" val="1830746805"/>
-                        </a:ext>
-                      </a:extLst>
-                    </a:gridCol>
-                    <a:gridCol w="630550">
-                      <a:extLst>
-                        <a:ext uri="{9D8B030D-6E8A-4147-A177-3AD203B41FA5}">
-                          <a16:colId xmlns:a16="http://schemas.microsoft.com/office/drawing/2014/main" val="991393940"/>
-                        </a:ext>
-                      </a:extLst>
-                    </a:gridCol>
-                  </a:tblGrid>
-                  <a:tr h="304800">
-                    <a:tc>
-                      <a:txBody>
-                        <a:bodyPr/>
-                        <a:lstStyle/>
-                        <a:p>
-                          <a:endParaRPr lang="en-US" sz="1400" dirty="0"/>
-                        </a:p>
-                      </a:txBody>
-                      <a:tcPr/>
-                    </a:tc>
-                    <a:tc>
-                      <a:txBody>
-                        <a:bodyPr/>
-                        <a:lstStyle/>
-                        <a:p>
-                          <a:r>
-                            <a:rPr lang="en-US" sz="1400" dirty="0"/>
-                            <a:t>up</a:t>
-                          </a:r>
-                        </a:p>
-                      </a:txBody>
-                      <a:tcPr/>
-                    </a:tc>
-                    <a:tc>
-                      <a:txBody>
-                        <a:bodyPr/>
-                        <a:lstStyle/>
-                        <a:p>
-                          <a:r>
-                            <a:rPr lang="en-US" sz="1400" dirty="0"/>
-                            <a:t>right</a:t>
-                          </a:r>
-                        </a:p>
-                      </a:txBody>
-                      <a:tcPr/>
-                    </a:tc>
-                    <a:tc>
-                      <a:txBody>
-                        <a:bodyPr/>
-                        <a:lstStyle/>
-                        <a:p>
-                          <a:r>
-                            <a:rPr lang="en-US" sz="1400" dirty="0"/>
-                            <a:t>down</a:t>
-                          </a:r>
-                        </a:p>
-                      </a:txBody>
-                      <a:tcPr/>
-                    </a:tc>
-                    <a:tc>
-                      <a:txBody>
-                        <a:bodyPr/>
-                        <a:lstStyle/>
-                        <a:p>
-                          <a:r>
-                            <a:rPr lang="en-US" sz="1400" dirty="0"/>
-                            <a:t>left</a:t>
-                          </a:r>
-                        </a:p>
-                      </a:txBody>
-                      <a:tcPr/>
-                    </a:tc>
-                    <a:extLst>
-                      <a:ext uri="{0D108BD9-81ED-4DB2-BD59-A6C34878D82A}">
-                        <a16:rowId xmlns:a16="http://schemas.microsoft.com/office/drawing/2014/main" val="2008869826"/>
-                      </a:ext>
-                    </a:extLst>
-                  </a:tr>
-                  <a:tr h="304800">
-                    <a:tc>
-                      <a:txBody>
-                        <a:bodyPr/>
-                        <a:lstStyle/>
-                        <a:p>
-                          <a:r>
-                            <a:rPr lang="en-US" sz="1400" dirty="0"/>
-                            <a:t>(1,1)</a:t>
-                          </a:r>
-                        </a:p>
-                      </a:txBody>
-                      <a:tcPr/>
-                    </a:tc>
-                    <a:tc>
-                      <a:txBody>
-                        <a:bodyPr/>
-                        <a:lstStyle/>
-                        <a:p>
-                          <a:endParaRPr lang="en-US"/>
-                        </a:p>
-                      </a:txBody>
-                      <a:tcPr>
-                        <a:blipFill>
-                          <a:blip r:embed="rId5"/>
-                          <a:stretch>
-                            <a:fillRect l="-93396" t="-101961" r="-311321" b="-215686"/>
-                          </a:stretch>
-                        </a:blipFill>
-                      </a:tcPr>
-                    </a:tc>
-                    <a:tc>
-                      <a:txBody>
-                        <a:bodyPr/>
-                        <a:lstStyle/>
-                        <a:p>
-                          <a:endParaRPr lang="en-US"/>
-                        </a:p>
-                      </a:txBody>
-                      <a:tcPr>
-                        <a:blipFill>
-                          <a:blip r:embed="rId5"/>
-                          <a:stretch>
-                            <a:fillRect l="-195238" t="-101961" r="-214286" b="-215686"/>
-                          </a:stretch>
-                        </a:blipFill>
-                      </a:tcPr>
-                    </a:tc>
-                    <a:tc>
-                      <a:txBody>
-                        <a:bodyPr/>
-                        <a:lstStyle/>
-                        <a:p>
-                          <a:endParaRPr lang="en-US"/>
-                        </a:p>
-                      </a:txBody>
-                      <a:tcPr>
-                        <a:blipFill>
-                          <a:blip r:embed="rId5"/>
-                          <a:stretch>
-                            <a:fillRect l="-264957" t="-101961" r="-92308" b="-215686"/>
-                          </a:stretch>
-                        </a:blipFill>
-                      </a:tcPr>
-                    </a:tc>
-                    <a:tc>
-                      <a:txBody>
-                        <a:bodyPr/>
-                        <a:lstStyle/>
-                        <a:p>
-                          <a:endParaRPr lang="en-US"/>
-                        </a:p>
-                      </a:txBody>
-                      <a:tcPr>
-                        <a:blipFill>
-                          <a:blip r:embed="rId5"/>
-                          <a:stretch>
-                            <a:fillRect l="-410577" t="-101961" r="-3846" b="-215686"/>
-                          </a:stretch>
-                        </a:blipFill>
-                      </a:tcPr>
-                    </a:tc>
-                    <a:extLst>
-                      <a:ext uri="{0D108BD9-81ED-4DB2-BD59-A6C34878D82A}">
-                        <a16:rowId xmlns:a16="http://schemas.microsoft.com/office/drawing/2014/main" val="524805492"/>
-                      </a:ext>
-                    </a:extLst>
-                  </a:tr>
-                  <a:tr h="304800">
-                    <a:tc>
-                      <a:txBody>
-                        <a:bodyPr/>
-                        <a:lstStyle/>
-                        <a:p>
-                          <a:r>
-                            <a:rPr lang="en-US" sz="1400" dirty="0"/>
-                            <a:t>…</a:t>
-                          </a:r>
-                        </a:p>
-                      </a:txBody>
-                      <a:tcPr/>
-                    </a:tc>
-                    <a:tc>
-                      <a:txBody>
-                        <a:bodyPr/>
-                        <a:lstStyle/>
-                        <a:p>
-                          <a:r>
-                            <a:rPr lang="en-US" sz="1400" dirty="0"/>
-                            <a:t>…</a:t>
-                          </a:r>
-                        </a:p>
-                      </a:txBody>
-                      <a:tcPr/>
-                    </a:tc>
-                    <a:tc>
-                      <a:txBody>
-                        <a:bodyPr/>
-                        <a:lstStyle/>
-                        <a:p>
-                          <a:pPr marL="0" marR="0" lvl="0" indent="0" algn="l" defTabSz="914400" rtl="0" eaLnBrk="1" fontAlgn="auto" latinLnBrk="0" hangingPunct="1">
-                            <a:lnSpc>
-                              <a:spcPct val="100000"/>
-                            </a:lnSpc>
-                            <a:spcBef>
-                              <a:spcPts val="0"/>
-                            </a:spcBef>
-                            <a:spcAft>
-                              <a:spcPts val="0"/>
-                            </a:spcAft>
-                            <a:buClrTx/>
-                            <a:buSzTx/>
-                            <a:buFontTx/>
-                            <a:buNone/>
-                            <a:tabLst/>
-                            <a:defRPr/>
-                          </a:pPr>
-                          <a:r>
-                            <a:rPr lang="en-US" sz="1400" dirty="0"/>
-                            <a:t>…</a:t>
-                          </a:r>
-                        </a:p>
-                      </a:txBody>
-                      <a:tcPr/>
-                    </a:tc>
-                    <a:tc>
-                      <a:txBody>
-                        <a:bodyPr/>
-                        <a:lstStyle/>
-                        <a:p>
-                          <a:pPr marL="0" marR="0" lvl="0" indent="0" algn="l" defTabSz="914400" rtl="0" eaLnBrk="1" fontAlgn="auto" latinLnBrk="0" hangingPunct="1">
-                            <a:lnSpc>
-                              <a:spcPct val="100000"/>
-                            </a:lnSpc>
-                            <a:spcBef>
-                              <a:spcPts val="0"/>
-                            </a:spcBef>
-                            <a:spcAft>
-                              <a:spcPts val="0"/>
-                            </a:spcAft>
-                            <a:buClrTx/>
-                            <a:buSzTx/>
-                            <a:buFontTx/>
-                            <a:buNone/>
-                            <a:tabLst/>
-                            <a:defRPr/>
-                          </a:pPr>
-                          <a:r>
-                            <a:rPr lang="en-US" sz="1400" dirty="0"/>
-                            <a:t>…</a:t>
-                          </a:r>
-                        </a:p>
-                      </a:txBody>
-                      <a:tcPr/>
-                    </a:tc>
-                    <a:tc>
-                      <a:txBody>
-                        <a:bodyPr/>
-                        <a:lstStyle/>
-                        <a:p>
-                          <a:r>
-                            <a:rPr lang="en-US" sz="1400" dirty="0"/>
-                            <a:t>…</a:t>
-                          </a:r>
-                        </a:p>
-                      </a:txBody>
-                      <a:tcPr/>
-                    </a:tc>
-                    <a:extLst>
-                      <a:ext uri="{0D108BD9-81ED-4DB2-BD59-A6C34878D82A}">
-                        <a16:rowId xmlns:a16="http://schemas.microsoft.com/office/drawing/2014/main" val="3725035416"/>
-                      </a:ext>
-                    </a:extLst>
-                  </a:tr>
-                  <a:tr h="304800">
-                    <a:tc>
-                      <a:txBody>
-                        <a:bodyPr/>
-                        <a:lstStyle/>
-                        <a:p>
-                          <a:r>
-                            <a:rPr lang="en-US" sz="1400" dirty="0"/>
-                            <a:t>…</a:t>
-                          </a:r>
-                        </a:p>
-                      </a:txBody>
-                      <a:tcPr/>
-                    </a:tc>
-                    <a:tc>
-                      <a:txBody>
-                        <a:bodyPr/>
-                        <a:lstStyle/>
-                        <a:p>
-                          <a:r>
-                            <a:rPr lang="en-US" sz="1400" dirty="0"/>
-                            <a:t>…</a:t>
-                          </a:r>
-                        </a:p>
-                      </a:txBody>
-                      <a:tcPr/>
-                    </a:tc>
-                    <a:tc>
-                      <a:txBody>
-                        <a:bodyPr/>
-                        <a:lstStyle/>
-                        <a:p>
-                          <a:pPr marL="0" marR="0" lvl="0" indent="0" algn="l" defTabSz="914400" rtl="0" eaLnBrk="1" fontAlgn="auto" latinLnBrk="0" hangingPunct="1">
-                            <a:lnSpc>
-                              <a:spcPct val="100000"/>
-                            </a:lnSpc>
-                            <a:spcBef>
-                              <a:spcPts val="0"/>
-                            </a:spcBef>
-                            <a:spcAft>
-                              <a:spcPts val="0"/>
-                            </a:spcAft>
-                            <a:buClrTx/>
-                            <a:buSzTx/>
-                            <a:buFontTx/>
-                            <a:buNone/>
-                            <a:tabLst/>
-                            <a:defRPr/>
-                          </a:pPr>
-                          <a:r>
-                            <a:rPr lang="en-US" sz="1400" dirty="0"/>
-                            <a:t>…</a:t>
-                          </a:r>
-                        </a:p>
-                      </a:txBody>
-                      <a:tcPr/>
-                    </a:tc>
-                    <a:tc>
-                      <a:txBody>
-                        <a:bodyPr/>
-                        <a:lstStyle/>
-                        <a:p>
-                          <a:pPr marL="0" marR="0" lvl="0" indent="0" algn="l" defTabSz="914400" rtl="0" eaLnBrk="1" fontAlgn="auto" latinLnBrk="0" hangingPunct="1">
-                            <a:lnSpc>
-                              <a:spcPct val="100000"/>
-                            </a:lnSpc>
-                            <a:spcBef>
-                              <a:spcPts val="0"/>
-                            </a:spcBef>
-                            <a:spcAft>
-                              <a:spcPts val="0"/>
-                            </a:spcAft>
-                            <a:buClrTx/>
-                            <a:buSzTx/>
-                            <a:buFontTx/>
-                            <a:buNone/>
-                            <a:tabLst/>
-                            <a:defRPr/>
-                          </a:pPr>
-                          <a:r>
-                            <a:rPr lang="en-US" sz="1400" dirty="0"/>
-                            <a:t>…</a:t>
-                          </a:r>
-                        </a:p>
-                      </a:txBody>
-                      <a:tcPr/>
-                    </a:tc>
-                    <a:tc>
-                      <a:txBody>
-                        <a:bodyPr/>
-                        <a:lstStyle/>
-                        <a:p>
-                          <a:r>
-                            <a:rPr lang="en-US" sz="1400" dirty="0"/>
+                            <a:rPr lang="en-US" sz="1200" dirty="0"/>
                             <a:t>…</a:t>
                           </a:r>
                         </a:p>
@@ -30603,10 +29494,10 @@
       </mc:AlternateContent>
       <p:sp>
         <p:nvSpPr>
-          <p:cNvPr id="12" name="TextBox 4">
+          <p:cNvPr id="15" name="TextBox 14">
             <a:extLst>
               <a:ext uri="{FF2B5EF4-FFF2-40B4-BE49-F238E27FC236}">
-                <a16:creationId xmlns:a16="http://schemas.microsoft.com/office/drawing/2014/main" id="{44CFFF41-CFC5-E3BB-D794-D00B06D2A95F}"/>
+                <a16:creationId xmlns:a16="http://schemas.microsoft.com/office/drawing/2014/main" id="{4F618E29-8BC7-5465-7F90-DBCC57613545}"/>
               </a:ext>
             </a:extLst>
           </p:cNvPr>
@@ -30615,8 +29506,8 @@
         </p:nvSpPr>
         <p:spPr>
           <a:xfrm>
-            <a:off x="9200611" y="4727489"/>
-            <a:ext cx="1640261" cy="369332"/>
+            <a:off x="8685923" y="4598699"/>
+            <a:ext cx="2602993" cy="338554"/>
           </a:xfrm>
           <a:prstGeom prst="rect">
             <a:avLst/>
@@ -30627,110 +29518,438 @@
           <a:bodyPr wrap="square" rtlCol="0">
             <a:spAutoFit/>
           </a:bodyPr>
-          <a:lstStyle>
-            <a:defPPr>
-              <a:defRPr lang="en-US"/>
-            </a:defPPr>
-            <a:lvl1pPr marL="0" algn="l" defTabSz="914400" rtl="0" eaLnBrk="1" latinLnBrk="0" hangingPunct="1">
-              <a:defRPr sz="1800" kern="1200">
-                <a:solidFill>
-                  <a:schemeClr val="tx1"/>
-                </a:solidFill>
-                <a:latin typeface="+mn-lt"/>
-                <a:ea typeface="+mn-ea"/>
-                <a:cs typeface="+mn-cs"/>
-              </a:defRPr>
-            </a:lvl1pPr>
-            <a:lvl2pPr marL="457200" algn="l" defTabSz="914400" rtl="0" eaLnBrk="1" latinLnBrk="0" hangingPunct="1">
-              <a:defRPr sz="1800" kern="1200">
-                <a:solidFill>
-                  <a:schemeClr val="tx1"/>
-                </a:solidFill>
-                <a:latin typeface="+mn-lt"/>
-                <a:ea typeface="+mn-ea"/>
-                <a:cs typeface="+mn-cs"/>
-              </a:defRPr>
-            </a:lvl2pPr>
-            <a:lvl3pPr marL="914400" algn="l" defTabSz="914400" rtl="0" eaLnBrk="1" latinLnBrk="0" hangingPunct="1">
-              <a:defRPr sz="1800" kern="1200">
-                <a:solidFill>
-                  <a:schemeClr val="tx1"/>
-                </a:solidFill>
-                <a:latin typeface="+mn-lt"/>
-                <a:ea typeface="+mn-ea"/>
-                <a:cs typeface="+mn-cs"/>
-              </a:defRPr>
-            </a:lvl3pPr>
-            <a:lvl4pPr marL="1371600" algn="l" defTabSz="914400" rtl="0" eaLnBrk="1" latinLnBrk="0" hangingPunct="1">
-              <a:defRPr sz="1800" kern="1200">
-                <a:solidFill>
-                  <a:schemeClr val="tx1"/>
-                </a:solidFill>
-                <a:latin typeface="+mn-lt"/>
-                <a:ea typeface="+mn-ea"/>
-                <a:cs typeface="+mn-cs"/>
-              </a:defRPr>
-            </a:lvl4pPr>
-            <a:lvl5pPr marL="1828800" algn="l" defTabSz="914400" rtl="0" eaLnBrk="1" latinLnBrk="0" hangingPunct="1">
-              <a:defRPr sz="1800" kern="1200">
-                <a:solidFill>
-                  <a:schemeClr val="tx1"/>
-                </a:solidFill>
-                <a:latin typeface="+mn-lt"/>
-                <a:ea typeface="+mn-ea"/>
-                <a:cs typeface="+mn-cs"/>
-              </a:defRPr>
-            </a:lvl5pPr>
-            <a:lvl6pPr marL="2286000" algn="l" defTabSz="914400" rtl="0" eaLnBrk="1" latinLnBrk="0" hangingPunct="1">
-              <a:defRPr sz="1800" kern="1200">
-                <a:solidFill>
-                  <a:schemeClr val="tx1"/>
-                </a:solidFill>
-                <a:latin typeface="+mn-lt"/>
-                <a:ea typeface="+mn-ea"/>
-                <a:cs typeface="+mn-cs"/>
-              </a:defRPr>
-            </a:lvl6pPr>
-            <a:lvl7pPr marL="2743200" algn="l" defTabSz="914400" rtl="0" eaLnBrk="1" latinLnBrk="0" hangingPunct="1">
-              <a:defRPr sz="1800" kern="1200">
-                <a:solidFill>
-                  <a:schemeClr val="tx1"/>
-                </a:solidFill>
-                <a:latin typeface="+mn-lt"/>
-                <a:ea typeface="+mn-ea"/>
-                <a:cs typeface="+mn-cs"/>
-              </a:defRPr>
-            </a:lvl7pPr>
-            <a:lvl8pPr marL="3200400" algn="l" defTabSz="914400" rtl="0" eaLnBrk="1" latinLnBrk="0" hangingPunct="1">
-              <a:defRPr sz="1800" kern="1200">
-                <a:solidFill>
-                  <a:schemeClr val="tx1"/>
-                </a:solidFill>
-                <a:latin typeface="+mn-lt"/>
-                <a:ea typeface="+mn-ea"/>
-                <a:cs typeface="+mn-cs"/>
-              </a:defRPr>
-            </a:lvl8pPr>
-            <a:lvl9pPr marL="3657600" algn="l" defTabSz="914400" rtl="0" eaLnBrk="1" latinLnBrk="0" hangingPunct="1">
-              <a:defRPr sz="1800" kern="1200">
-                <a:solidFill>
-                  <a:schemeClr val="tx1"/>
-                </a:solidFill>
-                <a:latin typeface="+mn-lt"/>
-                <a:ea typeface="+mn-ea"/>
-                <a:cs typeface="+mn-cs"/>
-              </a:defRPr>
-            </a:lvl9pPr>
-          </a:lstStyle>
+          <a:lstStyle/>
           <a:p>
             <a:pPr algn="ctr"/>
             <a:r>
-              <a:rPr lang="en-US" dirty="0"/>
-              <a:t>or</a:t>
+              <a:rPr lang="en-US" sz="1600" dirty="0"/>
+              <a:t>Policy </a:t>
             </a:r>
           </a:p>
         </p:txBody>
       </p:sp>
+      <mc:AlternateContent xmlns:mc="http://schemas.openxmlformats.org/markup-compatibility/2006">
+        <mc:Choice xmlns:a14="http://schemas.microsoft.com/office/drawing/2010/main" Requires="a14">
+          <p:graphicFrame>
+            <p:nvGraphicFramePr>
+              <p:cNvPr id="17" name="Table 16">
+                <a:extLst>
+                  <a:ext uri="{FF2B5EF4-FFF2-40B4-BE49-F238E27FC236}">
+                    <a16:creationId xmlns:a16="http://schemas.microsoft.com/office/drawing/2014/main" id="{CA774F2A-88BA-B1E8-30E2-DDB62E0F5EF0}"/>
+                  </a:ext>
+                  <a:ext uri="{C183D7F6-B498-43B3-948B-1728B52AA6E4}">
+                    <adec:decorative xmlns:adec="http://schemas.microsoft.com/office/drawing/2017/decorative" val="0"/>
+                  </a:ext>
+                </a:extLst>
+              </p:cNvPr>
+              <p:cNvGraphicFramePr>
+                <a:graphicFrameLocks noGrp="1"/>
+              </p:cNvGraphicFramePr>
+              <p:nvPr>
+                <p:extLst>
+                  <p:ext uri="{D42A27DB-BD31-4B8C-83A1-F6EECF244321}">
+                    <p14:modId xmlns:p14="http://schemas.microsoft.com/office/powerpoint/2010/main" val="1352679748"/>
+                  </p:ext>
+                </p:extLst>
+              </p:nvPr>
+            </p:nvGraphicFramePr>
+            <p:xfrm>
+              <a:off x="9171327" y="4994415"/>
+              <a:ext cx="1632185" cy="1082040"/>
+            </p:xfrm>
+            <a:graphic>
+              <a:graphicData uri="http://schemas.openxmlformats.org/drawingml/2006/table">
+                <a:tbl>
+                  <a:tblPr firstRow="1" bandRow="1">
+                    <a:tableStyleId>{93296810-A885-4BE3-A3E7-6D5BEEA58F35}</a:tableStyleId>
+                  </a:tblPr>
+                  <a:tblGrid>
+                    <a:gridCol w="512256">
+                      <a:extLst>
+                        <a:ext uri="{9D8B030D-6E8A-4147-A177-3AD203B41FA5}">
+                          <a16:colId xmlns:a16="http://schemas.microsoft.com/office/drawing/2014/main" val="3711460689"/>
+                        </a:ext>
+                      </a:extLst>
+                    </a:gridCol>
+                    <a:gridCol w="1119929">
+                      <a:extLst>
+                        <a:ext uri="{9D8B030D-6E8A-4147-A177-3AD203B41FA5}">
+                          <a16:colId xmlns:a16="http://schemas.microsoft.com/office/drawing/2014/main" val="2080107700"/>
+                        </a:ext>
+                      </a:extLst>
+                    </a:gridCol>
+                  </a:tblGrid>
+                  <a:tr h="0">
+                    <a:tc>
+                      <a:txBody>
+                        <a:bodyPr/>
+                        <a:lstStyle/>
+                        <a:p>
+                          <a:pPr/>
+                          <a14:m>
+                            <m:oMathPara xmlns:m="http://schemas.openxmlformats.org/officeDocument/2006/math">
+                              <m:oMath>
+                                <m:r>
+                                  <a:rPr lang="en-US" sz="1200" dirty="0" smtClean="0">
+                                    <a:latin typeface="Cambria Math" panose="02040503050406030204" pitchFamily="18" charset="0"/>
+                                  </a:rPr>
+                                  <m:t>𝑠</m:t>
+                                </m:r>
+                              </m:oMath>
+                            </m:oMathPara>
+                          </a14:m>
+                          <a:endParaRPr lang="en-US" sz="1200" dirty="0"/>
+                        </a:p>
+                      </a:txBody>
+                      <a:tcPr/>
+                    </a:tc>
+                    <a:tc>
+                      <a:txBody>
+                        <a:bodyPr/>
+                        <a:lstStyle/>
+                        <a:p>
+                          <a:r>
+                            <a:rPr lang="en-US" sz="1200" b="1" dirty="0"/>
+                            <a:t>Action </a:t>
+                          </a:r>
+                          <a14:m>
+                            <m:oMath xmlns:m="http://schemas.openxmlformats.org/officeDocument/2006/math">
+                              <m:r>
+                                <a:rPr lang="en-US" sz="1200" i="1" smtClean="0">
+                                  <a:latin typeface="Cambria Math" panose="02040503050406030204" pitchFamily="18" charset="0"/>
+                                </a:rPr>
+                                <m:t>𝜋</m:t>
+                              </m:r>
+                              <m:d>
+                                <m:dPr>
+                                  <m:ctrlPr>
+                                    <a:rPr lang="en-US" sz="1200" i="1">
+                                      <a:latin typeface="Cambria Math" panose="02040503050406030204" pitchFamily="18" charset="0"/>
+                                    </a:rPr>
+                                  </m:ctrlPr>
+                                </m:dPr>
+                                <m:e>
+                                  <m:r>
+                                    <a:rPr lang="en-US" sz="1200" i="1">
+                                      <a:latin typeface="Cambria Math" panose="02040503050406030204" pitchFamily="18" charset="0"/>
+                                    </a:rPr>
+                                    <m:t>𝑠</m:t>
+                                  </m:r>
+                                </m:e>
+                              </m:d>
+                            </m:oMath>
+                          </a14:m>
+                          <a:endParaRPr lang="en-US" sz="1200" dirty="0"/>
+                        </a:p>
+                      </a:txBody>
+                      <a:tcPr/>
+                    </a:tc>
+                    <a:extLst>
+                      <a:ext uri="{0D108BD9-81ED-4DB2-BD59-A6C34878D82A}">
+                        <a16:rowId xmlns:a16="http://schemas.microsoft.com/office/drawing/2014/main" val="2008869826"/>
+                      </a:ext>
+                    </a:extLst>
+                  </a:tr>
+                  <a:tr h="0">
+                    <a:tc>
+                      <a:txBody>
+                        <a:bodyPr/>
+                        <a:lstStyle/>
+                        <a:p>
+                          <a:r>
+                            <a:rPr lang="en-US" sz="1100" dirty="0"/>
+                            <a:t>(1,1)</a:t>
+                          </a:r>
+                        </a:p>
+                      </a:txBody>
+                      <a:tcPr/>
+                    </a:tc>
+                    <a:tc>
+                      <a:txBody>
+                        <a:bodyPr/>
+                        <a:lstStyle/>
+                        <a:p>
+                          <a:r>
+                            <a:rPr lang="en-US" sz="1100" dirty="0"/>
+                            <a:t>up</a:t>
+                          </a:r>
+                        </a:p>
+                      </a:txBody>
+                      <a:tcPr/>
+                    </a:tc>
+                    <a:extLst>
+                      <a:ext uri="{0D108BD9-81ED-4DB2-BD59-A6C34878D82A}">
+                        <a16:rowId xmlns:a16="http://schemas.microsoft.com/office/drawing/2014/main" val="524805492"/>
+                      </a:ext>
+                    </a:extLst>
+                  </a:tr>
+                  <a:tr h="0">
+                    <a:tc>
+                      <a:txBody>
+                        <a:bodyPr/>
+                        <a:lstStyle/>
+                        <a:p>
+                          <a:r>
+                            <a:rPr lang="en-US" sz="1200" dirty="0"/>
+                            <a:t>…</a:t>
+                          </a:r>
+                        </a:p>
+                      </a:txBody>
+                      <a:tcPr/>
+                    </a:tc>
+                    <a:tc>
+                      <a:txBody>
+                        <a:bodyPr/>
+                        <a:lstStyle/>
+                        <a:p>
+                          <a:r>
+                            <a:rPr lang="en-US" sz="1200" dirty="0"/>
+                            <a:t>…</a:t>
+                          </a:r>
+                        </a:p>
+                      </a:txBody>
+                      <a:tcPr/>
+                    </a:tc>
+                    <a:extLst>
+                      <a:ext uri="{0D108BD9-81ED-4DB2-BD59-A6C34878D82A}">
+                        <a16:rowId xmlns:a16="http://schemas.microsoft.com/office/drawing/2014/main" val="3725035416"/>
+                      </a:ext>
+                    </a:extLst>
+                  </a:tr>
+                  <a:tr h="0">
+                    <a:tc>
+                      <a:txBody>
+                        <a:bodyPr/>
+                        <a:lstStyle/>
+                        <a:p>
+                          <a:r>
+                            <a:rPr lang="en-US" sz="1200" dirty="0"/>
+                            <a:t>…</a:t>
+                          </a:r>
+                        </a:p>
+                      </a:txBody>
+                      <a:tcPr/>
+                    </a:tc>
+                    <a:tc>
+                      <a:txBody>
+                        <a:bodyPr/>
+                        <a:lstStyle/>
+                        <a:p>
+                          <a:r>
+                            <a:rPr lang="en-US" sz="1200" dirty="0"/>
+                            <a:t>…</a:t>
+                          </a:r>
+                        </a:p>
+                      </a:txBody>
+                      <a:tcPr/>
+                    </a:tc>
+                    <a:extLst>
+                      <a:ext uri="{0D108BD9-81ED-4DB2-BD59-A6C34878D82A}">
+                        <a16:rowId xmlns:a16="http://schemas.microsoft.com/office/drawing/2014/main" val="868402448"/>
+                      </a:ext>
+                    </a:extLst>
+                  </a:tr>
+                </a:tbl>
+              </a:graphicData>
+            </a:graphic>
+          </p:graphicFrame>
+        </mc:Choice>
+        <mc:Fallback>
+          <p:graphicFrame>
+            <p:nvGraphicFramePr>
+              <p:cNvPr id="17" name="Table 16">
+                <a:extLst>
+                  <a:ext uri="{FF2B5EF4-FFF2-40B4-BE49-F238E27FC236}">
+                    <a16:creationId xmlns:a16="http://schemas.microsoft.com/office/drawing/2014/main" id="{CA774F2A-88BA-B1E8-30E2-DDB62E0F5EF0}"/>
+                  </a:ext>
+                  <a:ext uri="{C183D7F6-B498-43B3-948B-1728B52AA6E4}">
+                    <adec:decorative xmlns:adec="http://schemas.microsoft.com/office/drawing/2017/decorative" val="0"/>
+                  </a:ext>
+                </a:extLst>
+              </p:cNvPr>
+              <p:cNvGraphicFramePr>
+                <a:graphicFrameLocks noGrp="1"/>
+              </p:cNvGraphicFramePr>
+              <p:nvPr>
+                <p:extLst>
+                  <p:ext uri="{D42A27DB-BD31-4B8C-83A1-F6EECF244321}">
+                    <p14:modId xmlns:p14="http://schemas.microsoft.com/office/powerpoint/2010/main" val="1352679748"/>
+                  </p:ext>
+                </p:extLst>
+              </p:nvPr>
+            </p:nvGraphicFramePr>
+            <p:xfrm>
+              <a:off x="9171327" y="4994415"/>
+              <a:ext cx="1632185" cy="1082040"/>
+            </p:xfrm>
+            <a:graphic>
+              <a:graphicData uri="http://schemas.openxmlformats.org/drawingml/2006/table">
+                <a:tbl>
+                  <a:tblPr firstRow="1" bandRow="1">
+                    <a:tableStyleId>{93296810-A885-4BE3-A3E7-6D5BEEA58F35}</a:tableStyleId>
+                  </a:tblPr>
+                  <a:tblGrid>
+                    <a:gridCol w="512256">
+                      <a:extLst>
+                        <a:ext uri="{9D8B030D-6E8A-4147-A177-3AD203B41FA5}">
+                          <a16:colId xmlns:a16="http://schemas.microsoft.com/office/drawing/2014/main" val="3711460689"/>
+                        </a:ext>
+                      </a:extLst>
+                    </a:gridCol>
+                    <a:gridCol w="1119929">
+                      <a:extLst>
+                        <a:ext uri="{9D8B030D-6E8A-4147-A177-3AD203B41FA5}">
+                          <a16:colId xmlns:a16="http://schemas.microsoft.com/office/drawing/2014/main" val="2080107700"/>
+                        </a:ext>
+                      </a:extLst>
+                    </a:gridCol>
+                  </a:tblGrid>
+                  <a:tr h="274320">
+                    <a:tc>
+                      <a:txBody>
+                        <a:bodyPr/>
+                        <a:lstStyle/>
+                        <a:p>
+                          <a:endParaRPr lang="en-US"/>
+                        </a:p>
+                      </a:txBody>
+                      <a:tcPr>
+                        <a:blipFill>
+                          <a:blip r:embed="rId5"/>
+                          <a:stretch>
+                            <a:fillRect l="-1190" t="-2222" r="-225000" b="-313333"/>
+                          </a:stretch>
+                        </a:blipFill>
+                      </a:tcPr>
+                    </a:tc>
+                    <a:tc>
+                      <a:txBody>
+                        <a:bodyPr/>
+                        <a:lstStyle/>
+                        <a:p>
+                          <a:endParaRPr lang="en-US"/>
+                        </a:p>
+                      </a:txBody>
+                      <a:tcPr>
+                        <a:blipFill>
+                          <a:blip r:embed="rId5"/>
+                          <a:stretch>
+                            <a:fillRect l="-45946" t="-2222" r="-2162" b="-313333"/>
+                          </a:stretch>
+                        </a:blipFill>
+                      </a:tcPr>
+                    </a:tc>
+                    <a:extLst>
+                      <a:ext uri="{0D108BD9-81ED-4DB2-BD59-A6C34878D82A}">
+                        <a16:rowId xmlns:a16="http://schemas.microsoft.com/office/drawing/2014/main" val="2008869826"/>
+                      </a:ext>
+                    </a:extLst>
+                  </a:tr>
+                  <a:tr h="259080">
+                    <a:tc>
+                      <a:txBody>
+                        <a:bodyPr/>
+                        <a:lstStyle/>
+                        <a:p>
+                          <a:r>
+                            <a:rPr lang="en-US" sz="1100" dirty="0"/>
+                            <a:t>(1,1)</a:t>
+                          </a:r>
+                        </a:p>
+                      </a:txBody>
+                      <a:tcPr/>
+                    </a:tc>
+                    <a:tc>
+                      <a:txBody>
+                        <a:bodyPr/>
+                        <a:lstStyle/>
+                        <a:p>
+                          <a:r>
+                            <a:rPr lang="en-US" sz="1100" dirty="0"/>
+                            <a:t>up</a:t>
+                          </a:r>
+                        </a:p>
+                      </a:txBody>
+                      <a:tcPr/>
+                    </a:tc>
+                    <a:extLst>
+                      <a:ext uri="{0D108BD9-81ED-4DB2-BD59-A6C34878D82A}">
+                        <a16:rowId xmlns:a16="http://schemas.microsoft.com/office/drawing/2014/main" val="524805492"/>
+                      </a:ext>
+                    </a:extLst>
+                  </a:tr>
+                  <a:tr h="274320">
+                    <a:tc>
+                      <a:txBody>
+                        <a:bodyPr/>
+                        <a:lstStyle/>
+                        <a:p>
+                          <a:r>
+                            <a:rPr lang="en-US" sz="1200" dirty="0"/>
+                            <a:t>…</a:t>
+                          </a:r>
+                        </a:p>
+                      </a:txBody>
+                      <a:tcPr/>
+                    </a:tc>
+                    <a:tc>
+                      <a:txBody>
+                        <a:bodyPr/>
+                        <a:lstStyle/>
+                        <a:p>
+                          <a:r>
+                            <a:rPr lang="en-US" sz="1200" dirty="0"/>
+                            <a:t>…</a:t>
+                          </a:r>
+                        </a:p>
+                      </a:txBody>
+                      <a:tcPr/>
+                    </a:tc>
+                    <a:extLst>
+                      <a:ext uri="{0D108BD9-81ED-4DB2-BD59-A6C34878D82A}">
+                        <a16:rowId xmlns:a16="http://schemas.microsoft.com/office/drawing/2014/main" val="3725035416"/>
+                      </a:ext>
+                    </a:extLst>
+                  </a:tr>
+                  <a:tr h="274320">
+                    <a:tc>
+                      <a:txBody>
+                        <a:bodyPr/>
+                        <a:lstStyle/>
+                        <a:p>
+                          <a:r>
+                            <a:rPr lang="en-US" sz="1200" dirty="0"/>
+                            <a:t>…</a:t>
+                          </a:r>
+                        </a:p>
+                      </a:txBody>
+                      <a:tcPr/>
+                    </a:tc>
+                    <a:tc>
+                      <a:txBody>
+                        <a:bodyPr/>
+                        <a:lstStyle/>
+                        <a:p>
+                          <a:r>
+                            <a:rPr lang="en-US" sz="1200" dirty="0"/>
+                            <a:t>…</a:t>
+                          </a:r>
+                        </a:p>
+                      </a:txBody>
+                      <a:tcPr/>
+                    </a:tc>
+                    <a:extLst>
+                      <a:ext uri="{0D108BD9-81ED-4DB2-BD59-A6C34878D82A}">
+                        <a16:rowId xmlns:a16="http://schemas.microsoft.com/office/drawing/2014/main" val="868402448"/>
+                      </a:ext>
+                    </a:extLst>
+                  </a:tr>
+                </a:tbl>
+              </a:graphicData>
+            </a:graphic>
+          </p:graphicFrame>
+        </mc:Fallback>
+      </mc:AlternateContent>
     </p:spTree>
     <p:extLst>
       <p:ext uri="{BB962C8B-B14F-4D97-AF65-F5344CB8AC3E}">
@@ -30741,289 +29960,6 @@
   <p:clrMapOvr>
     <a:masterClrMapping/>
   </p:clrMapOvr>
-  <p:timing>
-    <p:tnLst>
-      <p:par>
-        <p:cTn id="1" dur="indefinite" restart="never" nodeType="tmRoot">
-          <p:childTnLst>
-            <p:seq concurrent="1" nextAc="seek">
-              <p:cTn id="2" dur="indefinite" nodeType="mainSeq">
-                <p:childTnLst>
-                  <p:par>
-                    <p:cTn id="3" fill="hold">
-                      <p:stCondLst>
-                        <p:cond delay="indefinite"/>
-                      </p:stCondLst>
-                      <p:childTnLst>
-                        <p:par>
-                          <p:cTn id="4" fill="hold">
-                            <p:stCondLst>
-                              <p:cond delay="0"/>
-                            </p:stCondLst>
-                            <p:childTnLst>
-                              <p:par>
-                                <p:cTn id="5" presetID="1" presetClass="entr" presetSubtype="0" fill="hold" nodeType="clickEffect">
-                                  <p:stCondLst>
-                                    <p:cond delay="0"/>
-                                  </p:stCondLst>
-                                  <p:childTnLst>
-                                    <p:set>
-                                      <p:cBhvr>
-                                        <p:cTn id="6" dur="1" fill="hold">
-                                          <p:stCondLst>
-                                            <p:cond delay="0"/>
-                                          </p:stCondLst>
-                                        </p:cTn>
-                                        <p:tgtEl>
-                                          <p:spTgt spid="3">
-                                            <p:txEl>
-                                              <p:pRg st="4" end="4"/>
-                                            </p:txEl>
-                                          </p:spTgt>
-                                        </p:tgtEl>
-                                        <p:attrNameLst>
-                                          <p:attrName>style.visibility</p:attrName>
-                                        </p:attrNameLst>
-                                      </p:cBhvr>
-                                      <p:to>
-                                        <p:strVal val="visible"/>
-                                      </p:to>
-                                    </p:set>
-                                  </p:childTnLst>
-                                </p:cTn>
-                              </p:par>
-                            </p:childTnLst>
-                          </p:cTn>
-                        </p:par>
-                      </p:childTnLst>
-                    </p:cTn>
-                  </p:par>
-                  <p:par>
-                    <p:cTn id="7" fill="hold">
-                      <p:stCondLst>
-                        <p:cond delay="indefinite"/>
-                      </p:stCondLst>
-                      <p:childTnLst>
-                        <p:par>
-                          <p:cTn id="8" fill="hold">
-                            <p:stCondLst>
-                              <p:cond delay="0"/>
-                            </p:stCondLst>
-                            <p:childTnLst>
-                              <p:par>
-                                <p:cTn id="9" presetID="1" presetClass="entr" presetSubtype="0" fill="hold" nodeType="clickEffect">
-                                  <p:stCondLst>
-                                    <p:cond delay="0"/>
-                                  </p:stCondLst>
-                                  <p:childTnLst>
-                                    <p:set>
-                                      <p:cBhvr>
-                                        <p:cTn id="10" dur="1" fill="hold">
-                                          <p:stCondLst>
-                                            <p:cond delay="0"/>
-                                          </p:stCondLst>
-                                        </p:cTn>
-                                        <p:tgtEl>
-                                          <p:spTgt spid="3">
-                                            <p:txEl>
-                                              <p:pRg st="5" end="5"/>
-                                            </p:txEl>
-                                          </p:spTgt>
-                                        </p:tgtEl>
-                                        <p:attrNameLst>
-                                          <p:attrName>style.visibility</p:attrName>
-                                        </p:attrNameLst>
-                                      </p:cBhvr>
-                                      <p:to>
-                                        <p:strVal val="visible"/>
-                                      </p:to>
-                                    </p:set>
-                                  </p:childTnLst>
-                                </p:cTn>
-                              </p:par>
-                              <p:par>
-                                <p:cTn id="11" presetID="1" presetClass="entr" presetSubtype="0" fill="hold" nodeType="withEffect">
-                                  <p:stCondLst>
-                                    <p:cond delay="0"/>
-                                  </p:stCondLst>
-                                  <p:childTnLst>
-                                    <p:set>
-                                      <p:cBhvr>
-                                        <p:cTn id="12" dur="1" fill="hold">
-                                          <p:stCondLst>
-                                            <p:cond delay="0"/>
-                                          </p:stCondLst>
-                                        </p:cTn>
-                                        <p:tgtEl>
-                                          <p:spTgt spid="3">
-                                            <p:txEl>
-                                              <p:pRg st="6" end="6"/>
-                                            </p:txEl>
-                                          </p:spTgt>
-                                        </p:tgtEl>
-                                        <p:attrNameLst>
-                                          <p:attrName>style.visibility</p:attrName>
-                                        </p:attrNameLst>
-                                      </p:cBhvr>
-                                      <p:to>
-                                        <p:strVal val="visible"/>
-                                      </p:to>
-                                    </p:set>
-                                  </p:childTnLst>
-                                </p:cTn>
-                              </p:par>
-                              <p:par>
-                                <p:cTn id="13" presetID="1" presetClass="entr" presetSubtype="0" fill="hold" nodeType="withEffect">
-                                  <p:stCondLst>
-                                    <p:cond delay="0"/>
-                                  </p:stCondLst>
-                                  <p:childTnLst>
-                                    <p:set>
-                                      <p:cBhvr>
-                                        <p:cTn id="14" dur="1" fill="hold">
-                                          <p:stCondLst>
-                                            <p:cond delay="0"/>
-                                          </p:stCondLst>
-                                        </p:cTn>
-                                        <p:tgtEl>
-                                          <p:spTgt spid="3">
-                                            <p:txEl>
-                                              <p:pRg st="7" end="7"/>
-                                            </p:txEl>
-                                          </p:spTgt>
-                                        </p:tgtEl>
-                                        <p:attrNameLst>
-                                          <p:attrName>style.visibility</p:attrName>
-                                        </p:attrNameLst>
-                                      </p:cBhvr>
-                                      <p:to>
-                                        <p:strVal val="visible"/>
-                                      </p:to>
-                                    </p:set>
-                                  </p:childTnLst>
-                                </p:cTn>
-                              </p:par>
-                              <p:par>
-                                <p:cTn id="15" presetID="1" presetClass="entr" presetSubtype="0" fill="hold" nodeType="withEffect">
-                                  <p:stCondLst>
-                                    <p:cond delay="0"/>
-                                  </p:stCondLst>
-                                  <p:childTnLst>
-                                    <p:set>
-                                      <p:cBhvr>
-                                        <p:cTn id="16" dur="1" fill="hold">
-                                          <p:stCondLst>
-                                            <p:cond delay="0"/>
-                                          </p:stCondLst>
-                                        </p:cTn>
-                                        <p:tgtEl>
-                                          <p:spTgt spid="3">
-                                            <p:txEl>
-                                              <p:pRg st="8" end="8"/>
-                                            </p:txEl>
-                                          </p:spTgt>
-                                        </p:tgtEl>
-                                        <p:attrNameLst>
-                                          <p:attrName>style.visibility</p:attrName>
-                                        </p:attrNameLst>
-                                      </p:cBhvr>
-                                      <p:to>
-                                        <p:strVal val="visible"/>
-                                      </p:to>
-                                    </p:set>
-                                  </p:childTnLst>
-                                </p:cTn>
-                              </p:par>
-                              <p:par>
-                                <p:cTn id="17" presetID="1" presetClass="entr" presetSubtype="0" fill="hold" nodeType="withEffect">
-                                  <p:stCondLst>
-                                    <p:cond delay="0"/>
-                                  </p:stCondLst>
-                                  <p:childTnLst>
-                                    <p:set>
-                                      <p:cBhvr>
-                                        <p:cTn id="18" dur="1" fill="hold">
-                                          <p:stCondLst>
-                                            <p:cond delay="0"/>
-                                          </p:stCondLst>
-                                        </p:cTn>
-                                        <p:tgtEl>
-                                          <p:spTgt spid="3">
-                                            <p:txEl>
-                                              <p:pRg st="9" end="9"/>
-                                            </p:txEl>
-                                          </p:spTgt>
-                                        </p:tgtEl>
-                                        <p:attrNameLst>
-                                          <p:attrName>style.visibility</p:attrName>
-                                        </p:attrNameLst>
-                                      </p:cBhvr>
-                                      <p:to>
-                                        <p:strVal val="visible"/>
-                                      </p:to>
-                                    </p:set>
-                                  </p:childTnLst>
-                                </p:cTn>
-                              </p:par>
-                              <p:par>
-                                <p:cTn id="19" presetID="1" presetClass="entr" presetSubtype="0" fill="hold" nodeType="withEffect">
-                                  <p:stCondLst>
-                                    <p:cond delay="0"/>
-                                  </p:stCondLst>
-                                  <p:childTnLst>
-                                    <p:set>
-                                      <p:cBhvr>
-                                        <p:cTn id="20" dur="1" fill="hold">
-                                          <p:stCondLst>
-                                            <p:cond delay="0"/>
-                                          </p:stCondLst>
-                                        </p:cTn>
-                                        <p:tgtEl>
-                                          <p:spTgt spid="3">
-                                            <p:txEl>
-                                              <p:pRg st="11" end="11"/>
-                                            </p:txEl>
-                                          </p:spTgt>
-                                        </p:tgtEl>
-                                        <p:attrNameLst>
-                                          <p:attrName>style.visibility</p:attrName>
-                                        </p:attrNameLst>
-                                      </p:cBhvr>
-                                      <p:to>
-                                        <p:strVal val="visible"/>
-                                      </p:to>
-                                    </p:set>
-                                  </p:childTnLst>
-                                </p:cTn>
-                              </p:par>
-                            </p:childTnLst>
-                          </p:cTn>
-                        </p:par>
-                      </p:childTnLst>
-                    </p:cTn>
-                  </p:par>
-                </p:childTnLst>
-              </p:cTn>
-              <p:prevCondLst>
-                <p:cond evt="onPrev" delay="0">
-                  <p:tgtEl>
-                    <p:sldTgt/>
-                  </p:tgtEl>
-                </p:cond>
-              </p:prevCondLst>
-              <p:nextCondLst>
-                <p:cond evt="onNext" delay="0">
-                  <p:tgtEl>
-                    <p:sldTgt/>
-                  </p:tgtEl>
-                </p:cond>
-              </p:nextCondLst>
-            </p:seq>
-          </p:childTnLst>
-        </p:cTn>
-      </p:par>
-    </p:tnLst>
-  </p:timing>
 </p:sld>
 </file>
 
@@ -31357,8 +30293,8 @@
           </p:sp>
         </mc:Fallback>
       </mc:AlternateContent>
-      <mc:AlternateContent xmlns:mc="http://schemas.openxmlformats.org/markup-compatibility/2006" xmlns:a14="http://schemas.microsoft.com/office/drawing/2010/main">
-        <mc:Choice Requires="a14">
+      <mc:AlternateContent xmlns:mc="http://schemas.openxmlformats.org/markup-compatibility/2006">
+        <mc:Choice xmlns:a14="http://schemas.microsoft.com/office/drawing/2010/main" Requires="a14">
           <p:sp>
             <p:nvSpPr>
               <p:cNvPr id="3" name="Content Placeholder 2">
@@ -31477,10 +30413,7 @@
                 </a:pPr>
                 <a14:m>
                   <m:oMathPara xmlns:m="http://schemas.openxmlformats.org/officeDocument/2006/math">
-                    <m:oMathParaPr>
-                      <m:jc m:val="centerGroup"/>
-                    </m:oMathParaPr>
-                    <m:oMath xmlns:m="http://schemas.openxmlformats.org/officeDocument/2006/math">
+                    <m:oMath>
                       <m:sSub>
                         <m:sSubPr>
                           <m:ctrlPr>
@@ -31652,11 +30585,11 @@
                         <m:t>]</m:t>
                       </m:r>
                     </m:oMath>
-                    <m:oMath xmlns:m="http://schemas.openxmlformats.org/officeDocument/2006/math">
+                    <m:oMath>
                       <m:sSub>
                         <m:sSubPr>
                           <m:ctrlPr>
-                            <a:rPr lang="en-US" i="1" smtClean="0">
+                            <a:rPr lang="en-US" i="1">
                               <a:latin typeface="Cambria Math" panose="02040503050406030204" pitchFamily="18" charset="0"/>
                               <a:ea typeface="Cambria Math" panose="02040503050406030204" pitchFamily="18" charset="0"/>
                             </a:rPr>
@@ -31839,7 +30772,7 @@
                         <m:t>]</m:t>
                       </m:r>
                     </m:oMath>
-                    <m:oMath xmlns:m="http://schemas.openxmlformats.org/officeDocument/2006/math">
+                    <m:oMath>
                       <m:sSub>
                         <m:sSubPr>
                           <m:ctrlPr>
@@ -32066,7 +30999,7 @@
                         <m:t>]</m:t>
                       </m:r>
                     </m:oMath>
-                    <m:oMath xmlns:m="http://schemas.openxmlformats.org/officeDocument/2006/math">
+                    <m:oMath>
                       <m:r>
                         <m:rPr>
                           <m:aln/>
@@ -32379,6 +31312,7 @@
                         <m:ctrlPr>
                           <a:rPr lang="en-US" i="1" smtClean="0">
                             <a:latin typeface="Cambria Math" panose="02040503050406030204" pitchFamily="18" charset="0"/>
+                            <a:ea typeface="Cambria Math" panose="02040503050406030204" pitchFamily="18" charset="0"/>
                           </a:rPr>
                         </m:ctrlPr>
                       </m:dPr>
@@ -32412,9 +31346,6 @@
                   <a:rPr lang="en-US" dirty="0"/>
                   <a:t>.</a:t>
                 </a:r>
-              </a:p>
-              <a:p>
-                <a:endParaRPr lang="en-US" b="1" dirty="0"/>
               </a:p>
               <a:p>
                 <a:pPr marL="0" indent="0">
@@ -32631,10 +31562,144 @@
                   <a:t> is the time step.  I.e. , value depends on how close we are to the end of the episode.</a:t>
                 </a:r>
               </a:p>
+              <a:p>
+                <a:pPr lvl="1"/>
+                <a:endParaRPr lang="en-US" dirty="0"/>
+              </a:p>
+              <a:p>
+                <a:pPr marL="0" indent="0">
+                  <a:buNone/>
+                </a:pPr>
+                <a:r>
+                  <a:rPr lang="en-US" b="1" dirty="0"/>
+                  <a:t>Issue</a:t>
+                </a:r>
+                <a:r>
+                  <a:rPr lang="en-US" dirty="0"/>
+                  <a:t>: Recursive relationship between </a:t>
+                </a:r>
+                <a14:m>
+                  <m:oMath xmlns:m="http://schemas.openxmlformats.org/officeDocument/2006/math">
+                    <m:sSub>
+                      <m:sSubPr>
+                        <m:ctrlPr>
+                          <a:rPr lang="en-US" b="0" i="1" smtClean="0">
+                            <a:latin typeface="Cambria Math" panose="02040503050406030204" pitchFamily="18" charset="0"/>
+                          </a:rPr>
+                        </m:ctrlPr>
+                      </m:sSubPr>
+                      <m:e>
+                        <m:r>
+                          <a:rPr lang="en-US" b="0" i="1" smtClean="0">
+                            <a:latin typeface="Cambria Math" panose="02040503050406030204" pitchFamily="18" charset="0"/>
+                          </a:rPr>
+                          <m:t>𝑣</m:t>
+                        </m:r>
+                      </m:e>
+                      <m:sub>
+                        <m:r>
+                          <a:rPr lang="en-US" b="0" i="1" smtClean="0">
+                            <a:latin typeface="Cambria Math" panose="02040503050406030204" pitchFamily="18" charset="0"/>
+                          </a:rPr>
+                          <m:t>𝜋</m:t>
+                        </m:r>
+                      </m:sub>
+                    </m:sSub>
+                    <m:r>
+                      <a:rPr lang="en-US" b="0" i="1" smtClean="0">
+                        <a:latin typeface="Cambria Math" panose="02040503050406030204" pitchFamily="18" charset="0"/>
+                      </a:rPr>
+                      <m:t>(</m:t>
+                    </m:r>
+                    <m:r>
+                      <a:rPr lang="en-US" b="0" i="1" smtClean="0">
+                        <a:latin typeface="Cambria Math" panose="02040503050406030204" pitchFamily="18" charset="0"/>
+                      </a:rPr>
+                      <m:t>𝑠</m:t>
+                    </m:r>
+                    <m:r>
+                      <a:rPr lang="en-US" b="0" i="1" smtClean="0">
+                        <a:latin typeface="Cambria Math" panose="02040503050406030204" pitchFamily="18" charset="0"/>
+                      </a:rPr>
+                      <m:t>)</m:t>
+                    </m:r>
+                  </m:oMath>
+                </a14:m>
+                <a:r>
+                  <a:rPr lang="en-US" dirty="0"/>
+                  <a:t> and </a:t>
+                </a:r>
+                <a14:m>
+                  <m:oMath xmlns:m="http://schemas.openxmlformats.org/officeDocument/2006/math">
+                    <m:sSub>
+                      <m:sSubPr>
+                        <m:ctrlPr>
+                          <a:rPr lang="en-US" b="0" i="1" smtClean="0">
+                            <a:latin typeface="Cambria Math" panose="02040503050406030204" pitchFamily="18" charset="0"/>
+                          </a:rPr>
+                        </m:ctrlPr>
+                      </m:sSubPr>
+                      <m:e>
+                        <m:r>
+                          <a:rPr lang="en-US" b="0" i="1" smtClean="0">
+                            <a:latin typeface="Cambria Math" panose="02040503050406030204" pitchFamily="18" charset="0"/>
+                          </a:rPr>
+                          <m:t>𝑣</m:t>
+                        </m:r>
+                      </m:e>
+                      <m:sub>
+                        <m:r>
+                          <a:rPr lang="en-US" b="0" i="1" smtClean="0">
+                            <a:latin typeface="Cambria Math" panose="02040503050406030204" pitchFamily="18" charset="0"/>
+                          </a:rPr>
+                          <m:t>𝜋</m:t>
+                        </m:r>
+                      </m:sub>
+                    </m:sSub>
+                    <m:d>
+                      <m:dPr>
+                        <m:ctrlPr>
+                          <a:rPr lang="en-US" b="0" i="1" smtClean="0">
+                            <a:latin typeface="Cambria Math" panose="02040503050406030204" pitchFamily="18" charset="0"/>
+                          </a:rPr>
+                        </m:ctrlPr>
+                      </m:dPr>
+                      <m:e>
+                        <m:sSup>
+                          <m:sSupPr>
+                            <m:ctrlPr>
+                              <a:rPr lang="en-US" b="0" i="1" smtClean="0">
+                                <a:latin typeface="Cambria Math" panose="02040503050406030204" pitchFamily="18" charset="0"/>
+                              </a:rPr>
+                            </m:ctrlPr>
+                          </m:sSupPr>
+                          <m:e>
+                            <m:r>
+                              <a:rPr lang="en-US" b="0" i="1" smtClean="0">
+                                <a:latin typeface="Cambria Math" panose="02040503050406030204" pitchFamily="18" charset="0"/>
+                              </a:rPr>
+                              <m:t>𝑠</m:t>
+                            </m:r>
+                          </m:e>
+                          <m:sup>
+                            <m:r>
+                              <a:rPr lang="en-US" b="0" i="1" smtClean="0">
+                                <a:latin typeface="Cambria Math" panose="02040503050406030204" pitchFamily="18" charset="0"/>
+                              </a:rPr>
+                              <m:t>′</m:t>
+                            </m:r>
+                          </m:sup>
+                        </m:sSup>
+                      </m:e>
+                    </m:d>
+                  </m:oMath>
+                </a14:m>
+                <a:endParaRPr lang="en-US" dirty="0"/>
+              </a:p>
             </p:txBody>
           </p:sp>
         </mc:Choice>
-        <mc:Fallback xmlns="">
+        <mc:Fallback>
           <p:sp>
             <p:nvSpPr>
               <p:cNvPr id="3" name="Content Placeholder 2">
@@ -32659,7 +31724,7 @@
               <a:blipFill>
                 <a:blip r:embed="rId3"/>
                 <a:stretch>
-                  <a:fillRect l="-522" t="-1901"/>
+                  <a:fillRect l="-522" t="-1901" b="-887"/>
                 </a:stretch>
               </a:blipFill>
             </p:spPr>
@@ -32782,6 +31847,7 @@
                         <m:ctrlPr>
                           <a:rPr lang="en-US" sz="2400" i="1" smtClean="0">
                             <a:latin typeface="Cambria Math" panose="02040503050406030204" pitchFamily="18" charset="0"/>
+                            <a:ea typeface="Cambria Math" panose="02040503050406030204" pitchFamily="18" charset="0"/>
                           </a:rPr>
                         </m:ctrlPr>
                       </m:dPr>
@@ -32812,10 +31878,7 @@
                 </a:pPr>
                 <a14:m>
                   <m:oMathPara xmlns:m="http://schemas.openxmlformats.org/officeDocument/2006/math">
-                    <m:oMathParaPr>
-                      <m:jc m:val="centerGroup"/>
-                    </m:oMathParaPr>
-                    <m:oMath xmlns:m="http://schemas.openxmlformats.org/officeDocument/2006/math">
+                    <m:oMath>
                       <m:sSub>
                         <m:sSubPr>
                           <m:ctrlPr>
@@ -32844,7 +31907,7 @@
                       <m:d>
                         <m:dPr>
                           <m:ctrlPr>
-                            <a:rPr lang="en-US" sz="2400" i="1">
+                            <a:rPr lang="en-US" sz="2400" b="0" i="1" smtClean="0">
                               <a:latin typeface="Cambria Math" panose="02040503050406030204" pitchFamily="18" charset="0"/>
                             </a:rPr>
                           </m:ctrlPr>
@@ -32853,7 +31916,7 @@
                           <m:sSub>
                             <m:sSubPr>
                               <m:ctrlPr>
-                                <a:rPr lang="en-US" sz="2400" b="0" i="1" smtClean="0">
+                                <a:rPr lang="en-US" sz="2400" i="1">
                                   <a:latin typeface="Cambria Math" panose="02040503050406030204" pitchFamily="18" charset="0"/>
                                 </a:rPr>
                               </m:ctrlPr>
@@ -32933,7 +31996,7 @@
                           <m:sSub>
                             <m:sSubPr>
                               <m:ctrlPr>
-                                <a:rPr lang="en-US" sz="2400" b="0" i="1" smtClean="0">
+                                <a:rPr lang="en-US" sz="2400" i="1">
                                   <a:latin typeface="Cambria Math" panose="02040503050406030204" pitchFamily="18" charset="0"/>
                                 </a:rPr>
                               </m:ctrlPr>
@@ -33078,7 +32141,7 @@
                           <m:sSub>
                             <m:sSubPr>
                               <m:ctrlPr>
-                                <a:rPr lang="en-US" sz="2400" b="0" i="1" smtClean="0">
+                                <a:rPr lang="en-US" sz="2400" i="1">
                                   <a:latin typeface="Cambria Math" panose="02040503050406030204" pitchFamily="18" charset="0"/>
                                 </a:rPr>
                               </m:ctrlPr>
@@ -33216,10 +32279,7 @@
                 </a:pPr>
                 <a14:m>
                   <m:oMathPara xmlns:m="http://schemas.openxmlformats.org/officeDocument/2006/math">
-                    <m:oMathParaPr>
-                      <m:jc m:val="centerGroup"/>
-                    </m:oMathParaPr>
-                    <m:oMath xmlns:m="http://schemas.openxmlformats.org/officeDocument/2006/math">
+                    <m:oMath>
                       <m:sSub>
                         <m:sSubPr>
                           <m:ctrlPr>
@@ -33626,10 +32686,7 @@
                 </a:pPr>
                 <a14:m>
                   <m:oMathPara xmlns:m="http://schemas.openxmlformats.org/officeDocument/2006/math">
-                    <m:oMathParaPr>
-                      <m:jc m:val="centerGroup"/>
-                    </m:oMathParaPr>
-                    <m:oMath xmlns:m="http://schemas.openxmlformats.org/officeDocument/2006/math">
+                    <m:oMath>
                       <m:r>
                         <a:rPr lang="en-US" sz="2400" b="0" i="1" smtClean="0">
                           <a:latin typeface="Cambria Math" panose="02040503050406030204" pitchFamily="18" charset="0"/>
@@ -33643,34 +32700,7 @@
                         <a:rPr lang="en-US" sz="2400" b="0" i="0" smtClean="0">
                           <a:latin typeface="Cambria Math" panose="02040503050406030204" pitchFamily="18" charset="0"/>
                         </a:rPr>
-                        <m:t>for</m:t>
-                      </m:r>
-                      <m:r>
-                        <m:rPr>
-                          <m:nor/>
-                        </m:rPr>
-                        <a:rPr lang="en-US" sz="2400" b="0" i="0" smtClean="0">
-                          <a:latin typeface="Cambria Math" panose="02040503050406030204" pitchFamily="18" charset="0"/>
-                        </a:rPr>
-                        <m:t> </m:t>
-                      </m:r>
-                      <m:r>
-                        <m:rPr>
-                          <m:nor/>
-                        </m:rPr>
-                        <a:rPr lang="en-US" sz="2400" b="0" i="0" smtClean="0">
-                          <a:latin typeface="Cambria Math" panose="02040503050406030204" pitchFamily="18" charset="0"/>
-                        </a:rPr>
-                        <m:t>all</m:t>
-                      </m:r>
-                      <m:r>
-                        <m:rPr>
-                          <m:nor/>
-                        </m:rPr>
-                        <a:rPr lang="en-US" sz="2400" b="0" i="0" smtClean="0">
-                          <a:latin typeface="Cambria Math" panose="02040503050406030204" pitchFamily="18" charset="0"/>
-                        </a:rPr>
-                        <m:t> </m:t>
+                        <m:t>for all </m:t>
                       </m:r>
                       <m:r>
                         <a:rPr lang="en-US" sz="2400" b="0" i="1" smtClean="0">
@@ -33725,7 +32755,7 @@
                         <m:limLow>
                           <m:limLowPr>
                             <m:ctrlPr>
-                              <a:rPr lang="en-US" sz="2300" i="1" smtClean="0">
+                              <a:rPr lang="en-US" sz="2300" i="0" smtClean="0">
                                 <a:latin typeface="Cambria Math" panose="02040503050406030204" pitchFamily="18" charset="0"/>
                               </a:rPr>
                             </m:ctrlPr>
@@ -33757,7 +32787,7 @@
                             <m:chr m:val="∑"/>
                             <m:supHide m:val="on"/>
                             <m:ctrlPr>
-                              <a:rPr lang="en-US" sz="2300" i="1" smtClean="0">
+                              <a:rPr lang="en-US" sz="2300" b="0" i="1" smtClean="0">
                                 <a:latin typeface="Cambria Math" panose="02040503050406030204" pitchFamily="18" charset="0"/>
                               </a:rPr>
                             </m:ctrlPr>
@@ -34115,10 +33145,7 @@
                 </a:pPr>
                 <a14:m>
                   <m:oMathPara xmlns:m="http://schemas.openxmlformats.org/officeDocument/2006/math">
-                    <m:oMathParaPr>
-                      <m:jc m:val="centerGroup"/>
-                    </m:oMathParaPr>
-                    <m:oMath xmlns:m="http://schemas.openxmlformats.org/officeDocument/2006/math">
+                    <m:oMath>
                       <m:r>
                         <a:rPr lang="en-US" sz="2400" i="1">
                           <a:latin typeface="Cambria Math" panose="02040503050406030204" pitchFamily="18" charset="0"/>

--- a/slides/Lecture_Chapter04.pptx
+++ b/slides/Lecture_Chapter04.pptx
@@ -193,6 +193,1241 @@
 </p:presentation>
 </file>
 
+<file path=ppt/charts/chart1.xml><?xml version="1.0" encoding="utf-8"?>
+<c:chartSpace xmlns:c="http://schemas.openxmlformats.org/drawingml/2006/chart" xmlns:a="http://schemas.openxmlformats.org/drawingml/2006/main" xmlns:r="http://schemas.openxmlformats.org/officeDocument/2006/relationships" xmlns:c16r2="http://schemas.microsoft.com/office/drawing/2015/06/chart">
+  <c:date1904 val="0"/>
+  <c:lang val="en-US"/>
+  <c:roundedCorners val="0"/>
+  <mc:AlternateContent xmlns:mc="http://schemas.openxmlformats.org/markup-compatibility/2006">
+    <mc:Choice xmlns:c14="http://schemas.microsoft.com/office/drawing/2007/8/2/chart" Requires="c14">
+      <c14:style val="102"/>
+    </mc:Choice>
+    <mc:Fallback>
+      <c:style val="2"/>
+    </mc:Fallback>
+  </mc:AlternateContent>
+  <c:chart>
+    <c:title>
+      <c:tx>
+        <c:rich>
+          <a:bodyPr rot="0" spcFirstLastPara="1" vertOverflow="ellipsis" vert="horz" wrap="square" anchor="ctr" anchorCtr="1"/>
+          <a:lstStyle/>
+          <a:p>
+            <a:pPr>
+              <a:defRPr sz="1400" b="0" i="0" u="none" strike="noStrike" kern="1200" spc="0" baseline="0">
+                <a:solidFill>
+                  <a:schemeClr val="tx1">
+                    <a:lumMod val="65000"/>
+                    <a:lumOff val="35000"/>
+                  </a:schemeClr>
+                </a:solidFill>
+                <a:latin typeface="+mn-lt"/>
+                <a:ea typeface="+mn-ea"/>
+                <a:cs typeface="+mn-cs"/>
+              </a:defRPr>
+            </a:pPr>
+            <a:r>
+              <a:rPr lang="en-US"/>
+              <a:t>LP</a:t>
+            </a:r>
+            <a:r>
+              <a:rPr lang="en-US" baseline="0"/>
+              <a:t> for 2-State MDP</a:t>
+            </a:r>
+            <a:endParaRPr lang="en-US"/>
+          </a:p>
+        </c:rich>
+      </c:tx>
+      <c:overlay val="0"/>
+      <c:spPr>
+        <a:noFill/>
+        <a:ln>
+          <a:noFill/>
+        </a:ln>
+        <a:effectLst/>
+      </c:spPr>
+      <c:txPr>
+        <a:bodyPr rot="0" spcFirstLastPara="1" vertOverflow="ellipsis" vert="horz" wrap="square" anchor="ctr" anchorCtr="1"/>
+        <a:lstStyle/>
+        <a:p>
+          <a:pPr>
+            <a:defRPr sz="1400" b="0" i="0" u="none" strike="noStrike" kern="1200" spc="0" baseline="0">
+              <a:solidFill>
+                <a:schemeClr val="tx1">
+                  <a:lumMod val="65000"/>
+                  <a:lumOff val="35000"/>
+                </a:schemeClr>
+              </a:solidFill>
+              <a:latin typeface="+mn-lt"/>
+              <a:ea typeface="+mn-ea"/>
+              <a:cs typeface="+mn-cs"/>
+            </a:defRPr>
+          </a:pPr>
+          <a:endParaRPr lang="en-US"/>
+        </a:p>
+      </c:txPr>
+    </c:title>
+    <c:autoTitleDeleted val="0"/>
+    <c:plotArea>
+      <c:layout/>
+      <c:lineChart>
+        <c:grouping val="standard"/>
+        <c:varyColors val="0"/>
+        <c:ser>
+          <c:idx val="0"/>
+          <c:order val="0"/>
+          <c:tx>
+            <c:strRef>
+              <c:f>'LP Policy Evaluation'!$F$6</c:f>
+              <c:strCache>
+                <c:ptCount val="1"/>
+                <c:pt idx="0">
+                  <c:v>Constraint V(s1)</c:v>
+                </c:pt>
+              </c:strCache>
+            </c:strRef>
+          </c:tx>
+          <c:spPr>
+            <a:ln w="28575" cap="rnd">
+              <a:solidFill>
+                <a:schemeClr val="accent1"/>
+              </a:solidFill>
+              <a:round/>
+            </a:ln>
+            <a:effectLst/>
+          </c:spPr>
+          <c:marker>
+            <c:symbol val="none"/>
+          </c:marker>
+          <c:cat>
+            <c:numRef>
+              <c:f>'LP Policy Evaluation'!$E$7:$E$22</c:f>
+              <c:numCache>
+                <c:formatCode>0.0</c:formatCode>
+                <c:ptCount val="16"/>
+                <c:pt idx="0">
+                  <c:v>10</c:v>
+                </c:pt>
+                <c:pt idx="1">
+                  <c:v>11</c:v>
+                </c:pt>
+                <c:pt idx="2">
+                  <c:v>12</c:v>
+                </c:pt>
+                <c:pt idx="3">
+                  <c:v>13</c:v>
+                </c:pt>
+                <c:pt idx="4">
+                  <c:v>14</c:v>
+                </c:pt>
+                <c:pt idx="5">
+                  <c:v>15</c:v>
+                </c:pt>
+                <c:pt idx="6">
+                  <c:v>16</c:v>
+                </c:pt>
+                <c:pt idx="7">
+                  <c:v>17</c:v>
+                </c:pt>
+                <c:pt idx="8">
+                  <c:v>18</c:v>
+                </c:pt>
+                <c:pt idx="9">
+                  <c:v>19</c:v>
+                </c:pt>
+                <c:pt idx="10">
+                  <c:v>20</c:v>
+                </c:pt>
+                <c:pt idx="11">
+                  <c:v>21</c:v>
+                </c:pt>
+                <c:pt idx="12">
+                  <c:v>22</c:v>
+                </c:pt>
+                <c:pt idx="13">
+                  <c:v>23</c:v>
+                </c:pt>
+                <c:pt idx="14">
+                  <c:v>24</c:v>
+                </c:pt>
+                <c:pt idx="15">
+                  <c:v>25</c:v>
+                </c:pt>
+              </c:numCache>
+            </c:numRef>
+          </c:cat>
+          <c:val>
+            <c:numRef>
+              <c:f>'LP Policy Evaluation'!$F$7:$F$22</c:f>
+              <c:numCache>
+                <c:formatCode>0.00</c:formatCode>
+                <c:ptCount val="16"/>
+                <c:pt idx="0">
+                  <c:v>10</c:v>
+                </c:pt>
+                <c:pt idx="1">
+                  <c:v>11.222222222222223</c:v>
+                </c:pt>
+                <c:pt idx="2">
+                  <c:v>12.444444444444445</c:v>
+                </c:pt>
+                <c:pt idx="3">
+                  <c:v>13.666666666666668</c:v>
+                </c:pt>
+                <c:pt idx="4">
+                  <c:v>14.888888888888891</c:v>
+                </c:pt>
+                <c:pt idx="5">
+                  <c:v>16.111111111111111</c:v>
+                </c:pt>
+                <c:pt idx="6">
+                  <c:v>17.333333333333336</c:v>
+                </c:pt>
+                <c:pt idx="7">
+                  <c:v>18.555555555555557</c:v>
+                </c:pt>
+                <c:pt idx="8">
+                  <c:v>19.777777777777779</c:v>
+                </c:pt>
+                <c:pt idx="9">
+                  <c:v>21.000000000000004</c:v>
+                </c:pt>
+                <c:pt idx="10">
+                  <c:v>22.222222222222221</c:v>
+                </c:pt>
+                <c:pt idx="11">
+                  <c:v>23.444444444444446</c:v>
+                </c:pt>
+                <c:pt idx="12">
+                  <c:v>24.666666666666668</c:v>
+                </c:pt>
+                <c:pt idx="13">
+                  <c:v>25.888888888888889</c:v>
+                </c:pt>
+                <c:pt idx="14">
+                  <c:v>27.111111111111114</c:v>
+                </c:pt>
+                <c:pt idx="15">
+                  <c:v>28.333333333333336</c:v>
+                </c:pt>
+              </c:numCache>
+            </c:numRef>
+          </c:val>
+          <c:smooth val="0"/>
+          <c:extLst>
+            <c:ext xmlns:c16="http://schemas.microsoft.com/office/drawing/2014/chart" uri="{C3380CC4-5D6E-409C-BE32-E72D297353CC}">
+              <c16:uniqueId val="{00000000-F007-4291-B431-AD94702AE9CD}"/>
+            </c:ext>
+          </c:extLst>
+        </c:ser>
+        <c:ser>
+          <c:idx val="1"/>
+          <c:order val="1"/>
+          <c:tx>
+            <c:strRef>
+              <c:f>'LP Policy Evaluation'!$G$6</c:f>
+              <c:strCache>
+                <c:ptCount val="1"/>
+                <c:pt idx="0">
+                  <c:v>Constraint V(s2)</c:v>
+                </c:pt>
+              </c:strCache>
+            </c:strRef>
+          </c:tx>
+          <c:spPr>
+            <a:ln w="28575" cap="rnd">
+              <a:solidFill>
+                <a:schemeClr val="accent2"/>
+              </a:solidFill>
+              <a:round/>
+            </a:ln>
+            <a:effectLst/>
+          </c:spPr>
+          <c:marker>
+            <c:symbol val="none"/>
+          </c:marker>
+          <c:cat>
+            <c:numRef>
+              <c:f>'LP Policy Evaluation'!$E$7:$E$22</c:f>
+              <c:numCache>
+                <c:formatCode>0.0</c:formatCode>
+                <c:ptCount val="16"/>
+                <c:pt idx="0">
+                  <c:v>10</c:v>
+                </c:pt>
+                <c:pt idx="1">
+                  <c:v>11</c:v>
+                </c:pt>
+                <c:pt idx="2">
+                  <c:v>12</c:v>
+                </c:pt>
+                <c:pt idx="3">
+                  <c:v>13</c:v>
+                </c:pt>
+                <c:pt idx="4">
+                  <c:v>14</c:v>
+                </c:pt>
+                <c:pt idx="5">
+                  <c:v>15</c:v>
+                </c:pt>
+                <c:pt idx="6">
+                  <c:v>16</c:v>
+                </c:pt>
+                <c:pt idx="7">
+                  <c:v>17</c:v>
+                </c:pt>
+                <c:pt idx="8">
+                  <c:v>18</c:v>
+                </c:pt>
+                <c:pt idx="9">
+                  <c:v>19</c:v>
+                </c:pt>
+                <c:pt idx="10">
+                  <c:v>20</c:v>
+                </c:pt>
+                <c:pt idx="11">
+                  <c:v>21</c:v>
+                </c:pt>
+                <c:pt idx="12">
+                  <c:v>22</c:v>
+                </c:pt>
+                <c:pt idx="13">
+                  <c:v>23</c:v>
+                </c:pt>
+                <c:pt idx="14">
+                  <c:v>24</c:v>
+                </c:pt>
+                <c:pt idx="15">
+                  <c:v>25</c:v>
+                </c:pt>
+              </c:numCache>
+            </c:numRef>
+          </c:cat>
+          <c:val>
+            <c:numRef>
+              <c:f>'LP Policy Evaluation'!$G$7:$G$22</c:f>
+              <c:numCache>
+                <c:formatCode>0.00</c:formatCode>
+                <c:ptCount val="16"/>
+                <c:pt idx="0">
+                  <c:v>15.263157894736848</c:v>
+                </c:pt>
+                <c:pt idx="1">
+                  <c:v>15.736842105263163</c:v>
+                </c:pt>
+                <c:pt idx="2">
+                  <c:v>16.21052631578948</c:v>
+                </c:pt>
+                <c:pt idx="3">
+                  <c:v>16.684210526315795</c:v>
+                </c:pt>
+                <c:pt idx="4">
+                  <c:v>17.15789473684211</c:v>
+                </c:pt>
+                <c:pt idx="5">
+                  <c:v>17.631578947368425</c:v>
+                </c:pt>
+                <c:pt idx="6">
+                  <c:v>18.105263157894743</c:v>
+                </c:pt>
+                <c:pt idx="7">
+                  <c:v>18.578947368421058</c:v>
+                </c:pt>
+                <c:pt idx="8">
+                  <c:v>19.052631578947373</c:v>
+                </c:pt>
+                <c:pt idx="9">
+                  <c:v>19.526315789473689</c:v>
+                </c:pt>
+                <c:pt idx="10">
+                  <c:v>20.000000000000007</c:v>
+                </c:pt>
+                <c:pt idx="11">
+                  <c:v>20.473684210526322</c:v>
+                </c:pt>
+                <c:pt idx="12">
+                  <c:v>20.947368421052641</c:v>
+                </c:pt>
+                <c:pt idx="13">
+                  <c:v>21.421052631578956</c:v>
+                </c:pt>
+                <c:pt idx="14">
+                  <c:v>21.894736842105271</c:v>
+                </c:pt>
+                <c:pt idx="15">
+                  <c:v>22.368421052631586</c:v>
+                </c:pt>
+              </c:numCache>
+            </c:numRef>
+          </c:val>
+          <c:smooth val="0"/>
+          <c:extLst>
+            <c:ext xmlns:c16="http://schemas.microsoft.com/office/drawing/2014/chart" uri="{C3380CC4-5D6E-409C-BE32-E72D297353CC}">
+              <c16:uniqueId val="{00000001-F007-4291-B431-AD94702AE9CD}"/>
+            </c:ext>
+          </c:extLst>
+        </c:ser>
+        <c:dLbls>
+          <c:showLegendKey val="0"/>
+          <c:showVal val="0"/>
+          <c:showCatName val="0"/>
+          <c:showSerName val="0"/>
+          <c:showPercent val="0"/>
+          <c:showBubbleSize val="0"/>
+        </c:dLbls>
+        <c:smooth val="0"/>
+        <c:axId val="938217840"/>
+        <c:axId val="1015613472"/>
+      </c:lineChart>
+      <c:catAx>
+        <c:axId val="938217840"/>
+        <c:scaling>
+          <c:orientation val="minMax"/>
+        </c:scaling>
+        <c:delete val="0"/>
+        <c:axPos val="b"/>
+        <c:title>
+          <c:tx>
+            <c:rich>
+              <a:bodyPr rot="0" spcFirstLastPara="1" vertOverflow="ellipsis" vert="horz" wrap="square" anchor="ctr" anchorCtr="1"/>
+              <a:lstStyle/>
+              <a:p>
+                <a:pPr>
+                  <a:defRPr sz="1000" b="0" i="0" u="none" strike="noStrike" kern="1200" baseline="0">
+                    <a:solidFill>
+                      <a:schemeClr val="tx1">
+                        <a:lumMod val="65000"/>
+                        <a:lumOff val="35000"/>
+                      </a:schemeClr>
+                    </a:solidFill>
+                    <a:latin typeface="+mn-lt"/>
+                    <a:ea typeface="+mn-ea"/>
+                    <a:cs typeface="+mn-cs"/>
+                  </a:defRPr>
+                </a:pPr>
+                <a:r>
+                  <a:rPr lang="en-US"/>
+                  <a:t>V(s1)</a:t>
+                </a:r>
+              </a:p>
+            </c:rich>
+          </c:tx>
+          <c:overlay val="0"/>
+          <c:spPr>
+            <a:noFill/>
+            <a:ln>
+              <a:noFill/>
+            </a:ln>
+            <a:effectLst/>
+          </c:spPr>
+          <c:txPr>
+            <a:bodyPr rot="0" spcFirstLastPara="1" vertOverflow="ellipsis" vert="horz" wrap="square" anchor="ctr" anchorCtr="1"/>
+            <a:lstStyle/>
+            <a:p>
+              <a:pPr>
+                <a:defRPr sz="1000" b="0" i="0" u="none" strike="noStrike" kern="1200" baseline="0">
+                  <a:solidFill>
+                    <a:schemeClr val="tx1">
+                      <a:lumMod val="65000"/>
+                      <a:lumOff val="35000"/>
+                    </a:schemeClr>
+                  </a:solidFill>
+                  <a:latin typeface="+mn-lt"/>
+                  <a:ea typeface="+mn-ea"/>
+                  <a:cs typeface="+mn-cs"/>
+                </a:defRPr>
+              </a:pPr>
+              <a:endParaRPr lang="en-US"/>
+            </a:p>
+          </c:txPr>
+        </c:title>
+        <c:numFmt formatCode="0.0" sourceLinked="1"/>
+        <c:majorTickMark val="none"/>
+        <c:minorTickMark val="none"/>
+        <c:tickLblPos val="nextTo"/>
+        <c:spPr>
+          <a:noFill/>
+          <a:ln w="9525" cap="flat" cmpd="sng" algn="ctr">
+            <a:solidFill>
+              <a:schemeClr val="tx1">
+                <a:lumMod val="15000"/>
+                <a:lumOff val="85000"/>
+              </a:schemeClr>
+            </a:solidFill>
+            <a:round/>
+          </a:ln>
+          <a:effectLst/>
+        </c:spPr>
+        <c:txPr>
+          <a:bodyPr rot="-60000000" spcFirstLastPara="1" vertOverflow="ellipsis" vert="horz" wrap="square" anchor="ctr" anchorCtr="1"/>
+          <a:lstStyle/>
+          <a:p>
+            <a:pPr>
+              <a:defRPr sz="900" b="0" i="0" u="none" strike="noStrike" kern="1200" baseline="0">
+                <a:solidFill>
+                  <a:schemeClr val="tx1">
+                    <a:lumMod val="65000"/>
+                    <a:lumOff val="35000"/>
+                  </a:schemeClr>
+                </a:solidFill>
+                <a:latin typeface="+mn-lt"/>
+                <a:ea typeface="+mn-ea"/>
+                <a:cs typeface="+mn-cs"/>
+              </a:defRPr>
+            </a:pPr>
+            <a:endParaRPr lang="en-US"/>
+          </a:p>
+        </c:txPr>
+        <c:crossAx val="1015613472"/>
+        <c:crosses val="autoZero"/>
+        <c:auto val="1"/>
+        <c:lblAlgn val="ctr"/>
+        <c:lblOffset val="100"/>
+        <c:noMultiLvlLbl val="0"/>
+      </c:catAx>
+      <c:valAx>
+        <c:axId val="1015613472"/>
+        <c:scaling>
+          <c:orientation val="minMax"/>
+        </c:scaling>
+        <c:delete val="0"/>
+        <c:axPos val="l"/>
+        <c:majorGridlines>
+          <c:spPr>
+            <a:ln w="9525" cap="flat" cmpd="sng" algn="ctr">
+              <a:solidFill>
+                <a:schemeClr val="tx1">
+                  <a:lumMod val="15000"/>
+                  <a:lumOff val="85000"/>
+                </a:schemeClr>
+              </a:solidFill>
+              <a:round/>
+            </a:ln>
+            <a:effectLst/>
+          </c:spPr>
+        </c:majorGridlines>
+        <c:title>
+          <c:tx>
+            <c:rich>
+              <a:bodyPr rot="-5400000" spcFirstLastPara="1" vertOverflow="ellipsis" vert="horz" wrap="square" anchor="ctr" anchorCtr="1"/>
+              <a:lstStyle/>
+              <a:p>
+                <a:pPr>
+                  <a:defRPr sz="1000" b="0" i="0" u="none" strike="noStrike" kern="1200" baseline="0">
+                    <a:solidFill>
+                      <a:schemeClr val="tx1">
+                        <a:lumMod val="65000"/>
+                        <a:lumOff val="35000"/>
+                      </a:schemeClr>
+                    </a:solidFill>
+                    <a:latin typeface="+mn-lt"/>
+                    <a:ea typeface="+mn-ea"/>
+                    <a:cs typeface="+mn-cs"/>
+                  </a:defRPr>
+                </a:pPr>
+                <a:r>
+                  <a:rPr lang="en-US"/>
+                  <a:t>V(s2)</a:t>
+                </a:r>
+              </a:p>
+            </c:rich>
+          </c:tx>
+          <c:overlay val="0"/>
+          <c:spPr>
+            <a:noFill/>
+            <a:ln>
+              <a:noFill/>
+            </a:ln>
+            <a:effectLst/>
+          </c:spPr>
+          <c:txPr>
+            <a:bodyPr rot="-5400000" spcFirstLastPara="1" vertOverflow="ellipsis" vert="horz" wrap="square" anchor="ctr" anchorCtr="1"/>
+            <a:lstStyle/>
+            <a:p>
+              <a:pPr>
+                <a:defRPr sz="1000" b="0" i="0" u="none" strike="noStrike" kern="1200" baseline="0">
+                  <a:solidFill>
+                    <a:schemeClr val="tx1">
+                      <a:lumMod val="65000"/>
+                      <a:lumOff val="35000"/>
+                    </a:schemeClr>
+                  </a:solidFill>
+                  <a:latin typeface="+mn-lt"/>
+                  <a:ea typeface="+mn-ea"/>
+                  <a:cs typeface="+mn-cs"/>
+                </a:defRPr>
+              </a:pPr>
+              <a:endParaRPr lang="en-US"/>
+            </a:p>
+          </c:txPr>
+        </c:title>
+        <c:numFmt formatCode="0.00" sourceLinked="1"/>
+        <c:majorTickMark val="none"/>
+        <c:minorTickMark val="none"/>
+        <c:tickLblPos val="nextTo"/>
+        <c:spPr>
+          <a:noFill/>
+          <a:ln>
+            <a:noFill/>
+          </a:ln>
+          <a:effectLst/>
+        </c:spPr>
+        <c:txPr>
+          <a:bodyPr rot="-60000000" spcFirstLastPara="1" vertOverflow="ellipsis" vert="horz" wrap="square" anchor="ctr" anchorCtr="1"/>
+          <a:lstStyle/>
+          <a:p>
+            <a:pPr>
+              <a:defRPr sz="900" b="0" i="0" u="none" strike="noStrike" kern="1200" baseline="0">
+                <a:solidFill>
+                  <a:schemeClr val="tx1">
+                    <a:lumMod val="65000"/>
+                    <a:lumOff val="35000"/>
+                  </a:schemeClr>
+                </a:solidFill>
+                <a:latin typeface="+mn-lt"/>
+                <a:ea typeface="+mn-ea"/>
+                <a:cs typeface="+mn-cs"/>
+              </a:defRPr>
+            </a:pPr>
+            <a:endParaRPr lang="en-US"/>
+          </a:p>
+        </c:txPr>
+        <c:crossAx val="938217840"/>
+        <c:crosses val="autoZero"/>
+        <c:crossBetween val="between"/>
+      </c:valAx>
+      <c:spPr>
+        <a:noFill/>
+        <a:ln>
+          <a:noFill/>
+        </a:ln>
+        <a:effectLst/>
+      </c:spPr>
+    </c:plotArea>
+    <c:legend>
+      <c:legendPos val="b"/>
+      <c:layout>
+        <c:manualLayout>
+          <c:xMode val="edge"/>
+          <c:yMode val="edge"/>
+          <c:x val="0.13418345972776227"/>
+          <c:y val="0.87674603548807883"/>
+          <c:w val="0.73163280402065634"/>
+          <c:h val="6.7365740959026824E-2"/>
+        </c:manualLayout>
+      </c:layout>
+      <c:overlay val="0"/>
+      <c:spPr>
+        <a:noFill/>
+        <a:ln>
+          <a:noFill/>
+        </a:ln>
+        <a:effectLst/>
+      </c:spPr>
+      <c:txPr>
+        <a:bodyPr rot="0" spcFirstLastPara="1" vertOverflow="ellipsis" vert="horz" wrap="square" anchor="ctr" anchorCtr="1"/>
+        <a:lstStyle/>
+        <a:p>
+          <a:pPr>
+            <a:defRPr sz="900" b="0" i="0" u="none" strike="noStrike" kern="1200" baseline="0">
+              <a:solidFill>
+                <a:schemeClr val="tx1">
+                  <a:lumMod val="65000"/>
+                  <a:lumOff val="35000"/>
+                </a:schemeClr>
+              </a:solidFill>
+              <a:latin typeface="+mn-lt"/>
+              <a:ea typeface="+mn-ea"/>
+              <a:cs typeface="+mn-cs"/>
+            </a:defRPr>
+          </a:pPr>
+          <a:endParaRPr lang="en-US"/>
+        </a:p>
+      </c:txPr>
+    </c:legend>
+    <c:plotVisOnly val="1"/>
+    <c:dispBlanksAs val="gap"/>
+    <c:showDLblsOverMax val="0"/>
+  </c:chart>
+  <c:spPr>
+    <a:noFill/>
+    <a:ln>
+      <a:noFill/>
+    </a:ln>
+    <a:effectLst/>
+  </c:spPr>
+  <c:txPr>
+    <a:bodyPr/>
+    <a:lstStyle/>
+    <a:p>
+      <a:pPr>
+        <a:defRPr/>
+      </a:pPr>
+      <a:endParaRPr lang="en-US"/>
+    </a:p>
+  </c:txPr>
+  <c:externalData r:id="rId3">
+    <c:autoUpdate val="0"/>
+  </c:externalData>
+</c:chartSpace>
+</file>
+
+<file path=ppt/charts/colors1.xml><?xml version="1.0" encoding="utf-8"?>
+<cs:colorStyle xmlns:cs="http://schemas.microsoft.com/office/drawing/2012/chartStyle" xmlns:a="http://schemas.openxmlformats.org/drawingml/2006/main" meth="cycle" id="10">
+  <a:schemeClr val="accent1"/>
+  <a:schemeClr val="accent2"/>
+  <a:schemeClr val="accent3"/>
+  <a:schemeClr val="accent4"/>
+  <a:schemeClr val="accent5"/>
+  <a:schemeClr val="accent6"/>
+  <cs:variation/>
+  <cs:variation>
+    <a:lumMod val="60000"/>
+  </cs:variation>
+  <cs:variation>
+    <a:lumMod val="80000"/>
+    <a:lumOff val="20000"/>
+  </cs:variation>
+  <cs:variation>
+    <a:lumMod val="80000"/>
+  </cs:variation>
+  <cs:variation>
+    <a:lumMod val="60000"/>
+    <a:lumOff val="40000"/>
+  </cs:variation>
+  <cs:variation>
+    <a:lumMod val="50000"/>
+  </cs:variation>
+  <cs:variation>
+    <a:lumMod val="70000"/>
+    <a:lumOff val="30000"/>
+  </cs:variation>
+  <cs:variation>
+    <a:lumMod val="70000"/>
+  </cs:variation>
+  <cs:variation>
+    <a:lumMod val="50000"/>
+    <a:lumOff val="50000"/>
+  </cs:variation>
+</cs:colorStyle>
+</file>
+
+<file path=ppt/charts/style1.xml><?xml version="1.0" encoding="utf-8"?>
+<cs:chartStyle xmlns:cs="http://schemas.microsoft.com/office/drawing/2012/chartStyle" xmlns:a="http://schemas.openxmlformats.org/drawingml/2006/main" id="227">
+  <cs:axisTitle>
+    <cs:lnRef idx="0"/>
+    <cs:fillRef idx="0"/>
+    <cs:effectRef idx="0"/>
+    <cs:fontRef idx="minor">
+      <a:schemeClr val="tx1">
+        <a:lumMod val="65000"/>
+        <a:lumOff val="35000"/>
+      </a:schemeClr>
+    </cs:fontRef>
+    <cs:defRPr sz="1000" kern="1200"/>
+  </cs:axisTitle>
+  <cs:categoryAxis>
+    <cs:lnRef idx="0"/>
+    <cs:fillRef idx="0"/>
+    <cs:effectRef idx="0"/>
+    <cs:fontRef idx="minor">
+      <a:schemeClr val="tx1">
+        <a:lumMod val="65000"/>
+        <a:lumOff val="35000"/>
+      </a:schemeClr>
+    </cs:fontRef>
+    <cs:spPr>
+      <a:ln w="9525" cap="flat" cmpd="sng" algn="ctr">
+        <a:solidFill>
+          <a:schemeClr val="tx1">
+            <a:lumMod val="15000"/>
+            <a:lumOff val="85000"/>
+          </a:schemeClr>
+        </a:solidFill>
+        <a:round/>
+      </a:ln>
+    </cs:spPr>
+    <cs:defRPr sz="900" kern="1200"/>
+  </cs:categoryAxis>
+  <cs:chartArea mods="allowNoFillOverride allowNoLineOverride">
+    <cs:lnRef idx="0"/>
+    <cs:fillRef idx="0"/>
+    <cs:effectRef idx="0"/>
+    <cs:fontRef idx="minor">
+      <a:schemeClr val="tx1"/>
+    </cs:fontRef>
+    <cs:spPr>
+      <a:solidFill>
+        <a:schemeClr val="bg1"/>
+      </a:solidFill>
+      <a:ln w="9525" cap="flat" cmpd="sng" algn="ctr">
+        <a:solidFill>
+          <a:schemeClr val="tx1">
+            <a:lumMod val="15000"/>
+            <a:lumOff val="85000"/>
+          </a:schemeClr>
+        </a:solidFill>
+        <a:round/>
+      </a:ln>
+    </cs:spPr>
+    <cs:defRPr sz="1000" kern="1200"/>
+  </cs:chartArea>
+  <cs:dataLabel>
+    <cs:lnRef idx="0"/>
+    <cs:fillRef idx="0"/>
+    <cs:effectRef idx="0"/>
+    <cs:fontRef idx="minor">
+      <a:schemeClr val="tx1">
+        <a:lumMod val="75000"/>
+        <a:lumOff val="25000"/>
+      </a:schemeClr>
+    </cs:fontRef>
+    <cs:defRPr sz="900" kern="1200"/>
+  </cs:dataLabel>
+  <cs:dataLabelCallout>
+    <cs:lnRef idx="0"/>
+    <cs:fillRef idx="0"/>
+    <cs:effectRef idx="0"/>
+    <cs:fontRef idx="minor">
+      <a:schemeClr val="dk1">
+        <a:lumMod val="65000"/>
+        <a:lumOff val="35000"/>
+      </a:schemeClr>
+    </cs:fontRef>
+    <cs:spPr>
+      <a:solidFill>
+        <a:schemeClr val="lt1"/>
+      </a:solidFill>
+      <a:ln>
+        <a:solidFill>
+          <a:schemeClr val="dk1">
+            <a:lumMod val="25000"/>
+            <a:lumOff val="75000"/>
+          </a:schemeClr>
+        </a:solidFill>
+      </a:ln>
+    </cs:spPr>
+    <cs:defRPr sz="900" kern="1200"/>
+    <cs:bodyPr rot="0" spcFirstLastPara="1" vertOverflow="clip" horzOverflow="clip" vert="horz" wrap="square" lIns="36576" tIns="18288" rIns="36576" bIns="18288" anchor="ctr" anchorCtr="1">
+      <a:spAutoFit/>
+    </cs:bodyPr>
+  </cs:dataLabelCallout>
+  <cs:dataPoint>
+    <cs:lnRef idx="0"/>
+    <cs:fillRef idx="1">
+      <cs:styleClr val="auto"/>
+    </cs:fillRef>
+    <cs:effectRef idx="0"/>
+    <cs:fontRef idx="minor">
+      <a:schemeClr val="tx1"/>
+    </cs:fontRef>
+    <cs:spPr>
+      <a:solidFill>
+        <a:schemeClr val="phClr"/>
+      </a:solidFill>
+    </cs:spPr>
+  </cs:dataPoint>
+  <cs:dataPoint3D>
+    <cs:lnRef idx="0"/>
+    <cs:fillRef idx="1">
+      <cs:styleClr val="auto"/>
+    </cs:fillRef>
+    <cs:effectRef idx="0"/>
+    <cs:fontRef idx="minor">
+      <a:schemeClr val="tx1"/>
+    </cs:fontRef>
+    <cs:spPr>
+      <a:solidFill>
+        <a:schemeClr val="phClr"/>
+      </a:solidFill>
+    </cs:spPr>
+  </cs:dataPoint3D>
+  <cs:dataPointLine>
+    <cs:lnRef idx="0">
+      <cs:styleClr val="auto"/>
+    </cs:lnRef>
+    <cs:fillRef idx="1"/>
+    <cs:effectRef idx="0"/>
+    <cs:fontRef idx="minor">
+      <a:schemeClr val="tx1"/>
+    </cs:fontRef>
+    <cs:spPr>
+      <a:ln w="28575" cap="rnd">
+        <a:solidFill>
+          <a:schemeClr val="phClr"/>
+        </a:solidFill>
+        <a:round/>
+      </a:ln>
+    </cs:spPr>
+  </cs:dataPointLine>
+  <cs:dataPointMarker>
+    <cs:lnRef idx="0">
+      <cs:styleClr val="auto"/>
+    </cs:lnRef>
+    <cs:fillRef idx="1">
+      <cs:styleClr val="auto"/>
+    </cs:fillRef>
+    <cs:effectRef idx="0"/>
+    <cs:fontRef idx="minor">
+      <a:schemeClr val="tx1"/>
+    </cs:fontRef>
+    <cs:spPr>
+      <a:solidFill>
+        <a:schemeClr val="phClr"/>
+      </a:solidFill>
+      <a:ln w="9525">
+        <a:solidFill>
+          <a:schemeClr val="phClr"/>
+        </a:solidFill>
+      </a:ln>
+    </cs:spPr>
+  </cs:dataPointMarker>
+  <cs:dataPointMarkerLayout symbol="circle" size="5"/>
+  <cs:dataPointWireframe>
+    <cs:lnRef idx="0">
+      <cs:styleClr val="auto"/>
+    </cs:lnRef>
+    <cs:fillRef idx="1"/>
+    <cs:effectRef idx="0"/>
+    <cs:fontRef idx="minor">
+      <a:schemeClr val="tx1"/>
+    </cs:fontRef>
+    <cs:spPr>
+      <a:ln w="9525" cap="rnd">
+        <a:solidFill>
+          <a:schemeClr val="phClr"/>
+        </a:solidFill>
+        <a:round/>
+      </a:ln>
+    </cs:spPr>
+  </cs:dataPointWireframe>
+  <cs:dataTable>
+    <cs:lnRef idx="0"/>
+    <cs:fillRef idx="0"/>
+    <cs:effectRef idx="0"/>
+    <cs:fontRef idx="minor">
+      <a:schemeClr val="tx1">
+        <a:lumMod val="65000"/>
+        <a:lumOff val="35000"/>
+      </a:schemeClr>
+    </cs:fontRef>
+    <cs:spPr>
+      <a:noFill/>
+      <a:ln w="9525" cap="flat" cmpd="sng" algn="ctr">
+        <a:solidFill>
+          <a:schemeClr val="tx1">
+            <a:lumMod val="15000"/>
+            <a:lumOff val="85000"/>
+          </a:schemeClr>
+        </a:solidFill>
+        <a:round/>
+      </a:ln>
+    </cs:spPr>
+    <cs:defRPr sz="900" kern="1200"/>
+  </cs:dataTable>
+  <cs:downBar>
+    <cs:lnRef idx="0"/>
+    <cs:fillRef idx="0"/>
+    <cs:effectRef idx="0"/>
+    <cs:fontRef idx="minor">
+      <a:schemeClr val="dk1"/>
+    </cs:fontRef>
+    <cs:spPr>
+      <a:solidFill>
+        <a:schemeClr val="dk1">
+          <a:lumMod val="65000"/>
+          <a:lumOff val="35000"/>
+        </a:schemeClr>
+      </a:solidFill>
+      <a:ln w="9525">
+        <a:solidFill>
+          <a:schemeClr val="tx1">
+            <a:lumMod val="65000"/>
+            <a:lumOff val="35000"/>
+          </a:schemeClr>
+        </a:solidFill>
+      </a:ln>
+    </cs:spPr>
+  </cs:downBar>
+  <cs:dropLine>
+    <cs:lnRef idx="0"/>
+    <cs:fillRef idx="0"/>
+    <cs:effectRef idx="0"/>
+    <cs:fontRef idx="minor">
+      <a:schemeClr val="tx1"/>
+    </cs:fontRef>
+    <cs:spPr>
+      <a:ln w="9525" cap="flat" cmpd="sng" algn="ctr">
+        <a:solidFill>
+          <a:schemeClr val="tx1">
+            <a:lumMod val="35000"/>
+            <a:lumOff val="65000"/>
+          </a:schemeClr>
+        </a:solidFill>
+        <a:round/>
+      </a:ln>
+    </cs:spPr>
+  </cs:dropLine>
+  <cs:errorBar>
+    <cs:lnRef idx="0"/>
+    <cs:fillRef idx="0"/>
+    <cs:effectRef idx="0"/>
+    <cs:fontRef idx="minor">
+      <a:schemeClr val="tx1"/>
+    </cs:fontRef>
+    <cs:spPr>
+      <a:ln w="9525" cap="flat" cmpd="sng" algn="ctr">
+        <a:solidFill>
+          <a:schemeClr val="tx1">
+            <a:lumMod val="65000"/>
+            <a:lumOff val="35000"/>
+          </a:schemeClr>
+        </a:solidFill>
+        <a:round/>
+      </a:ln>
+    </cs:spPr>
+  </cs:errorBar>
+  <cs:floor>
+    <cs:lnRef idx="0"/>
+    <cs:fillRef idx="0"/>
+    <cs:effectRef idx="0"/>
+    <cs:fontRef idx="minor">
+      <a:schemeClr val="tx1"/>
+    </cs:fontRef>
+    <cs:spPr>
+      <a:noFill/>
+      <a:ln>
+        <a:noFill/>
+      </a:ln>
+    </cs:spPr>
+  </cs:floor>
+  <cs:gridlineMajor>
+    <cs:lnRef idx="0"/>
+    <cs:fillRef idx="0"/>
+    <cs:effectRef idx="0"/>
+    <cs:fontRef idx="minor">
+      <a:schemeClr val="tx1"/>
+    </cs:fontRef>
+    <cs:spPr>
+      <a:ln w="9525" cap="flat" cmpd="sng" algn="ctr">
+        <a:solidFill>
+          <a:schemeClr val="tx1">
+            <a:lumMod val="15000"/>
+            <a:lumOff val="85000"/>
+          </a:schemeClr>
+        </a:solidFill>
+        <a:round/>
+      </a:ln>
+    </cs:spPr>
+  </cs:gridlineMajor>
+  <cs:gridlineMinor>
+    <cs:lnRef idx="0"/>
+    <cs:fillRef idx="0"/>
+    <cs:effectRef idx="0"/>
+    <cs:fontRef idx="minor">
+      <a:schemeClr val="tx1"/>
+    </cs:fontRef>
+    <cs:spPr>
+      <a:ln w="9525" cap="flat" cmpd="sng" algn="ctr">
+        <a:solidFill>
+          <a:schemeClr val="tx1">
+            <a:lumMod val="5000"/>
+            <a:lumOff val="95000"/>
+          </a:schemeClr>
+        </a:solidFill>
+        <a:round/>
+      </a:ln>
+    </cs:spPr>
+  </cs:gridlineMinor>
+  <cs:hiLoLine>
+    <cs:lnRef idx="0"/>
+    <cs:fillRef idx="0"/>
+    <cs:effectRef idx="0"/>
+    <cs:fontRef idx="minor">
+      <a:schemeClr val="tx1"/>
+    </cs:fontRef>
+    <cs:spPr>
+      <a:ln w="9525" cap="flat" cmpd="sng" algn="ctr">
+        <a:solidFill>
+          <a:schemeClr val="tx1">
+            <a:lumMod val="75000"/>
+            <a:lumOff val="25000"/>
+          </a:schemeClr>
+        </a:solidFill>
+        <a:round/>
+      </a:ln>
+    </cs:spPr>
+  </cs:hiLoLine>
+  <cs:leaderLine>
+    <cs:lnRef idx="0"/>
+    <cs:fillRef idx="0"/>
+    <cs:effectRef idx="0"/>
+    <cs:fontRef idx="minor">
+      <a:schemeClr val="tx1"/>
+    </cs:fontRef>
+    <cs:spPr>
+      <a:ln w="9525" cap="flat" cmpd="sng" algn="ctr">
+        <a:solidFill>
+          <a:schemeClr val="tx1">
+            <a:lumMod val="35000"/>
+            <a:lumOff val="65000"/>
+          </a:schemeClr>
+        </a:solidFill>
+        <a:round/>
+      </a:ln>
+    </cs:spPr>
+  </cs:leaderLine>
+  <cs:legend>
+    <cs:lnRef idx="0"/>
+    <cs:fillRef idx="0"/>
+    <cs:effectRef idx="0"/>
+    <cs:fontRef idx="minor">
+      <a:schemeClr val="tx1">
+        <a:lumMod val="65000"/>
+        <a:lumOff val="35000"/>
+      </a:schemeClr>
+    </cs:fontRef>
+    <cs:defRPr sz="900" kern="1200"/>
+  </cs:legend>
+  <cs:plotArea mods="allowNoFillOverride allowNoLineOverride">
+    <cs:lnRef idx="0"/>
+    <cs:fillRef idx="0"/>
+    <cs:effectRef idx="0"/>
+    <cs:fontRef idx="minor">
+      <a:schemeClr val="tx1"/>
+    </cs:fontRef>
+  </cs:plotArea>
+  <cs:plotArea3D mods="allowNoFillOverride allowNoLineOverride">
+    <cs:lnRef idx="0"/>
+    <cs:fillRef idx="0"/>
+    <cs:effectRef idx="0"/>
+    <cs:fontRef idx="minor">
+      <a:schemeClr val="tx1"/>
+    </cs:fontRef>
+  </cs:plotArea3D>
+  <cs:seriesAxis>
+    <cs:lnRef idx="0"/>
+    <cs:fillRef idx="0"/>
+    <cs:effectRef idx="0"/>
+    <cs:fontRef idx="minor">
+      <a:schemeClr val="tx1">
+        <a:lumMod val="65000"/>
+        <a:lumOff val="35000"/>
+      </a:schemeClr>
+    </cs:fontRef>
+    <cs:defRPr sz="900" kern="1200"/>
+  </cs:seriesAxis>
+  <cs:seriesLine>
+    <cs:lnRef idx="0"/>
+    <cs:fillRef idx="0"/>
+    <cs:effectRef idx="0"/>
+    <cs:fontRef idx="minor">
+      <a:schemeClr val="tx1"/>
+    </cs:fontRef>
+    <cs:spPr>
+      <a:ln w="9525" cap="flat" cmpd="sng" algn="ctr">
+        <a:solidFill>
+          <a:schemeClr val="tx1">
+            <a:lumMod val="35000"/>
+            <a:lumOff val="65000"/>
+          </a:schemeClr>
+        </a:solidFill>
+        <a:round/>
+      </a:ln>
+    </cs:spPr>
+  </cs:seriesLine>
+  <cs:title>
+    <cs:lnRef idx="0"/>
+    <cs:fillRef idx="0"/>
+    <cs:effectRef idx="0"/>
+    <cs:fontRef idx="minor">
+      <a:schemeClr val="tx1">
+        <a:lumMod val="65000"/>
+        <a:lumOff val="35000"/>
+      </a:schemeClr>
+    </cs:fontRef>
+    <cs:defRPr sz="1400" b="0" kern="1200" spc="0" baseline="0"/>
+  </cs:title>
+  <cs:trendline>
+    <cs:lnRef idx="0">
+      <cs:styleClr val="auto"/>
+    </cs:lnRef>
+    <cs:fillRef idx="0"/>
+    <cs:effectRef idx="0"/>
+    <cs:fontRef idx="minor">
+      <a:schemeClr val="tx1"/>
+    </cs:fontRef>
+    <cs:spPr>
+      <a:ln w="19050" cap="rnd">
+        <a:solidFill>
+          <a:schemeClr val="phClr"/>
+        </a:solidFill>
+        <a:prstDash val="sysDot"/>
+      </a:ln>
+    </cs:spPr>
+  </cs:trendline>
+  <cs:trendlineLabel>
+    <cs:lnRef idx="0"/>
+    <cs:fillRef idx="0"/>
+    <cs:effectRef idx="0"/>
+    <cs:fontRef idx="minor">
+      <a:schemeClr val="tx1">
+        <a:lumMod val="65000"/>
+        <a:lumOff val="35000"/>
+      </a:schemeClr>
+    </cs:fontRef>
+    <cs:defRPr sz="900" kern="1200"/>
+  </cs:trendlineLabel>
+  <cs:upBar>
+    <cs:lnRef idx="0"/>
+    <cs:fillRef idx="0"/>
+    <cs:effectRef idx="0"/>
+    <cs:fontRef idx="minor">
+      <a:schemeClr val="dk1"/>
+    </cs:fontRef>
+    <cs:spPr>
+      <a:solidFill>
+        <a:schemeClr val="lt1"/>
+      </a:solidFill>
+      <a:ln w="9525">
+        <a:solidFill>
+          <a:schemeClr val="tx1">
+            <a:lumMod val="15000"/>
+            <a:lumOff val="85000"/>
+          </a:schemeClr>
+        </a:solidFill>
+      </a:ln>
+    </cs:spPr>
+  </cs:upBar>
+  <cs:valueAxis>
+    <cs:lnRef idx="0"/>
+    <cs:fillRef idx="0"/>
+    <cs:effectRef idx="0"/>
+    <cs:fontRef idx="minor">
+      <a:schemeClr val="tx1">
+        <a:lumMod val="65000"/>
+        <a:lumOff val="35000"/>
+      </a:schemeClr>
+    </cs:fontRef>
+    <cs:defRPr sz="900" kern="1200"/>
+  </cs:valueAxis>
+  <cs:wall>
+    <cs:lnRef idx="0"/>
+    <cs:fillRef idx="0"/>
+    <cs:effectRef idx="0"/>
+    <cs:fontRef idx="minor">
+      <a:schemeClr val="tx1"/>
+    </cs:fontRef>
+    <cs:spPr>
+      <a:noFill/>
+      <a:ln>
+        <a:noFill/>
+      </a:ln>
+    </cs:spPr>
+  </cs:wall>
+</cs:chartStyle>
+</file>
+
 <file path=ppt/slideLayouts/slideLayout1.xml><?xml version="1.0" encoding="utf-8"?>
 <p:sldLayout xmlns:a="http://schemas.openxmlformats.org/drawingml/2006/main" xmlns:r="http://schemas.openxmlformats.org/officeDocument/2006/relationships" xmlns:p="http://schemas.openxmlformats.org/presentationml/2006/main" type="title" preserve="1">
   <p:cSld name="Title Slide">
@@ -340,7 +1575,7 @@
           <a:p>
             <a:fld id="{3E22BF2E-04DA-469E-97C5-BB68A0368813}" type="datetimeFigureOut">
               <a:rPr lang="en-US" smtClean="0"/>
-              <a:t>9/9/2026</a:t>
+              <a:t>9/12/2026</a:t>
             </a:fld>
             <a:endParaRPr lang="en-US"/>
           </a:p>
@@ -538,7 +1773,7 @@
           <a:p>
             <a:fld id="{3E22BF2E-04DA-469E-97C5-BB68A0368813}" type="datetimeFigureOut">
               <a:rPr lang="en-US" smtClean="0"/>
-              <a:t>9/9/2026</a:t>
+              <a:t>9/12/2026</a:t>
             </a:fld>
             <a:endParaRPr lang="en-US"/>
           </a:p>
@@ -746,7 +1981,7 @@
           <a:p>
             <a:fld id="{3E22BF2E-04DA-469E-97C5-BB68A0368813}" type="datetimeFigureOut">
               <a:rPr lang="en-US" smtClean="0"/>
-              <a:t>9/9/2026</a:t>
+              <a:t>9/12/2026</a:t>
             </a:fld>
             <a:endParaRPr lang="en-US"/>
           </a:p>
@@ -954,7 +2189,7 @@
           <a:p>
             <a:fld id="{3E22BF2E-04DA-469E-97C5-BB68A0368813}" type="datetimeFigureOut">
               <a:rPr lang="en-US" smtClean="0"/>
-              <a:t>9/9/2026</a:t>
+              <a:t>9/12/2026</a:t>
             </a:fld>
             <a:endParaRPr lang="en-US"/>
           </a:p>
@@ -1229,7 +2464,7 @@
           <a:p>
             <a:fld id="{3E22BF2E-04DA-469E-97C5-BB68A0368813}" type="datetimeFigureOut">
               <a:rPr lang="en-US" smtClean="0"/>
-              <a:t>9/9/2026</a:t>
+              <a:t>9/12/2026</a:t>
             </a:fld>
             <a:endParaRPr lang="en-US"/>
           </a:p>
@@ -1494,7 +2729,7 @@
           <a:p>
             <a:fld id="{3E22BF2E-04DA-469E-97C5-BB68A0368813}" type="datetimeFigureOut">
               <a:rPr lang="en-US" smtClean="0"/>
-              <a:t>9/9/2026</a:t>
+              <a:t>9/12/2026</a:t>
             </a:fld>
             <a:endParaRPr lang="en-US"/>
           </a:p>
@@ -1906,7 +3141,7 @@
           <a:p>
             <a:fld id="{3E22BF2E-04DA-469E-97C5-BB68A0368813}" type="datetimeFigureOut">
               <a:rPr lang="en-US" smtClean="0"/>
-              <a:t>9/9/2026</a:t>
+              <a:t>9/12/2026</a:t>
             </a:fld>
             <a:endParaRPr lang="en-US"/>
           </a:p>
@@ -2047,7 +3282,7 @@
           <a:p>
             <a:fld id="{3E22BF2E-04DA-469E-97C5-BB68A0368813}" type="datetimeFigureOut">
               <a:rPr lang="en-US" smtClean="0"/>
-              <a:t>9/9/2026</a:t>
+              <a:t>9/12/2026</a:t>
             </a:fld>
             <a:endParaRPr lang="en-US"/>
           </a:p>
@@ -2160,7 +3395,7 @@
           <a:p>
             <a:fld id="{3E22BF2E-04DA-469E-97C5-BB68A0368813}" type="datetimeFigureOut">
               <a:rPr lang="en-US" smtClean="0"/>
-              <a:t>9/9/2026</a:t>
+              <a:t>9/12/2026</a:t>
             </a:fld>
             <a:endParaRPr lang="en-US"/>
           </a:p>
@@ -2471,7 +3706,7 @@
           <a:p>
             <a:fld id="{3E22BF2E-04DA-469E-97C5-BB68A0368813}" type="datetimeFigureOut">
               <a:rPr lang="en-US" smtClean="0"/>
-              <a:t>9/9/2026</a:t>
+              <a:t>9/12/2026</a:t>
             </a:fld>
             <a:endParaRPr lang="en-US"/>
           </a:p>
@@ -2759,7 +3994,7 @@
           <a:p>
             <a:fld id="{3E22BF2E-04DA-469E-97C5-BB68A0368813}" type="datetimeFigureOut">
               <a:rPr lang="en-US" smtClean="0"/>
-              <a:t>9/9/2026</a:t>
+              <a:t>9/12/2026</a:t>
             </a:fld>
             <a:endParaRPr lang="en-US"/>
           </a:p>
@@ -3000,7 +4235,7 @@
           <a:p>
             <a:fld id="{3E22BF2E-04DA-469E-97C5-BB68A0368813}" type="datetimeFigureOut">
               <a:rPr lang="en-US" smtClean="0"/>
-              <a:t>9/9/2026</a:t>
+              <a:t>9/12/2026</a:t>
             </a:fld>
             <a:endParaRPr lang="en-US"/>
           </a:p>
@@ -7085,8 +8320,8 @@
           </a:p>
         </p:txBody>
       </p:sp>
-      <mc:AlternateContent xmlns:mc="http://schemas.openxmlformats.org/markup-compatibility/2006" xmlns:a14="http://schemas.microsoft.com/office/drawing/2010/main">
-        <mc:Choice Requires="a14">
+      <mc:AlternateContent xmlns:mc="http://schemas.openxmlformats.org/markup-compatibility/2006">
+        <mc:Choice xmlns:a14="http://schemas.microsoft.com/office/drawing/2010/main" Requires="a14">
           <p:sp>
             <p:nvSpPr>
               <p:cNvPr id="3" name="Content Placeholder 2">
@@ -7105,13 +8340,13 @@
             </p:nvSpPr>
             <p:spPr>
               <a:xfrm>
-                <a:off x="838200" y="1397331"/>
-                <a:ext cx="8581869" cy="3189659"/>
+                <a:off x="838200" y="1397330"/>
+                <a:ext cx="8581869" cy="4145562"/>
               </a:xfrm>
             </p:spPr>
             <p:txBody>
               <a:bodyPr>
-                <a:normAutofit fontScale="70000" lnSpcReduction="20000"/>
+                <a:normAutofit fontScale="55000" lnSpcReduction="20000"/>
               </a:bodyPr>
               <a:lstStyle/>
               <a:p>
@@ -7508,8 +8743,129 @@
               </a:p>
               <a:p>
                 <a:r>
+                  <a:rPr lang="en-US" b="1" dirty="0"/>
+                  <a:t>The Fixed Point Property: </a:t>
+                </a:r>
+                <a:r>
                   <a:rPr lang="en-US" dirty="0"/>
-                  <a:t>The operator </a:t>
+                  <a:t>The value function is unchanged if all state values are already consistent.</a:t>
+                </a:r>
+              </a:p>
+              <a:p>
+                <a:pPr marL="0" indent="0">
+                  <a:buNone/>
+                </a:pPr>
+                <a14:m>
+                  <m:oMathPara xmlns:m="http://schemas.openxmlformats.org/officeDocument/2006/math">
+                    <m:oMath>
+                      <m:sSub>
+                        <m:sSubPr>
+                          <m:ctrlPr>
+                            <a:rPr lang="en-US" i="1">
+                              <a:latin typeface="Cambria Math" panose="02040503050406030204" pitchFamily="18" charset="0"/>
+                            </a:rPr>
+                          </m:ctrlPr>
+                        </m:sSubPr>
+                        <m:e>
+                          <m:r>
+                            <a:rPr lang="en-US" i="1">
+                              <a:latin typeface="Cambria Math" panose="02040503050406030204" pitchFamily="18" charset="0"/>
+                            </a:rPr>
+                            <m:t>𝑣</m:t>
+                          </m:r>
+                        </m:e>
+                        <m:sub>
+                          <m:r>
+                            <a:rPr lang="en-US" i="1">
+                              <a:latin typeface="Cambria Math" panose="02040503050406030204" pitchFamily="18" charset="0"/>
+                            </a:rPr>
+                            <m:t>𝜋</m:t>
+                          </m:r>
+                        </m:sub>
+                      </m:sSub>
+                      <m:r>
+                        <a:rPr lang="en-US" i="1">
+                          <a:latin typeface="Cambria Math" panose="02040503050406030204" pitchFamily="18" charset="0"/>
+                        </a:rPr>
+                        <m:t>=</m:t>
+                      </m:r>
+                      <m:sSup>
+                        <m:sSupPr>
+                          <m:ctrlPr>
+                            <a:rPr lang="en-US" i="1">
+                              <a:latin typeface="Cambria Math" panose="02040503050406030204" pitchFamily="18" charset="0"/>
+                            </a:rPr>
+                          </m:ctrlPr>
+                        </m:sSupPr>
+                        <m:e>
+                          <m:r>
+                            <a:rPr lang="en-US" i="1">
+                              <a:latin typeface="Cambria Math" panose="02040503050406030204" pitchFamily="18" charset="0"/>
+                            </a:rPr>
+                            <m:t>𝑇</m:t>
+                          </m:r>
+                        </m:e>
+                        <m:sup>
+                          <m:r>
+                            <a:rPr lang="en-US" i="1">
+                              <a:latin typeface="Cambria Math" panose="02040503050406030204" pitchFamily="18" charset="0"/>
+                            </a:rPr>
+                            <m:t>𝜋</m:t>
+                          </m:r>
+                        </m:sup>
+                      </m:sSup>
+                      <m:d>
+                        <m:dPr>
+                          <m:ctrlPr>
+                            <a:rPr lang="en-US" i="1">
+                              <a:latin typeface="Cambria Math" panose="02040503050406030204" pitchFamily="18" charset="0"/>
+                            </a:rPr>
+                          </m:ctrlPr>
+                        </m:dPr>
+                        <m:e>
+                          <m:sSub>
+                            <m:sSubPr>
+                              <m:ctrlPr>
+                                <a:rPr lang="en-US" i="1">
+                                  <a:latin typeface="Cambria Math" panose="02040503050406030204" pitchFamily="18" charset="0"/>
+                                </a:rPr>
+                              </m:ctrlPr>
+                            </m:sSubPr>
+                            <m:e>
+                              <m:r>
+                                <a:rPr lang="en-US" i="1">
+                                  <a:latin typeface="Cambria Math" panose="02040503050406030204" pitchFamily="18" charset="0"/>
+                                </a:rPr>
+                                <m:t>𝑣</m:t>
+                              </m:r>
+                            </m:e>
+                            <m:sub>
+                              <m:r>
+                                <a:rPr lang="en-US" i="1">
+                                  <a:latin typeface="Cambria Math" panose="02040503050406030204" pitchFamily="18" charset="0"/>
+                                </a:rPr>
+                                <m:t>𝜋</m:t>
+                              </m:r>
+                            </m:sub>
+                          </m:sSub>
+                        </m:e>
+                      </m:d>
+                    </m:oMath>
+                  </m:oMathPara>
+                </a14:m>
+                <a:endParaRPr lang="en-US" dirty="0"/>
+              </a:p>
+              <a:p>
+                <a:endParaRPr lang="en-US" dirty="0"/>
+              </a:p>
+              <a:p>
+                <a:r>
+                  <a:rPr lang="en-US" b="1" dirty="0"/>
+                  <a:t>The Contraction Property</a:t>
+                </a:r>
+                <a:r>
+                  <a:rPr lang="en-US" dirty="0"/>
+                  <a:t>: The operator </a:t>
                 </a:r>
                 <a14:m>
                   <m:oMath xmlns:m="http://schemas.openxmlformats.org/officeDocument/2006/math">
@@ -7556,370 +8912,216 @@
                 </a14:m>
                 <a:r>
                   <a:rPr lang="en-US" dirty="0"/>
-                  <a:t>-contracting with </a:t>
+                  <a:t>-contracting (see textbook for derivation):</a:t>
                 </a:r>
+                <a:br>
+                  <a:rPr lang="en-US" dirty="0"/>
+                </a:br>
+                <a:br>
+                  <a:rPr lang="en-US" dirty="0"/>
+                </a:br>
                 <a14:m>
                   <m:oMath xmlns:m="http://schemas.openxmlformats.org/officeDocument/2006/math">
                     <m:sSub>
                       <m:sSubPr>
                         <m:ctrlPr>
-                          <a:rPr lang="en-US" b="0" i="1" smtClean="0">
+                          <a:rPr lang="en-US" i="1">
+                            <a:latin typeface="Cambria Math" panose="02040503050406030204" pitchFamily="18" charset="0"/>
+                          </a:rPr>
+                        </m:ctrlPr>
+                      </m:sSubPr>
+                      <m:e>
+                        <m:d>
+                          <m:dPr>
+                            <m:begChr m:val="‖"/>
+                            <m:endChr m:val="‖"/>
+                            <m:ctrlPr>
+                              <a:rPr lang="en-US" i="1">
+                                <a:latin typeface="Cambria Math" panose="02040503050406030204" pitchFamily="18" charset="0"/>
+                              </a:rPr>
+                            </m:ctrlPr>
+                          </m:dPr>
+                          <m:e>
+                            <m:sSup>
+                              <m:sSupPr>
+                                <m:ctrlPr>
+                                  <a:rPr lang="en-US" i="1">
+                                    <a:latin typeface="Cambria Math" panose="02040503050406030204" pitchFamily="18" charset="0"/>
+                                  </a:rPr>
+                                </m:ctrlPr>
+                              </m:sSupPr>
+                              <m:e>
+                                <m:r>
+                                  <a:rPr lang="en-US" i="1">
+                                    <a:latin typeface="Cambria Math" panose="02040503050406030204" pitchFamily="18" charset="0"/>
+                                  </a:rPr>
+                                  <m:t>𝑇</m:t>
+                                </m:r>
+                              </m:e>
+                              <m:sup>
+                                <m:r>
+                                  <a:rPr lang="en-US" i="1">
+                                    <a:latin typeface="Cambria Math" panose="02040503050406030204" pitchFamily="18" charset="0"/>
+                                  </a:rPr>
+                                  <m:t>𝜋</m:t>
+                                </m:r>
+                              </m:sup>
+                            </m:sSup>
+                            <m:r>
+                              <a:rPr lang="en-US" b="0" i="1" smtClean="0">
+                                <a:latin typeface="Cambria Math" panose="02040503050406030204" pitchFamily="18" charset="0"/>
+                              </a:rPr>
+                              <m:t>𝑢</m:t>
+                            </m:r>
+                            <m:r>
+                              <a:rPr lang="en-US" i="1">
+                                <a:latin typeface="Cambria Math" panose="02040503050406030204" pitchFamily="18" charset="0"/>
+                              </a:rPr>
+                              <m:t>−</m:t>
+                            </m:r>
+                            <m:sSup>
+                              <m:sSupPr>
+                                <m:ctrlPr>
+                                  <a:rPr lang="en-US" i="1">
+                                    <a:latin typeface="Cambria Math" panose="02040503050406030204" pitchFamily="18" charset="0"/>
+                                  </a:rPr>
+                                </m:ctrlPr>
+                              </m:sSupPr>
+                              <m:e>
+                                <m:r>
+                                  <a:rPr lang="en-US" i="1">
+                                    <a:latin typeface="Cambria Math" panose="02040503050406030204" pitchFamily="18" charset="0"/>
+                                  </a:rPr>
+                                  <m:t>𝑇</m:t>
+                                </m:r>
+                              </m:e>
+                              <m:sup>
+                                <m:r>
+                                  <a:rPr lang="en-US" i="1">
+                                    <a:latin typeface="Cambria Math" panose="02040503050406030204" pitchFamily="18" charset="0"/>
+                                  </a:rPr>
+                                  <m:t>𝜋</m:t>
+                                </m:r>
+                              </m:sup>
+                            </m:sSup>
+                            <m:r>
+                              <a:rPr lang="en-US" i="1">
+                                <a:latin typeface="Cambria Math" panose="02040503050406030204" pitchFamily="18" charset="0"/>
+                              </a:rPr>
+                              <m:t>𝑣</m:t>
+                            </m:r>
+                          </m:e>
+                        </m:d>
+                      </m:e>
+                      <m:sub>
+                        <m:r>
+                          <a:rPr lang="en-US" i="1">
+                            <a:latin typeface="Cambria Math" panose="02040503050406030204" pitchFamily="18" charset="0"/>
+                          </a:rPr>
+                          <m:t>∞</m:t>
+                        </m:r>
+                      </m:sub>
+                    </m:sSub>
+                    <m:r>
+                      <a:rPr lang="en-US" i="1">
+                        <a:latin typeface="Cambria Math" panose="02040503050406030204" pitchFamily="18" charset="0"/>
+                      </a:rPr>
+                      <m:t>≤ </m:t>
+                    </m:r>
+                    <m:sSub>
+                      <m:sSubPr>
+                        <m:ctrlPr>
+                          <a:rPr lang="en-US" i="1">
                             <a:latin typeface="Cambria Math" panose="02040503050406030204" pitchFamily="18" charset="0"/>
                           </a:rPr>
                         </m:ctrlPr>
                       </m:sSubPr>
                       <m:e>
                         <m:r>
-                          <a:rPr lang="en-US" b="0" i="1" smtClean="0">
+                          <a:rPr lang="en-US" i="1">
                             <a:latin typeface="Cambria Math" panose="02040503050406030204" pitchFamily="18" charset="0"/>
                           </a:rPr>
-                          <m:t>𝑣</m:t>
+                          <m:t>𝛾</m:t>
                         </m:r>
+                        <m:d>
+                          <m:dPr>
+                            <m:begChr m:val="‖"/>
+                            <m:endChr m:val="‖"/>
+                            <m:ctrlPr>
+                              <a:rPr lang="en-US" b="0" i="1" smtClean="0">
+                                <a:latin typeface="Cambria Math" panose="02040503050406030204" pitchFamily="18" charset="0"/>
+                              </a:rPr>
+                            </m:ctrlPr>
+                          </m:dPr>
+                          <m:e>
+                            <m:r>
+                              <a:rPr lang="en-US" b="0" i="1" smtClean="0">
+                                <a:latin typeface="Cambria Math" panose="02040503050406030204" pitchFamily="18" charset="0"/>
+                              </a:rPr>
+                              <m:t>𝑢</m:t>
+                            </m:r>
+                            <m:r>
+                              <a:rPr lang="en-US" i="1">
+                                <a:latin typeface="Cambria Math" panose="02040503050406030204" pitchFamily="18" charset="0"/>
+                              </a:rPr>
+                              <m:t>−</m:t>
+                            </m:r>
+                            <m:r>
+                              <a:rPr lang="en-US" i="1">
+                                <a:latin typeface="Cambria Math" panose="02040503050406030204" pitchFamily="18" charset="0"/>
+                              </a:rPr>
+                              <m:t>𝑣</m:t>
+                            </m:r>
+                          </m:e>
+                        </m:d>
                       </m:e>
                       <m:sub>
                         <m:r>
-                          <a:rPr lang="en-US" b="0" i="1" smtClean="0">
+                          <a:rPr lang="en-US" i="1">
                             <a:latin typeface="Cambria Math" panose="02040503050406030204" pitchFamily="18" charset="0"/>
                           </a:rPr>
-                          <m:t>𝜋</m:t>
+                          <m:t>∞</m:t>
                         </m:r>
                       </m:sub>
                     </m:sSub>
+                    <m:r>
+                      <a:rPr lang="en-US" i="1">
+                        <a:latin typeface="Cambria Math" panose="02040503050406030204" pitchFamily="18" charset="0"/>
+                      </a:rPr>
+                      <m:t>  </m:t>
+                    </m:r>
+                    <m:r>
+                      <m:rPr>
+                        <m:nor/>
+                      </m:rPr>
+                      <a:rPr lang="en-US" i="0">
+                        <a:latin typeface="Cambria Math" panose="02040503050406030204" pitchFamily="18" charset="0"/>
+                      </a:rPr>
+                      <m:t> for any   </m:t>
+                    </m:r>
+                    <m:r>
+                      <a:rPr lang="en-US" i="1">
+                        <a:latin typeface="Cambria Math" panose="02040503050406030204" pitchFamily="18" charset="0"/>
+                      </a:rPr>
+                      <m:t>𝛾</m:t>
+                    </m:r>
+                    <m:r>
+                      <a:rPr lang="en-US" i="1">
+                        <a:latin typeface="Cambria Math" panose="02040503050406030204" pitchFamily="18" charset="0"/>
+                      </a:rPr>
+                      <m:t>&lt;1</m:t>
+                    </m:r>
                   </m:oMath>
                 </a14:m>
-                <a:r>
+                <a:br>
                   <a:rPr lang="en-US" dirty="0"/>
-                  <a:t> as its fixed point:</a:t>
-                </a:r>
+                </a:br>
                 <a:br>
                   <a:rPr lang="en-US" dirty="0"/>
                 </a:br>
                 <a:r>
                   <a:rPr lang="en-US" dirty="0"/>
-                  <a:t>(see textbook for derivation)</a:t>
-                </a:r>
-              </a:p>
-              <a:p>
-                <a:endParaRPr lang="en-US" dirty="0"/>
-              </a:p>
-              <a:p>
-                <a:pPr marL="0" indent="0">
-                  <a:buNone/>
-                </a:pPr>
-                <a14:m>
-                  <m:oMathPara xmlns:m="http://schemas.openxmlformats.org/officeDocument/2006/math">
-                    <m:oMath>
-                      <m:sSub>
-                        <m:sSubPr>
-                          <m:ctrlPr>
-                            <a:rPr lang="en-US" i="1" smtClean="0">
-                              <a:latin typeface="Cambria Math" panose="02040503050406030204" pitchFamily="18" charset="0"/>
-                            </a:rPr>
-                          </m:ctrlPr>
-                        </m:sSubPr>
-                        <m:e>
-                          <m:d>
-                            <m:dPr>
-                              <m:begChr m:val="‖"/>
-                              <m:endChr m:val="‖"/>
-                              <m:ctrlPr>
-                                <a:rPr lang="en-US" b="0" i="1" smtClean="0">
-                                  <a:latin typeface="Cambria Math" panose="02040503050406030204" pitchFamily="18" charset="0"/>
-                                </a:rPr>
-                              </m:ctrlPr>
-                            </m:dPr>
-                            <m:e>
-                              <m:sSub>
-                                <m:sSubPr>
-                                  <m:ctrlPr>
-                                    <a:rPr lang="en-US" b="0" i="1" smtClean="0">
-                                      <a:latin typeface="Cambria Math" panose="02040503050406030204" pitchFamily="18" charset="0"/>
-                                    </a:rPr>
-                                  </m:ctrlPr>
-                                </m:sSubPr>
-                                <m:e>
-                                  <m:r>
-                                    <a:rPr lang="en-US" b="0" i="1" smtClean="0">
-                                      <a:latin typeface="Cambria Math" panose="02040503050406030204" pitchFamily="18" charset="0"/>
-                                    </a:rPr>
-                                    <m:t>𝑣</m:t>
-                                  </m:r>
-                                </m:e>
-                                <m:sub>
-                                  <m:r>
-                                    <a:rPr lang="en-US" b="0" i="1" smtClean="0">
-                                      <a:latin typeface="Cambria Math" panose="02040503050406030204" pitchFamily="18" charset="0"/>
-                                    </a:rPr>
-                                    <m:t>𝜋</m:t>
-                                  </m:r>
-                                </m:sub>
-                              </m:sSub>
-                              <m:r>
-                                <a:rPr lang="en-US" b="0" i="1" smtClean="0">
-                                  <a:latin typeface="Cambria Math" panose="02040503050406030204" pitchFamily="18" charset="0"/>
-                                </a:rPr>
-                                <m:t>−</m:t>
-                              </m:r>
-                              <m:sSup>
-                                <m:sSupPr>
-                                  <m:ctrlPr>
-                                    <a:rPr lang="en-US" b="0" i="1" smtClean="0">
-                                      <a:latin typeface="Cambria Math" panose="02040503050406030204" pitchFamily="18" charset="0"/>
-                                    </a:rPr>
-                                  </m:ctrlPr>
-                                </m:sSupPr>
-                                <m:e>
-                                  <m:r>
-                                    <a:rPr lang="en-US" b="0" i="1" smtClean="0">
-                                      <a:latin typeface="Cambria Math" panose="02040503050406030204" pitchFamily="18" charset="0"/>
-                                    </a:rPr>
-                                    <m:t>𝑇</m:t>
-                                  </m:r>
-                                </m:e>
-                                <m:sup>
-                                  <m:r>
-                                    <a:rPr lang="en-US" b="0" i="1" smtClean="0">
-                                      <a:latin typeface="Cambria Math" panose="02040503050406030204" pitchFamily="18" charset="0"/>
-                                    </a:rPr>
-                                    <m:t>𝜋</m:t>
-                                  </m:r>
-                                </m:sup>
-                              </m:sSup>
-                              <m:r>
-                                <a:rPr lang="en-US" b="0" i="1" smtClean="0">
-                                  <a:latin typeface="Cambria Math" panose="02040503050406030204" pitchFamily="18" charset="0"/>
-                                </a:rPr>
-                                <m:t>𝑣</m:t>
-                              </m:r>
-                            </m:e>
-                          </m:d>
-                        </m:e>
-                        <m:sub>
-                          <m:r>
-                            <a:rPr lang="en-US" b="0" i="1" smtClean="0">
-                              <a:latin typeface="Cambria Math" panose="02040503050406030204" pitchFamily="18" charset="0"/>
-                            </a:rPr>
-                            <m:t>∞</m:t>
-                          </m:r>
-                        </m:sub>
-                      </m:sSub>
-                      <m:r>
-                        <a:rPr lang="en-US" b="0" i="1" smtClean="0">
-                          <a:latin typeface="Cambria Math" panose="02040503050406030204" pitchFamily="18" charset="0"/>
-                        </a:rPr>
-                        <m:t>≤ </m:t>
-                      </m:r>
-                      <m:sSub>
-                        <m:sSubPr>
-                          <m:ctrlPr>
-                            <a:rPr lang="en-US" b="0" i="1" smtClean="0">
-                              <a:latin typeface="Cambria Math" panose="02040503050406030204" pitchFamily="18" charset="0"/>
-                            </a:rPr>
-                          </m:ctrlPr>
-                        </m:sSubPr>
-                        <m:e>
-                          <m:r>
-                            <a:rPr lang="en-US" b="0" i="1" smtClean="0">
-                              <a:latin typeface="Cambria Math" panose="02040503050406030204" pitchFamily="18" charset="0"/>
-                            </a:rPr>
-                            <m:t>𝛾</m:t>
-                          </m:r>
-                          <m:d>
-                            <m:dPr>
-                              <m:begChr m:val="‖"/>
-                              <m:endChr m:val="‖"/>
-                              <m:ctrlPr>
-                                <a:rPr lang="en-US" b="0" i="1" smtClean="0">
-                                  <a:latin typeface="Cambria Math" panose="02040503050406030204" pitchFamily="18" charset="0"/>
-                                </a:rPr>
-                              </m:ctrlPr>
-                            </m:dPr>
-                            <m:e>
-                              <m:sSub>
-                                <m:sSubPr>
-                                  <m:ctrlPr>
-                                    <a:rPr lang="en-US" i="1">
-                                      <a:latin typeface="Cambria Math" panose="02040503050406030204" pitchFamily="18" charset="0"/>
-                                    </a:rPr>
-                                  </m:ctrlPr>
-                                </m:sSubPr>
-                                <m:e>
-                                  <m:r>
-                                    <a:rPr lang="en-US" i="1">
-                                      <a:latin typeface="Cambria Math" panose="02040503050406030204" pitchFamily="18" charset="0"/>
-                                    </a:rPr>
-                                    <m:t>𝑣</m:t>
-                                  </m:r>
-                                </m:e>
-                                <m:sub>
-                                  <m:r>
-                                    <a:rPr lang="en-US" b="0" i="1" smtClean="0">
-                                      <a:latin typeface="Cambria Math" panose="02040503050406030204" pitchFamily="18" charset="0"/>
-                                    </a:rPr>
-                                    <m:t>𝜋</m:t>
-                                  </m:r>
-                                </m:sub>
-                              </m:sSub>
-                              <m:r>
-                                <a:rPr lang="en-US" i="1">
-                                  <a:latin typeface="Cambria Math" panose="02040503050406030204" pitchFamily="18" charset="0"/>
-                                </a:rPr>
-                                <m:t>−</m:t>
-                              </m:r>
-                              <m:r>
-                                <a:rPr lang="en-US" b="0" i="1" smtClean="0">
-                                  <a:latin typeface="Cambria Math" panose="02040503050406030204" pitchFamily="18" charset="0"/>
-                                </a:rPr>
-                                <m:t>𝑣</m:t>
-                              </m:r>
-                            </m:e>
-                          </m:d>
-                        </m:e>
-                        <m:sub>
-                          <m:r>
-                            <a:rPr lang="en-US" i="1">
-                              <a:latin typeface="Cambria Math" panose="02040503050406030204" pitchFamily="18" charset="0"/>
-                            </a:rPr>
-                            <m:t>∞</m:t>
-                          </m:r>
-                        </m:sub>
-                      </m:sSub>
-                      <m:r>
-                        <a:rPr lang="en-US" b="0" i="1" smtClean="0">
-                          <a:latin typeface="Cambria Math" panose="02040503050406030204" pitchFamily="18" charset="0"/>
-                        </a:rPr>
-                        <m:t>  </m:t>
-                      </m:r>
-                      <m:r>
-                        <m:rPr>
-                          <m:nor/>
-                        </m:rPr>
-                        <a:rPr lang="en-US" b="0" i="0" smtClean="0">
-                          <a:latin typeface="Cambria Math" panose="02040503050406030204" pitchFamily="18" charset="0"/>
-                        </a:rPr>
-                        <m:t> for any   </m:t>
-                      </m:r>
-                      <m:r>
-                        <a:rPr lang="en-US" b="0" i="1" smtClean="0">
-                          <a:latin typeface="Cambria Math" panose="02040503050406030204" pitchFamily="18" charset="0"/>
-                        </a:rPr>
-                        <m:t>𝛾</m:t>
-                      </m:r>
-                      <m:r>
-                        <a:rPr lang="en-US" b="0" i="1" smtClean="0">
-                          <a:latin typeface="Cambria Math" panose="02040503050406030204" pitchFamily="18" charset="0"/>
-                        </a:rPr>
-                        <m:t>&lt;1</m:t>
-                      </m:r>
-                    </m:oMath>
-                  </m:oMathPara>
-                </a14:m>
-                <a:endParaRPr lang="en-US" dirty="0"/>
-              </a:p>
-              <a:p>
-                <a:pPr marL="0" indent="0">
-                  <a:buNone/>
-                </a:pPr>
-                <a:endParaRPr lang="en-US" dirty="0"/>
-              </a:p>
-            </p:txBody>
-          </p:sp>
-        </mc:Choice>
-        <mc:Fallback xmlns="">
-          <p:sp>
-            <p:nvSpPr>
-              <p:cNvPr id="3" name="Content Placeholder 2">
-                <a:extLst>
-                  <a:ext uri="{FF2B5EF4-FFF2-40B4-BE49-F238E27FC236}">
-                    <a16:creationId xmlns:a16="http://schemas.microsoft.com/office/drawing/2014/main" id="{1FC648E6-02D2-1E64-6265-DB7D1C1179F6}"/>
-                  </a:ext>
-                </a:extLst>
-              </p:cNvPr>
-              <p:cNvSpPr>
-                <a:spLocks noGrp="1" noRot="1" noChangeAspect="1" noMove="1" noResize="1" noEditPoints="1" noAdjustHandles="1" noChangeArrowheads="1" noChangeShapeType="1" noTextEdit="1"/>
-              </p:cNvSpPr>
-              <p:nvPr>
-                <p:ph idx="1"/>
-              </p:nvPr>
-            </p:nvSpPr>
-            <p:spPr>
-              <a:xfrm>
-                <a:off x="838200" y="1397331"/>
-                <a:ext cx="8581869" cy="3189659"/>
-              </a:xfrm>
-              <a:blipFill>
-                <a:blip r:embed="rId2"/>
-                <a:stretch>
-                  <a:fillRect l="-640" t="-3250"/>
-                </a:stretch>
-              </a:blipFill>
-            </p:spPr>
-            <p:txBody>
-              <a:bodyPr/>
-              <a:lstStyle/>
-              <a:p>
-                <a:r>
-                  <a:rPr lang="en-US">
-                    <a:noFill/>
-                  </a:rPr>
-                  <a:t> </a:t>
-                </a:r>
-              </a:p>
-            </p:txBody>
-          </p:sp>
-        </mc:Fallback>
-      </mc:AlternateContent>
-      <mc:AlternateContent xmlns:mc="http://schemas.openxmlformats.org/markup-compatibility/2006" xmlns:a14="http://schemas.microsoft.com/office/drawing/2010/main">
-        <mc:Choice Requires="a14">
-          <p:sp>
-            <p:nvSpPr>
-              <p:cNvPr id="4" name="Speech Bubble: Rectangle with Corners Rounded 3">
-                <a:extLst>
-                  <a:ext uri="{FF2B5EF4-FFF2-40B4-BE49-F238E27FC236}">
-                    <a16:creationId xmlns:a16="http://schemas.microsoft.com/office/drawing/2014/main" id="{5515D800-FF17-B0C5-3048-BCF34084F051}"/>
-                  </a:ext>
-                </a:extLst>
-              </p:cNvPr>
-              <p:cNvSpPr/>
-              <p:nvPr/>
-            </p:nvSpPr>
-            <p:spPr>
-              <a:xfrm>
-                <a:off x="955193" y="5312558"/>
-                <a:ext cx="4051521" cy="1214547"/>
-              </a:xfrm>
-              <a:prstGeom prst="wedgeRoundRectCallout">
-                <a:avLst>
-                  <a:gd name="adj1" fmla="val 17160"/>
-                  <a:gd name="adj2" fmla="val -122557"/>
-                  <a:gd name="adj3" fmla="val 16667"/>
-                </a:avLst>
-              </a:prstGeom>
-            </p:spPr>
-            <p:style>
-              <a:lnRef idx="2">
-                <a:schemeClr val="accent1">
-                  <a:shade val="15000"/>
-                </a:schemeClr>
-              </a:lnRef>
-              <a:fillRef idx="1">
-                <a:schemeClr val="accent1"/>
-              </a:fillRef>
-              <a:effectRef idx="0">
-                <a:schemeClr val="accent1"/>
-              </a:effectRef>
-              <a:fontRef idx="minor">
-                <a:schemeClr val="lt1"/>
-              </a:fontRef>
-            </p:style>
-            <p:txBody>
-              <a:bodyPr rtlCol="0" anchor="ctr"/>
-              <a:lstStyle/>
-              <a:p>
-                <a:pPr algn="ctr"/>
-                <a:r>
-                  <a:rPr lang="en-US" dirty="0"/>
-                  <a:t>This means the largest difference (infinity norm) will be reduced by applying </a:t>
+                  <a:t>I.e. : Applying </a:t>
                 </a:r>
                 <a14:m>
                   <m:oMath xmlns:m="http://schemas.openxmlformats.org/officeDocument/2006/math">
@@ -7948,14 +9150,518 @@
                         </m:r>
                       </m:sup>
                     </m:sSup>
+                    <m:r>
+                      <a:rPr lang="en-US" i="1">
+                        <a:latin typeface="Cambria Math" panose="02040503050406030204" pitchFamily="18" charset="0"/>
+                      </a:rPr>
+                      <m:t> </m:t>
+                    </m:r>
                   </m:oMath>
                 </a14:m>
                 <a:r>
                   <a:rPr lang="en-US" dirty="0"/>
-                  <a:t>, leading to convergence to </a:t>
+                  <a:t>reduces the largest difference (infinity norm) between any arbitrary value functions </a:t>
                 </a:r>
                 <a14:m>
                   <m:oMath xmlns:m="http://schemas.openxmlformats.org/officeDocument/2006/math">
+                    <m:r>
+                      <a:rPr lang="en-US" b="0" i="1" smtClean="0">
+                        <a:latin typeface="Cambria Math" panose="02040503050406030204" pitchFamily="18" charset="0"/>
+                      </a:rPr>
+                      <m:t>𝑢</m:t>
+                    </m:r>
+                  </m:oMath>
+                </a14:m>
+                <a:r>
+                  <a:rPr lang="en-US" dirty="0"/>
+                  <a:t> and </a:t>
+                </a:r>
+                <a14:m>
+                  <m:oMath xmlns:m="http://schemas.openxmlformats.org/officeDocument/2006/math">
+                    <m:r>
+                      <a:rPr lang="en-US" b="0" i="1" smtClean="0">
+                        <a:latin typeface="Cambria Math" panose="02040503050406030204" pitchFamily="18" charset="0"/>
+                      </a:rPr>
+                      <m:t>𝑣</m:t>
+                    </m:r>
+                  </m:oMath>
+                </a14:m>
+                <a:r>
+                  <a:rPr lang="en-US" dirty="0"/>
+                  <a:t> by at least a factor of </a:t>
+                </a:r>
+                <a14:m>
+                  <m:oMath xmlns:m="http://schemas.openxmlformats.org/officeDocument/2006/math">
+                    <m:r>
+                      <a:rPr lang="en-US" i="1">
+                        <a:latin typeface="Cambria Math" panose="02040503050406030204" pitchFamily="18" charset="0"/>
+                      </a:rPr>
+                      <m:t>𝛾</m:t>
+                    </m:r>
+                  </m:oMath>
+                </a14:m>
+                <a:endParaRPr lang="en-US" dirty="0"/>
+              </a:p>
+              <a:p>
+                <a:r>
+                  <a:rPr lang="en-US" dirty="0"/>
+                  <a:t>This implies:</a:t>
+                </a:r>
+                <a:br>
+                  <a:rPr lang="en-US" dirty="0"/>
+                </a:br>
+                <a14:m>
+                  <m:oMath xmlns:m="http://schemas.openxmlformats.org/officeDocument/2006/math">
+                    <m:sSub>
+                      <m:sSubPr>
+                        <m:ctrlPr>
+                          <a:rPr lang="en-US" i="1">
+                            <a:latin typeface="Cambria Math" panose="02040503050406030204" pitchFamily="18" charset="0"/>
+                          </a:rPr>
+                        </m:ctrlPr>
+                      </m:sSubPr>
+                      <m:e>
+                        <m:d>
+                          <m:dPr>
+                            <m:begChr m:val="‖"/>
+                            <m:endChr m:val="‖"/>
+                            <m:ctrlPr>
+                              <a:rPr lang="en-US" i="1">
+                                <a:latin typeface="Cambria Math" panose="02040503050406030204" pitchFamily="18" charset="0"/>
+                              </a:rPr>
+                            </m:ctrlPr>
+                          </m:dPr>
+                          <m:e>
+                            <m:sSub>
+                              <m:sSubPr>
+                                <m:ctrlPr>
+                                  <a:rPr lang="en-US" i="1">
+                                    <a:latin typeface="Cambria Math" panose="02040503050406030204" pitchFamily="18" charset="0"/>
+                                  </a:rPr>
+                                </m:ctrlPr>
+                              </m:sSubPr>
+                              <m:e>
+                                <m:r>
+                                  <a:rPr lang="en-US" i="1">
+                                    <a:latin typeface="Cambria Math" panose="02040503050406030204" pitchFamily="18" charset="0"/>
+                                  </a:rPr>
+                                  <m:t>𝑣</m:t>
+                                </m:r>
+                              </m:e>
+                              <m:sub>
+                                <m:r>
+                                  <a:rPr lang="en-US" i="1">
+                                    <a:latin typeface="Cambria Math" panose="02040503050406030204" pitchFamily="18" charset="0"/>
+                                  </a:rPr>
+                                  <m:t>𝜋</m:t>
+                                </m:r>
+                              </m:sub>
+                            </m:sSub>
+                            <m:r>
+                              <a:rPr lang="en-US" i="1">
+                                <a:latin typeface="Cambria Math" panose="02040503050406030204" pitchFamily="18" charset="0"/>
+                              </a:rPr>
+                              <m:t>−</m:t>
+                            </m:r>
+                            <m:sSup>
+                              <m:sSupPr>
+                                <m:ctrlPr>
+                                  <a:rPr lang="en-US" i="1">
+                                    <a:latin typeface="Cambria Math" panose="02040503050406030204" pitchFamily="18" charset="0"/>
+                                  </a:rPr>
+                                </m:ctrlPr>
+                              </m:sSupPr>
+                              <m:e>
+                                <m:r>
+                                  <a:rPr lang="en-US" i="1">
+                                    <a:latin typeface="Cambria Math" panose="02040503050406030204" pitchFamily="18" charset="0"/>
+                                  </a:rPr>
+                                  <m:t>𝑇</m:t>
+                                </m:r>
+                              </m:e>
+                              <m:sup>
+                                <m:r>
+                                  <a:rPr lang="en-US" i="1">
+                                    <a:latin typeface="Cambria Math" panose="02040503050406030204" pitchFamily="18" charset="0"/>
+                                  </a:rPr>
+                                  <m:t>𝜋</m:t>
+                                </m:r>
+                              </m:sup>
+                            </m:sSup>
+                            <m:r>
+                              <a:rPr lang="en-US" i="1">
+                                <a:latin typeface="Cambria Math" panose="02040503050406030204" pitchFamily="18" charset="0"/>
+                              </a:rPr>
+                              <m:t>𝑣</m:t>
+                            </m:r>
+                          </m:e>
+                        </m:d>
+                      </m:e>
+                      <m:sub>
+                        <m:r>
+                          <a:rPr lang="en-US" i="1">
+                            <a:latin typeface="Cambria Math" panose="02040503050406030204" pitchFamily="18" charset="0"/>
+                          </a:rPr>
+                          <m:t>∞</m:t>
+                        </m:r>
+                      </m:sub>
+                    </m:sSub>
+                    <m:r>
+                      <a:rPr lang="en-US" i="1">
+                        <a:latin typeface="Cambria Math" panose="02040503050406030204" pitchFamily="18" charset="0"/>
+                      </a:rPr>
+                      <m:t>≤ </m:t>
+                    </m:r>
+                    <m:sSub>
+                      <m:sSubPr>
+                        <m:ctrlPr>
+                          <a:rPr lang="en-US" i="1">
+                            <a:latin typeface="Cambria Math" panose="02040503050406030204" pitchFamily="18" charset="0"/>
+                          </a:rPr>
+                        </m:ctrlPr>
+                      </m:sSubPr>
+                      <m:e>
+                        <m:r>
+                          <a:rPr lang="en-US" i="1">
+                            <a:latin typeface="Cambria Math" panose="02040503050406030204" pitchFamily="18" charset="0"/>
+                          </a:rPr>
+                          <m:t>𝛾</m:t>
+                        </m:r>
+                        <m:d>
+                          <m:dPr>
+                            <m:begChr m:val="‖"/>
+                            <m:endChr m:val="‖"/>
+                            <m:ctrlPr>
+                              <a:rPr lang="en-US" i="1">
+                                <a:latin typeface="Cambria Math" panose="02040503050406030204" pitchFamily="18" charset="0"/>
+                              </a:rPr>
+                            </m:ctrlPr>
+                          </m:dPr>
+                          <m:e>
+                            <m:sSub>
+                              <m:sSubPr>
+                                <m:ctrlPr>
+                                  <a:rPr lang="en-US" i="1">
+                                    <a:latin typeface="Cambria Math" panose="02040503050406030204" pitchFamily="18" charset="0"/>
+                                  </a:rPr>
+                                </m:ctrlPr>
+                              </m:sSubPr>
+                              <m:e>
+                                <m:r>
+                                  <a:rPr lang="en-US" i="1">
+                                    <a:latin typeface="Cambria Math" panose="02040503050406030204" pitchFamily="18" charset="0"/>
+                                  </a:rPr>
+                                  <m:t>𝑣</m:t>
+                                </m:r>
+                              </m:e>
+                              <m:sub>
+                                <m:r>
+                                  <a:rPr lang="en-US" i="1">
+                                    <a:latin typeface="Cambria Math" panose="02040503050406030204" pitchFamily="18" charset="0"/>
+                                  </a:rPr>
+                                  <m:t>𝜋</m:t>
+                                </m:r>
+                              </m:sub>
+                            </m:sSub>
+                            <m:r>
+                              <a:rPr lang="en-US" i="1">
+                                <a:latin typeface="Cambria Math" panose="02040503050406030204" pitchFamily="18" charset="0"/>
+                              </a:rPr>
+                              <m:t>−</m:t>
+                            </m:r>
+                            <m:r>
+                              <a:rPr lang="en-US" i="1">
+                                <a:latin typeface="Cambria Math" panose="02040503050406030204" pitchFamily="18" charset="0"/>
+                              </a:rPr>
+                              <m:t>𝑣</m:t>
+                            </m:r>
+                          </m:e>
+                        </m:d>
+                      </m:e>
+                      <m:sub>
+                        <m:r>
+                          <a:rPr lang="en-US" i="1">
+                            <a:latin typeface="Cambria Math" panose="02040503050406030204" pitchFamily="18" charset="0"/>
+                          </a:rPr>
+                          <m:t>∞</m:t>
+                        </m:r>
+                      </m:sub>
+                    </m:sSub>
+                    <m:r>
+                      <a:rPr lang="en-US" i="1">
+                        <a:latin typeface="Cambria Math" panose="02040503050406030204" pitchFamily="18" charset="0"/>
+                      </a:rPr>
+                      <m:t>  </m:t>
+                    </m:r>
+                    <m:r>
+                      <m:rPr>
+                        <m:nor/>
+                      </m:rPr>
+                      <a:rPr lang="en-US" i="0">
+                        <a:latin typeface="Cambria Math" panose="02040503050406030204" pitchFamily="18" charset="0"/>
+                      </a:rPr>
+                      <m:t> for any   </m:t>
+                    </m:r>
+                    <m:r>
+                      <a:rPr lang="en-US" i="1">
+                        <a:latin typeface="Cambria Math" panose="02040503050406030204" pitchFamily="18" charset="0"/>
+                      </a:rPr>
+                      <m:t>𝛾</m:t>
+                    </m:r>
+                    <m:r>
+                      <a:rPr lang="en-US" i="1">
+                        <a:latin typeface="Cambria Math" panose="02040503050406030204" pitchFamily="18" charset="0"/>
+                      </a:rPr>
+                      <m:t>&lt;1</m:t>
+                    </m:r>
+                  </m:oMath>
+                </a14:m>
+                <a:endParaRPr lang="en-US" dirty="0"/>
+              </a:p>
+              <a:p>
+                <a:pPr marL="0" indent="0">
+                  <a:buNone/>
+                </a:pPr>
+                <a:endParaRPr lang="en-US" b="0" i="1" dirty="0">
+                  <a:latin typeface="Cambria Math" panose="02040503050406030204" pitchFamily="18" charset="0"/>
+                </a:endParaRPr>
+              </a:p>
+              <a:p>
+                <a:pPr marL="0" indent="0">
+                  <a:buNone/>
+                </a:pPr>
+                <a:endParaRPr lang="en-US" dirty="0"/>
+              </a:p>
+            </p:txBody>
+          </p:sp>
+        </mc:Choice>
+        <mc:Fallback>
+          <p:sp>
+            <p:nvSpPr>
+              <p:cNvPr id="3" name="Content Placeholder 2">
+                <a:extLst>
+                  <a:ext uri="{FF2B5EF4-FFF2-40B4-BE49-F238E27FC236}">
+                    <a16:creationId xmlns:a16="http://schemas.microsoft.com/office/drawing/2014/main" id="{1FC648E6-02D2-1E64-6265-DB7D1C1179F6}"/>
+                  </a:ext>
+                </a:extLst>
+              </p:cNvPr>
+              <p:cNvSpPr>
+                <a:spLocks noGrp="1" noRot="1" noChangeAspect="1" noMove="1" noResize="1" noEditPoints="1" noAdjustHandles="1" noChangeArrowheads="1" noChangeShapeType="1" noTextEdit="1"/>
+              </p:cNvSpPr>
+              <p:nvPr>
+                <p:ph idx="1"/>
+              </p:nvPr>
+            </p:nvSpPr>
+            <p:spPr>
+              <a:xfrm>
+                <a:off x="838200" y="1397330"/>
+                <a:ext cx="8581869" cy="4145562"/>
+              </a:xfrm>
+              <a:blipFill>
+                <a:blip r:embed="rId2"/>
+                <a:stretch>
+                  <a:fillRect l="-213" t="-5147"/>
+                </a:stretch>
+              </a:blipFill>
+            </p:spPr>
+            <p:txBody>
+              <a:bodyPr/>
+              <a:lstStyle/>
+              <a:p>
+                <a:r>
+                  <a:rPr lang="en-US">
+                    <a:noFill/>
+                  </a:rPr>
+                  <a:t> </a:t>
+                </a:r>
+              </a:p>
+            </p:txBody>
+          </p:sp>
+        </mc:Fallback>
+      </mc:AlternateContent>
+      <mc:AlternateContent xmlns:mc="http://schemas.openxmlformats.org/markup-compatibility/2006" xmlns:a14="http://schemas.microsoft.com/office/drawing/2010/main">
+        <mc:Choice Requires="a14">
+          <p:sp>
+            <p:nvSpPr>
+              <p:cNvPr id="5" name="Speech Bubble: Rectangle with Corners Rounded 4">
+                <a:extLst>
+                  <a:ext uri="{FF2B5EF4-FFF2-40B4-BE49-F238E27FC236}">
+                    <a16:creationId xmlns:a16="http://schemas.microsoft.com/office/drawing/2014/main" id="{32C5A7CC-4FA8-C473-6FA9-CC4B56CECEA4}"/>
+                  </a:ext>
+                </a:extLst>
+              </p:cNvPr>
+              <p:cNvSpPr/>
+              <p:nvPr/>
+            </p:nvSpPr>
+            <p:spPr>
+              <a:xfrm>
+                <a:off x="3507303" y="5630091"/>
+                <a:ext cx="3363494" cy="718762"/>
+              </a:xfrm>
+              <a:prstGeom prst="wedgeRoundRectCallout">
+                <a:avLst>
+                  <a:gd name="adj1" fmla="val -17540"/>
+                  <a:gd name="adj2" fmla="val -93676"/>
+                  <a:gd name="adj3" fmla="val 16667"/>
+                </a:avLst>
+              </a:prstGeom>
+            </p:spPr>
+            <p:style>
+              <a:lnRef idx="2">
+                <a:schemeClr val="accent1">
+                  <a:shade val="15000"/>
+                </a:schemeClr>
+              </a:lnRef>
+              <a:fillRef idx="1">
+                <a:schemeClr val="accent1"/>
+              </a:fillRef>
+              <a:effectRef idx="0">
+                <a:schemeClr val="accent1"/>
+              </a:effectRef>
+              <a:fontRef idx="minor">
+                <a:schemeClr val="lt1"/>
+              </a:fontRef>
+            </p:style>
+            <p:txBody>
+              <a:bodyPr rtlCol="0" anchor="ctr"/>
+              <a:lstStyle/>
+              <a:p>
+                <a:pPr algn="ctr"/>
+                <a:r>
+                  <a:rPr lang="en-US" b="0" dirty="0"/>
+                  <a:t>Convergence if </a:t>
+                </a:r>
+                <a14:m>
+                  <m:oMath xmlns:m="http://schemas.openxmlformats.org/officeDocument/2006/math">
+                    <m:r>
+                      <a:rPr lang="en-US" i="1">
+                        <a:latin typeface="Cambria Math" panose="02040503050406030204" pitchFamily="18" charset="0"/>
+                      </a:rPr>
+                      <m:t>𝛾</m:t>
+                    </m:r>
+                    <m:r>
+                      <a:rPr lang="en-US" i="1">
+                        <a:latin typeface="Cambria Math" panose="02040503050406030204" pitchFamily="18" charset="0"/>
+                      </a:rPr>
+                      <m:t>&lt;1</m:t>
+                    </m:r>
+                  </m:oMath>
+                </a14:m>
+                <a:r>
+                  <a:rPr lang="en-US" b="0" dirty="0"/>
+                  <a:t>:</a:t>
+                </a:r>
+                <a:br>
+                  <a:rPr lang="en-US" b="0" dirty="0"/>
+                </a:br>
+                <a14:m>
+                  <m:oMath xmlns:m="http://schemas.openxmlformats.org/officeDocument/2006/math">
+                    <m:sSup>
+                      <m:sSupPr>
+                        <m:ctrlPr>
+                          <a:rPr lang="en-US" i="1">
+                            <a:latin typeface="Cambria Math" panose="02040503050406030204" pitchFamily="18" charset="0"/>
+                          </a:rPr>
+                        </m:ctrlPr>
+                      </m:sSupPr>
+                      <m:e>
+                        <m:r>
+                          <a:rPr lang="en-US" i="1">
+                            <a:latin typeface="Cambria Math" panose="02040503050406030204" pitchFamily="18" charset="0"/>
+                          </a:rPr>
+                          <m:t>𝑇</m:t>
+                        </m:r>
+                      </m:e>
+                      <m:sup>
+                        <m:r>
+                          <a:rPr lang="en-US" i="1">
+                            <a:latin typeface="Cambria Math" panose="02040503050406030204" pitchFamily="18" charset="0"/>
+                          </a:rPr>
+                          <m:t>𝜋</m:t>
+                        </m:r>
+                      </m:sup>
+                    </m:sSup>
+                    <m:sSup>
+                      <m:sSupPr>
+                        <m:ctrlPr>
+                          <a:rPr lang="en-US" i="1">
+                            <a:latin typeface="Cambria Math" panose="02040503050406030204" pitchFamily="18" charset="0"/>
+                          </a:rPr>
+                        </m:ctrlPr>
+                      </m:sSupPr>
+                      <m:e>
+                        <m:r>
+                          <a:rPr lang="en-US" i="1">
+                            <a:latin typeface="Cambria Math" panose="02040503050406030204" pitchFamily="18" charset="0"/>
+                          </a:rPr>
+                          <m:t>𝑇</m:t>
+                        </m:r>
+                      </m:e>
+                      <m:sup>
+                        <m:r>
+                          <a:rPr lang="en-US" i="1">
+                            <a:latin typeface="Cambria Math" panose="02040503050406030204" pitchFamily="18" charset="0"/>
+                          </a:rPr>
+                          <m:t>𝜋</m:t>
+                        </m:r>
+                      </m:sup>
+                    </m:sSup>
+                    <m:sSup>
+                      <m:sSupPr>
+                        <m:ctrlPr>
+                          <a:rPr lang="en-US" i="1">
+                            <a:latin typeface="Cambria Math" panose="02040503050406030204" pitchFamily="18" charset="0"/>
+                          </a:rPr>
+                        </m:ctrlPr>
+                      </m:sSupPr>
+                      <m:e>
+                        <m:r>
+                          <a:rPr lang="en-US" i="1">
+                            <a:latin typeface="Cambria Math" panose="02040503050406030204" pitchFamily="18" charset="0"/>
+                          </a:rPr>
+                          <m:t>𝑇</m:t>
+                        </m:r>
+                      </m:e>
+                      <m:sup>
+                        <m:r>
+                          <a:rPr lang="en-US" i="1">
+                            <a:latin typeface="Cambria Math" panose="02040503050406030204" pitchFamily="18" charset="0"/>
+                          </a:rPr>
+                          <m:t>𝜋</m:t>
+                        </m:r>
+                      </m:sup>
+                    </m:sSup>
+                    <m:r>
+                      <a:rPr lang="en-US" b="0" i="1" smtClean="0">
+                        <a:latin typeface="Cambria Math" panose="02040503050406030204" pitchFamily="18" charset="0"/>
+                      </a:rPr>
+                      <m:t>…</m:t>
+                    </m:r>
+                    <m:sSup>
+                      <m:sSupPr>
+                        <m:ctrlPr>
+                          <a:rPr lang="en-US" i="1">
+                            <a:latin typeface="Cambria Math" panose="02040503050406030204" pitchFamily="18" charset="0"/>
+                          </a:rPr>
+                        </m:ctrlPr>
+                      </m:sSupPr>
+                      <m:e>
+                        <m:r>
+                          <a:rPr lang="en-US" i="1">
+                            <a:latin typeface="Cambria Math" panose="02040503050406030204" pitchFamily="18" charset="0"/>
+                          </a:rPr>
+                          <m:t>𝑇</m:t>
+                        </m:r>
+                      </m:e>
+                      <m:sup>
+                        <m:r>
+                          <a:rPr lang="en-US" i="1">
+                            <a:latin typeface="Cambria Math" panose="02040503050406030204" pitchFamily="18" charset="0"/>
+                          </a:rPr>
+                          <m:t>𝜋</m:t>
+                        </m:r>
+                      </m:sup>
+                    </m:sSup>
                     <m:r>
                       <a:rPr lang="en-US" b="0" i="1" smtClean="0">
                         <a:latin typeface="Cambria Math" panose="02040503050406030204" pitchFamily="18" charset="0"/>
@@ -7966,7 +9672,7 @@
                       <a:rPr lang="en-US" b="0" i="1" smtClean="0">
                         <a:latin typeface="Cambria Math" panose="02040503050406030204" pitchFamily="18" charset="0"/>
                       </a:rPr>
-                      <m:t>=</m:t>
+                      <m:t> →</m:t>
                     </m:r>
                     <m:sSub>
                       <m:sSubPr>
@@ -7997,7 +9703,21 @@
                 </a14:m>
                 <a:r>
                   <a:rPr lang="en-US" dirty="0"/>
-                  <a:t> when is applied many times.</a:t>
+                  <a:t> for any </a:t>
+                </a:r>
+                <a14:m>
+                  <m:oMath xmlns:m="http://schemas.openxmlformats.org/officeDocument/2006/math">
+                    <m:r>
+                      <a:rPr lang="en-US" i="1">
+                        <a:latin typeface="Cambria Math" panose="02040503050406030204" pitchFamily="18" charset="0"/>
+                      </a:rPr>
+                      <m:t>𝑣</m:t>
+                    </m:r>
+                  </m:oMath>
+                </a14:m>
+                <a:r>
+                  <a:rPr lang="en-US" dirty="0"/>
+                  <a:t> </a:t>
                 </a:r>
               </a:p>
             </p:txBody>
@@ -8006,10 +9726,10 @@
         <mc:Fallback xmlns="">
           <p:sp>
             <p:nvSpPr>
-              <p:cNvPr id="4" name="Speech Bubble: Rectangle with Corners Rounded 3">
+              <p:cNvPr id="5" name="Speech Bubble: Rectangle with Corners Rounded 4">
                 <a:extLst>
                   <a:ext uri="{FF2B5EF4-FFF2-40B4-BE49-F238E27FC236}">
-                    <a16:creationId xmlns:a16="http://schemas.microsoft.com/office/drawing/2014/main" id="{5515D800-FF17-B0C5-3048-BCF34084F051}"/>
+                    <a16:creationId xmlns:a16="http://schemas.microsoft.com/office/drawing/2014/main" id="{32C5A7CC-4FA8-C473-6FA9-CC4B56CECEA4}"/>
                   </a:ext>
                 </a:extLst>
               </p:cNvPr>
@@ -8020,20 +9740,20 @@
             </p:nvSpPr>
             <p:spPr>
               <a:xfrm>
-                <a:off x="955193" y="5312558"/>
-                <a:ext cx="4051521" cy="1214547"/>
+                <a:off x="3507303" y="5630091"/>
+                <a:ext cx="3363494" cy="718762"/>
               </a:xfrm>
               <a:prstGeom prst="wedgeRoundRectCallout">
                 <a:avLst>
-                  <a:gd name="adj1" fmla="val 17160"/>
-                  <a:gd name="adj2" fmla="val -122557"/>
+                  <a:gd name="adj1" fmla="val -17540"/>
+                  <a:gd name="adj2" fmla="val -93676"/>
                   <a:gd name="adj3" fmla="val 16667"/>
                 </a:avLst>
               </a:prstGeom>
               <a:blipFill>
                 <a:blip r:embed="rId3"/>
                 <a:stretch>
-                  <a:fillRect b="-3714"/>
+                  <a:fillRect b="-5233"/>
                 </a:stretch>
               </a:blipFill>
             </p:spPr>
@@ -8052,59 +9772,6 @@
           </p:sp>
         </mc:Fallback>
       </mc:AlternateContent>
-      <p:sp>
-        <p:nvSpPr>
-          <p:cNvPr id="5" name="Speech Bubble: Rectangle with Corners Rounded 4">
-            <a:extLst>
-              <a:ext uri="{FF2B5EF4-FFF2-40B4-BE49-F238E27FC236}">
-                <a16:creationId xmlns:a16="http://schemas.microsoft.com/office/drawing/2014/main" id="{32C5A7CC-4FA8-C473-6FA9-CC4B56CECEA4}"/>
-              </a:ext>
-            </a:extLst>
-          </p:cNvPr>
-          <p:cNvSpPr/>
-          <p:nvPr/>
-        </p:nvSpPr>
-        <p:spPr>
-          <a:xfrm>
-            <a:off x="7547488" y="5278327"/>
-            <a:ext cx="3363494" cy="1214547"/>
-          </a:xfrm>
-          <a:prstGeom prst="wedgeRoundRectCallout">
-            <a:avLst>
-              <a:gd name="adj1" fmla="val -46485"/>
-              <a:gd name="adj2" fmla="val -122726"/>
-              <a:gd name="adj3" fmla="val 16667"/>
-            </a:avLst>
-          </a:prstGeom>
-        </p:spPr>
-        <p:style>
-          <a:lnRef idx="2">
-            <a:schemeClr val="accent1">
-              <a:shade val="15000"/>
-            </a:schemeClr>
-          </a:lnRef>
-          <a:fillRef idx="1">
-            <a:schemeClr val="accent1"/>
-          </a:fillRef>
-          <a:effectRef idx="0">
-            <a:schemeClr val="accent1"/>
-          </a:effectRef>
-          <a:fontRef idx="minor">
-            <a:schemeClr val="lt1"/>
-          </a:fontRef>
-        </p:style>
-        <p:txBody>
-          <a:bodyPr rtlCol="0" anchor="ctr"/>
-          <a:lstStyle/>
-          <a:p>
-            <a:pPr algn="ctr"/>
-            <a:r>
-              <a:rPr lang="en-US" dirty="0"/>
-              <a:t>Convergence is guaranteed if the discount factor is strictly smaller than 1!</a:t>
-            </a:r>
-          </a:p>
-        </p:txBody>
-      </p:sp>
       <mc:AlternateContent xmlns:mc="http://schemas.openxmlformats.org/markup-compatibility/2006" xmlns:a14="http://schemas.microsoft.com/office/drawing/2010/main">
         <mc:Choice Requires="a14">
           <p:sp>
@@ -8122,7 +9789,7 @@
             <p:spPr>
               <a:xfrm>
                 <a:off x="9229235" y="1195993"/>
-                <a:ext cx="2227288" cy="2084225"/>
+                <a:ext cx="2227288" cy="1323439"/>
               </a:xfrm>
               <a:prstGeom prst="rect">
                 <a:avLst/>
@@ -8309,117 +9976,6 @@
                 </a14:m>
                 <a:endParaRPr lang="en-US" sz="1600" b="0" dirty="0"/>
               </a:p>
-              <a:p>
-                <a:endParaRPr lang="en-US" sz="1600" dirty="0"/>
-              </a:p>
-              <a:p>
-                <a:r>
-                  <a:rPr lang="en-US" sz="1600" dirty="0"/>
-                  <a:t>Note:</a:t>
-                </a:r>
-              </a:p>
-              <a:p>
-                <a:pPr/>
-                <a14:m>
-                  <m:oMathPara xmlns:m="http://schemas.openxmlformats.org/officeDocument/2006/math">
-                    <m:oMath>
-                      <m:sSub>
-                        <m:sSubPr>
-                          <m:ctrlPr>
-                            <a:rPr lang="en-US" sz="1600" i="1">
-                              <a:latin typeface="Cambria Math" panose="02040503050406030204" pitchFamily="18" charset="0"/>
-                            </a:rPr>
-                          </m:ctrlPr>
-                        </m:sSubPr>
-                        <m:e>
-                          <m:r>
-                            <a:rPr lang="en-US" sz="1600" i="1">
-                              <a:latin typeface="Cambria Math" panose="02040503050406030204" pitchFamily="18" charset="0"/>
-                            </a:rPr>
-                            <m:t>𝑣</m:t>
-                          </m:r>
-                        </m:e>
-                        <m:sub>
-                          <m:r>
-                            <a:rPr lang="en-US" sz="1600" b="0" i="1" smtClean="0">
-                              <a:latin typeface="Cambria Math" panose="02040503050406030204" pitchFamily="18" charset="0"/>
-                            </a:rPr>
-                            <m:t>𝜋</m:t>
-                          </m:r>
-                        </m:sub>
-                      </m:sSub>
-                      <m:r>
-                        <a:rPr lang="en-US" sz="1600" i="1">
-                          <a:latin typeface="Cambria Math" panose="02040503050406030204" pitchFamily="18" charset="0"/>
-                        </a:rPr>
-                        <m:t>=</m:t>
-                      </m:r>
-                      <m:sSup>
-                        <m:sSupPr>
-                          <m:ctrlPr>
-                            <a:rPr lang="en-US" sz="1600" i="1">
-                              <a:latin typeface="Cambria Math" panose="02040503050406030204" pitchFamily="18" charset="0"/>
-                            </a:rPr>
-                          </m:ctrlPr>
-                        </m:sSupPr>
-                        <m:e>
-                          <m:r>
-                            <a:rPr lang="en-US" sz="1600" i="1">
-                              <a:latin typeface="Cambria Math" panose="02040503050406030204" pitchFamily="18" charset="0"/>
-                            </a:rPr>
-                            <m:t>𝑇</m:t>
-                          </m:r>
-                        </m:e>
-                        <m:sup>
-                          <m:r>
-                            <a:rPr lang="en-US" sz="1600" i="1">
-                              <a:latin typeface="Cambria Math" panose="02040503050406030204" pitchFamily="18" charset="0"/>
-                            </a:rPr>
-                            <m:t>𝜋</m:t>
-                          </m:r>
-                        </m:sup>
-                      </m:sSup>
-                      <m:d>
-                        <m:dPr>
-                          <m:ctrlPr>
-                            <a:rPr lang="en-US" sz="1600" i="1">
-                              <a:latin typeface="Cambria Math" panose="02040503050406030204" pitchFamily="18" charset="0"/>
-                            </a:rPr>
-                          </m:ctrlPr>
-                        </m:dPr>
-                        <m:e>
-                          <m:sSub>
-                            <m:sSubPr>
-                              <m:ctrlPr>
-                                <a:rPr lang="en-US" sz="1600" i="1">
-                                  <a:latin typeface="Cambria Math" panose="02040503050406030204" pitchFamily="18" charset="0"/>
-                                </a:rPr>
-                              </m:ctrlPr>
-                            </m:sSubPr>
-                            <m:e>
-                              <m:r>
-                                <a:rPr lang="en-US" sz="1600" i="1">
-                                  <a:latin typeface="Cambria Math" panose="02040503050406030204" pitchFamily="18" charset="0"/>
-                                </a:rPr>
-                                <m:t>𝑣</m:t>
-                              </m:r>
-                            </m:e>
-                            <m:sub>
-                              <m:r>
-                                <a:rPr lang="en-US" sz="1600" b="0" i="1" smtClean="0">
-                                  <a:latin typeface="Cambria Math" panose="02040503050406030204" pitchFamily="18" charset="0"/>
-                                </a:rPr>
-                                <m:t>𝜋</m:t>
-                              </m:r>
-                            </m:sub>
-                          </m:sSub>
-                        </m:e>
-                      </m:d>
-                    </m:oMath>
-                  </m:oMathPara>
-                </a14:m>
-                <a:endParaRPr lang="en-US" sz="1600" dirty="0"/>
-              </a:p>
             </p:txBody>
           </p:sp>
         </mc:Choice>
@@ -8441,15 +9997,15 @@
             <p:spPr>
               <a:xfrm>
                 <a:off x="9229235" y="1195993"/>
-                <a:ext cx="2227288" cy="2084225"/>
+                <a:ext cx="2227288" cy="1323439"/>
               </a:xfrm>
               <a:prstGeom prst="rect">
                 <a:avLst/>
               </a:prstGeom>
               <a:blipFill>
-                <a:blip r:embed="rId4"/>
+                <a:blip r:embed="rId5"/>
                 <a:stretch>
-                  <a:fillRect l="-1359" t="-580"/>
+                  <a:fillRect l="-1359" t="-909" b="-4091"/>
                 </a:stretch>
               </a:blipFill>
             </p:spPr>
@@ -8470,10 +10026,10 @@
       </mc:AlternateContent>
       <p:grpSp>
         <p:nvGrpSpPr>
-          <p:cNvPr id="8" name="Group 7">
+          <p:cNvPr id="28" name="Group 27">
             <a:extLst>
               <a:ext uri="{FF2B5EF4-FFF2-40B4-BE49-F238E27FC236}">
-                <a16:creationId xmlns:a16="http://schemas.microsoft.com/office/drawing/2014/main" id="{73DFF17E-DF67-BABC-A51D-6F73F6245657}"/>
+                <a16:creationId xmlns:a16="http://schemas.microsoft.com/office/drawing/2014/main" id="{6FA554BD-05FF-369E-7672-880FEF6243EC}"/>
               </a:ext>
             </a:extLst>
           </p:cNvPr>
@@ -8482,18 +10038,18 @@
         </p:nvGrpSpPr>
         <p:grpSpPr>
           <a:xfrm>
-            <a:off x="9065494" y="3469270"/>
-            <a:ext cx="2854818" cy="1480504"/>
-            <a:chOff x="8867761" y="4764111"/>
-            <a:chExt cx="2854818" cy="1480504"/>
+            <a:off x="9027743" y="4880328"/>
+            <a:ext cx="2854818" cy="1745524"/>
+            <a:chOff x="9027743" y="4880328"/>
+            <a:chExt cx="2854818" cy="1745524"/>
           </a:xfrm>
         </p:grpSpPr>
         <p:grpSp>
           <p:nvGrpSpPr>
-            <p:cNvPr id="9" name="Group 8" descr="Updating the value function using iterative Bellman updates.">
+            <p:cNvPr id="8" name="Group 7">
               <a:extLst>
                 <a:ext uri="{FF2B5EF4-FFF2-40B4-BE49-F238E27FC236}">
-                  <a16:creationId xmlns:a16="http://schemas.microsoft.com/office/drawing/2014/main" id="{5E13A197-79F1-6CAE-0A97-FAA7508CBCC7}"/>
+                  <a16:creationId xmlns:a16="http://schemas.microsoft.com/office/drawing/2014/main" id="{73DFF17E-DF67-BABC-A51D-6F73F6245657}"/>
                 </a:ext>
               </a:extLst>
             </p:cNvPr>
@@ -8502,1453 +10058,1603 @@
           </p:nvGrpSpPr>
           <p:grpSpPr>
             <a:xfrm>
-              <a:off x="8867761" y="4764111"/>
-              <a:ext cx="2854818" cy="1428805"/>
-              <a:chOff x="9337182" y="2229868"/>
-              <a:chExt cx="2854818" cy="1428805"/>
+              <a:off x="9027743" y="4880328"/>
+              <a:ext cx="2854818" cy="1745524"/>
+              <a:chOff x="8867761" y="4499091"/>
+              <a:chExt cx="2854818" cy="1745524"/>
             </a:xfrm>
           </p:grpSpPr>
-          <p:cxnSp>
-            <p:nvCxnSpPr>
-              <p:cNvPr id="11" name="Straight Connector 10">
+          <p:grpSp>
+            <p:nvGrpSpPr>
+              <p:cNvPr id="9" name="Group 8" descr="Updating the value function using iterative Bellman updates.">
                 <a:extLst>
                   <a:ext uri="{FF2B5EF4-FFF2-40B4-BE49-F238E27FC236}">
-                    <a16:creationId xmlns:a16="http://schemas.microsoft.com/office/drawing/2014/main" id="{8A7CFF6D-44E5-4AC6-F8FA-305C74E68FE9}"/>
-                  </a:ext>
-                  <a:ext uri="{C183D7F6-B498-43B3-948B-1728B52AA6E4}">
-                    <adec:decorative xmlns:adec="http://schemas.microsoft.com/office/drawing/2017/decorative" val="1"/>
+                    <a16:creationId xmlns:a16="http://schemas.microsoft.com/office/drawing/2014/main" id="{5E13A197-79F1-6CAE-0A97-FAA7508CBCC7}"/>
                   </a:ext>
                 </a:extLst>
               </p:cNvPr>
-              <p:cNvCxnSpPr>
-                <a:cxnSpLocks/>
-              </p:cNvCxnSpPr>
+              <p:cNvGrpSpPr/>
               <p:nvPr/>
-            </p:nvCxnSpPr>
-            <p:spPr>
+            </p:nvGrpSpPr>
+            <p:grpSpPr>
               <a:xfrm>
-                <a:off x="9337182" y="3124199"/>
-                <a:ext cx="2393078" cy="0"/>
+                <a:off x="8867761" y="4499091"/>
+                <a:ext cx="2854818" cy="1693825"/>
+                <a:chOff x="9337182" y="1964848"/>
+                <a:chExt cx="2854818" cy="1693825"/>
               </a:xfrm>
-              <a:prstGeom prst="line">
-                <a:avLst/>
-              </a:prstGeom>
-            </p:spPr>
-            <p:style>
-              <a:lnRef idx="1">
-                <a:schemeClr val="accent1"/>
-              </a:lnRef>
-              <a:fillRef idx="0">
-                <a:schemeClr val="accent1"/>
-              </a:fillRef>
-              <a:effectRef idx="0">
-                <a:schemeClr val="accent1"/>
-              </a:effectRef>
-              <a:fontRef idx="minor">
-                <a:schemeClr val="tx1"/>
-              </a:fontRef>
-            </p:style>
-          </p:cxnSp>
-          <mc:AlternateContent xmlns:mc="http://schemas.openxmlformats.org/markup-compatibility/2006" xmlns:a14="http://schemas.microsoft.com/office/drawing/2010/main">
-            <mc:Choice Requires="a14">
-              <p:sp>
-                <p:nvSpPr>
-                  <p:cNvPr id="12" name="TextBox 8">
-                    <a:extLst>
-                      <a:ext uri="{FF2B5EF4-FFF2-40B4-BE49-F238E27FC236}">
-                        <a16:creationId xmlns:a16="http://schemas.microsoft.com/office/drawing/2014/main" id="{FC62ADE9-9B2E-0CE9-B525-28B9E250FACF}"/>
-                      </a:ext>
-                      <a:ext uri="{C183D7F6-B498-43B3-948B-1728B52AA6E4}">
-                        <adec:decorative xmlns:adec="http://schemas.microsoft.com/office/drawing/2017/decorative" val="1"/>
-                      </a:ext>
-                    </a:extLst>
-                  </p:cNvPr>
-                  <p:cNvSpPr txBox="1"/>
-                  <p:nvPr/>
-                </p:nvSpPr>
-                <p:spPr>
-                  <a:xfrm>
-                    <a:off x="11425004" y="3092683"/>
-                    <a:ext cx="766996" cy="369332"/>
-                  </a:xfrm>
-                  <a:prstGeom prst="rect">
-                    <a:avLst/>
-                  </a:prstGeom>
-                  <a:noFill/>
-                </p:spPr>
-                <p:txBody>
-                  <a:bodyPr wrap="square">
-                    <a:spAutoFit/>
-                  </a:bodyPr>
-                  <a:lstStyle>
-                    <a:defPPr>
-                      <a:defRPr lang="en-US"/>
-                    </a:defPPr>
-                    <a:lvl1pPr marL="0" algn="l" defTabSz="914400" rtl="0" eaLnBrk="1" latinLnBrk="0" hangingPunct="1">
-                      <a:defRPr sz="1800" kern="1200">
-                        <a:solidFill>
-                          <a:schemeClr val="tx1"/>
-                        </a:solidFill>
-                        <a:latin typeface="+mn-lt"/>
-                        <a:ea typeface="+mn-ea"/>
-                        <a:cs typeface="+mn-cs"/>
-                      </a:defRPr>
-                    </a:lvl1pPr>
-                    <a:lvl2pPr marL="457200" algn="l" defTabSz="914400" rtl="0" eaLnBrk="1" latinLnBrk="0" hangingPunct="1">
-                      <a:defRPr sz="1800" kern="1200">
-                        <a:solidFill>
-                          <a:schemeClr val="tx1"/>
-                        </a:solidFill>
-                        <a:latin typeface="+mn-lt"/>
-                        <a:ea typeface="+mn-ea"/>
-                        <a:cs typeface="+mn-cs"/>
-                      </a:defRPr>
-                    </a:lvl2pPr>
-                    <a:lvl3pPr marL="914400" algn="l" defTabSz="914400" rtl="0" eaLnBrk="1" latinLnBrk="0" hangingPunct="1">
-                      <a:defRPr sz="1800" kern="1200">
-                        <a:solidFill>
-                          <a:schemeClr val="tx1"/>
-                        </a:solidFill>
-                        <a:latin typeface="+mn-lt"/>
-                        <a:ea typeface="+mn-ea"/>
-                        <a:cs typeface="+mn-cs"/>
-                      </a:defRPr>
-                    </a:lvl3pPr>
-                    <a:lvl4pPr marL="1371600" algn="l" defTabSz="914400" rtl="0" eaLnBrk="1" latinLnBrk="0" hangingPunct="1">
-                      <a:defRPr sz="1800" kern="1200">
-                        <a:solidFill>
-                          <a:schemeClr val="tx1"/>
-                        </a:solidFill>
-                        <a:latin typeface="+mn-lt"/>
-                        <a:ea typeface="+mn-ea"/>
-                        <a:cs typeface="+mn-cs"/>
-                      </a:defRPr>
-                    </a:lvl4pPr>
-                    <a:lvl5pPr marL="1828800" algn="l" defTabSz="914400" rtl="0" eaLnBrk="1" latinLnBrk="0" hangingPunct="1">
-                      <a:defRPr sz="1800" kern="1200">
-                        <a:solidFill>
-                          <a:schemeClr val="tx1"/>
-                        </a:solidFill>
-                        <a:latin typeface="+mn-lt"/>
-                        <a:ea typeface="+mn-ea"/>
-                        <a:cs typeface="+mn-cs"/>
-                      </a:defRPr>
-                    </a:lvl5pPr>
-                    <a:lvl6pPr marL="2286000" algn="l" defTabSz="914400" rtl="0" eaLnBrk="1" latinLnBrk="0" hangingPunct="1">
-                      <a:defRPr sz="1800" kern="1200">
-                        <a:solidFill>
-                          <a:schemeClr val="tx1"/>
-                        </a:solidFill>
-                        <a:latin typeface="+mn-lt"/>
-                        <a:ea typeface="+mn-ea"/>
-                        <a:cs typeface="+mn-cs"/>
-                      </a:defRPr>
-                    </a:lvl6pPr>
-                    <a:lvl7pPr marL="2743200" algn="l" defTabSz="914400" rtl="0" eaLnBrk="1" latinLnBrk="0" hangingPunct="1">
-                      <a:defRPr sz="1800" kern="1200">
-                        <a:solidFill>
-                          <a:schemeClr val="tx1"/>
-                        </a:solidFill>
-                        <a:latin typeface="+mn-lt"/>
-                        <a:ea typeface="+mn-ea"/>
-                        <a:cs typeface="+mn-cs"/>
-                      </a:defRPr>
-                    </a:lvl7pPr>
-                    <a:lvl8pPr marL="3200400" algn="l" defTabSz="914400" rtl="0" eaLnBrk="1" latinLnBrk="0" hangingPunct="1">
-                      <a:defRPr sz="1800" kern="1200">
-                        <a:solidFill>
-                          <a:schemeClr val="tx1"/>
-                        </a:solidFill>
-                        <a:latin typeface="+mn-lt"/>
-                        <a:ea typeface="+mn-ea"/>
-                        <a:cs typeface="+mn-cs"/>
-                      </a:defRPr>
-                    </a:lvl8pPr>
-                    <a:lvl9pPr marL="3657600" algn="l" defTabSz="914400" rtl="0" eaLnBrk="1" latinLnBrk="0" hangingPunct="1">
-                      <a:defRPr sz="1800" kern="1200">
-                        <a:solidFill>
-                          <a:schemeClr val="tx1"/>
-                        </a:solidFill>
-                        <a:latin typeface="+mn-lt"/>
-                        <a:ea typeface="+mn-ea"/>
-                        <a:cs typeface="+mn-cs"/>
-                      </a:defRPr>
-                    </a:lvl9pPr>
-                  </a:lstStyle>
-                  <a:p>
-                    <a:pPr/>
-                    <a14:m>
-                      <m:oMathPara xmlns:m="http://schemas.openxmlformats.org/officeDocument/2006/math">
-                        <m:oMath>
-                          <m:sSub>
-                            <m:sSubPr>
-                              <m:ctrlPr>
-                                <a:rPr lang="en-US" sz="1800" b="0" i="1" smtClean="0">
-                                  <a:latin typeface="Cambria Math" panose="02040503050406030204" pitchFamily="18" charset="0"/>
-                                </a:rPr>
-                              </m:ctrlPr>
-                            </m:sSubPr>
-                            <m:e>
-                              <m:r>
-                                <a:rPr lang="en-US" sz="1800" b="0" i="1" smtClean="0">
-                                  <a:latin typeface="Cambria Math" panose="02040503050406030204" pitchFamily="18" charset="0"/>
-                                </a:rPr>
-                                <m:t>𝑣</m:t>
-                              </m:r>
-                            </m:e>
-                            <m:sub>
-                              <m:r>
-                                <a:rPr lang="en-US" sz="1800" b="0" i="1" smtClean="0">
-                                  <a:latin typeface="Cambria Math" panose="02040503050406030204" pitchFamily="18" charset="0"/>
-                                </a:rPr>
-                                <m:t>𝜋</m:t>
-                              </m:r>
-                            </m:sub>
-                          </m:sSub>
-                        </m:oMath>
-                      </m:oMathPara>
-                    </a14:m>
-                    <a:endParaRPr lang="en-US" dirty="0"/>
-                  </a:p>
-                </p:txBody>
-              </p:sp>
-            </mc:Choice>
-            <mc:Fallback xmlns="">
-              <p:sp>
-                <p:nvSpPr>
-                  <p:cNvPr id="12" name="TextBox 8">
-                    <a:extLst>
-                      <a:ext uri="{FF2B5EF4-FFF2-40B4-BE49-F238E27FC236}">
-                        <a16:creationId xmlns:a16="http://schemas.microsoft.com/office/drawing/2014/main" id="{115AA05C-2180-0AF6-A384-9D75BED15ED1}"/>
-                      </a:ext>
-                      <a:ext uri="{C183D7F6-B498-43B3-948B-1728B52AA6E4}">
-                        <adec:decorative xmlns:adec="http://schemas.microsoft.com/office/drawing/2017/decorative" val="1"/>
-                      </a:ext>
-                    </a:extLst>
-                  </p:cNvPr>
-                  <p:cNvSpPr txBox="1">
-                    <a:spLocks noRot="1" noChangeAspect="1" noMove="1" noResize="1" noEditPoints="1" noAdjustHandles="1" noChangeArrowheads="1" noChangeShapeType="1" noTextEdit="1"/>
-                  </p:cNvSpPr>
-                  <p:nvPr/>
-                </p:nvSpPr>
-                <p:spPr>
-                  <a:xfrm>
-                    <a:off x="11425004" y="3092683"/>
-                    <a:ext cx="766996" cy="369332"/>
-                  </a:xfrm>
-                  <a:prstGeom prst="rect">
-                    <a:avLst/>
-                  </a:prstGeom>
-                  <a:blipFill>
-                    <a:blip r:embed="rId5"/>
-                    <a:stretch>
-                      <a:fillRect/>
-                    </a:stretch>
-                  </a:blipFill>
-                </p:spPr>
-                <p:txBody>
-                  <a:bodyPr/>
-                  <a:lstStyle/>
-                  <a:p>
-                    <a:r>
-                      <a:rPr lang="en-US">
-                        <a:noFill/>
-                      </a:rPr>
-                      <a:t> </a:t>
-                    </a:r>
-                  </a:p>
-                </p:txBody>
-              </p:sp>
-            </mc:Fallback>
-          </mc:AlternateContent>
+            </p:grpSpPr>
+            <p:cxnSp>
+              <p:nvCxnSpPr>
+                <p:cNvPr id="11" name="Straight Connector 10">
+                  <a:extLst>
+                    <a:ext uri="{FF2B5EF4-FFF2-40B4-BE49-F238E27FC236}">
+                      <a16:creationId xmlns:a16="http://schemas.microsoft.com/office/drawing/2014/main" id="{8A7CFF6D-44E5-4AC6-F8FA-305C74E68FE9}"/>
+                    </a:ext>
+                    <a:ext uri="{C183D7F6-B498-43B3-948B-1728B52AA6E4}">
+                      <adec:decorative xmlns:adec="http://schemas.microsoft.com/office/drawing/2017/decorative" val="1"/>
+                    </a:ext>
+                  </a:extLst>
+                </p:cNvPr>
+                <p:cNvCxnSpPr>
+                  <a:cxnSpLocks/>
+                </p:cNvCxnSpPr>
+                <p:nvPr/>
+              </p:nvCxnSpPr>
+              <p:spPr>
+                <a:xfrm>
+                  <a:off x="9337182" y="3124199"/>
+                  <a:ext cx="2393078" cy="0"/>
+                </a:xfrm>
+                <a:prstGeom prst="line">
+                  <a:avLst/>
+                </a:prstGeom>
+              </p:spPr>
+              <p:style>
+                <a:lnRef idx="1">
+                  <a:schemeClr val="accent1"/>
+                </a:lnRef>
+                <a:fillRef idx="0">
+                  <a:schemeClr val="accent1"/>
+                </a:fillRef>
+                <a:effectRef idx="0">
+                  <a:schemeClr val="accent1"/>
+                </a:effectRef>
+                <a:fontRef idx="minor">
+                  <a:schemeClr val="tx1"/>
+                </a:fontRef>
+              </p:style>
+            </p:cxnSp>
+            <mc:AlternateContent xmlns:mc="http://schemas.openxmlformats.org/markup-compatibility/2006" xmlns:a14="http://schemas.microsoft.com/office/drawing/2010/main">
+              <mc:Choice Requires="a14">
+                <p:sp>
+                  <p:nvSpPr>
+                    <p:cNvPr id="12" name="TextBox 8">
+                      <a:extLst>
+                        <a:ext uri="{FF2B5EF4-FFF2-40B4-BE49-F238E27FC236}">
+                          <a16:creationId xmlns:a16="http://schemas.microsoft.com/office/drawing/2014/main" id="{FC62ADE9-9B2E-0CE9-B525-28B9E250FACF}"/>
+                        </a:ext>
+                        <a:ext uri="{C183D7F6-B498-43B3-948B-1728B52AA6E4}">
+                          <adec:decorative xmlns:adec="http://schemas.microsoft.com/office/drawing/2017/decorative" val="1"/>
+                        </a:ext>
+                      </a:extLst>
+                    </p:cNvPr>
+                    <p:cNvSpPr txBox="1"/>
+                    <p:nvPr/>
+                  </p:nvSpPr>
+                  <p:spPr>
+                    <a:xfrm>
+                      <a:off x="11425004" y="3092683"/>
+                      <a:ext cx="766996" cy="369332"/>
+                    </a:xfrm>
+                    <a:prstGeom prst="rect">
+                      <a:avLst/>
+                    </a:prstGeom>
+                    <a:noFill/>
+                  </p:spPr>
+                  <p:txBody>
+                    <a:bodyPr wrap="square">
+                      <a:spAutoFit/>
+                    </a:bodyPr>
+                    <a:lstStyle>
+                      <a:defPPr>
+                        <a:defRPr lang="en-US"/>
+                      </a:defPPr>
+                      <a:lvl1pPr marL="0" algn="l" defTabSz="914400" rtl="0" eaLnBrk="1" latinLnBrk="0" hangingPunct="1">
+                        <a:defRPr sz="1800" kern="1200">
+                          <a:solidFill>
+                            <a:schemeClr val="tx1"/>
+                          </a:solidFill>
+                          <a:latin typeface="+mn-lt"/>
+                          <a:ea typeface="+mn-ea"/>
+                          <a:cs typeface="+mn-cs"/>
+                        </a:defRPr>
+                      </a:lvl1pPr>
+                      <a:lvl2pPr marL="457200" algn="l" defTabSz="914400" rtl="0" eaLnBrk="1" latinLnBrk="0" hangingPunct="1">
+                        <a:defRPr sz="1800" kern="1200">
+                          <a:solidFill>
+                            <a:schemeClr val="tx1"/>
+                          </a:solidFill>
+                          <a:latin typeface="+mn-lt"/>
+                          <a:ea typeface="+mn-ea"/>
+                          <a:cs typeface="+mn-cs"/>
+                        </a:defRPr>
+                      </a:lvl2pPr>
+                      <a:lvl3pPr marL="914400" algn="l" defTabSz="914400" rtl="0" eaLnBrk="1" latinLnBrk="0" hangingPunct="1">
+                        <a:defRPr sz="1800" kern="1200">
+                          <a:solidFill>
+                            <a:schemeClr val="tx1"/>
+                          </a:solidFill>
+                          <a:latin typeface="+mn-lt"/>
+                          <a:ea typeface="+mn-ea"/>
+                          <a:cs typeface="+mn-cs"/>
+                        </a:defRPr>
+                      </a:lvl3pPr>
+                      <a:lvl4pPr marL="1371600" algn="l" defTabSz="914400" rtl="0" eaLnBrk="1" latinLnBrk="0" hangingPunct="1">
+                        <a:defRPr sz="1800" kern="1200">
+                          <a:solidFill>
+                            <a:schemeClr val="tx1"/>
+                          </a:solidFill>
+                          <a:latin typeface="+mn-lt"/>
+                          <a:ea typeface="+mn-ea"/>
+                          <a:cs typeface="+mn-cs"/>
+                        </a:defRPr>
+                      </a:lvl4pPr>
+                      <a:lvl5pPr marL="1828800" algn="l" defTabSz="914400" rtl="0" eaLnBrk="1" latinLnBrk="0" hangingPunct="1">
+                        <a:defRPr sz="1800" kern="1200">
+                          <a:solidFill>
+                            <a:schemeClr val="tx1"/>
+                          </a:solidFill>
+                          <a:latin typeface="+mn-lt"/>
+                          <a:ea typeface="+mn-ea"/>
+                          <a:cs typeface="+mn-cs"/>
+                        </a:defRPr>
+                      </a:lvl5pPr>
+                      <a:lvl6pPr marL="2286000" algn="l" defTabSz="914400" rtl="0" eaLnBrk="1" latinLnBrk="0" hangingPunct="1">
+                        <a:defRPr sz="1800" kern="1200">
+                          <a:solidFill>
+                            <a:schemeClr val="tx1"/>
+                          </a:solidFill>
+                          <a:latin typeface="+mn-lt"/>
+                          <a:ea typeface="+mn-ea"/>
+                          <a:cs typeface="+mn-cs"/>
+                        </a:defRPr>
+                      </a:lvl6pPr>
+                      <a:lvl7pPr marL="2743200" algn="l" defTabSz="914400" rtl="0" eaLnBrk="1" latinLnBrk="0" hangingPunct="1">
+                        <a:defRPr sz="1800" kern="1200">
+                          <a:solidFill>
+                            <a:schemeClr val="tx1"/>
+                          </a:solidFill>
+                          <a:latin typeface="+mn-lt"/>
+                          <a:ea typeface="+mn-ea"/>
+                          <a:cs typeface="+mn-cs"/>
+                        </a:defRPr>
+                      </a:lvl7pPr>
+                      <a:lvl8pPr marL="3200400" algn="l" defTabSz="914400" rtl="0" eaLnBrk="1" latinLnBrk="0" hangingPunct="1">
+                        <a:defRPr sz="1800" kern="1200">
+                          <a:solidFill>
+                            <a:schemeClr val="tx1"/>
+                          </a:solidFill>
+                          <a:latin typeface="+mn-lt"/>
+                          <a:ea typeface="+mn-ea"/>
+                          <a:cs typeface="+mn-cs"/>
+                        </a:defRPr>
+                      </a:lvl8pPr>
+                      <a:lvl9pPr marL="3657600" algn="l" defTabSz="914400" rtl="0" eaLnBrk="1" latinLnBrk="0" hangingPunct="1">
+                        <a:defRPr sz="1800" kern="1200">
+                          <a:solidFill>
+                            <a:schemeClr val="tx1"/>
+                          </a:solidFill>
+                          <a:latin typeface="+mn-lt"/>
+                          <a:ea typeface="+mn-ea"/>
+                          <a:cs typeface="+mn-cs"/>
+                        </a:defRPr>
+                      </a:lvl9pPr>
+                    </a:lstStyle>
+                    <a:p>
+                      <a:pPr/>
+                      <a14:m>
+                        <m:oMathPara xmlns:m="http://schemas.openxmlformats.org/officeDocument/2006/math">
+                          <m:oMath>
+                            <m:sSub>
+                              <m:sSubPr>
+                                <m:ctrlPr>
+                                  <a:rPr lang="en-US" sz="1800" b="0" i="1" smtClean="0">
+                                    <a:latin typeface="Cambria Math" panose="02040503050406030204" pitchFamily="18" charset="0"/>
+                                  </a:rPr>
+                                </m:ctrlPr>
+                              </m:sSubPr>
+                              <m:e>
+                                <m:r>
+                                  <a:rPr lang="en-US" sz="1800" b="0" i="1" smtClean="0">
+                                    <a:latin typeface="Cambria Math" panose="02040503050406030204" pitchFamily="18" charset="0"/>
+                                  </a:rPr>
+                                  <m:t>𝑣</m:t>
+                                </m:r>
+                              </m:e>
+                              <m:sub>
+                                <m:r>
+                                  <a:rPr lang="en-US" sz="1800" b="0" i="1" smtClean="0">
+                                    <a:latin typeface="Cambria Math" panose="02040503050406030204" pitchFamily="18" charset="0"/>
+                                  </a:rPr>
+                                  <m:t>𝜋</m:t>
+                                </m:r>
+                              </m:sub>
+                            </m:sSub>
+                          </m:oMath>
+                        </m:oMathPara>
+                      </a14:m>
+                      <a:endParaRPr lang="en-US" dirty="0"/>
+                    </a:p>
+                  </p:txBody>
+                </p:sp>
+              </mc:Choice>
+              <mc:Fallback xmlns="">
+                <p:sp>
+                  <p:nvSpPr>
+                    <p:cNvPr id="12" name="TextBox 8">
+                      <a:extLst>
+                        <a:ext uri="{FF2B5EF4-FFF2-40B4-BE49-F238E27FC236}">
+                          <a16:creationId xmlns:a16="http://schemas.microsoft.com/office/drawing/2014/main" id="{115AA05C-2180-0AF6-A384-9D75BED15ED1}"/>
+                        </a:ext>
+                        <a:ext uri="{C183D7F6-B498-43B3-948B-1728B52AA6E4}">
+                          <adec:decorative xmlns:adec="http://schemas.microsoft.com/office/drawing/2017/decorative" val="1"/>
+                        </a:ext>
+                      </a:extLst>
+                    </p:cNvPr>
+                    <p:cNvSpPr txBox="1">
+                      <a:spLocks noRot="1" noChangeAspect="1" noMove="1" noResize="1" noEditPoints="1" noAdjustHandles="1" noChangeArrowheads="1" noChangeShapeType="1" noTextEdit="1"/>
+                    </p:cNvSpPr>
+                    <p:nvPr/>
+                  </p:nvSpPr>
+                  <p:spPr>
+                    <a:xfrm>
+                      <a:off x="11425004" y="3092683"/>
+                      <a:ext cx="766996" cy="369332"/>
+                    </a:xfrm>
+                    <a:prstGeom prst="rect">
+                      <a:avLst/>
+                    </a:prstGeom>
+                    <a:blipFill>
+                      <a:blip r:embed="rId6"/>
+                      <a:stretch>
+                        <a:fillRect/>
+                      </a:stretch>
+                    </a:blipFill>
+                  </p:spPr>
+                  <p:txBody>
+                    <a:bodyPr/>
+                    <a:lstStyle/>
+                    <a:p>
+                      <a:r>
+                        <a:rPr lang="en-US">
+                          <a:noFill/>
+                        </a:rPr>
+                        <a:t> </a:t>
+                      </a:r>
+                    </a:p>
+                  </p:txBody>
+                </p:sp>
+              </mc:Fallback>
+            </mc:AlternateContent>
+            <p:sp>
+              <p:nvSpPr>
+                <p:cNvPr id="13" name="Arc 12">
+                  <a:extLst>
+                    <a:ext uri="{FF2B5EF4-FFF2-40B4-BE49-F238E27FC236}">
+                      <a16:creationId xmlns:a16="http://schemas.microsoft.com/office/drawing/2014/main" id="{58658A5E-4BF3-F495-C114-E6EA460FC871}"/>
+                    </a:ext>
+                    <a:ext uri="{C183D7F6-B498-43B3-948B-1728B52AA6E4}">
+                      <adec:decorative xmlns:adec="http://schemas.microsoft.com/office/drawing/2017/decorative" val="1"/>
+                    </a:ext>
+                  </a:extLst>
+                </p:cNvPr>
+                <p:cNvSpPr/>
+                <p:nvPr/>
+              </p:nvSpPr>
+              <p:spPr>
+                <a:xfrm>
+                  <a:off x="9760371" y="2649297"/>
+                  <a:ext cx="574339" cy="1009376"/>
+                </a:xfrm>
+                <a:prstGeom prst="arc">
+                  <a:avLst>
+                    <a:gd name="adj1" fmla="val 10871568"/>
+                    <a:gd name="adj2" fmla="val 0"/>
+                  </a:avLst>
+                </a:prstGeom>
+                <a:ln w="19050" cap="flat" cmpd="sng" algn="ctr">
+                  <a:solidFill>
+                    <a:schemeClr val="accent6"/>
+                  </a:solidFill>
+                  <a:prstDash val="solid"/>
+                  <a:round/>
+                  <a:headEnd type="none" w="med" len="med"/>
+                  <a:tailEnd type="arrow" w="med" len="med"/>
+                </a:ln>
+              </p:spPr>
+              <p:style>
+                <a:lnRef idx="0">
+                  <a:scrgbClr r="0" g="0" b="0"/>
+                </a:lnRef>
+                <a:fillRef idx="0">
+                  <a:scrgbClr r="0" g="0" b="0"/>
+                </a:fillRef>
+                <a:effectRef idx="0">
+                  <a:scrgbClr r="0" g="0" b="0"/>
+                </a:effectRef>
+                <a:fontRef idx="minor">
+                  <a:schemeClr val="tx1"/>
+                </a:fontRef>
+              </p:style>
+              <p:txBody>
+                <a:bodyPr rtlCol="0" anchor="ctr"/>
+                <a:lstStyle>
+                  <a:defPPr>
+                    <a:defRPr lang="en-US"/>
+                  </a:defPPr>
+                  <a:lvl1pPr marL="0" algn="l" defTabSz="914400" rtl="0" eaLnBrk="1" latinLnBrk="0" hangingPunct="1">
+                    <a:defRPr sz="1800" kern="1200">
+                      <a:solidFill>
+                        <a:schemeClr val="tx1"/>
+                      </a:solidFill>
+                      <a:latin typeface="+mn-lt"/>
+                      <a:ea typeface="+mn-ea"/>
+                      <a:cs typeface="+mn-cs"/>
+                    </a:defRPr>
+                  </a:lvl1pPr>
+                  <a:lvl2pPr marL="457200" algn="l" defTabSz="914400" rtl="0" eaLnBrk="1" latinLnBrk="0" hangingPunct="1">
+                    <a:defRPr sz="1800" kern="1200">
+                      <a:solidFill>
+                        <a:schemeClr val="tx1"/>
+                      </a:solidFill>
+                      <a:latin typeface="+mn-lt"/>
+                      <a:ea typeface="+mn-ea"/>
+                      <a:cs typeface="+mn-cs"/>
+                    </a:defRPr>
+                  </a:lvl2pPr>
+                  <a:lvl3pPr marL="914400" algn="l" defTabSz="914400" rtl="0" eaLnBrk="1" latinLnBrk="0" hangingPunct="1">
+                    <a:defRPr sz="1800" kern="1200">
+                      <a:solidFill>
+                        <a:schemeClr val="tx1"/>
+                      </a:solidFill>
+                      <a:latin typeface="+mn-lt"/>
+                      <a:ea typeface="+mn-ea"/>
+                      <a:cs typeface="+mn-cs"/>
+                    </a:defRPr>
+                  </a:lvl3pPr>
+                  <a:lvl4pPr marL="1371600" algn="l" defTabSz="914400" rtl="0" eaLnBrk="1" latinLnBrk="0" hangingPunct="1">
+                    <a:defRPr sz="1800" kern="1200">
+                      <a:solidFill>
+                        <a:schemeClr val="tx1"/>
+                      </a:solidFill>
+                      <a:latin typeface="+mn-lt"/>
+                      <a:ea typeface="+mn-ea"/>
+                      <a:cs typeface="+mn-cs"/>
+                    </a:defRPr>
+                  </a:lvl4pPr>
+                  <a:lvl5pPr marL="1828800" algn="l" defTabSz="914400" rtl="0" eaLnBrk="1" latinLnBrk="0" hangingPunct="1">
+                    <a:defRPr sz="1800" kern="1200">
+                      <a:solidFill>
+                        <a:schemeClr val="tx1"/>
+                      </a:solidFill>
+                      <a:latin typeface="+mn-lt"/>
+                      <a:ea typeface="+mn-ea"/>
+                      <a:cs typeface="+mn-cs"/>
+                    </a:defRPr>
+                  </a:lvl5pPr>
+                  <a:lvl6pPr marL="2286000" algn="l" defTabSz="914400" rtl="0" eaLnBrk="1" latinLnBrk="0" hangingPunct="1">
+                    <a:defRPr sz="1800" kern="1200">
+                      <a:solidFill>
+                        <a:schemeClr val="tx1"/>
+                      </a:solidFill>
+                      <a:latin typeface="+mn-lt"/>
+                      <a:ea typeface="+mn-ea"/>
+                      <a:cs typeface="+mn-cs"/>
+                    </a:defRPr>
+                  </a:lvl6pPr>
+                  <a:lvl7pPr marL="2743200" algn="l" defTabSz="914400" rtl="0" eaLnBrk="1" latinLnBrk="0" hangingPunct="1">
+                    <a:defRPr sz="1800" kern="1200">
+                      <a:solidFill>
+                        <a:schemeClr val="tx1"/>
+                      </a:solidFill>
+                      <a:latin typeface="+mn-lt"/>
+                      <a:ea typeface="+mn-ea"/>
+                      <a:cs typeface="+mn-cs"/>
+                    </a:defRPr>
+                  </a:lvl7pPr>
+                  <a:lvl8pPr marL="3200400" algn="l" defTabSz="914400" rtl="0" eaLnBrk="1" latinLnBrk="0" hangingPunct="1">
+                    <a:defRPr sz="1800" kern="1200">
+                      <a:solidFill>
+                        <a:schemeClr val="tx1"/>
+                      </a:solidFill>
+                      <a:latin typeface="+mn-lt"/>
+                      <a:ea typeface="+mn-ea"/>
+                      <a:cs typeface="+mn-cs"/>
+                    </a:defRPr>
+                  </a:lvl8pPr>
+                  <a:lvl9pPr marL="3657600" algn="l" defTabSz="914400" rtl="0" eaLnBrk="1" latinLnBrk="0" hangingPunct="1">
+                    <a:defRPr sz="1800" kern="1200">
+                      <a:solidFill>
+                        <a:schemeClr val="tx1"/>
+                      </a:solidFill>
+                      <a:latin typeface="+mn-lt"/>
+                      <a:ea typeface="+mn-ea"/>
+                      <a:cs typeface="+mn-cs"/>
+                    </a:defRPr>
+                  </a:lvl9pPr>
+                </a:lstStyle>
+                <a:p>
+                  <a:pPr algn="ctr"/>
+                  <a:endParaRPr lang="en-US"/>
+                </a:p>
+              </p:txBody>
+            </p:sp>
+            <p:sp>
+              <p:nvSpPr>
+                <p:cNvPr id="14" name="Arc 13">
+                  <a:extLst>
+                    <a:ext uri="{FF2B5EF4-FFF2-40B4-BE49-F238E27FC236}">
+                      <a16:creationId xmlns:a16="http://schemas.microsoft.com/office/drawing/2014/main" id="{8C2E7F1D-DC32-A251-BB28-41567AFC7C70}"/>
+                    </a:ext>
+                    <a:ext uri="{C183D7F6-B498-43B3-948B-1728B52AA6E4}">
+                      <adec:decorative xmlns:adec="http://schemas.microsoft.com/office/drawing/2017/decorative" val="1"/>
+                    </a:ext>
+                  </a:extLst>
+                </p:cNvPr>
+                <p:cNvSpPr/>
+                <p:nvPr/>
+              </p:nvSpPr>
+              <p:spPr>
+                <a:xfrm>
+                  <a:off x="10334710" y="2614308"/>
+                  <a:ext cx="765785" cy="1019782"/>
+                </a:xfrm>
+                <a:prstGeom prst="arc">
+                  <a:avLst>
+                    <a:gd name="adj1" fmla="val 10871568"/>
+                    <a:gd name="adj2" fmla="val 0"/>
+                  </a:avLst>
+                </a:prstGeom>
+                <a:ln w="19050" cap="flat" cmpd="sng" algn="ctr">
+                  <a:solidFill>
+                    <a:schemeClr val="accent6"/>
+                  </a:solidFill>
+                  <a:prstDash val="solid"/>
+                  <a:round/>
+                  <a:headEnd type="none" w="med" len="med"/>
+                  <a:tailEnd type="arrow" w="med" len="med"/>
+                </a:ln>
+              </p:spPr>
+              <p:style>
+                <a:lnRef idx="0">
+                  <a:scrgbClr r="0" g="0" b="0"/>
+                </a:lnRef>
+                <a:fillRef idx="0">
+                  <a:scrgbClr r="0" g="0" b="0"/>
+                </a:fillRef>
+                <a:effectRef idx="0">
+                  <a:scrgbClr r="0" g="0" b="0"/>
+                </a:effectRef>
+                <a:fontRef idx="minor">
+                  <a:schemeClr val="tx1"/>
+                </a:fontRef>
+              </p:style>
+              <p:txBody>
+                <a:bodyPr rtlCol="0" anchor="ctr"/>
+                <a:lstStyle>
+                  <a:defPPr>
+                    <a:defRPr lang="en-US"/>
+                  </a:defPPr>
+                  <a:lvl1pPr marL="0" algn="l" defTabSz="914400" rtl="0" eaLnBrk="1" latinLnBrk="0" hangingPunct="1">
+                    <a:defRPr sz="1800" kern="1200">
+                      <a:solidFill>
+                        <a:schemeClr val="tx1"/>
+                      </a:solidFill>
+                      <a:latin typeface="+mn-lt"/>
+                      <a:ea typeface="+mn-ea"/>
+                      <a:cs typeface="+mn-cs"/>
+                    </a:defRPr>
+                  </a:lvl1pPr>
+                  <a:lvl2pPr marL="457200" algn="l" defTabSz="914400" rtl="0" eaLnBrk="1" latinLnBrk="0" hangingPunct="1">
+                    <a:defRPr sz="1800" kern="1200">
+                      <a:solidFill>
+                        <a:schemeClr val="tx1"/>
+                      </a:solidFill>
+                      <a:latin typeface="+mn-lt"/>
+                      <a:ea typeface="+mn-ea"/>
+                      <a:cs typeface="+mn-cs"/>
+                    </a:defRPr>
+                  </a:lvl2pPr>
+                  <a:lvl3pPr marL="914400" algn="l" defTabSz="914400" rtl="0" eaLnBrk="1" latinLnBrk="0" hangingPunct="1">
+                    <a:defRPr sz="1800" kern="1200">
+                      <a:solidFill>
+                        <a:schemeClr val="tx1"/>
+                      </a:solidFill>
+                      <a:latin typeface="+mn-lt"/>
+                      <a:ea typeface="+mn-ea"/>
+                      <a:cs typeface="+mn-cs"/>
+                    </a:defRPr>
+                  </a:lvl3pPr>
+                  <a:lvl4pPr marL="1371600" algn="l" defTabSz="914400" rtl="0" eaLnBrk="1" latinLnBrk="0" hangingPunct="1">
+                    <a:defRPr sz="1800" kern="1200">
+                      <a:solidFill>
+                        <a:schemeClr val="tx1"/>
+                      </a:solidFill>
+                      <a:latin typeface="+mn-lt"/>
+                      <a:ea typeface="+mn-ea"/>
+                      <a:cs typeface="+mn-cs"/>
+                    </a:defRPr>
+                  </a:lvl4pPr>
+                  <a:lvl5pPr marL="1828800" algn="l" defTabSz="914400" rtl="0" eaLnBrk="1" latinLnBrk="0" hangingPunct="1">
+                    <a:defRPr sz="1800" kern="1200">
+                      <a:solidFill>
+                        <a:schemeClr val="tx1"/>
+                      </a:solidFill>
+                      <a:latin typeface="+mn-lt"/>
+                      <a:ea typeface="+mn-ea"/>
+                      <a:cs typeface="+mn-cs"/>
+                    </a:defRPr>
+                  </a:lvl5pPr>
+                  <a:lvl6pPr marL="2286000" algn="l" defTabSz="914400" rtl="0" eaLnBrk="1" latinLnBrk="0" hangingPunct="1">
+                    <a:defRPr sz="1800" kern="1200">
+                      <a:solidFill>
+                        <a:schemeClr val="tx1"/>
+                      </a:solidFill>
+                      <a:latin typeface="+mn-lt"/>
+                      <a:ea typeface="+mn-ea"/>
+                      <a:cs typeface="+mn-cs"/>
+                    </a:defRPr>
+                  </a:lvl6pPr>
+                  <a:lvl7pPr marL="2743200" algn="l" defTabSz="914400" rtl="0" eaLnBrk="1" latinLnBrk="0" hangingPunct="1">
+                    <a:defRPr sz="1800" kern="1200">
+                      <a:solidFill>
+                        <a:schemeClr val="tx1"/>
+                      </a:solidFill>
+                      <a:latin typeface="+mn-lt"/>
+                      <a:ea typeface="+mn-ea"/>
+                      <a:cs typeface="+mn-cs"/>
+                    </a:defRPr>
+                  </a:lvl7pPr>
+                  <a:lvl8pPr marL="3200400" algn="l" defTabSz="914400" rtl="0" eaLnBrk="1" latinLnBrk="0" hangingPunct="1">
+                    <a:defRPr sz="1800" kern="1200">
+                      <a:solidFill>
+                        <a:schemeClr val="tx1"/>
+                      </a:solidFill>
+                      <a:latin typeface="+mn-lt"/>
+                      <a:ea typeface="+mn-ea"/>
+                      <a:cs typeface="+mn-cs"/>
+                    </a:defRPr>
+                  </a:lvl8pPr>
+                  <a:lvl9pPr marL="3657600" algn="l" defTabSz="914400" rtl="0" eaLnBrk="1" latinLnBrk="0" hangingPunct="1">
+                    <a:defRPr sz="1800" kern="1200">
+                      <a:solidFill>
+                        <a:schemeClr val="tx1"/>
+                      </a:solidFill>
+                      <a:latin typeface="+mn-lt"/>
+                      <a:ea typeface="+mn-ea"/>
+                      <a:cs typeface="+mn-cs"/>
+                    </a:defRPr>
+                  </a:lvl9pPr>
+                </a:lstStyle>
+                <a:p>
+                  <a:pPr algn="ctr"/>
+                  <a:endParaRPr lang="en-US"/>
+                </a:p>
+              </p:txBody>
+            </p:sp>
+            <p:sp>
+              <p:nvSpPr>
+                <p:cNvPr id="15" name="Arc 14">
+                  <a:extLst>
+                    <a:ext uri="{FF2B5EF4-FFF2-40B4-BE49-F238E27FC236}">
+                      <a16:creationId xmlns:a16="http://schemas.microsoft.com/office/drawing/2014/main" id="{7026F178-8BD0-9B6E-1868-851FF19E16DA}"/>
+                    </a:ext>
+                    <a:ext uri="{C183D7F6-B498-43B3-948B-1728B52AA6E4}">
+                      <adec:decorative xmlns:adec="http://schemas.microsoft.com/office/drawing/2017/decorative" val="1"/>
+                    </a:ext>
+                  </a:extLst>
+                </p:cNvPr>
+                <p:cNvSpPr/>
+                <p:nvPr/>
+              </p:nvSpPr>
+              <p:spPr>
+                <a:xfrm>
+                  <a:off x="11100495" y="2627412"/>
+                  <a:ext cx="220048" cy="1019782"/>
+                </a:xfrm>
+                <a:prstGeom prst="arc">
+                  <a:avLst>
+                    <a:gd name="adj1" fmla="val 10871568"/>
+                    <a:gd name="adj2" fmla="val 0"/>
+                  </a:avLst>
+                </a:prstGeom>
+                <a:ln w="19050" cap="flat" cmpd="sng" algn="ctr">
+                  <a:solidFill>
+                    <a:schemeClr val="accent6"/>
+                  </a:solidFill>
+                  <a:prstDash val="solid"/>
+                  <a:round/>
+                  <a:headEnd type="none" w="med" len="med"/>
+                  <a:tailEnd type="arrow" w="med" len="med"/>
+                </a:ln>
+              </p:spPr>
+              <p:style>
+                <a:lnRef idx="0">
+                  <a:scrgbClr r="0" g="0" b="0"/>
+                </a:lnRef>
+                <a:fillRef idx="0">
+                  <a:scrgbClr r="0" g="0" b="0"/>
+                </a:fillRef>
+                <a:effectRef idx="0">
+                  <a:scrgbClr r="0" g="0" b="0"/>
+                </a:effectRef>
+                <a:fontRef idx="minor">
+                  <a:schemeClr val="tx1"/>
+                </a:fontRef>
+              </p:style>
+              <p:txBody>
+                <a:bodyPr rtlCol="0" anchor="ctr"/>
+                <a:lstStyle>
+                  <a:defPPr>
+                    <a:defRPr lang="en-US"/>
+                  </a:defPPr>
+                  <a:lvl1pPr marL="0" algn="l" defTabSz="914400" rtl="0" eaLnBrk="1" latinLnBrk="0" hangingPunct="1">
+                    <a:defRPr sz="1800" kern="1200">
+                      <a:solidFill>
+                        <a:schemeClr val="tx1"/>
+                      </a:solidFill>
+                      <a:latin typeface="+mn-lt"/>
+                      <a:ea typeface="+mn-ea"/>
+                      <a:cs typeface="+mn-cs"/>
+                    </a:defRPr>
+                  </a:lvl1pPr>
+                  <a:lvl2pPr marL="457200" algn="l" defTabSz="914400" rtl="0" eaLnBrk="1" latinLnBrk="0" hangingPunct="1">
+                    <a:defRPr sz="1800" kern="1200">
+                      <a:solidFill>
+                        <a:schemeClr val="tx1"/>
+                      </a:solidFill>
+                      <a:latin typeface="+mn-lt"/>
+                      <a:ea typeface="+mn-ea"/>
+                      <a:cs typeface="+mn-cs"/>
+                    </a:defRPr>
+                  </a:lvl2pPr>
+                  <a:lvl3pPr marL="914400" algn="l" defTabSz="914400" rtl="0" eaLnBrk="1" latinLnBrk="0" hangingPunct="1">
+                    <a:defRPr sz="1800" kern="1200">
+                      <a:solidFill>
+                        <a:schemeClr val="tx1"/>
+                      </a:solidFill>
+                      <a:latin typeface="+mn-lt"/>
+                      <a:ea typeface="+mn-ea"/>
+                      <a:cs typeface="+mn-cs"/>
+                    </a:defRPr>
+                  </a:lvl3pPr>
+                  <a:lvl4pPr marL="1371600" algn="l" defTabSz="914400" rtl="0" eaLnBrk="1" latinLnBrk="0" hangingPunct="1">
+                    <a:defRPr sz="1800" kern="1200">
+                      <a:solidFill>
+                        <a:schemeClr val="tx1"/>
+                      </a:solidFill>
+                      <a:latin typeface="+mn-lt"/>
+                      <a:ea typeface="+mn-ea"/>
+                      <a:cs typeface="+mn-cs"/>
+                    </a:defRPr>
+                  </a:lvl4pPr>
+                  <a:lvl5pPr marL="1828800" algn="l" defTabSz="914400" rtl="0" eaLnBrk="1" latinLnBrk="0" hangingPunct="1">
+                    <a:defRPr sz="1800" kern="1200">
+                      <a:solidFill>
+                        <a:schemeClr val="tx1"/>
+                      </a:solidFill>
+                      <a:latin typeface="+mn-lt"/>
+                      <a:ea typeface="+mn-ea"/>
+                      <a:cs typeface="+mn-cs"/>
+                    </a:defRPr>
+                  </a:lvl5pPr>
+                  <a:lvl6pPr marL="2286000" algn="l" defTabSz="914400" rtl="0" eaLnBrk="1" latinLnBrk="0" hangingPunct="1">
+                    <a:defRPr sz="1800" kern="1200">
+                      <a:solidFill>
+                        <a:schemeClr val="tx1"/>
+                      </a:solidFill>
+                      <a:latin typeface="+mn-lt"/>
+                      <a:ea typeface="+mn-ea"/>
+                      <a:cs typeface="+mn-cs"/>
+                    </a:defRPr>
+                  </a:lvl6pPr>
+                  <a:lvl7pPr marL="2743200" algn="l" defTabSz="914400" rtl="0" eaLnBrk="1" latinLnBrk="0" hangingPunct="1">
+                    <a:defRPr sz="1800" kern="1200">
+                      <a:solidFill>
+                        <a:schemeClr val="tx1"/>
+                      </a:solidFill>
+                      <a:latin typeface="+mn-lt"/>
+                      <a:ea typeface="+mn-ea"/>
+                      <a:cs typeface="+mn-cs"/>
+                    </a:defRPr>
+                  </a:lvl7pPr>
+                  <a:lvl8pPr marL="3200400" algn="l" defTabSz="914400" rtl="0" eaLnBrk="1" latinLnBrk="0" hangingPunct="1">
+                    <a:defRPr sz="1800" kern="1200">
+                      <a:solidFill>
+                        <a:schemeClr val="tx1"/>
+                      </a:solidFill>
+                      <a:latin typeface="+mn-lt"/>
+                      <a:ea typeface="+mn-ea"/>
+                      <a:cs typeface="+mn-cs"/>
+                    </a:defRPr>
+                  </a:lvl8pPr>
+                  <a:lvl9pPr marL="3657600" algn="l" defTabSz="914400" rtl="0" eaLnBrk="1" latinLnBrk="0" hangingPunct="1">
+                    <a:defRPr sz="1800" kern="1200">
+                      <a:solidFill>
+                        <a:schemeClr val="tx1"/>
+                      </a:solidFill>
+                      <a:latin typeface="+mn-lt"/>
+                      <a:ea typeface="+mn-ea"/>
+                      <a:cs typeface="+mn-cs"/>
+                    </a:defRPr>
+                  </a:lvl9pPr>
+                </a:lstStyle>
+                <a:p>
+                  <a:pPr algn="ctr"/>
+                  <a:endParaRPr lang="en-US"/>
+                </a:p>
+              </p:txBody>
+            </p:sp>
+            <p:sp>
+              <p:nvSpPr>
+                <p:cNvPr id="16" name="Arc 15">
+                  <a:extLst>
+                    <a:ext uri="{FF2B5EF4-FFF2-40B4-BE49-F238E27FC236}">
+                      <a16:creationId xmlns:a16="http://schemas.microsoft.com/office/drawing/2014/main" id="{57088D6C-4C8C-FE23-F85D-8685A8BA96A3}"/>
+                    </a:ext>
+                    <a:ext uri="{C183D7F6-B498-43B3-948B-1728B52AA6E4}">
+                      <adec:decorative xmlns:adec="http://schemas.microsoft.com/office/drawing/2017/decorative" val="1"/>
+                    </a:ext>
+                  </a:extLst>
+                </p:cNvPr>
+                <p:cNvSpPr/>
+                <p:nvPr/>
+              </p:nvSpPr>
+              <p:spPr>
+                <a:xfrm>
+                  <a:off x="11308888" y="2648522"/>
+                  <a:ext cx="417487" cy="951353"/>
+                </a:xfrm>
+                <a:prstGeom prst="arc">
+                  <a:avLst>
+                    <a:gd name="adj1" fmla="val 10871568"/>
+                    <a:gd name="adj2" fmla="val 0"/>
+                  </a:avLst>
+                </a:prstGeom>
+                <a:ln w="19050" cap="flat" cmpd="sng" algn="ctr">
+                  <a:solidFill>
+                    <a:schemeClr val="accent6"/>
+                  </a:solidFill>
+                  <a:prstDash val="solid"/>
+                  <a:round/>
+                  <a:headEnd type="none" w="med" len="med"/>
+                  <a:tailEnd type="arrow" w="med" len="med"/>
+                </a:ln>
+              </p:spPr>
+              <p:style>
+                <a:lnRef idx="0">
+                  <a:scrgbClr r="0" g="0" b="0"/>
+                </a:lnRef>
+                <a:fillRef idx="0">
+                  <a:scrgbClr r="0" g="0" b="0"/>
+                </a:fillRef>
+                <a:effectRef idx="0">
+                  <a:scrgbClr r="0" g="0" b="0"/>
+                </a:effectRef>
+                <a:fontRef idx="minor">
+                  <a:schemeClr val="tx1"/>
+                </a:fontRef>
+              </p:style>
+              <p:txBody>
+                <a:bodyPr rtlCol="0" anchor="ctr"/>
+                <a:lstStyle>
+                  <a:defPPr>
+                    <a:defRPr lang="en-US"/>
+                  </a:defPPr>
+                  <a:lvl1pPr marL="0" algn="l" defTabSz="914400" rtl="0" eaLnBrk="1" latinLnBrk="0" hangingPunct="1">
+                    <a:defRPr sz="1800" kern="1200">
+                      <a:solidFill>
+                        <a:schemeClr val="tx1"/>
+                      </a:solidFill>
+                      <a:latin typeface="+mn-lt"/>
+                      <a:ea typeface="+mn-ea"/>
+                      <a:cs typeface="+mn-cs"/>
+                    </a:defRPr>
+                  </a:lvl1pPr>
+                  <a:lvl2pPr marL="457200" algn="l" defTabSz="914400" rtl="0" eaLnBrk="1" latinLnBrk="0" hangingPunct="1">
+                    <a:defRPr sz="1800" kern="1200">
+                      <a:solidFill>
+                        <a:schemeClr val="tx1"/>
+                      </a:solidFill>
+                      <a:latin typeface="+mn-lt"/>
+                      <a:ea typeface="+mn-ea"/>
+                      <a:cs typeface="+mn-cs"/>
+                    </a:defRPr>
+                  </a:lvl2pPr>
+                  <a:lvl3pPr marL="914400" algn="l" defTabSz="914400" rtl="0" eaLnBrk="1" latinLnBrk="0" hangingPunct="1">
+                    <a:defRPr sz="1800" kern="1200">
+                      <a:solidFill>
+                        <a:schemeClr val="tx1"/>
+                      </a:solidFill>
+                      <a:latin typeface="+mn-lt"/>
+                      <a:ea typeface="+mn-ea"/>
+                      <a:cs typeface="+mn-cs"/>
+                    </a:defRPr>
+                  </a:lvl3pPr>
+                  <a:lvl4pPr marL="1371600" algn="l" defTabSz="914400" rtl="0" eaLnBrk="1" latinLnBrk="0" hangingPunct="1">
+                    <a:defRPr sz="1800" kern="1200">
+                      <a:solidFill>
+                        <a:schemeClr val="tx1"/>
+                      </a:solidFill>
+                      <a:latin typeface="+mn-lt"/>
+                      <a:ea typeface="+mn-ea"/>
+                      <a:cs typeface="+mn-cs"/>
+                    </a:defRPr>
+                  </a:lvl4pPr>
+                  <a:lvl5pPr marL="1828800" algn="l" defTabSz="914400" rtl="0" eaLnBrk="1" latinLnBrk="0" hangingPunct="1">
+                    <a:defRPr sz="1800" kern="1200">
+                      <a:solidFill>
+                        <a:schemeClr val="tx1"/>
+                      </a:solidFill>
+                      <a:latin typeface="+mn-lt"/>
+                      <a:ea typeface="+mn-ea"/>
+                      <a:cs typeface="+mn-cs"/>
+                    </a:defRPr>
+                  </a:lvl5pPr>
+                  <a:lvl6pPr marL="2286000" algn="l" defTabSz="914400" rtl="0" eaLnBrk="1" latinLnBrk="0" hangingPunct="1">
+                    <a:defRPr sz="1800" kern="1200">
+                      <a:solidFill>
+                        <a:schemeClr val="tx1"/>
+                      </a:solidFill>
+                      <a:latin typeface="+mn-lt"/>
+                      <a:ea typeface="+mn-ea"/>
+                      <a:cs typeface="+mn-cs"/>
+                    </a:defRPr>
+                  </a:lvl6pPr>
+                  <a:lvl7pPr marL="2743200" algn="l" defTabSz="914400" rtl="0" eaLnBrk="1" latinLnBrk="0" hangingPunct="1">
+                    <a:defRPr sz="1800" kern="1200">
+                      <a:solidFill>
+                        <a:schemeClr val="tx1"/>
+                      </a:solidFill>
+                      <a:latin typeface="+mn-lt"/>
+                      <a:ea typeface="+mn-ea"/>
+                      <a:cs typeface="+mn-cs"/>
+                    </a:defRPr>
+                  </a:lvl7pPr>
+                  <a:lvl8pPr marL="3200400" algn="l" defTabSz="914400" rtl="0" eaLnBrk="1" latinLnBrk="0" hangingPunct="1">
+                    <a:defRPr sz="1800" kern="1200">
+                      <a:solidFill>
+                        <a:schemeClr val="tx1"/>
+                      </a:solidFill>
+                      <a:latin typeface="+mn-lt"/>
+                      <a:ea typeface="+mn-ea"/>
+                      <a:cs typeface="+mn-cs"/>
+                    </a:defRPr>
+                  </a:lvl8pPr>
+                  <a:lvl9pPr marL="3657600" algn="l" defTabSz="914400" rtl="0" eaLnBrk="1" latinLnBrk="0" hangingPunct="1">
+                    <a:defRPr sz="1800" kern="1200">
+                      <a:solidFill>
+                        <a:schemeClr val="tx1"/>
+                      </a:solidFill>
+                      <a:latin typeface="+mn-lt"/>
+                      <a:ea typeface="+mn-ea"/>
+                      <a:cs typeface="+mn-cs"/>
+                    </a:defRPr>
+                  </a:lvl9pPr>
+                </a:lstStyle>
+                <a:p>
+                  <a:pPr algn="ctr"/>
+                  <a:endParaRPr lang="en-US"/>
+                </a:p>
+              </p:txBody>
+            </p:sp>
+            <mc:AlternateContent xmlns:mc="http://schemas.openxmlformats.org/markup-compatibility/2006" xmlns:a14="http://schemas.microsoft.com/office/drawing/2010/main">
+              <mc:Choice Requires="a14">
+                <p:sp>
+                  <p:nvSpPr>
+                    <p:cNvPr id="17" name="TextBox 29">
+                      <a:extLst>
+                        <a:ext uri="{FF2B5EF4-FFF2-40B4-BE49-F238E27FC236}">
+                          <a16:creationId xmlns:a16="http://schemas.microsoft.com/office/drawing/2014/main" id="{33B57A32-72F6-077F-22AE-C34A118F7D55}"/>
+                        </a:ext>
+                        <a:ext uri="{C183D7F6-B498-43B3-948B-1728B52AA6E4}">
+                          <adec:decorative xmlns:adec="http://schemas.microsoft.com/office/drawing/2017/decorative" val="1"/>
+                        </a:ext>
+                      </a:extLst>
+                    </p:cNvPr>
+                    <p:cNvSpPr txBox="1"/>
+                    <p:nvPr/>
+                  </p:nvSpPr>
+                  <p:spPr>
+                    <a:xfrm>
+                      <a:off x="9564903" y="3086337"/>
+                      <a:ext cx="395810" cy="369332"/>
+                    </a:xfrm>
+                    <a:prstGeom prst="rect">
+                      <a:avLst/>
+                    </a:prstGeom>
+                    <a:noFill/>
+                  </p:spPr>
+                  <p:txBody>
+                    <a:bodyPr wrap="square">
+                      <a:spAutoFit/>
+                    </a:bodyPr>
+                    <a:lstStyle>
+                      <a:defPPr>
+                        <a:defRPr lang="en-US"/>
+                      </a:defPPr>
+                      <a:lvl1pPr marL="0" algn="l" defTabSz="914400" rtl="0" eaLnBrk="1" latinLnBrk="0" hangingPunct="1">
+                        <a:defRPr sz="1800" kern="1200">
+                          <a:solidFill>
+                            <a:schemeClr val="tx1"/>
+                          </a:solidFill>
+                          <a:latin typeface="+mn-lt"/>
+                          <a:ea typeface="+mn-ea"/>
+                          <a:cs typeface="+mn-cs"/>
+                        </a:defRPr>
+                      </a:lvl1pPr>
+                      <a:lvl2pPr marL="457200" algn="l" defTabSz="914400" rtl="0" eaLnBrk="1" latinLnBrk="0" hangingPunct="1">
+                        <a:defRPr sz="1800" kern="1200">
+                          <a:solidFill>
+                            <a:schemeClr val="tx1"/>
+                          </a:solidFill>
+                          <a:latin typeface="+mn-lt"/>
+                          <a:ea typeface="+mn-ea"/>
+                          <a:cs typeface="+mn-cs"/>
+                        </a:defRPr>
+                      </a:lvl2pPr>
+                      <a:lvl3pPr marL="914400" algn="l" defTabSz="914400" rtl="0" eaLnBrk="1" latinLnBrk="0" hangingPunct="1">
+                        <a:defRPr sz="1800" kern="1200">
+                          <a:solidFill>
+                            <a:schemeClr val="tx1"/>
+                          </a:solidFill>
+                          <a:latin typeface="+mn-lt"/>
+                          <a:ea typeface="+mn-ea"/>
+                          <a:cs typeface="+mn-cs"/>
+                        </a:defRPr>
+                      </a:lvl3pPr>
+                      <a:lvl4pPr marL="1371600" algn="l" defTabSz="914400" rtl="0" eaLnBrk="1" latinLnBrk="0" hangingPunct="1">
+                        <a:defRPr sz="1800" kern="1200">
+                          <a:solidFill>
+                            <a:schemeClr val="tx1"/>
+                          </a:solidFill>
+                          <a:latin typeface="+mn-lt"/>
+                          <a:ea typeface="+mn-ea"/>
+                          <a:cs typeface="+mn-cs"/>
+                        </a:defRPr>
+                      </a:lvl4pPr>
+                      <a:lvl5pPr marL="1828800" algn="l" defTabSz="914400" rtl="0" eaLnBrk="1" latinLnBrk="0" hangingPunct="1">
+                        <a:defRPr sz="1800" kern="1200">
+                          <a:solidFill>
+                            <a:schemeClr val="tx1"/>
+                          </a:solidFill>
+                          <a:latin typeface="+mn-lt"/>
+                          <a:ea typeface="+mn-ea"/>
+                          <a:cs typeface="+mn-cs"/>
+                        </a:defRPr>
+                      </a:lvl5pPr>
+                      <a:lvl6pPr marL="2286000" algn="l" defTabSz="914400" rtl="0" eaLnBrk="1" latinLnBrk="0" hangingPunct="1">
+                        <a:defRPr sz="1800" kern="1200">
+                          <a:solidFill>
+                            <a:schemeClr val="tx1"/>
+                          </a:solidFill>
+                          <a:latin typeface="+mn-lt"/>
+                          <a:ea typeface="+mn-ea"/>
+                          <a:cs typeface="+mn-cs"/>
+                        </a:defRPr>
+                      </a:lvl6pPr>
+                      <a:lvl7pPr marL="2743200" algn="l" defTabSz="914400" rtl="0" eaLnBrk="1" latinLnBrk="0" hangingPunct="1">
+                        <a:defRPr sz="1800" kern="1200">
+                          <a:solidFill>
+                            <a:schemeClr val="tx1"/>
+                          </a:solidFill>
+                          <a:latin typeface="+mn-lt"/>
+                          <a:ea typeface="+mn-ea"/>
+                          <a:cs typeface="+mn-cs"/>
+                        </a:defRPr>
+                      </a:lvl7pPr>
+                      <a:lvl8pPr marL="3200400" algn="l" defTabSz="914400" rtl="0" eaLnBrk="1" latinLnBrk="0" hangingPunct="1">
+                        <a:defRPr sz="1800" kern="1200">
+                          <a:solidFill>
+                            <a:schemeClr val="tx1"/>
+                          </a:solidFill>
+                          <a:latin typeface="+mn-lt"/>
+                          <a:ea typeface="+mn-ea"/>
+                          <a:cs typeface="+mn-cs"/>
+                        </a:defRPr>
+                      </a:lvl8pPr>
+                      <a:lvl9pPr marL="3657600" algn="l" defTabSz="914400" rtl="0" eaLnBrk="1" latinLnBrk="0" hangingPunct="1">
+                        <a:defRPr sz="1800" kern="1200">
+                          <a:solidFill>
+                            <a:schemeClr val="tx1"/>
+                          </a:solidFill>
+                          <a:latin typeface="+mn-lt"/>
+                          <a:ea typeface="+mn-ea"/>
+                          <a:cs typeface="+mn-cs"/>
+                        </a:defRPr>
+                      </a:lvl9pPr>
+                    </a:lstStyle>
+                    <a:p>
+                      <a:pPr/>
+                      <a14:m>
+                        <m:oMathPara xmlns:m="http://schemas.openxmlformats.org/officeDocument/2006/math">
+                          <m:oMath>
+                            <m:sSub>
+                              <m:sSubPr>
+                                <m:ctrlPr>
+                                  <a:rPr lang="en-US" sz="1800" b="0" i="1" smtClean="0">
+                                    <a:latin typeface="Cambria Math" panose="02040503050406030204" pitchFamily="18" charset="0"/>
+                                  </a:rPr>
+                                </m:ctrlPr>
+                              </m:sSubPr>
+                              <m:e>
+                                <m:r>
+                                  <a:rPr lang="en-US" sz="1800" b="0" i="1" smtClean="0">
+                                    <a:latin typeface="Cambria Math" panose="02040503050406030204" pitchFamily="18" charset="0"/>
+                                  </a:rPr>
+                                  <m:t>𝑣</m:t>
+                                </m:r>
+                              </m:e>
+                              <m:sub>
+                                <m:r>
+                                  <a:rPr lang="en-US" sz="1800" b="0" i="1" smtClean="0">
+                                    <a:latin typeface="Cambria Math" panose="02040503050406030204" pitchFamily="18" charset="0"/>
+                                  </a:rPr>
+                                  <m:t>0</m:t>
+                                </m:r>
+                              </m:sub>
+                            </m:sSub>
+                          </m:oMath>
+                        </m:oMathPara>
+                      </a14:m>
+                      <a:endParaRPr lang="en-US" dirty="0"/>
+                    </a:p>
+                  </p:txBody>
+                </p:sp>
+              </mc:Choice>
+              <mc:Fallback xmlns="">
+                <p:sp>
+                  <p:nvSpPr>
+                    <p:cNvPr id="17" name="TextBox 29">
+                      <a:extLst>
+                        <a:ext uri="{FF2B5EF4-FFF2-40B4-BE49-F238E27FC236}">
+                          <a16:creationId xmlns:a16="http://schemas.microsoft.com/office/drawing/2014/main" id="{6DB673C8-2425-685A-8CBE-35EDDCA1EB91}"/>
+                        </a:ext>
+                        <a:ext uri="{C183D7F6-B498-43B3-948B-1728B52AA6E4}">
+                          <adec:decorative xmlns:adec="http://schemas.microsoft.com/office/drawing/2017/decorative" val="1"/>
+                        </a:ext>
+                      </a:extLst>
+                    </p:cNvPr>
+                    <p:cNvSpPr txBox="1">
+                      <a:spLocks noRot="1" noChangeAspect="1" noMove="1" noResize="1" noEditPoints="1" noAdjustHandles="1" noChangeArrowheads="1" noChangeShapeType="1" noTextEdit="1"/>
+                    </p:cNvSpPr>
+                    <p:nvPr/>
+                  </p:nvSpPr>
+                  <p:spPr>
+                    <a:xfrm>
+                      <a:off x="9564903" y="3086337"/>
+                      <a:ext cx="395810" cy="369332"/>
+                    </a:xfrm>
+                    <a:prstGeom prst="rect">
+                      <a:avLst/>
+                    </a:prstGeom>
+                    <a:blipFill>
+                      <a:blip r:embed="rId7"/>
+                      <a:stretch>
+                        <a:fillRect/>
+                      </a:stretch>
+                    </a:blipFill>
+                  </p:spPr>
+                  <p:txBody>
+                    <a:bodyPr/>
+                    <a:lstStyle/>
+                    <a:p>
+                      <a:r>
+                        <a:rPr lang="en-US">
+                          <a:noFill/>
+                        </a:rPr>
+                        <a:t> </a:t>
+                      </a:r>
+                    </a:p>
+                  </p:txBody>
+                </p:sp>
+              </mc:Fallback>
+            </mc:AlternateContent>
+            <mc:AlternateContent xmlns:mc="http://schemas.openxmlformats.org/markup-compatibility/2006" xmlns:a14="http://schemas.microsoft.com/office/drawing/2010/main">
+              <mc:Choice Requires="a14">
+                <p:sp>
+                  <p:nvSpPr>
+                    <p:cNvPr id="18" name="TextBox 30">
+                      <a:extLst>
+                        <a:ext uri="{FF2B5EF4-FFF2-40B4-BE49-F238E27FC236}">
+                          <a16:creationId xmlns:a16="http://schemas.microsoft.com/office/drawing/2014/main" id="{1223FDB0-EDE1-D3F8-B49E-7C42FE2277C4}"/>
+                        </a:ext>
+                        <a:ext uri="{C183D7F6-B498-43B3-948B-1728B52AA6E4}">
+                          <adec:decorative xmlns:adec="http://schemas.microsoft.com/office/drawing/2017/decorative" val="1"/>
+                        </a:ext>
+                      </a:extLst>
+                    </p:cNvPr>
+                    <p:cNvSpPr txBox="1"/>
+                    <p:nvPr/>
+                  </p:nvSpPr>
+                  <p:spPr>
+                    <a:xfrm>
+                      <a:off x="10066895" y="3115740"/>
+                      <a:ext cx="395810" cy="369332"/>
+                    </a:xfrm>
+                    <a:prstGeom prst="rect">
+                      <a:avLst/>
+                    </a:prstGeom>
+                    <a:noFill/>
+                  </p:spPr>
+                  <p:txBody>
+                    <a:bodyPr wrap="square">
+                      <a:spAutoFit/>
+                    </a:bodyPr>
+                    <a:lstStyle>
+                      <a:defPPr>
+                        <a:defRPr lang="en-US"/>
+                      </a:defPPr>
+                      <a:lvl1pPr marL="0" algn="l" defTabSz="914400" rtl="0" eaLnBrk="1" latinLnBrk="0" hangingPunct="1">
+                        <a:defRPr sz="1800" kern="1200">
+                          <a:solidFill>
+                            <a:schemeClr val="tx1"/>
+                          </a:solidFill>
+                          <a:latin typeface="+mn-lt"/>
+                          <a:ea typeface="+mn-ea"/>
+                          <a:cs typeface="+mn-cs"/>
+                        </a:defRPr>
+                      </a:lvl1pPr>
+                      <a:lvl2pPr marL="457200" algn="l" defTabSz="914400" rtl="0" eaLnBrk="1" latinLnBrk="0" hangingPunct="1">
+                        <a:defRPr sz="1800" kern="1200">
+                          <a:solidFill>
+                            <a:schemeClr val="tx1"/>
+                          </a:solidFill>
+                          <a:latin typeface="+mn-lt"/>
+                          <a:ea typeface="+mn-ea"/>
+                          <a:cs typeface="+mn-cs"/>
+                        </a:defRPr>
+                      </a:lvl2pPr>
+                      <a:lvl3pPr marL="914400" algn="l" defTabSz="914400" rtl="0" eaLnBrk="1" latinLnBrk="0" hangingPunct="1">
+                        <a:defRPr sz="1800" kern="1200">
+                          <a:solidFill>
+                            <a:schemeClr val="tx1"/>
+                          </a:solidFill>
+                          <a:latin typeface="+mn-lt"/>
+                          <a:ea typeface="+mn-ea"/>
+                          <a:cs typeface="+mn-cs"/>
+                        </a:defRPr>
+                      </a:lvl3pPr>
+                      <a:lvl4pPr marL="1371600" algn="l" defTabSz="914400" rtl="0" eaLnBrk="1" latinLnBrk="0" hangingPunct="1">
+                        <a:defRPr sz="1800" kern="1200">
+                          <a:solidFill>
+                            <a:schemeClr val="tx1"/>
+                          </a:solidFill>
+                          <a:latin typeface="+mn-lt"/>
+                          <a:ea typeface="+mn-ea"/>
+                          <a:cs typeface="+mn-cs"/>
+                        </a:defRPr>
+                      </a:lvl4pPr>
+                      <a:lvl5pPr marL="1828800" algn="l" defTabSz="914400" rtl="0" eaLnBrk="1" latinLnBrk="0" hangingPunct="1">
+                        <a:defRPr sz="1800" kern="1200">
+                          <a:solidFill>
+                            <a:schemeClr val="tx1"/>
+                          </a:solidFill>
+                          <a:latin typeface="+mn-lt"/>
+                          <a:ea typeface="+mn-ea"/>
+                          <a:cs typeface="+mn-cs"/>
+                        </a:defRPr>
+                      </a:lvl5pPr>
+                      <a:lvl6pPr marL="2286000" algn="l" defTabSz="914400" rtl="0" eaLnBrk="1" latinLnBrk="0" hangingPunct="1">
+                        <a:defRPr sz="1800" kern="1200">
+                          <a:solidFill>
+                            <a:schemeClr val="tx1"/>
+                          </a:solidFill>
+                          <a:latin typeface="+mn-lt"/>
+                          <a:ea typeface="+mn-ea"/>
+                          <a:cs typeface="+mn-cs"/>
+                        </a:defRPr>
+                      </a:lvl6pPr>
+                      <a:lvl7pPr marL="2743200" algn="l" defTabSz="914400" rtl="0" eaLnBrk="1" latinLnBrk="0" hangingPunct="1">
+                        <a:defRPr sz="1800" kern="1200">
+                          <a:solidFill>
+                            <a:schemeClr val="tx1"/>
+                          </a:solidFill>
+                          <a:latin typeface="+mn-lt"/>
+                          <a:ea typeface="+mn-ea"/>
+                          <a:cs typeface="+mn-cs"/>
+                        </a:defRPr>
+                      </a:lvl7pPr>
+                      <a:lvl8pPr marL="3200400" algn="l" defTabSz="914400" rtl="0" eaLnBrk="1" latinLnBrk="0" hangingPunct="1">
+                        <a:defRPr sz="1800" kern="1200">
+                          <a:solidFill>
+                            <a:schemeClr val="tx1"/>
+                          </a:solidFill>
+                          <a:latin typeface="+mn-lt"/>
+                          <a:ea typeface="+mn-ea"/>
+                          <a:cs typeface="+mn-cs"/>
+                        </a:defRPr>
+                      </a:lvl8pPr>
+                      <a:lvl9pPr marL="3657600" algn="l" defTabSz="914400" rtl="0" eaLnBrk="1" latinLnBrk="0" hangingPunct="1">
+                        <a:defRPr sz="1800" kern="1200">
+                          <a:solidFill>
+                            <a:schemeClr val="tx1"/>
+                          </a:solidFill>
+                          <a:latin typeface="+mn-lt"/>
+                          <a:ea typeface="+mn-ea"/>
+                          <a:cs typeface="+mn-cs"/>
+                        </a:defRPr>
+                      </a:lvl9pPr>
+                    </a:lstStyle>
+                    <a:p>
+                      <a:pPr/>
+                      <a14:m>
+                        <m:oMathPara xmlns:m="http://schemas.openxmlformats.org/officeDocument/2006/math">
+                          <m:oMath>
+                            <m:sSub>
+                              <m:sSubPr>
+                                <m:ctrlPr>
+                                  <a:rPr lang="en-US" sz="1800" b="0" i="1" smtClean="0">
+                                    <a:latin typeface="Cambria Math" panose="02040503050406030204" pitchFamily="18" charset="0"/>
+                                  </a:rPr>
+                                </m:ctrlPr>
+                              </m:sSubPr>
+                              <m:e>
+                                <m:r>
+                                  <a:rPr lang="en-US" sz="1800" b="0" i="1" smtClean="0">
+                                    <a:latin typeface="Cambria Math" panose="02040503050406030204" pitchFamily="18" charset="0"/>
+                                  </a:rPr>
+                                  <m:t>𝑣</m:t>
+                                </m:r>
+                              </m:e>
+                              <m:sub>
+                                <m:r>
+                                  <a:rPr lang="en-US" sz="1800" b="0" i="1" smtClean="0">
+                                    <a:latin typeface="Cambria Math" panose="02040503050406030204" pitchFamily="18" charset="0"/>
+                                  </a:rPr>
+                                  <m:t>1</m:t>
+                                </m:r>
+                              </m:sub>
+                            </m:sSub>
+                          </m:oMath>
+                        </m:oMathPara>
+                      </a14:m>
+                      <a:endParaRPr lang="en-US" dirty="0"/>
+                    </a:p>
+                  </p:txBody>
+                </p:sp>
+              </mc:Choice>
+              <mc:Fallback xmlns="">
+                <p:sp>
+                  <p:nvSpPr>
+                    <p:cNvPr id="18" name="TextBox 30">
+                      <a:extLst>
+                        <a:ext uri="{FF2B5EF4-FFF2-40B4-BE49-F238E27FC236}">
+                          <a16:creationId xmlns:a16="http://schemas.microsoft.com/office/drawing/2014/main" id="{56DA2FE2-AC26-7B66-B5BD-7064ECD50CE7}"/>
+                        </a:ext>
+                        <a:ext uri="{C183D7F6-B498-43B3-948B-1728B52AA6E4}">
+                          <adec:decorative xmlns:adec="http://schemas.microsoft.com/office/drawing/2017/decorative" val="1"/>
+                        </a:ext>
+                      </a:extLst>
+                    </p:cNvPr>
+                    <p:cNvSpPr txBox="1">
+                      <a:spLocks noRot="1" noChangeAspect="1" noMove="1" noResize="1" noEditPoints="1" noAdjustHandles="1" noChangeArrowheads="1" noChangeShapeType="1" noTextEdit="1"/>
+                    </p:cNvSpPr>
+                    <p:nvPr/>
+                  </p:nvSpPr>
+                  <p:spPr>
+                    <a:xfrm>
+                      <a:off x="10066895" y="3115740"/>
+                      <a:ext cx="395810" cy="369332"/>
+                    </a:xfrm>
+                    <a:prstGeom prst="rect">
+                      <a:avLst/>
+                    </a:prstGeom>
+                    <a:blipFill>
+                      <a:blip r:embed="rId8"/>
+                      <a:stretch>
+                        <a:fillRect/>
+                      </a:stretch>
+                    </a:blipFill>
+                  </p:spPr>
+                  <p:txBody>
+                    <a:bodyPr/>
+                    <a:lstStyle/>
+                    <a:p>
+                      <a:r>
+                        <a:rPr lang="en-US">
+                          <a:noFill/>
+                        </a:rPr>
+                        <a:t> </a:t>
+                      </a:r>
+                    </a:p>
+                  </p:txBody>
+                </p:sp>
+              </mc:Fallback>
+            </mc:AlternateContent>
+            <p:sp>
+              <p:nvSpPr>
+                <p:cNvPr id="19" name="Oval 18">
+                  <a:extLst>
+                    <a:ext uri="{FF2B5EF4-FFF2-40B4-BE49-F238E27FC236}">
+                      <a16:creationId xmlns:a16="http://schemas.microsoft.com/office/drawing/2014/main" id="{4FB5ACCD-0701-2FB2-F78E-42498C38670D}"/>
+                    </a:ext>
+                    <a:ext uri="{C183D7F6-B498-43B3-948B-1728B52AA6E4}">
+                      <adec:decorative xmlns:adec="http://schemas.microsoft.com/office/drawing/2017/decorative" val="1"/>
+                    </a:ext>
+                  </a:extLst>
+                </p:cNvPr>
+                <p:cNvSpPr/>
+                <p:nvPr/>
+              </p:nvSpPr>
+              <p:spPr>
+                <a:xfrm>
+                  <a:off x="11680507" y="3066584"/>
+                  <a:ext cx="127995" cy="117892"/>
+                </a:xfrm>
+                <a:prstGeom prst="ellipse">
+                  <a:avLst/>
+                </a:prstGeom>
+              </p:spPr>
+              <p:style>
+                <a:lnRef idx="2">
+                  <a:schemeClr val="accent6">
+                    <a:shade val="15000"/>
+                  </a:schemeClr>
+                </a:lnRef>
+                <a:fillRef idx="1">
+                  <a:schemeClr val="accent6"/>
+                </a:fillRef>
+                <a:effectRef idx="0">
+                  <a:schemeClr val="accent6"/>
+                </a:effectRef>
+                <a:fontRef idx="minor">
+                  <a:schemeClr val="lt1"/>
+                </a:fontRef>
+              </p:style>
+              <p:txBody>
+                <a:bodyPr rtlCol="0" anchor="ctr"/>
+                <a:lstStyle>
+                  <a:defPPr>
+                    <a:defRPr lang="en-US"/>
+                  </a:defPPr>
+                  <a:lvl1pPr marL="0" algn="l" defTabSz="914400" rtl="0" eaLnBrk="1" latinLnBrk="0" hangingPunct="1">
+                    <a:defRPr sz="1800" kern="1200">
+                      <a:solidFill>
+                        <a:schemeClr val="lt1"/>
+                      </a:solidFill>
+                      <a:latin typeface="+mn-lt"/>
+                      <a:ea typeface="+mn-ea"/>
+                      <a:cs typeface="+mn-cs"/>
+                    </a:defRPr>
+                  </a:lvl1pPr>
+                  <a:lvl2pPr marL="457200" algn="l" defTabSz="914400" rtl="0" eaLnBrk="1" latinLnBrk="0" hangingPunct="1">
+                    <a:defRPr sz="1800" kern="1200">
+                      <a:solidFill>
+                        <a:schemeClr val="lt1"/>
+                      </a:solidFill>
+                      <a:latin typeface="+mn-lt"/>
+                      <a:ea typeface="+mn-ea"/>
+                      <a:cs typeface="+mn-cs"/>
+                    </a:defRPr>
+                  </a:lvl2pPr>
+                  <a:lvl3pPr marL="914400" algn="l" defTabSz="914400" rtl="0" eaLnBrk="1" latinLnBrk="0" hangingPunct="1">
+                    <a:defRPr sz="1800" kern="1200">
+                      <a:solidFill>
+                        <a:schemeClr val="lt1"/>
+                      </a:solidFill>
+                      <a:latin typeface="+mn-lt"/>
+                      <a:ea typeface="+mn-ea"/>
+                      <a:cs typeface="+mn-cs"/>
+                    </a:defRPr>
+                  </a:lvl3pPr>
+                  <a:lvl4pPr marL="1371600" algn="l" defTabSz="914400" rtl="0" eaLnBrk="1" latinLnBrk="0" hangingPunct="1">
+                    <a:defRPr sz="1800" kern="1200">
+                      <a:solidFill>
+                        <a:schemeClr val="lt1"/>
+                      </a:solidFill>
+                      <a:latin typeface="+mn-lt"/>
+                      <a:ea typeface="+mn-ea"/>
+                      <a:cs typeface="+mn-cs"/>
+                    </a:defRPr>
+                  </a:lvl4pPr>
+                  <a:lvl5pPr marL="1828800" algn="l" defTabSz="914400" rtl="0" eaLnBrk="1" latinLnBrk="0" hangingPunct="1">
+                    <a:defRPr sz="1800" kern="1200">
+                      <a:solidFill>
+                        <a:schemeClr val="lt1"/>
+                      </a:solidFill>
+                      <a:latin typeface="+mn-lt"/>
+                      <a:ea typeface="+mn-ea"/>
+                      <a:cs typeface="+mn-cs"/>
+                    </a:defRPr>
+                  </a:lvl5pPr>
+                  <a:lvl6pPr marL="2286000" algn="l" defTabSz="914400" rtl="0" eaLnBrk="1" latinLnBrk="0" hangingPunct="1">
+                    <a:defRPr sz="1800" kern="1200">
+                      <a:solidFill>
+                        <a:schemeClr val="lt1"/>
+                      </a:solidFill>
+                      <a:latin typeface="+mn-lt"/>
+                      <a:ea typeface="+mn-ea"/>
+                      <a:cs typeface="+mn-cs"/>
+                    </a:defRPr>
+                  </a:lvl6pPr>
+                  <a:lvl7pPr marL="2743200" algn="l" defTabSz="914400" rtl="0" eaLnBrk="1" latinLnBrk="0" hangingPunct="1">
+                    <a:defRPr sz="1800" kern="1200">
+                      <a:solidFill>
+                        <a:schemeClr val="lt1"/>
+                      </a:solidFill>
+                      <a:latin typeface="+mn-lt"/>
+                      <a:ea typeface="+mn-ea"/>
+                      <a:cs typeface="+mn-cs"/>
+                    </a:defRPr>
+                  </a:lvl7pPr>
+                  <a:lvl8pPr marL="3200400" algn="l" defTabSz="914400" rtl="0" eaLnBrk="1" latinLnBrk="0" hangingPunct="1">
+                    <a:defRPr sz="1800" kern="1200">
+                      <a:solidFill>
+                        <a:schemeClr val="lt1"/>
+                      </a:solidFill>
+                      <a:latin typeface="+mn-lt"/>
+                      <a:ea typeface="+mn-ea"/>
+                      <a:cs typeface="+mn-cs"/>
+                    </a:defRPr>
+                  </a:lvl8pPr>
+                  <a:lvl9pPr marL="3657600" algn="l" defTabSz="914400" rtl="0" eaLnBrk="1" latinLnBrk="0" hangingPunct="1">
+                    <a:defRPr sz="1800" kern="1200">
+                      <a:solidFill>
+                        <a:schemeClr val="lt1"/>
+                      </a:solidFill>
+                      <a:latin typeface="+mn-lt"/>
+                      <a:ea typeface="+mn-ea"/>
+                      <a:cs typeface="+mn-cs"/>
+                    </a:defRPr>
+                  </a:lvl9pPr>
+                </a:lstStyle>
+                <a:p>
+                  <a:pPr algn="ctr"/>
+                  <a:endParaRPr lang="en-US"/>
+                </a:p>
+              </p:txBody>
+            </p:sp>
+            <p:sp>
+              <p:nvSpPr>
+                <p:cNvPr id="20" name="TextBox 35">
+                  <a:extLst>
+                    <a:ext uri="{FF2B5EF4-FFF2-40B4-BE49-F238E27FC236}">
+                      <a16:creationId xmlns:a16="http://schemas.microsoft.com/office/drawing/2014/main" id="{0BA13DE3-9692-0A72-42C2-2997B4BD90D3}"/>
+                    </a:ext>
+                    <a:ext uri="{C183D7F6-B498-43B3-948B-1728B52AA6E4}">
+                      <adec:decorative xmlns:adec="http://schemas.microsoft.com/office/drawing/2017/decorative" val="1"/>
+                    </a:ext>
+                  </a:extLst>
+                </p:cNvPr>
+                <p:cNvSpPr txBox="1"/>
+                <p:nvPr/>
+              </p:nvSpPr>
+              <p:spPr>
+                <a:xfrm>
+                  <a:off x="9366631" y="1964848"/>
+                  <a:ext cx="1796338" cy="338554"/>
+                </a:xfrm>
+                <a:prstGeom prst="rect">
+                  <a:avLst/>
+                </a:prstGeom>
+                <a:noFill/>
+              </p:spPr>
+              <p:txBody>
+                <a:bodyPr wrap="square">
+                  <a:spAutoFit/>
+                </a:bodyPr>
+                <a:lstStyle>
+                  <a:defPPr>
+                    <a:defRPr lang="en-US"/>
+                  </a:defPPr>
+                  <a:lvl1pPr marL="0" algn="l" defTabSz="914400" rtl="0" eaLnBrk="1" latinLnBrk="0" hangingPunct="1">
+                    <a:defRPr sz="1800" kern="1200">
+                      <a:solidFill>
+                        <a:schemeClr val="tx1"/>
+                      </a:solidFill>
+                      <a:latin typeface="+mn-lt"/>
+                      <a:ea typeface="+mn-ea"/>
+                      <a:cs typeface="+mn-cs"/>
+                    </a:defRPr>
+                  </a:lvl1pPr>
+                  <a:lvl2pPr marL="457200" algn="l" defTabSz="914400" rtl="0" eaLnBrk="1" latinLnBrk="0" hangingPunct="1">
+                    <a:defRPr sz="1800" kern="1200">
+                      <a:solidFill>
+                        <a:schemeClr val="tx1"/>
+                      </a:solidFill>
+                      <a:latin typeface="+mn-lt"/>
+                      <a:ea typeface="+mn-ea"/>
+                      <a:cs typeface="+mn-cs"/>
+                    </a:defRPr>
+                  </a:lvl2pPr>
+                  <a:lvl3pPr marL="914400" algn="l" defTabSz="914400" rtl="0" eaLnBrk="1" latinLnBrk="0" hangingPunct="1">
+                    <a:defRPr sz="1800" kern="1200">
+                      <a:solidFill>
+                        <a:schemeClr val="tx1"/>
+                      </a:solidFill>
+                      <a:latin typeface="+mn-lt"/>
+                      <a:ea typeface="+mn-ea"/>
+                      <a:cs typeface="+mn-cs"/>
+                    </a:defRPr>
+                  </a:lvl3pPr>
+                  <a:lvl4pPr marL="1371600" algn="l" defTabSz="914400" rtl="0" eaLnBrk="1" latinLnBrk="0" hangingPunct="1">
+                    <a:defRPr sz="1800" kern="1200">
+                      <a:solidFill>
+                        <a:schemeClr val="tx1"/>
+                      </a:solidFill>
+                      <a:latin typeface="+mn-lt"/>
+                      <a:ea typeface="+mn-ea"/>
+                      <a:cs typeface="+mn-cs"/>
+                    </a:defRPr>
+                  </a:lvl4pPr>
+                  <a:lvl5pPr marL="1828800" algn="l" defTabSz="914400" rtl="0" eaLnBrk="1" latinLnBrk="0" hangingPunct="1">
+                    <a:defRPr sz="1800" kern="1200">
+                      <a:solidFill>
+                        <a:schemeClr val="tx1"/>
+                      </a:solidFill>
+                      <a:latin typeface="+mn-lt"/>
+                      <a:ea typeface="+mn-ea"/>
+                      <a:cs typeface="+mn-cs"/>
+                    </a:defRPr>
+                  </a:lvl5pPr>
+                  <a:lvl6pPr marL="2286000" algn="l" defTabSz="914400" rtl="0" eaLnBrk="1" latinLnBrk="0" hangingPunct="1">
+                    <a:defRPr sz="1800" kern="1200">
+                      <a:solidFill>
+                        <a:schemeClr val="tx1"/>
+                      </a:solidFill>
+                      <a:latin typeface="+mn-lt"/>
+                      <a:ea typeface="+mn-ea"/>
+                      <a:cs typeface="+mn-cs"/>
+                    </a:defRPr>
+                  </a:lvl6pPr>
+                  <a:lvl7pPr marL="2743200" algn="l" defTabSz="914400" rtl="0" eaLnBrk="1" latinLnBrk="0" hangingPunct="1">
+                    <a:defRPr sz="1800" kern="1200">
+                      <a:solidFill>
+                        <a:schemeClr val="tx1"/>
+                      </a:solidFill>
+                      <a:latin typeface="+mn-lt"/>
+                      <a:ea typeface="+mn-ea"/>
+                      <a:cs typeface="+mn-cs"/>
+                    </a:defRPr>
+                  </a:lvl7pPr>
+                  <a:lvl8pPr marL="3200400" algn="l" defTabSz="914400" rtl="0" eaLnBrk="1" latinLnBrk="0" hangingPunct="1">
+                    <a:defRPr sz="1800" kern="1200">
+                      <a:solidFill>
+                        <a:schemeClr val="tx1"/>
+                      </a:solidFill>
+                      <a:latin typeface="+mn-lt"/>
+                      <a:ea typeface="+mn-ea"/>
+                      <a:cs typeface="+mn-cs"/>
+                    </a:defRPr>
+                  </a:lvl8pPr>
+                  <a:lvl9pPr marL="3657600" algn="l" defTabSz="914400" rtl="0" eaLnBrk="1" latinLnBrk="0" hangingPunct="1">
+                    <a:defRPr sz="1800" kern="1200">
+                      <a:solidFill>
+                        <a:schemeClr val="tx1"/>
+                      </a:solidFill>
+                      <a:latin typeface="+mn-lt"/>
+                      <a:ea typeface="+mn-ea"/>
+                      <a:cs typeface="+mn-cs"/>
+                    </a:defRPr>
+                  </a:lvl9pPr>
+                </a:lstStyle>
+                <a:p>
+                  <a:r>
+                    <a:rPr lang="en-US" sz="1600" dirty="0"/>
+                    <a:t>Bellman updates</a:t>
+                  </a:r>
+                </a:p>
+              </p:txBody>
+            </p:sp>
+          </p:grpSp>
           <p:sp>
             <p:nvSpPr>
-              <p:cNvPr id="13" name="Arc 12">
+              <p:cNvPr id="10" name="TextBox 9">
                 <a:extLst>
                   <a:ext uri="{FF2B5EF4-FFF2-40B4-BE49-F238E27FC236}">
-                    <a16:creationId xmlns:a16="http://schemas.microsoft.com/office/drawing/2014/main" id="{58658A5E-4BF3-F495-C114-E6EA460FC871}"/>
-                  </a:ext>
-                  <a:ext uri="{C183D7F6-B498-43B3-948B-1728B52AA6E4}">
-                    <adec:decorative xmlns:adec="http://schemas.microsoft.com/office/drawing/2017/decorative" val="1"/>
-                  </a:ext>
-                </a:extLst>
-              </p:cNvPr>
-              <p:cNvSpPr/>
-              <p:nvPr/>
-            </p:nvSpPr>
-            <p:spPr>
-              <a:xfrm>
-                <a:off x="9760371" y="2649297"/>
-                <a:ext cx="574339" cy="1009376"/>
-              </a:xfrm>
-              <a:prstGeom prst="arc">
-                <a:avLst>
-                  <a:gd name="adj1" fmla="val 10871568"/>
-                  <a:gd name="adj2" fmla="val 0"/>
-                </a:avLst>
-              </a:prstGeom>
-              <a:ln w="19050" cap="flat" cmpd="sng" algn="ctr">
-                <a:solidFill>
-                  <a:schemeClr val="accent6"/>
-                </a:solidFill>
-                <a:prstDash val="solid"/>
-                <a:round/>
-                <a:headEnd type="none" w="med" len="med"/>
-                <a:tailEnd type="arrow" w="med" len="med"/>
-              </a:ln>
-            </p:spPr>
-            <p:style>
-              <a:lnRef idx="0">
-                <a:scrgbClr r="0" g="0" b="0"/>
-              </a:lnRef>
-              <a:fillRef idx="0">
-                <a:scrgbClr r="0" g="0" b="0"/>
-              </a:fillRef>
-              <a:effectRef idx="0">
-                <a:scrgbClr r="0" g="0" b="0"/>
-              </a:effectRef>
-              <a:fontRef idx="minor">
-                <a:schemeClr val="tx1"/>
-              </a:fontRef>
-            </p:style>
-            <p:txBody>
-              <a:bodyPr rtlCol="0" anchor="ctr"/>
-              <a:lstStyle>
-                <a:defPPr>
-                  <a:defRPr lang="en-US"/>
-                </a:defPPr>
-                <a:lvl1pPr marL="0" algn="l" defTabSz="914400" rtl="0" eaLnBrk="1" latinLnBrk="0" hangingPunct="1">
-                  <a:defRPr sz="1800" kern="1200">
-                    <a:solidFill>
-                      <a:schemeClr val="tx1"/>
-                    </a:solidFill>
-                    <a:latin typeface="+mn-lt"/>
-                    <a:ea typeface="+mn-ea"/>
-                    <a:cs typeface="+mn-cs"/>
-                  </a:defRPr>
-                </a:lvl1pPr>
-                <a:lvl2pPr marL="457200" algn="l" defTabSz="914400" rtl="0" eaLnBrk="1" latinLnBrk="0" hangingPunct="1">
-                  <a:defRPr sz="1800" kern="1200">
-                    <a:solidFill>
-                      <a:schemeClr val="tx1"/>
-                    </a:solidFill>
-                    <a:latin typeface="+mn-lt"/>
-                    <a:ea typeface="+mn-ea"/>
-                    <a:cs typeface="+mn-cs"/>
-                  </a:defRPr>
-                </a:lvl2pPr>
-                <a:lvl3pPr marL="914400" algn="l" defTabSz="914400" rtl="0" eaLnBrk="1" latinLnBrk="0" hangingPunct="1">
-                  <a:defRPr sz="1800" kern="1200">
-                    <a:solidFill>
-                      <a:schemeClr val="tx1"/>
-                    </a:solidFill>
-                    <a:latin typeface="+mn-lt"/>
-                    <a:ea typeface="+mn-ea"/>
-                    <a:cs typeface="+mn-cs"/>
-                  </a:defRPr>
-                </a:lvl3pPr>
-                <a:lvl4pPr marL="1371600" algn="l" defTabSz="914400" rtl="0" eaLnBrk="1" latinLnBrk="0" hangingPunct="1">
-                  <a:defRPr sz="1800" kern="1200">
-                    <a:solidFill>
-                      <a:schemeClr val="tx1"/>
-                    </a:solidFill>
-                    <a:latin typeface="+mn-lt"/>
-                    <a:ea typeface="+mn-ea"/>
-                    <a:cs typeface="+mn-cs"/>
-                  </a:defRPr>
-                </a:lvl4pPr>
-                <a:lvl5pPr marL="1828800" algn="l" defTabSz="914400" rtl="0" eaLnBrk="1" latinLnBrk="0" hangingPunct="1">
-                  <a:defRPr sz="1800" kern="1200">
-                    <a:solidFill>
-                      <a:schemeClr val="tx1"/>
-                    </a:solidFill>
-                    <a:latin typeface="+mn-lt"/>
-                    <a:ea typeface="+mn-ea"/>
-                    <a:cs typeface="+mn-cs"/>
-                  </a:defRPr>
-                </a:lvl5pPr>
-                <a:lvl6pPr marL="2286000" algn="l" defTabSz="914400" rtl="0" eaLnBrk="1" latinLnBrk="0" hangingPunct="1">
-                  <a:defRPr sz="1800" kern="1200">
-                    <a:solidFill>
-                      <a:schemeClr val="tx1"/>
-                    </a:solidFill>
-                    <a:latin typeface="+mn-lt"/>
-                    <a:ea typeface="+mn-ea"/>
-                    <a:cs typeface="+mn-cs"/>
-                  </a:defRPr>
-                </a:lvl6pPr>
-                <a:lvl7pPr marL="2743200" algn="l" defTabSz="914400" rtl="0" eaLnBrk="1" latinLnBrk="0" hangingPunct="1">
-                  <a:defRPr sz="1800" kern="1200">
-                    <a:solidFill>
-                      <a:schemeClr val="tx1"/>
-                    </a:solidFill>
-                    <a:latin typeface="+mn-lt"/>
-                    <a:ea typeface="+mn-ea"/>
-                    <a:cs typeface="+mn-cs"/>
-                  </a:defRPr>
-                </a:lvl7pPr>
-                <a:lvl8pPr marL="3200400" algn="l" defTabSz="914400" rtl="0" eaLnBrk="1" latinLnBrk="0" hangingPunct="1">
-                  <a:defRPr sz="1800" kern="1200">
-                    <a:solidFill>
-                      <a:schemeClr val="tx1"/>
-                    </a:solidFill>
-                    <a:latin typeface="+mn-lt"/>
-                    <a:ea typeface="+mn-ea"/>
-                    <a:cs typeface="+mn-cs"/>
-                  </a:defRPr>
-                </a:lvl8pPr>
-                <a:lvl9pPr marL="3657600" algn="l" defTabSz="914400" rtl="0" eaLnBrk="1" latinLnBrk="0" hangingPunct="1">
-                  <a:defRPr sz="1800" kern="1200">
-                    <a:solidFill>
-                      <a:schemeClr val="tx1"/>
-                    </a:solidFill>
-                    <a:latin typeface="+mn-lt"/>
-                    <a:ea typeface="+mn-ea"/>
-                    <a:cs typeface="+mn-cs"/>
-                  </a:defRPr>
-                </a:lvl9pPr>
-              </a:lstStyle>
-              <a:p>
-                <a:pPr algn="ctr"/>
-                <a:endParaRPr lang="en-US"/>
-              </a:p>
-            </p:txBody>
-          </p:sp>
-          <p:sp>
-            <p:nvSpPr>
-              <p:cNvPr id="14" name="Arc 13">
-                <a:extLst>
-                  <a:ext uri="{FF2B5EF4-FFF2-40B4-BE49-F238E27FC236}">
-                    <a16:creationId xmlns:a16="http://schemas.microsoft.com/office/drawing/2014/main" id="{8C2E7F1D-DC32-A251-BB28-41567AFC7C70}"/>
-                  </a:ext>
-                  <a:ext uri="{C183D7F6-B498-43B3-948B-1728B52AA6E4}">
-                    <adec:decorative xmlns:adec="http://schemas.microsoft.com/office/drawing/2017/decorative" val="1"/>
-                  </a:ext>
-                </a:extLst>
-              </p:cNvPr>
-              <p:cNvSpPr/>
-              <p:nvPr/>
-            </p:nvSpPr>
-            <p:spPr>
-              <a:xfrm>
-                <a:off x="10334710" y="2614308"/>
-                <a:ext cx="765785" cy="1019782"/>
-              </a:xfrm>
-              <a:prstGeom prst="arc">
-                <a:avLst>
-                  <a:gd name="adj1" fmla="val 10871568"/>
-                  <a:gd name="adj2" fmla="val 0"/>
-                </a:avLst>
-              </a:prstGeom>
-              <a:ln w="19050" cap="flat" cmpd="sng" algn="ctr">
-                <a:solidFill>
-                  <a:schemeClr val="accent6"/>
-                </a:solidFill>
-                <a:prstDash val="solid"/>
-                <a:round/>
-                <a:headEnd type="none" w="med" len="med"/>
-                <a:tailEnd type="arrow" w="med" len="med"/>
-              </a:ln>
-            </p:spPr>
-            <p:style>
-              <a:lnRef idx="0">
-                <a:scrgbClr r="0" g="0" b="0"/>
-              </a:lnRef>
-              <a:fillRef idx="0">
-                <a:scrgbClr r="0" g="0" b="0"/>
-              </a:fillRef>
-              <a:effectRef idx="0">
-                <a:scrgbClr r="0" g="0" b="0"/>
-              </a:effectRef>
-              <a:fontRef idx="minor">
-                <a:schemeClr val="tx1"/>
-              </a:fontRef>
-            </p:style>
-            <p:txBody>
-              <a:bodyPr rtlCol="0" anchor="ctr"/>
-              <a:lstStyle>
-                <a:defPPr>
-                  <a:defRPr lang="en-US"/>
-                </a:defPPr>
-                <a:lvl1pPr marL="0" algn="l" defTabSz="914400" rtl="0" eaLnBrk="1" latinLnBrk="0" hangingPunct="1">
-                  <a:defRPr sz="1800" kern="1200">
-                    <a:solidFill>
-                      <a:schemeClr val="tx1"/>
-                    </a:solidFill>
-                    <a:latin typeface="+mn-lt"/>
-                    <a:ea typeface="+mn-ea"/>
-                    <a:cs typeface="+mn-cs"/>
-                  </a:defRPr>
-                </a:lvl1pPr>
-                <a:lvl2pPr marL="457200" algn="l" defTabSz="914400" rtl="0" eaLnBrk="1" latinLnBrk="0" hangingPunct="1">
-                  <a:defRPr sz="1800" kern="1200">
-                    <a:solidFill>
-                      <a:schemeClr val="tx1"/>
-                    </a:solidFill>
-                    <a:latin typeface="+mn-lt"/>
-                    <a:ea typeface="+mn-ea"/>
-                    <a:cs typeface="+mn-cs"/>
-                  </a:defRPr>
-                </a:lvl2pPr>
-                <a:lvl3pPr marL="914400" algn="l" defTabSz="914400" rtl="0" eaLnBrk="1" latinLnBrk="0" hangingPunct="1">
-                  <a:defRPr sz="1800" kern="1200">
-                    <a:solidFill>
-                      <a:schemeClr val="tx1"/>
-                    </a:solidFill>
-                    <a:latin typeface="+mn-lt"/>
-                    <a:ea typeface="+mn-ea"/>
-                    <a:cs typeface="+mn-cs"/>
-                  </a:defRPr>
-                </a:lvl3pPr>
-                <a:lvl4pPr marL="1371600" algn="l" defTabSz="914400" rtl="0" eaLnBrk="1" latinLnBrk="0" hangingPunct="1">
-                  <a:defRPr sz="1800" kern="1200">
-                    <a:solidFill>
-                      <a:schemeClr val="tx1"/>
-                    </a:solidFill>
-                    <a:latin typeface="+mn-lt"/>
-                    <a:ea typeface="+mn-ea"/>
-                    <a:cs typeface="+mn-cs"/>
-                  </a:defRPr>
-                </a:lvl4pPr>
-                <a:lvl5pPr marL="1828800" algn="l" defTabSz="914400" rtl="0" eaLnBrk="1" latinLnBrk="0" hangingPunct="1">
-                  <a:defRPr sz="1800" kern="1200">
-                    <a:solidFill>
-                      <a:schemeClr val="tx1"/>
-                    </a:solidFill>
-                    <a:latin typeface="+mn-lt"/>
-                    <a:ea typeface="+mn-ea"/>
-                    <a:cs typeface="+mn-cs"/>
-                  </a:defRPr>
-                </a:lvl5pPr>
-                <a:lvl6pPr marL="2286000" algn="l" defTabSz="914400" rtl="0" eaLnBrk="1" latinLnBrk="0" hangingPunct="1">
-                  <a:defRPr sz="1800" kern="1200">
-                    <a:solidFill>
-                      <a:schemeClr val="tx1"/>
-                    </a:solidFill>
-                    <a:latin typeface="+mn-lt"/>
-                    <a:ea typeface="+mn-ea"/>
-                    <a:cs typeface="+mn-cs"/>
-                  </a:defRPr>
-                </a:lvl6pPr>
-                <a:lvl7pPr marL="2743200" algn="l" defTabSz="914400" rtl="0" eaLnBrk="1" latinLnBrk="0" hangingPunct="1">
-                  <a:defRPr sz="1800" kern="1200">
-                    <a:solidFill>
-                      <a:schemeClr val="tx1"/>
-                    </a:solidFill>
-                    <a:latin typeface="+mn-lt"/>
-                    <a:ea typeface="+mn-ea"/>
-                    <a:cs typeface="+mn-cs"/>
-                  </a:defRPr>
-                </a:lvl7pPr>
-                <a:lvl8pPr marL="3200400" algn="l" defTabSz="914400" rtl="0" eaLnBrk="1" latinLnBrk="0" hangingPunct="1">
-                  <a:defRPr sz="1800" kern="1200">
-                    <a:solidFill>
-                      <a:schemeClr val="tx1"/>
-                    </a:solidFill>
-                    <a:latin typeface="+mn-lt"/>
-                    <a:ea typeface="+mn-ea"/>
-                    <a:cs typeface="+mn-cs"/>
-                  </a:defRPr>
-                </a:lvl8pPr>
-                <a:lvl9pPr marL="3657600" algn="l" defTabSz="914400" rtl="0" eaLnBrk="1" latinLnBrk="0" hangingPunct="1">
-                  <a:defRPr sz="1800" kern="1200">
-                    <a:solidFill>
-                      <a:schemeClr val="tx1"/>
-                    </a:solidFill>
-                    <a:latin typeface="+mn-lt"/>
-                    <a:ea typeface="+mn-ea"/>
-                    <a:cs typeface="+mn-cs"/>
-                  </a:defRPr>
-                </a:lvl9pPr>
-              </a:lstStyle>
-              <a:p>
-                <a:pPr algn="ctr"/>
-                <a:endParaRPr lang="en-US"/>
-              </a:p>
-            </p:txBody>
-          </p:sp>
-          <p:sp>
-            <p:nvSpPr>
-              <p:cNvPr id="15" name="Arc 14">
-                <a:extLst>
-                  <a:ext uri="{FF2B5EF4-FFF2-40B4-BE49-F238E27FC236}">
-                    <a16:creationId xmlns:a16="http://schemas.microsoft.com/office/drawing/2014/main" id="{7026F178-8BD0-9B6E-1868-851FF19E16DA}"/>
-                  </a:ext>
-                  <a:ext uri="{C183D7F6-B498-43B3-948B-1728B52AA6E4}">
-                    <adec:decorative xmlns:adec="http://schemas.microsoft.com/office/drawing/2017/decorative" val="1"/>
-                  </a:ext>
-                </a:extLst>
-              </p:cNvPr>
-              <p:cNvSpPr/>
-              <p:nvPr/>
-            </p:nvSpPr>
-            <p:spPr>
-              <a:xfrm>
-                <a:off x="11100495" y="2627412"/>
-                <a:ext cx="220048" cy="1019782"/>
-              </a:xfrm>
-              <a:prstGeom prst="arc">
-                <a:avLst>
-                  <a:gd name="adj1" fmla="val 10871568"/>
-                  <a:gd name="adj2" fmla="val 0"/>
-                </a:avLst>
-              </a:prstGeom>
-              <a:ln w="19050" cap="flat" cmpd="sng" algn="ctr">
-                <a:solidFill>
-                  <a:schemeClr val="accent6"/>
-                </a:solidFill>
-                <a:prstDash val="solid"/>
-                <a:round/>
-                <a:headEnd type="none" w="med" len="med"/>
-                <a:tailEnd type="arrow" w="med" len="med"/>
-              </a:ln>
-            </p:spPr>
-            <p:style>
-              <a:lnRef idx="0">
-                <a:scrgbClr r="0" g="0" b="0"/>
-              </a:lnRef>
-              <a:fillRef idx="0">
-                <a:scrgbClr r="0" g="0" b="0"/>
-              </a:fillRef>
-              <a:effectRef idx="0">
-                <a:scrgbClr r="0" g="0" b="0"/>
-              </a:effectRef>
-              <a:fontRef idx="minor">
-                <a:schemeClr val="tx1"/>
-              </a:fontRef>
-            </p:style>
-            <p:txBody>
-              <a:bodyPr rtlCol="0" anchor="ctr"/>
-              <a:lstStyle>
-                <a:defPPr>
-                  <a:defRPr lang="en-US"/>
-                </a:defPPr>
-                <a:lvl1pPr marL="0" algn="l" defTabSz="914400" rtl="0" eaLnBrk="1" latinLnBrk="0" hangingPunct="1">
-                  <a:defRPr sz="1800" kern="1200">
-                    <a:solidFill>
-                      <a:schemeClr val="tx1"/>
-                    </a:solidFill>
-                    <a:latin typeface="+mn-lt"/>
-                    <a:ea typeface="+mn-ea"/>
-                    <a:cs typeface="+mn-cs"/>
-                  </a:defRPr>
-                </a:lvl1pPr>
-                <a:lvl2pPr marL="457200" algn="l" defTabSz="914400" rtl="0" eaLnBrk="1" latinLnBrk="0" hangingPunct="1">
-                  <a:defRPr sz="1800" kern="1200">
-                    <a:solidFill>
-                      <a:schemeClr val="tx1"/>
-                    </a:solidFill>
-                    <a:latin typeface="+mn-lt"/>
-                    <a:ea typeface="+mn-ea"/>
-                    <a:cs typeface="+mn-cs"/>
-                  </a:defRPr>
-                </a:lvl2pPr>
-                <a:lvl3pPr marL="914400" algn="l" defTabSz="914400" rtl="0" eaLnBrk="1" latinLnBrk="0" hangingPunct="1">
-                  <a:defRPr sz="1800" kern="1200">
-                    <a:solidFill>
-                      <a:schemeClr val="tx1"/>
-                    </a:solidFill>
-                    <a:latin typeface="+mn-lt"/>
-                    <a:ea typeface="+mn-ea"/>
-                    <a:cs typeface="+mn-cs"/>
-                  </a:defRPr>
-                </a:lvl3pPr>
-                <a:lvl4pPr marL="1371600" algn="l" defTabSz="914400" rtl="0" eaLnBrk="1" latinLnBrk="0" hangingPunct="1">
-                  <a:defRPr sz="1800" kern="1200">
-                    <a:solidFill>
-                      <a:schemeClr val="tx1"/>
-                    </a:solidFill>
-                    <a:latin typeface="+mn-lt"/>
-                    <a:ea typeface="+mn-ea"/>
-                    <a:cs typeface="+mn-cs"/>
-                  </a:defRPr>
-                </a:lvl4pPr>
-                <a:lvl5pPr marL="1828800" algn="l" defTabSz="914400" rtl="0" eaLnBrk="1" latinLnBrk="0" hangingPunct="1">
-                  <a:defRPr sz="1800" kern="1200">
-                    <a:solidFill>
-                      <a:schemeClr val="tx1"/>
-                    </a:solidFill>
-                    <a:latin typeface="+mn-lt"/>
-                    <a:ea typeface="+mn-ea"/>
-                    <a:cs typeface="+mn-cs"/>
-                  </a:defRPr>
-                </a:lvl5pPr>
-                <a:lvl6pPr marL="2286000" algn="l" defTabSz="914400" rtl="0" eaLnBrk="1" latinLnBrk="0" hangingPunct="1">
-                  <a:defRPr sz="1800" kern="1200">
-                    <a:solidFill>
-                      <a:schemeClr val="tx1"/>
-                    </a:solidFill>
-                    <a:latin typeface="+mn-lt"/>
-                    <a:ea typeface="+mn-ea"/>
-                    <a:cs typeface="+mn-cs"/>
-                  </a:defRPr>
-                </a:lvl6pPr>
-                <a:lvl7pPr marL="2743200" algn="l" defTabSz="914400" rtl="0" eaLnBrk="1" latinLnBrk="0" hangingPunct="1">
-                  <a:defRPr sz="1800" kern="1200">
-                    <a:solidFill>
-                      <a:schemeClr val="tx1"/>
-                    </a:solidFill>
-                    <a:latin typeface="+mn-lt"/>
-                    <a:ea typeface="+mn-ea"/>
-                    <a:cs typeface="+mn-cs"/>
-                  </a:defRPr>
-                </a:lvl7pPr>
-                <a:lvl8pPr marL="3200400" algn="l" defTabSz="914400" rtl="0" eaLnBrk="1" latinLnBrk="0" hangingPunct="1">
-                  <a:defRPr sz="1800" kern="1200">
-                    <a:solidFill>
-                      <a:schemeClr val="tx1"/>
-                    </a:solidFill>
-                    <a:latin typeface="+mn-lt"/>
-                    <a:ea typeface="+mn-ea"/>
-                    <a:cs typeface="+mn-cs"/>
-                  </a:defRPr>
-                </a:lvl8pPr>
-                <a:lvl9pPr marL="3657600" algn="l" defTabSz="914400" rtl="0" eaLnBrk="1" latinLnBrk="0" hangingPunct="1">
-                  <a:defRPr sz="1800" kern="1200">
-                    <a:solidFill>
-                      <a:schemeClr val="tx1"/>
-                    </a:solidFill>
-                    <a:latin typeface="+mn-lt"/>
-                    <a:ea typeface="+mn-ea"/>
-                    <a:cs typeface="+mn-cs"/>
-                  </a:defRPr>
-                </a:lvl9pPr>
-              </a:lstStyle>
-              <a:p>
-                <a:pPr algn="ctr"/>
-                <a:endParaRPr lang="en-US"/>
-              </a:p>
-            </p:txBody>
-          </p:sp>
-          <p:sp>
-            <p:nvSpPr>
-              <p:cNvPr id="16" name="Arc 15">
-                <a:extLst>
-                  <a:ext uri="{FF2B5EF4-FFF2-40B4-BE49-F238E27FC236}">
-                    <a16:creationId xmlns:a16="http://schemas.microsoft.com/office/drawing/2014/main" id="{57088D6C-4C8C-FE23-F85D-8685A8BA96A3}"/>
-                  </a:ext>
-                  <a:ext uri="{C183D7F6-B498-43B3-948B-1728B52AA6E4}">
-                    <adec:decorative xmlns:adec="http://schemas.microsoft.com/office/drawing/2017/decorative" val="1"/>
-                  </a:ext>
-                </a:extLst>
-              </p:cNvPr>
-              <p:cNvSpPr/>
-              <p:nvPr/>
-            </p:nvSpPr>
-            <p:spPr>
-              <a:xfrm>
-                <a:off x="11308888" y="2648522"/>
-                <a:ext cx="417487" cy="951353"/>
-              </a:xfrm>
-              <a:prstGeom prst="arc">
-                <a:avLst>
-                  <a:gd name="adj1" fmla="val 10871568"/>
-                  <a:gd name="adj2" fmla="val 0"/>
-                </a:avLst>
-              </a:prstGeom>
-              <a:ln w="19050" cap="flat" cmpd="sng" algn="ctr">
-                <a:solidFill>
-                  <a:schemeClr val="accent6"/>
-                </a:solidFill>
-                <a:prstDash val="solid"/>
-                <a:round/>
-                <a:headEnd type="none" w="med" len="med"/>
-                <a:tailEnd type="arrow" w="med" len="med"/>
-              </a:ln>
-            </p:spPr>
-            <p:style>
-              <a:lnRef idx="0">
-                <a:scrgbClr r="0" g="0" b="0"/>
-              </a:lnRef>
-              <a:fillRef idx="0">
-                <a:scrgbClr r="0" g="0" b="0"/>
-              </a:fillRef>
-              <a:effectRef idx="0">
-                <a:scrgbClr r="0" g="0" b="0"/>
-              </a:effectRef>
-              <a:fontRef idx="minor">
-                <a:schemeClr val="tx1"/>
-              </a:fontRef>
-            </p:style>
-            <p:txBody>
-              <a:bodyPr rtlCol="0" anchor="ctr"/>
-              <a:lstStyle>
-                <a:defPPr>
-                  <a:defRPr lang="en-US"/>
-                </a:defPPr>
-                <a:lvl1pPr marL="0" algn="l" defTabSz="914400" rtl="0" eaLnBrk="1" latinLnBrk="0" hangingPunct="1">
-                  <a:defRPr sz="1800" kern="1200">
-                    <a:solidFill>
-                      <a:schemeClr val="tx1"/>
-                    </a:solidFill>
-                    <a:latin typeface="+mn-lt"/>
-                    <a:ea typeface="+mn-ea"/>
-                    <a:cs typeface="+mn-cs"/>
-                  </a:defRPr>
-                </a:lvl1pPr>
-                <a:lvl2pPr marL="457200" algn="l" defTabSz="914400" rtl="0" eaLnBrk="1" latinLnBrk="0" hangingPunct="1">
-                  <a:defRPr sz="1800" kern="1200">
-                    <a:solidFill>
-                      <a:schemeClr val="tx1"/>
-                    </a:solidFill>
-                    <a:latin typeface="+mn-lt"/>
-                    <a:ea typeface="+mn-ea"/>
-                    <a:cs typeface="+mn-cs"/>
-                  </a:defRPr>
-                </a:lvl2pPr>
-                <a:lvl3pPr marL="914400" algn="l" defTabSz="914400" rtl="0" eaLnBrk="1" latinLnBrk="0" hangingPunct="1">
-                  <a:defRPr sz="1800" kern="1200">
-                    <a:solidFill>
-                      <a:schemeClr val="tx1"/>
-                    </a:solidFill>
-                    <a:latin typeface="+mn-lt"/>
-                    <a:ea typeface="+mn-ea"/>
-                    <a:cs typeface="+mn-cs"/>
-                  </a:defRPr>
-                </a:lvl3pPr>
-                <a:lvl4pPr marL="1371600" algn="l" defTabSz="914400" rtl="0" eaLnBrk="1" latinLnBrk="0" hangingPunct="1">
-                  <a:defRPr sz="1800" kern="1200">
-                    <a:solidFill>
-                      <a:schemeClr val="tx1"/>
-                    </a:solidFill>
-                    <a:latin typeface="+mn-lt"/>
-                    <a:ea typeface="+mn-ea"/>
-                    <a:cs typeface="+mn-cs"/>
-                  </a:defRPr>
-                </a:lvl4pPr>
-                <a:lvl5pPr marL="1828800" algn="l" defTabSz="914400" rtl="0" eaLnBrk="1" latinLnBrk="0" hangingPunct="1">
-                  <a:defRPr sz="1800" kern="1200">
-                    <a:solidFill>
-                      <a:schemeClr val="tx1"/>
-                    </a:solidFill>
-                    <a:latin typeface="+mn-lt"/>
-                    <a:ea typeface="+mn-ea"/>
-                    <a:cs typeface="+mn-cs"/>
-                  </a:defRPr>
-                </a:lvl5pPr>
-                <a:lvl6pPr marL="2286000" algn="l" defTabSz="914400" rtl="0" eaLnBrk="1" latinLnBrk="0" hangingPunct="1">
-                  <a:defRPr sz="1800" kern="1200">
-                    <a:solidFill>
-                      <a:schemeClr val="tx1"/>
-                    </a:solidFill>
-                    <a:latin typeface="+mn-lt"/>
-                    <a:ea typeface="+mn-ea"/>
-                    <a:cs typeface="+mn-cs"/>
-                  </a:defRPr>
-                </a:lvl6pPr>
-                <a:lvl7pPr marL="2743200" algn="l" defTabSz="914400" rtl="0" eaLnBrk="1" latinLnBrk="0" hangingPunct="1">
-                  <a:defRPr sz="1800" kern="1200">
-                    <a:solidFill>
-                      <a:schemeClr val="tx1"/>
-                    </a:solidFill>
-                    <a:latin typeface="+mn-lt"/>
-                    <a:ea typeface="+mn-ea"/>
-                    <a:cs typeface="+mn-cs"/>
-                  </a:defRPr>
-                </a:lvl7pPr>
-                <a:lvl8pPr marL="3200400" algn="l" defTabSz="914400" rtl="0" eaLnBrk="1" latinLnBrk="0" hangingPunct="1">
-                  <a:defRPr sz="1800" kern="1200">
-                    <a:solidFill>
-                      <a:schemeClr val="tx1"/>
-                    </a:solidFill>
-                    <a:latin typeface="+mn-lt"/>
-                    <a:ea typeface="+mn-ea"/>
-                    <a:cs typeface="+mn-cs"/>
-                  </a:defRPr>
-                </a:lvl8pPr>
-                <a:lvl9pPr marL="3657600" algn="l" defTabSz="914400" rtl="0" eaLnBrk="1" latinLnBrk="0" hangingPunct="1">
-                  <a:defRPr sz="1800" kern="1200">
-                    <a:solidFill>
-                      <a:schemeClr val="tx1"/>
-                    </a:solidFill>
-                    <a:latin typeface="+mn-lt"/>
-                    <a:ea typeface="+mn-ea"/>
-                    <a:cs typeface="+mn-cs"/>
-                  </a:defRPr>
-                </a:lvl9pPr>
-              </a:lstStyle>
-              <a:p>
-                <a:pPr algn="ctr"/>
-                <a:endParaRPr lang="en-US"/>
-              </a:p>
-            </p:txBody>
-          </p:sp>
-          <mc:AlternateContent xmlns:mc="http://schemas.openxmlformats.org/markup-compatibility/2006" xmlns:a14="http://schemas.microsoft.com/office/drawing/2010/main">
-            <mc:Choice Requires="a14">
-              <p:sp>
-                <p:nvSpPr>
-                  <p:cNvPr id="17" name="TextBox 29">
-                    <a:extLst>
-                      <a:ext uri="{FF2B5EF4-FFF2-40B4-BE49-F238E27FC236}">
-                        <a16:creationId xmlns:a16="http://schemas.microsoft.com/office/drawing/2014/main" id="{33B57A32-72F6-077F-22AE-C34A118F7D55}"/>
-                      </a:ext>
-                      <a:ext uri="{C183D7F6-B498-43B3-948B-1728B52AA6E4}">
-                        <adec:decorative xmlns:adec="http://schemas.microsoft.com/office/drawing/2017/decorative" val="1"/>
-                      </a:ext>
-                    </a:extLst>
-                  </p:cNvPr>
-                  <p:cNvSpPr txBox="1"/>
-                  <p:nvPr/>
-                </p:nvSpPr>
-                <p:spPr>
-                  <a:xfrm>
-                    <a:off x="9564903" y="3086337"/>
-                    <a:ext cx="395810" cy="369332"/>
-                  </a:xfrm>
-                  <a:prstGeom prst="rect">
-                    <a:avLst/>
-                  </a:prstGeom>
-                  <a:noFill/>
-                </p:spPr>
-                <p:txBody>
-                  <a:bodyPr wrap="square">
-                    <a:spAutoFit/>
-                  </a:bodyPr>
-                  <a:lstStyle>
-                    <a:defPPr>
-                      <a:defRPr lang="en-US"/>
-                    </a:defPPr>
-                    <a:lvl1pPr marL="0" algn="l" defTabSz="914400" rtl="0" eaLnBrk="1" latinLnBrk="0" hangingPunct="1">
-                      <a:defRPr sz="1800" kern="1200">
-                        <a:solidFill>
-                          <a:schemeClr val="tx1"/>
-                        </a:solidFill>
-                        <a:latin typeface="+mn-lt"/>
-                        <a:ea typeface="+mn-ea"/>
-                        <a:cs typeface="+mn-cs"/>
-                      </a:defRPr>
-                    </a:lvl1pPr>
-                    <a:lvl2pPr marL="457200" algn="l" defTabSz="914400" rtl="0" eaLnBrk="1" latinLnBrk="0" hangingPunct="1">
-                      <a:defRPr sz="1800" kern="1200">
-                        <a:solidFill>
-                          <a:schemeClr val="tx1"/>
-                        </a:solidFill>
-                        <a:latin typeface="+mn-lt"/>
-                        <a:ea typeface="+mn-ea"/>
-                        <a:cs typeface="+mn-cs"/>
-                      </a:defRPr>
-                    </a:lvl2pPr>
-                    <a:lvl3pPr marL="914400" algn="l" defTabSz="914400" rtl="0" eaLnBrk="1" latinLnBrk="0" hangingPunct="1">
-                      <a:defRPr sz="1800" kern="1200">
-                        <a:solidFill>
-                          <a:schemeClr val="tx1"/>
-                        </a:solidFill>
-                        <a:latin typeface="+mn-lt"/>
-                        <a:ea typeface="+mn-ea"/>
-                        <a:cs typeface="+mn-cs"/>
-                      </a:defRPr>
-                    </a:lvl3pPr>
-                    <a:lvl4pPr marL="1371600" algn="l" defTabSz="914400" rtl="0" eaLnBrk="1" latinLnBrk="0" hangingPunct="1">
-                      <a:defRPr sz="1800" kern="1200">
-                        <a:solidFill>
-                          <a:schemeClr val="tx1"/>
-                        </a:solidFill>
-                        <a:latin typeface="+mn-lt"/>
-                        <a:ea typeface="+mn-ea"/>
-                        <a:cs typeface="+mn-cs"/>
-                      </a:defRPr>
-                    </a:lvl4pPr>
-                    <a:lvl5pPr marL="1828800" algn="l" defTabSz="914400" rtl="0" eaLnBrk="1" latinLnBrk="0" hangingPunct="1">
-                      <a:defRPr sz="1800" kern="1200">
-                        <a:solidFill>
-                          <a:schemeClr val="tx1"/>
-                        </a:solidFill>
-                        <a:latin typeface="+mn-lt"/>
-                        <a:ea typeface="+mn-ea"/>
-                        <a:cs typeface="+mn-cs"/>
-                      </a:defRPr>
-                    </a:lvl5pPr>
-                    <a:lvl6pPr marL="2286000" algn="l" defTabSz="914400" rtl="0" eaLnBrk="1" latinLnBrk="0" hangingPunct="1">
-                      <a:defRPr sz="1800" kern="1200">
-                        <a:solidFill>
-                          <a:schemeClr val="tx1"/>
-                        </a:solidFill>
-                        <a:latin typeface="+mn-lt"/>
-                        <a:ea typeface="+mn-ea"/>
-                        <a:cs typeface="+mn-cs"/>
-                      </a:defRPr>
-                    </a:lvl6pPr>
-                    <a:lvl7pPr marL="2743200" algn="l" defTabSz="914400" rtl="0" eaLnBrk="1" latinLnBrk="0" hangingPunct="1">
-                      <a:defRPr sz="1800" kern="1200">
-                        <a:solidFill>
-                          <a:schemeClr val="tx1"/>
-                        </a:solidFill>
-                        <a:latin typeface="+mn-lt"/>
-                        <a:ea typeface="+mn-ea"/>
-                        <a:cs typeface="+mn-cs"/>
-                      </a:defRPr>
-                    </a:lvl7pPr>
-                    <a:lvl8pPr marL="3200400" algn="l" defTabSz="914400" rtl="0" eaLnBrk="1" latinLnBrk="0" hangingPunct="1">
-                      <a:defRPr sz="1800" kern="1200">
-                        <a:solidFill>
-                          <a:schemeClr val="tx1"/>
-                        </a:solidFill>
-                        <a:latin typeface="+mn-lt"/>
-                        <a:ea typeface="+mn-ea"/>
-                        <a:cs typeface="+mn-cs"/>
-                      </a:defRPr>
-                    </a:lvl8pPr>
-                    <a:lvl9pPr marL="3657600" algn="l" defTabSz="914400" rtl="0" eaLnBrk="1" latinLnBrk="0" hangingPunct="1">
-                      <a:defRPr sz="1800" kern="1200">
-                        <a:solidFill>
-                          <a:schemeClr val="tx1"/>
-                        </a:solidFill>
-                        <a:latin typeface="+mn-lt"/>
-                        <a:ea typeface="+mn-ea"/>
-                        <a:cs typeface="+mn-cs"/>
-                      </a:defRPr>
-                    </a:lvl9pPr>
-                  </a:lstStyle>
-                  <a:p>
-                    <a:pPr/>
-                    <a14:m>
-                      <m:oMathPara xmlns:m="http://schemas.openxmlformats.org/officeDocument/2006/math">
-                        <m:oMath>
-                          <m:sSub>
-                            <m:sSubPr>
-                              <m:ctrlPr>
-                                <a:rPr lang="en-US" sz="1800" b="0" i="1" smtClean="0">
-                                  <a:latin typeface="Cambria Math" panose="02040503050406030204" pitchFamily="18" charset="0"/>
-                                </a:rPr>
-                              </m:ctrlPr>
-                            </m:sSubPr>
-                            <m:e>
-                              <m:r>
-                                <a:rPr lang="en-US" sz="1800" b="0" i="1" smtClean="0">
-                                  <a:latin typeface="Cambria Math" panose="02040503050406030204" pitchFamily="18" charset="0"/>
-                                </a:rPr>
-                                <m:t>𝑣</m:t>
-                              </m:r>
-                            </m:e>
-                            <m:sub>
-                              <m:r>
-                                <a:rPr lang="en-US" sz="1800" b="0" i="1" smtClean="0">
-                                  <a:latin typeface="Cambria Math" panose="02040503050406030204" pitchFamily="18" charset="0"/>
-                                </a:rPr>
-                                <m:t>0</m:t>
-                              </m:r>
-                            </m:sub>
-                          </m:sSub>
-                        </m:oMath>
-                      </m:oMathPara>
-                    </a14:m>
-                    <a:endParaRPr lang="en-US" dirty="0"/>
-                  </a:p>
-                </p:txBody>
-              </p:sp>
-            </mc:Choice>
-            <mc:Fallback xmlns="">
-              <p:sp>
-                <p:nvSpPr>
-                  <p:cNvPr id="17" name="TextBox 29">
-                    <a:extLst>
-                      <a:ext uri="{FF2B5EF4-FFF2-40B4-BE49-F238E27FC236}">
-                        <a16:creationId xmlns:a16="http://schemas.microsoft.com/office/drawing/2014/main" id="{6DB673C8-2425-685A-8CBE-35EDDCA1EB91}"/>
-                      </a:ext>
-                      <a:ext uri="{C183D7F6-B498-43B3-948B-1728B52AA6E4}">
-                        <adec:decorative xmlns:adec="http://schemas.microsoft.com/office/drawing/2017/decorative" val="1"/>
-                      </a:ext>
-                    </a:extLst>
-                  </p:cNvPr>
-                  <p:cNvSpPr txBox="1">
-                    <a:spLocks noRot="1" noChangeAspect="1" noMove="1" noResize="1" noEditPoints="1" noAdjustHandles="1" noChangeArrowheads="1" noChangeShapeType="1" noTextEdit="1"/>
-                  </p:cNvSpPr>
-                  <p:nvPr/>
-                </p:nvSpPr>
-                <p:spPr>
-                  <a:xfrm>
-                    <a:off x="9564903" y="3086337"/>
-                    <a:ext cx="395810" cy="369332"/>
-                  </a:xfrm>
-                  <a:prstGeom prst="rect">
-                    <a:avLst/>
-                  </a:prstGeom>
-                  <a:blipFill>
-                    <a:blip r:embed="rId6"/>
-                    <a:stretch>
-                      <a:fillRect/>
-                    </a:stretch>
-                  </a:blipFill>
-                </p:spPr>
-                <p:txBody>
-                  <a:bodyPr/>
-                  <a:lstStyle/>
-                  <a:p>
-                    <a:r>
-                      <a:rPr lang="en-US">
-                        <a:noFill/>
-                      </a:rPr>
-                      <a:t> </a:t>
-                    </a:r>
-                  </a:p>
-                </p:txBody>
-              </p:sp>
-            </mc:Fallback>
-          </mc:AlternateContent>
-          <mc:AlternateContent xmlns:mc="http://schemas.openxmlformats.org/markup-compatibility/2006" xmlns:a14="http://schemas.microsoft.com/office/drawing/2010/main">
-            <mc:Choice Requires="a14">
-              <p:sp>
-                <p:nvSpPr>
-                  <p:cNvPr id="18" name="TextBox 30">
-                    <a:extLst>
-                      <a:ext uri="{FF2B5EF4-FFF2-40B4-BE49-F238E27FC236}">
-                        <a16:creationId xmlns:a16="http://schemas.microsoft.com/office/drawing/2014/main" id="{1223FDB0-EDE1-D3F8-B49E-7C42FE2277C4}"/>
-                      </a:ext>
-                      <a:ext uri="{C183D7F6-B498-43B3-948B-1728B52AA6E4}">
-                        <adec:decorative xmlns:adec="http://schemas.microsoft.com/office/drawing/2017/decorative" val="1"/>
-                      </a:ext>
-                    </a:extLst>
-                  </p:cNvPr>
-                  <p:cNvSpPr txBox="1"/>
-                  <p:nvPr/>
-                </p:nvSpPr>
-                <p:spPr>
-                  <a:xfrm>
-                    <a:off x="10066895" y="3115740"/>
-                    <a:ext cx="395810" cy="369332"/>
-                  </a:xfrm>
-                  <a:prstGeom prst="rect">
-                    <a:avLst/>
-                  </a:prstGeom>
-                  <a:noFill/>
-                </p:spPr>
-                <p:txBody>
-                  <a:bodyPr wrap="square">
-                    <a:spAutoFit/>
-                  </a:bodyPr>
-                  <a:lstStyle>
-                    <a:defPPr>
-                      <a:defRPr lang="en-US"/>
-                    </a:defPPr>
-                    <a:lvl1pPr marL="0" algn="l" defTabSz="914400" rtl="0" eaLnBrk="1" latinLnBrk="0" hangingPunct="1">
-                      <a:defRPr sz="1800" kern="1200">
-                        <a:solidFill>
-                          <a:schemeClr val="tx1"/>
-                        </a:solidFill>
-                        <a:latin typeface="+mn-lt"/>
-                        <a:ea typeface="+mn-ea"/>
-                        <a:cs typeface="+mn-cs"/>
-                      </a:defRPr>
-                    </a:lvl1pPr>
-                    <a:lvl2pPr marL="457200" algn="l" defTabSz="914400" rtl="0" eaLnBrk="1" latinLnBrk="0" hangingPunct="1">
-                      <a:defRPr sz="1800" kern="1200">
-                        <a:solidFill>
-                          <a:schemeClr val="tx1"/>
-                        </a:solidFill>
-                        <a:latin typeface="+mn-lt"/>
-                        <a:ea typeface="+mn-ea"/>
-                        <a:cs typeface="+mn-cs"/>
-                      </a:defRPr>
-                    </a:lvl2pPr>
-                    <a:lvl3pPr marL="914400" algn="l" defTabSz="914400" rtl="0" eaLnBrk="1" latinLnBrk="0" hangingPunct="1">
-                      <a:defRPr sz="1800" kern="1200">
-                        <a:solidFill>
-                          <a:schemeClr val="tx1"/>
-                        </a:solidFill>
-                        <a:latin typeface="+mn-lt"/>
-                        <a:ea typeface="+mn-ea"/>
-                        <a:cs typeface="+mn-cs"/>
-                      </a:defRPr>
-                    </a:lvl3pPr>
-                    <a:lvl4pPr marL="1371600" algn="l" defTabSz="914400" rtl="0" eaLnBrk="1" latinLnBrk="0" hangingPunct="1">
-                      <a:defRPr sz="1800" kern="1200">
-                        <a:solidFill>
-                          <a:schemeClr val="tx1"/>
-                        </a:solidFill>
-                        <a:latin typeface="+mn-lt"/>
-                        <a:ea typeface="+mn-ea"/>
-                        <a:cs typeface="+mn-cs"/>
-                      </a:defRPr>
-                    </a:lvl4pPr>
-                    <a:lvl5pPr marL="1828800" algn="l" defTabSz="914400" rtl="0" eaLnBrk="1" latinLnBrk="0" hangingPunct="1">
-                      <a:defRPr sz="1800" kern="1200">
-                        <a:solidFill>
-                          <a:schemeClr val="tx1"/>
-                        </a:solidFill>
-                        <a:latin typeface="+mn-lt"/>
-                        <a:ea typeface="+mn-ea"/>
-                        <a:cs typeface="+mn-cs"/>
-                      </a:defRPr>
-                    </a:lvl5pPr>
-                    <a:lvl6pPr marL="2286000" algn="l" defTabSz="914400" rtl="0" eaLnBrk="1" latinLnBrk="0" hangingPunct="1">
-                      <a:defRPr sz="1800" kern="1200">
-                        <a:solidFill>
-                          <a:schemeClr val="tx1"/>
-                        </a:solidFill>
-                        <a:latin typeface="+mn-lt"/>
-                        <a:ea typeface="+mn-ea"/>
-                        <a:cs typeface="+mn-cs"/>
-                      </a:defRPr>
-                    </a:lvl6pPr>
-                    <a:lvl7pPr marL="2743200" algn="l" defTabSz="914400" rtl="0" eaLnBrk="1" latinLnBrk="0" hangingPunct="1">
-                      <a:defRPr sz="1800" kern="1200">
-                        <a:solidFill>
-                          <a:schemeClr val="tx1"/>
-                        </a:solidFill>
-                        <a:latin typeface="+mn-lt"/>
-                        <a:ea typeface="+mn-ea"/>
-                        <a:cs typeface="+mn-cs"/>
-                      </a:defRPr>
-                    </a:lvl7pPr>
-                    <a:lvl8pPr marL="3200400" algn="l" defTabSz="914400" rtl="0" eaLnBrk="1" latinLnBrk="0" hangingPunct="1">
-                      <a:defRPr sz="1800" kern="1200">
-                        <a:solidFill>
-                          <a:schemeClr val="tx1"/>
-                        </a:solidFill>
-                        <a:latin typeface="+mn-lt"/>
-                        <a:ea typeface="+mn-ea"/>
-                        <a:cs typeface="+mn-cs"/>
-                      </a:defRPr>
-                    </a:lvl8pPr>
-                    <a:lvl9pPr marL="3657600" algn="l" defTabSz="914400" rtl="0" eaLnBrk="1" latinLnBrk="0" hangingPunct="1">
-                      <a:defRPr sz="1800" kern="1200">
-                        <a:solidFill>
-                          <a:schemeClr val="tx1"/>
-                        </a:solidFill>
-                        <a:latin typeface="+mn-lt"/>
-                        <a:ea typeface="+mn-ea"/>
-                        <a:cs typeface="+mn-cs"/>
-                      </a:defRPr>
-                    </a:lvl9pPr>
-                  </a:lstStyle>
-                  <a:p>
-                    <a:pPr/>
-                    <a14:m>
-                      <m:oMathPara xmlns:m="http://schemas.openxmlformats.org/officeDocument/2006/math">
-                        <m:oMath>
-                          <m:sSub>
-                            <m:sSubPr>
-                              <m:ctrlPr>
-                                <a:rPr lang="en-US" sz="1800" b="0" i="1" smtClean="0">
-                                  <a:latin typeface="Cambria Math" panose="02040503050406030204" pitchFamily="18" charset="0"/>
-                                </a:rPr>
-                              </m:ctrlPr>
-                            </m:sSubPr>
-                            <m:e>
-                              <m:r>
-                                <a:rPr lang="en-US" sz="1800" b="0" i="1" smtClean="0">
-                                  <a:latin typeface="Cambria Math" panose="02040503050406030204" pitchFamily="18" charset="0"/>
-                                </a:rPr>
-                                <m:t>𝑣</m:t>
-                              </m:r>
-                            </m:e>
-                            <m:sub>
-                              <m:r>
-                                <a:rPr lang="en-US" sz="1800" b="0" i="1" smtClean="0">
-                                  <a:latin typeface="Cambria Math" panose="02040503050406030204" pitchFamily="18" charset="0"/>
-                                </a:rPr>
-                                <m:t>1</m:t>
-                              </m:r>
-                            </m:sub>
-                          </m:sSub>
-                        </m:oMath>
-                      </m:oMathPara>
-                    </a14:m>
-                    <a:endParaRPr lang="en-US" dirty="0"/>
-                  </a:p>
-                </p:txBody>
-              </p:sp>
-            </mc:Choice>
-            <mc:Fallback xmlns="">
-              <p:sp>
-                <p:nvSpPr>
-                  <p:cNvPr id="18" name="TextBox 30">
-                    <a:extLst>
-                      <a:ext uri="{FF2B5EF4-FFF2-40B4-BE49-F238E27FC236}">
-                        <a16:creationId xmlns:a16="http://schemas.microsoft.com/office/drawing/2014/main" id="{56DA2FE2-AC26-7B66-B5BD-7064ECD50CE7}"/>
-                      </a:ext>
-                      <a:ext uri="{C183D7F6-B498-43B3-948B-1728B52AA6E4}">
-                        <adec:decorative xmlns:adec="http://schemas.microsoft.com/office/drawing/2017/decorative" val="1"/>
-                      </a:ext>
-                    </a:extLst>
-                  </p:cNvPr>
-                  <p:cNvSpPr txBox="1">
-                    <a:spLocks noRot="1" noChangeAspect="1" noMove="1" noResize="1" noEditPoints="1" noAdjustHandles="1" noChangeArrowheads="1" noChangeShapeType="1" noTextEdit="1"/>
-                  </p:cNvSpPr>
-                  <p:nvPr/>
-                </p:nvSpPr>
-                <p:spPr>
-                  <a:xfrm>
-                    <a:off x="10066895" y="3115740"/>
-                    <a:ext cx="395810" cy="369332"/>
-                  </a:xfrm>
-                  <a:prstGeom prst="rect">
-                    <a:avLst/>
-                  </a:prstGeom>
-                  <a:blipFill>
-                    <a:blip r:embed="rId7"/>
-                    <a:stretch>
-                      <a:fillRect/>
-                    </a:stretch>
-                  </a:blipFill>
-                </p:spPr>
-                <p:txBody>
-                  <a:bodyPr/>
-                  <a:lstStyle/>
-                  <a:p>
-                    <a:r>
-                      <a:rPr lang="en-US">
-                        <a:noFill/>
-                      </a:rPr>
-                      <a:t> </a:t>
-                    </a:r>
-                  </a:p>
-                </p:txBody>
-              </p:sp>
-            </mc:Fallback>
-          </mc:AlternateContent>
-          <p:sp>
-            <p:nvSpPr>
-              <p:cNvPr id="19" name="Oval 18">
-                <a:extLst>
-                  <a:ext uri="{FF2B5EF4-FFF2-40B4-BE49-F238E27FC236}">
-                    <a16:creationId xmlns:a16="http://schemas.microsoft.com/office/drawing/2014/main" id="{4FB5ACCD-0701-2FB2-F78E-42498C38670D}"/>
-                  </a:ext>
-                  <a:ext uri="{C183D7F6-B498-43B3-948B-1728B52AA6E4}">
-                    <adec:decorative xmlns:adec="http://schemas.microsoft.com/office/drawing/2017/decorative" val="1"/>
-                  </a:ext>
-                </a:extLst>
-              </p:cNvPr>
-              <p:cNvSpPr/>
-              <p:nvPr/>
-            </p:nvSpPr>
-            <p:spPr>
-              <a:xfrm>
-                <a:off x="11680507" y="3066584"/>
-                <a:ext cx="127995" cy="117892"/>
-              </a:xfrm>
-              <a:prstGeom prst="ellipse">
-                <a:avLst/>
-              </a:prstGeom>
-            </p:spPr>
-            <p:style>
-              <a:lnRef idx="2">
-                <a:schemeClr val="accent6">
-                  <a:shade val="15000"/>
-                </a:schemeClr>
-              </a:lnRef>
-              <a:fillRef idx="1">
-                <a:schemeClr val="accent6"/>
-              </a:fillRef>
-              <a:effectRef idx="0">
-                <a:schemeClr val="accent6"/>
-              </a:effectRef>
-              <a:fontRef idx="minor">
-                <a:schemeClr val="lt1"/>
-              </a:fontRef>
-            </p:style>
-            <p:txBody>
-              <a:bodyPr rtlCol="0" anchor="ctr"/>
-              <a:lstStyle>
-                <a:defPPr>
-                  <a:defRPr lang="en-US"/>
-                </a:defPPr>
-                <a:lvl1pPr marL="0" algn="l" defTabSz="914400" rtl="0" eaLnBrk="1" latinLnBrk="0" hangingPunct="1">
-                  <a:defRPr sz="1800" kern="1200">
-                    <a:solidFill>
-                      <a:schemeClr val="lt1"/>
-                    </a:solidFill>
-                    <a:latin typeface="+mn-lt"/>
-                    <a:ea typeface="+mn-ea"/>
-                    <a:cs typeface="+mn-cs"/>
-                  </a:defRPr>
-                </a:lvl1pPr>
-                <a:lvl2pPr marL="457200" algn="l" defTabSz="914400" rtl="0" eaLnBrk="1" latinLnBrk="0" hangingPunct="1">
-                  <a:defRPr sz="1800" kern="1200">
-                    <a:solidFill>
-                      <a:schemeClr val="lt1"/>
-                    </a:solidFill>
-                    <a:latin typeface="+mn-lt"/>
-                    <a:ea typeface="+mn-ea"/>
-                    <a:cs typeface="+mn-cs"/>
-                  </a:defRPr>
-                </a:lvl2pPr>
-                <a:lvl3pPr marL="914400" algn="l" defTabSz="914400" rtl="0" eaLnBrk="1" latinLnBrk="0" hangingPunct="1">
-                  <a:defRPr sz="1800" kern="1200">
-                    <a:solidFill>
-                      <a:schemeClr val="lt1"/>
-                    </a:solidFill>
-                    <a:latin typeface="+mn-lt"/>
-                    <a:ea typeface="+mn-ea"/>
-                    <a:cs typeface="+mn-cs"/>
-                  </a:defRPr>
-                </a:lvl3pPr>
-                <a:lvl4pPr marL="1371600" algn="l" defTabSz="914400" rtl="0" eaLnBrk="1" latinLnBrk="0" hangingPunct="1">
-                  <a:defRPr sz="1800" kern="1200">
-                    <a:solidFill>
-                      <a:schemeClr val="lt1"/>
-                    </a:solidFill>
-                    <a:latin typeface="+mn-lt"/>
-                    <a:ea typeface="+mn-ea"/>
-                    <a:cs typeface="+mn-cs"/>
-                  </a:defRPr>
-                </a:lvl4pPr>
-                <a:lvl5pPr marL="1828800" algn="l" defTabSz="914400" rtl="0" eaLnBrk="1" latinLnBrk="0" hangingPunct="1">
-                  <a:defRPr sz="1800" kern="1200">
-                    <a:solidFill>
-                      <a:schemeClr val="lt1"/>
-                    </a:solidFill>
-                    <a:latin typeface="+mn-lt"/>
-                    <a:ea typeface="+mn-ea"/>
-                    <a:cs typeface="+mn-cs"/>
-                  </a:defRPr>
-                </a:lvl5pPr>
-                <a:lvl6pPr marL="2286000" algn="l" defTabSz="914400" rtl="0" eaLnBrk="1" latinLnBrk="0" hangingPunct="1">
-                  <a:defRPr sz="1800" kern="1200">
-                    <a:solidFill>
-                      <a:schemeClr val="lt1"/>
-                    </a:solidFill>
-                    <a:latin typeface="+mn-lt"/>
-                    <a:ea typeface="+mn-ea"/>
-                    <a:cs typeface="+mn-cs"/>
-                  </a:defRPr>
-                </a:lvl6pPr>
-                <a:lvl7pPr marL="2743200" algn="l" defTabSz="914400" rtl="0" eaLnBrk="1" latinLnBrk="0" hangingPunct="1">
-                  <a:defRPr sz="1800" kern="1200">
-                    <a:solidFill>
-                      <a:schemeClr val="lt1"/>
-                    </a:solidFill>
-                    <a:latin typeface="+mn-lt"/>
-                    <a:ea typeface="+mn-ea"/>
-                    <a:cs typeface="+mn-cs"/>
-                  </a:defRPr>
-                </a:lvl7pPr>
-                <a:lvl8pPr marL="3200400" algn="l" defTabSz="914400" rtl="0" eaLnBrk="1" latinLnBrk="0" hangingPunct="1">
-                  <a:defRPr sz="1800" kern="1200">
-                    <a:solidFill>
-                      <a:schemeClr val="lt1"/>
-                    </a:solidFill>
-                    <a:latin typeface="+mn-lt"/>
-                    <a:ea typeface="+mn-ea"/>
-                    <a:cs typeface="+mn-cs"/>
-                  </a:defRPr>
-                </a:lvl8pPr>
-                <a:lvl9pPr marL="3657600" algn="l" defTabSz="914400" rtl="0" eaLnBrk="1" latinLnBrk="0" hangingPunct="1">
-                  <a:defRPr sz="1800" kern="1200">
-                    <a:solidFill>
-                      <a:schemeClr val="lt1"/>
-                    </a:solidFill>
-                    <a:latin typeface="+mn-lt"/>
-                    <a:ea typeface="+mn-ea"/>
-                    <a:cs typeface="+mn-cs"/>
-                  </a:defRPr>
-                </a:lvl9pPr>
-              </a:lstStyle>
-              <a:p>
-                <a:pPr algn="ctr"/>
-                <a:endParaRPr lang="en-US"/>
-              </a:p>
-            </p:txBody>
-          </p:sp>
-          <p:sp>
-            <p:nvSpPr>
-              <p:cNvPr id="20" name="TextBox 35">
-                <a:extLst>
-                  <a:ext uri="{FF2B5EF4-FFF2-40B4-BE49-F238E27FC236}">
-                    <a16:creationId xmlns:a16="http://schemas.microsoft.com/office/drawing/2014/main" id="{0BA13DE3-9692-0A72-42C2-2997B4BD90D3}"/>
-                  </a:ext>
-                  <a:ext uri="{C183D7F6-B498-43B3-948B-1728B52AA6E4}">
-                    <adec:decorative xmlns:adec="http://schemas.microsoft.com/office/drawing/2017/decorative" val="1"/>
+                    <a16:creationId xmlns:a16="http://schemas.microsoft.com/office/drawing/2014/main" id="{6EDF9F97-99C7-C914-8056-5CB2B24BFC7D}"/>
                   </a:ext>
                 </a:extLst>
               </p:cNvPr>
@@ -9957,8 +11663,8 @@
             </p:nvSpPr>
             <p:spPr>
               <a:xfrm>
-                <a:off x="9337182" y="2229868"/>
-                <a:ext cx="1796338" cy="338554"/>
+                <a:off x="9189345" y="5967616"/>
+                <a:ext cx="1978780" cy="276999"/>
               </a:xfrm>
               <a:prstGeom prst="rect">
                 <a:avLst/>
@@ -9966,149 +11672,468 @@
               <a:noFill/>
             </p:spPr>
             <p:txBody>
-              <a:bodyPr wrap="square">
+              <a:bodyPr wrap="square" rtlCol="0">
                 <a:spAutoFit/>
               </a:bodyPr>
-              <a:lstStyle>
-                <a:defPPr>
-                  <a:defRPr lang="en-US"/>
-                </a:defPPr>
-                <a:lvl1pPr marL="0" algn="l" defTabSz="914400" rtl="0" eaLnBrk="1" latinLnBrk="0" hangingPunct="1">
-                  <a:defRPr sz="1800" kern="1200">
-                    <a:solidFill>
-                      <a:schemeClr val="tx1"/>
-                    </a:solidFill>
-                    <a:latin typeface="+mn-lt"/>
-                    <a:ea typeface="+mn-ea"/>
-                    <a:cs typeface="+mn-cs"/>
-                  </a:defRPr>
-                </a:lvl1pPr>
-                <a:lvl2pPr marL="457200" algn="l" defTabSz="914400" rtl="0" eaLnBrk="1" latinLnBrk="0" hangingPunct="1">
-                  <a:defRPr sz="1800" kern="1200">
-                    <a:solidFill>
-                      <a:schemeClr val="tx1"/>
-                    </a:solidFill>
-                    <a:latin typeface="+mn-lt"/>
-                    <a:ea typeface="+mn-ea"/>
-                    <a:cs typeface="+mn-cs"/>
-                  </a:defRPr>
-                </a:lvl2pPr>
-                <a:lvl3pPr marL="914400" algn="l" defTabSz="914400" rtl="0" eaLnBrk="1" latinLnBrk="0" hangingPunct="1">
-                  <a:defRPr sz="1800" kern="1200">
-                    <a:solidFill>
-                      <a:schemeClr val="tx1"/>
-                    </a:solidFill>
-                    <a:latin typeface="+mn-lt"/>
-                    <a:ea typeface="+mn-ea"/>
-                    <a:cs typeface="+mn-cs"/>
-                  </a:defRPr>
-                </a:lvl3pPr>
-                <a:lvl4pPr marL="1371600" algn="l" defTabSz="914400" rtl="0" eaLnBrk="1" latinLnBrk="0" hangingPunct="1">
-                  <a:defRPr sz="1800" kern="1200">
-                    <a:solidFill>
-                      <a:schemeClr val="tx1"/>
-                    </a:solidFill>
-                    <a:latin typeface="+mn-lt"/>
-                    <a:ea typeface="+mn-ea"/>
-                    <a:cs typeface="+mn-cs"/>
-                  </a:defRPr>
-                </a:lvl4pPr>
-                <a:lvl5pPr marL="1828800" algn="l" defTabSz="914400" rtl="0" eaLnBrk="1" latinLnBrk="0" hangingPunct="1">
-                  <a:defRPr sz="1800" kern="1200">
-                    <a:solidFill>
-                      <a:schemeClr val="tx1"/>
-                    </a:solidFill>
-                    <a:latin typeface="+mn-lt"/>
-                    <a:ea typeface="+mn-ea"/>
-                    <a:cs typeface="+mn-cs"/>
-                  </a:defRPr>
-                </a:lvl5pPr>
-                <a:lvl6pPr marL="2286000" algn="l" defTabSz="914400" rtl="0" eaLnBrk="1" latinLnBrk="0" hangingPunct="1">
-                  <a:defRPr sz="1800" kern="1200">
-                    <a:solidFill>
-                      <a:schemeClr val="tx1"/>
-                    </a:solidFill>
-                    <a:latin typeface="+mn-lt"/>
-                    <a:ea typeface="+mn-ea"/>
-                    <a:cs typeface="+mn-cs"/>
-                  </a:defRPr>
-                </a:lvl6pPr>
-                <a:lvl7pPr marL="2743200" algn="l" defTabSz="914400" rtl="0" eaLnBrk="1" latinLnBrk="0" hangingPunct="1">
-                  <a:defRPr sz="1800" kern="1200">
-                    <a:solidFill>
-                      <a:schemeClr val="tx1"/>
-                    </a:solidFill>
-                    <a:latin typeface="+mn-lt"/>
-                    <a:ea typeface="+mn-ea"/>
-                    <a:cs typeface="+mn-cs"/>
-                  </a:defRPr>
-                </a:lvl7pPr>
-                <a:lvl8pPr marL="3200400" algn="l" defTabSz="914400" rtl="0" eaLnBrk="1" latinLnBrk="0" hangingPunct="1">
-                  <a:defRPr sz="1800" kern="1200">
-                    <a:solidFill>
-                      <a:schemeClr val="tx1"/>
-                    </a:solidFill>
-                    <a:latin typeface="+mn-lt"/>
-                    <a:ea typeface="+mn-ea"/>
-                    <a:cs typeface="+mn-cs"/>
-                  </a:defRPr>
-                </a:lvl8pPr>
-                <a:lvl9pPr marL="3657600" algn="l" defTabSz="914400" rtl="0" eaLnBrk="1" latinLnBrk="0" hangingPunct="1">
-                  <a:defRPr sz="1800" kern="1200">
-                    <a:solidFill>
-                      <a:schemeClr val="tx1"/>
-                    </a:solidFill>
-                    <a:latin typeface="+mn-lt"/>
-                    <a:ea typeface="+mn-ea"/>
-                    <a:cs typeface="+mn-cs"/>
-                  </a:defRPr>
-                </a:lvl9pPr>
-              </a:lstStyle>
+              <a:lstStyle/>
               <a:p>
+                <a:pPr algn="ctr"/>
                 <a:r>
-                  <a:rPr lang="en-US" sz="1600" dirty="0"/>
-                  <a:t>Bellman updates</a:t>
+                  <a:rPr lang="en-US" sz="1200" dirty="0"/>
+                  <a:t>Distance means difference</a:t>
                 </a:r>
               </a:p>
             </p:txBody>
           </p:sp>
         </p:grpSp>
-        <p:sp>
-          <p:nvSpPr>
-            <p:cNvPr id="10" name="TextBox 9">
-              <a:extLst>
-                <a:ext uri="{FF2B5EF4-FFF2-40B4-BE49-F238E27FC236}">
-                  <a16:creationId xmlns:a16="http://schemas.microsoft.com/office/drawing/2014/main" id="{6EDF9F97-99C7-C914-8056-5CB2B24BFC7D}"/>
-                </a:ext>
-              </a:extLst>
-            </p:cNvPr>
-            <p:cNvSpPr txBox="1"/>
-            <p:nvPr/>
-          </p:nvSpPr>
-          <p:spPr>
-            <a:xfrm>
-              <a:off x="9189345" y="5967616"/>
-              <a:ext cx="1978780" cy="276999"/>
-            </a:xfrm>
-            <a:prstGeom prst="rect">
-              <a:avLst/>
-            </a:prstGeom>
-            <a:noFill/>
-          </p:spPr>
-          <p:txBody>
-            <a:bodyPr wrap="square" rtlCol="0">
-              <a:spAutoFit/>
-            </a:bodyPr>
-            <a:lstStyle/>
-            <a:p>
-              <a:pPr algn="ctr"/>
-              <a:r>
-                <a:rPr lang="en-US" sz="1200" dirty="0"/>
-                <a:t>Distance means difference</a:t>
-              </a:r>
-            </a:p>
-          </p:txBody>
-        </p:sp>
+        <mc:AlternateContent xmlns:mc="http://schemas.openxmlformats.org/markup-compatibility/2006" xmlns:a14="http://schemas.microsoft.com/office/drawing/2010/main">
+          <mc:Choice Requires="a14">
+            <p:sp>
+              <p:nvSpPr>
+                <p:cNvPr id="21" name="TextBox 20">
+                  <a:extLst>
+                    <a:ext uri="{FF2B5EF4-FFF2-40B4-BE49-F238E27FC236}">
+                      <a16:creationId xmlns:a16="http://schemas.microsoft.com/office/drawing/2014/main" id="{3FD4057F-5032-BC1B-A63D-1B8B48716C06}"/>
+                    </a:ext>
+                  </a:extLst>
+                </p:cNvPr>
+                <p:cNvSpPr txBox="1"/>
+                <p:nvPr/>
+              </p:nvSpPr>
+              <p:spPr>
+                <a:xfrm>
+                  <a:off x="9501294" y="5233425"/>
+                  <a:ext cx="501748" cy="338554"/>
+                </a:xfrm>
+                <a:prstGeom prst="rect">
+                  <a:avLst/>
+                </a:prstGeom>
+                <a:noFill/>
+              </p:spPr>
+              <p:txBody>
+                <a:bodyPr wrap="square">
+                  <a:spAutoFit/>
+                </a:bodyPr>
+                <a:lstStyle/>
+                <a:p>
+                  <a:pPr/>
+                  <a14:m>
+                    <m:oMathPara xmlns:m="http://schemas.openxmlformats.org/officeDocument/2006/math">
+                      <m:oMath>
+                        <m:sSup>
+                          <m:sSupPr>
+                            <m:ctrlPr>
+                              <a:rPr lang="en-US" sz="1600" b="0" i="1" smtClean="0">
+                                <a:latin typeface="Cambria Math" panose="02040503050406030204" pitchFamily="18" charset="0"/>
+                              </a:rPr>
+                            </m:ctrlPr>
+                          </m:sSupPr>
+                          <m:e>
+                            <m:r>
+                              <a:rPr lang="en-US" sz="1600" b="0" i="1" smtClean="0">
+                                <a:latin typeface="Cambria Math" panose="02040503050406030204" pitchFamily="18" charset="0"/>
+                              </a:rPr>
+                              <m:t>𝑇</m:t>
+                            </m:r>
+                          </m:e>
+                          <m:sup>
+                            <m:r>
+                              <a:rPr lang="en-US" sz="1600" b="0" i="1" smtClean="0">
+                                <a:latin typeface="Cambria Math" panose="02040503050406030204" pitchFamily="18" charset="0"/>
+                              </a:rPr>
+                              <m:t>𝜋</m:t>
+                            </m:r>
+                          </m:sup>
+                        </m:sSup>
+                      </m:oMath>
+                    </m:oMathPara>
+                  </a14:m>
+                  <a:endParaRPr lang="en-US" sz="1600" dirty="0"/>
+                </a:p>
+              </p:txBody>
+            </p:sp>
+          </mc:Choice>
+          <mc:Fallback xmlns="">
+            <p:sp>
+              <p:nvSpPr>
+                <p:cNvPr id="21" name="TextBox 20">
+                  <a:extLst>
+                    <a:ext uri="{FF2B5EF4-FFF2-40B4-BE49-F238E27FC236}">
+                      <a16:creationId xmlns:a16="http://schemas.microsoft.com/office/drawing/2014/main" id="{3FD4057F-5032-BC1B-A63D-1B8B48716C06}"/>
+                    </a:ext>
+                  </a:extLst>
+                </p:cNvPr>
+                <p:cNvSpPr txBox="1">
+                  <a:spLocks noRot="1" noChangeAspect="1" noMove="1" noResize="1" noEditPoints="1" noAdjustHandles="1" noChangeArrowheads="1" noChangeShapeType="1" noTextEdit="1"/>
+                </p:cNvSpPr>
+                <p:nvPr/>
+              </p:nvSpPr>
+              <p:spPr>
+                <a:xfrm>
+                  <a:off x="9501294" y="5233425"/>
+                  <a:ext cx="501748" cy="338554"/>
+                </a:xfrm>
+                <a:prstGeom prst="rect">
+                  <a:avLst/>
+                </a:prstGeom>
+                <a:blipFill>
+                  <a:blip r:embed="rId9"/>
+                  <a:stretch>
+                    <a:fillRect/>
+                  </a:stretch>
+                </a:blipFill>
+              </p:spPr>
+              <p:txBody>
+                <a:bodyPr/>
+                <a:lstStyle/>
+                <a:p>
+                  <a:r>
+                    <a:rPr lang="en-US">
+                      <a:noFill/>
+                    </a:rPr>
+                    <a:t> </a:t>
+                  </a:r>
+                </a:p>
+              </p:txBody>
+            </p:sp>
+          </mc:Fallback>
+        </mc:AlternateContent>
+        <mc:AlternateContent xmlns:mc="http://schemas.openxmlformats.org/markup-compatibility/2006" xmlns:a14="http://schemas.microsoft.com/office/drawing/2010/main">
+          <mc:Choice Requires="a14">
+            <p:sp>
+              <p:nvSpPr>
+                <p:cNvPr id="23" name="TextBox 22">
+                  <a:extLst>
+                    <a:ext uri="{FF2B5EF4-FFF2-40B4-BE49-F238E27FC236}">
+                      <a16:creationId xmlns:a16="http://schemas.microsoft.com/office/drawing/2014/main" id="{E99B973D-2558-A2C6-4BF8-EFA820911BD3}"/>
+                    </a:ext>
+                  </a:extLst>
+                </p:cNvPr>
+                <p:cNvSpPr txBox="1"/>
+                <p:nvPr/>
+              </p:nvSpPr>
+              <p:spPr>
+                <a:xfrm>
+                  <a:off x="10190449" y="5233425"/>
+                  <a:ext cx="501748" cy="338554"/>
+                </a:xfrm>
+                <a:prstGeom prst="rect">
+                  <a:avLst/>
+                </a:prstGeom>
+                <a:noFill/>
+              </p:spPr>
+              <p:txBody>
+                <a:bodyPr wrap="square">
+                  <a:spAutoFit/>
+                </a:bodyPr>
+                <a:lstStyle/>
+                <a:p>
+                  <a:pPr/>
+                  <a14:m>
+                    <m:oMathPara xmlns:m="http://schemas.openxmlformats.org/officeDocument/2006/math">
+                      <m:oMath>
+                        <m:sSup>
+                          <m:sSupPr>
+                            <m:ctrlPr>
+                              <a:rPr lang="en-US" sz="1600" b="0" i="1" smtClean="0">
+                                <a:latin typeface="Cambria Math" panose="02040503050406030204" pitchFamily="18" charset="0"/>
+                              </a:rPr>
+                            </m:ctrlPr>
+                          </m:sSupPr>
+                          <m:e>
+                            <m:r>
+                              <a:rPr lang="en-US" sz="1600" b="0" i="1" smtClean="0">
+                                <a:latin typeface="Cambria Math" panose="02040503050406030204" pitchFamily="18" charset="0"/>
+                              </a:rPr>
+                              <m:t>𝑇</m:t>
+                            </m:r>
+                          </m:e>
+                          <m:sup>
+                            <m:r>
+                              <a:rPr lang="en-US" sz="1600" b="0" i="1" smtClean="0">
+                                <a:latin typeface="Cambria Math" panose="02040503050406030204" pitchFamily="18" charset="0"/>
+                              </a:rPr>
+                              <m:t>𝜋</m:t>
+                            </m:r>
+                          </m:sup>
+                        </m:sSup>
+                      </m:oMath>
+                    </m:oMathPara>
+                  </a14:m>
+                  <a:endParaRPr lang="en-US" sz="1600" dirty="0"/>
+                </a:p>
+              </p:txBody>
+            </p:sp>
+          </mc:Choice>
+          <mc:Fallback xmlns="">
+            <p:sp>
+              <p:nvSpPr>
+                <p:cNvPr id="23" name="TextBox 22">
+                  <a:extLst>
+                    <a:ext uri="{FF2B5EF4-FFF2-40B4-BE49-F238E27FC236}">
+                      <a16:creationId xmlns:a16="http://schemas.microsoft.com/office/drawing/2014/main" id="{E99B973D-2558-A2C6-4BF8-EFA820911BD3}"/>
+                    </a:ext>
+                  </a:extLst>
+                </p:cNvPr>
+                <p:cNvSpPr txBox="1">
+                  <a:spLocks noRot="1" noChangeAspect="1" noMove="1" noResize="1" noEditPoints="1" noAdjustHandles="1" noChangeArrowheads="1" noChangeShapeType="1" noTextEdit="1"/>
+                </p:cNvSpPr>
+                <p:nvPr/>
+              </p:nvSpPr>
+              <p:spPr>
+                <a:xfrm>
+                  <a:off x="10190449" y="5233425"/>
+                  <a:ext cx="501748" cy="338554"/>
+                </a:xfrm>
+                <a:prstGeom prst="rect">
+                  <a:avLst/>
+                </a:prstGeom>
+                <a:blipFill>
+                  <a:blip r:embed="rId10"/>
+                  <a:stretch>
+                    <a:fillRect/>
+                  </a:stretch>
+                </a:blipFill>
+              </p:spPr>
+              <p:txBody>
+                <a:bodyPr/>
+                <a:lstStyle/>
+                <a:p>
+                  <a:r>
+                    <a:rPr lang="en-US">
+                      <a:noFill/>
+                    </a:rPr>
+                    <a:t> </a:t>
+                  </a:r>
+                </a:p>
+              </p:txBody>
+            </p:sp>
+          </mc:Fallback>
+        </mc:AlternateContent>
+        <mc:AlternateContent xmlns:mc="http://schemas.openxmlformats.org/markup-compatibility/2006" xmlns:a14="http://schemas.microsoft.com/office/drawing/2010/main">
+          <mc:Choice Requires="a14">
+            <p:sp>
+              <p:nvSpPr>
+                <p:cNvPr id="25" name="TextBox 24">
+                  <a:extLst>
+                    <a:ext uri="{FF2B5EF4-FFF2-40B4-BE49-F238E27FC236}">
+                      <a16:creationId xmlns:a16="http://schemas.microsoft.com/office/drawing/2014/main" id="{9A128481-FC48-A100-EFEE-53B99DA80707}"/>
+                    </a:ext>
+                  </a:extLst>
+                </p:cNvPr>
+                <p:cNvSpPr txBox="1"/>
+                <p:nvPr/>
+              </p:nvSpPr>
+              <p:spPr>
+                <a:xfrm>
+                  <a:off x="11038934" y="5233425"/>
+                  <a:ext cx="501748" cy="338554"/>
+                </a:xfrm>
+                <a:prstGeom prst="rect">
+                  <a:avLst/>
+                </a:prstGeom>
+                <a:noFill/>
+              </p:spPr>
+              <p:txBody>
+                <a:bodyPr wrap="square">
+                  <a:spAutoFit/>
+                </a:bodyPr>
+                <a:lstStyle/>
+                <a:p>
+                  <a:pPr/>
+                  <a14:m>
+                    <m:oMathPara xmlns:m="http://schemas.openxmlformats.org/officeDocument/2006/math">
+                      <m:oMath>
+                        <m:sSup>
+                          <m:sSupPr>
+                            <m:ctrlPr>
+                              <a:rPr lang="en-US" sz="1600" b="0" i="1" smtClean="0">
+                                <a:latin typeface="Cambria Math" panose="02040503050406030204" pitchFamily="18" charset="0"/>
+                              </a:rPr>
+                            </m:ctrlPr>
+                          </m:sSupPr>
+                          <m:e>
+                            <m:r>
+                              <a:rPr lang="en-US" sz="1600" b="0" i="1" smtClean="0">
+                                <a:latin typeface="Cambria Math" panose="02040503050406030204" pitchFamily="18" charset="0"/>
+                              </a:rPr>
+                              <m:t>𝑇</m:t>
+                            </m:r>
+                          </m:e>
+                          <m:sup>
+                            <m:r>
+                              <a:rPr lang="en-US" sz="1600" b="0" i="1" smtClean="0">
+                                <a:latin typeface="Cambria Math" panose="02040503050406030204" pitchFamily="18" charset="0"/>
+                              </a:rPr>
+                              <m:t>𝜋</m:t>
+                            </m:r>
+                          </m:sup>
+                        </m:sSup>
+                      </m:oMath>
+                    </m:oMathPara>
+                  </a14:m>
+                  <a:endParaRPr lang="en-US" sz="1600" dirty="0"/>
+                </a:p>
+              </p:txBody>
+            </p:sp>
+          </mc:Choice>
+          <mc:Fallback xmlns="">
+            <p:sp>
+              <p:nvSpPr>
+                <p:cNvPr id="25" name="TextBox 24">
+                  <a:extLst>
+                    <a:ext uri="{FF2B5EF4-FFF2-40B4-BE49-F238E27FC236}">
+                      <a16:creationId xmlns:a16="http://schemas.microsoft.com/office/drawing/2014/main" id="{9A128481-FC48-A100-EFEE-53B99DA80707}"/>
+                    </a:ext>
+                  </a:extLst>
+                </p:cNvPr>
+                <p:cNvSpPr txBox="1">
+                  <a:spLocks noRot="1" noChangeAspect="1" noMove="1" noResize="1" noEditPoints="1" noAdjustHandles="1" noChangeArrowheads="1" noChangeShapeType="1" noTextEdit="1"/>
+                </p:cNvSpPr>
+                <p:nvPr/>
+              </p:nvSpPr>
+              <p:spPr>
+                <a:xfrm>
+                  <a:off x="11038934" y="5233425"/>
+                  <a:ext cx="501748" cy="338554"/>
+                </a:xfrm>
+                <a:prstGeom prst="rect">
+                  <a:avLst/>
+                </a:prstGeom>
+                <a:blipFill>
+                  <a:blip r:embed="rId11"/>
+                  <a:stretch>
+                    <a:fillRect/>
+                  </a:stretch>
+                </a:blipFill>
+              </p:spPr>
+              <p:txBody>
+                <a:bodyPr/>
+                <a:lstStyle/>
+                <a:p>
+                  <a:r>
+                    <a:rPr lang="en-US">
+                      <a:noFill/>
+                    </a:rPr>
+                    <a:t> </a:t>
+                  </a:r>
+                </a:p>
+              </p:txBody>
+            </p:sp>
+          </mc:Fallback>
+        </mc:AlternateContent>
+        <mc:AlternateContent xmlns:mc="http://schemas.openxmlformats.org/markup-compatibility/2006" xmlns:a14="http://schemas.microsoft.com/office/drawing/2010/main">
+          <mc:Choice Requires="a14">
+            <p:sp>
+              <p:nvSpPr>
+                <p:cNvPr id="27" name="TextBox 26">
+                  <a:extLst>
+                    <a:ext uri="{FF2B5EF4-FFF2-40B4-BE49-F238E27FC236}">
+                      <a16:creationId xmlns:a16="http://schemas.microsoft.com/office/drawing/2014/main" id="{FA372508-99EC-EFF8-6F86-5D6D9B152179}"/>
+                    </a:ext>
+                  </a:extLst>
+                </p:cNvPr>
+                <p:cNvSpPr txBox="1"/>
+                <p:nvPr/>
+              </p:nvSpPr>
+              <p:spPr>
+                <a:xfrm>
+                  <a:off x="10682975" y="5233425"/>
+                  <a:ext cx="501748" cy="338554"/>
+                </a:xfrm>
+                <a:prstGeom prst="rect">
+                  <a:avLst/>
+                </a:prstGeom>
+                <a:noFill/>
+              </p:spPr>
+              <p:txBody>
+                <a:bodyPr wrap="square">
+                  <a:spAutoFit/>
+                </a:bodyPr>
+                <a:lstStyle/>
+                <a:p>
+                  <a:pPr/>
+                  <a14:m>
+                    <m:oMathPara xmlns:m="http://schemas.openxmlformats.org/officeDocument/2006/math">
+                      <m:oMath>
+                        <m:sSup>
+                          <m:sSupPr>
+                            <m:ctrlPr>
+                              <a:rPr lang="en-US" sz="1600" b="0" i="1" smtClean="0">
+                                <a:latin typeface="Cambria Math" panose="02040503050406030204" pitchFamily="18" charset="0"/>
+                              </a:rPr>
+                            </m:ctrlPr>
+                          </m:sSupPr>
+                          <m:e>
+                            <m:r>
+                              <a:rPr lang="en-US" sz="1600" b="0" i="1" smtClean="0">
+                                <a:latin typeface="Cambria Math" panose="02040503050406030204" pitchFamily="18" charset="0"/>
+                              </a:rPr>
+                              <m:t>𝑇</m:t>
+                            </m:r>
+                          </m:e>
+                          <m:sup>
+                            <m:r>
+                              <a:rPr lang="en-US" sz="1600" b="0" i="1" smtClean="0">
+                                <a:latin typeface="Cambria Math" panose="02040503050406030204" pitchFamily="18" charset="0"/>
+                              </a:rPr>
+                              <m:t>𝜋</m:t>
+                            </m:r>
+                          </m:sup>
+                        </m:sSup>
+                      </m:oMath>
+                    </m:oMathPara>
+                  </a14:m>
+                  <a:endParaRPr lang="en-US" sz="1600" dirty="0"/>
+                </a:p>
+              </p:txBody>
+            </p:sp>
+          </mc:Choice>
+          <mc:Fallback xmlns="">
+            <p:sp>
+              <p:nvSpPr>
+                <p:cNvPr id="27" name="TextBox 26">
+                  <a:extLst>
+                    <a:ext uri="{FF2B5EF4-FFF2-40B4-BE49-F238E27FC236}">
+                      <a16:creationId xmlns:a16="http://schemas.microsoft.com/office/drawing/2014/main" id="{FA372508-99EC-EFF8-6F86-5D6D9B152179}"/>
+                    </a:ext>
+                  </a:extLst>
+                </p:cNvPr>
+                <p:cNvSpPr txBox="1">
+                  <a:spLocks noRot="1" noChangeAspect="1" noMove="1" noResize="1" noEditPoints="1" noAdjustHandles="1" noChangeArrowheads="1" noChangeShapeType="1" noTextEdit="1"/>
+                </p:cNvSpPr>
+                <p:nvPr/>
+              </p:nvSpPr>
+              <p:spPr>
+                <a:xfrm>
+                  <a:off x="10682975" y="5233425"/>
+                  <a:ext cx="501748" cy="338554"/>
+                </a:xfrm>
+                <a:prstGeom prst="rect">
+                  <a:avLst/>
+                </a:prstGeom>
+                <a:blipFill>
+                  <a:blip r:embed="rId12"/>
+                  <a:stretch>
+                    <a:fillRect/>
+                  </a:stretch>
+                </a:blipFill>
+              </p:spPr>
+              <p:txBody>
+                <a:bodyPr/>
+                <a:lstStyle/>
+                <a:p>
+                  <a:r>
+                    <a:rPr lang="en-US">
+                      <a:noFill/>
+                    </a:rPr>
+                    <a:t> </a:t>
+                  </a:r>
+                </a:p>
+              </p:txBody>
+            </p:sp>
+          </mc:Fallback>
+        </mc:AlternateContent>
       </p:grpSp>
     </p:spTree>
     <p:extLst>
@@ -10187,36 +12212,9 @@
                                         <p:tgtEl>
                                           <p:spTgt spid="3">
                                             <p:txEl>
-                                              <p:pRg st="6" end="6"/>
+                                              <p:pRg st="5" end="5"/>
                                             </p:txEl>
                                           </p:spTgt>
-                                        </p:tgtEl>
-                                        <p:attrNameLst>
-                                          <p:attrName>style.visibility</p:attrName>
-                                        </p:attrNameLst>
-                                      </p:cBhvr>
-                                      <p:to>
-                                        <p:strVal val="visible"/>
-                                      </p:to>
-                                    </p:set>
-                                  </p:childTnLst>
-                                </p:cTn>
-                              </p:par>
-                              <p:par>
-                                <p:cTn id="9" presetID="1" presetClass="entr" presetSubtype="0" fill="hold" nodeType="withEffect">
-                                  <p:stCondLst>
-                                    <p:cond delay="0"/>
-                                  </p:stCondLst>
-                                  <p:childTnLst>
-                                    <p:set>
-                                      <p:cBhvr>
-                                        <p:cTn id="10" dur="1" fill="hold">
-                                          <p:stCondLst>
-                                            <p:cond delay="0"/>
-                                          </p:stCondLst>
-                                        </p:cTn>
-                                        <p:tgtEl>
-                                          <p:spTgt spid="8"/>
                                         </p:tgtEl>
                                         <p:attrNameLst>
                                           <p:attrName>style.visibility</p:attrName>
@@ -10236,32 +12234,36 @@
                     </p:cTn>
                   </p:par>
                   <p:par>
-                    <p:cTn id="11" fill="hold">
+                    <p:cTn id="9" fill="hold">
                       <p:stCondLst>
                         <p:cond delay="indefinite"/>
                       </p:stCondLst>
                       <p:childTnLst>
                         <p:par>
-                          <p:cTn id="12" fill="hold">
+                          <p:cTn id="10" fill="hold">
                             <p:stCondLst>
                               <p:cond delay="0"/>
                             </p:stCondLst>
                             <p:childTnLst>
                               <p:par>
-                                <p:cTn id="13" presetID="1" presetClass="entr" presetSubtype="0" fill="hold" grpId="0" nodeType="clickEffect">
+                                <p:cTn id="11" presetID="1" presetClass="entr" presetSubtype="0" fill="hold" nodeType="clickEffect">
                                   <p:stCondLst>
                                     <p:cond delay="0"/>
                                   </p:stCondLst>
                                   <p:childTnLst>
                                     <p:set>
                                       <p:cBhvr>
-                                        <p:cTn id="14" dur="1" fill="hold">
+                                        <p:cTn id="12" dur="1" fill="hold">
                                           <p:stCondLst>
                                             <p:cond delay="0"/>
                                           </p:stCondLst>
                                         </p:cTn>
                                         <p:tgtEl>
-                                          <p:spTgt spid="4"/>
+                                          <p:spTgt spid="3">
+                                            <p:txEl>
+                                              <p:pRg st="7" end="7"/>
+                                            </p:txEl>
+                                          </p:spTgt>
                                         </p:tgtEl>
                                         <p:attrNameLst>
                                           <p:attrName>style.visibility</p:attrName>
@@ -10281,26 +12283,75 @@
                     </p:cTn>
                   </p:par>
                   <p:par>
-                    <p:cTn id="15" fill="hold">
+                    <p:cTn id="13" fill="hold">
                       <p:stCondLst>
                         <p:cond delay="indefinite"/>
                       </p:stCondLst>
                       <p:childTnLst>
                         <p:par>
-                          <p:cTn id="16" fill="hold">
+                          <p:cTn id="14" fill="hold">
                             <p:stCondLst>
                               <p:cond delay="0"/>
                             </p:stCondLst>
                             <p:childTnLst>
                               <p:par>
-                                <p:cTn id="17" presetID="1" presetClass="entr" presetSubtype="0" fill="hold" grpId="0" nodeType="clickEffect">
+                                <p:cTn id="15" presetID="1" presetClass="entr" presetSubtype="0" fill="hold" nodeType="clickEffect">
                                   <p:stCondLst>
                                     <p:cond delay="0"/>
                                   </p:stCondLst>
                                   <p:childTnLst>
                                     <p:set>
                                       <p:cBhvr>
-                                        <p:cTn id="18" dur="1" fill="hold">
+                                        <p:cTn id="16" dur="1" fill="hold">
+                                          <p:stCondLst>
+                                            <p:cond delay="0"/>
+                                          </p:stCondLst>
+                                        </p:cTn>
+                                        <p:tgtEl>
+                                          <p:spTgt spid="3">
+                                            <p:txEl>
+                                              <p:pRg st="8" end="8"/>
+                                            </p:txEl>
+                                          </p:spTgt>
+                                        </p:tgtEl>
+                                        <p:attrNameLst>
+                                          <p:attrName>style.visibility</p:attrName>
+                                        </p:attrNameLst>
+                                      </p:cBhvr>
+                                      <p:to>
+                                        <p:strVal val="visible"/>
+                                      </p:to>
+                                    </p:set>
+                                  </p:childTnLst>
+                                </p:cTn>
+                              </p:par>
+                            </p:childTnLst>
+                          </p:cTn>
+                        </p:par>
+                      </p:childTnLst>
+                    </p:cTn>
+                  </p:par>
+                  <p:par>
+                    <p:cTn id="17" fill="hold">
+                      <p:stCondLst>
+                        <p:cond delay="indefinite"/>
+                      </p:stCondLst>
+                      <p:childTnLst>
+                        <p:par>
+                          <p:cTn id="18" fill="hold">
+                            <p:stCondLst>
+                              <p:cond delay="0"/>
+                            </p:stCondLst>
+                            <p:childTnLst>
+                              <p:par>
+                                <p:cTn id="19" presetID="1" presetClass="entr" presetSubtype="0" fill="hold" grpId="0" nodeType="clickEffect">
+                                  <p:stCondLst>
+                                    <p:cond delay="0"/>
+                                  </p:stCondLst>
+                                  <p:childTnLst>
+                                    <p:set>
+                                      <p:cBhvr>
+                                        <p:cTn id="20" dur="1" fill="hold">
                                           <p:stCondLst>
                                             <p:cond delay="0"/>
                                           </p:stCondLst>
@@ -10347,7 +12398,6 @@
       </p:par>
     </p:tnLst>
     <p:bldLst>
-      <p:bldP spid="4" grpId="0" animBg="1"/>
       <p:bldP spid="5" grpId="0" animBg="1"/>
     </p:bldLst>
   </p:timing>
@@ -10733,7 +12783,7 @@
                       <m:sSub>
                         <m:sSubPr>
                           <m:ctrlPr>
-                            <a:rPr lang="en-US" sz="1400" i="1" smtClean="0">
+                            <a:rPr lang="en-US" sz="1400" b="0" i="1" smtClean="0">
                               <a:latin typeface="Cambria Math" panose="02040503050406030204" pitchFamily="18" charset="0"/>
                             </a:rPr>
                           </m:ctrlPr>
@@ -10875,7 +12925,7 @@
                       <m:sSub>
                         <m:sSubPr>
                           <m:ctrlPr>
-                            <a:rPr lang="en-US" sz="1400" i="1" smtClean="0">
+                            <a:rPr lang="en-US" sz="1400" b="0" i="1" smtClean="0">
                               <a:latin typeface="Cambria Math" panose="02040503050406030204" pitchFamily="18" charset="0"/>
                             </a:rPr>
                           </m:ctrlPr>
@@ -27749,8 +29799,8 @@
           </a:p>
         </p:txBody>
       </p:sp>
-      <mc:AlternateContent xmlns:mc="http://schemas.openxmlformats.org/markup-compatibility/2006">
-        <mc:Choice xmlns:a14="http://schemas.microsoft.com/office/drawing/2010/main" Requires="a14">
+      <mc:AlternateContent xmlns:mc="http://schemas.openxmlformats.org/markup-compatibility/2006" xmlns:a14="http://schemas.microsoft.com/office/drawing/2010/main">
+        <mc:Choice Requires="a14">
           <p:sp>
             <p:nvSpPr>
               <p:cNvPr id="3" name="Content Placeholder 2">
@@ -28027,7 +30077,7 @@
             </p:txBody>
           </p:sp>
         </mc:Choice>
-        <mc:Fallback>
+        <mc:Fallback xmlns="">
           <p:sp>
             <p:nvSpPr>
               <p:cNvPr id="3" name="Content Placeholder 2">
@@ -28331,8 +30381,8 @@
           </a:p>
         </p:txBody>
       </p:sp>
-      <mc:AlternateContent xmlns:mc="http://schemas.openxmlformats.org/markup-compatibility/2006">
-        <mc:Choice xmlns:a14="http://schemas.microsoft.com/office/drawing/2010/main" Requires="a14">
+      <mc:AlternateContent xmlns:mc="http://schemas.openxmlformats.org/markup-compatibility/2006" xmlns:a14="http://schemas.microsoft.com/office/drawing/2010/main">
+        <mc:Choice Requires="a14">
           <p:graphicFrame>
             <p:nvGraphicFramePr>
               <p:cNvPr id="9" name="Table 8">
@@ -28727,7 +30777,7 @@
             </a:graphic>
           </p:graphicFrame>
         </mc:Choice>
-        <mc:Fallback>
+        <mc:Fallback xmlns="">
           <p:graphicFrame>
             <p:nvGraphicFramePr>
               <p:cNvPr id="9" name="Table 8">
@@ -29075,8 +31125,8 @@
           </p:graphicFrame>
         </mc:Fallback>
       </mc:AlternateContent>
-      <mc:AlternateContent xmlns:mc="http://schemas.openxmlformats.org/markup-compatibility/2006">
-        <mc:Choice xmlns:a14="http://schemas.microsoft.com/office/drawing/2010/main" Requires="a14">
+      <mc:AlternateContent xmlns:mc="http://schemas.openxmlformats.org/markup-compatibility/2006" xmlns:a14="http://schemas.microsoft.com/office/drawing/2010/main">
+        <mc:Choice Requires="a14">
           <p:graphicFrame>
             <p:nvGraphicFramePr>
               <p:cNvPr id="10" name="Table 9">
@@ -29299,7 +31349,7 @@
             </a:graphic>
           </p:graphicFrame>
         </mc:Choice>
-        <mc:Fallback>
+        <mc:Fallback xmlns="">
           <p:graphicFrame>
             <p:nvGraphicFramePr>
               <p:cNvPr id="10" name="Table 9">
@@ -29528,8 +31578,8 @@
           </a:p>
         </p:txBody>
       </p:sp>
-      <mc:AlternateContent xmlns:mc="http://schemas.openxmlformats.org/markup-compatibility/2006">
-        <mc:Choice xmlns:a14="http://schemas.microsoft.com/office/drawing/2010/main" Requires="a14">
+      <mc:AlternateContent xmlns:mc="http://schemas.openxmlformats.org/markup-compatibility/2006" xmlns:a14="http://schemas.microsoft.com/office/drawing/2010/main">
+        <mc:Choice Requires="a14">
           <p:graphicFrame>
             <p:nvGraphicFramePr>
               <p:cNvPr id="17" name="Table 16">
@@ -29754,7 +31804,7 @@
             </a:graphic>
           </p:graphicFrame>
         </mc:Choice>
-        <mc:Fallback>
+        <mc:Fallback xmlns="">
           <p:graphicFrame>
             <p:nvGraphicFramePr>
               <p:cNvPr id="17" name="Table 16">
@@ -30293,8 +32343,8 @@
           </p:sp>
         </mc:Fallback>
       </mc:AlternateContent>
-      <mc:AlternateContent xmlns:mc="http://schemas.openxmlformats.org/markup-compatibility/2006">
-        <mc:Choice xmlns:a14="http://schemas.microsoft.com/office/drawing/2010/main" Requires="a14">
+      <mc:AlternateContent xmlns:mc="http://schemas.openxmlformats.org/markup-compatibility/2006" xmlns:a14="http://schemas.microsoft.com/office/drawing/2010/main">
+        <mc:Choice Requires="a14">
           <p:sp>
             <p:nvSpPr>
               <p:cNvPr id="3" name="Content Placeholder 2">
@@ -31699,7 +33749,7 @@
             </p:txBody>
           </p:sp>
         </mc:Choice>
-        <mc:Fallback>
+        <mc:Fallback xmlns="">
           <p:sp>
             <p:nvSpPr>
               <p:cNvPr id="3" name="Content Placeholder 2">
@@ -31822,12 +33872,12 @@
             <p:spPr>
               <a:xfrm>
                 <a:off x="838199" y="1397329"/>
-                <a:ext cx="10350985" cy="5170993"/>
+                <a:ext cx="7579865" cy="5170993"/>
               </a:xfrm>
             </p:spPr>
             <p:txBody>
               <a:bodyPr>
-                <a:normAutofit fontScale="85000" lnSpcReduction="10000"/>
+                <a:normAutofit fontScale="77500" lnSpcReduction="20000"/>
               </a:bodyPr>
               <a:lstStyle/>
               <a:p>
@@ -31907,7 +33957,7 @@
                       <m:d>
                         <m:dPr>
                           <m:ctrlPr>
-                            <a:rPr lang="en-US" sz="2400" b="0" i="1" smtClean="0">
+                            <a:rPr lang="en-US" sz="2400" i="1">
                               <a:latin typeface="Cambria Math" panose="02040503050406030204" pitchFamily="18" charset="0"/>
                             </a:rPr>
                           </m:ctrlPr>
@@ -32739,7 +34789,7 @@
                 <a:pPr lvl="1"/>
                 <a:r>
                   <a:rPr lang="en-US" sz="2300" dirty="0"/>
-                  <a:t>Objective function:       </a:t>
+                  <a:t>Objective function:  </a:t>
                 </a:r>
                 <a14:m>
                   <m:oMath xmlns:m="http://schemas.openxmlformats.org/officeDocument/2006/math">
@@ -32854,7 +34904,7 @@
                 <a:pPr lvl="1"/>
                 <a:r>
                   <a:rPr lang="en-US" sz="2300" dirty="0"/>
-                  <a:t>Constraints:                     </a:t>
+                  <a:t>Constraints:                </a:t>
                 </a:r>
                 <a14:m>
                   <m:oMath xmlns:m="http://schemas.openxmlformats.org/officeDocument/2006/math">
@@ -32883,6 +34933,9 @@
                     </m:d>
                     <m:r>
                       <a:rPr lang="en-US" sz="2300" b="0" i="1" smtClean="0">
+                        <a:solidFill>
+                          <a:srgbClr val="FF0000"/>
+                        </a:solidFill>
                         <a:latin typeface="Cambria Math" panose="02040503050406030204" pitchFamily="18" charset="0"/>
                       </a:rPr>
                       <m:t>≥</m:t>
@@ -33097,7 +35150,7 @@
                           <a:rPr lang="en-US" sz="2300" b="0" i="1" smtClean="0">
                             <a:latin typeface="Cambria Math" panose="02040503050406030204" pitchFamily="18" charset="0"/>
                           </a:rPr>
-                          <m:t>          ∀</m:t>
+                          <m:t>   ∀</m:t>
                         </m:r>
                         <m:r>
                           <a:rPr lang="en-US" sz="2300" b="0" i="1" smtClean="0">
@@ -33388,7 +35441,7 @@
                             <a:rPr lang="en-US" sz="2400" b="0" i="1" smtClean="0">
                               <a:latin typeface="Cambria Math" panose="02040503050406030204" pitchFamily="18" charset="0"/>
                             </a:rPr>
-                            <m:t>       </m:t>
+                            <m:t>     </m:t>
                           </m:r>
                           <m:r>
                             <a:rPr lang="en-US" sz="2400" i="1">
@@ -33454,12 +35507,12 @@
             <p:spPr>
               <a:xfrm>
                 <a:off x="838199" y="1397329"/>
-                <a:ext cx="10350985" cy="5170993"/>
+                <a:ext cx="7579865" cy="5170993"/>
               </a:xfrm>
               <a:blipFill>
                 <a:blip r:embed="rId2"/>
                 <a:stretch>
-                  <a:fillRect l="-589" t="-1533"/>
+                  <a:fillRect l="-723" t="-2005"/>
                 </a:stretch>
               </a:blipFill>
             </p:spPr>
@@ -33478,6 +35531,1586 @@
           </p:sp>
         </mc:Fallback>
       </mc:AlternateContent>
+      <p:grpSp>
+        <p:nvGrpSpPr>
+          <p:cNvPr id="39" name="Group 38">
+            <a:extLst>
+              <a:ext uri="{FF2B5EF4-FFF2-40B4-BE49-F238E27FC236}">
+                <a16:creationId xmlns:a16="http://schemas.microsoft.com/office/drawing/2014/main" id="{063F7E0A-EB54-5CD3-4BA4-B413E4A3ABA8}"/>
+              </a:ext>
+            </a:extLst>
+          </p:cNvPr>
+          <p:cNvGrpSpPr/>
+          <p:nvPr/>
+        </p:nvGrpSpPr>
+        <p:grpSpPr>
+          <a:xfrm>
+            <a:off x="8418064" y="1033063"/>
+            <a:ext cx="3616325" cy="5577287"/>
+            <a:chOff x="8418064" y="1033063"/>
+            <a:chExt cx="3616325" cy="5577287"/>
+          </a:xfrm>
+        </p:grpSpPr>
+        <p:grpSp>
+          <p:nvGrpSpPr>
+            <p:cNvPr id="10" name="Group 9">
+              <a:extLst>
+                <a:ext uri="{FF2B5EF4-FFF2-40B4-BE49-F238E27FC236}">
+                  <a16:creationId xmlns:a16="http://schemas.microsoft.com/office/drawing/2014/main" id="{F9BC0917-F24E-73E3-0ED1-DF374DF98E97}"/>
+                </a:ext>
+              </a:extLst>
+            </p:cNvPr>
+            <p:cNvGrpSpPr/>
+            <p:nvPr/>
+          </p:nvGrpSpPr>
+          <p:grpSpPr>
+            <a:xfrm>
+              <a:off x="8432631" y="1033063"/>
+              <a:ext cx="3601758" cy="5577287"/>
+              <a:chOff x="8306382" y="1228507"/>
+              <a:chExt cx="3601758" cy="5339815"/>
+            </a:xfrm>
+          </p:grpSpPr>
+          <p:sp>
+            <p:nvSpPr>
+              <p:cNvPr id="5" name="Rectangle 4">
+                <a:extLst>
+                  <a:ext uri="{FF2B5EF4-FFF2-40B4-BE49-F238E27FC236}">
+                    <a16:creationId xmlns:a16="http://schemas.microsoft.com/office/drawing/2014/main" id="{94A67163-ACB2-FA39-36EB-A99E9C883C84}"/>
+                  </a:ext>
+                </a:extLst>
+              </p:cNvPr>
+              <p:cNvSpPr/>
+              <p:nvPr/>
+            </p:nvSpPr>
+            <p:spPr>
+              <a:xfrm>
+                <a:off x="8306382" y="1228507"/>
+                <a:ext cx="3601758" cy="5339815"/>
+              </a:xfrm>
+              <a:prstGeom prst="rect">
+                <a:avLst/>
+              </a:prstGeom>
+              <a:noFill/>
+              <a:ln w="9525" cap="flat" cmpd="sng" algn="ctr">
+                <a:solidFill>
+                  <a:schemeClr val="accent1"/>
+                </a:solidFill>
+                <a:prstDash val="solid"/>
+                <a:round/>
+                <a:headEnd type="none" w="med" len="med"/>
+                <a:tailEnd type="none" w="med" len="med"/>
+              </a:ln>
+            </p:spPr>
+            <p:style>
+              <a:lnRef idx="0">
+                <a:scrgbClr r="0" g="0" b="0"/>
+              </a:lnRef>
+              <a:fillRef idx="0">
+                <a:scrgbClr r="0" g="0" b="0"/>
+              </a:fillRef>
+              <a:effectRef idx="0">
+                <a:scrgbClr r="0" g="0" b="0"/>
+              </a:effectRef>
+              <a:fontRef idx="minor">
+                <a:schemeClr val="accent1"/>
+              </a:fontRef>
+            </p:style>
+            <p:txBody>
+              <a:bodyPr rtlCol="0" anchor="ctr"/>
+              <a:lstStyle/>
+              <a:p>
+                <a:pPr algn="ctr"/>
+                <a:endParaRPr lang="en-US"/>
+              </a:p>
+            </p:txBody>
+          </p:sp>
+          <mc:AlternateContent xmlns:mc="http://schemas.openxmlformats.org/markup-compatibility/2006" xmlns:a14="http://schemas.microsoft.com/office/drawing/2010/main">
+            <mc:Choice Requires="a14">
+              <p:sp>
+                <p:nvSpPr>
+                  <p:cNvPr id="4" name="TextBox 3">
+                    <a:extLst>
+                      <a:ext uri="{FF2B5EF4-FFF2-40B4-BE49-F238E27FC236}">
+                        <a16:creationId xmlns:a16="http://schemas.microsoft.com/office/drawing/2014/main" id="{63B2C840-7C72-C056-FD2A-B1FAC79C9C9D}"/>
+                      </a:ext>
+                    </a:extLst>
+                  </p:cNvPr>
+                  <p:cNvSpPr txBox="1"/>
+                  <p:nvPr/>
+                </p:nvSpPr>
+                <p:spPr>
+                  <a:xfrm>
+                    <a:off x="8397124" y="1293020"/>
+                    <a:ext cx="3420274" cy="2503827"/>
+                  </a:xfrm>
+                  <a:prstGeom prst="rect">
+                    <a:avLst/>
+                  </a:prstGeom>
+                  <a:noFill/>
+                </p:spPr>
+                <p:txBody>
+                  <a:bodyPr wrap="square" rtlCol="0">
+                    <a:spAutoFit/>
+                  </a:bodyPr>
+                  <a:lstStyle/>
+                  <a:p>
+                    <a:r>
+                      <a:rPr lang="en-US" b="1" dirty="0"/>
+                      <a:t>Example: 2-State MDP</a:t>
+                    </a:r>
+                  </a:p>
+                  <a:p>
+                    <a:endParaRPr lang="en-US" dirty="0"/>
+                  </a:p>
+                  <a:p>
+                    <a:r>
+                      <a:rPr lang="en-US" sz="1400" dirty="0"/>
+                      <a:t>Min: </a:t>
+                    </a:r>
+                    <a14:m>
+                      <m:oMath xmlns:m="http://schemas.openxmlformats.org/officeDocument/2006/math">
+                        <m:r>
+                          <a:rPr lang="en-US" sz="1400" b="0" i="1" smtClean="0">
+                            <a:latin typeface="Cambria Math" panose="02040503050406030204" pitchFamily="18" charset="0"/>
+                          </a:rPr>
+                          <m:t>𝑉</m:t>
+                        </m:r>
+                        <m:d>
+                          <m:dPr>
+                            <m:ctrlPr>
+                              <a:rPr lang="en-US" sz="1400" b="0" i="1" smtClean="0">
+                                <a:latin typeface="Cambria Math" panose="02040503050406030204" pitchFamily="18" charset="0"/>
+                              </a:rPr>
+                            </m:ctrlPr>
+                          </m:dPr>
+                          <m:e>
+                            <m:sSub>
+                              <m:sSubPr>
+                                <m:ctrlPr>
+                                  <a:rPr lang="en-US" sz="1400" b="0" i="1" smtClean="0">
+                                    <a:latin typeface="Cambria Math" panose="02040503050406030204" pitchFamily="18" charset="0"/>
+                                  </a:rPr>
+                                </m:ctrlPr>
+                              </m:sSubPr>
+                              <m:e>
+                                <m:r>
+                                  <a:rPr lang="en-US" sz="1400" b="0" i="1" smtClean="0">
+                                    <a:latin typeface="Cambria Math" panose="02040503050406030204" pitchFamily="18" charset="0"/>
+                                  </a:rPr>
+                                  <m:t>𝑠</m:t>
+                                </m:r>
+                              </m:e>
+                              <m:sub>
+                                <m:r>
+                                  <a:rPr lang="en-US" sz="1400" b="0" i="1" smtClean="0">
+                                    <a:latin typeface="Cambria Math" panose="02040503050406030204" pitchFamily="18" charset="0"/>
+                                  </a:rPr>
+                                  <m:t>1</m:t>
+                                </m:r>
+                              </m:sub>
+                            </m:sSub>
+                          </m:e>
+                        </m:d>
+                        <m:r>
+                          <a:rPr lang="en-US" sz="1400" b="0" i="1" smtClean="0">
+                            <a:latin typeface="Cambria Math" panose="02040503050406030204" pitchFamily="18" charset="0"/>
+                          </a:rPr>
+                          <m:t>+</m:t>
+                        </m:r>
+                        <m:r>
+                          <a:rPr lang="en-US" sz="1400" b="0" i="1" smtClean="0">
+                            <a:latin typeface="Cambria Math" panose="02040503050406030204" pitchFamily="18" charset="0"/>
+                          </a:rPr>
+                          <m:t>𝑉</m:t>
+                        </m:r>
+                        <m:r>
+                          <a:rPr lang="en-US" sz="1400" b="0" i="1" smtClean="0">
+                            <a:latin typeface="Cambria Math" panose="02040503050406030204" pitchFamily="18" charset="0"/>
+                          </a:rPr>
+                          <m:t>(</m:t>
+                        </m:r>
+                        <m:sSub>
+                          <m:sSubPr>
+                            <m:ctrlPr>
+                              <a:rPr lang="en-US" sz="1400" b="0" i="1" smtClean="0">
+                                <a:latin typeface="Cambria Math" panose="02040503050406030204" pitchFamily="18" charset="0"/>
+                              </a:rPr>
+                            </m:ctrlPr>
+                          </m:sSubPr>
+                          <m:e>
+                            <m:r>
+                              <a:rPr lang="en-US" sz="1400" b="0" i="1" smtClean="0">
+                                <a:latin typeface="Cambria Math" panose="02040503050406030204" pitchFamily="18" charset="0"/>
+                              </a:rPr>
+                              <m:t>𝑠</m:t>
+                            </m:r>
+                          </m:e>
+                          <m:sub>
+                            <m:r>
+                              <a:rPr lang="en-US" sz="1400" b="0" i="1" smtClean="0">
+                                <a:latin typeface="Cambria Math" panose="02040503050406030204" pitchFamily="18" charset="0"/>
+                              </a:rPr>
+                              <m:t>2</m:t>
+                            </m:r>
+                          </m:sub>
+                        </m:sSub>
+                        <m:r>
+                          <a:rPr lang="en-US" sz="1400" b="0" i="1" smtClean="0">
+                            <a:latin typeface="Cambria Math" panose="02040503050406030204" pitchFamily="18" charset="0"/>
+                          </a:rPr>
+                          <m:t>)</m:t>
+                        </m:r>
+                      </m:oMath>
+                    </a14:m>
+                    <a:endParaRPr lang="en-US" sz="1400" dirty="0"/>
+                  </a:p>
+                  <a:p>
+                    <a:r>
+                      <a:rPr lang="en-US" sz="1400" dirty="0" err="1"/>
+                      <a:t>S.t.</a:t>
+                    </a:r>
+                    <a:r>
+                      <a:rPr lang="en-US" sz="1400" dirty="0"/>
+                      <a:t>:  </a:t>
+                    </a:r>
+                    <a14:m>
+                      <m:oMath xmlns:m="http://schemas.openxmlformats.org/officeDocument/2006/math">
+                        <m:r>
+                          <a:rPr lang="en-US" sz="1400" b="0" i="1" smtClean="0">
+                            <a:latin typeface="Cambria Math" panose="02040503050406030204" pitchFamily="18" charset="0"/>
+                          </a:rPr>
+                          <m:t>𝑉</m:t>
+                        </m:r>
+                        <m:d>
+                          <m:dPr>
+                            <m:ctrlPr>
+                              <a:rPr lang="en-US" sz="1400" b="0" i="1" smtClean="0">
+                                <a:latin typeface="Cambria Math" panose="02040503050406030204" pitchFamily="18" charset="0"/>
+                              </a:rPr>
+                            </m:ctrlPr>
+                          </m:dPr>
+                          <m:e>
+                            <m:sSub>
+                              <m:sSubPr>
+                                <m:ctrlPr>
+                                  <a:rPr lang="en-US" sz="1400" b="0" i="1" smtClean="0">
+                                    <a:latin typeface="Cambria Math" panose="02040503050406030204" pitchFamily="18" charset="0"/>
+                                  </a:rPr>
+                                </m:ctrlPr>
+                              </m:sSubPr>
+                              <m:e>
+                                <m:r>
+                                  <a:rPr lang="en-US" sz="1400" b="0" i="1" smtClean="0">
+                                    <a:latin typeface="Cambria Math" panose="02040503050406030204" pitchFamily="18" charset="0"/>
+                                  </a:rPr>
+                                  <m:t>𝑠</m:t>
+                                </m:r>
+                              </m:e>
+                              <m:sub>
+                                <m:r>
+                                  <a:rPr lang="en-US" sz="1400" b="0" i="1" smtClean="0">
+                                    <a:latin typeface="Cambria Math" panose="02040503050406030204" pitchFamily="18" charset="0"/>
+                                  </a:rPr>
+                                  <m:t>1</m:t>
+                                </m:r>
+                              </m:sub>
+                            </m:sSub>
+                          </m:e>
+                        </m:d>
+                        <m:r>
+                          <a:rPr lang="en-US" sz="1400" b="0" i="1" smtClean="0">
+                            <a:latin typeface="Cambria Math" panose="02040503050406030204" pitchFamily="18" charset="0"/>
+                          </a:rPr>
+                          <m:t>≥</m:t>
+                        </m:r>
+                        <m:sSub>
+                          <m:sSubPr>
+                            <m:ctrlPr>
+                              <a:rPr lang="en-US" sz="1400" b="0" i="1" smtClean="0">
+                                <a:latin typeface="Cambria Math" panose="02040503050406030204" pitchFamily="18" charset="0"/>
+                              </a:rPr>
+                            </m:ctrlPr>
+                          </m:sSubPr>
+                          <m:e>
+                            <m:r>
+                              <a:rPr lang="en-US" sz="1400" b="0" i="1" smtClean="0">
+                                <a:latin typeface="Cambria Math" panose="02040503050406030204" pitchFamily="18" charset="0"/>
+                              </a:rPr>
+                              <m:t>𝑅</m:t>
+                            </m:r>
+                          </m:e>
+                          <m:sub>
+                            <m:r>
+                              <a:rPr lang="en-US" sz="1400" b="0" i="1" smtClean="0">
+                                <a:latin typeface="Cambria Math" panose="02040503050406030204" pitchFamily="18" charset="0"/>
+                              </a:rPr>
+                              <m:t>1</m:t>
+                            </m:r>
+                          </m:sub>
+                        </m:sSub>
+                        <m:r>
+                          <a:rPr lang="en-US" sz="1400" b="0" i="1" smtClean="0">
+                            <a:latin typeface="Cambria Math" panose="02040503050406030204" pitchFamily="18" charset="0"/>
+                          </a:rPr>
+                          <m:t>+</m:t>
+                        </m:r>
+                        <m:r>
+                          <a:rPr lang="en-US" sz="1400" b="0" i="1" smtClean="0">
+                            <a:latin typeface="Cambria Math" panose="02040503050406030204" pitchFamily="18" charset="0"/>
+                          </a:rPr>
+                          <m:t>𝛾</m:t>
+                        </m:r>
+                        <m:d>
+                          <m:dPr>
+                            <m:ctrlPr>
+                              <a:rPr lang="en-US" sz="1400" b="0" i="1" smtClean="0">
+                                <a:latin typeface="Cambria Math" panose="02040503050406030204" pitchFamily="18" charset="0"/>
+                              </a:rPr>
+                            </m:ctrlPr>
+                          </m:dPr>
+                          <m:e>
+                            <m:sSub>
+                              <m:sSubPr>
+                                <m:ctrlPr>
+                                  <a:rPr lang="en-US" sz="1400" b="0" i="1" smtClean="0">
+                                    <a:latin typeface="Cambria Math" panose="02040503050406030204" pitchFamily="18" charset="0"/>
+                                  </a:rPr>
+                                </m:ctrlPr>
+                              </m:sSubPr>
+                              <m:e>
+                                <m:r>
+                                  <a:rPr lang="en-US" sz="1400" b="0" i="1" smtClean="0">
+                                    <a:latin typeface="Cambria Math" panose="02040503050406030204" pitchFamily="18" charset="0"/>
+                                  </a:rPr>
+                                  <m:t>𝑃</m:t>
+                                </m:r>
+                              </m:e>
+                              <m:sub>
+                                <m:r>
+                                  <a:rPr lang="en-US" sz="1400" b="0" i="1" smtClean="0">
+                                    <a:latin typeface="Cambria Math" panose="02040503050406030204" pitchFamily="18" charset="0"/>
+                                  </a:rPr>
+                                  <m:t>11</m:t>
+                                </m:r>
+                              </m:sub>
+                            </m:sSub>
+                            <m:r>
+                              <a:rPr lang="en-US" sz="1400" b="0" i="1" smtClean="0">
+                                <a:latin typeface="Cambria Math" panose="02040503050406030204" pitchFamily="18" charset="0"/>
+                              </a:rPr>
+                              <m:t>𝑉</m:t>
+                            </m:r>
+                            <m:d>
+                              <m:dPr>
+                                <m:ctrlPr>
+                                  <a:rPr lang="en-US" sz="1400" b="0" i="1" smtClean="0">
+                                    <a:latin typeface="Cambria Math" panose="02040503050406030204" pitchFamily="18" charset="0"/>
+                                  </a:rPr>
+                                </m:ctrlPr>
+                              </m:dPr>
+                              <m:e>
+                                <m:sSub>
+                                  <m:sSubPr>
+                                    <m:ctrlPr>
+                                      <a:rPr lang="en-US" sz="1400" b="0" i="1" smtClean="0">
+                                        <a:latin typeface="Cambria Math" panose="02040503050406030204" pitchFamily="18" charset="0"/>
+                                      </a:rPr>
+                                    </m:ctrlPr>
+                                  </m:sSubPr>
+                                  <m:e>
+                                    <m:r>
+                                      <a:rPr lang="en-US" sz="1400" b="0" i="1" smtClean="0">
+                                        <a:latin typeface="Cambria Math" panose="02040503050406030204" pitchFamily="18" charset="0"/>
+                                      </a:rPr>
+                                      <m:t>𝑠</m:t>
+                                    </m:r>
+                                  </m:e>
+                                  <m:sub>
+                                    <m:r>
+                                      <a:rPr lang="en-US" sz="1400" b="0" i="1" smtClean="0">
+                                        <a:latin typeface="Cambria Math" panose="02040503050406030204" pitchFamily="18" charset="0"/>
+                                      </a:rPr>
+                                      <m:t>1</m:t>
+                                    </m:r>
+                                  </m:sub>
+                                </m:sSub>
+                              </m:e>
+                            </m:d>
+                            <m:r>
+                              <a:rPr lang="en-US" sz="1400" b="0" i="1" smtClean="0">
+                                <a:latin typeface="Cambria Math" panose="02040503050406030204" pitchFamily="18" charset="0"/>
+                              </a:rPr>
+                              <m:t>+</m:t>
+                            </m:r>
+                            <m:sSub>
+                              <m:sSubPr>
+                                <m:ctrlPr>
+                                  <a:rPr lang="en-US" sz="1400" b="0" i="1" smtClean="0">
+                                    <a:latin typeface="Cambria Math" panose="02040503050406030204" pitchFamily="18" charset="0"/>
+                                  </a:rPr>
+                                </m:ctrlPr>
+                              </m:sSubPr>
+                              <m:e>
+                                <m:r>
+                                  <a:rPr lang="en-US" sz="1400" b="0" i="1" smtClean="0">
+                                    <a:latin typeface="Cambria Math" panose="02040503050406030204" pitchFamily="18" charset="0"/>
+                                  </a:rPr>
+                                  <m:t>𝑃</m:t>
+                                </m:r>
+                              </m:e>
+                              <m:sub>
+                                <m:r>
+                                  <a:rPr lang="en-US" sz="1400" b="0" i="1" smtClean="0">
+                                    <a:latin typeface="Cambria Math" panose="02040503050406030204" pitchFamily="18" charset="0"/>
+                                  </a:rPr>
+                                  <m:t>12</m:t>
+                                </m:r>
+                              </m:sub>
+                            </m:sSub>
+                            <m:r>
+                              <a:rPr lang="en-US" sz="1400" b="0" i="1" smtClean="0">
+                                <a:latin typeface="Cambria Math" panose="02040503050406030204" pitchFamily="18" charset="0"/>
+                              </a:rPr>
+                              <m:t>𝑉</m:t>
+                            </m:r>
+                            <m:d>
+                              <m:dPr>
+                                <m:ctrlPr>
+                                  <a:rPr lang="en-US" sz="1400" b="0" i="1" smtClean="0">
+                                    <a:latin typeface="Cambria Math" panose="02040503050406030204" pitchFamily="18" charset="0"/>
+                                  </a:rPr>
+                                </m:ctrlPr>
+                              </m:dPr>
+                              <m:e>
+                                <m:sSub>
+                                  <m:sSubPr>
+                                    <m:ctrlPr>
+                                      <a:rPr lang="en-US" sz="1400" b="0" i="1" smtClean="0">
+                                        <a:latin typeface="Cambria Math" panose="02040503050406030204" pitchFamily="18" charset="0"/>
+                                      </a:rPr>
+                                    </m:ctrlPr>
+                                  </m:sSubPr>
+                                  <m:e>
+                                    <m:r>
+                                      <a:rPr lang="en-US" sz="1400" b="0" i="1" smtClean="0">
+                                        <a:latin typeface="Cambria Math" panose="02040503050406030204" pitchFamily="18" charset="0"/>
+                                      </a:rPr>
+                                      <m:t>𝑠</m:t>
+                                    </m:r>
+                                  </m:e>
+                                  <m:sub>
+                                    <m:r>
+                                      <a:rPr lang="en-US" sz="1400" b="0" i="1" smtClean="0">
+                                        <a:latin typeface="Cambria Math" panose="02040503050406030204" pitchFamily="18" charset="0"/>
+                                      </a:rPr>
+                                      <m:t>2</m:t>
+                                    </m:r>
+                                  </m:sub>
+                                </m:sSub>
+                              </m:e>
+                            </m:d>
+                          </m:e>
+                        </m:d>
+                      </m:oMath>
+                    </a14:m>
+                    <a:endParaRPr lang="en-US" sz="1400" b="0" dirty="0"/>
+                  </a:p>
+                  <a:p>
+                    <a:pPr/>
+                    <a14:m>
+                      <m:oMathPara xmlns:m="http://schemas.openxmlformats.org/officeDocument/2006/math">
+                        <m:oMath>
+                          <m:r>
+                            <a:rPr lang="en-US" sz="1400" b="0" i="1" smtClean="0">
+                              <a:latin typeface="Cambria Math" panose="02040503050406030204" pitchFamily="18" charset="0"/>
+                            </a:rPr>
+                            <m:t>         </m:t>
+                          </m:r>
+                          <m:r>
+                            <a:rPr lang="en-US" sz="1400" i="1">
+                              <a:latin typeface="Cambria Math" panose="02040503050406030204" pitchFamily="18" charset="0"/>
+                            </a:rPr>
+                            <m:t>𝑉</m:t>
+                          </m:r>
+                          <m:d>
+                            <m:dPr>
+                              <m:ctrlPr>
+                                <a:rPr lang="en-US" sz="1400" i="1">
+                                  <a:latin typeface="Cambria Math" panose="02040503050406030204" pitchFamily="18" charset="0"/>
+                                </a:rPr>
+                              </m:ctrlPr>
+                            </m:dPr>
+                            <m:e>
+                              <m:sSub>
+                                <m:sSubPr>
+                                  <m:ctrlPr>
+                                    <a:rPr lang="en-US" sz="1400" i="1">
+                                      <a:latin typeface="Cambria Math" panose="02040503050406030204" pitchFamily="18" charset="0"/>
+                                    </a:rPr>
+                                  </m:ctrlPr>
+                                </m:sSubPr>
+                                <m:e>
+                                  <m:r>
+                                    <a:rPr lang="en-US" sz="1400" i="1">
+                                      <a:latin typeface="Cambria Math" panose="02040503050406030204" pitchFamily="18" charset="0"/>
+                                    </a:rPr>
+                                    <m:t>𝑠</m:t>
+                                  </m:r>
+                                </m:e>
+                                <m:sub>
+                                  <m:r>
+                                    <a:rPr lang="en-US" sz="1400" b="0" i="1" smtClean="0">
+                                      <a:latin typeface="Cambria Math" panose="02040503050406030204" pitchFamily="18" charset="0"/>
+                                    </a:rPr>
+                                    <m:t>2</m:t>
+                                  </m:r>
+                                </m:sub>
+                              </m:sSub>
+                            </m:e>
+                          </m:d>
+                          <m:r>
+                            <a:rPr lang="en-US" sz="1400" b="0" i="1" smtClean="0">
+                              <a:latin typeface="Cambria Math" panose="02040503050406030204" pitchFamily="18" charset="0"/>
+                            </a:rPr>
+                            <m:t>≥</m:t>
+                          </m:r>
+                          <m:sSub>
+                            <m:sSubPr>
+                              <m:ctrlPr>
+                                <a:rPr lang="en-US" sz="1400" i="1">
+                                  <a:latin typeface="Cambria Math" panose="02040503050406030204" pitchFamily="18" charset="0"/>
+                                </a:rPr>
+                              </m:ctrlPr>
+                            </m:sSubPr>
+                            <m:e>
+                              <m:r>
+                                <a:rPr lang="en-US" sz="1400" i="1">
+                                  <a:latin typeface="Cambria Math" panose="02040503050406030204" pitchFamily="18" charset="0"/>
+                                </a:rPr>
+                                <m:t>𝑅</m:t>
+                              </m:r>
+                            </m:e>
+                            <m:sub>
+                              <m:r>
+                                <a:rPr lang="en-US" sz="1400" b="0" i="1" smtClean="0">
+                                  <a:latin typeface="Cambria Math" panose="02040503050406030204" pitchFamily="18" charset="0"/>
+                                </a:rPr>
+                                <m:t>2</m:t>
+                              </m:r>
+                            </m:sub>
+                          </m:sSub>
+                          <m:r>
+                            <a:rPr lang="en-US" sz="1400" i="1">
+                              <a:latin typeface="Cambria Math" panose="02040503050406030204" pitchFamily="18" charset="0"/>
+                            </a:rPr>
+                            <m:t>+</m:t>
+                          </m:r>
+                          <m:r>
+                            <a:rPr lang="en-US" sz="1400" i="1">
+                              <a:latin typeface="Cambria Math" panose="02040503050406030204" pitchFamily="18" charset="0"/>
+                            </a:rPr>
+                            <m:t>𝛾</m:t>
+                          </m:r>
+                          <m:d>
+                            <m:dPr>
+                              <m:ctrlPr>
+                                <a:rPr lang="en-US" sz="1400" i="1">
+                                  <a:latin typeface="Cambria Math" panose="02040503050406030204" pitchFamily="18" charset="0"/>
+                                </a:rPr>
+                              </m:ctrlPr>
+                            </m:dPr>
+                            <m:e>
+                              <m:sSub>
+                                <m:sSubPr>
+                                  <m:ctrlPr>
+                                    <a:rPr lang="en-US" sz="1400" i="1">
+                                      <a:latin typeface="Cambria Math" panose="02040503050406030204" pitchFamily="18" charset="0"/>
+                                    </a:rPr>
+                                  </m:ctrlPr>
+                                </m:sSubPr>
+                                <m:e>
+                                  <m:r>
+                                    <a:rPr lang="en-US" sz="1400" i="1">
+                                      <a:latin typeface="Cambria Math" panose="02040503050406030204" pitchFamily="18" charset="0"/>
+                                    </a:rPr>
+                                    <m:t>𝑃</m:t>
+                                  </m:r>
+                                </m:e>
+                                <m:sub>
+                                  <m:r>
+                                    <a:rPr lang="en-US" sz="1400" b="0" i="1" smtClean="0">
+                                      <a:latin typeface="Cambria Math" panose="02040503050406030204" pitchFamily="18" charset="0"/>
+                                    </a:rPr>
+                                    <m:t>2</m:t>
+                                  </m:r>
+                                  <m:r>
+                                    <a:rPr lang="en-US" sz="1400" i="1">
+                                      <a:latin typeface="Cambria Math" panose="02040503050406030204" pitchFamily="18" charset="0"/>
+                                    </a:rPr>
+                                    <m:t>1</m:t>
+                                  </m:r>
+                                </m:sub>
+                              </m:sSub>
+                              <m:r>
+                                <a:rPr lang="en-US" sz="1400" i="1">
+                                  <a:latin typeface="Cambria Math" panose="02040503050406030204" pitchFamily="18" charset="0"/>
+                                </a:rPr>
+                                <m:t>𝑉</m:t>
+                              </m:r>
+                              <m:d>
+                                <m:dPr>
+                                  <m:ctrlPr>
+                                    <a:rPr lang="en-US" sz="1400" i="1">
+                                      <a:latin typeface="Cambria Math" panose="02040503050406030204" pitchFamily="18" charset="0"/>
+                                    </a:rPr>
+                                  </m:ctrlPr>
+                                </m:dPr>
+                                <m:e>
+                                  <m:sSub>
+                                    <m:sSubPr>
+                                      <m:ctrlPr>
+                                        <a:rPr lang="en-US" sz="1400" i="1">
+                                          <a:latin typeface="Cambria Math" panose="02040503050406030204" pitchFamily="18" charset="0"/>
+                                        </a:rPr>
+                                      </m:ctrlPr>
+                                    </m:sSubPr>
+                                    <m:e>
+                                      <m:r>
+                                        <a:rPr lang="en-US" sz="1400" i="1">
+                                          <a:latin typeface="Cambria Math" panose="02040503050406030204" pitchFamily="18" charset="0"/>
+                                        </a:rPr>
+                                        <m:t>𝑠</m:t>
+                                      </m:r>
+                                    </m:e>
+                                    <m:sub>
+                                      <m:r>
+                                        <a:rPr lang="en-US" sz="1400" i="1">
+                                          <a:latin typeface="Cambria Math" panose="02040503050406030204" pitchFamily="18" charset="0"/>
+                                        </a:rPr>
+                                        <m:t>1</m:t>
+                                      </m:r>
+                                    </m:sub>
+                                  </m:sSub>
+                                </m:e>
+                              </m:d>
+                              <m:r>
+                                <a:rPr lang="en-US" sz="1400" i="1">
+                                  <a:latin typeface="Cambria Math" panose="02040503050406030204" pitchFamily="18" charset="0"/>
+                                </a:rPr>
+                                <m:t>+</m:t>
+                              </m:r>
+                              <m:sSub>
+                                <m:sSubPr>
+                                  <m:ctrlPr>
+                                    <a:rPr lang="en-US" sz="1400" i="1">
+                                      <a:latin typeface="Cambria Math" panose="02040503050406030204" pitchFamily="18" charset="0"/>
+                                    </a:rPr>
+                                  </m:ctrlPr>
+                                </m:sSubPr>
+                                <m:e>
+                                  <m:r>
+                                    <a:rPr lang="en-US" sz="1400" i="1">
+                                      <a:latin typeface="Cambria Math" panose="02040503050406030204" pitchFamily="18" charset="0"/>
+                                    </a:rPr>
+                                    <m:t>𝑃</m:t>
+                                  </m:r>
+                                </m:e>
+                                <m:sub>
+                                  <m:r>
+                                    <a:rPr lang="en-US" sz="1400" b="0" i="1" smtClean="0">
+                                      <a:latin typeface="Cambria Math" panose="02040503050406030204" pitchFamily="18" charset="0"/>
+                                    </a:rPr>
+                                    <m:t>2</m:t>
+                                  </m:r>
+                                  <m:r>
+                                    <a:rPr lang="en-US" sz="1400" i="1">
+                                      <a:latin typeface="Cambria Math" panose="02040503050406030204" pitchFamily="18" charset="0"/>
+                                    </a:rPr>
+                                    <m:t>2</m:t>
+                                  </m:r>
+                                </m:sub>
+                              </m:sSub>
+                              <m:r>
+                                <a:rPr lang="en-US" sz="1400" i="1">
+                                  <a:latin typeface="Cambria Math" panose="02040503050406030204" pitchFamily="18" charset="0"/>
+                                </a:rPr>
+                                <m:t>𝑉</m:t>
+                              </m:r>
+                              <m:d>
+                                <m:dPr>
+                                  <m:ctrlPr>
+                                    <a:rPr lang="en-US" sz="1400" i="1">
+                                      <a:latin typeface="Cambria Math" panose="02040503050406030204" pitchFamily="18" charset="0"/>
+                                    </a:rPr>
+                                  </m:ctrlPr>
+                                </m:dPr>
+                                <m:e>
+                                  <m:sSub>
+                                    <m:sSubPr>
+                                      <m:ctrlPr>
+                                        <a:rPr lang="en-US" sz="1400" i="1">
+                                          <a:latin typeface="Cambria Math" panose="02040503050406030204" pitchFamily="18" charset="0"/>
+                                        </a:rPr>
+                                      </m:ctrlPr>
+                                    </m:sSubPr>
+                                    <m:e>
+                                      <m:r>
+                                        <a:rPr lang="en-US" sz="1400" i="1">
+                                          <a:latin typeface="Cambria Math" panose="02040503050406030204" pitchFamily="18" charset="0"/>
+                                        </a:rPr>
+                                        <m:t>𝑠</m:t>
+                                      </m:r>
+                                    </m:e>
+                                    <m:sub>
+                                      <m:r>
+                                        <a:rPr lang="en-US" sz="1400" i="1">
+                                          <a:latin typeface="Cambria Math" panose="02040503050406030204" pitchFamily="18" charset="0"/>
+                                        </a:rPr>
+                                        <m:t>2</m:t>
+                                      </m:r>
+                                    </m:sub>
+                                  </m:sSub>
+                                </m:e>
+                              </m:d>
+                            </m:e>
+                          </m:d>
+                        </m:oMath>
+                      </m:oMathPara>
+                    </a14:m>
+                    <a:endParaRPr lang="en-US" sz="1400" dirty="0"/>
+                  </a:p>
+                  <a:p>
+                    <a:endParaRPr lang="en-US" sz="1400" dirty="0"/>
+                  </a:p>
+                  <a:p>
+                    <a:r>
+                      <a:rPr lang="en-US" sz="1400" dirty="0"/>
+                      <a:t>Where </a:t>
+                    </a:r>
+                    <a:r>
+                      <a:rPr lang="en-US" sz="1400" b="1" dirty="0"/>
+                      <a:t>following </a:t>
+                    </a:r>
+                    <a14:m>
+                      <m:oMath xmlns:m="http://schemas.openxmlformats.org/officeDocument/2006/math">
+                        <m:r>
+                          <a:rPr lang="en-US" sz="1400" b="1" i="1" smtClean="0">
+                            <a:latin typeface="Cambria Math" panose="02040503050406030204" pitchFamily="18" charset="0"/>
+                          </a:rPr>
+                          <m:t>𝝅</m:t>
+                        </m:r>
+                      </m:oMath>
+                    </a14:m>
+                    <a:r>
+                      <a:rPr lang="en-US" sz="1400" b="1" dirty="0"/>
+                      <a:t> </a:t>
+                    </a:r>
+                    <a:r>
+                      <a:rPr lang="en-US" sz="1400" dirty="0"/>
+                      <a:t>has</a:t>
+                    </a:r>
+                  </a:p>
+                  <a:p>
+                    <a14:m>
+                      <m:oMath xmlns:m="http://schemas.openxmlformats.org/officeDocument/2006/math">
+                        <m:sSub>
+                          <m:sSubPr>
+                            <m:ctrlPr>
+                              <a:rPr lang="en-US" sz="1400" i="1" dirty="0">
+                                <a:latin typeface="Cambria Math" panose="02040503050406030204" pitchFamily="18" charset="0"/>
+                              </a:rPr>
+                            </m:ctrlPr>
+                          </m:sSubPr>
+                          <m:e>
+                            <m:r>
+                              <a:rPr lang="en-US" sz="1400" i="1" dirty="0">
+                                <a:latin typeface="Cambria Math" panose="02040503050406030204" pitchFamily="18" charset="0"/>
+                              </a:rPr>
+                              <m:t>𝑅</m:t>
+                            </m:r>
+                          </m:e>
+                          <m:sub>
+                            <m:r>
+                              <a:rPr lang="en-US" sz="1400" i="1" dirty="0">
+                                <a:latin typeface="Cambria Math" panose="02040503050406030204" pitchFamily="18" charset="0"/>
+                              </a:rPr>
+                              <m:t>𝑥</m:t>
+                            </m:r>
+                          </m:sub>
+                        </m:sSub>
+                        <m:r>
+                          <a:rPr lang="en-US" sz="1400" i="1" dirty="0">
+                            <a:latin typeface="Cambria Math" panose="02040503050406030204" pitchFamily="18" charset="0"/>
+                          </a:rPr>
+                          <m:t> </m:t>
+                        </m:r>
+                      </m:oMath>
+                    </a14:m>
+                    <a:r>
+                      <a:rPr lang="en-US" sz="1400" dirty="0"/>
+                      <a:t>immediate reward of  </a:t>
+                    </a:r>
+                    <a14:m>
+                      <m:oMath xmlns:m="http://schemas.openxmlformats.org/officeDocument/2006/math">
+                        <m:sSub>
+                          <m:sSubPr>
+                            <m:ctrlPr>
+                              <a:rPr lang="en-US" sz="1400" i="1">
+                                <a:latin typeface="Cambria Math" panose="02040503050406030204" pitchFamily="18" charset="0"/>
+                              </a:rPr>
+                            </m:ctrlPr>
+                          </m:sSubPr>
+                          <m:e>
+                            <m:r>
+                              <a:rPr lang="en-US" sz="1400" i="1">
+                                <a:latin typeface="Cambria Math" panose="02040503050406030204" pitchFamily="18" charset="0"/>
+                              </a:rPr>
+                              <m:t>𝑠</m:t>
+                            </m:r>
+                          </m:e>
+                          <m:sub>
+                            <m:r>
+                              <a:rPr lang="en-US" sz="1400" i="1">
+                                <a:latin typeface="Cambria Math" panose="02040503050406030204" pitchFamily="18" charset="0"/>
+                              </a:rPr>
+                              <m:t>𝑥</m:t>
+                            </m:r>
+                          </m:sub>
+                        </m:sSub>
+                      </m:oMath>
+                    </a14:m>
+                    <a:endParaRPr lang="en-US" sz="1400" dirty="0"/>
+                  </a:p>
+                  <a:p>
+                    <a:pPr lvl="0"/>
+                    <a14:m>
+                      <m:oMath xmlns:m="http://schemas.openxmlformats.org/officeDocument/2006/math">
+                        <m:sSub>
+                          <m:sSubPr>
+                            <m:ctrlPr>
+                              <a:rPr lang="en-US" sz="1400" i="1" dirty="0">
+                                <a:latin typeface="Cambria Math" panose="02040503050406030204" pitchFamily="18" charset="0"/>
+                              </a:rPr>
+                            </m:ctrlPr>
+                          </m:sSubPr>
+                          <m:e>
+                            <m:r>
+                              <a:rPr lang="en-US" sz="1400" i="1" dirty="0">
+                                <a:latin typeface="Cambria Math" panose="02040503050406030204" pitchFamily="18" charset="0"/>
+                              </a:rPr>
+                              <m:t>𝑃</m:t>
+                            </m:r>
+                          </m:e>
+                          <m:sub>
+                            <m:r>
+                              <a:rPr lang="en-US" sz="1400" i="1" dirty="0">
+                                <a:latin typeface="Cambria Math" panose="02040503050406030204" pitchFamily="18" charset="0"/>
+                              </a:rPr>
+                              <m:t>𝑥𝑦</m:t>
+                            </m:r>
+                          </m:sub>
+                        </m:sSub>
+                        <m:r>
+                          <a:rPr lang="en-US" sz="1400" i="1" dirty="0">
+                            <a:latin typeface="Cambria Math" panose="02040503050406030204" pitchFamily="18" charset="0"/>
+                          </a:rPr>
+                          <m:t> </m:t>
+                        </m:r>
+                      </m:oMath>
+                    </a14:m>
+                    <a:r>
+                      <a:rPr lang="en-US" sz="1400" dirty="0"/>
+                      <a:t>transition probability </a:t>
+                    </a:r>
+                    <a14:m>
+                      <m:oMath xmlns:m="http://schemas.openxmlformats.org/officeDocument/2006/math">
+                        <m:sSub>
+                          <m:sSubPr>
+                            <m:ctrlPr>
+                              <a:rPr lang="en-US" sz="1400" i="1">
+                                <a:latin typeface="Cambria Math" panose="02040503050406030204" pitchFamily="18" charset="0"/>
+                              </a:rPr>
+                            </m:ctrlPr>
+                          </m:sSubPr>
+                          <m:e>
+                            <m:r>
+                              <a:rPr lang="en-US" sz="1400" i="1">
+                                <a:latin typeface="Cambria Math" panose="02040503050406030204" pitchFamily="18" charset="0"/>
+                              </a:rPr>
+                              <m:t>𝑠</m:t>
+                            </m:r>
+                          </m:e>
+                          <m:sub>
+                            <m:r>
+                              <a:rPr lang="en-US" sz="1400" i="1">
+                                <a:latin typeface="Cambria Math" panose="02040503050406030204" pitchFamily="18" charset="0"/>
+                              </a:rPr>
+                              <m:t>𝑥</m:t>
+                            </m:r>
+                          </m:sub>
+                        </m:sSub>
+                        <m:r>
+                          <a:rPr lang="en-US" sz="1400" i="1">
+                            <a:latin typeface="Cambria Math" panose="02040503050406030204" pitchFamily="18" charset="0"/>
+                          </a:rPr>
+                          <m:t>→</m:t>
+                        </m:r>
+                        <m:sSub>
+                          <m:sSubPr>
+                            <m:ctrlPr>
+                              <a:rPr lang="en-US" sz="1400" i="1">
+                                <a:latin typeface="Cambria Math" panose="02040503050406030204" pitchFamily="18" charset="0"/>
+                              </a:rPr>
+                            </m:ctrlPr>
+                          </m:sSubPr>
+                          <m:e>
+                            <m:r>
+                              <a:rPr lang="en-US" sz="1400" i="1">
+                                <a:latin typeface="Cambria Math" panose="02040503050406030204" pitchFamily="18" charset="0"/>
+                              </a:rPr>
+                              <m:t>𝑠</m:t>
+                            </m:r>
+                          </m:e>
+                          <m:sub>
+                            <m:r>
+                              <a:rPr lang="en-US" sz="1400" i="1">
+                                <a:latin typeface="Cambria Math" panose="02040503050406030204" pitchFamily="18" charset="0"/>
+                              </a:rPr>
+                              <m:t>𝑦</m:t>
+                            </m:r>
+                          </m:sub>
+                        </m:sSub>
+                      </m:oMath>
+                    </a14:m>
+                    <a:endParaRPr lang="en-US" sz="1400" dirty="0"/>
+                  </a:p>
+                  <a:p>
+                    <a:endParaRPr lang="en-US" dirty="0"/>
+                  </a:p>
+                </p:txBody>
+              </p:sp>
+            </mc:Choice>
+            <mc:Fallback xmlns="">
+              <p:sp>
+                <p:nvSpPr>
+                  <p:cNvPr id="4" name="TextBox 3">
+                    <a:extLst>
+                      <a:ext uri="{FF2B5EF4-FFF2-40B4-BE49-F238E27FC236}">
+                        <a16:creationId xmlns:a16="http://schemas.microsoft.com/office/drawing/2014/main" id="{63B2C840-7C72-C056-FD2A-B1FAC79C9C9D}"/>
+                      </a:ext>
+                    </a:extLst>
+                  </p:cNvPr>
+                  <p:cNvSpPr txBox="1">
+                    <a:spLocks noRot="1" noChangeAspect="1" noMove="1" noResize="1" noEditPoints="1" noAdjustHandles="1" noChangeArrowheads="1" noChangeShapeType="1" noTextEdit="1"/>
+                  </p:cNvSpPr>
+                  <p:nvPr/>
+                </p:nvSpPr>
+                <p:spPr>
+                  <a:xfrm>
+                    <a:off x="8397124" y="1293020"/>
+                    <a:ext cx="3420274" cy="2503827"/>
+                  </a:xfrm>
+                  <a:prstGeom prst="rect">
+                    <a:avLst/>
+                  </a:prstGeom>
+                  <a:blipFill>
+                    <a:blip r:embed="rId3"/>
+                    <a:stretch>
+                      <a:fillRect l="-1426" t="-1193"/>
+                    </a:stretch>
+                  </a:blipFill>
+                </p:spPr>
+                <p:txBody>
+                  <a:bodyPr/>
+                  <a:lstStyle/>
+                  <a:p>
+                    <a:r>
+                      <a:rPr lang="en-US">
+                        <a:noFill/>
+                      </a:rPr>
+                      <a:t> </a:t>
+                    </a:r>
+                  </a:p>
+                </p:txBody>
+              </p:sp>
+            </mc:Fallback>
+          </mc:AlternateContent>
+        </p:grpSp>
+        <p:grpSp>
+          <p:nvGrpSpPr>
+            <p:cNvPr id="30" name="Group 29">
+              <a:extLst>
+                <a:ext uri="{FF2B5EF4-FFF2-40B4-BE49-F238E27FC236}">
+                  <a16:creationId xmlns:a16="http://schemas.microsoft.com/office/drawing/2014/main" id="{0324149C-65E1-3FEF-6A06-7D77DA05FD9C}"/>
+                </a:ext>
+              </a:extLst>
+            </p:cNvPr>
+            <p:cNvGrpSpPr/>
+            <p:nvPr/>
+          </p:nvGrpSpPr>
+          <p:grpSpPr>
+            <a:xfrm>
+              <a:off x="8418064" y="3334260"/>
+              <a:ext cx="3616325" cy="3181350"/>
+              <a:chOff x="8418064" y="3494800"/>
+              <a:chExt cx="3616325" cy="3181350"/>
+            </a:xfrm>
+          </p:grpSpPr>
+          <p:sp>
+            <p:nvSpPr>
+              <p:cNvPr id="25" name="Freeform: Shape 24">
+                <a:extLst>
+                  <a:ext uri="{FF2B5EF4-FFF2-40B4-BE49-F238E27FC236}">
+                    <a16:creationId xmlns:a16="http://schemas.microsoft.com/office/drawing/2014/main" id="{D737ACAD-42B0-15EE-555A-D36591094A60}"/>
+                  </a:ext>
+                </a:extLst>
+              </p:cNvPr>
+              <p:cNvSpPr/>
+              <p:nvPr/>
+            </p:nvSpPr>
+            <p:spPr>
+              <a:xfrm>
+                <a:off x="10394580" y="4055469"/>
+                <a:ext cx="1471679" cy="614253"/>
+              </a:xfrm>
+              <a:custGeom>
+                <a:avLst/>
+                <a:gdLst>
+                  <a:gd name="csX0" fmla="*/ 0 w 1361130"/>
+                  <a:gd name="csY0" fmla="*/ 579353 h 579353"/>
+                  <a:gd name="csX1" fmla="*/ 1361130 w 1361130"/>
+                  <a:gd name="csY1" fmla="*/ 0 h 579353"/>
+                  <a:gd name="csX2" fmla="*/ 1361130 w 1361130"/>
+                  <a:gd name="csY2" fmla="*/ 314107 h 579353"/>
+                  <a:gd name="csX3" fmla="*/ 0 w 1361130"/>
+                  <a:gd name="csY3" fmla="*/ 579353 h 579353"/>
+                </a:gdLst>
+                <a:ahLst/>
+                <a:cxnLst>
+                  <a:cxn ang="0">
+                    <a:pos x="csX0" y="csY0"/>
+                  </a:cxn>
+                  <a:cxn ang="0">
+                    <a:pos x="csX1" y="csY1"/>
+                  </a:cxn>
+                  <a:cxn ang="0">
+                    <a:pos x="csX2" y="csY2"/>
+                  </a:cxn>
+                  <a:cxn ang="0">
+                    <a:pos x="csX3" y="csY3"/>
+                  </a:cxn>
+                </a:cxnLst>
+                <a:rect l="l" t="t" r="r" b="b"/>
+                <a:pathLst>
+                  <a:path w="1361130" h="579353">
+                    <a:moveTo>
+                      <a:pt x="0" y="579353"/>
+                    </a:moveTo>
+                    <a:lnTo>
+                      <a:pt x="1361130" y="0"/>
+                    </a:lnTo>
+                    <a:lnTo>
+                      <a:pt x="1361130" y="314107"/>
+                    </a:lnTo>
+                    <a:lnTo>
+                      <a:pt x="0" y="579353"/>
+                    </a:lnTo>
+                    <a:close/>
+                  </a:path>
+                </a:pathLst>
+              </a:custGeom>
+              <a:solidFill>
+                <a:schemeClr val="accent6"/>
+              </a:solidFill>
+              <a:ln>
+                <a:noFill/>
+              </a:ln>
+            </p:spPr>
+            <p:style>
+              <a:lnRef idx="0">
+                <a:scrgbClr r="0" g="0" b="0"/>
+              </a:lnRef>
+              <a:fillRef idx="0">
+                <a:scrgbClr r="0" g="0" b="0"/>
+              </a:fillRef>
+              <a:effectRef idx="0">
+                <a:scrgbClr r="0" g="0" b="0"/>
+              </a:effectRef>
+              <a:fontRef idx="minor">
+                <a:schemeClr val="lt1"/>
+              </a:fontRef>
+            </p:style>
+            <p:txBody>
+              <a:bodyPr rtlCol="0" anchor="ctr"/>
+              <a:lstStyle/>
+              <a:p>
+                <a:pPr algn="ctr"/>
+                <a:endParaRPr lang="en-US"/>
+              </a:p>
+            </p:txBody>
+          </p:sp>
+          <mc:AlternateContent xmlns:mc="http://schemas.openxmlformats.org/markup-compatibility/2006" xmlns:a14="http://schemas.microsoft.com/office/drawing/2010/main">
+            <mc:Choice Requires="a14">
+              <p:graphicFrame>
+                <p:nvGraphicFramePr>
+                  <p:cNvPr id="6" name="Chart 5">
+                    <a:extLst>
+                      <a:ext uri="{FF2B5EF4-FFF2-40B4-BE49-F238E27FC236}">
+                        <a16:creationId xmlns:a16="http://schemas.microsoft.com/office/drawing/2014/main" id="{B7392BAE-65BB-DF7C-4722-CF4BC4EA04F0}"/>
+                      </a:ext>
+                    </a:extLst>
+                  </p:cNvPr>
+                  <p:cNvGraphicFramePr>
+                    <a:graphicFrameLocks/>
+                  </p:cNvGraphicFramePr>
+                  <p:nvPr>
+                    <p:extLst>
+                      <p:ext uri="{D42A27DB-BD31-4B8C-83A1-F6EECF244321}">
+                        <p14:modId xmlns:p14="http://schemas.microsoft.com/office/powerpoint/2010/main" val="1496141950"/>
+                      </p:ext>
+                    </p:extLst>
+                  </p:nvPr>
+                </p:nvGraphicFramePr>
+                <p:xfrm>
+                  <a:off x="8418064" y="3494800"/>
+                  <a:ext cx="3616325" cy="3181350"/>
+                </p:xfrm>
+                <a:graphic>
+                  <a:graphicData uri="http://schemas.openxmlformats.org/drawingml/2006/chart">
+                    <c:chart xmlns:c="http://schemas.openxmlformats.org/drawingml/2006/chart" xmlns:r="http://schemas.openxmlformats.org/officeDocument/2006/relationships" r:id="rId4"/>
+                  </a:graphicData>
+                </a:graphic>
+              </p:graphicFrame>
+            </mc:Choice>
+            <mc:Fallback xmlns="">
+              <p:graphicFrame>
+                <p:nvGraphicFramePr>
+                  <p:cNvPr id="6" name="Chart 5">
+                    <a:extLst>
+                      <a:ext uri="{FF2B5EF4-FFF2-40B4-BE49-F238E27FC236}">
+                        <a16:creationId xmlns:a16="http://schemas.microsoft.com/office/drawing/2014/main" id="{B7392BAE-65BB-DF7C-4722-CF4BC4EA04F0}"/>
+                      </a:ext>
+                    </a:extLst>
+                  </p:cNvPr>
+                  <p:cNvGraphicFramePr>
+                    <a:graphicFrameLocks/>
+                  </p:cNvGraphicFramePr>
+                  <p:nvPr>
+                    <p:extLst>
+                      <p:ext uri="{D42A27DB-BD31-4B8C-83A1-F6EECF244321}">
+                        <p14:modId xmlns:p14="http://schemas.microsoft.com/office/powerpoint/2010/main" val="1496141950"/>
+                      </p:ext>
+                    </p:extLst>
+                  </p:nvPr>
+                </p:nvGraphicFramePr>
+                <p:xfrm>
+                  <a:off x="8418064" y="3494800"/>
+                  <a:ext cx="3616325" cy="3181350"/>
+                </p:xfrm>
+                <a:graphic>
+                  <a:graphicData uri="http://schemas.openxmlformats.org/drawingml/2006/chart">
+                    <c:chart xmlns:c="http://schemas.openxmlformats.org/drawingml/2006/chart" xmlns:r="http://schemas.openxmlformats.org/officeDocument/2006/relationships" r:id="rId5"/>
+                  </a:graphicData>
+                </a:graphic>
+              </p:graphicFrame>
+            </mc:Fallback>
+          </mc:AlternateContent>
+          <p:cxnSp>
+            <p:nvCxnSpPr>
+              <p:cNvPr id="15" name="Straight Connector 14">
+                <a:extLst>
+                  <a:ext uri="{FF2B5EF4-FFF2-40B4-BE49-F238E27FC236}">
+                    <a16:creationId xmlns:a16="http://schemas.microsoft.com/office/drawing/2014/main" id="{38276DAE-6A06-26E9-2E13-5AFB76A49DD3}"/>
+                  </a:ext>
+                </a:extLst>
+              </p:cNvPr>
+              <p:cNvCxnSpPr>
+                <a:cxnSpLocks/>
+              </p:cNvCxnSpPr>
+              <p:nvPr/>
+            </p:nvCxnSpPr>
+            <p:spPr>
+              <a:xfrm>
+                <a:off x="10107261" y="3971707"/>
+                <a:ext cx="1766585" cy="614253"/>
+              </a:xfrm>
+              <a:prstGeom prst="line">
+                <a:avLst/>
+              </a:prstGeom>
+              <a:ln w="19050" cap="flat" cmpd="sng" algn="ctr">
+                <a:solidFill>
+                  <a:schemeClr val="dk1"/>
+                </a:solidFill>
+                <a:prstDash val="dash"/>
+                <a:round/>
+                <a:headEnd type="none" w="med" len="med"/>
+                <a:tailEnd type="none" w="med" len="med"/>
+              </a:ln>
+            </p:spPr>
+            <p:style>
+              <a:lnRef idx="0">
+                <a:scrgbClr r="0" g="0" b="0"/>
+              </a:lnRef>
+              <a:fillRef idx="0">
+                <a:scrgbClr r="0" g="0" b="0"/>
+              </a:fillRef>
+              <a:effectRef idx="0">
+                <a:scrgbClr r="0" g="0" b="0"/>
+              </a:effectRef>
+              <a:fontRef idx="minor">
+                <a:schemeClr val="tx1"/>
+              </a:fontRef>
+            </p:style>
+          </p:cxnSp>
+          <p:cxnSp>
+            <p:nvCxnSpPr>
+              <p:cNvPr id="19" name="Straight Connector 18">
+                <a:extLst>
+                  <a:ext uri="{FF2B5EF4-FFF2-40B4-BE49-F238E27FC236}">
+                    <a16:creationId xmlns:a16="http://schemas.microsoft.com/office/drawing/2014/main" id="{9A82668A-976C-2EE8-6FF4-EAD852BA2BBB}"/>
+                  </a:ext>
+                </a:extLst>
+              </p:cNvPr>
+              <p:cNvCxnSpPr>
+                <a:cxnSpLocks/>
+              </p:cNvCxnSpPr>
+              <p:nvPr/>
+            </p:nvCxnSpPr>
+            <p:spPr>
+              <a:xfrm>
+                <a:off x="9071568" y="4157007"/>
+                <a:ext cx="2872079" cy="980385"/>
+              </a:xfrm>
+              <a:prstGeom prst="line">
+                <a:avLst/>
+              </a:prstGeom>
+              <a:ln>
+                <a:headEnd type="none" w="med" len="med"/>
+                <a:tailEnd type="none" w="med" len="med"/>
+              </a:ln>
+            </p:spPr>
+            <p:style>
+              <a:lnRef idx="2">
+                <a:schemeClr val="dk1"/>
+              </a:lnRef>
+              <a:fillRef idx="0">
+                <a:schemeClr val="dk1"/>
+              </a:fillRef>
+              <a:effectRef idx="1">
+                <a:schemeClr val="dk1"/>
+              </a:effectRef>
+              <a:fontRef idx="minor">
+                <a:schemeClr val="tx1"/>
+              </a:fontRef>
+            </p:style>
+          </p:cxnSp>
+          <p:sp>
+            <p:nvSpPr>
+              <p:cNvPr id="21" name="Arrow: Right 20">
+                <a:extLst>
+                  <a:ext uri="{FF2B5EF4-FFF2-40B4-BE49-F238E27FC236}">
+                    <a16:creationId xmlns:a16="http://schemas.microsoft.com/office/drawing/2014/main" id="{CAC1E6C5-81C8-462F-C6CA-14B12340386A}"/>
+                  </a:ext>
+                </a:extLst>
+              </p:cNvPr>
+              <p:cNvSpPr/>
+              <p:nvPr/>
+            </p:nvSpPr>
+            <p:spPr>
+              <a:xfrm rot="6920301">
+                <a:off x="10015636" y="4193460"/>
+                <a:ext cx="278151" cy="170745"/>
+              </a:xfrm>
+              <a:prstGeom prst="rightArrow">
+                <a:avLst/>
+              </a:prstGeom>
+            </p:spPr>
+            <p:style>
+              <a:lnRef idx="2">
+                <a:schemeClr val="dk1">
+                  <a:shade val="15000"/>
+                </a:schemeClr>
+              </a:lnRef>
+              <a:fillRef idx="1">
+                <a:schemeClr val="dk1"/>
+              </a:fillRef>
+              <a:effectRef idx="0">
+                <a:schemeClr val="dk1"/>
+              </a:effectRef>
+              <a:fontRef idx="minor">
+                <a:schemeClr val="lt1"/>
+              </a:fontRef>
+            </p:style>
+            <p:txBody>
+              <a:bodyPr rtlCol="0" anchor="ctr"/>
+              <a:lstStyle/>
+              <a:p>
+                <a:pPr algn="ctr"/>
+                <a:endParaRPr lang="en-US"/>
+              </a:p>
+            </p:txBody>
+          </p:sp>
+          <p:sp>
+            <p:nvSpPr>
+              <p:cNvPr id="22" name="Oval 21">
+                <a:extLst>
+                  <a:ext uri="{FF2B5EF4-FFF2-40B4-BE49-F238E27FC236}">
+                    <a16:creationId xmlns:a16="http://schemas.microsoft.com/office/drawing/2014/main" id="{0692D36B-4A13-D527-F0C3-F0E026972B2D}"/>
+                  </a:ext>
+                </a:extLst>
+              </p:cNvPr>
+              <p:cNvSpPr/>
+              <p:nvPr/>
+            </p:nvSpPr>
+            <p:spPr>
+              <a:xfrm>
+                <a:off x="10372508" y="4544080"/>
+                <a:ext cx="174504" cy="185300"/>
+              </a:xfrm>
+              <a:prstGeom prst="ellipse">
+                <a:avLst/>
+              </a:prstGeom>
+              <a:noFill/>
+              <a:ln w="28575" cap="flat" cmpd="sng" algn="ctr">
+                <a:solidFill>
+                  <a:srgbClr val="C00000"/>
+                </a:solidFill>
+                <a:prstDash val="solid"/>
+                <a:round/>
+                <a:headEnd type="none" w="med" len="med"/>
+                <a:tailEnd type="none" w="med" len="med"/>
+              </a:ln>
+            </p:spPr>
+            <p:style>
+              <a:lnRef idx="0">
+                <a:scrgbClr r="0" g="0" b="0"/>
+              </a:lnRef>
+              <a:fillRef idx="0">
+                <a:scrgbClr r="0" g="0" b="0"/>
+              </a:fillRef>
+              <a:effectRef idx="0">
+                <a:scrgbClr r="0" g="0" b="0"/>
+              </a:effectRef>
+              <a:fontRef idx="minor">
+                <a:schemeClr val="accent2"/>
+              </a:fontRef>
+            </p:style>
+            <p:txBody>
+              <a:bodyPr rtlCol="0" anchor="ctr"/>
+              <a:lstStyle/>
+              <a:p>
+                <a:pPr algn="ctr"/>
+                <a:endParaRPr lang="en-US"/>
+              </a:p>
+            </p:txBody>
+          </p:sp>
+        </p:grpSp>
+        <p:sp>
+          <p:nvSpPr>
+            <p:cNvPr id="31" name="Rectangle 30">
+              <a:extLst>
+                <a:ext uri="{FF2B5EF4-FFF2-40B4-BE49-F238E27FC236}">
+                  <a16:creationId xmlns:a16="http://schemas.microsoft.com/office/drawing/2014/main" id="{071AA459-F063-70B6-69BF-3CF753D9DFFD}"/>
+                </a:ext>
+              </a:extLst>
+            </p:cNvPr>
+            <p:cNvSpPr/>
+            <p:nvPr/>
+          </p:nvSpPr>
+          <p:spPr>
+            <a:xfrm>
+              <a:off x="10358547" y="6388387"/>
+              <a:ext cx="272226" cy="104702"/>
+            </a:xfrm>
+            <a:prstGeom prst="rect">
+              <a:avLst/>
+            </a:prstGeom>
+          </p:spPr>
+          <p:style>
+            <a:lnRef idx="2">
+              <a:schemeClr val="accent6">
+                <a:shade val="15000"/>
+              </a:schemeClr>
+            </a:lnRef>
+            <a:fillRef idx="1">
+              <a:schemeClr val="accent6"/>
+            </a:fillRef>
+            <a:effectRef idx="0">
+              <a:schemeClr val="accent6"/>
+            </a:effectRef>
+            <a:fontRef idx="minor">
+              <a:schemeClr val="lt1"/>
+            </a:fontRef>
+          </p:style>
+          <p:txBody>
+            <a:bodyPr rtlCol="0" anchor="ctr"/>
+            <a:lstStyle/>
+            <a:p>
+              <a:pPr algn="ctr"/>
+              <a:endParaRPr lang="en-US"/>
+            </a:p>
+          </p:txBody>
+        </p:sp>
+        <p:sp>
+          <p:nvSpPr>
+            <p:cNvPr id="32" name="TextBox 31">
+              <a:extLst>
+                <a:ext uri="{FF2B5EF4-FFF2-40B4-BE49-F238E27FC236}">
+                  <a16:creationId xmlns:a16="http://schemas.microsoft.com/office/drawing/2014/main" id="{BC01A90C-3DC2-24D5-7AEB-F176EB14962C}"/>
+                </a:ext>
+              </a:extLst>
+            </p:cNvPr>
+            <p:cNvSpPr txBox="1"/>
+            <p:nvPr/>
+          </p:nvSpPr>
+          <p:spPr>
+            <a:xfrm>
+              <a:off x="10596480" y="6332302"/>
+              <a:ext cx="998161" cy="230832"/>
+            </a:xfrm>
+            <a:prstGeom prst="rect">
+              <a:avLst/>
+            </a:prstGeom>
+            <a:noFill/>
+          </p:spPr>
+          <p:txBody>
+            <a:bodyPr wrap="square" rtlCol="0">
+              <a:spAutoFit/>
+            </a:bodyPr>
+            <a:lstStyle/>
+            <a:p>
+              <a:r>
+                <a:rPr lang="en-US" sz="900" dirty="0">
+                  <a:solidFill>
+                    <a:schemeClr val="tx1">
+                      <a:lumMod val="75000"/>
+                      <a:lumOff val="25000"/>
+                    </a:schemeClr>
+                  </a:solidFill>
+                </a:rPr>
+                <a:t>Feasible Region</a:t>
+              </a:r>
+            </a:p>
+          </p:txBody>
+        </p:sp>
+        <p:sp>
+          <p:nvSpPr>
+            <p:cNvPr id="34" name="TextBox 33">
+              <a:extLst>
+                <a:ext uri="{FF2B5EF4-FFF2-40B4-BE49-F238E27FC236}">
+                  <a16:creationId xmlns:a16="http://schemas.microsoft.com/office/drawing/2014/main" id="{C0F1D236-089D-C565-6073-49307F48A7FB}"/>
+                </a:ext>
+              </a:extLst>
+            </p:cNvPr>
+            <p:cNvSpPr txBox="1"/>
+            <p:nvPr/>
+          </p:nvSpPr>
+          <p:spPr>
+            <a:xfrm>
+              <a:off x="9325486" y="6316966"/>
+              <a:ext cx="998161" cy="230832"/>
+            </a:xfrm>
+            <a:prstGeom prst="rect">
+              <a:avLst/>
+            </a:prstGeom>
+            <a:noFill/>
+          </p:spPr>
+          <p:txBody>
+            <a:bodyPr wrap="square" rtlCol="0">
+              <a:spAutoFit/>
+            </a:bodyPr>
+            <a:lstStyle/>
+            <a:p>
+              <a:r>
+                <a:rPr lang="en-US" sz="900" dirty="0">
+                  <a:solidFill>
+                    <a:schemeClr val="tx1">
+                      <a:lumMod val="75000"/>
+                      <a:lumOff val="25000"/>
+                    </a:schemeClr>
+                  </a:solidFill>
+                </a:rPr>
+                <a:t>Objective</a:t>
+              </a:r>
+            </a:p>
+          </p:txBody>
+        </p:sp>
+        <p:cxnSp>
+          <p:nvCxnSpPr>
+            <p:cNvPr id="36" name="Straight Connector 35">
+              <a:extLst>
+                <a:ext uri="{FF2B5EF4-FFF2-40B4-BE49-F238E27FC236}">
+                  <a16:creationId xmlns:a16="http://schemas.microsoft.com/office/drawing/2014/main" id="{3572DEA6-FA04-75F0-4595-BF28C491920D}"/>
+                </a:ext>
+              </a:extLst>
+            </p:cNvPr>
+            <p:cNvCxnSpPr>
+              <a:cxnSpLocks/>
+            </p:cNvCxnSpPr>
+            <p:nvPr/>
+          </p:nvCxnSpPr>
+          <p:spPr>
+            <a:xfrm>
+              <a:off x="9071568" y="6437247"/>
+              <a:ext cx="293166" cy="0"/>
+            </a:xfrm>
+            <a:prstGeom prst="line">
+              <a:avLst/>
+            </a:prstGeom>
+            <a:ln w="28575"/>
+          </p:spPr>
+          <p:style>
+            <a:lnRef idx="2">
+              <a:schemeClr val="dk1"/>
+            </a:lnRef>
+            <a:fillRef idx="0">
+              <a:schemeClr val="dk1"/>
+            </a:fillRef>
+            <a:effectRef idx="1">
+              <a:schemeClr val="dk1"/>
+            </a:effectRef>
+            <a:fontRef idx="minor">
+              <a:schemeClr val="tx1"/>
+            </a:fontRef>
+          </p:style>
+        </p:cxnSp>
+        <p:sp>
+          <p:nvSpPr>
+            <p:cNvPr id="38" name="TextBox 37">
+              <a:extLst>
+                <a:ext uri="{FF2B5EF4-FFF2-40B4-BE49-F238E27FC236}">
+                  <a16:creationId xmlns:a16="http://schemas.microsoft.com/office/drawing/2014/main" id="{FD68DB8D-17B1-E89F-6F92-76DF48399885}"/>
+                </a:ext>
+              </a:extLst>
+            </p:cNvPr>
+            <p:cNvSpPr txBox="1"/>
+            <p:nvPr/>
+          </p:nvSpPr>
+          <p:spPr>
+            <a:xfrm rot="17618624">
+              <a:off x="9784196" y="3854535"/>
+              <a:ext cx="439749" cy="261610"/>
+            </a:xfrm>
+            <a:prstGeom prst="rect">
+              <a:avLst/>
+            </a:prstGeom>
+            <a:noFill/>
+          </p:spPr>
+          <p:txBody>
+            <a:bodyPr wrap="square" rtlCol="0">
+              <a:spAutoFit/>
+            </a:bodyPr>
+            <a:lstStyle/>
+            <a:p>
+              <a:r>
+                <a:rPr lang="en-US" sz="1100" dirty="0"/>
+                <a:t>min</a:t>
+              </a:r>
+            </a:p>
+          </p:txBody>
+        </p:sp>
+      </p:grpSp>
     </p:spTree>
     <p:extLst>
       <p:ext uri="{BB962C8B-B14F-4D97-AF65-F5344CB8AC3E}">
@@ -33669,6 +37302,51 @@
                                               <p:pRg st="10" end="10"/>
                                             </p:txEl>
                                           </p:spTgt>
+                                        </p:tgtEl>
+                                        <p:attrNameLst>
+                                          <p:attrName>style.visibility</p:attrName>
+                                        </p:attrNameLst>
+                                      </p:cBhvr>
+                                      <p:to>
+                                        <p:strVal val="visible"/>
+                                      </p:to>
+                                    </p:set>
+                                  </p:childTnLst>
+                                </p:cTn>
+                              </p:par>
+                            </p:childTnLst>
+                          </p:cTn>
+                        </p:par>
+                      </p:childTnLst>
+                    </p:cTn>
+                  </p:par>
+                  <p:par>
+                    <p:cTn id="17" fill="hold">
+                      <p:stCondLst>
+                        <p:cond delay="indefinite"/>
+                      </p:stCondLst>
+                      <p:childTnLst>
+                        <p:par>
+                          <p:cTn id="18" fill="hold">
+                            <p:stCondLst>
+                              <p:cond delay="0"/>
+                            </p:stCondLst>
+                            <p:childTnLst>
+                              <p:par>
+                                <p:cTn id="19" presetID="1" presetClass="entr" presetSubtype="0" fill="hold" nodeType="clickEffect">
+                                  <p:stCondLst>
+                                    <p:cond delay="0"/>
+                                  </p:stCondLst>
+                                  <p:childTnLst>
+                                    <p:set>
+                                      <p:cBhvr>
+                                        <p:cTn id="20" dur="1" fill="hold">
+                                          <p:stCondLst>
+                                            <p:cond delay="0"/>
+                                          </p:stCondLst>
+                                        </p:cTn>
+                                        <p:tgtEl>
+                                          <p:spTgt spid="39"/>
                                         </p:tgtEl>
                                         <p:attrNameLst>
                                           <p:attrName>style.visibility</p:attrName>

--- a/slides/Lecture_Chapter04.pptx
+++ b/slides/Lecture_Chapter04.pptx
@@ -228,13 +228,8 @@
             </a:pPr>
             <a:r>
               <a:rPr lang="en-US"/>
-              <a:t>LP</a:t>
+              <a:t>LP for 2-State MDP</a:t>
             </a:r>
-            <a:r>
-              <a:rPr lang="en-US" baseline="0"/>
-              <a:t> for 2-State MDP</a:t>
-            </a:r>
-            <a:endParaRPr lang="en-US"/>
           </a:p>
         </c:rich>
       </c:tx>
@@ -269,16 +264,26 @@
     </c:title>
     <c:autoTitleDeleted val="0"/>
     <c:plotArea>
-      <c:layout/>
-      <c:lineChart>
-        <c:grouping val="standard"/>
+      <c:layout>
+        <c:manualLayout>
+          <c:layoutTarget val="inner"/>
+          <c:xMode val="edge"/>
+          <c:yMode val="edge"/>
+          <c:x val="0.24470449538092845"/>
+          <c:y val="0.14415161889679015"/>
+          <c:w val="0.66259651666957675"/>
+          <c:h val="0.57157750571892885"/>
+        </c:manualLayout>
+      </c:layout>
+      <c:scatterChart>
+        <c:scatterStyle val="lineMarker"/>
         <c:varyColors val="0"/>
         <c:ser>
           <c:idx val="0"/>
           <c:order val="0"/>
           <c:tx>
             <c:strRef>
-              <c:f>'LP Policy Evaluation'!$F$6</c:f>
+              <c:f>'LP Policy Evaluation'!$B$26</c:f>
               <c:strCache>
                 <c:ptCount val="1"/>
                 <c:pt idx="0">
@@ -288,7 +293,7 @@
             </c:strRef>
           </c:tx>
           <c:spPr>
-            <a:ln w="28575" cap="rnd">
+            <a:ln w="19050" cap="rnd">
               <a:solidFill>
                 <a:schemeClr val="accent1"/>
               </a:solidFill>
@@ -299,124 +304,40 @@
           <c:marker>
             <c:symbol val="none"/>
           </c:marker>
-          <c:cat>
+          <c:xVal>
             <c:numRef>
-              <c:f>'LP Policy Evaluation'!$E$7:$E$22</c:f>
+              <c:f>'LP Policy Evaluation'!$A$27:$A$28</c:f>
               <c:numCache>
-                <c:formatCode>0.0</c:formatCode>
-                <c:ptCount val="16"/>
+                <c:formatCode>0.00</c:formatCode>
+                <c:ptCount val="2"/>
                 <c:pt idx="0">
-                  <c:v>10</c:v>
+                  <c:v>0</c:v>
                 </c:pt>
                 <c:pt idx="1">
-                  <c:v>11</c:v>
-                </c:pt>
-                <c:pt idx="2">
-                  <c:v>12</c:v>
-                </c:pt>
-                <c:pt idx="3">
-                  <c:v>13</c:v>
-                </c:pt>
-                <c:pt idx="4">
-                  <c:v>14</c:v>
-                </c:pt>
-                <c:pt idx="5">
-                  <c:v>15</c:v>
-                </c:pt>
-                <c:pt idx="6">
-                  <c:v>16</c:v>
-                </c:pt>
-                <c:pt idx="7">
-                  <c:v>17</c:v>
-                </c:pt>
-                <c:pt idx="8">
-                  <c:v>18</c:v>
-                </c:pt>
-                <c:pt idx="9">
-                  <c:v>19</c:v>
-                </c:pt>
-                <c:pt idx="10">
-                  <c:v>20</c:v>
-                </c:pt>
-                <c:pt idx="11">
-                  <c:v>21</c:v>
-                </c:pt>
-                <c:pt idx="12">
-                  <c:v>22</c:v>
-                </c:pt>
-                <c:pt idx="13">
-                  <c:v>23</c:v>
-                </c:pt>
-                <c:pt idx="14">
-                  <c:v>24</c:v>
-                </c:pt>
-                <c:pt idx="15">
-                  <c:v>25</c:v>
+                  <c:v>50</c:v>
                 </c:pt>
               </c:numCache>
             </c:numRef>
-          </c:cat>
-          <c:val>
+          </c:xVal>
+          <c:yVal>
             <c:numRef>
-              <c:f>'LP Policy Evaluation'!$F$7:$F$22</c:f>
+              <c:f>'LP Policy Evaluation'!$B$27:$B$28</c:f>
               <c:numCache>
                 <c:formatCode>0.00</c:formatCode>
-                <c:ptCount val="16"/>
+                <c:ptCount val="2"/>
                 <c:pt idx="0">
-                  <c:v>10</c:v>
+                  <c:v>-2.2222222222222223</c:v>
                 </c:pt>
                 <c:pt idx="1">
-                  <c:v>11.222222222222223</c:v>
-                </c:pt>
-                <c:pt idx="2">
-                  <c:v>12.444444444444445</c:v>
-                </c:pt>
-                <c:pt idx="3">
-                  <c:v>13.666666666666668</c:v>
-                </c:pt>
-                <c:pt idx="4">
-                  <c:v>14.888888888888891</c:v>
-                </c:pt>
-                <c:pt idx="5">
-                  <c:v>16.111111111111111</c:v>
-                </c:pt>
-                <c:pt idx="6">
-                  <c:v>17.333333333333336</c:v>
-                </c:pt>
-                <c:pt idx="7">
-                  <c:v>18.555555555555557</c:v>
-                </c:pt>
-                <c:pt idx="8">
-                  <c:v>19.777777777777779</c:v>
-                </c:pt>
-                <c:pt idx="9">
-                  <c:v>21.000000000000004</c:v>
-                </c:pt>
-                <c:pt idx="10">
-                  <c:v>22.222222222222221</c:v>
-                </c:pt>
-                <c:pt idx="11">
-                  <c:v>23.444444444444446</c:v>
-                </c:pt>
-                <c:pt idx="12">
-                  <c:v>24.666666666666668</c:v>
-                </c:pt>
-                <c:pt idx="13">
-                  <c:v>25.888888888888889</c:v>
-                </c:pt>
-                <c:pt idx="14">
-                  <c:v>27.111111111111114</c:v>
-                </c:pt>
-                <c:pt idx="15">
-                  <c:v>28.333333333333336</c:v>
+                  <c:v>58.888888888888893</c:v>
                 </c:pt>
               </c:numCache>
             </c:numRef>
-          </c:val>
+          </c:yVal>
           <c:smooth val="0"/>
           <c:extLst>
             <c:ext xmlns:c16="http://schemas.microsoft.com/office/drawing/2014/chart" uri="{C3380CC4-5D6E-409C-BE32-E72D297353CC}">
-              <c16:uniqueId val="{00000000-F007-4291-B431-AD94702AE9CD}"/>
+              <c16:uniqueId val="{00000000-1978-4693-9BC9-F3EBFFE6FCF1}"/>
             </c:ext>
           </c:extLst>
         </c:ser>
@@ -425,7 +346,7 @@
           <c:order val="1"/>
           <c:tx>
             <c:strRef>
-              <c:f>'LP Policy Evaluation'!$G$6</c:f>
+              <c:f>'LP Policy Evaluation'!$C$26</c:f>
               <c:strCache>
                 <c:ptCount val="1"/>
                 <c:pt idx="0">
@@ -435,7 +356,7 @@
             </c:strRef>
           </c:tx>
           <c:spPr>
-            <a:ln w="28575" cap="rnd">
+            <a:ln w="19050" cap="rnd">
               <a:solidFill>
                 <a:schemeClr val="accent2"/>
               </a:solidFill>
@@ -446,124 +367,40 @@
           <c:marker>
             <c:symbol val="none"/>
           </c:marker>
-          <c:cat>
+          <c:xVal>
             <c:numRef>
-              <c:f>'LP Policy Evaluation'!$E$7:$E$22</c:f>
+              <c:f>'LP Policy Evaluation'!$A$27:$A$28</c:f>
               <c:numCache>
-                <c:formatCode>0.0</c:formatCode>
-                <c:ptCount val="16"/>
+                <c:formatCode>0.00</c:formatCode>
+                <c:ptCount val="2"/>
                 <c:pt idx="0">
-                  <c:v>10</c:v>
+                  <c:v>0</c:v>
                 </c:pt>
                 <c:pt idx="1">
-                  <c:v>11</c:v>
-                </c:pt>
-                <c:pt idx="2">
-                  <c:v>12</c:v>
-                </c:pt>
-                <c:pt idx="3">
-                  <c:v>13</c:v>
-                </c:pt>
-                <c:pt idx="4">
-                  <c:v>14</c:v>
-                </c:pt>
-                <c:pt idx="5">
-                  <c:v>15</c:v>
-                </c:pt>
-                <c:pt idx="6">
-                  <c:v>16</c:v>
-                </c:pt>
-                <c:pt idx="7">
-                  <c:v>17</c:v>
-                </c:pt>
-                <c:pt idx="8">
-                  <c:v>18</c:v>
-                </c:pt>
-                <c:pt idx="9">
-                  <c:v>19</c:v>
-                </c:pt>
-                <c:pt idx="10">
-                  <c:v>20</c:v>
-                </c:pt>
-                <c:pt idx="11">
-                  <c:v>21</c:v>
-                </c:pt>
-                <c:pt idx="12">
-                  <c:v>22</c:v>
-                </c:pt>
-                <c:pt idx="13">
-                  <c:v>23</c:v>
-                </c:pt>
-                <c:pt idx="14">
-                  <c:v>24</c:v>
-                </c:pt>
-                <c:pt idx="15">
-                  <c:v>25</c:v>
+                  <c:v>50</c:v>
                 </c:pt>
               </c:numCache>
             </c:numRef>
-          </c:cat>
-          <c:val>
+          </c:xVal>
+          <c:yVal>
             <c:numRef>
-              <c:f>'LP Policy Evaluation'!$G$7:$G$22</c:f>
+              <c:f>'LP Policy Evaluation'!$C$27:$C$28</c:f>
               <c:numCache>
                 <c:formatCode>0.00</c:formatCode>
-                <c:ptCount val="16"/>
+                <c:ptCount val="2"/>
                 <c:pt idx="0">
-                  <c:v>15.263157894736848</c:v>
+                  <c:v>10.526315789473687</c:v>
                 </c:pt>
                 <c:pt idx="1">
-                  <c:v>15.736842105263163</c:v>
-                </c:pt>
-                <c:pt idx="2">
-                  <c:v>16.21052631578948</c:v>
-                </c:pt>
-                <c:pt idx="3">
-                  <c:v>16.684210526315795</c:v>
-                </c:pt>
-                <c:pt idx="4">
-                  <c:v>17.15789473684211</c:v>
-                </c:pt>
-                <c:pt idx="5">
-                  <c:v>17.631578947368425</c:v>
-                </c:pt>
-                <c:pt idx="6">
-                  <c:v>18.105263157894743</c:v>
-                </c:pt>
-                <c:pt idx="7">
-                  <c:v>18.578947368421058</c:v>
-                </c:pt>
-                <c:pt idx="8">
-                  <c:v>19.052631578947373</c:v>
-                </c:pt>
-                <c:pt idx="9">
-                  <c:v>19.526315789473689</c:v>
-                </c:pt>
-                <c:pt idx="10">
-                  <c:v>20.000000000000007</c:v>
-                </c:pt>
-                <c:pt idx="11">
-                  <c:v>20.473684210526322</c:v>
-                </c:pt>
-                <c:pt idx="12">
-                  <c:v>20.947368421052641</c:v>
-                </c:pt>
-                <c:pt idx="13">
-                  <c:v>21.421052631578956</c:v>
-                </c:pt>
-                <c:pt idx="14">
-                  <c:v>21.894736842105271</c:v>
-                </c:pt>
-                <c:pt idx="15">
-                  <c:v>22.368421052631586</c:v>
+                  <c:v>34.210526315789487</c:v>
                 </c:pt>
               </c:numCache>
             </c:numRef>
-          </c:val>
+          </c:yVal>
           <c:smooth val="0"/>
           <c:extLst>
             <c:ext xmlns:c16="http://schemas.microsoft.com/office/drawing/2014/chart" uri="{C3380CC4-5D6E-409C-BE32-E72D297353CC}">
-              <c16:uniqueId val="{00000001-F007-4291-B431-AD94702AE9CD}"/>
+              <c16:uniqueId val="{00000001-1978-4693-9BC9-F3EBFFE6FCF1}"/>
             </c:ext>
           </c:extLst>
         </c:ser>
@@ -575,17 +412,31 @@
           <c:showPercent val="0"/>
           <c:showBubbleSize val="0"/>
         </c:dLbls>
-        <c:smooth val="0"/>
         <c:axId val="938217840"/>
         <c:axId val="1015613472"/>
-      </c:lineChart>
-      <c:catAx>
+      </c:scatterChart>
+      <c:valAx>
         <c:axId val="938217840"/>
         <c:scaling>
           <c:orientation val="minMax"/>
+          <c:max val="40"/>
         </c:scaling>
         <c:delete val="0"/>
         <c:axPos val="b"/>
+        <c:majorGridlines>
+          <c:spPr>
+            <a:ln w="9525" cap="flat" cmpd="sng" algn="ctr">
+              <a:solidFill>
+                <a:schemeClr val="tx1">
+                  <a:lumMod val="15000"/>
+                  <a:lumOff val="85000"/>
+                </a:schemeClr>
+              </a:solidFill>
+              <a:round/>
+            </a:ln>
+            <a:effectLst/>
+          </c:spPr>
+        </c:majorGridlines>
         <c:title>
           <c:tx>
             <c:rich>
@@ -641,7 +492,7 @@
             </a:p>
           </c:txPr>
         </c:title>
-        <c:numFmt formatCode="0.0" sourceLinked="1"/>
+        <c:numFmt formatCode="0.00" sourceLinked="1"/>
         <c:majorTickMark val="none"/>
         <c:minorTickMark val="none"/>
         <c:tickLblPos val="nextTo"/>
@@ -650,8 +501,8 @@
           <a:ln w="9525" cap="flat" cmpd="sng" algn="ctr">
             <a:solidFill>
               <a:schemeClr val="tx1">
-                <a:lumMod val="15000"/>
-                <a:lumOff val="85000"/>
+                <a:lumMod val="25000"/>
+                <a:lumOff val="75000"/>
               </a:schemeClr>
             </a:solidFill>
             <a:round/>
@@ -680,15 +531,14 @@
         </c:txPr>
         <c:crossAx val="1015613472"/>
         <c:crosses val="autoZero"/>
-        <c:auto val="1"/>
-        <c:lblAlgn val="ctr"/>
-        <c:lblOffset val="100"/>
-        <c:noMultiLvlLbl val="0"/>
-      </c:catAx>
+        <c:crossBetween val="midCat"/>
+      </c:valAx>
       <c:valAx>
         <c:axId val="1015613472"/>
         <c:scaling>
           <c:orientation val="minMax"/>
+          <c:max val="40"/>
+          <c:min val="0"/>
         </c:scaling>
         <c:delete val="0"/>
         <c:axPos val="l"/>
@@ -767,8 +617,14 @@
         <c:tickLblPos val="nextTo"/>
         <c:spPr>
           <a:noFill/>
-          <a:ln>
-            <a:noFill/>
+          <a:ln w="9525" cap="flat" cmpd="sng" algn="ctr">
+            <a:solidFill>
+              <a:schemeClr val="tx1">
+                <a:lumMod val="25000"/>
+                <a:lumOff val="75000"/>
+              </a:schemeClr>
+            </a:solidFill>
+            <a:round/>
           </a:ln>
           <a:effectLst/>
         </c:spPr>
@@ -794,7 +650,8 @@
         </c:txPr>
         <c:crossAx val="938217840"/>
         <c:crosses val="autoZero"/>
-        <c:crossBetween val="between"/>
+        <c:crossBetween val="midCat"/>
+        <c:majorUnit val="10"/>
       </c:valAx>
       <c:spPr>
         <a:noFill/>
@@ -806,16 +663,6 @@
     </c:plotArea>
     <c:legend>
       <c:legendPos val="b"/>
-      <c:layout>
-        <c:manualLayout>
-          <c:xMode val="edge"/>
-          <c:yMode val="edge"/>
-          <c:x val="0.13418345972776227"/>
-          <c:y val="0.87674603548807883"/>
-          <c:w val="0.73163280402065634"/>
-          <c:h val="6.7365740959026824E-2"/>
-        </c:manualLayout>
-      </c:layout>
       <c:overlay val="0"/>
       <c:spPr>
         <a:noFill/>
@@ -913,7 +760,7 @@
 </file>
 
 <file path=ppt/charts/style1.xml><?xml version="1.0" encoding="utf-8"?>
-<cs:chartStyle xmlns:cs="http://schemas.microsoft.com/office/drawing/2012/chartStyle" xmlns:a="http://schemas.openxmlformats.org/drawingml/2006/main" id="227">
+<cs:chartStyle xmlns:cs="http://schemas.microsoft.com/office/drawing/2012/chartStyle" xmlns:a="http://schemas.openxmlformats.org/drawingml/2006/main" id="240">
   <cs:axisTitle>
     <cs:lnRef idx="0"/>
     <cs:fillRef idx="0"/>
@@ -940,8 +787,8 @@
       <a:ln w="9525" cap="flat" cmpd="sng" algn="ctr">
         <a:solidFill>
           <a:schemeClr val="tx1">
-            <a:lumMod val="15000"/>
-            <a:lumOff val="85000"/>
+            <a:lumMod val="25000"/>
+            <a:lumOff val="75000"/>
           </a:schemeClr>
         </a:solidFill>
         <a:round/>
@@ -1021,11 +868,6 @@
     <cs:fontRef idx="minor">
       <a:schemeClr val="tx1"/>
     </cs:fontRef>
-    <cs:spPr>
-      <a:solidFill>
-        <a:schemeClr val="phClr"/>
-      </a:solidFill>
-    </cs:spPr>
   </cs:dataPoint>
   <cs:dataPoint3D>
     <cs:lnRef idx="0"/>
@@ -1036,11 +878,6 @@
     <cs:fontRef idx="minor">
       <a:schemeClr val="tx1"/>
     </cs:fontRef>
-    <cs:spPr>
-      <a:solidFill>
-        <a:schemeClr val="phClr"/>
-      </a:solidFill>
-    </cs:spPr>
   </cs:dataPoint3D>
   <cs:dataPointLine>
     <cs:lnRef idx="0">
@@ -1052,7 +889,7 @@
       <a:schemeClr val="tx1"/>
     </cs:fontRef>
     <cs:spPr>
-      <a:ln w="28575" cap="rnd">
+      <a:ln w="19050" cap="rnd">
         <a:solidFill>
           <a:schemeClr val="phClr"/>
         </a:solidFill>
@@ -1072,9 +909,6 @@
       <a:schemeClr val="tx1"/>
     </cs:fontRef>
     <cs:spPr>
-      <a:solidFill>
-        <a:schemeClr val="phClr"/>
-      </a:solidFill>
       <a:ln w="9525">
         <a:solidFill>
           <a:schemeClr val="phClr"/>
@@ -1087,10 +921,10 @@
     <cs:lnRef idx="0">
       <cs:styleClr val="auto"/>
     </cs:lnRef>
-    <cs:fillRef idx="1"/>
+    <cs:fillRef idx="0"/>
     <cs:effectRef idx="0"/>
     <cs:fontRef idx="minor">
-      <a:schemeClr val="tx1"/>
+      <a:schemeClr val="dk1"/>
     </cs:fontRef>
     <cs:spPr>
       <a:ln w="9525" cap="rnd">
@@ -1130,22 +964,23 @@
     <cs:fillRef idx="0"/>
     <cs:effectRef idx="0"/>
     <cs:fontRef idx="minor">
-      <a:schemeClr val="dk1"/>
+      <a:schemeClr val="tx1"/>
     </cs:fontRef>
     <cs:spPr>
       <a:solidFill>
         <a:schemeClr val="dk1">
-          <a:lumMod val="65000"/>
-          <a:lumOff val="35000"/>
+          <a:lumMod val="75000"/>
+          <a:lumOff val="25000"/>
         </a:schemeClr>
       </a:solidFill>
-      <a:ln w="9525">
+      <a:ln w="9525" cap="flat" cmpd="sng" algn="ctr">
         <a:solidFill>
           <a:schemeClr val="tx1">
             <a:lumMod val="65000"/>
             <a:lumOff val="35000"/>
           </a:schemeClr>
         </a:solidFill>
+        <a:round/>
       </a:ln>
     </cs:spPr>
   </cs:downBar>
@@ -1250,8 +1085,8 @@
       <a:ln w="9525" cap="flat" cmpd="sng" algn="ctr">
         <a:solidFill>
           <a:schemeClr val="tx1">
-            <a:lumMod val="75000"/>
-            <a:lumOff val="25000"/>
+            <a:lumMod val="50000"/>
+            <a:lumOff val="50000"/>
           </a:schemeClr>
         </a:solidFill>
         <a:round/>
@@ -1383,19 +1218,20 @@
     <cs:fillRef idx="0"/>
     <cs:effectRef idx="0"/>
     <cs:fontRef idx="minor">
-      <a:schemeClr val="dk1"/>
+      <a:schemeClr val="tx1"/>
     </cs:fontRef>
     <cs:spPr>
       <a:solidFill>
         <a:schemeClr val="lt1"/>
       </a:solidFill>
-      <a:ln w="9525">
+      <a:ln w="9525" cap="flat" cmpd="sng" algn="ctr">
         <a:solidFill>
           <a:schemeClr val="tx1">
-            <a:lumMod val="15000"/>
-            <a:lumOff val="85000"/>
+            <a:lumMod val="65000"/>
+            <a:lumOff val="35000"/>
           </a:schemeClr>
         </a:solidFill>
+        <a:round/>
       </a:ln>
     </cs:spPr>
   </cs:upBar>
@@ -1409,6 +1245,17 @@
         <a:lumOff val="35000"/>
       </a:schemeClr>
     </cs:fontRef>
+    <cs:spPr>
+      <a:ln w="9525" cap="flat" cmpd="sng" algn="ctr">
+        <a:solidFill>
+          <a:schemeClr val="tx1">
+            <a:lumMod val="25000"/>
+            <a:lumOff val="75000"/>
+          </a:schemeClr>
+        </a:solidFill>
+        <a:round/>
+      </a:ln>
+    </cs:spPr>
     <cs:defRPr sz="900" kern="1200"/>
   </cs:valueAxis>
   <cs:wall>
@@ -1575,7 +1422,7 @@
           <a:p>
             <a:fld id="{3E22BF2E-04DA-469E-97C5-BB68A0368813}" type="datetimeFigureOut">
               <a:rPr lang="en-US" smtClean="0"/>
-              <a:t>9/12/2026</a:t>
+              <a:t>9/18/2026</a:t>
             </a:fld>
             <a:endParaRPr lang="en-US"/>
           </a:p>
@@ -1773,7 +1620,7 @@
           <a:p>
             <a:fld id="{3E22BF2E-04DA-469E-97C5-BB68A0368813}" type="datetimeFigureOut">
               <a:rPr lang="en-US" smtClean="0"/>
-              <a:t>9/12/2026</a:t>
+              <a:t>9/18/2026</a:t>
             </a:fld>
             <a:endParaRPr lang="en-US"/>
           </a:p>
@@ -1981,7 +1828,7 @@
           <a:p>
             <a:fld id="{3E22BF2E-04DA-469E-97C5-BB68A0368813}" type="datetimeFigureOut">
               <a:rPr lang="en-US" smtClean="0"/>
-              <a:t>9/12/2026</a:t>
+              <a:t>9/18/2026</a:t>
             </a:fld>
             <a:endParaRPr lang="en-US"/>
           </a:p>
@@ -2189,7 +2036,7 @@
           <a:p>
             <a:fld id="{3E22BF2E-04DA-469E-97C5-BB68A0368813}" type="datetimeFigureOut">
               <a:rPr lang="en-US" smtClean="0"/>
-              <a:t>9/12/2026</a:t>
+              <a:t>9/18/2026</a:t>
             </a:fld>
             <a:endParaRPr lang="en-US"/>
           </a:p>
@@ -2464,7 +2311,7 @@
           <a:p>
             <a:fld id="{3E22BF2E-04DA-469E-97C5-BB68A0368813}" type="datetimeFigureOut">
               <a:rPr lang="en-US" smtClean="0"/>
-              <a:t>9/12/2026</a:t>
+              <a:t>9/18/2026</a:t>
             </a:fld>
             <a:endParaRPr lang="en-US"/>
           </a:p>
@@ -2729,7 +2576,7 @@
           <a:p>
             <a:fld id="{3E22BF2E-04DA-469E-97C5-BB68A0368813}" type="datetimeFigureOut">
               <a:rPr lang="en-US" smtClean="0"/>
-              <a:t>9/12/2026</a:t>
+              <a:t>9/18/2026</a:t>
             </a:fld>
             <a:endParaRPr lang="en-US"/>
           </a:p>
@@ -3141,7 +2988,7 @@
           <a:p>
             <a:fld id="{3E22BF2E-04DA-469E-97C5-BB68A0368813}" type="datetimeFigureOut">
               <a:rPr lang="en-US" smtClean="0"/>
-              <a:t>9/12/2026</a:t>
+              <a:t>9/18/2026</a:t>
             </a:fld>
             <a:endParaRPr lang="en-US"/>
           </a:p>
@@ -3282,7 +3129,7 @@
           <a:p>
             <a:fld id="{3E22BF2E-04DA-469E-97C5-BB68A0368813}" type="datetimeFigureOut">
               <a:rPr lang="en-US" smtClean="0"/>
-              <a:t>9/12/2026</a:t>
+              <a:t>9/18/2026</a:t>
             </a:fld>
             <a:endParaRPr lang="en-US"/>
           </a:p>
@@ -3395,7 +3242,7 @@
           <a:p>
             <a:fld id="{3E22BF2E-04DA-469E-97C5-BB68A0368813}" type="datetimeFigureOut">
               <a:rPr lang="en-US" smtClean="0"/>
-              <a:t>9/12/2026</a:t>
+              <a:t>9/18/2026</a:t>
             </a:fld>
             <a:endParaRPr lang="en-US"/>
           </a:p>
@@ -3706,7 +3553,7 @@
           <a:p>
             <a:fld id="{3E22BF2E-04DA-469E-97C5-BB68A0368813}" type="datetimeFigureOut">
               <a:rPr lang="en-US" smtClean="0"/>
-              <a:t>9/12/2026</a:t>
+              <a:t>9/18/2026</a:t>
             </a:fld>
             <a:endParaRPr lang="en-US"/>
           </a:p>
@@ -3994,7 +3841,7 @@
           <a:p>
             <a:fld id="{3E22BF2E-04DA-469E-97C5-BB68A0368813}" type="datetimeFigureOut">
               <a:rPr lang="en-US" smtClean="0"/>
-              <a:t>9/12/2026</a:t>
+              <a:t>9/18/2026</a:t>
             </a:fld>
             <a:endParaRPr lang="en-US"/>
           </a:p>
@@ -4235,7 +4082,7 @@
           <a:p>
             <a:fld id="{3E22BF2E-04DA-469E-97C5-BB68A0368813}" type="datetimeFigureOut">
               <a:rPr lang="en-US" smtClean="0"/>
-              <a:t>9/12/2026</a:t>
+              <a:t>9/18/2026</a:t>
             </a:fld>
             <a:endParaRPr lang="en-US"/>
           </a:p>
@@ -8320,8 +8167,8 @@
           </a:p>
         </p:txBody>
       </p:sp>
-      <mc:AlternateContent xmlns:mc="http://schemas.openxmlformats.org/markup-compatibility/2006">
-        <mc:Choice xmlns:a14="http://schemas.microsoft.com/office/drawing/2010/main" Requires="a14">
+      <mc:AlternateContent xmlns:mc="http://schemas.openxmlformats.org/markup-compatibility/2006" xmlns:a14="http://schemas.microsoft.com/office/drawing/2010/main">
+        <mc:Choice Requires="a14">
           <p:sp>
             <p:nvSpPr>
               <p:cNvPr id="3" name="Content Placeholder 2">
@@ -9435,7 +9282,7 @@
             </p:txBody>
           </p:sp>
         </mc:Choice>
-        <mc:Fallback>
+        <mc:Fallback xmlns="">
           <p:sp>
             <p:nvSpPr>
               <p:cNvPr id="3" name="Content Placeholder 2">
@@ -13674,8 +13521,8 @@
           </a:p>
         </p:txBody>
       </p:sp>
-      <mc:AlternateContent xmlns:mc="http://schemas.openxmlformats.org/markup-compatibility/2006" xmlns:a14="http://schemas.microsoft.com/office/drawing/2010/main">
-        <mc:Choice Requires="a14">
+      <mc:AlternateContent xmlns:mc="http://schemas.openxmlformats.org/markup-compatibility/2006">
+        <mc:Choice xmlns:a14="http://schemas.microsoft.com/office/drawing/2010/main" Requires="a14">
           <p:sp>
             <p:nvSpPr>
               <p:cNvPr id="5" name="Content Placeholder 4">
@@ -13692,48 +13539,25 @@
                 <p:ph idx="1"/>
               </p:nvPr>
             </p:nvSpPr>
-            <p:spPr/>
+            <p:spPr>
+              <a:xfrm>
+                <a:off x="917896" y="3181599"/>
+                <a:ext cx="10965110" cy="3164674"/>
+              </a:xfrm>
+            </p:spPr>
             <p:txBody>
               <a:bodyPr>
-                <a:normAutofit fontScale="77500" lnSpcReduction="20000"/>
+                <a:normAutofit fontScale="62500" lnSpcReduction="20000"/>
               </a:bodyPr>
               <a:lstStyle/>
               <a:p>
                 <a:r>
                   <a:rPr lang="en-US" b="1" dirty="0"/>
-                  <a:t>Goal</a:t>
+                  <a:t>Greedy policy improvement</a:t>
                 </a:r>
                 <a:r>
                   <a:rPr lang="en-US" dirty="0"/>
-                  <a:t>: Find a better policy.</a:t>
-                </a:r>
-              </a:p>
-              <a:p>
-                <a:endParaRPr lang="en-US" dirty="0"/>
-              </a:p>
-              <a:p>
-                <a:endParaRPr lang="en-US" dirty="0"/>
-              </a:p>
-              <a:p>
-                <a:endParaRPr lang="en-US" dirty="0"/>
-              </a:p>
-              <a:p>
-                <a:endParaRPr lang="en-US" dirty="0"/>
-              </a:p>
-              <a:p>
-                <a:endParaRPr lang="en-US" dirty="0"/>
-              </a:p>
-              <a:p>
-                <a:endParaRPr lang="en-US" dirty="0"/>
-              </a:p>
-              <a:p>
-                <a:r>
-                  <a:rPr lang="en-US" b="1" dirty="0"/>
-                  <a:t>Policy improvement</a:t>
-                </a:r>
-                <a:r>
-                  <a:rPr lang="en-US" dirty="0"/>
-                  <a:t>: creating a new policy </a:t>
+                  <a:t>: create a new policy </a:t>
                 </a:r>
                 <a14:m>
                   <m:oMath xmlns:m="http://schemas.openxmlformats.org/officeDocument/2006/math">
@@ -13817,8 +13641,9 @@
                   <a:rPr lang="en-US" dirty="0"/>
                   <a:t>. </a:t>
                 </a:r>
-              </a:p>
-              <a:p>
+                <a:br>
+                  <a:rPr lang="en-US" dirty="0"/>
+                </a:br>
                 <a:endParaRPr lang="en-US" dirty="0"/>
               </a:p>
               <a:p>
@@ -14036,10 +13861,739 @@
                   <a:t> is already optimal.</a:t>
                 </a:r>
               </a:p>
+              <a:p>
+                <a:r>
+                  <a:rPr lang="en-US" b="1" dirty="0"/>
+                  <a:t>Proof</a:t>
+                </a:r>
+                <a:r>
+                  <a:rPr lang="en-US" dirty="0"/>
+                  <a:t>:</a:t>
+                </a:r>
+                <a:br>
+                  <a:rPr lang="en-US" dirty="0"/>
+                </a:br>
+                <a14:m>
+                  <m:oMath xmlns:m="http://schemas.openxmlformats.org/officeDocument/2006/math">
+                    <m:sSub>
+                      <m:sSubPr>
+                        <m:ctrlPr>
+                          <a:rPr lang="en-US" i="1">
+                            <a:latin typeface="Cambria Math" panose="02040503050406030204" pitchFamily="18" charset="0"/>
+                          </a:rPr>
+                        </m:ctrlPr>
+                      </m:sSubPr>
+                      <m:e>
+                        <m:r>
+                          <a:rPr lang="en-US" i="1">
+                            <a:latin typeface="Cambria Math" panose="02040503050406030204" pitchFamily="18" charset="0"/>
+                          </a:rPr>
+                          <m:t>𝑣</m:t>
+                        </m:r>
+                      </m:e>
+                      <m:sub>
+                        <m:sSub>
+                          <m:sSubPr>
+                            <m:ctrlPr>
+                              <a:rPr lang="en-US" i="1">
+                                <a:latin typeface="Cambria Math" panose="02040503050406030204" pitchFamily="18" charset="0"/>
+                              </a:rPr>
+                            </m:ctrlPr>
+                          </m:sSubPr>
+                          <m:e>
+                            <m:r>
+                              <a:rPr lang="en-US" i="1">
+                                <a:latin typeface="Cambria Math" panose="02040503050406030204" pitchFamily="18" charset="0"/>
+                              </a:rPr>
+                              <m:t>𝜋</m:t>
+                            </m:r>
+                          </m:e>
+                          <m:sub>
+                            <m:r>
+                              <a:rPr lang="en-US" i="1">
+                                <a:latin typeface="Cambria Math" panose="02040503050406030204" pitchFamily="18" charset="0"/>
+                              </a:rPr>
+                              <m:t>𝑘</m:t>
+                            </m:r>
+                            <m:r>
+                              <a:rPr lang="en-US" i="1">
+                                <a:latin typeface="Cambria Math" panose="02040503050406030204" pitchFamily="18" charset="0"/>
+                              </a:rPr>
+                              <m:t>+1</m:t>
+                            </m:r>
+                          </m:sub>
+                        </m:sSub>
+                      </m:sub>
+                    </m:sSub>
+                    <m:d>
+                      <m:dPr>
+                        <m:ctrlPr>
+                          <a:rPr lang="en-US" i="1">
+                            <a:latin typeface="Cambria Math" panose="02040503050406030204" pitchFamily="18" charset="0"/>
+                          </a:rPr>
+                        </m:ctrlPr>
+                      </m:dPr>
+                      <m:e>
+                        <m:r>
+                          <a:rPr lang="en-US" i="1">
+                            <a:latin typeface="Cambria Math" panose="02040503050406030204" pitchFamily="18" charset="0"/>
+                          </a:rPr>
+                          <m:t>𝑠</m:t>
+                        </m:r>
+                      </m:e>
+                    </m:d>
+                    <m:r>
+                      <a:rPr lang="en-US" i="1">
+                        <a:latin typeface="Cambria Math" panose="02040503050406030204" pitchFamily="18" charset="0"/>
+                      </a:rPr>
+                      <m:t>=</m:t>
+                    </m:r>
+                    <m:sSub>
+                      <m:sSubPr>
+                        <m:ctrlPr>
+                          <a:rPr lang="en-US" i="1">
+                            <a:latin typeface="Cambria Math" panose="02040503050406030204" pitchFamily="18" charset="0"/>
+                          </a:rPr>
+                        </m:ctrlPr>
+                      </m:sSubPr>
+                      <m:e>
+                        <m:r>
+                          <a:rPr lang="en-US" i="1">
+                            <a:latin typeface="Cambria Math" panose="02040503050406030204" pitchFamily="18" charset="0"/>
+                          </a:rPr>
+                          <m:t>𝑞</m:t>
+                        </m:r>
+                      </m:e>
+                      <m:sub>
+                        <m:sSub>
+                          <m:sSubPr>
+                            <m:ctrlPr>
+                              <a:rPr lang="en-US" i="1">
+                                <a:latin typeface="Cambria Math" panose="02040503050406030204" pitchFamily="18" charset="0"/>
+                              </a:rPr>
+                            </m:ctrlPr>
+                          </m:sSubPr>
+                          <m:e>
+                            <m:r>
+                              <a:rPr lang="en-US" i="1">
+                                <a:latin typeface="Cambria Math" panose="02040503050406030204" pitchFamily="18" charset="0"/>
+                              </a:rPr>
+                              <m:t>𝜋</m:t>
+                            </m:r>
+                          </m:e>
+                          <m:sub>
+                            <m:r>
+                              <a:rPr lang="en-US" i="1">
+                                <a:latin typeface="Cambria Math" panose="02040503050406030204" pitchFamily="18" charset="0"/>
+                              </a:rPr>
+                              <m:t>𝑘</m:t>
+                            </m:r>
+                          </m:sub>
+                        </m:sSub>
+                      </m:sub>
+                    </m:sSub>
+                    <m:d>
+                      <m:dPr>
+                        <m:ctrlPr>
+                          <a:rPr lang="en-US" i="1">
+                            <a:latin typeface="Cambria Math" panose="02040503050406030204" pitchFamily="18" charset="0"/>
+                          </a:rPr>
+                        </m:ctrlPr>
+                      </m:dPr>
+                      <m:e>
+                        <m:r>
+                          <a:rPr lang="en-US" i="1">
+                            <a:latin typeface="Cambria Math" panose="02040503050406030204" pitchFamily="18" charset="0"/>
+                          </a:rPr>
+                          <m:t>𝑠</m:t>
+                        </m:r>
+                        <m:r>
+                          <a:rPr lang="en-US" i="1">
+                            <a:latin typeface="Cambria Math" panose="02040503050406030204" pitchFamily="18" charset="0"/>
+                          </a:rPr>
+                          <m:t>, </m:t>
+                        </m:r>
+                        <m:sSub>
+                          <m:sSubPr>
+                            <m:ctrlPr>
+                              <a:rPr lang="en-US" i="1">
+                                <a:latin typeface="Cambria Math" panose="02040503050406030204" pitchFamily="18" charset="0"/>
+                              </a:rPr>
+                            </m:ctrlPr>
+                          </m:sSubPr>
+                          <m:e>
+                            <m:r>
+                              <a:rPr lang="en-US" i="1">
+                                <a:latin typeface="Cambria Math" panose="02040503050406030204" pitchFamily="18" charset="0"/>
+                              </a:rPr>
+                              <m:t>𝜋</m:t>
+                            </m:r>
+                          </m:e>
+                          <m:sub>
+                            <m:r>
+                              <a:rPr lang="en-US" i="1">
+                                <a:latin typeface="Cambria Math" panose="02040503050406030204" pitchFamily="18" charset="0"/>
+                              </a:rPr>
+                              <m:t>𝑘</m:t>
+                            </m:r>
+                            <m:r>
+                              <a:rPr lang="en-US" i="1">
+                                <a:latin typeface="Cambria Math" panose="02040503050406030204" pitchFamily="18" charset="0"/>
+                              </a:rPr>
+                              <m:t>+1</m:t>
+                            </m:r>
+                          </m:sub>
+                        </m:sSub>
+                        <m:d>
+                          <m:dPr>
+                            <m:ctrlPr>
+                              <a:rPr lang="en-US" i="1">
+                                <a:latin typeface="Cambria Math" panose="02040503050406030204" pitchFamily="18" charset="0"/>
+                              </a:rPr>
+                            </m:ctrlPr>
+                          </m:dPr>
+                          <m:e>
+                            <m:r>
+                              <a:rPr lang="en-US" i="1">
+                                <a:latin typeface="Cambria Math" panose="02040503050406030204" pitchFamily="18" charset="0"/>
+                              </a:rPr>
+                              <m:t>𝑠</m:t>
+                            </m:r>
+                          </m:e>
+                        </m:d>
+                      </m:e>
+                    </m:d>
+                    <m:r>
+                      <m:rPr>
+                        <m:aln/>
+                      </m:rPr>
+                      <a:rPr lang="en-US" i="1">
+                        <a:latin typeface="Cambria Math" panose="02040503050406030204" pitchFamily="18" charset="0"/>
+                      </a:rPr>
+                      <m:t>=</m:t>
+                    </m:r>
+                    <m:sSub>
+                      <m:sSubPr>
+                        <m:ctrlPr>
+                          <a:rPr lang="en-US" i="1">
+                            <a:latin typeface="Cambria Math" panose="02040503050406030204" pitchFamily="18" charset="0"/>
+                          </a:rPr>
+                        </m:ctrlPr>
+                      </m:sSubPr>
+                      <m:e>
+                        <m:r>
+                          <a:rPr lang="en-US" i="1">
+                            <a:latin typeface="Cambria Math" panose="02040503050406030204" pitchFamily="18" charset="0"/>
+                          </a:rPr>
+                          <m:t>𝑞</m:t>
+                        </m:r>
+                      </m:e>
+                      <m:sub>
+                        <m:sSub>
+                          <m:sSubPr>
+                            <m:ctrlPr>
+                              <a:rPr lang="en-US" i="1">
+                                <a:latin typeface="Cambria Math" panose="02040503050406030204" pitchFamily="18" charset="0"/>
+                              </a:rPr>
+                            </m:ctrlPr>
+                          </m:sSubPr>
+                          <m:e>
+                            <m:r>
+                              <a:rPr lang="en-US" i="1">
+                                <a:latin typeface="Cambria Math" panose="02040503050406030204" pitchFamily="18" charset="0"/>
+                              </a:rPr>
+                              <m:t>𝜋</m:t>
+                            </m:r>
+                          </m:e>
+                          <m:sub>
+                            <m:r>
+                              <a:rPr lang="en-US" i="1">
+                                <a:latin typeface="Cambria Math" panose="02040503050406030204" pitchFamily="18" charset="0"/>
+                              </a:rPr>
+                              <m:t>𝑘</m:t>
+                            </m:r>
+                          </m:sub>
+                        </m:sSub>
+                      </m:sub>
+                    </m:sSub>
+                    <m:r>
+                      <a:rPr lang="en-US" i="1">
+                        <a:latin typeface="Cambria Math" panose="02040503050406030204" pitchFamily="18" charset="0"/>
+                      </a:rPr>
+                      <m:t>(</m:t>
+                    </m:r>
+                    <m:r>
+                      <a:rPr lang="en-US" i="1">
+                        <a:latin typeface="Cambria Math" panose="02040503050406030204" pitchFamily="18" charset="0"/>
+                      </a:rPr>
+                      <m:t>𝑠</m:t>
+                    </m:r>
+                    <m:r>
+                      <a:rPr lang="en-US" i="1">
+                        <a:latin typeface="Cambria Math" panose="02040503050406030204" pitchFamily="18" charset="0"/>
+                      </a:rPr>
+                      <m:t>, </m:t>
+                    </m:r>
+                    <m:func>
+                      <m:funcPr>
+                        <m:ctrlPr>
+                          <a:rPr lang="en-US" i="1">
+                            <a:latin typeface="Cambria Math" panose="02040503050406030204" pitchFamily="18" charset="0"/>
+                          </a:rPr>
+                        </m:ctrlPr>
+                      </m:funcPr>
+                      <m:fName>
+                        <m:limLow>
+                          <m:limLowPr>
+                            <m:ctrlPr>
+                              <a:rPr lang="en-US">
+                                <a:latin typeface="Cambria Math" panose="02040503050406030204" pitchFamily="18" charset="0"/>
+                              </a:rPr>
+                            </m:ctrlPr>
+                          </m:limLowPr>
+                          <m:e>
+                            <m:r>
+                              <m:rPr>
+                                <m:sty m:val="p"/>
+                              </m:rPr>
+                              <a:rPr lang="en-US">
+                                <a:latin typeface="Cambria Math" panose="02040503050406030204" pitchFamily="18" charset="0"/>
+                              </a:rPr>
+                              <m:t>argmax</m:t>
+                            </m:r>
+                          </m:e>
+                          <m:lim>
+                            <m:r>
+                              <a:rPr lang="en-US" i="1">
+                                <a:latin typeface="Cambria Math" panose="02040503050406030204" pitchFamily="18" charset="0"/>
+                              </a:rPr>
+                              <m:t>𝑎</m:t>
+                            </m:r>
+                          </m:lim>
+                        </m:limLow>
+                      </m:fName>
+                      <m:e>
+                        <m:sSub>
+                          <m:sSubPr>
+                            <m:ctrlPr>
+                              <a:rPr lang="en-US" i="1">
+                                <a:latin typeface="Cambria Math" panose="02040503050406030204" pitchFamily="18" charset="0"/>
+                              </a:rPr>
+                            </m:ctrlPr>
+                          </m:sSubPr>
+                          <m:e>
+                            <m:r>
+                              <a:rPr lang="en-US" i="1">
+                                <a:latin typeface="Cambria Math" panose="02040503050406030204" pitchFamily="18" charset="0"/>
+                              </a:rPr>
+                              <m:t>𝑞</m:t>
+                            </m:r>
+                          </m:e>
+                          <m:sub>
+                            <m:sSub>
+                              <m:sSubPr>
+                                <m:ctrlPr>
+                                  <a:rPr lang="en-US" i="1">
+                                    <a:latin typeface="Cambria Math" panose="02040503050406030204" pitchFamily="18" charset="0"/>
+                                  </a:rPr>
+                                </m:ctrlPr>
+                              </m:sSubPr>
+                              <m:e>
+                                <m:r>
+                                  <a:rPr lang="en-US" i="1">
+                                    <a:latin typeface="Cambria Math" panose="02040503050406030204" pitchFamily="18" charset="0"/>
+                                  </a:rPr>
+                                  <m:t>𝜋</m:t>
+                                </m:r>
+                              </m:e>
+                              <m:sub>
+                                <m:r>
+                                  <a:rPr lang="en-US" i="1">
+                                    <a:latin typeface="Cambria Math" panose="02040503050406030204" pitchFamily="18" charset="0"/>
+                                  </a:rPr>
+                                  <m:t>𝑘</m:t>
+                                </m:r>
+                              </m:sub>
+                            </m:sSub>
+                          </m:sub>
+                        </m:sSub>
+                        <m:d>
+                          <m:dPr>
+                            <m:ctrlPr>
+                              <a:rPr lang="en-US" i="1">
+                                <a:latin typeface="Cambria Math" panose="02040503050406030204" pitchFamily="18" charset="0"/>
+                              </a:rPr>
+                            </m:ctrlPr>
+                          </m:dPr>
+                          <m:e>
+                            <m:r>
+                              <a:rPr lang="en-US" i="1">
+                                <a:latin typeface="Cambria Math" panose="02040503050406030204" pitchFamily="18" charset="0"/>
+                              </a:rPr>
+                              <m:t>𝑠</m:t>
+                            </m:r>
+                            <m:r>
+                              <a:rPr lang="en-US" i="1">
+                                <a:latin typeface="Cambria Math" panose="02040503050406030204" pitchFamily="18" charset="0"/>
+                              </a:rPr>
+                              <m:t>,</m:t>
+                            </m:r>
+                            <m:r>
+                              <a:rPr lang="en-US" i="1">
+                                <a:latin typeface="Cambria Math" panose="02040503050406030204" pitchFamily="18" charset="0"/>
+                              </a:rPr>
+                              <m:t>𝑎</m:t>
+                            </m:r>
+                          </m:e>
+                        </m:d>
+                      </m:e>
+                    </m:func>
+                    <m:r>
+                      <a:rPr lang="en-US" i="1">
+                        <a:latin typeface="Cambria Math" panose="02040503050406030204" pitchFamily="18" charset="0"/>
+                      </a:rPr>
+                      <m:t>)</m:t>
+                    </m:r>
+                  </m:oMath>
+                </a14:m>
+                <a:br>
+                  <a:rPr lang="en-US" i="1" dirty="0">
+                    <a:latin typeface="Cambria Math" panose="02040503050406030204" pitchFamily="18" charset="0"/>
+                  </a:rPr>
+                </a:br>
+                <a14:m>
+                  <m:oMath xmlns:m="http://schemas.openxmlformats.org/officeDocument/2006/math">
+                    <m:r>
+                      <m:rPr>
+                        <m:aln/>
+                      </m:rPr>
+                      <a:rPr lang="en-US" i="1">
+                        <a:latin typeface="Cambria Math" panose="02040503050406030204" pitchFamily="18" charset="0"/>
+                      </a:rPr>
+                      <m:t>=</m:t>
+                    </m:r>
+                    <m:limLow>
+                      <m:limLowPr>
+                        <m:ctrlPr>
+                          <a:rPr lang="en-US">
+                            <a:latin typeface="Cambria Math" panose="02040503050406030204" pitchFamily="18" charset="0"/>
+                          </a:rPr>
+                        </m:ctrlPr>
+                      </m:limLowPr>
+                      <m:e>
+                        <m:r>
+                          <m:rPr>
+                            <m:sty m:val="p"/>
+                          </m:rPr>
+                          <a:rPr lang="en-US">
+                            <a:latin typeface="Cambria Math" panose="02040503050406030204" pitchFamily="18" charset="0"/>
+                          </a:rPr>
+                          <m:t>max</m:t>
+                        </m:r>
+                      </m:e>
+                      <m:lim>
+                        <m:r>
+                          <a:rPr lang="en-US" i="1">
+                            <a:latin typeface="Cambria Math" panose="02040503050406030204" pitchFamily="18" charset="0"/>
+                          </a:rPr>
+                          <m:t>𝑎</m:t>
+                        </m:r>
+                      </m:lim>
+                    </m:limLow>
+                    <m:r>
+                      <a:rPr lang="en-US" i="1">
+                        <a:latin typeface="Cambria Math" panose="02040503050406030204" pitchFamily="18" charset="0"/>
+                      </a:rPr>
+                      <m:t> </m:t>
+                    </m:r>
+                    <m:sSub>
+                      <m:sSubPr>
+                        <m:ctrlPr>
+                          <a:rPr lang="en-US" i="1">
+                            <a:latin typeface="Cambria Math" panose="02040503050406030204" pitchFamily="18" charset="0"/>
+                          </a:rPr>
+                        </m:ctrlPr>
+                      </m:sSubPr>
+                      <m:e>
+                        <m:r>
+                          <a:rPr lang="en-US" i="1">
+                            <a:latin typeface="Cambria Math" panose="02040503050406030204" pitchFamily="18" charset="0"/>
+                          </a:rPr>
+                          <m:t>𝑞</m:t>
+                        </m:r>
+                      </m:e>
+                      <m:sub>
+                        <m:sSub>
+                          <m:sSubPr>
+                            <m:ctrlPr>
+                              <a:rPr lang="en-US" i="1">
+                                <a:latin typeface="Cambria Math" panose="02040503050406030204" pitchFamily="18" charset="0"/>
+                              </a:rPr>
+                            </m:ctrlPr>
+                          </m:sSubPr>
+                          <m:e>
+                            <m:r>
+                              <a:rPr lang="en-US" i="1">
+                                <a:latin typeface="Cambria Math" panose="02040503050406030204" pitchFamily="18" charset="0"/>
+                              </a:rPr>
+                              <m:t>𝜋</m:t>
+                            </m:r>
+                          </m:e>
+                          <m:sub>
+                            <m:r>
+                              <a:rPr lang="en-US" i="1">
+                                <a:latin typeface="Cambria Math" panose="02040503050406030204" pitchFamily="18" charset="0"/>
+                              </a:rPr>
+                              <m:t>𝑘</m:t>
+                            </m:r>
+                          </m:sub>
+                        </m:sSub>
+                      </m:sub>
+                    </m:sSub>
+                    <m:d>
+                      <m:dPr>
+                        <m:ctrlPr>
+                          <a:rPr lang="en-US" i="1">
+                            <a:latin typeface="Cambria Math" panose="02040503050406030204" pitchFamily="18" charset="0"/>
+                          </a:rPr>
+                        </m:ctrlPr>
+                      </m:dPr>
+                      <m:e>
+                        <m:r>
+                          <a:rPr lang="en-US" i="1">
+                            <a:latin typeface="Cambria Math" panose="02040503050406030204" pitchFamily="18" charset="0"/>
+                          </a:rPr>
+                          <m:t>𝑠</m:t>
+                        </m:r>
+                        <m:r>
+                          <a:rPr lang="en-US" i="1">
+                            <a:latin typeface="Cambria Math" panose="02040503050406030204" pitchFamily="18" charset="0"/>
+                          </a:rPr>
+                          <m:t>,</m:t>
+                        </m:r>
+                        <m:r>
+                          <a:rPr lang="en-US" i="1">
+                            <a:latin typeface="Cambria Math" panose="02040503050406030204" pitchFamily="18" charset="0"/>
+                          </a:rPr>
+                          <m:t>𝑎</m:t>
+                        </m:r>
+                      </m:e>
+                    </m:d>
+                  </m:oMath>
+                </a14:m>
+                <a:br>
+                  <a:rPr lang="en-US" i="1" dirty="0">
+                    <a:latin typeface="Cambria Math" panose="02040503050406030204" pitchFamily="18" charset="0"/>
+                  </a:rPr>
+                </a:br>
+                <a14:m>
+                  <m:oMath xmlns:m="http://schemas.openxmlformats.org/officeDocument/2006/math">
+                    <m:r>
+                      <m:rPr>
+                        <m:aln/>
+                      </m:rPr>
+                      <a:rPr lang="en-US" i="1">
+                        <a:latin typeface="Cambria Math" panose="02040503050406030204" pitchFamily="18" charset="0"/>
+                      </a:rPr>
+                      <m:t>≥</m:t>
+                    </m:r>
+                    <m:sSub>
+                      <m:sSubPr>
+                        <m:ctrlPr>
+                          <a:rPr lang="en-US" i="1">
+                            <a:latin typeface="Cambria Math" panose="02040503050406030204" pitchFamily="18" charset="0"/>
+                          </a:rPr>
+                        </m:ctrlPr>
+                      </m:sSubPr>
+                      <m:e>
+                        <m:r>
+                          <a:rPr lang="en-US" i="1">
+                            <a:latin typeface="Cambria Math" panose="02040503050406030204" pitchFamily="18" charset="0"/>
+                          </a:rPr>
+                          <m:t>𝑞</m:t>
+                        </m:r>
+                      </m:e>
+                      <m:sub>
+                        <m:sSub>
+                          <m:sSubPr>
+                            <m:ctrlPr>
+                              <a:rPr lang="en-US" i="1">
+                                <a:latin typeface="Cambria Math" panose="02040503050406030204" pitchFamily="18" charset="0"/>
+                              </a:rPr>
+                            </m:ctrlPr>
+                          </m:sSubPr>
+                          <m:e>
+                            <m:r>
+                              <a:rPr lang="en-US" i="1">
+                                <a:latin typeface="Cambria Math" panose="02040503050406030204" pitchFamily="18" charset="0"/>
+                              </a:rPr>
+                              <m:t>𝜋</m:t>
+                            </m:r>
+                          </m:e>
+                          <m:sub>
+                            <m:r>
+                              <a:rPr lang="en-US" i="1">
+                                <a:latin typeface="Cambria Math" panose="02040503050406030204" pitchFamily="18" charset="0"/>
+                              </a:rPr>
+                              <m:t>𝑘</m:t>
+                            </m:r>
+                          </m:sub>
+                        </m:sSub>
+                      </m:sub>
+                    </m:sSub>
+                    <m:d>
+                      <m:dPr>
+                        <m:ctrlPr>
+                          <a:rPr lang="en-US" i="1">
+                            <a:latin typeface="Cambria Math" panose="02040503050406030204" pitchFamily="18" charset="0"/>
+                          </a:rPr>
+                        </m:ctrlPr>
+                      </m:dPr>
+                      <m:e>
+                        <m:r>
+                          <a:rPr lang="en-US" i="1">
+                            <a:latin typeface="Cambria Math" panose="02040503050406030204" pitchFamily="18" charset="0"/>
+                          </a:rPr>
+                          <m:t>𝑠</m:t>
+                        </m:r>
+                        <m:r>
+                          <a:rPr lang="en-US" i="1">
+                            <a:latin typeface="Cambria Math" panose="02040503050406030204" pitchFamily="18" charset="0"/>
+                          </a:rPr>
+                          <m:t>,</m:t>
+                        </m:r>
+                        <m:sSub>
+                          <m:sSubPr>
+                            <m:ctrlPr>
+                              <a:rPr lang="en-US" i="1">
+                                <a:latin typeface="Cambria Math" panose="02040503050406030204" pitchFamily="18" charset="0"/>
+                              </a:rPr>
+                            </m:ctrlPr>
+                          </m:sSubPr>
+                          <m:e>
+                            <m:r>
+                              <a:rPr lang="en-US" i="1">
+                                <a:latin typeface="Cambria Math" panose="02040503050406030204" pitchFamily="18" charset="0"/>
+                              </a:rPr>
+                              <m:t>𝜋</m:t>
+                            </m:r>
+                          </m:e>
+                          <m:sub>
+                            <m:r>
+                              <a:rPr lang="en-US" i="1">
+                                <a:latin typeface="Cambria Math" panose="02040503050406030204" pitchFamily="18" charset="0"/>
+                              </a:rPr>
+                              <m:t>𝑘</m:t>
+                            </m:r>
+                          </m:sub>
+                        </m:sSub>
+                        <m:d>
+                          <m:dPr>
+                            <m:ctrlPr>
+                              <a:rPr lang="en-US" i="1">
+                                <a:latin typeface="Cambria Math" panose="02040503050406030204" pitchFamily="18" charset="0"/>
+                              </a:rPr>
+                            </m:ctrlPr>
+                          </m:dPr>
+                          <m:e>
+                            <m:r>
+                              <a:rPr lang="en-US" i="1">
+                                <a:latin typeface="Cambria Math" panose="02040503050406030204" pitchFamily="18" charset="0"/>
+                              </a:rPr>
+                              <m:t>𝑠</m:t>
+                            </m:r>
+                          </m:e>
+                        </m:d>
+                      </m:e>
+                    </m:d>
+                  </m:oMath>
+                </a14:m>
+                <a:br>
+                  <a:rPr lang="en-US" i="1" dirty="0">
+                    <a:latin typeface="Cambria Math" panose="02040503050406030204" pitchFamily="18" charset="0"/>
+                  </a:rPr>
+                </a:br>
+                <a14:m>
+                  <m:oMath xmlns:m="http://schemas.openxmlformats.org/officeDocument/2006/math">
+                    <m:r>
+                      <m:rPr>
+                        <m:aln/>
+                      </m:rPr>
+                      <a:rPr lang="en-US" i="1">
+                        <a:latin typeface="Cambria Math" panose="02040503050406030204" pitchFamily="18" charset="0"/>
+                      </a:rPr>
+                      <m:t>≥</m:t>
+                    </m:r>
+                    <m:sSub>
+                      <m:sSubPr>
+                        <m:ctrlPr>
+                          <a:rPr lang="en-US" i="1">
+                            <a:latin typeface="Cambria Math" panose="02040503050406030204" pitchFamily="18" charset="0"/>
+                          </a:rPr>
+                        </m:ctrlPr>
+                      </m:sSubPr>
+                      <m:e>
+                        <m:r>
+                          <a:rPr lang="en-US" i="1">
+                            <a:latin typeface="Cambria Math" panose="02040503050406030204" pitchFamily="18" charset="0"/>
+                          </a:rPr>
+                          <m:t>𝑣</m:t>
+                        </m:r>
+                      </m:e>
+                      <m:sub>
+                        <m:sSub>
+                          <m:sSubPr>
+                            <m:ctrlPr>
+                              <a:rPr lang="en-US" i="1">
+                                <a:latin typeface="Cambria Math" panose="02040503050406030204" pitchFamily="18" charset="0"/>
+                              </a:rPr>
+                            </m:ctrlPr>
+                          </m:sSubPr>
+                          <m:e>
+                            <m:r>
+                              <a:rPr lang="en-US" i="1">
+                                <a:latin typeface="Cambria Math" panose="02040503050406030204" pitchFamily="18" charset="0"/>
+                              </a:rPr>
+                              <m:t>𝜋</m:t>
+                            </m:r>
+                          </m:e>
+                          <m:sub>
+                            <m:r>
+                              <a:rPr lang="en-US" i="1">
+                                <a:latin typeface="Cambria Math" panose="02040503050406030204" pitchFamily="18" charset="0"/>
+                              </a:rPr>
+                              <m:t>𝑘</m:t>
+                            </m:r>
+                          </m:sub>
+                        </m:sSub>
+                      </m:sub>
+                    </m:sSub>
+                    <m:r>
+                      <a:rPr lang="en-US" i="1">
+                        <a:latin typeface="Cambria Math" panose="02040503050406030204" pitchFamily="18" charset="0"/>
+                      </a:rPr>
+                      <m:t>(</m:t>
+                    </m:r>
+                    <m:r>
+                      <a:rPr lang="en-US" i="1">
+                        <a:latin typeface="Cambria Math" panose="02040503050406030204" pitchFamily="18" charset="0"/>
+                      </a:rPr>
+                      <m:t>𝑠</m:t>
+                    </m:r>
+                    <m:r>
+                      <a:rPr lang="en-US" i="1">
+                        <a:latin typeface="Cambria Math" panose="02040503050406030204" pitchFamily="18" charset="0"/>
+                      </a:rPr>
+                      <m:t>)</m:t>
+                    </m:r>
+                  </m:oMath>
+                </a14:m>
+                <a:endParaRPr lang="en-US" dirty="0"/>
+              </a:p>
             </p:txBody>
           </p:sp>
         </mc:Choice>
-        <mc:Fallback xmlns="">
+        <mc:Fallback>
           <p:sp>
             <p:nvSpPr>
               <p:cNvPr id="5" name="Content Placeholder 4">
@@ -14057,10 +14611,14 @@
               </p:nvPr>
             </p:nvSpPr>
             <p:spPr>
+              <a:xfrm>
+                <a:off x="917896" y="3181599"/>
+                <a:ext cx="10965110" cy="3164674"/>
+              </a:xfrm>
               <a:blipFill>
                 <a:blip r:embed="rId2"/>
                 <a:stretch>
-                  <a:fillRect l="-696" t="-2551"/>
+                  <a:fillRect l="-389" t="-3083"/>
                 </a:stretch>
               </a:blipFill>
             </p:spPr>
@@ -14079,8 +14637,8 @@
           </p:sp>
         </mc:Fallback>
       </mc:AlternateContent>
-      <mc:AlternateContent xmlns:mc="http://schemas.openxmlformats.org/markup-compatibility/2006" xmlns:a14="http://schemas.microsoft.com/office/drawing/2010/main">
-        <mc:Choice Requires="a14">
+      <mc:AlternateContent xmlns:mc="http://schemas.openxmlformats.org/markup-compatibility/2006">
+        <mc:Choice xmlns:a14="http://schemas.microsoft.com/office/drawing/2010/main" Requires="a14">
           <p:sp>
             <p:nvSpPr>
               <p:cNvPr id="6" name="TextBox 5">
@@ -14095,8 +14653,8 @@
             </p:nvSpPr>
             <p:spPr>
               <a:xfrm>
-                <a:off x="838201" y="1897071"/>
-                <a:ext cx="10771682" cy="1670842"/>
+                <a:off x="976969" y="1396409"/>
+                <a:ext cx="10846964" cy="1512978"/>
               </a:xfrm>
               <a:prstGeom prst="rect">
                 <a:avLst/>
@@ -14124,12 +14682,12 @@
               <a:p>
                 <a:pPr algn="ctr"/>
                 <a:r>
-                  <a:rPr lang="en-US" sz="2000" b="1" dirty="0"/>
+                  <a:rPr lang="en-US" b="1" dirty="0"/>
                   <a:t>Policy Improvement Theorem</a:t>
                 </a:r>
               </a:p>
               <a:p>
-                <a:endParaRPr lang="en-US" sz="2000" dirty="0"/>
+                <a:endParaRPr lang="en-US" dirty="0"/>
               </a:p>
               <a:p>
                 <a:pPr/>
@@ -14139,14 +14697,14 @@
                       <m:sSub>
                         <m:sSubPr>
                           <m:ctrlPr>
-                            <a:rPr lang="en-US" sz="2000" b="0" i="1" smtClean="0">
+                            <a:rPr lang="en-US" b="0" i="1" smtClean="0">
                               <a:latin typeface="Cambria Math" panose="02040503050406030204" pitchFamily="18" charset="0"/>
                             </a:rPr>
                           </m:ctrlPr>
                         </m:sSubPr>
                         <m:e>
                           <m:r>
-                            <a:rPr lang="en-US" sz="2000" b="0" i="1" smtClean="0">
+                            <a:rPr lang="en-US" b="0" i="1" smtClean="0">
                               <a:latin typeface="Cambria Math" panose="02040503050406030204" pitchFamily="18" charset="0"/>
                             </a:rPr>
                             <m:t>𝑞</m:t>
@@ -14154,7 +14712,7 @@
                         </m:e>
                         <m:sub>
                           <m:r>
-                            <a:rPr lang="en-US" sz="2000" b="0" i="1" smtClean="0">
+                            <a:rPr lang="en-US" b="0" i="1" smtClean="0">
                               <a:latin typeface="Cambria Math" panose="02040503050406030204" pitchFamily="18" charset="0"/>
                             </a:rPr>
                             <m:t>𝜋</m:t>
@@ -14164,20 +14722,20 @@
                       <m:d>
                         <m:dPr>
                           <m:ctrlPr>
-                            <a:rPr lang="en-US" sz="2000" b="0" i="1" smtClean="0">
+                            <a:rPr lang="en-US" b="0" i="1" smtClean="0">
                               <a:latin typeface="Cambria Math" panose="02040503050406030204" pitchFamily="18" charset="0"/>
                             </a:rPr>
                           </m:ctrlPr>
                         </m:dPr>
                         <m:e>
                           <m:r>
-                            <a:rPr lang="en-US" sz="2000" b="0" i="1" smtClean="0">
+                            <a:rPr lang="en-US" b="0" i="1" smtClean="0">
                               <a:latin typeface="Cambria Math" panose="02040503050406030204" pitchFamily="18" charset="0"/>
                             </a:rPr>
                             <m:t>𝑠</m:t>
                           </m:r>
                           <m:r>
-                            <a:rPr lang="en-US" sz="2000" b="0" i="1" smtClean="0">
+                            <a:rPr lang="en-US" b="0" i="1" smtClean="0">
                               <a:latin typeface="Cambria Math" panose="02040503050406030204" pitchFamily="18" charset="0"/>
                             </a:rPr>
                             <m:t>, </m:t>
@@ -14185,14 +14743,14 @@
                           <m:sSup>
                             <m:sSupPr>
                               <m:ctrlPr>
-                                <a:rPr lang="en-US" sz="2000" b="0" i="1" smtClean="0">
+                                <a:rPr lang="en-US" b="0" i="1" smtClean="0">
                                   <a:latin typeface="Cambria Math" panose="02040503050406030204" pitchFamily="18" charset="0"/>
                                 </a:rPr>
                               </m:ctrlPr>
                             </m:sSupPr>
                             <m:e>
                               <m:r>
-                                <a:rPr lang="en-US" sz="2000" b="0" i="1" smtClean="0">
+                                <a:rPr lang="en-US" b="0" i="1" smtClean="0">
                                   <a:latin typeface="Cambria Math" panose="02040503050406030204" pitchFamily="18" charset="0"/>
                                 </a:rPr>
                                 <m:t>𝜋</m:t>
@@ -14200,7 +14758,7 @@
                             </m:e>
                             <m:sup>
                               <m:r>
-                                <a:rPr lang="en-US" sz="2000" b="0" i="1" smtClean="0">
+                                <a:rPr lang="en-US" b="0" i="1" smtClean="0">
                                   <a:latin typeface="Cambria Math" panose="02040503050406030204" pitchFamily="18" charset="0"/>
                                 </a:rPr>
                                 <m:t>′</m:t>
@@ -14210,14 +14768,14 @@
                           <m:d>
                             <m:dPr>
                               <m:ctrlPr>
-                                <a:rPr lang="en-US" sz="2000" b="0" i="1" smtClean="0">
+                                <a:rPr lang="en-US" b="0" i="1" smtClean="0">
                                   <a:latin typeface="Cambria Math" panose="02040503050406030204" pitchFamily="18" charset="0"/>
                                 </a:rPr>
                               </m:ctrlPr>
                             </m:dPr>
                             <m:e>
                               <m:r>
-                                <a:rPr lang="en-US" sz="2000" b="0" i="1" smtClean="0">
+                                <a:rPr lang="en-US" b="0" i="1" smtClean="0">
                                   <a:latin typeface="Cambria Math" panose="02040503050406030204" pitchFamily="18" charset="0"/>
                                 </a:rPr>
                                 <m:t>𝑠</m:t>
@@ -14227,7 +14785,7 @@
                         </m:e>
                       </m:d>
                       <m:r>
-                        <a:rPr lang="en-US" sz="2000" b="0" i="1" smtClean="0">
+                        <a:rPr lang="en-US" b="0" i="1" smtClean="0">
                           <a:latin typeface="Cambria Math" panose="02040503050406030204" pitchFamily="18" charset="0"/>
                         </a:rPr>
                         <m:t>≥</m:t>
@@ -14235,14 +14793,14 @@
                       <m:sSub>
                         <m:sSubPr>
                           <m:ctrlPr>
-                            <a:rPr lang="en-US" sz="2000" b="0" i="1" smtClean="0">
+                            <a:rPr lang="en-US" b="0" i="1" smtClean="0">
                               <a:latin typeface="Cambria Math" panose="02040503050406030204" pitchFamily="18" charset="0"/>
                             </a:rPr>
                           </m:ctrlPr>
                         </m:sSubPr>
                         <m:e>
                           <m:r>
-                            <a:rPr lang="en-US" sz="2000" b="0" i="1" smtClean="0">
+                            <a:rPr lang="en-US" b="0" i="1" smtClean="0">
                               <a:latin typeface="Cambria Math" panose="02040503050406030204" pitchFamily="18" charset="0"/>
                             </a:rPr>
                             <m:t>𝑣</m:t>
@@ -14250,7 +14808,7 @@
                         </m:e>
                         <m:sub>
                           <m:r>
-                            <a:rPr lang="en-US" sz="2000" b="0" i="1" smtClean="0">
+                            <a:rPr lang="en-US" b="0" i="1" smtClean="0">
                               <a:latin typeface="Cambria Math" panose="02040503050406030204" pitchFamily="18" charset="0"/>
                             </a:rPr>
                             <m:t>𝜋</m:t>
@@ -14260,14 +14818,14 @@
                       <m:d>
                         <m:dPr>
                           <m:ctrlPr>
-                            <a:rPr lang="en-US" sz="2000" b="0" i="1" smtClean="0">
+                            <a:rPr lang="en-US" b="0" i="1" smtClean="0">
                               <a:latin typeface="Cambria Math" panose="02040503050406030204" pitchFamily="18" charset="0"/>
                             </a:rPr>
                           </m:ctrlPr>
                         </m:dPr>
                         <m:e>
                           <m:r>
-                            <a:rPr lang="en-US" sz="2000" b="0" i="1" smtClean="0">
+                            <a:rPr lang="en-US" b="0" i="1" smtClean="0">
                               <a:latin typeface="Cambria Math" panose="02040503050406030204" pitchFamily="18" charset="0"/>
                             </a:rPr>
                             <m:t>𝑠</m:t>
@@ -14275,32 +14833,32 @@
                         </m:e>
                       </m:d>
                       <m:r>
-                        <a:rPr lang="en-US" sz="2000" b="0" i="1" smtClean="0">
+                        <a:rPr lang="en-US" b="0" i="1" smtClean="0">
                           <a:latin typeface="Cambria Math" panose="02040503050406030204" pitchFamily="18" charset="0"/>
                         </a:rPr>
                         <m:t>  ∀</m:t>
                       </m:r>
                       <m:r>
-                        <a:rPr lang="en-US" sz="2000" b="0" i="1" smtClean="0">
+                        <a:rPr lang="en-US" b="0" i="1" smtClean="0">
                           <a:latin typeface="Cambria Math" panose="02040503050406030204" pitchFamily="18" charset="0"/>
                         </a:rPr>
                         <m:t>𝑠</m:t>
                       </m:r>
                       <m:r>
-                        <a:rPr lang="en-US" sz="2000" b="0" i="1" smtClean="0">
+                        <a:rPr lang="en-US" b="0" i="1" smtClean="0">
                           <a:latin typeface="Cambria Math" panose="02040503050406030204" pitchFamily="18" charset="0"/>
                         </a:rPr>
                         <m:t>∈</m:t>
                       </m:r>
                       <m:r>
-                        <a:rPr lang="en-US" sz="2000" b="0" i="1" smtClean="0">
+                        <a:rPr lang="en-US" b="0" i="1" smtClean="0">
                           <a:latin typeface="Cambria Math" panose="02040503050406030204" pitchFamily="18" charset="0"/>
                           <a:ea typeface="Cambria Math" panose="02040503050406030204" pitchFamily="18" charset="0"/>
                         </a:rPr>
                         <m:t>𝒮</m:t>
                       </m:r>
                       <m:r>
-                        <a:rPr lang="en-US" sz="2000" b="0" i="1" smtClean="0">
+                        <a:rPr lang="en-US" b="0" i="1" smtClean="0">
                           <a:latin typeface="Cambria Math" panose="02040503050406030204" pitchFamily="18" charset="0"/>
                           <a:ea typeface="Cambria Math" panose="02040503050406030204" pitchFamily="18" charset="0"/>
                         </a:rPr>
@@ -14309,20 +14867,20 @@
                       <m:sSub>
                         <m:sSubPr>
                           <m:ctrlPr>
-                            <a:rPr lang="en-US" sz="2000" b="0" i="1" smtClean="0">
+                            <a:rPr lang="en-US" b="0" i="1" smtClean="0">
                               <a:latin typeface="Cambria Math" panose="02040503050406030204" pitchFamily="18" charset="0"/>
                             </a:rPr>
                           </m:ctrlPr>
                         </m:sSubPr>
                         <m:e>
                           <m:r>
-                            <a:rPr lang="en-US" sz="2000" b="0" i="1" smtClean="0">
+                            <a:rPr lang="en-US" b="0" i="1" smtClean="0">
                               <a:latin typeface="Cambria Math" panose="02040503050406030204" pitchFamily="18" charset="0"/>
                             </a:rPr>
                             <m:t>    </m:t>
                           </m:r>
                           <m:r>
-                            <a:rPr lang="en-US" sz="2000" i="1">
+                            <a:rPr lang="en-US" i="1">
                               <a:latin typeface="Cambria Math" panose="02040503050406030204" pitchFamily="18" charset="0"/>
                             </a:rPr>
                             <m:t>𝑣</m:t>
@@ -14332,14 +14890,14 @@
                           <m:sSup>
                             <m:sSupPr>
                               <m:ctrlPr>
-                                <a:rPr lang="en-US" sz="2000" i="1">
+                                <a:rPr lang="en-US" i="1">
                                   <a:latin typeface="Cambria Math" panose="02040503050406030204" pitchFamily="18" charset="0"/>
                                 </a:rPr>
                               </m:ctrlPr>
                             </m:sSupPr>
                             <m:e>
                               <m:r>
-                                <a:rPr lang="en-US" sz="2000" i="1">
+                                <a:rPr lang="en-US" i="1">
                                   <a:latin typeface="Cambria Math" panose="02040503050406030204" pitchFamily="18" charset="0"/>
                                 </a:rPr>
                                 <m:t>𝜋</m:t>
@@ -14347,7 +14905,7 @@
                             </m:e>
                             <m:sup>
                               <m:r>
-                                <a:rPr lang="en-US" sz="2000" i="1">
+                                <a:rPr lang="en-US" i="1">
                                   <a:latin typeface="Cambria Math" panose="02040503050406030204" pitchFamily="18" charset="0"/>
                                 </a:rPr>
                                 <m:t>′</m:t>
@@ -14359,14 +14917,14 @@
                       <m:d>
                         <m:dPr>
                           <m:ctrlPr>
-                            <a:rPr lang="en-US" sz="2000" i="1">
+                            <a:rPr lang="en-US" i="1">
                               <a:latin typeface="Cambria Math" panose="02040503050406030204" pitchFamily="18" charset="0"/>
                             </a:rPr>
                           </m:ctrlPr>
                         </m:dPr>
                         <m:e>
                           <m:r>
-                            <a:rPr lang="en-US" sz="2000" i="1">
+                            <a:rPr lang="en-US" i="1">
                               <a:latin typeface="Cambria Math" panose="02040503050406030204" pitchFamily="18" charset="0"/>
                             </a:rPr>
                             <m:t>𝑠</m:t>
@@ -14374,7 +14932,7 @@
                         </m:e>
                       </m:d>
                       <m:r>
-                        <a:rPr lang="en-US" sz="2000" i="1">
+                        <a:rPr lang="en-US" i="1">
                           <a:latin typeface="Cambria Math" panose="02040503050406030204" pitchFamily="18" charset="0"/>
                         </a:rPr>
                         <m:t>≥</m:t>
@@ -14382,14 +14940,14 @@
                       <m:sSub>
                         <m:sSubPr>
                           <m:ctrlPr>
-                            <a:rPr lang="en-US" sz="2000" i="1">
+                            <a:rPr lang="en-US" i="1">
                               <a:latin typeface="Cambria Math" panose="02040503050406030204" pitchFamily="18" charset="0"/>
                             </a:rPr>
                           </m:ctrlPr>
                         </m:sSubPr>
                         <m:e>
                           <m:r>
-                            <a:rPr lang="en-US" sz="2000" i="1">
+                            <a:rPr lang="en-US" i="1">
                               <a:latin typeface="Cambria Math" panose="02040503050406030204" pitchFamily="18" charset="0"/>
                             </a:rPr>
                             <m:t>𝑣</m:t>
@@ -14397,7 +14955,7 @@
                         </m:e>
                         <m:sub>
                           <m:r>
-                            <a:rPr lang="en-US" sz="2000" i="1">
+                            <a:rPr lang="en-US" i="1">
                               <a:latin typeface="Cambria Math" panose="02040503050406030204" pitchFamily="18" charset="0"/>
                             </a:rPr>
                             <m:t>𝜋</m:t>
@@ -14407,14 +14965,14 @@
                       <m:d>
                         <m:dPr>
                           <m:ctrlPr>
-                            <a:rPr lang="en-US" sz="2000" i="1">
+                            <a:rPr lang="en-US" i="1">
                               <a:latin typeface="Cambria Math" panose="02040503050406030204" pitchFamily="18" charset="0"/>
                             </a:rPr>
                           </m:ctrlPr>
                         </m:dPr>
                         <m:e>
                           <m:r>
-                            <a:rPr lang="en-US" sz="2000" i="1">
+                            <a:rPr lang="en-US" i="1">
                               <a:latin typeface="Cambria Math" panose="02040503050406030204" pitchFamily="18" charset="0"/>
                             </a:rPr>
                             <m:t>𝑠</m:t>
@@ -14422,25 +14980,25 @@
                         </m:e>
                       </m:d>
                       <m:r>
-                        <a:rPr lang="en-US" sz="2000" i="1">
+                        <a:rPr lang="en-US" i="1">
                           <a:latin typeface="Cambria Math" panose="02040503050406030204" pitchFamily="18" charset="0"/>
                         </a:rPr>
                         <m:t>  ∀</m:t>
                       </m:r>
                       <m:r>
-                        <a:rPr lang="en-US" sz="2000" i="1">
+                        <a:rPr lang="en-US" i="1">
                           <a:latin typeface="Cambria Math" panose="02040503050406030204" pitchFamily="18" charset="0"/>
                         </a:rPr>
                         <m:t>𝑠</m:t>
                       </m:r>
                       <m:r>
-                        <a:rPr lang="en-US" sz="2000" i="1">
+                        <a:rPr lang="en-US" i="1">
                           <a:latin typeface="Cambria Math" panose="02040503050406030204" pitchFamily="18" charset="0"/>
                         </a:rPr>
                         <m:t>∈</m:t>
                       </m:r>
                       <m:r>
-                        <a:rPr lang="en-US" sz="2000" i="1">
+                        <a:rPr lang="en-US" i="1">
                           <a:latin typeface="Cambria Math" panose="02040503050406030204" pitchFamily="18" charset="0"/>
                           <a:ea typeface="Cambria Math" panose="02040503050406030204" pitchFamily="18" charset="0"/>
                         </a:rPr>
@@ -14449,26 +15007,26 @@
                     </m:oMath>
                   </m:oMathPara>
                 </a14:m>
-                <a:endParaRPr lang="en-US" sz="2000" dirty="0"/>
+                <a:endParaRPr lang="en-US" dirty="0"/>
               </a:p>
               <a:p>
-                <a:endParaRPr lang="en-US" sz="2000" dirty="0"/>
+                <a:endParaRPr lang="en-US" dirty="0"/>
               </a:p>
               <a:p>
                 <a:r>
-                  <a:rPr lang="en-US" sz="2000" dirty="0"/>
+                  <a:rPr lang="en-US" dirty="0"/>
                   <a:t>If </a:t>
                 </a:r>
                 <a14:m>
                   <m:oMath xmlns:m="http://schemas.openxmlformats.org/officeDocument/2006/math">
                     <m:r>
-                      <a:rPr lang="en-US" sz="2000" i="1">
+                      <a:rPr lang="en-US" i="1">
                         <a:latin typeface="Cambria Math" panose="02040503050406030204" pitchFamily="18" charset="0"/>
                       </a:rPr>
                       <m:t>𝜋</m:t>
                     </m:r>
                     <m:r>
-                      <a:rPr lang="en-US" sz="2000" i="1">
+                      <a:rPr lang="en-US" i="1">
                         <a:latin typeface="Cambria Math" panose="02040503050406030204" pitchFamily="18" charset="0"/>
                       </a:rPr>
                       <m:t>′</m:t>
@@ -14476,13 +15034,13 @@
                   </m:oMath>
                 </a14:m>
                 <a:r>
-                  <a:rPr lang="en-US" sz="2000" dirty="0"/>
+                  <a:rPr lang="en-US" dirty="0"/>
                   <a:t> is the same as </a:t>
                 </a:r>
                 <a14:m>
                   <m:oMath xmlns:m="http://schemas.openxmlformats.org/officeDocument/2006/math">
                     <m:r>
-                      <a:rPr lang="en-US" sz="2000" b="0" i="1" smtClean="0">
+                      <a:rPr lang="en-US" b="0" i="1" smtClean="0">
                         <a:latin typeface="Cambria Math" panose="02040503050406030204" pitchFamily="18" charset="0"/>
                       </a:rPr>
                       <m:t>𝜋</m:t>
@@ -14490,19 +15048,19 @@
                   </m:oMath>
                 </a14:m>
                 <a:r>
-                  <a:rPr lang="en-US" sz="2000" dirty="0"/>
-                  <a:t> but has a better action for at least one state then </a:t>
+                  <a:rPr lang="en-US" dirty="0"/>
+                  <a:t> but has a better action for at least one state, then </a:t>
                 </a:r>
                 <a14:m>
                   <m:oMath xmlns:m="http://schemas.openxmlformats.org/officeDocument/2006/math">
                     <m:r>
-                      <a:rPr lang="en-US" sz="2000" b="0" i="1" smtClean="0">
+                      <a:rPr lang="en-US" b="0" i="1" smtClean="0">
                         <a:latin typeface="Cambria Math" panose="02040503050406030204" pitchFamily="18" charset="0"/>
                       </a:rPr>
                       <m:t>𝜋</m:t>
                     </m:r>
                     <m:r>
-                      <a:rPr lang="en-US" sz="2000" b="0" i="1" smtClean="0">
+                      <a:rPr lang="en-US" b="0" i="1" smtClean="0">
                         <a:latin typeface="Cambria Math" panose="02040503050406030204" pitchFamily="18" charset="0"/>
                       </a:rPr>
                       <m:t>′</m:t>
@@ -14510,25 +15068,25 @@
                   </m:oMath>
                 </a14:m>
                 <a:r>
-                  <a:rPr lang="en-US" sz="2000" dirty="0"/>
+                  <a:rPr lang="en-US" dirty="0"/>
                   <a:t> is strictly better than </a:t>
                 </a:r>
                 <a14:m>
                   <m:oMath xmlns:m="http://schemas.openxmlformats.org/officeDocument/2006/math">
                     <m:r>
-                      <a:rPr lang="en-US" sz="2000" b="0" i="1" smtClean="0">
+                      <a:rPr lang="en-US" b="0" i="1" smtClean="0">
                         <a:latin typeface="Cambria Math" panose="02040503050406030204" pitchFamily="18" charset="0"/>
                       </a:rPr>
                       <m:t>𝜋</m:t>
                     </m:r>
                   </m:oMath>
                 </a14:m>
-                <a:endParaRPr lang="en-US" sz="2000" dirty="0"/>
+                <a:endParaRPr lang="en-US" dirty="0"/>
               </a:p>
             </p:txBody>
           </p:sp>
         </mc:Choice>
-        <mc:Fallback xmlns="">
+        <mc:Fallback>
           <p:sp>
             <p:nvSpPr>
               <p:cNvPr id="6" name="TextBox 5">
@@ -14545,8 +15103,8 @@
             </p:nvSpPr>
             <p:spPr>
               <a:xfrm>
-                <a:off x="838201" y="1897071"/>
-                <a:ext cx="10771682" cy="1670842"/>
+                <a:off x="976969" y="1396409"/>
+                <a:ext cx="10846964" cy="1512978"/>
               </a:xfrm>
               <a:prstGeom prst="rect">
                 <a:avLst/>
@@ -14554,7 +15112,7 @@
               <a:blipFill>
                 <a:blip r:embed="rId3"/>
                 <a:stretch>
-                  <a:fillRect l="-565" t="-1444" b="-5054"/>
+                  <a:fillRect l="-393" t="-1195" b="-5179"/>
                 </a:stretch>
               </a:blipFill>
             </p:spPr>
@@ -14573,6 +15131,210 @@
           </p:sp>
         </mc:Fallback>
       </mc:AlternateContent>
+      <mc:AlternateContent xmlns:mc="http://schemas.openxmlformats.org/markup-compatibility/2006">
+        <mc:Choice xmlns:a14="http://schemas.microsoft.com/office/drawing/2010/main" Requires="a14">
+          <p:sp>
+            <p:nvSpPr>
+              <p:cNvPr id="11" name="Speech Bubble: Rectangle with Corners Rounded 10">
+                <a:extLst>
+                  <a:ext uri="{FF2B5EF4-FFF2-40B4-BE49-F238E27FC236}">
+                    <a16:creationId xmlns:a16="http://schemas.microsoft.com/office/drawing/2014/main" id="{D086C4F6-4539-C0FB-374C-830B01387B13}"/>
+                  </a:ext>
+                </a:extLst>
+              </p:cNvPr>
+              <p:cNvSpPr/>
+              <p:nvPr/>
+            </p:nvSpPr>
+            <p:spPr>
+              <a:xfrm>
+                <a:off x="9670987" y="4757576"/>
+                <a:ext cx="2031167" cy="464759"/>
+              </a:xfrm>
+              <a:prstGeom prst="wedgeRoundRectCallout">
+                <a:avLst>
+                  <a:gd name="adj1" fmla="val -80506"/>
+                  <a:gd name="adj2" fmla="val 43591"/>
+                  <a:gd name="adj3" fmla="val 16667"/>
+                </a:avLst>
+              </a:prstGeom>
+            </p:spPr>
+            <p:style>
+              <a:lnRef idx="2">
+                <a:schemeClr val="accent1">
+                  <a:shade val="15000"/>
+                </a:schemeClr>
+              </a:lnRef>
+              <a:fillRef idx="1">
+                <a:schemeClr val="accent1"/>
+              </a:fillRef>
+              <a:effectRef idx="0">
+                <a:schemeClr val="accent1"/>
+              </a:effectRef>
+              <a:fontRef idx="minor">
+                <a:schemeClr val="lt1"/>
+              </a:fontRef>
+            </p:style>
+            <p:txBody>
+              <a:bodyPr rtlCol="0" anchor="ctr"/>
+              <a:lstStyle/>
+              <a:p>
+                <a:pPr algn="ctr"/>
+                <a14:m>
+                  <m:oMath xmlns:m="http://schemas.openxmlformats.org/officeDocument/2006/math">
+                    <m:sSub>
+                      <m:sSubPr>
+                        <m:ctrlPr>
+                          <a:rPr lang="en-US" sz="1400" b="0" i="1" smtClean="0">
+                            <a:latin typeface="Cambria Math" panose="02040503050406030204" pitchFamily="18" charset="0"/>
+                          </a:rPr>
+                        </m:ctrlPr>
+                      </m:sSubPr>
+                      <m:e>
+                        <m:r>
+                          <a:rPr lang="en-US" sz="1400" b="0" i="1" smtClean="0">
+                            <a:latin typeface="Cambria Math" panose="02040503050406030204" pitchFamily="18" charset="0"/>
+                          </a:rPr>
+                          <m:t>𝜋</m:t>
+                        </m:r>
+                      </m:e>
+                      <m:sub>
+                        <m:r>
+                          <a:rPr lang="en-US" sz="1400" b="0" i="1" smtClean="0">
+                            <a:latin typeface="Cambria Math" panose="02040503050406030204" pitchFamily="18" charset="0"/>
+                          </a:rPr>
+                          <m:t>𝑘</m:t>
+                        </m:r>
+                        <m:r>
+                          <a:rPr lang="en-US" sz="1400" b="0" i="1" smtClean="0">
+                            <a:latin typeface="Cambria Math" panose="02040503050406030204" pitchFamily="18" charset="0"/>
+                          </a:rPr>
+                          <m:t>+1</m:t>
+                        </m:r>
+                      </m:sub>
+                    </m:sSub>
+                  </m:oMath>
+                </a14:m>
+                <a:r>
+                  <a:rPr lang="en-US" sz="1400" dirty="0"/>
+                  <a:t> chooses greedy action for </a:t>
+                </a:r>
+                <a14:m>
+                  <m:oMath xmlns:m="http://schemas.openxmlformats.org/officeDocument/2006/math">
+                    <m:r>
+                      <a:rPr lang="en-US" sz="1400" b="0" i="1" smtClean="0">
+                        <a:latin typeface="Cambria Math" panose="02040503050406030204" pitchFamily="18" charset="0"/>
+                      </a:rPr>
+                      <m:t>𝑠</m:t>
+                    </m:r>
+                  </m:oMath>
+                </a14:m>
+                <a:endParaRPr lang="en-US" sz="1400" dirty="0"/>
+              </a:p>
+            </p:txBody>
+          </p:sp>
+        </mc:Choice>
+        <mc:Fallback>
+          <p:sp>
+            <p:nvSpPr>
+              <p:cNvPr id="11" name="Speech Bubble: Rectangle with Corners Rounded 10">
+                <a:extLst>
+                  <a:ext uri="{FF2B5EF4-FFF2-40B4-BE49-F238E27FC236}">
+                    <a16:creationId xmlns:a16="http://schemas.microsoft.com/office/drawing/2014/main" id="{D086C4F6-4539-C0FB-374C-830B01387B13}"/>
+                  </a:ext>
+                </a:extLst>
+              </p:cNvPr>
+              <p:cNvSpPr>
+                <a:spLocks noRot="1" noChangeAspect="1" noMove="1" noResize="1" noEditPoints="1" noAdjustHandles="1" noChangeArrowheads="1" noChangeShapeType="1" noTextEdit="1"/>
+              </p:cNvSpPr>
+              <p:nvPr/>
+            </p:nvSpPr>
+            <p:spPr>
+              <a:xfrm>
+                <a:off x="9670987" y="4757576"/>
+                <a:ext cx="2031167" cy="464759"/>
+              </a:xfrm>
+              <a:prstGeom prst="wedgeRoundRectCallout">
+                <a:avLst>
+                  <a:gd name="adj1" fmla="val -80506"/>
+                  <a:gd name="adj2" fmla="val 43591"/>
+                  <a:gd name="adj3" fmla="val 16667"/>
+                </a:avLst>
+              </a:prstGeom>
+              <a:blipFill>
+                <a:blip r:embed="rId4"/>
+                <a:stretch>
+                  <a:fillRect t="-6250" b="-16250"/>
+                </a:stretch>
+              </a:blipFill>
+            </p:spPr>
+            <p:txBody>
+              <a:bodyPr/>
+              <a:lstStyle/>
+              <a:p>
+                <a:r>
+                  <a:rPr lang="en-US">
+                    <a:noFill/>
+                  </a:rPr>
+                  <a:t> </a:t>
+                </a:r>
+              </a:p>
+            </p:txBody>
+          </p:sp>
+        </mc:Fallback>
+      </mc:AlternateContent>
+      <p:sp>
+        <p:nvSpPr>
+          <p:cNvPr id="13" name="Speech Bubble: Rectangle with Corners Rounded 12">
+            <a:extLst>
+              <a:ext uri="{FF2B5EF4-FFF2-40B4-BE49-F238E27FC236}">
+                <a16:creationId xmlns:a16="http://schemas.microsoft.com/office/drawing/2014/main" id="{59270C0F-08F4-3155-6EDB-9B5E891DF373}"/>
+              </a:ext>
+            </a:extLst>
+          </p:cNvPr>
+          <p:cNvSpPr/>
+          <p:nvPr/>
+        </p:nvSpPr>
+        <p:spPr>
+          <a:xfrm>
+            <a:off x="9290619" y="5551861"/>
+            <a:ext cx="2440898" cy="661369"/>
+          </a:xfrm>
+          <a:prstGeom prst="wedgeRoundRectCallout">
+            <a:avLst>
+              <a:gd name="adj1" fmla="val -99327"/>
+              <a:gd name="adj2" fmla="val -39027"/>
+              <a:gd name="adj3" fmla="val 16667"/>
+            </a:avLst>
+          </a:prstGeom>
+        </p:spPr>
+        <p:style>
+          <a:lnRef idx="2">
+            <a:schemeClr val="accent1">
+              <a:shade val="15000"/>
+            </a:schemeClr>
+          </a:lnRef>
+          <a:fillRef idx="1">
+            <a:schemeClr val="accent1"/>
+          </a:fillRef>
+          <a:effectRef idx="0">
+            <a:schemeClr val="accent1"/>
+          </a:effectRef>
+          <a:fontRef idx="minor">
+            <a:schemeClr val="lt1"/>
+          </a:fontRef>
+        </p:style>
+        <p:txBody>
+          <a:bodyPr rtlCol="0" anchor="ctr"/>
+          <a:lstStyle/>
+          <a:p>
+            <a:pPr algn="ctr"/>
+            <a:r>
+              <a:rPr lang="en-US" sz="1400" dirty="0"/>
+              <a:t>Choosing the best action will never lead to a lower value!</a:t>
+            </a:r>
+          </a:p>
+        </p:txBody>
+      </p:sp>
     </p:spTree>
     <p:extLst>
       <p:ext uri="{BB962C8B-B14F-4D97-AF65-F5344CB8AC3E}">
@@ -14604,7 +15366,7 @@
                             </p:stCondLst>
                             <p:childTnLst>
                               <p:par>
-                                <p:cTn id="5" presetID="1" presetClass="entr" presetSubtype="0" fill="hold" nodeType="clickEffect">
+                                <p:cTn id="5" presetID="1" presetClass="entr" presetSubtype="0" fill="hold" grpId="0" nodeType="clickEffect">
                                   <p:stCondLst>
                                     <p:cond delay="0"/>
                                   </p:stCondLst>
@@ -14619,7 +15381,7 @@
                                         <p:tgtEl>
                                           <p:spTgt spid="5">
                                             <p:txEl>
-                                              <p:pRg st="7" end="7"/>
+                                              <p:pRg st="0" end="0"/>
                                             </p:txEl>
                                           </p:spTgt>
                                         </p:tgtEl>
@@ -14635,7 +15397,7 @@
                                 </p:cTn>
                               </p:par>
                               <p:par>
-                                <p:cTn id="7" presetID="1" presetClass="entr" presetSubtype="0" fill="hold" nodeType="withEffect">
+                                <p:cTn id="7" presetID="1" presetClass="entr" presetSubtype="0" fill="hold" grpId="0" nodeType="withEffect">
                                   <p:stCondLst>
                                     <p:cond delay="0"/>
                                   </p:stCondLst>
@@ -14650,7 +15412,7 @@
                                         <p:tgtEl>
                                           <p:spTgt spid="5">
                                             <p:txEl>
-                                              <p:pRg st="9" end="9"/>
+                                              <p:pRg st="1" end="1"/>
                                             </p:txEl>
                                           </p:spTgt>
                                         </p:tgtEl>
@@ -14684,7 +15446,7 @@
                             </p:stCondLst>
                             <p:childTnLst>
                               <p:par>
-                                <p:cTn id="11" presetID="1" presetClass="entr" presetSubtype="0" fill="hold" nodeType="clickEffect">
+                                <p:cTn id="11" presetID="1" presetClass="entr" presetSubtype="0" fill="hold" grpId="0" nodeType="clickEffect">
                                   <p:stCondLst>
                                     <p:cond delay="0"/>
                                   </p:stCondLst>
@@ -14699,9 +15461,148 @@
                                         <p:tgtEl>
                                           <p:spTgt spid="5">
                                             <p:txEl>
-                                              <p:pRg st="11" end="11"/>
+                                              <p:pRg st="3" end="3"/>
                                             </p:txEl>
                                           </p:spTgt>
+                                        </p:tgtEl>
+                                        <p:attrNameLst>
+                                          <p:attrName>style.visibility</p:attrName>
+                                        </p:attrNameLst>
+                                      </p:cBhvr>
+                                      <p:to>
+                                        <p:strVal val="visible"/>
+                                      </p:to>
+                                    </p:set>
+                                  </p:childTnLst>
+                                </p:cTn>
+                              </p:par>
+                            </p:childTnLst>
+                          </p:cTn>
+                        </p:par>
+                      </p:childTnLst>
+                    </p:cTn>
+                  </p:par>
+                  <p:par>
+                    <p:cTn id="13" fill="hold">
+                      <p:stCondLst>
+                        <p:cond delay="indefinite"/>
+                      </p:stCondLst>
+                      <p:childTnLst>
+                        <p:par>
+                          <p:cTn id="14" fill="hold">
+                            <p:stCondLst>
+                              <p:cond delay="0"/>
+                            </p:stCondLst>
+                            <p:childTnLst>
+                              <p:par>
+                                <p:cTn id="15" presetID="1" presetClass="entr" presetSubtype="0" fill="hold" grpId="0" nodeType="clickEffect">
+                                  <p:stCondLst>
+                                    <p:cond delay="0"/>
+                                  </p:stCondLst>
+                                  <p:childTnLst>
+                                    <p:set>
+                                      <p:cBhvr>
+                                        <p:cTn id="16" dur="1" fill="hold">
+                                          <p:stCondLst>
+                                            <p:cond delay="0"/>
+                                          </p:stCondLst>
+                                        </p:cTn>
+                                        <p:tgtEl>
+                                          <p:spTgt spid="5">
+                                            <p:txEl>
+                                              <p:pRg st="4" end="4"/>
+                                            </p:txEl>
+                                          </p:spTgt>
+                                        </p:tgtEl>
+                                        <p:attrNameLst>
+                                          <p:attrName>style.visibility</p:attrName>
+                                        </p:attrNameLst>
+                                      </p:cBhvr>
+                                      <p:to>
+                                        <p:strVal val="visible"/>
+                                      </p:to>
+                                    </p:set>
+                                  </p:childTnLst>
+                                </p:cTn>
+                              </p:par>
+                            </p:childTnLst>
+                          </p:cTn>
+                        </p:par>
+                      </p:childTnLst>
+                    </p:cTn>
+                  </p:par>
+                  <p:par>
+                    <p:cTn id="17" fill="hold">
+                      <p:stCondLst>
+                        <p:cond delay="indefinite"/>
+                      </p:stCondLst>
+                      <p:childTnLst>
+                        <p:par>
+                          <p:cTn id="18" fill="hold">
+                            <p:stCondLst>
+                              <p:cond delay="0"/>
+                            </p:stCondLst>
+                            <p:childTnLst>
+                              <p:par>
+                                <p:cTn id="19" presetID="1" presetClass="entr" presetSubtype="0" fill="hold" grpId="0" nodeType="clickEffect">
+                                  <p:stCondLst>
+                                    <p:cond delay="0"/>
+                                  </p:stCondLst>
+                                  <p:childTnLst>
+                                    <p:set>
+                                      <p:cBhvr>
+                                        <p:cTn id="20" dur="1" fill="hold">
+                                          <p:stCondLst>
+                                            <p:cond delay="0"/>
+                                          </p:stCondLst>
+                                        </p:cTn>
+                                        <p:tgtEl>
+                                          <p:spTgt spid="11"/>
+                                        </p:tgtEl>
+                                        <p:attrNameLst>
+                                          <p:attrName>style.visibility</p:attrName>
+                                        </p:attrNameLst>
+                                      </p:cBhvr>
+                                      <p:to>
+                                        <p:strVal val="visible"/>
+                                      </p:to>
+                                    </p:set>
+                                  </p:childTnLst>
+                                </p:cTn>
+                              </p:par>
+                            </p:childTnLst>
+                          </p:cTn>
+                        </p:par>
+                      </p:childTnLst>
+                    </p:cTn>
+                  </p:par>
+                  <p:par>
+                    <p:cTn id="21" fill="hold">
+                      <p:stCondLst>
+                        <p:cond delay="indefinite"/>
+                      </p:stCondLst>
+                      <p:childTnLst>
+                        <p:par>
+                          <p:cTn id="22" fill="hold">
+                            <p:stCondLst>
+                              <p:cond delay="0"/>
+                            </p:stCondLst>
+                            <p:childTnLst>
+                              <p:par>
+                                <p:cTn id="23" presetID="1" presetClass="entr" presetSubtype="0" fill="hold" grpId="0" nodeType="clickEffect">
+                                  <p:stCondLst>
+                                    <p:cond delay="0"/>
+                                  </p:stCondLst>
+                                  <p:childTnLst>
+                                    <p:set>
+                                      <p:cBhvr>
+                                        <p:cTn id="24" dur="1" fill="hold">
+                                          <p:stCondLst>
+                                            <p:cond delay="0"/>
+                                          </p:stCondLst>
+                                        </p:cTn>
+                                        <p:tgtEl>
+                                          <p:spTgt spid="13"/>
                                         </p:tgtEl>
                                         <p:attrNameLst>
                                           <p:attrName>style.visibility</p:attrName>
@@ -14741,6 +15642,11 @@
         </p:cTn>
       </p:par>
     </p:tnLst>
+    <p:bldLst>
+      <p:bldP spid="5" grpId="0" uiExpand="1" build="p"/>
+      <p:bldP spid="11" grpId="0" animBg="1"/>
+      <p:bldP spid="13" grpId="0" animBg="1"/>
+    </p:bldLst>
   </p:timing>
 </p:sld>
 </file>
@@ -35533,10 +36439,10 @@
       </mc:AlternateContent>
       <p:grpSp>
         <p:nvGrpSpPr>
-          <p:cNvPr id="39" name="Group 38">
+          <p:cNvPr id="37" name="Group 36">
             <a:extLst>
               <a:ext uri="{FF2B5EF4-FFF2-40B4-BE49-F238E27FC236}">
-                <a16:creationId xmlns:a16="http://schemas.microsoft.com/office/drawing/2014/main" id="{063F7E0A-EB54-5CD3-4BA4-B413E4A3ABA8}"/>
+                <a16:creationId xmlns:a16="http://schemas.microsoft.com/office/drawing/2014/main" id="{66CB828E-C25E-8A36-C71B-92344FFDD713}"/>
               </a:ext>
             </a:extLst>
           </p:cNvPr>
@@ -35545,18 +36451,18 @@
         </p:nvGrpSpPr>
         <p:grpSpPr>
           <a:xfrm>
-            <a:off x="8418064" y="1033063"/>
-            <a:ext cx="3616325" cy="5577287"/>
-            <a:chOff x="8418064" y="1033063"/>
-            <a:chExt cx="3616325" cy="5577287"/>
+            <a:off x="8432631" y="1033063"/>
+            <a:ext cx="3601758" cy="5577287"/>
+            <a:chOff x="8432631" y="1033063"/>
+            <a:chExt cx="3601758" cy="5577287"/>
           </a:xfrm>
         </p:grpSpPr>
         <p:grpSp>
           <p:nvGrpSpPr>
-            <p:cNvPr id="10" name="Group 9">
+            <p:cNvPr id="26" name="Group 25">
               <a:extLst>
                 <a:ext uri="{FF2B5EF4-FFF2-40B4-BE49-F238E27FC236}">
-                  <a16:creationId xmlns:a16="http://schemas.microsoft.com/office/drawing/2014/main" id="{F9BC0917-F24E-73E3-0ED1-DF374DF98E97}"/>
+                  <a16:creationId xmlns:a16="http://schemas.microsoft.com/office/drawing/2014/main" id="{7FA6A3FA-BE98-9EA5-E3AE-89E6FF29DCA5}"/>
                 </a:ext>
               </a:extLst>
             </p:cNvPr>
@@ -35567,336 +36473,488 @@
             <a:xfrm>
               <a:off x="8432631" y="1033063"/>
               <a:ext cx="3601758" cy="5577287"/>
-              <a:chOff x="8306382" y="1228507"/>
-              <a:chExt cx="3601758" cy="5339815"/>
+              <a:chOff x="8432631" y="1033063"/>
+              <a:chExt cx="3601758" cy="5577287"/>
             </a:xfrm>
           </p:grpSpPr>
-          <p:sp>
-            <p:nvSpPr>
-              <p:cNvPr id="5" name="Rectangle 4">
+          <p:grpSp>
+            <p:nvGrpSpPr>
+              <p:cNvPr id="10" name="Group 9">
                 <a:extLst>
                   <a:ext uri="{FF2B5EF4-FFF2-40B4-BE49-F238E27FC236}">
-                    <a16:creationId xmlns:a16="http://schemas.microsoft.com/office/drawing/2014/main" id="{94A67163-ACB2-FA39-36EB-A99E9C883C84}"/>
+                    <a16:creationId xmlns:a16="http://schemas.microsoft.com/office/drawing/2014/main" id="{F9BC0917-F24E-73E3-0ED1-DF374DF98E97}"/>
                   </a:ext>
                 </a:extLst>
               </p:cNvPr>
-              <p:cNvSpPr/>
+              <p:cNvGrpSpPr/>
               <p:nvPr/>
-            </p:nvSpPr>
-            <p:spPr>
+            </p:nvGrpSpPr>
+            <p:grpSpPr>
               <a:xfrm>
-                <a:off x="8306382" y="1228507"/>
-                <a:ext cx="3601758" cy="5339815"/>
+                <a:off x="8432631" y="1033063"/>
+                <a:ext cx="3601758" cy="5577287"/>
+                <a:chOff x="8306382" y="1228507"/>
+                <a:chExt cx="3601758" cy="5339815"/>
               </a:xfrm>
-              <a:prstGeom prst="rect">
-                <a:avLst/>
-              </a:prstGeom>
-              <a:noFill/>
-              <a:ln w="9525" cap="flat" cmpd="sng" algn="ctr">
-                <a:solidFill>
+            </p:grpSpPr>
+            <p:sp>
+              <p:nvSpPr>
+                <p:cNvPr id="5" name="Rectangle 4">
+                  <a:extLst>
+                    <a:ext uri="{FF2B5EF4-FFF2-40B4-BE49-F238E27FC236}">
+                      <a16:creationId xmlns:a16="http://schemas.microsoft.com/office/drawing/2014/main" id="{94A67163-ACB2-FA39-36EB-A99E9C883C84}"/>
+                    </a:ext>
+                  </a:extLst>
+                </p:cNvPr>
+                <p:cNvSpPr/>
+                <p:nvPr/>
+              </p:nvSpPr>
+              <p:spPr>
+                <a:xfrm>
+                  <a:off x="8306382" y="1228507"/>
+                  <a:ext cx="3601758" cy="5339815"/>
+                </a:xfrm>
+                <a:prstGeom prst="rect">
+                  <a:avLst/>
+                </a:prstGeom>
+                <a:noFill/>
+                <a:ln w="9525" cap="flat" cmpd="sng" algn="ctr">
+                  <a:solidFill>
+                    <a:schemeClr val="accent1"/>
+                  </a:solidFill>
+                  <a:prstDash val="solid"/>
+                  <a:round/>
+                  <a:headEnd type="none" w="med" len="med"/>
+                  <a:tailEnd type="none" w="med" len="med"/>
+                </a:ln>
+              </p:spPr>
+              <p:style>
+                <a:lnRef idx="0">
+                  <a:scrgbClr r="0" g="0" b="0"/>
+                </a:lnRef>
+                <a:fillRef idx="0">
+                  <a:scrgbClr r="0" g="0" b="0"/>
+                </a:fillRef>
+                <a:effectRef idx="0">
+                  <a:scrgbClr r="0" g="0" b="0"/>
+                </a:effectRef>
+                <a:fontRef idx="minor">
                   <a:schemeClr val="accent1"/>
-                </a:solidFill>
-                <a:prstDash val="solid"/>
-                <a:round/>
-                <a:headEnd type="none" w="med" len="med"/>
-                <a:tailEnd type="none" w="med" len="med"/>
-              </a:ln>
-            </p:spPr>
-            <p:style>
-              <a:lnRef idx="0">
-                <a:scrgbClr r="0" g="0" b="0"/>
-              </a:lnRef>
-              <a:fillRef idx="0">
-                <a:scrgbClr r="0" g="0" b="0"/>
-              </a:fillRef>
-              <a:effectRef idx="0">
-                <a:scrgbClr r="0" g="0" b="0"/>
-              </a:effectRef>
-              <a:fontRef idx="minor">
-                <a:schemeClr val="accent1"/>
-              </a:fontRef>
-            </p:style>
-            <p:txBody>
-              <a:bodyPr rtlCol="0" anchor="ctr"/>
-              <a:lstStyle/>
-              <a:p>
-                <a:pPr algn="ctr"/>
-                <a:endParaRPr lang="en-US"/>
-              </a:p>
-            </p:txBody>
-          </p:sp>
-          <mc:AlternateContent xmlns:mc="http://schemas.openxmlformats.org/markup-compatibility/2006" xmlns:a14="http://schemas.microsoft.com/office/drawing/2010/main">
-            <mc:Choice Requires="a14">
-              <p:sp>
-                <p:nvSpPr>
-                  <p:cNvPr id="4" name="TextBox 3">
-                    <a:extLst>
-                      <a:ext uri="{FF2B5EF4-FFF2-40B4-BE49-F238E27FC236}">
-                        <a16:creationId xmlns:a16="http://schemas.microsoft.com/office/drawing/2014/main" id="{63B2C840-7C72-C056-FD2A-B1FAC79C9C9D}"/>
-                      </a:ext>
-                    </a:extLst>
-                  </p:cNvPr>
-                  <p:cNvSpPr txBox="1"/>
-                  <p:nvPr/>
-                </p:nvSpPr>
-                <p:spPr>
-                  <a:xfrm>
-                    <a:off x="8397124" y="1293020"/>
-                    <a:ext cx="3420274" cy="2503827"/>
-                  </a:xfrm>
-                  <a:prstGeom prst="rect">
-                    <a:avLst/>
-                  </a:prstGeom>
-                  <a:noFill/>
-                </p:spPr>
-                <p:txBody>
-                  <a:bodyPr wrap="square" rtlCol="0">
-                    <a:spAutoFit/>
-                  </a:bodyPr>
-                  <a:lstStyle/>
-                  <a:p>
-                    <a:r>
-                      <a:rPr lang="en-US" b="1" dirty="0"/>
-                      <a:t>Example: 2-State MDP</a:t>
-                    </a:r>
-                  </a:p>
-                  <a:p>
-                    <a:endParaRPr lang="en-US" dirty="0"/>
-                  </a:p>
-                  <a:p>
-                    <a:r>
-                      <a:rPr lang="en-US" sz="1400" dirty="0"/>
-                      <a:t>Min: </a:t>
-                    </a:r>
-                    <a14:m>
-                      <m:oMath xmlns:m="http://schemas.openxmlformats.org/officeDocument/2006/math">
-                        <m:r>
-                          <a:rPr lang="en-US" sz="1400" b="0" i="1" smtClean="0">
-                            <a:latin typeface="Cambria Math" panose="02040503050406030204" pitchFamily="18" charset="0"/>
-                          </a:rPr>
-                          <m:t>𝑉</m:t>
-                        </m:r>
-                        <m:d>
-                          <m:dPr>
-                            <m:ctrlPr>
-                              <a:rPr lang="en-US" sz="1400" b="0" i="1" smtClean="0">
-                                <a:latin typeface="Cambria Math" panose="02040503050406030204" pitchFamily="18" charset="0"/>
-                              </a:rPr>
-                            </m:ctrlPr>
-                          </m:dPr>
-                          <m:e>
-                            <m:sSub>
-                              <m:sSubPr>
-                                <m:ctrlPr>
-                                  <a:rPr lang="en-US" sz="1400" b="0" i="1" smtClean="0">
-                                    <a:latin typeface="Cambria Math" panose="02040503050406030204" pitchFamily="18" charset="0"/>
-                                  </a:rPr>
-                                </m:ctrlPr>
-                              </m:sSubPr>
-                              <m:e>
-                                <m:r>
-                                  <a:rPr lang="en-US" sz="1400" b="0" i="1" smtClean="0">
-                                    <a:latin typeface="Cambria Math" panose="02040503050406030204" pitchFamily="18" charset="0"/>
-                                  </a:rPr>
-                                  <m:t>𝑠</m:t>
-                                </m:r>
-                              </m:e>
-                              <m:sub>
-                                <m:r>
-                                  <a:rPr lang="en-US" sz="1400" b="0" i="1" smtClean="0">
-                                    <a:latin typeface="Cambria Math" panose="02040503050406030204" pitchFamily="18" charset="0"/>
-                                  </a:rPr>
-                                  <m:t>1</m:t>
-                                </m:r>
-                              </m:sub>
-                            </m:sSub>
-                          </m:e>
-                        </m:d>
-                        <m:r>
-                          <a:rPr lang="en-US" sz="1400" b="0" i="1" smtClean="0">
-                            <a:latin typeface="Cambria Math" panose="02040503050406030204" pitchFamily="18" charset="0"/>
-                          </a:rPr>
-                          <m:t>+</m:t>
-                        </m:r>
-                        <m:r>
-                          <a:rPr lang="en-US" sz="1400" b="0" i="1" smtClean="0">
-                            <a:latin typeface="Cambria Math" panose="02040503050406030204" pitchFamily="18" charset="0"/>
-                          </a:rPr>
-                          <m:t>𝑉</m:t>
-                        </m:r>
-                        <m:r>
-                          <a:rPr lang="en-US" sz="1400" b="0" i="1" smtClean="0">
-                            <a:latin typeface="Cambria Math" panose="02040503050406030204" pitchFamily="18" charset="0"/>
-                          </a:rPr>
-                          <m:t>(</m:t>
-                        </m:r>
-                        <m:sSub>
-                          <m:sSubPr>
-                            <m:ctrlPr>
-                              <a:rPr lang="en-US" sz="1400" b="0" i="1" smtClean="0">
-                                <a:latin typeface="Cambria Math" panose="02040503050406030204" pitchFamily="18" charset="0"/>
-                              </a:rPr>
-                            </m:ctrlPr>
-                          </m:sSubPr>
-                          <m:e>
+                </a:fontRef>
+              </p:style>
+              <p:txBody>
+                <a:bodyPr rtlCol="0" anchor="ctr"/>
+                <a:lstStyle/>
+                <a:p>
+                  <a:pPr algn="ctr"/>
+                  <a:endParaRPr lang="en-US"/>
+                </a:p>
+              </p:txBody>
+            </p:sp>
+            <mc:AlternateContent xmlns:mc="http://schemas.openxmlformats.org/markup-compatibility/2006" xmlns:a14="http://schemas.microsoft.com/office/drawing/2010/main">
+              <mc:Choice Requires="a14">
+                <p:sp>
+                  <p:nvSpPr>
+                    <p:cNvPr id="4" name="TextBox 3">
+                      <a:extLst>
+                        <a:ext uri="{FF2B5EF4-FFF2-40B4-BE49-F238E27FC236}">
+                          <a16:creationId xmlns:a16="http://schemas.microsoft.com/office/drawing/2014/main" id="{63B2C840-7C72-C056-FD2A-B1FAC79C9C9D}"/>
+                        </a:ext>
+                      </a:extLst>
+                    </p:cNvPr>
+                    <p:cNvSpPr txBox="1"/>
+                    <p:nvPr/>
+                  </p:nvSpPr>
+                  <p:spPr>
+                    <a:xfrm>
+                      <a:off x="8397124" y="1293020"/>
+                      <a:ext cx="3420274" cy="2503827"/>
+                    </a:xfrm>
+                    <a:prstGeom prst="rect">
+                      <a:avLst/>
+                    </a:prstGeom>
+                    <a:noFill/>
+                  </p:spPr>
+                  <p:txBody>
+                    <a:bodyPr wrap="square" rtlCol="0">
+                      <a:spAutoFit/>
+                    </a:bodyPr>
+                    <a:lstStyle/>
+                    <a:p>
+                      <a:r>
+                        <a:rPr lang="en-US" b="1" dirty="0"/>
+                        <a:t>Example: 2-State MDP</a:t>
+                      </a:r>
+                    </a:p>
+                    <a:p>
+                      <a:endParaRPr lang="en-US" dirty="0"/>
+                    </a:p>
+                    <a:p>
+                      <a:r>
+                        <a:rPr lang="en-US" sz="1400" dirty="0"/>
+                        <a:t>Min: </a:t>
+                      </a:r>
+                      <a14:m>
+                        <m:oMath xmlns:m="http://schemas.openxmlformats.org/officeDocument/2006/math">
+                          <m:r>
+                            <a:rPr lang="en-US" sz="1400" b="0" i="1" smtClean="0">
+                              <a:latin typeface="Cambria Math" panose="02040503050406030204" pitchFamily="18" charset="0"/>
+                            </a:rPr>
+                            <m:t>𝑉</m:t>
+                          </m:r>
+                          <m:d>
+                            <m:dPr>
+                              <m:ctrlPr>
+                                <a:rPr lang="en-US" sz="1400" b="0" i="1" smtClean="0">
+                                  <a:latin typeface="Cambria Math" panose="02040503050406030204" pitchFamily="18" charset="0"/>
+                                </a:rPr>
+                              </m:ctrlPr>
+                            </m:dPr>
+                            <m:e>
+                              <m:sSub>
+                                <m:sSubPr>
+                                  <m:ctrlPr>
+                                    <a:rPr lang="en-US" sz="1400" b="0" i="1" smtClean="0">
+                                      <a:latin typeface="Cambria Math" panose="02040503050406030204" pitchFamily="18" charset="0"/>
+                                    </a:rPr>
+                                  </m:ctrlPr>
+                                </m:sSubPr>
+                                <m:e>
+                                  <m:r>
+                                    <a:rPr lang="en-US" sz="1400" b="0" i="1" smtClean="0">
+                                      <a:latin typeface="Cambria Math" panose="02040503050406030204" pitchFamily="18" charset="0"/>
+                                    </a:rPr>
+                                    <m:t>𝑠</m:t>
+                                  </m:r>
+                                </m:e>
+                                <m:sub>
+                                  <m:r>
+                                    <a:rPr lang="en-US" sz="1400" b="0" i="1" smtClean="0">
+                                      <a:latin typeface="Cambria Math" panose="02040503050406030204" pitchFamily="18" charset="0"/>
+                                    </a:rPr>
+                                    <m:t>1</m:t>
+                                  </m:r>
+                                </m:sub>
+                              </m:sSub>
+                            </m:e>
+                          </m:d>
+                          <m:r>
+                            <a:rPr lang="en-US" sz="1400" b="0" i="1" smtClean="0">
+                              <a:latin typeface="Cambria Math" panose="02040503050406030204" pitchFamily="18" charset="0"/>
+                            </a:rPr>
+                            <m:t>+</m:t>
+                          </m:r>
+                          <m:r>
+                            <a:rPr lang="en-US" sz="1400" b="0" i="1" smtClean="0">
+                              <a:latin typeface="Cambria Math" panose="02040503050406030204" pitchFamily="18" charset="0"/>
+                            </a:rPr>
+                            <m:t>𝑉</m:t>
+                          </m:r>
+                          <m:r>
+                            <a:rPr lang="en-US" sz="1400" b="0" i="1" smtClean="0">
+                              <a:latin typeface="Cambria Math" panose="02040503050406030204" pitchFamily="18" charset="0"/>
+                            </a:rPr>
+                            <m:t>(</m:t>
+                          </m:r>
+                          <m:sSub>
+                            <m:sSubPr>
+                              <m:ctrlPr>
+                                <a:rPr lang="en-US" sz="1400" b="0" i="1" smtClean="0">
+                                  <a:latin typeface="Cambria Math" panose="02040503050406030204" pitchFamily="18" charset="0"/>
+                                </a:rPr>
+                              </m:ctrlPr>
+                            </m:sSubPr>
+                            <m:e>
+                              <m:r>
+                                <a:rPr lang="en-US" sz="1400" b="0" i="1" smtClean="0">
+                                  <a:latin typeface="Cambria Math" panose="02040503050406030204" pitchFamily="18" charset="0"/>
+                                </a:rPr>
+                                <m:t>𝑠</m:t>
+                              </m:r>
+                            </m:e>
+                            <m:sub>
+                              <m:r>
+                                <a:rPr lang="en-US" sz="1400" b="0" i="1" smtClean="0">
+                                  <a:latin typeface="Cambria Math" panose="02040503050406030204" pitchFamily="18" charset="0"/>
+                                </a:rPr>
+                                <m:t>2</m:t>
+                              </m:r>
+                            </m:sub>
+                          </m:sSub>
+                          <m:r>
+                            <a:rPr lang="en-US" sz="1400" b="0" i="1" smtClean="0">
+                              <a:latin typeface="Cambria Math" panose="02040503050406030204" pitchFamily="18" charset="0"/>
+                            </a:rPr>
+                            <m:t>)</m:t>
+                          </m:r>
+                        </m:oMath>
+                      </a14:m>
+                      <a:endParaRPr lang="en-US" sz="1400" dirty="0"/>
+                    </a:p>
+                    <a:p>
+                      <a:r>
+                        <a:rPr lang="en-US" sz="1400" dirty="0" err="1"/>
+                        <a:t>S.t.</a:t>
+                      </a:r>
+                      <a:r>
+                        <a:rPr lang="en-US" sz="1400" dirty="0"/>
+                        <a:t>:  </a:t>
+                      </a:r>
+                      <a14:m>
+                        <m:oMath xmlns:m="http://schemas.openxmlformats.org/officeDocument/2006/math">
+                          <m:r>
+                            <a:rPr lang="en-US" sz="1400" b="0" i="1" smtClean="0">
+                              <a:latin typeface="Cambria Math" panose="02040503050406030204" pitchFamily="18" charset="0"/>
+                            </a:rPr>
+                            <m:t>𝑉</m:t>
+                          </m:r>
+                          <m:d>
+                            <m:dPr>
+                              <m:ctrlPr>
+                                <a:rPr lang="en-US" sz="1400" b="0" i="1" smtClean="0">
+                                  <a:latin typeface="Cambria Math" panose="02040503050406030204" pitchFamily="18" charset="0"/>
+                                </a:rPr>
+                              </m:ctrlPr>
+                            </m:dPr>
+                            <m:e>
+                              <m:sSub>
+                                <m:sSubPr>
+                                  <m:ctrlPr>
+                                    <a:rPr lang="en-US" sz="1400" b="0" i="1" smtClean="0">
+                                      <a:latin typeface="Cambria Math" panose="02040503050406030204" pitchFamily="18" charset="0"/>
+                                    </a:rPr>
+                                  </m:ctrlPr>
+                                </m:sSubPr>
+                                <m:e>
+                                  <m:r>
+                                    <a:rPr lang="en-US" sz="1400" b="0" i="1" smtClean="0">
+                                      <a:latin typeface="Cambria Math" panose="02040503050406030204" pitchFamily="18" charset="0"/>
+                                    </a:rPr>
+                                    <m:t>𝑠</m:t>
+                                  </m:r>
+                                </m:e>
+                                <m:sub>
+                                  <m:r>
+                                    <a:rPr lang="en-US" sz="1400" b="0" i="1" smtClean="0">
+                                      <a:latin typeface="Cambria Math" panose="02040503050406030204" pitchFamily="18" charset="0"/>
+                                    </a:rPr>
+                                    <m:t>1</m:t>
+                                  </m:r>
+                                </m:sub>
+                              </m:sSub>
+                            </m:e>
+                          </m:d>
+                          <m:r>
+                            <a:rPr lang="en-US" sz="1400" b="0" i="1" smtClean="0">
+                              <a:latin typeface="Cambria Math" panose="02040503050406030204" pitchFamily="18" charset="0"/>
+                            </a:rPr>
+                            <m:t>≥</m:t>
+                          </m:r>
+                          <m:sSub>
+                            <m:sSubPr>
+                              <m:ctrlPr>
+                                <a:rPr lang="en-US" sz="1400" b="0" i="1" smtClean="0">
+                                  <a:latin typeface="Cambria Math" panose="02040503050406030204" pitchFamily="18" charset="0"/>
+                                </a:rPr>
+                              </m:ctrlPr>
+                            </m:sSubPr>
+                            <m:e>
+                              <m:r>
+                                <a:rPr lang="en-US" sz="1400" b="0" i="1" smtClean="0">
+                                  <a:latin typeface="Cambria Math" panose="02040503050406030204" pitchFamily="18" charset="0"/>
+                                </a:rPr>
+                                <m:t>𝑅</m:t>
+                              </m:r>
+                            </m:e>
+                            <m:sub>
+                              <m:r>
+                                <a:rPr lang="en-US" sz="1400" b="0" i="1" smtClean="0">
+                                  <a:latin typeface="Cambria Math" panose="02040503050406030204" pitchFamily="18" charset="0"/>
+                                </a:rPr>
+                                <m:t>1</m:t>
+                              </m:r>
+                            </m:sub>
+                          </m:sSub>
+                          <m:r>
+                            <a:rPr lang="en-US" sz="1400" b="0" i="1" smtClean="0">
+                              <a:latin typeface="Cambria Math" panose="02040503050406030204" pitchFamily="18" charset="0"/>
+                            </a:rPr>
+                            <m:t>+</m:t>
+                          </m:r>
+                          <m:r>
+                            <a:rPr lang="en-US" sz="1400" b="0" i="1" smtClean="0">
+                              <a:latin typeface="Cambria Math" panose="02040503050406030204" pitchFamily="18" charset="0"/>
+                            </a:rPr>
+                            <m:t>𝛾</m:t>
+                          </m:r>
+                          <m:d>
+                            <m:dPr>
+                              <m:ctrlPr>
+                                <a:rPr lang="en-US" sz="1400" b="0" i="1" smtClean="0">
+                                  <a:latin typeface="Cambria Math" panose="02040503050406030204" pitchFamily="18" charset="0"/>
+                                </a:rPr>
+                              </m:ctrlPr>
+                            </m:dPr>
+                            <m:e>
+                              <m:sSub>
+                                <m:sSubPr>
+                                  <m:ctrlPr>
+                                    <a:rPr lang="en-US" sz="1400" b="0" i="1" smtClean="0">
+                                      <a:latin typeface="Cambria Math" panose="02040503050406030204" pitchFamily="18" charset="0"/>
+                                    </a:rPr>
+                                  </m:ctrlPr>
+                                </m:sSubPr>
+                                <m:e>
+                                  <m:r>
+                                    <a:rPr lang="en-US" sz="1400" b="0" i="1" smtClean="0">
+                                      <a:latin typeface="Cambria Math" panose="02040503050406030204" pitchFamily="18" charset="0"/>
+                                    </a:rPr>
+                                    <m:t>𝑃</m:t>
+                                  </m:r>
+                                </m:e>
+                                <m:sub>
+                                  <m:r>
+                                    <a:rPr lang="en-US" sz="1400" b="0" i="1" smtClean="0">
+                                      <a:latin typeface="Cambria Math" panose="02040503050406030204" pitchFamily="18" charset="0"/>
+                                    </a:rPr>
+                                    <m:t>11</m:t>
+                                  </m:r>
+                                </m:sub>
+                              </m:sSub>
+                              <m:r>
+                                <a:rPr lang="en-US" sz="1400" b="0" i="1" smtClean="0">
+                                  <a:latin typeface="Cambria Math" panose="02040503050406030204" pitchFamily="18" charset="0"/>
+                                </a:rPr>
+                                <m:t>𝑉</m:t>
+                              </m:r>
+                              <m:d>
+                                <m:dPr>
+                                  <m:ctrlPr>
+                                    <a:rPr lang="en-US" sz="1400" b="0" i="1" smtClean="0">
+                                      <a:latin typeface="Cambria Math" panose="02040503050406030204" pitchFamily="18" charset="0"/>
+                                    </a:rPr>
+                                  </m:ctrlPr>
+                                </m:dPr>
+                                <m:e>
+                                  <m:sSub>
+                                    <m:sSubPr>
+                                      <m:ctrlPr>
+                                        <a:rPr lang="en-US" sz="1400" b="0" i="1" smtClean="0">
+                                          <a:latin typeface="Cambria Math" panose="02040503050406030204" pitchFamily="18" charset="0"/>
+                                        </a:rPr>
+                                      </m:ctrlPr>
+                                    </m:sSubPr>
+                                    <m:e>
+                                      <m:r>
+                                        <a:rPr lang="en-US" sz="1400" b="0" i="1" smtClean="0">
+                                          <a:latin typeface="Cambria Math" panose="02040503050406030204" pitchFamily="18" charset="0"/>
+                                        </a:rPr>
+                                        <m:t>𝑠</m:t>
+                                      </m:r>
+                                    </m:e>
+                                    <m:sub>
+                                      <m:r>
+                                        <a:rPr lang="en-US" sz="1400" b="0" i="1" smtClean="0">
+                                          <a:latin typeface="Cambria Math" panose="02040503050406030204" pitchFamily="18" charset="0"/>
+                                        </a:rPr>
+                                        <m:t>1</m:t>
+                                      </m:r>
+                                    </m:sub>
+                                  </m:sSub>
+                                </m:e>
+                              </m:d>
+                              <m:r>
+                                <a:rPr lang="en-US" sz="1400" b="0" i="1" smtClean="0">
+                                  <a:latin typeface="Cambria Math" panose="02040503050406030204" pitchFamily="18" charset="0"/>
+                                </a:rPr>
+                                <m:t>+</m:t>
+                              </m:r>
+                              <m:sSub>
+                                <m:sSubPr>
+                                  <m:ctrlPr>
+                                    <a:rPr lang="en-US" sz="1400" b="0" i="1" smtClean="0">
+                                      <a:latin typeface="Cambria Math" panose="02040503050406030204" pitchFamily="18" charset="0"/>
+                                    </a:rPr>
+                                  </m:ctrlPr>
+                                </m:sSubPr>
+                                <m:e>
+                                  <m:r>
+                                    <a:rPr lang="en-US" sz="1400" b="0" i="1" smtClean="0">
+                                      <a:latin typeface="Cambria Math" panose="02040503050406030204" pitchFamily="18" charset="0"/>
+                                    </a:rPr>
+                                    <m:t>𝑃</m:t>
+                                  </m:r>
+                                </m:e>
+                                <m:sub>
+                                  <m:r>
+                                    <a:rPr lang="en-US" sz="1400" b="0" i="1" smtClean="0">
+                                      <a:latin typeface="Cambria Math" panose="02040503050406030204" pitchFamily="18" charset="0"/>
+                                    </a:rPr>
+                                    <m:t>12</m:t>
+                                  </m:r>
+                                </m:sub>
+                              </m:sSub>
+                              <m:r>
+                                <a:rPr lang="en-US" sz="1400" b="0" i="1" smtClean="0">
+                                  <a:latin typeface="Cambria Math" panose="02040503050406030204" pitchFamily="18" charset="0"/>
+                                </a:rPr>
+                                <m:t>𝑉</m:t>
+                              </m:r>
+                              <m:d>
+                                <m:dPr>
+                                  <m:ctrlPr>
+                                    <a:rPr lang="en-US" sz="1400" b="0" i="1" smtClean="0">
+                                      <a:latin typeface="Cambria Math" panose="02040503050406030204" pitchFamily="18" charset="0"/>
+                                    </a:rPr>
+                                  </m:ctrlPr>
+                                </m:dPr>
+                                <m:e>
+                                  <m:sSub>
+                                    <m:sSubPr>
+                                      <m:ctrlPr>
+                                        <a:rPr lang="en-US" sz="1400" b="0" i="1" smtClean="0">
+                                          <a:latin typeface="Cambria Math" panose="02040503050406030204" pitchFamily="18" charset="0"/>
+                                        </a:rPr>
+                                      </m:ctrlPr>
+                                    </m:sSubPr>
+                                    <m:e>
+                                      <m:r>
+                                        <a:rPr lang="en-US" sz="1400" b="0" i="1" smtClean="0">
+                                          <a:latin typeface="Cambria Math" panose="02040503050406030204" pitchFamily="18" charset="0"/>
+                                        </a:rPr>
+                                        <m:t>𝑠</m:t>
+                                      </m:r>
+                                    </m:e>
+                                    <m:sub>
+                                      <m:r>
+                                        <a:rPr lang="en-US" sz="1400" b="0" i="1" smtClean="0">
+                                          <a:latin typeface="Cambria Math" panose="02040503050406030204" pitchFamily="18" charset="0"/>
+                                        </a:rPr>
+                                        <m:t>2</m:t>
+                                      </m:r>
+                                    </m:sub>
+                                  </m:sSub>
+                                </m:e>
+                              </m:d>
+                            </m:e>
+                          </m:d>
+                        </m:oMath>
+                      </a14:m>
+                      <a:endParaRPr lang="en-US" sz="1400" b="0" dirty="0"/>
+                    </a:p>
+                    <a:p>
+                      <a:pPr/>
+                      <a14:m>
+                        <m:oMathPara xmlns:m="http://schemas.openxmlformats.org/officeDocument/2006/math">
+                          <m:oMath>
                             <m:r>
                               <a:rPr lang="en-US" sz="1400" b="0" i="1" smtClean="0">
                                 <a:latin typeface="Cambria Math" panose="02040503050406030204" pitchFamily="18" charset="0"/>
                               </a:rPr>
-                              <m:t>𝑠</m:t>
+                              <m:t>         </m:t>
                             </m:r>
-                          </m:e>
-                          <m:sub>
                             <m:r>
-                              <a:rPr lang="en-US" sz="1400" b="0" i="1" smtClean="0">
-                                <a:latin typeface="Cambria Math" panose="02040503050406030204" pitchFamily="18" charset="0"/>
-                              </a:rPr>
-                              <m:t>2</m:t>
-                            </m:r>
-                          </m:sub>
-                        </m:sSub>
-                        <m:r>
-                          <a:rPr lang="en-US" sz="1400" b="0" i="1" smtClean="0">
-                            <a:latin typeface="Cambria Math" panose="02040503050406030204" pitchFamily="18" charset="0"/>
-                          </a:rPr>
-                          <m:t>)</m:t>
-                        </m:r>
-                      </m:oMath>
-                    </a14:m>
-                    <a:endParaRPr lang="en-US" sz="1400" dirty="0"/>
-                  </a:p>
-                  <a:p>
-                    <a:r>
-                      <a:rPr lang="en-US" sz="1400" dirty="0" err="1"/>
-                      <a:t>S.t.</a:t>
-                    </a:r>
-                    <a:r>
-                      <a:rPr lang="en-US" sz="1400" dirty="0"/>
-                      <a:t>:  </a:t>
-                    </a:r>
-                    <a14:m>
-                      <m:oMath xmlns:m="http://schemas.openxmlformats.org/officeDocument/2006/math">
-                        <m:r>
-                          <a:rPr lang="en-US" sz="1400" b="0" i="1" smtClean="0">
-                            <a:latin typeface="Cambria Math" panose="02040503050406030204" pitchFamily="18" charset="0"/>
-                          </a:rPr>
-                          <m:t>𝑉</m:t>
-                        </m:r>
-                        <m:d>
-                          <m:dPr>
-                            <m:ctrlPr>
-                              <a:rPr lang="en-US" sz="1400" b="0" i="1" smtClean="0">
-                                <a:latin typeface="Cambria Math" panose="02040503050406030204" pitchFamily="18" charset="0"/>
-                              </a:rPr>
-                            </m:ctrlPr>
-                          </m:dPr>
-                          <m:e>
-                            <m:sSub>
-                              <m:sSubPr>
-                                <m:ctrlPr>
-                                  <a:rPr lang="en-US" sz="1400" b="0" i="1" smtClean="0">
-                                    <a:latin typeface="Cambria Math" panose="02040503050406030204" pitchFamily="18" charset="0"/>
-                                  </a:rPr>
-                                </m:ctrlPr>
-                              </m:sSubPr>
-                              <m:e>
-                                <m:r>
-                                  <a:rPr lang="en-US" sz="1400" b="0" i="1" smtClean="0">
-                                    <a:latin typeface="Cambria Math" panose="02040503050406030204" pitchFamily="18" charset="0"/>
-                                  </a:rPr>
-                                  <m:t>𝑠</m:t>
-                                </m:r>
-                              </m:e>
-                              <m:sub>
-                                <m:r>
-                                  <a:rPr lang="en-US" sz="1400" b="0" i="1" smtClean="0">
-                                    <a:latin typeface="Cambria Math" panose="02040503050406030204" pitchFamily="18" charset="0"/>
-                                  </a:rPr>
-                                  <m:t>1</m:t>
-                                </m:r>
-                              </m:sub>
-                            </m:sSub>
-                          </m:e>
-                        </m:d>
-                        <m:r>
-                          <a:rPr lang="en-US" sz="1400" b="0" i="1" smtClean="0">
-                            <a:latin typeface="Cambria Math" panose="02040503050406030204" pitchFamily="18" charset="0"/>
-                          </a:rPr>
-                          <m:t>≥</m:t>
-                        </m:r>
-                        <m:sSub>
-                          <m:sSubPr>
-                            <m:ctrlPr>
-                              <a:rPr lang="en-US" sz="1400" b="0" i="1" smtClean="0">
-                                <a:latin typeface="Cambria Math" panose="02040503050406030204" pitchFamily="18" charset="0"/>
-                              </a:rPr>
-                            </m:ctrlPr>
-                          </m:sSubPr>
-                          <m:e>
-                            <m:r>
-                              <a:rPr lang="en-US" sz="1400" b="0" i="1" smtClean="0">
-                                <a:latin typeface="Cambria Math" panose="02040503050406030204" pitchFamily="18" charset="0"/>
-                              </a:rPr>
-                              <m:t>𝑅</m:t>
-                            </m:r>
-                          </m:e>
-                          <m:sub>
-                            <m:r>
-                              <a:rPr lang="en-US" sz="1400" b="0" i="1" smtClean="0">
-                                <a:latin typeface="Cambria Math" panose="02040503050406030204" pitchFamily="18" charset="0"/>
-                              </a:rPr>
-                              <m:t>1</m:t>
-                            </m:r>
-                          </m:sub>
-                        </m:sSub>
-                        <m:r>
-                          <a:rPr lang="en-US" sz="1400" b="0" i="1" smtClean="0">
-                            <a:latin typeface="Cambria Math" panose="02040503050406030204" pitchFamily="18" charset="0"/>
-                          </a:rPr>
-                          <m:t>+</m:t>
-                        </m:r>
-                        <m:r>
-                          <a:rPr lang="en-US" sz="1400" b="0" i="1" smtClean="0">
-                            <a:latin typeface="Cambria Math" panose="02040503050406030204" pitchFamily="18" charset="0"/>
-                          </a:rPr>
-                          <m:t>𝛾</m:t>
-                        </m:r>
-                        <m:d>
-                          <m:dPr>
-                            <m:ctrlPr>
-                              <a:rPr lang="en-US" sz="1400" b="0" i="1" smtClean="0">
-                                <a:latin typeface="Cambria Math" panose="02040503050406030204" pitchFamily="18" charset="0"/>
-                              </a:rPr>
-                            </m:ctrlPr>
-                          </m:dPr>
-                          <m:e>
-                            <m:sSub>
-                              <m:sSubPr>
-                                <m:ctrlPr>
-                                  <a:rPr lang="en-US" sz="1400" b="0" i="1" smtClean="0">
-                                    <a:latin typeface="Cambria Math" panose="02040503050406030204" pitchFamily="18" charset="0"/>
-                                  </a:rPr>
-                                </m:ctrlPr>
-                              </m:sSubPr>
-                              <m:e>
-                                <m:r>
-                                  <a:rPr lang="en-US" sz="1400" b="0" i="1" smtClean="0">
-                                    <a:latin typeface="Cambria Math" panose="02040503050406030204" pitchFamily="18" charset="0"/>
-                                  </a:rPr>
-                                  <m:t>𝑃</m:t>
-                                </m:r>
-                              </m:e>
-                              <m:sub>
-                                <m:r>
-                                  <a:rPr lang="en-US" sz="1400" b="0" i="1" smtClean="0">
-                                    <a:latin typeface="Cambria Math" panose="02040503050406030204" pitchFamily="18" charset="0"/>
-                                  </a:rPr>
-                                  <m:t>11</m:t>
-                                </m:r>
-                              </m:sub>
-                            </m:sSub>
-                            <m:r>
-                              <a:rPr lang="en-US" sz="1400" b="0" i="1" smtClean="0">
+                              <a:rPr lang="en-US" sz="1400" i="1">
                                 <a:latin typeface="Cambria Math" panose="02040503050406030204" pitchFamily="18" charset="0"/>
                               </a:rPr>
                               <m:t>𝑉</m:t>
@@ -35904,7 +36962,7 @@
                             <m:d>
                               <m:dPr>
                                 <m:ctrlPr>
-                                  <a:rPr lang="en-US" sz="1400" b="0" i="1" smtClean="0">
+                                  <a:rPr lang="en-US" sz="1400" i="1">
                                     <a:latin typeface="Cambria Math" panose="02040503050406030204" pitchFamily="18" charset="0"/>
                                   </a:rPr>
                                 </m:ctrlPr>
@@ -35913,87 +36971,14 @@
                                 <m:sSub>
                                   <m:sSubPr>
                                     <m:ctrlPr>
-                                      <a:rPr lang="en-US" sz="1400" b="0" i="1" smtClean="0">
+                                      <a:rPr lang="en-US" sz="1400" i="1">
                                         <a:latin typeface="Cambria Math" panose="02040503050406030204" pitchFamily="18" charset="0"/>
                                       </a:rPr>
                                     </m:ctrlPr>
                                   </m:sSubPr>
                                   <m:e>
                                     <m:r>
-                                      <a:rPr lang="en-US" sz="1400" b="0" i="1" smtClean="0">
-                                        <a:latin typeface="Cambria Math" panose="02040503050406030204" pitchFamily="18" charset="0"/>
-                                      </a:rPr>
-                                      <m:t>𝑠</m:t>
-                                    </m:r>
-                                  </m:e>
-                                  <m:sub>
-                                    <m:r>
-                                      <a:rPr lang="en-US" sz="1400" b="0" i="1" smtClean="0">
-                                        <a:latin typeface="Cambria Math" panose="02040503050406030204" pitchFamily="18" charset="0"/>
-                                      </a:rPr>
-                                      <m:t>1</m:t>
-                                    </m:r>
-                                  </m:sub>
-                                </m:sSub>
-                              </m:e>
-                            </m:d>
-                            <m:r>
-                              <a:rPr lang="en-US" sz="1400" b="0" i="1" smtClean="0">
-                                <a:latin typeface="Cambria Math" panose="02040503050406030204" pitchFamily="18" charset="0"/>
-                              </a:rPr>
-                              <m:t>+</m:t>
-                            </m:r>
-                            <m:sSub>
-                              <m:sSubPr>
-                                <m:ctrlPr>
-                                  <a:rPr lang="en-US" sz="1400" b="0" i="1" smtClean="0">
-                                    <a:latin typeface="Cambria Math" panose="02040503050406030204" pitchFamily="18" charset="0"/>
-                                  </a:rPr>
-                                </m:ctrlPr>
-                              </m:sSubPr>
-                              <m:e>
-                                <m:r>
-                                  <a:rPr lang="en-US" sz="1400" b="0" i="1" smtClean="0">
-                                    <a:latin typeface="Cambria Math" panose="02040503050406030204" pitchFamily="18" charset="0"/>
-                                  </a:rPr>
-                                  <m:t>𝑃</m:t>
-                                </m:r>
-                              </m:e>
-                              <m:sub>
-                                <m:r>
-                                  <a:rPr lang="en-US" sz="1400" b="0" i="1" smtClean="0">
-                                    <a:latin typeface="Cambria Math" panose="02040503050406030204" pitchFamily="18" charset="0"/>
-                                  </a:rPr>
-                                  <m:t>12</m:t>
-                                </m:r>
-                              </m:sub>
-                            </m:sSub>
-                            <m:r>
-                              <a:rPr lang="en-US" sz="1400" b="0" i="1" smtClean="0">
-                                <a:latin typeface="Cambria Math" panose="02040503050406030204" pitchFamily="18" charset="0"/>
-                              </a:rPr>
-                              <m:t>𝑉</m:t>
-                            </m:r>
-                            <m:d>
-                              <m:dPr>
-                                <m:ctrlPr>
-                                  <a:rPr lang="en-US" sz="1400" b="0" i="1" smtClean="0">
-                                    <a:latin typeface="Cambria Math" panose="02040503050406030204" pitchFamily="18" charset="0"/>
-                                  </a:rPr>
-                                </m:ctrlPr>
-                              </m:dPr>
-                              <m:e>
-                                <m:sSub>
-                                  <m:sSubPr>
-                                    <m:ctrlPr>
-                                      <a:rPr lang="en-US" sz="1400" b="0" i="1" smtClean="0">
-                                        <a:latin typeface="Cambria Math" panose="02040503050406030204" pitchFamily="18" charset="0"/>
-                                      </a:rPr>
-                                    </m:ctrlPr>
-                                  </m:sSubPr>
-                                  <m:e>
-                                    <m:r>
-                                      <a:rPr lang="en-US" sz="1400" b="0" i="1" smtClean="0">
+                                      <a:rPr lang="en-US" sz="1400" i="1">
                                         <a:latin typeface="Cambria Math" panose="02040503050406030204" pitchFamily="18" charset="0"/>
                                       </a:rPr>
                                       <m:t>𝑠</m:t>
@@ -36010,70 +36995,392 @@
                                 </m:sSub>
                               </m:e>
                             </m:d>
-                          </m:e>
-                        </m:d>
-                      </m:oMath>
-                    </a14:m>
-                    <a:endParaRPr lang="en-US" sz="1400" b="0" dirty="0"/>
-                  </a:p>
-                  <a:p>
-                    <a:pPr/>
-                    <a14:m>
-                      <m:oMathPara xmlns:m="http://schemas.openxmlformats.org/officeDocument/2006/math">
-                        <m:oMath>
+                            <m:r>
+                              <a:rPr lang="en-US" sz="1400" b="0" i="1" smtClean="0">
+                                <a:latin typeface="Cambria Math" panose="02040503050406030204" pitchFamily="18" charset="0"/>
+                              </a:rPr>
+                              <m:t>≥</m:t>
+                            </m:r>
+                            <m:sSub>
+                              <m:sSubPr>
+                                <m:ctrlPr>
+                                  <a:rPr lang="en-US" sz="1400" i="1">
+                                    <a:latin typeface="Cambria Math" panose="02040503050406030204" pitchFamily="18" charset="0"/>
+                                  </a:rPr>
+                                </m:ctrlPr>
+                              </m:sSubPr>
+                              <m:e>
+                                <m:r>
+                                  <a:rPr lang="en-US" sz="1400" i="1">
+                                    <a:latin typeface="Cambria Math" panose="02040503050406030204" pitchFamily="18" charset="0"/>
+                                  </a:rPr>
+                                  <m:t>𝑅</m:t>
+                                </m:r>
+                              </m:e>
+                              <m:sub>
+                                <m:r>
+                                  <a:rPr lang="en-US" sz="1400" b="0" i="1" smtClean="0">
+                                    <a:latin typeface="Cambria Math" panose="02040503050406030204" pitchFamily="18" charset="0"/>
+                                  </a:rPr>
+                                  <m:t>2</m:t>
+                                </m:r>
+                              </m:sub>
+                            </m:sSub>
+                            <m:r>
+                              <a:rPr lang="en-US" sz="1400" i="1">
+                                <a:latin typeface="Cambria Math" panose="02040503050406030204" pitchFamily="18" charset="0"/>
+                              </a:rPr>
+                              <m:t>+</m:t>
+                            </m:r>
+                            <m:r>
+                              <a:rPr lang="en-US" sz="1400" i="1">
+                                <a:latin typeface="Cambria Math" panose="02040503050406030204" pitchFamily="18" charset="0"/>
+                              </a:rPr>
+                              <m:t>𝛾</m:t>
+                            </m:r>
+                            <m:d>
+                              <m:dPr>
+                                <m:ctrlPr>
+                                  <a:rPr lang="en-US" sz="1400" i="1">
+                                    <a:latin typeface="Cambria Math" panose="02040503050406030204" pitchFamily="18" charset="0"/>
+                                  </a:rPr>
+                                </m:ctrlPr>
+                              </m:dPr>
+                              <m:e>
+                                <m:sSub>
+                                  <m:sSubPr>
+                                    <m:ctrlPr>
+                                      <a:rPr lang="en-US" sz="1400" i="1">
+                                        <a:latin typeface="Cambria Math" panose="02040503050406030204" pitchFamily="18" charset="0"/>
+                                      </a:rPr>
+                                    </m:ctrlPr>
+                                  </m:sSubPr>
+                                  <m:e>
+                                    <m:r>
+                                      <a:rPr lang="en-US" sz="1400" i="1">
+                                        <a:latin typeface="Cambria Math" panose="02040503050406030204" pitchFamily="18" charset="0"/>
+                                      </a:rPr>
+                                      <m:t>𝑃</m:t>
+                                    </m:r>
+                                  </m:e>
+                                  <m:sub>
+                                    <m:r>
+                                      <a:rPr lang="en-US" sz="1400" b="0" i="1" smtClean="0">
+                                        <a:latin typeface="Cambria Math" panose="02040503050406030204" pitchFamily="18" charset="0"/>
+                                      </a:rPr>
+                                      <m:t>2</m:t>
+                                    </m:r>
+                                    <m:r>
+                                      <a:rPr lang="en-US" sz="1400" i="1">
+                                        <a:latin typeface="Cambria Math" panose="02040503050406030204" pitchFamily="18" charset="0"/>
+                                      </a:rPr>
+                                      <m:t>1</m:t>
+                                    </m:r>
+                                  </m:sub>
+                                </m:sSub>
+                                <m:r>
+                                  <a:rPr lang="en-US" sz="1400" i="1">
+                                    <a:latin typeface="Cambria Math" panose="02040503050406030204" pitchFamily="18" charset="0"/>
+                                  </a:rPr>
+                                  <m:t>𝑉</m:t>
+                                </m:r>
+                                <m:d>
+                                  <m:dPr>
+                                    <m:ctrlPr>
+                                      <a:rPr lang="en-US" sz="1400" i="1">
+                                        <a:latin typeface="Cambria Math" panose="02040503050406030204" pitchFamily="18" charset="0"/>
+                                      </a:rPr>
+                                    </m:ctrlPr>
+                                  </m:dPr>
+                                  <m:e>
+                                    <m:sSub>
+                                      <m:sSubPr>
+                                        <m:ctrlPr>
+                                          <a:rPr lang="en-US" sz="1400" i="1">
+                                            <a:latin typeface="Cambria Math" panose="02040503050406030204" pitchFamily="18" charset="0"/>
+                                          </a:rPr>
+                                        </m:ctrlPr>
+                                      </m:sSubPr>
+                                      <m:e>
+                                        <m:r>
+                                          <a:rPr lang="en-US" sz="1400" i="1">
+                                            <a:latin typeface="Cambria Math" panose="02040503050406030204" pitchFamily="18" charset="0"/>
+                                          </a:rPr>
+                                          <m:t>𝑠</m:t>
+                                        </m:r>
+                                      </m:e>
+                                      <m:sub>
+                                        <m:r>
+                                          <a:rPr lang="en-US" sz="1400" i="1">
+                                            <a:latin typeface="Cambria Math" panose="02040503050406030204" pitchFamily="18" charset="0"/>
+                                          </a:rPr>
+                                          <m:t>1</m:t>
+                                        </m:r>
+                                      </m:sub>
+                                    </m:sSub>
+                                  </m:e>
+                                </m:d>
+                                <m:r>
+                                  <a:rPr lang="en-US" sz="1400" i="1">
+                                    <a:latin typeface="Cambria Math" panose="02040503050406030204" pitchFamily="18" charset="0"/>
+                                  </a:rPr>
+                                  <m:t>+</m:t>
+                                </m:r>
+                                <m:sSub>
+                                  <m:sSubPr>
+                                    <m:ctrlPr>
+                                      <a:rPr lang="en-US" sz="1400" i="1">
+                                        <a:latin typeface="Cambria Math" panose="02040503050406030204" pitchFamily="18" charset="0"/>
+                                      </a:rPr>
+                                    </m:ctrlPr>
+                                  </m:sSubPr>
+                                  <m:e>
+                                    <m:r>
+                                      <a:rPr lang="en-US" sz="1400" i="1">
+                                        <a:latin typeface="Cambria Math" panose="02040503050406030204" pitchFamily="18" charset="0"/>
+                                      </a:rPr>
+                                      <m:t>𝑃</m:t>
+                                    </m:r>
+                                  </m:e>
+                                  <m:sub>
+                                    <m:r>
+                                      <a:rPr lang="en-US" sz="1400" b="0" i="1" smtClean="0">
+                                        <a:latin typeface="Cambria Math" panose="02040503050406030204" pitchFamily="18" charset="0"/>
+                                      </a:rPr>
+                                      <m:t>2</m:t>
+                                    </m:r>
+                                    <m:r>
+                                      <a:rPr lang="en-US" sz="1400" i="1">
+                                        <a:latin typeface="Cambria Math" panose="02040503050406030204" pitchFamily="18" charset="0"/>
+                                      </a:rPr>
+                                      <m:t>2</m:t>
+                                    </m:r>
+                                  </m:sub>
+                                </m:sSub>
+                                <m:r>
+                                  <a:rPr lang="en-US" sz="1400" i="1">
+                                    <a:latin typeface="Cambria Math" panose="02040503050406030204" pitchFamily="18" charset="0"/>
+                                  </a:rPr>
+                                  <m:t>𝑉</m:t>
+                                </m:r>
+                                <m:d>
+                                  <m:dPr>
+                                    <m:ctrlPr>
+                                      <a:rPr lang="en-US" sz="1400" i="1">
+                                        <a:latin typeface="Cambria Math" panose="02040503050406030204" pitchFamily="18" charset="0"/>
+                                      </a:rPr>
+                                    </m:ctrlPr>
+                                  </m:dPr>
+                                  <m:e>
+                                    <m:sSub>
+                                      <m:sSubPr>
+                                        <m:ctrlPr>
+                                          <a:rPr lang="en-US" sz="1400" i="1">
+                                            <a:latin typeface="Cambria Math" panose="02040503050406030204" pitchFamily="18" charset="0"/>
+                                          </a:rPr>
+                                        </m:ctrlPr>
+                                      </m:sSubPr>
+                                      <m:e>
+                                        <m:r>
+                                          <a:rPr lang="en-US" sz="1400" i="1">
+                                            <a:latin typeface="Cambria Math" panose="02040503050406030204" pitchFamily="18" charset="0"/>
+                                          </a:rPr>
+                                          <m:t>𝑠</m:t>
+                                        </m:r>
+                                      </m:e>
+                                      <m:sub>
+                                        <m:r>
+                                          <a:rPr lang="en-US" sz="1400" i="1">
+                                            <a:latin typeface="Cambria Math" panose="02040503050406030204" pitchFamily="18" charset="0"/>
+                                          </a:rPr>
+                                          <m:t>2</m:t>
+                                        </m:r>
+                                      </m:sub>
+                                    </m:sSub>
+                                  </m:e>
+                                </m:d>
+                              </m:e>
+                            </m:d>
+                          </m:oMath>
+                        </m:oMathPara>
+                      </a14:m>
+                      <a:endParaRPr lang="en-US" sz="1400" dirty="0"/>
+                    </a:p>
+                    <a:p>
+                      <a:endParaRPr lang="en-US" sz="1400" dirty="0"/>
+                    </a:p>
+                    <a:p>
+                      <a:r>
+                        <a:rPr lang="en-US" sz="1400" dirty="0"/>
+                        <a:t>Where </a:t>
+                      </a:r>
+                      <a:r>
+                        <a:rPr lang="en-US" sz="1400" b="1" dirty="0"/>
+                        <a:t>following </a:t>
+                      </a:r>
+                      <a14:m>
+                        <m:oMath xmlns:m="http://schemas.openxmlformats.org/officeDocument/2006/math">
                           <m:r>
-                            <a:rPr lang="en-US" sz="1400" b="0" i="1" smtClean="0">
+                            <a:rPr lang="en-US" sz="1400" b="1" i="1" smtClean="0">
                               <a:latin typeface="Cambria Math" panose="02040503050406030204" pitchFamily="18" charset="0"/>
                             </a:rPr>
-                            <m:t>         </m:t>
+                            <m:t>𝝅</m:t>
                           </m:r>
+                        </m:oMath>
+                      </a14:m>
+                      <a:r>
+                        <a:rPr lang="en-US" sz="1400" b="1" dirty="0"/>
+                        <a:t> </a:t>
+                      </a:r>
+                      <a:r>
+                        <a:rPr lang="en-US" sz="1400" dirty="0"/>
+                        <a:t>has</a:t>
+                      </a:r>
+                    </a:p>
+                    <a:p>
+                      <a14:m>
+                        <m:oMath xmlns:m="http://schemas.openxmlformats.org/officeDocument/2006/math">
+                          <m:sSub>
+                            <m:sSubPr>
+                              <m:ctrlPr>
+                                <a:rPr lang="en-US" sz="1400" i="1" dirty="0">
+                                  <a:latin typeface="Cambria Math" panose="02040503050406030204" pitchFamily="18" charset="0"/>
+                                </a:rPr>
+                              </m:ctrlPr>
+                            </m:sSubPr>
+                            <m:e>
+                              <m:r>
+                                <a:rPr lang="en-US" sz="1400" i="1" dirty="0">
+                                  <a:latin typeface="Cambria Math" panose="02040503050406030204" pitchFamily="18" charset="0"/>
+                                </a:rPr>
+                                <m:t>𝑅</m:t>
+                              </m:r>
+                            </m:e>
+                            <m:sub>
+                              <m:r>
+                                <a:rPr lang="en-US" sz="1400" i="1" dirty="0">
+                                  <a:latin typeface="Cambria Math" panose="02040503050406030204" pitchFamily="18" charset="0"/>
+                                </a:rPr>
+                                <m:t>𝑥</m:t>
+                              </m:r>
+                            </m:sub>
+                          </m:sSub>
                           <m:r>
-                            <a:rPr lang="en-US" sz="1400" i="1">
+                            <a:rPr lang="en-US" sz="1400" i="1" dirty="0">
                               <a:latin typeface="Cambria Math" panose="02040503050406030204" pitchFamily="18" charset="0"/>
                             </a:rPr>
-                            <m:t>𝑉</m:t>
+                            <m:t> </m:t>
                           </m:r>
-                          <m:d>
-                            <m:dPr>
+                        </m:oMath>
+                      </a14:m>
+                      <a:r>
+                        <a:rPr lang="en-US" sz="1400" dirty="0"/>
+                        <a:t>immediate reward of  </a:t>
+                      </a:r>
+                      <a14:m>
+                        <m:oMath xmlns:m="http://schemas.openxmlformats.org/officeDocument/2006/math">
+                          <m:sSub>
+                            <m:sSubPr>
                               <m:ctrlPr>
                                 <a:rPr lang="en-US" sz="1400" i="1">
                                   <a:latin typeface="Cambria Math" panose="02040503050406030204" pitchFamily="18" charset="0"/>
                                 </a:rPr>
                               </m:ctrlPr>
-                            </m:dPr>
+                            </m:sSubPr>
                             <m:e>
-                              <m:sSub>
-                                <m:sSubPr>
-                                  <m:ctrlPr>
-                                    <a:rPr lang="en-US" sz="1400" i="1">
-                                      <a:latin typeface="Cambria Math" panose="02040503050406030204" pitchFamily="18" charset="0"/>
-                                    </a:rPr>
-                                  </m:ctrlPr>
-                                </m:sSubPr>
-                                <m:e>
-                                  <m:r>
-                                    <a:rPr lang="en-US" sz="1400" i="1">
-                                      <a:latin typeface="Cambria Math" panose="02040503050406030204" pitchFamily="18" charset="0"/>
-                                    </a:rPr>
-                                    <m:t>𝑠</m:t>
-                                  </m:r>
-                                </m:e>
-                                <m:sub>
-                                  <m:r>
-                                    <a:rPr lang="en-US" sz="1400" b="0" i="1" smtClean="0">
-                                      <a:latin typeface="Cambria Math" panose="02040503050406030204" pitchFamily="18" charset="0"/>
-                                    </a:rPr>
-                                    <m:t>2</m:t>
-                                  </m:r>
-                                </m:sub>
-                              </m:sSub>
+                              <m:r>
+                                <a:rPr lang="en-US" sz="1400" i="1">
+                                  <a:latin typeface="Cambria Math" panose="02040503050406030204" pitchFamily="18" charset="0"/>
+                                </a:rPr>
+                                <m:t>𝑠</m:t>
+                              </m:r>
                             </m:e>
-                          </m:d>
+                            <m:sub>
+                              <m:r>
+                                <a:rPr lang="en-US" sz="1400" i="1">
+                                  <a:latin typeface="Cambria Math" panose="02040503050406030204" pitchFamily="18" charset="0"/>
+                                </a:rPr>
+                                <m:t>𝑥</m:t>
+                              </m:r>
+                            </m:sub>
+                          </m:sSub>
+                        </m:oMath>
+                      </a14:m>
+                      <a:endParaRPr lang="en-US" sz="1400" dirty="0"/>
+                    </a:p>
+                    <a:p>
+                      <a:pPr lvl="0"/>
+                      <a14:m>
+                        <m:oMath xmlns:m="http://schemas.openxmlformats.org/officeDocument/2006/math">
+                          <m:sSub>
+                            <m:sSubPr>
+                              <m:ctrlPr>
+                                <a:rPr lang="en-US" sz="1400" i="1" dirty="0">
+                                  <a:latin typeface="Cambria Math" panose="02040503050406030204" pitchFamily="18" charset="0"/>
+                                </a:rPr>
+                              </m:ctrlPr>
+                            </m:sSubPr>
+                            <m:e>
+                              <m:r>
+                                <a:rPr lang="en-US" sz="1400" i="1" dirty="0">
+                                  <a:latin typeface="Cambria Math" panose="02040503050406030204" pitchFamily="18" charset="0"/>
+                                </a:rPr>
+                                <m:t>𝑃</m:t>
+                              </m:r>
+                            </m:e>
+                            <m:sub>
+                              <m:r>
+                                <a:rPr lang="en-US" sz="1400" i="1" dirty="0">
+                                  <a:latin typeface="Cambria Math" panose="02040503050406030204" pitchFamily="18" charset="0"/>
+                                </a:rPr>
+                                <m:t>𝑥𝑦</m:t>
+                              </m:r>
+                            </m:sub>
+                          </m:sSub>
                           <m:r>
-                            <a:rPr lang="en-US" sz="1400" b="0" i="1" smtClean="0">
+                            <a:rPr lang="en-US" sz="1400" i="1" dirty="0">
                               <a:latin typeface="Cambria Math" panose="02040503050406030204" pitchFamily="18" charset="0"/>
                             </a:rPr>
-                            <m:t>≥</m:t>
+                            <m:t> </m:t>
+                          </m:r>
+                        </m:oMath>
+                      </a14:m>
+                      <a:r>
+                        <a:rPr lang="en-US" sz="1400" dirty="0"/>
+                        <a:t>transition probability </a:t>
+                      </a:r>
+                      <a14:m>
+                        <m:oMath xmlns:m="http://schemas.openxmlformats.org/officeDocument/2006/math">
+                          <m:sSub>
+                            <m:sSubPr>
+                              <m:ctrlPr>
+                                <a:rPr lang="en-US" sz="1400" i="1">
+                                  <a:latin typeface="Cambria Math" panose="02040503050406030204" pitchFamily="18" charset="0"/>
+                                </a:rPr>
+                              </m:ctrlPr>
+                            </m:sSubPr>
+                            <m:e>
+                              <m:r>
+                                <a:rPr lang="en-US" sz="1400" i="1">
+                                  <a:latin typeface="Cambria Math" panose="02040503050406030204" pitchFamily="18" charset="0"/>
+                                </a:rPr>
+                                <m:t>𝑠</m:t>
+                              </m:r>
+                            </m:e>
+                            <m:sub>
+                              <m:r>
+                                <a:rPr lang="en-US" sz="1400" i="1">
+                                  <a:latin typeface="Cambria Math" panose="02040503050406030204" pitchFamily="18" charset="0"/>
+                                </a:rPr>
+                                <m:t>𝑥</m:t>
+                              </m:r>
+                            </m:sub>
+                          </m:sSub>
+                          <m:r>
+                            <a:rPr lang="en-US" sz="1400" i="1">
+                              <a:latin typeface="Cambria Math" panose="02040503050406030204" pitchFamily="18" charset="0"/>
+                            </a:rPr>
+                            <m:t>→</m:t>
                           </m:r>
                           <m:sSub>
                             <m:sSubPr>
@@ -36088,960 +37395,717 @@
                                 <a:rPr lang="en-US" sz="1400" i="1">
                                   <a:latin typeface="Cambria Math" panose="02040503050406030204" pitchFamily="18" charset="0"/>
                                 </a:rPr>
-                                <m:t>𝑅</m:t>
+                                <m:t>𝑠</m:t>
                               </m:r>
                             </m:e>
                             <m:sub>
                               <m:r>
-                                <a:rPr lang="en-US" sz="1400" b="0" i="1" smtClean="0">
+                                <a:rPr lang="en-US" sz="1400" i="1">
                                   <a:latin typeface="Cambria Math" panose="02040503050406030204" pitchFamily="18" charset="0"/>
                                 </a:rPr>
-                                <m:t>2</m:t>
+                                <m:t>𝑦</m:t>
                               </m:r>
                             </m:sub>
                           </m:sSub>
-                          <m:r>
-                            <a:rPr lang="en-US" sz="1400" i="1">
-                              <a:latin typeface="Cambria Math" panose="02040503050406030204" pitchFamily="18" charset="0"/>
-                            </a:rPr>
-                            <m:t>+</m:t>
-                          </m:r>
-                          <m:r>
-                            <a:rPr lang="en-US" sz="1400" i="1">
-                              <a:latin typeface="Cambria Math" panose="02040503050406030204" pitchFamily="18" charset="0"/>
-                            </a:rPr>
-                            <m:t>𝛾</m:t>
-                          </m:r>
-                          <m:d>
-                            <m:dPr>
-                              <m:ctrlPr>
-                                <a:rPr lang="en-US" sz="1400" i="1">
-                                  <a:latin typeface="Cambria Math" panose="02040503050406030204" pitchFamily="18" charset="0"/>
-                                </a:rPr>
-                              </m:ctrlPr>
-                            </m:dPr>
-                            <m:e>
-                              <m:sSub>
-                                <m:sSubPr>
-                                  <m:ctrlPr>
-                                    <a:rPr lang="en-US" sz="1400" i="1">
-                                      <a:latin typeface="Cambria Math" panose="02040503050406030204" pitchFamily="18" charset="0"/>
-                                    </a:rPr>
-                                  </m:ctrlPr>
-                                </m:sSubPr>
-                                <m:e>
-                                  <m:r>
-                                    <a:rPr lang="en-US" sz="1400" i="1">
-                                      <a:latin typeface="Cambria Math" panose="02040503050406030204" pitchFamily="18" charset="0"/>
-                                    </a:rPr>
-                                    <m:t>𝑃</m:t>
-                                  </m:r>
-                                </m:e>
-                                <m:sub>
-                                  <m:r>
-                                    <a:rPr lang="en-US" sz="1400" b="0" i="1" smtClean="0">
-                                      <a:latin typeface="Cambria Math" panose="02040503050406030204" pitchFamily="18" charset="0"/>
-                                    </a:rPr>
-                                    <m:t>2</m:t>
-                                  </m:r>
-                                  <m:r>
-                                    <a:rPr lang="en-US" sz="1400" i="1">
-                                      <a:latin typeface="Cambria Math" panose="02040503050406030204" pitchFamily="18" charset="0"/>
-                                    </a:rPr>
-                                    <m:t>1</m:t>
-                                  </m:r>
-                                </m:sub>
-                              </m:sSub>
-                              <m:r>
-                                <a:rPr lang="en-US" sz="1400" i="1">
-                                  <a:latin typeface="Cambria Math" panose="02040503050406030204" pitchFamily="18" charset="0"/>
-                                </a:rPr>
-                                <m:t>𝑉</m:t>
-                              </m:r>
-                              <m:d>
-                                <m:dPr>
-                                  <m:ctrlPr>
-                                    <a:rPr lang="en-US" sz="1400" i="1">
-                                      <a:latin typeface="Cambria Math" panose="02040503050406030204" pitchFamily="18" charset="0"/>
-                                    </a:rPr>
-                                  </m:ctrlPr>
-                                </m:dPr>
-                                <m:e>
-                                  <m:sSub>
-                                    <m:sSubPr>
-                                      <m:ctrlPr>
-                                        <a:rPr lang="en-US" sz="1400" i="1">
-                                          <a:latin typeface="Cambria Math" panose="02040503050406030204" pitchFamily="18" charset="0"/>
-                                        </a:rPr>
-                                      </m:ctrlPr>
-                                    </m:sSubPr>
-                                    <m:e>
-                                      <m:r>
-                                        <a:rPr lang="en-US" sz="1400" i="1">
-                                          <a:latin typeface="Cambria Math" panose="02040503050406030204" pitchFamily="18" charset="0"/>
-                                        </a:rPr>
-                                        <m:t>𝑠</m:t>
-                                      </m:r>
-                                    </m:e>
-                                    <m:sub>
-                                      <m:r>
-                                        <a:rPr lang="en-US" sz="1400" i="1">
-                                          <a:latin typeface="Cambria Math" panose="02040503050406030204" pitchFamily="18" charset="0"/>
-                                        </a:rPr>
-                                        <m:t>1</m:t>
-                                      </m:r>
-                                    </m:sub>
-                                  </m:sSub>
-                                </m:e>
-                              </m:d>
-                              <m:r>
-                                <a:rPr lang="en-US" sz="1400" i="1">
-                                  <a:latin typeface="Cambria Math" panose="02040503050406030204" pitchFamily="18" charset="0"/>
-                                </a:rPr>
-                                <m:t>+</m:t>
-                              </m:r>
-                              <m:sSub>
-                                <m:sSubPr>
-                                  <m:ctrlPr>
-                                    <a:rPr lang="en-US" sz="1400" i="1">
-                                      <a:latin typeface="Cambria Math" panose="02040503050406030204" pitchFamily="18" charset="0"/>
-                                    </a:rPr>
-                                  </m:ctrlPr>
-                                </m:sSubPr>
-                                <m:e>
-                                  <m:r>
-                                    <a:rPr lang="en-US" sz="1400" i="1">
-                                      <a:latin typeface="Cambria Math" panose="02040503050406030204" pitchFamily="18" charset="0"/>
-                                    </a:rPr>
-                                    <m:t>𝑃</m:t>
-                                  </m:r>
-                                </m:e>
-                                <m:sub>
-                                  <m:r>
-                                    <a:rPr lang="en-US" sz="1400" b="0" i="1" smtClean="0">
-                                      <a:latin typeface="Cambria Math" panose="02040503050406030204" pitchFamily="18" charset="0"/>
-                                    </a:rPr>
-                                    <m:t>2</m:t>
-                                  </m:r>
-                                  <m:r>
-                                    <a:rPr lang="en-US" sz="1400" i="1">
-                                      <a:latin typeface="Cambria Math" panose="02040503050406030204" pitchFamily="18" charset="0"/>
-                                    </a:rPr>
-                                    <m:t>2</m:t>
-                                  </m:r>
-                                </m:sub>
-                              </m:sSub>
-                              <m:r>
-                                <a:rPr lang="en-US" sz="1400" i="1">
-                                  <a:latin typeface="Cambria Math" panose="02040503050406030204" pitchFamily="18" charset="0"/>
-                                </a:rPr>
-                                <m:t>𝑉</m:t>
-                              </m:r>
-                              <m:d>
-                                <m:dPr>
-                                  <m:ctrlPr>
-                                    <a:rPr lang="en-US" sz="1400" i="1">
-                                      <a:latin typeface="Cambria Math" panose="02040503050406030204" pitchFamily="18" charset="0"/>
-                                    </a:rPr>
-                                  </m:ctrlPr>
-                                </m:dPr>
-                                <m:e>
-                                  <m:sSub>
-                                    <m:sSubPr>
-                                      <m:ctrlPr>
-                                        <a:rPr lang="en-US" sz="1400" i="1">
-                                          <a:latin typeface="Cambria Math" panose="02040503050406030204" pitchFamily="18" charset="0"/>
-                                        </a:rPr>
-                                      </m:ctrlPr>
-                                    </m:sSubPr>
-                                    <m:e>
-                                      <m:r>
-                                        <a:rPr lang="en-US" sz="1400" i="1">
-                                          <a:latin typeface="Cambria Math" panose="02040503050406030204" pitchFamily="18" charset="0"/>
-                                        </a:rPr>
-                                        <m:t>𝑠</m:t>
-                                      </m:r>
-                                    </m:e>
-                                    <m:sub>
-                                      <m:r>
-                                        <a:rPr lang="en-US" sz="1400" i="1">
-                                          <a:latin typeface="Cambria Math" panose="02040503050406030204" pitchFamily="18" charset="0"/>
-                                        </a:rPr>
-                                        <m:t>2</m:t>
-                                      </m:r>
-                                    </m:sub>
-                                  </m:sSub>
-                                </m:e>
-                              </m:d>
-                            </m:e>
-                          </m:d>
                         </m:oMath>
-                      </m:oMathPara>
-                    </a14:m>
-                    <a:endParaRPr lang="en-US" sz="1400" dirty="0"/>
-                  </a:p>
-                  <a:p>
-                    <a:endParaRPr lang="en-US" sz="1400" dirty="0"/>
-                  </a:p>
-                  <a:p>
-                    <a:r>
-                      <a:rPr lang="en-US" sz="1400" dirty="0"/>
-                      <a:t>Where </a:t>
-                    </a:r>
-                    <a:r>
-                      <a:rPr lang="en-US" sz="1400" b="1" dirty="0"/>
-                      <a:t>following </a:t>
-                    </a:r>
-                    <a14:m>
-                      <m:oMath xmlns:m="http://schemas.openxmlformats.org/officeDocument/2006/math">
-                        <m:r>
-                          <a:rPr lang="en-US" sz="1400" b="1" i="1" smtClean="0">
-                            <a:latin typeface="Cambria Math" panose="02040503050406030204" pitchFamily="18" charset="0"/>
-                          </a:rPr>
-                          <m:t>𝝅</m:t>
-                        </m:r>
-                      </m:oMath>
-                    </a14:m>
-                    <a:r>
-                      <a:rPr lang="en-US" sz="1400" b="1" dirty="0"/>
-                      <a:t> </a:t>
-                    </a:r>
-                    <a:r>
-                      <a:rPr lang="en-US" sz="1400" dirty="0"/>
-                      <a:t>has</a:t>
-                    </a:r>
-                  </a:p>
-                  <a:p>
-                    <a14:m>
-                      <m:oMath xmlns:m="http://schemas.openxmlformats.org/officeDocument/2006/math">
-                        <m:sSub>
-                          <m:sSubPr>
-                            <m:ctrlPr>
-                              <a:rPr lang="en-US" sz="1400" i="1" dirty="0">
-                                <a:latin typeface="Cambria Math" panose="02040503050406030204" pitchFamily="18" charset="0"/>
-                              </a:rPr>
-                            </m:ctrlPr>
-                          </m:sSubPr>
-                          <m:e>
-                            <m:r>
-                              <a:rPr lang="en-US" sz="1400" i="1" dirty="0">
-                                <a:latin typeface="Cambria Math" panose="02040503050406030204" pitchFamily="18" charset="0"/>
-                              </a:rPr>
-                              <m:t>𝑅</m:t>
-                            </m:r>
-                          </m:e>
-                          <m:sub>
-                            <m:r>
-                              <a:rPr lang="en-US" sz="1400" i="1" dirty="0">
-                                <a:latin typeface="Cambria Math" panose="02040503050406030204" pitchFamily="18" charset="0"/>
-                              </a:rPr>
-                              <m:t>𝑥</m:t>
-                            </m:r>
-                          </m:sub>
-                        </m:sSub>
-                        <m:r>
-                          <a:rPr lang="en-US" sz="1400" i="1" dirty="0">
-                            <a:latin typeface="Cambria Math" panose="02040503050406030204" pitchFamily="18" charset="0"/>
-                          </a:rPr>
-                          <m:t> </m:t>
-                        </m:r>
-                      </m:oMath>
-                    </a14:m>
-                    <a:r>
-                      <a:rPr lang="en-US" sz="1400" dirty="0"/>
-                      <a:t>immediate reward of  </a:t>
-                    </a:r>
-                    <a14:m>
-                      <m:oMath xmlns:m="http://schemas.openxmlformats.org/officeDocument/2006/math">
-                        <m:sSub>
-                          <m:sSubPr>
-                            <m:ctrlPr>
-                              <a:rPr lang="en-US" sz="1400" i="1">
-                                <a:latin typeface="Cambria Math" panose="02040503050406030204" pitchFamily="18" charset="0"/>
-                              </a:rPr>
-                            </m:ctrlPr>
-                          </m:sSubPr>
-                          <m:e>
-                            <m:r>
-                              <a:rPr lang="en-US" sz="1400" i="1">
-                                <a:latin typeface="Cambria Math" panose="02040503050406030204" pitchFamily="18" charset="0"/>
-                              </a:rPr>
-                              <m:t>𝑠</m:t>
-                            </m:r>
-                          </m:e>
-                          <m:sub>
-                            <m:r>
-                              <a:rPr lang="en-US" sz="1400" i="1">
-                                <a:latin typeface="Cambria Math" panose="02040503050406030204" pitchFamily="18" charset="0"/>
-                              </a:rPr>
-                              <m:t>𝑥</m:t>
-                            </m:r>
-                          </m:sub>
-                        </m:sSub>
-                      </m:oMath>
-                    </a14:m>
-                    <a:endParaRPr lang="en-US" sz="1400" dirty="0"/>
-                  </a:p>
-                  <a:p>
-                    <a:pPr lvl="0"/>
-                    <a14:m>
-                      <m:oMath xmlns:m="http://schemas.openxmlformats.org/officeDocument/2006/math">
-                        <m:sSub>
-                          <m:sSubPr>
-                            <m:ctrlPr>
-                              <a:rPr lang="en-US" sz="1400" i="1" dirty="0">
-                                <a:latin typeface="Cambria Math" panose="02040503050406030204" pitchFamily="18" charset="0"/>
-                              </a:rPr>
-                            </m:ctrlPr>
-                          </m:sSubPr>
-                          <m:e>
-                            <m:r>
-                              <a:rPr lang="en-US" sz="1400" i="1" dirty="0">
-                                <a:latin typeface="Cambria Math" panose="02040503050406030204" pitchFamily="18" charset="0"/>
-                              </a:rPr>
-                              <m:t>𝑃</m:t>
-                            </m:r>
-                          </m:e>
-                          <m:sub>
-                            <m:r>
-                              <a:rPr lang="en-US" sz="1400" i="1" dirty="0">
-                                <a:latin typeface="Cambria Math" panose="02040503050406030204" pitchFamily="18" charset="0"/>
-                              </a:rPr>
-                              <m:t>𝑥𝑦</m:t>
-                            </m:r>
-                          </m:sub>
-                        </m:sSub>
-                        <m:r>
-                          <a:rPr lang="en-US" sz="1400" i="1" dirty="0">
-                            <a:latin typeface="Cambria Math" panose="02040503050406030204" pitchFamily="18" charset="0"/>
-                          </a:rPr>
-                          <m:t> </m:t>
-                        </m:r>
-                      </m:oMath>
-                    </a14:m>
-                    <a:r>
-                      <a:rPr lang="en-US" sz="1400" dirty="0"/>
-                      <a:t>transition probability </a:t>
-                    </a:r>
-                    <a14:m>
-                      <m:oMath xmlns:m="http://schemas.openxmlformats.org/officeDocument/2006/math">
-                        <m:sSub>
-                          <m:sSubPr>
-                            <m:ctrlPr>
-                              <a:rPr lang="en-US" sz="1400" i="1">
-                                <a:latin typeface="Cambria Math" panose="02040503050406030204" pitchFamily="18" charset="0"/>
-                              </a:rPr>
-                            </m:ctrlPr>
-                          </m:sSubPr>
-                          <m:e>
-                            <m:r>
-                              <a:rPr lang="en-US" sz="1400" i="1">
-                                <a:latin typeface="Cambria Math" panose="02040503050406030204" pitchFamily="18" charset="0"/>
-                              </a:rPr>
-                              <m:t>𝑠</m:t>
-                            </m:r>
-                          </m:e>
-                          <m:sub>
-                            <m:r>
-                              <a:rPr lang="en-US" sz="1400" i="1">
-                                <a:latin typeface="Cambria Math" panose="02040503050406030204" pitchFamily="18" charset="0"/>
-                              </a:rPr>
-                              <m:t>𝑥</m:t>
-                            </m:r>
-                          </m:sub>
-                        </m:sSub>
-                        <m:r>
-                          <a:rPr lang="en-US" sz="1400" i="1">
-                            <a:latin typeface="Cambria Math" panose="02040503050406030204" pitchFamily="18" charset="0"/>
-                          </a:rPr>
-                          <m:t>→</m:t>
-                        </m:r>
-                        <m:sSub>
-                          <m:sSubPr>
-                            <m:ctrlPr>
-                              <a:rPr lang="en-US" sz="1400" i="1">
-                                <a:latin typeface="Cambria Math" panose="02040503050406030204" pitchFamily="18" charset="0"/>
-                              </a:rPr>
-                            </m:ctrlPr>
-                          </m:sSubPr>
-                          <m:e>
-                            <m:r>
-                              <a:rPr lang="en-US" sz="1400" i="1">
-                                <a:latin typeface="Cambria Math" panose="02040503050406030204" pitchFamily="18" charset="0"/>
-                              </a:rPr>
-                              <m:t>𝑠</m:t>
-                            </m:r>
-                          </m:e>
-                          <m:sub>
-                            <m:r>
-                              <a:rPr lang="en-US" sz="1400" i="1">
-                                <a:latin typeface="Cambria Math" panose="02040503050406030204" pitchFamily="18" charset="0"/>
-                              </a:rPr>
-                              <m:t>𝑦</m:t>
-                            </m:r>
-                          </m:sub>
-                        </m:sSub>
-                      </m:oMath>
-                    </a14:m>
-                    <a:endParaRPr lang="en-US" sz="1400" dirty="0"/>
-                  </a:p>
-                  <a:p>
-                    <a:endParaRPr lang="en-US" dirty="0"/>
-                  </a:p>
-                </p:txBody>
-              </p:sp>
-            </mc:Choice>
-            <mc:Fallback xmlns="">
-              <p:sp>
-                <p:nvSpPr>
-                  <p:cNvPr id="4" name="TextBox 3">
-                    <a:extLst>
-                      <a:ext uri="{FF2B5EF4-FFF2-40B4-BE49-F238E27FC236}">
-                        <a16:creationId xmlns:a16="http://schemas.microsoft.com/office/drawing/2014/main" id="{63B2C840-7C72-C056-FD2A-B1FAC79C9C9D}"/>
-                      </a:ext>
-                    </a:extLst>
-                  </p:cNvPr>
-                  <p:cNvSpPr txBox="1">
-                    <a:spLocks noRot="1" noChangeAspect="1" noMove="1" noResize="1" noEditPoints="1" noAdjustHandles="1" noChangeArrowheads="1" noChangeShapeType="1" noTextEdit="1"/>
-                  </p:cNvSpPr>
-                  <p:nvPr/>
-                </p:nvSpPr>
-                <p:spPr>
-                  <a:xfrm>
-                    <a:off x="8397124" y="1293020"/>
-                    <a:ext cx="3420274" cy="2503827"/>
-                  </a:xfrm>
-                  <a:prstGeom prst="rect">
-                    <a:avLst/>
-                  </a:prstGeom>
-                  <a:blipFill>
-                    <a:blip r:embed="rId3"/>
-                    <a:stretch>
-                      <a:fillRect l="-1426" t="-1193"/>
-                    </a:stretch>
-                  </a:blipFill>
-                </p:spPr>
-                <p:txBody>
-                  <a:bodyPr/>
-                  <a:lstStyle/>
-                  <a:p>
-                    <a:r>
-                      <a:rPr lang="en-US">
-                        <a:noFill/>
-                      </a:rPr>
-                      <a:t> </a:t>
-                    </a:r>
-                  </a:p>
-                </p:txBody>
-              </p:sp>
-            </mc:Fallback>
-          </mc:AlternateContent>
+                      </a14:m>
+                      <a:endParaRPr lang="en-US" sz="1400" dirty="0"/>
+                    </a:p>
+                    <a:p>
+                      <a:endParaRPr lang="en-US" dirty="0"/>
+                    </a:p>
+                  </p:txBody>
+                </p:sp>
+              </mc:Choice>
+              <mc:Fallback xmlns="">
+                <p:sp>
+                  <p:nvSpPr>
+                    <p:cNvPr id="4" name="TextBox 3">
+                      <a:extLst>
+                        <a:ext uri="{FF2B5EF4-FFF2-40B4-BE49-F238E27FC236}">
+                          <a16:creationId xmlns:a16="http://schemas.microsoft.com/office/drawing/2014/main" id="{63B2C840-7C72-C056-FD2A-B1FAC79C9C9D}"/>
+                        </a:ext>
+                      </a:extLst>
+                    </p:cNvPr>
+                    <p:cNvSpPr txBox="1">
+                      <a:spLocks noRot="1" noChangeAspect="1" noMove="1" noResize="1" noEditPoints="1" noAdjustHandles="1" noChangeArrowheads="1" noChangeShapeType="1" noTextEdit="1"/>
+                    </p:cNvSpPr>
+                    <p:nvPr/>
+                  </p:nvSpPr>
+                  <p:spPr>
+                    <a:xfrm>
+                      <a:off x="8397124" y="1293020"/>
+                      <a:ext cx="3420274" cy="2503827"/>
+                    </a:xfrm>
+                    <a:prstGeom prst="rect">
+                      <a:avLst/>
+                    </a:prstGeom>
+                    <a:blipFill>
+                      <a:blip r:embed="rId3"/>
+                      <a:stretch>
+                        <a:fillRect l="-1426" t="-1193"/>
+                      </a:stretch>
+                    </a:blipFill>
+                  </p:spPr>
+                  <p:txBody>
+                    <a:bodyPr/>
+                    <a:lstStyle/>
+                    <a:p>
+                      <a:r>
+                        <a:rPr lang="en-US">
+                          <a:noFill/>
+                        </a:rPr>
+                        <a:t> </a:t>
+                      </a:r>
+                    </a:p>
+                  </p:txBody>
+                </p:sp>
+              </mc:Fallback>
+            </mc:AlternateContent>
+          </p:grpSp>
+          <p:grpSp>
+            <p:nvGrpSpPr>
+              <p:cNvPr id="24" name="Group 23">
+                <a:extLst>
+                  <a:ext uri="{FF2B5EF4-FFF2-40B4-BE49-F238E27FC236}">
+                    <a16:creationId xmlns:a16="http://schemas.microsoft.com/office/drawing/2014/main" id="{43C63E96-2747-CB55-7AE6-1C2067C3DB3F}"/>
+                  </a:ext>
+                </a:extLst>
+              </p:cNvPr>
+              <p:cNvGrpSpPr/>
+              <p:nvPr/>
+            </p:nvGrpSpPr>
+            <p:grpSpPr>
+              <a:xfrm>
+                <a:off x="8654193" y="3268857"/>
+                <a:ext cx="3001036" cy="3263714"/>
+                <a:chOff x="8654193" y="3268857"/>
+                <a:chExt cx="3001036" cy="3263714"/>
+              </a:xfrm>
+            </p:grpSpPr>
+            <p:sp>
+              <p:nvSpPr>
+                <p:cNvPr id="32" name="TextBox 31">
+                  <a:extLst>
+                    <a:ext uri="{FF2B5EF4-FFF2-40B4-BE49-F238E27FC236}">
+                      <a16:creationId xmlns:a16="http://schemas.microsoft.com/office/drawing/2014/main" id="{BC01A90C-3DC2-24D5-7AEB-F176EB14962C}"/>
+                    </a:ext>
+                  </a:extLst>
+                </p:cNvPr>
+                <p:cNvSpPr txBox="1"/>
+                <p:nvPr/>
+              </p:nvSpPr>
+              <p:spPr>
+                <a:xfrm>
+                  <a:off x="10486716" y="6295213"/>
+                  <a:ext cx="998161" cy="230832"/>
+                </a:xfrm>
+                <a:prstGeom prst="rect">
+                  <a:avLst/>
+                </a:prstGeom>
+                <a:noFill/>
+              </p:spPr>
+              <p:txBody>
+                <a:bodyPr wrap="square" rtlCol="0">
+                  <a:spAutoFit/>
+                </a:bodyPr>
+                <a:lstStyle/>
+                <a:p>
+                  <a:r>
+                    <a:rPr lang="en-US" sz="900" dirty="0">
+                      <a:solidFill>
+                        <a:schemeClr val="tx1">
+                          <a:lumMod val="75000"/>
+                          <a:lumOff val="25000"/>
+                        </a:schemeClr>
+                      </a:solidFill>
+                    </a:rPr>
+                    <a:t>Feasible Region</a:t>
+                  </a:r>
+                </a:p>
+              </p:txBody>
+            </p:sp>
+            <p:sp>
+              <p:nvSpPr>
+                <p:cNvPr id="34" name="TextBox 33">
+                  <a:extLst>
+                    <a:ext uri="{FF2B5EF4-FFF2-40B4-BE49-F238E27FC236}">
+                      <a16:creationId xmlns:a16="http://schemas.microsoft.com/office/drawing/2014/main" id="{C0F1D236-089D-C565-6073-49307F48A7FB}"/>
+                    </a:ext>
+                  </a:extLst>
+                </p:cNvPr>
+                <p:cNvSpPr txBox="1"/>
+                <p:nvPr/>
+              </p:nvSpPr>
+              <p:spPr>
+                <a:xfrm>
+                  <a:off x="9235349" y="6301739"/>
+                  <a:ext cx="998161" cy="230832"/>
+                </a:xfrm>
+                <a:prstGeom prst="rect">
+                  <a:avLst/>
+                </a:prstGeom>
+                <a:noFill/>
+              </p:spPr>
+              <p:txBody>
+                <a:bodyPr wrap="square" rtlCol="0">
+                  <a:spAutoFit/>
+                </a:bodyPr>
+                <a:lstStyle/>
+                <a:p>
+                  <a:r>
+                    <a:rPr lang="en-US" sz="900" dirty="0">
+                      <a:solidFill>
+                        <a:schemeClr val="tx1">
+                          <a:lumMod val="75000"/>
+                          <a:lumOff val="25000"/>
+                        </a:schemeClr>
+                      </a:solidFill>
+                    </a:rPr>
+                    <a:t>Objective</a:t>
+                  </a:r>
+                </a:p>
+              </p:txBody>
+            </p:sp>
+            <p:cxnSp>
+              <p:nvCxnSpPr>
+                <p:cNvPr id="36" name="Straight Connector 35">
+                  <a:extLst>
+                    <a:ext uri="{FF2B5EF4-FFF2-40B4-BE49-F238E27FC236}">
+                      <a16:creationId xmlns:a16="http://schemas.microsoft.com/office/drawing/2014/main" id="{3572DEA6-FA04-75F0-4595-BF28C491920D}"/>
+                    </a:ext>
+                  </a:extLst>
+                </p:cNvPr>
+                <p:cNvCxnSpPr>
+                  <a:cxnSpLocks/>
+                </p:cNvCxnSpPr>
+                <p:nvPr/>
+              </p:nvCxnSpPr>
+              <p:spPr>
+                <a:xfrm>
+                  <a:off x="9003472" y="6432383"/>
+                  <a:ext cx="293166" cy="0"/>
+                </a:xfrm>
+                <a:prstGeom prst="line">
+                  <a:avLst/>
+                </a:prstGeom>
+                <a:ln w="28575">
+                  <a:prstDash val="dash"/>
+                </a:ln>
+              </p:spPr>
+              <p:style>
+                <a:lnRef idx="2">
+                  <a:schemeClr val="dk1"/>
+                </a:lnRef>
+                <a:fillRef idx="0">
+                  <a:schemeClr val="dk1"/>
+                </a:fillRef>
+                <a:effectRef idx="1">
+                  <a:schemeClr val="dk1"/>
+                </a:effectRef>
+                <a:fontRef idx="minor">
+                  <a:schemeClr val="tx1"/>
+                </a:fontRef>
+              </p:style>
+            </p:cxnSp>
+            <mc:AlternateContent xmlns:mc="http://schemas.openxmlformats.org/markup-compatibility/2006" xmlns:a14="http://schemas.microsoft.com/office/drawing/2010/main">
+              <mc:Choice Requires="a14">
+                <p:graphicFrame>
+                  <p:nvGraphicFramePr>
+                    <p:cNvPr id="8" name="Chart 7">
+                      <a:extLst>
+                        <a:ext uri="{FF2B5EF4-FFF2-40B4-BE49-F238E27FC236}">
+                          <a16:creationId xmlns:a16="http://schemas.microsoft.com/office/drawing/2014/main" id="{B7392BAE-65BB-DF7C-4722-CF4BC4EA04F0}"/>
+                        </a:ext>
+                      </a:extLst>
+                    </p:cNvPr>
+                    <p:cNvGraphicFramePr>
+                      <a:graphicFrameLocks/>
+                    </p:cNvGraphicFramePr>
+                    <p:nvPr>
+                      <p:extLst>
+                        <p:ext uri="{D42A27DB-BD31-4B8C-83A1-F6EECF244321}">
+                          <p14:modId xmlns:p14="http://schemas.microsoft.com/office/powerpoint/2010/main" val="404206085"/>
+                        </p:ext>
+                      </p:extLst>
+                    </p:nvPr>
+                  </p:nvGraphicFramePr>
+                  <p:xfrm>
+                    <a:off x="8654193" y="3268857"/>
+                    <a:ext cx="3001036" cy="3091488"/>
+                  </p:xfrm>
+                  <a:graphic>
+                    <a:graphicData uri="http://schemas.openxmlformats.org/drawingml/2006/chart">
+                      <c:chart xmlns:c="http://schemas.openxmlformats.org/drawingml/2006/chart" xmlns:r="http://schemas.openxmlformats.org/officeDocument/2006/relationships" r:id="rId4"/>
+                    </a:graphicData>
+                  </a:graphic>
+                </p:graphicFrame>
+              </mc:Choice>
+              <mc:Fallback xmlns="">
+                <p:graphicFrame>
+                  <p:nvGraphicFramePr>
+                    <p:cNvPr id="8" name="Chart 7">
+                      <a:extLst>
+                        <a:ext uri="{FF2B5EF4-FFF2-40B4-BE49-F238E27FC236}">
+                          <a16:creationId xmlns:a16="http://schemas.microsoft.com/office/drawing/2014/main" id="{B7392BAE-65BB-DF7C-4722-CF4BC4EA04F0}"/>
+                        </a:ext>
+                      </a:extLst>
+                    </p:cNvPr>
+                    <p:cNvGraphicFramePr>
+                      <a:graphicFrameLocks/>
+                    </p:cNvGraphicFramePr>
+                    <p:nvPr>
+                      <p:extLst>
+                        <p:ext uri="{D42A27DB-BD31-4B8C-83A1-F6EECF244321}">
+                          <p14:modId xmlns:p14="http://schemas.microsoft.com/office/powerpoint/2010/main" val="404206085"/>
+                        </p:ext>
+                      </p:extLst>
+                    </p:nvPr>
+                  </p:nvGraphicFramePr>
+                  <p:xfrm>
+                    <a:off x="8654193" y="3268857"/>
+                    <a:ext cx="3001036" cy="3091488"/>
+                  </p:xfrm>
+                  <a:graphic>
+                    <a:graphicData uri="http://schemas.openxmlformats.org/drawingml/2006/chart">
+                      <c:chart xmlns:c="http://schemas.openxmlformats.org/drawingml/2006/chart" xmlns:r="http://schemas.openxmlformats.org/officeDocument/2006/relationships" r:id="rId5"/>
+                    </a:graphicData>
+                  </a:graphic>
+                </p:graphicFrame>
+              </mc:Fallback>
+            </mc:AlternateContent>
+            <p:sp>
+              <p:nvSpPr>
+                <p:cNvPr id="31" name="Rectangle 30">
+                  <a:extLst>
+                    <a:ext uri="{FF2B5EF4-FFF2-40B4-BE49-F238E27FC236}">
+                      <a16:creationId xmlns:a16="http://schemas.microsoft.com/office/drawing/2014/main" id="{071AA459-F063-70B6-69BF-3CF753D9DFFD}"/>
+                    </a:ext>
+                  </a:extLst>
+                </p:cNvPr>
+                <p:cNvSpPr/>
+                <p:nvPr/>
+              </p:nvSpPr>
+              <p:spPr>
+                <a:xfrm>
+                  <a:off x="10257589" y="6360345"/>
+                  <a:ext cx="272226" cy="104702"/>
+                </a:xfrm>
+                <a:prstGeom prst="rect">
+                  <a:avLst/>
+                </a:prstGeom>
+                <a:solidFill>
+                  <a:schemeClr val="accent6">
+                    <a:alpha val="50000"/>
+                  </a:schemeClr>
+                </a:solidFill>
+                <a:ln>
+                  <a:noFill/>
+                </a:ln>
+              </p:spPr>
+              <p:style>
+                <a:lnRef idx="0">
+                  <a:scrgbClr r="0" g="0" b="0"/>
+                </a:lnRef>
+                <a:fillRef idx="0">
+                  <a:scrgbClr r="0" g="0" b="0"/>
+                </a:fillRef>
+                <a:effectRef idx="0">
+                  <a:scrgbClr r="0" g="0" b="0"/>
+                </a:effectRef>
+                <a:fontRef idx="minor">
+                  <a:schemeClr val="lt1"/>
+                </a:fontRef>
+              </p:style>
+              <p:txBody>
+                <a:bodyPr rtlCol="0" anchor="ctr"/>
+                <a:lstStyle/>
+                <a:p>
+                  <a:pPr algn="ctr"/>
+                  <a:endParaRPr lang="en-US"/>
+                </a:p>
+              </p:txBody>
+            </p:sp>
+            <p:cxnSp>
+              <p:nvCxnSpPr>
+                <p:cNvPr id="15" name="Straight Connector 14">
+                  <a:extLst>
+                    <a:ext uri="{FF2B5EF4-FFF2-40B4-BE49-F238E27FC236}">
+                      <a16:creationId xmlns:a16="http://schemas.microsoft.com/office/drawing/2014/main" id="{38276DAE-6A06-26E9-2E13-5AFB76A49DD3}"/>
+                    </a:ext>
+                  </a:extLst>
+                </p:cNvPr>
+                <p:cNvCxnSpPr>
+                  <a:cxnSpLocks/>
+                </p:cNvCxnSpPr>
+                <p:nvPr/>
+              </p:nvCxnSpPr>
+              <p:spPr>
+                <a:xfrm>
+                  <a:off x="9900027" y="3769528"/>
+                  <a:ext cx="1473932" cy="1281387"/>
+                </a:xfrm>
+                <a:prstGeom prst="line">
+                  <a:avLst/>
+                </a:prstGeom>
+                <a:ln w="19050" cap="flat" cmpd="sng" algn="ctr">
+                  <a:solidFill>
+                    <a:schemeClr val="dk1"/>
+                  </a:solidFill>
+                  <a:prstDash val="dash"/>
+                  <a:round/>
+                  <a:headEnd type="none" w="med" len="med"/>
+                  <a:tailEnd type="none" w="med" len="med"/>
+                </a:ln>
+              </p:spPr>
+              <p:style>
+                <a:lnRef idx="0">
+                  <a:scrgbClr r="0" g="0" b="0"/>
+                </a:lnRef>
+                <a:fillRef idx="0">
+                  <a:scrgbClr r="0" g="0" b="0"/>
+                </a:fillRef>
+                <a:effectRef idx="0">
+                  <a:scrgbClr r="0" g="0" b="0"/>
+                </a:effectRef>
+                <a:fontRef idx="minor">
+                  <a:schemeClr val="tx1"/>
+                </a:fontRef>
+              </p:style>
+            </p:cxnSp>
+            <p:cxnSp>
+              <p:nvCxnSpPr>
+                <p:cNvPr id="19" name="Straight Connector 18">
+                  <a:extLst>
+                    <a:ext uri="{FF2B5EF4-FFF2-40B4-BE49-F238E27FC236}">
+                      <a16:creationId xmlns:a16="http://schemas.microsoft.com/office/drawing/2014/main" id="{9A82668A-976C-2EE8-6FF4-EAD852BA2BBB}"/>
+                    </a:ext>
+                  </a:extLst>
+                </p:cNvPr>
+                <p:cNvCxnSpPr>
+                  <a:cxnSpLocks/>
+                </p:cNvCxnSpPr>
+                <p:nvPr/>
+              </p:nvCxnSpPr>
+              <p:spPr>
+                <a:xfrm>
+                  <a:off x="9389054" y="3941468"/>
+                  <a:ext cx="1790251" cy="1533708"/>
+                </a:xfrm>
+                <a:prstGeom prst="line">
+                  <a:avLst/>
+                </a:prstGeom>
+                <a:ln>
+                  <a:prstDash val="dash"/>
+                  <a:headEnd type="none" w="med" len="med"/>
+                  <a:tailEnd type="none" w="med" len="med"/>
+                </a:ln>
+              </p:spPr>
+              <p:style>
+                <a:lnRef idx="2">
+                  <a:schemeClr val="dk1"/>
+                </a:lnRef>
+                <a:fillRef idx="0">
+                  <a:schemeClr val="dk1"/>
+                </a:fillRef>
+                <a:effectRef idx="1">
+                  <a:schemeClr val="dk1"/>
+                </a:effectRef>
+                <a:fontRef idx="minor">
+                  <a:schemeClr val="tx1"/>
+                </a:fontRef>
+              </p:style>
+            </p:cxnSp>
+            <p:sp>
+              <p:nvSpPr>
+                <p:cNvPr id="21" name="Arrow: Right 20">
+                  <a:extLst>
+                    <a:ext uri="{FF2B5EF4-FFF2-40B4-BE49-F238E27FC236}">
+                      <a16:creationId xmlns:a16="http://schemas.microsoft.com/office/drawing/2014/main" id="{CAC1E6C5-81C8-462F-C6CA-14B12340386A}"/>
+                    </a:ext>
+                  </a:extLst>
+                </p:cNvPr>
+                <p:cNvSpPr/>
+                <p:nvPr/>
+              </p:nvSpPr>
+              <p:spPr>
+                <a:xfrm rot="7804867">
+                  <a:off x="9926867" y="4163517"/>
+                  <a:ext cx="278151" cy="170745"/>
+                </a:xfrm>
+                <a:prstGeom prst="rightArrow">
+                  <a:avLst/>
+                </a:prstGeom>
+              </p:spPr>
+              <p:style>
+                <a:lnRef idx="2">
+                  <a:schemeClr val="dk1">
+                    <a:shade val="15000"/>
+                  </a:schemeClr>
+                </a:lnRef>
+                <a:fillRef idx="1">
+                  <a:schemeClr val="dk1"/>
+                </a:fillRef>
+                <a:effectRef idx="0">
+                  <a:schemeClr val="dk1"/>
+                </a:effectRef>
+                <a:fontRef idx="minor">
+                  <a:schemeClr val="lt1"/>
+                </a:fontRef>
+              </p:style>
+              <p:txBody>
+                <a:bodyPr rtlCol="0" anchor="ctr"/>
+                <a:lstStyle/>
+                <a:p>
+                  <a:pPr algn="ctr"/>
+                  <a:endParaRPr lang="en-US"/>
+                </a:p>
+              </p:txBody>
+            </p:sp>
+            <p:sp>
+              <p:nvSpPr>
+                <p:cNvPr id="22" name="Oval 21">
+                  <a:extLst>
+                    <a:ext uri="{FF2B5EF4-FFF2-40B4-BE49-F238E27FC236}">
+                      <a16:creationId xmlns:a16="http://schemas.microsoft.com/office/drawing/2014/main" id="{0692D36B-4A13-D527-F0C3-F0E026972B2D}"/>
+                    </a:ext>
+                  </a:extLst>
+                </p:cNvPr>
+                <p:cNvSpPr/>
+                <p:nvPr/>
+              </p:nvSpPr>
+              <p:spPr>
+                <a:xfrm>
+                  <a:off x="10177334" y="4601721"/>
+                  <a:ext cx="114303" cy="121118"/>
+                </a:xfrm>
+                <a:prstGeom prst="ellipse">
+                  <a:avLst/>
+                </a:prstGeom>
+                <a:noFill/>
+                <a:ln w="28575" cap="flat" cmpd="sng" algn="ctr">
+                  <a:solidFill>
+                    <a:srgbClr val="C00000"/>
+                  </a:solidFill>
+                  <a:prstDash val="solid"/>
+                  <a:round/>
+                  <a:headEnd type="none" w="med" len="med"/>
+                  <a:tailEnd type="none" w="med" len="med"/>
+                </a:ln>
+              </p:spPr>
+              <p:style>
+                <a:lnRef idx="0">
+                  <a:scrgbClr r="0" g="0" b="0"/>
+                </a:lnRef>
+                <a:fillRef idx="0">
+                  <a:scrgbClr r="0" g="0" b="0"/>
+                </a:fillRef>
+                <a:effectRef idx="0">
+                  <a:scrgbClr r="0" g="0" b="0"/>
+                </a:effectRef>
+                <a:fontRef idx="minor">
+                  <a:schemeClr val="accent2"/>
+                </a:fontRef>
+              </p:style>
+              <p:txBody>
+                <a:bodyPr rtlCol="0" anchor="ctr"/>
+                <a:lstStyle/>
+                <a:p>
+                  <a:pPr algn="ctr"/>
+                  <a:endParaRPr lang="en-US"/>
+                </a:p>
+              </p:txBody>
+            </p:sp>
+            <p:sp>
+              <p:nvSpPr>
+                <p:cNvPr id="38" name="TextBox 37">
+                  <a:extLst>
+                    <a:ext uri="{FF2B5EF4-FFF2-40B4-BE49-F238E27FC236}">
+                      <a16:creationId xmlns:a16="http://schemas.microsoft.com/office/drawing/2014/main" id="{FD68DB8D-17B1-E89F-6F92-76DF48399885}"/>
+                    </a:ext>
+                  </a:extLst>
+                </p:cNvPr>
+                <p:cNvSpPr txBox="1"/>
+                <p:nvPr/>
+              </p:nvSpPr>
+              <p:spPr>
+                <a:xfrm rot="18450171">
+                  <a:off x="9743656" y="3980931"/>
+                  <a:ext cx="439749" cy="261610"/>
+                </a:xfrm>
+                <a:prstGeom prst="rect">
+                  <a:avLst/>
+                </a:prstGeom>
+                <a:noFill/>
+              </p:spPr>
+              <p:txBody>
+                <a:bodyPr wrap="square" rtlCol="0">
+                  <a:spAutoFit/>
+                </a:bodyPr>
+                <a:lstStyle/>
+                <a:p>
+                  <a:r>
+                    <a:rPr lang="en-US" sz="1100" dirty="0"/>
+                    <a:t>min</a:t>
+                  </a:r>
+                </a:p>
+              </p:txBody>
+            </p:sp>
+            <p:sp>
+              <p:nvSpPr>
+                <p:cNvPr id="23" name="Freeform: Shape 22">
+                  <a:extLst>
+                    <a:ext uri="{FF2B5EF4-FFF2-40B4-BE49-F238E27FC236}">
+                      <a16:creationId xmlns:a16="http://schemas.microsoft.com/office/drawing/2014/main" id="{F68730D9-6E46-BC68-7873-6F33997C405E}"/>
+                    </a:ext>
+                  </a:extLst>
+                </p:cNvPr>
+                <p:cNvSpPr/>
+                <p:nvPr/>
+              </p:nvSpPr>
+              <p:spPr>
+                <a:xfrm>
+                  <a:off x="10248089" y="3715966"/>
+                  <a:ext cx="1128409" cy="928991"/>
+                </a:xfrm>
+                <a:custGeom>
+                  <a:avLst/>
+                  <a:gdLst>
+                    <a:gd name="csX0" fmla="*/ 0 w 1128409"/>
+                    <a:gd name="csY0" fmla="*/ 928991 h 928991"/>
+                    <a:gd name="csX1" fmla="*/ 865762 w 1128409"/>
+                    <a:gd name="csY1" fmla="*/ 0 h 928991"/>
+                    <a:gd name="csX2" fmla="*/ 1128409 w 1128409"/>
+                    <a:gd name="csY2" fmla="*/ 4864 h 928991"/>
+                    <a:gd name="csX3" fmla="*/ 1128409 w 1128409"/>
+                    <a:gd name="csY3" fmla="*/ 437745 h 928991"/>
+                    <a:gd name="csX4" fmla="*/ 0 w 1128409"/>
+                    <a:gd name="csY4" fmla="*/ 928991 h 928991"/>
+                  </a:gdLst>
+                  <a:ahLst/>
+                  <a:cxnLst>
+                    <a:cxn ang="0">
+                      <a:pos x="csX0" y="csY0"/>
+                    </a:cxn>
+                    <a:cxn ang="0">
+                      <a:pos x="csX1" y="csY1"/>
+                    </a:cxn>
+                    <a:cxn ang="0">
+                      <a:pos x="csX2" y="csY2"/>
+                    </a:cxn>
+                    <a:cxn ang="0">
+                      <a:pos x="csX3" y="csY3"/>
+                    </a:cxn>
+                    <a:cxn ang="0">
+                      <a:pos x="csX4" y="csY4"/>
+                    </a:cxn>
+                  </a:cxnLst>
+                  <a:rect l="l" t="t" r="r" b="b"/>
+                  <a:pathLst>
+                    <a:path w="1128409" h="928991">
+                      <a:moveTo>
+                        <a:pt x="0" y="928991"/>
+                      </a:moveTo>
+                      <a:lnTo>
+                        <a:pt x="865762" y="0"/>
+                      </a:lnTo>
+                      <a:lnTo>
+                        <a:pt x="1128409" y="4864"/>
+                      </a:lnTo>
+                      <a:lnTo>
+                        <a:pt x="1128409" y="437745"/>
+                      </a:lnTo>
+                      <a:lnTo>
+                        <a:pt x="0" y="928991"/>
+                      </a:lnTo>
+                      <a:close/>
+                    </a:path>
+                  </a:pathLst>
+                </a:custGeom>
+                <a:solidFill>
+                  <a:schemeClr val="accent6">
+                    <a:alpha val="50000"/>
+                  </a:schemeClr>
+                </a:solidFill>
+                <a:ln>
+                  <a:noFill/>
+                </a:ln>
+              </p:spPr>
+              <p:style>
+                <a:lnRef idx="0">
+                  <a:scrgbClr r="0" g="0" b="0"/>
+                </a:lnRef>
+                <a:fillRef idx="0">
+                  <a:scrgbClr r="0" g="0" b="0"/>
+                </a:fillRef>
+                <a:effectRef idx="0">
+                  <a:scrgbClr r="0" g="0" b="0"/>
+                </a:effectRef>
+                <a:fontRef idx="minor">
+                  <a:schemeClr val="lt1"/>
+                </a:fontRef>
+              </p:style>
+              <p:txBody>
+                <a:bodyPr rtlCol="0" anchor="ctr"/>
+                <a:lstStyle/>
+                <a:p>
+                  <a:pPr algn="ctr"/>
+                  <a:endParaRPr lang="en-US"/>
+                </a:p>
+              </p:txBody>
+            </p:sp>
+          </p:grpSp>
         </p:grpSp>
-        <p:grpSp>
-          <p:nvGrpSpPr>
-            <p:cNvPr id="30" name="Group 29">
+        <p:cxnSp>
+          <p:nvCxnSpPr>
+            <p:cNvPr id="28" name="Straight Connector 27">
               <a:extLst>
                 <a:ext uri="{FF2B5EF4-FFF2-40B4-BE49-F238E27FC236}">
-                  <a16:creationId xmlns:a16="http://schemas.microsoft.com/office/drawing/2014/main" id="{0324149C-65E1-3FEF-6A06-7D77DA05FD9C}"/>
+                  <a16:creationId xmlns:a16="http://schemas.microsoft.com/office/drawing/2014/main" id="{765F6525-990F-A915-9A5F-E986BB3CBC1B}"/>
                 </a:ext>
               </a:extLst>
             </p:cNvPr>
-            <p:cNvGrpSpPr/>
+            <p:cNvCxnSpPr/>
             <p:nvPr/>
-          </p:nvGrpSpPr>
-          <p:grpSpPr>
-            <a:xfrm>
-              <a:off x="8418064" y="3334260"/>
-              <a:ext cx="3616325" cy="3181350"/>
-              <a:chOff x="8418064" y="3494800"/>
-              <a:chExt cx="3616325" cy="3181350"/>
-            </a:xfrm>
-          </p:grpSpPr>
-          <p:sp>
-            <p:nvSpPr>
-              <p:cNvPr id="25" name="Freeform: Shape 24">
-                <a:extLst>
-                  <a:ext uri="{FF2B5EF4-FFF2-40B4-BE49-F238E27FC236}">
-                    <a16:creationId xmlns:a16="http://schemas.microsoft.com/office/drawing/2014/main" id="{D737ACAD-42B0-15EE-555A-D36591094A60}"/>
-                  </a:ext>
-                </a:extLst>
-              </p:cNvPr>
-              <p:cNvSpPr/>
-              <p:nvPr/>
-            </p:nvSpPr>
-            <p:spPr>
-              <a:xfrm>
-                <a:off x="10394580" y="4055469"/>
-                <a:ext cx="1471679" cy="614253"/>
-              </a:xfrm>
-              <a:custGeom>
-                <a:avLst/>
-                <a:gdLst>
-                  <a:gd name="csX0" fmla="*/ 0 w 1361130"/>
-                  <a:gd name="csY0" fmla="*/ 579353 h 579353"/>
-                  <a:gd name="csX1" fmla="*/ 1361130 w 1361130"/>
-                  <a:gd name="csY1" fmla="*/ 0 h 579353"/>
-                  <a:gd name="csX2" fmla="*/ 1361130 w 1361130"/>
-                  <a:gd name="csY2" fmla="*/ 314107 h 579353"/>
-                  <a:gd name="csX3" fmla="*/ 0 w 1361130"/>
-                  <a:gd name="csY3" fmla="*/ 579353 h 579353"/>
-                </a:gdLst>
-                <a:ahLst/>
-                <a:cxnLst>
-                  <a:cxn ang="0">
-                    <a:pos x="csX0" y="csY0"/>
-                  </a:cxn>
-                  <a:cxn ang="0">
-                    <a:pos x="csX1" y="csY1"/>
-                  </a:cxn>
-                  <a:cxn ang="0">
-                    <a:pos x="csX2" y="csY2"/>
-                  </a:cxn>
-                  <a:cxn ang="0">
-                    <a:pos x="csX3" y="csY3"/>
-                  </a:cxn>
-                </a:cxnLst>
-                <a:rect l="l" t="t" r="r" b="b"/>
-                <a:pathLst>
-                  <a:path w="1361130" h="579353">
-                    <a:moveTo>
-                      <a:pt x="0" y="579353"/>
-                    </a:moveTo>
-                    <a:lnTo>
-                      <a:pt x="1361130" y="0"/>
-                    </a:lnTo>
-                    <a:lnTo>
-                      <a:pt x="1361130" y="314107"/>
-                    </a:lnTo>
-                    <a:lnTo>
-                      <a:pt x="0" y="579353"/>
-                    </a:lnTo>
-                    <a:close/>
-                  </a:path>
-                </a:pathLst>
-              </a:custGeom>
-              <a:solidFill>
-                <a:schemeClr val="accent6"/>
-              </a:solidFill>
-              <a:ln>
-                <a:noFill/>
-              </a:ln>
-            </p:spPr>
-            <p:style>
-              <a:lnRef idx="0">
-                <a:scrgbClr r="0" g="0" b="0"/>
-              </a:lnRef>
-              <a:fillRef idx="0">
-                <a:scrgbClr r="0" g="0" b="0"/>
-              </a:fillRef>
-              <a:effectRef idx="0">
-                <a:scrgbClr r="0" g="0" b="0"/>
-              </a:effectRef>
-              <a:fontRef idx="minor">
-                <a:schemeClr val="lt1"/>
-              </a:fontRef>
-            </p:style>
-            <p:txBody>
-              <a:bodyPr rtlCol="0" anchor="ctr"/>
-              <a:lstStyle/>
-              <a:p>
-                <a:pPr algn="ctr"/>
-                <a:endParaRPr lang="en-US"/>
-              </a:p>
-            </p:txBody>
-          </p:sp>
-          <mc:AlternateContent xmlns:mc="http://schemas.openxmlformats.org/markup-compatibility/2006" xmlns:a14="http://schemas.microsoft.com/office/drawing/2010/main">
-            <mc:Choice Requires="a14">
-              <p:graphicFrame>
-                <p:nvGraphicFramePr>
-                  <p:cNvPr id="6" name="Chart 5">
-                    <a:extLst>
-                      <a:ext uri="{FF2B5EF4-FFF2-40B4-BE49-F238E27FC236}">
-                        <a16:creationId xmlns:a16="http://schemas.microsoft.com/office/drawing/2014/main" id="{B7392BAE-65BB-DF7C-4722-CF4BC4EA04F0}"/>
-                      </a:ext>
-                    </a:extLst>
-                  </p:cNvPr>
-                  <p:cNvGraphicFramePr>
-                    <a:graphicFrameLocks/>
-                  </p:cNvGraphicFramePr>
-                  <p:nvPr>
-                    <p:extLst>
-                      <p:ext uri="{D42A27DB-BD31-4B8C-83A1-F6EECF244321}">
-                        <p14:modId xmlns:p14="http://schemas.microsoft.com/office/powerpoint/2010/main" val="1496141950"/>
-                      </p:ext>
-                    </p:extLst>
-                  </p:nvPr>
-                </p:nvGraphicFramePr>
-                <p:xfrm>
-                  <a:off x="8418064" y="3494800"/>
-                  <a:ext cx="3616325" cy="3181350"/>
-                </p:xfrm>
-                <a:graphic>
-                  <a:graphicData uri="http://schemas.openxmlformats.org/drawingml/2006/chart">
-                    <c:chart xmlns:c="http://schemas.openxmlformats.org/drawingml/2006/chart" xmlns:r="http://schemas.openxmlformats.org/officeDocument/2006/relationships" r:id="rId4"/>
-                  </a:graphicData>
-                </a:graphic>
-              </p:graphicFrame>
-            </mc:Choice>
-            <mc:Fallback xmlns="">
-              <p:graphicFrame>
-                <p:nvGraphicFramePr>
-                  <p:cNvPr id="6" name="Chart 5">
-                    <a:extLst>
-                      <a:ext uri="{FF2B5EF4-FFF2-40B4-BE49-F238E27FC236}">
-                        <a16:creationId xmlns:a16="http://schemas.microsoft.com/office/drawing/2014/main" id="{B7392BAE-65BB-DF7C-4722-CF4BC4EA04F0}"/>
-                      </a:ext>
-                    </a:extLst>
-                  </p:cNvPr>
-                  <p:cNvGraphicFramePr>
-                    <a:graphicFrameLocks/>
-                  </p:cNvGraphicFramePr>
-                  <p:nvPr>
-                    <p:extLst>
-                      <p:ext uri="{D42A27DB-BD31-4B8C-83A1-F6EECF244321}">
-                        <p14:modId xmlns:p14="http://schemas.microsoft.com/office/powerpoint/2010/main" val="1496141950"/>
-                      </p:ext>
-                    </p:extLst>
-                  </p:nvPr>
-                </p:nvGraphicFramePr>
-                <p:xfrm>
-                  <a:off x="8418064" y="3494800"/>
-                  <a:ext cx="3616325" cy="3181350"/>
-                </p:xfrm>
-                <a:graphic>
-                  <a:graphicData uri="http://schemas.openxmlformats.org/drawingml/2006/chart">
-                    <c:chart xmlns:c="http://schemas.openxmlformats.org/drawingml/2006/chart" xmlns:r="http://schemas.openxmlformats.org/officeDocument/2006/relationships" r:id="rId5"/>
-                  </a:graphicData>
-                </a:graphic>
-              </p:graphicFrame>
-            </mc:Fallback>
-          </mc:AlternateContent>
-          <p:cxnSp>
-            <p:nvCxnSpPr>
-              <p:cNvPr id="15" name="Straight Connector 14">
-                <a:extLst>
-                  <a:ext uri="{FF2B5EF4-FFF2-40B4-BE49-F238E27FC236}">
-                    <a16:creationId xmlns:a16="http://schemas.microsoft.com/office/drawing/2014/main" id="{38276DAE-6A06-26E9-2E13-5AFB76A49DD3}"/>
-                  </a:ext>
-                </a:extLst>
-              </p:cNvPr>
-              <p:cNvCxnSpPr>
-                <a:cxnSpLocks/>
-              </p:cNvCxnSpPr>
-              <p:nvPr/>
-            </p:nvCxnSpPr>
-            <p:spPr>
-              <a:xfrm>
-                <a:off x="10107261" y="3971707"/>
-                <a:ext cx="1766585" cy="614253"/>
-              </a:xfrm>
-              <a:prstGeom prst="line">
-                <a:avLst/>
-              </a:prstGeom>
-              <a:ln w="19050" cap="flat" cmpd="sng" algn="ctr">
-                <a:solidFill>
-                  <a:schemeClr val="dk1"/>
-                </a:solidFill>
-                <a:prstDash val="dash"/>
-                <a:round/>
-                <a:headEnd type="none" w="med" len="med"/>
-                <a:tailEnd type="none" w="med" len="med"/>
-              </a:ln>
-            </p:spPr>
-            <p:style>
-              <a:lnRef idx="0">
-                <a:scrgbClr r="0" g="0" b="0"/>
-              </a:lnRef>
-              <a:fillRef idx="0">
-                <a:scrgbClr r="0" g="0" b="0"/>
-              </a:fillRef>
-              <a:effectRef idx="0">
-                <a:scrgbClr r="0" g="0" b="0"/>
-              </a:effectRef>
-              <a:fontRef idx="minor">
-                <a:schemeClr val="tx1"/>
-              </a:fontRef>
-            </p:style>
-          </p:cxnSp>
-          <p:cxnSp>
-            <p:nvCxnSpPr>
-              <p:cNvPr id="19" name="Straight Connector 18">
-                <a:extLst>
-                  <a:ext uri="{FF2B5EF4-FFF2-40B4-BE49-F238E27FC236}">
-                    <a16:creationId xmlns:a16="http://schemas.microsoft.com/office/drawing/2014/main" id="{9A82668A-976C-2EE8-6FF4-EAD852BA2BBB}"/>
-                  </a:ext>
-                </a:extLst>
-              </p:cNvPr>
-              <p:cNvCxnSpPr>
-                <a:cxnSpLocks/>
-              </p:cNvCxnSpPr>
-              <p:nvPr/>
-            </p:nvCxnSpPr>
-            <p:spPr>
-              <a:xfrm>
-                <a:off x="9071568" y="4157007"/>
-                <a:ext cx="2872079" cy="980385"/>
-              </a:xfrm>
-              <a:prstGeom prst="line">
-                <a:avLst/>
-              </a:prstGeom>
-              <a:ln>
-                <a:headEnd type="none" w="med" len="med"/>
-                <a:tailEnd type="none" w="med" len="med"/>
-              </a:ln>
-            </p:spPr>
-            <p:style>
-              <a:lnRef idx="2">
-                <a:schemeClr val="dk1"/>
-              </a:lnRef>
-              <a:fillRef idx="0">
-                <a:schemeClr val="dk1"/>
-              </a:fillRef>
-              <a:effectRef idx="1">
-                <a:schemeClr val="dk1"/>
-              </a:effectRef>
-              <a:fontRef idx="minor">
-                <a:schemeClr val="tx1"/>
-              </a:fontRef>
-            </p:style>
-          </p:cxnSp>
-          <p:sp>
-            <p:nvSpPr>
-              <p:cNvPr id="21" name="Arrow: Right 20">
-                <a:extLst>
-                  <a:ext uri="{FF2B5EF4-FFF2-40B4-BE49-F238E27FC236}">
-                    <a16:creationId xmlns:a16="http://schemas.microsoft.com/office/drawing/2014/main" id="{CAC1E6C5-81C8-462F-C6CA-14B12340386A}"/>
-                  </a:ext>
-                </a:extLst>
-              </p:cNvPr>
-              <p:cNvSpPr/>
-              <p:nvPr/>
-            </p:nvSpPr>
-            <p:spPr>
-              <a:xfrm rot="6920301">
-                <a:off x="10015636" y="4193460"/>
-                <a:ext cx="278151" cy="170745"/>
-              </a:xfrm>
-              <a:prstGeom prst="rightArrow">
-                <a:avLst/>
-              </a:prstGeom>
-            </p:spPr>
-            <p:style>
-              <a:lnRef idx="2">
-                <a:schemeClr val="dk1">
-                  <a:shade val="15000"/>
-                </a:schemeClr>
-              </a:lnRef>
-              <a:fillRef idx="1">
-                <a:schemeClr val="dk1"/>
-              </a:fillRef>
-              <a:effectRef idx="0">
-                <a:schemeClr val="dk1"/>
-              </a:effectRef>
-              <a:fontRef idx="minor">
-                <a:schemeClr val="lt1"/>
-              </a:fontRef>
-            </p:style>
-            <p:txBody>
-              <a:bodyPr rtlCol="0" anchor="ctr"/>
-              <a:lstStyle/>
-              <a:p>
-                <a:pPr algn="ctr"/>
-                <a:endParaRPr lang="en-US"/>
-              </a:p>
-            </p:txBody>
-          </p:sp>
-          <p:sp>
-            <p:nvSpPr>
-              <p:cNvPr id="22" name="Oval 21">
-                <a:extLst>
-                  <a:ext uri="{FF2B5EF4-FFF2-40B4-BE49-F238E27FC236}">
-                    <a16:creationId xmlns:a16="http://schemas.microsoft.com/office/drawing/2014/main" id="{0692D36B-4A13-D527-F0C3-F0E026972B2D}"/>
-                  </a:ext>
-                </a:extLst>
-              </p:cNvPr>
-              <p:cNvSpPr/>
-              <p:nvPr/>
-            </p:nvSpPr>
-            <p:spPr>
-              <a:xfrm>
-                <a:off x="10372508" y="4544080"/>
-                <a:ext cx="174504" cy="185300"/>
-              </a:xfrm>
-              <a:prstGeom prst="ellipse">
-                <a:avLst/>
-              </a:prstGeom>
-              <a:noFill/>
-              <a:ln w="28575" cap="flat" cmpd="sng" algn="ctr">
-                <a:solidFill>
-                  <a:srgbClr val="C00000"/>
-                </a:solidFill>
-                <a:prstDash val="solid"/>
-                <a:round/>
-                <a:headEnd type="none" w="med" len="med"/>
-                <a:tailEnd type="none" w="med" len="med"/>
-              </a:ln>
-            </p:spPr>
-            <p:style>
-              <a:lnRef idx="0">
-                <a:scrgbClr r="0" g="0" b="0"/>
-              </a:lnRef>
-              <a:fillRef idx="0">
-                <a:scrgbClr r="0" g="0" b="0"/>
-              </a:fillRef>
-              <a:effectRef idx="0">
-                <a:scrgbClr r="0" g="0" b="0"/>
-              </a:effectRef>
-              <a:fontRef idx="minor">
-                <a:schemeClr val="accent2"/>
-              </a:fontRef>
-            </p:style>
-            <p:txBody>
-              <a:bodyPr rtlCol="0" anchor="ctr"/>
-              <a:lstStyle/>
-              <a:p>
-                <a:pPr algn="ctr"/>
-                <a:endParaRPr lang="en-US"/>
-              </a:p>
-            </p:txBody>
-          </p:sp>
-        </p:grpSp>
-        <p:sp>
-          <p:nvSpPr>
-            <p:cNvPr id="31" name="Rectangle 30">
-              <a:extLst>
-                <a:ext uri="{FF2B5EF4-FFF2-40B4-BE49-F238E27FC236}">
-                  <a16:creationId xmlns:a16="http://schemas.microsoft.com/office/drawing/2014/main" id="{071AA459-F063-70B6-69BF-3CF753D9DFFD}"/>
-                </a:ext>
-              </a:extLst>
-            </p:cNvPr>
-            <p:cNvSpPr/>
-            <p:nvPr/>
-          </p:nvSpPr>
+          </p:nvCxnSpPr>
           <p:spPr>
             <a:xfrm>
-              <a:off x="10358547" y="6388387"/>
-              <a:ext cx="272226" cy="104702"/>
+              <a:off x="10243226" y="4669277"/>
+              <a:ext cx="0" cy="821987"/>
             </a:xfrm>
-            <a:prstGeom prst="rect">
+            <a:prstGeom prst="line">
               <a:avLst/>
             </a:prstGeom>
+            <a:ln>
+              <a:solidFill>
+                <a:schemeClr val="bg2">
+                  <a:lumMod val="75000"/>
+                </a:schemeClr>
+              </a:solidFill>
+              <a:prstDash val="sysDot"/>
+            </a:ln>
           </p:spPr>
           <p:style>
             <a:lnRef idx="2">
-              <a:schemeClr val="accent6">
-                <a:shade val="15000"/>
-              </a:schemeClr>
+              <a:schemeClr val="accent1"/>
             </a:lnRef>
-            <a:fillRef idx="1">
-              <a:schemeClr val="accent6"/>
+            <a:fillRef idx="0">
+              <a:schemeClr val="accent1"/>
             </a:fillRef>
-            <a:effectRef idx="0">
-              <a:schemeClr val="accent6"/>
+            <a:effectRef idx="1">
+              <a:schemeClr val="accent1"/>
             </a:effectRef>
             <a:fontRef idx="minor">
-              <a:schemeClr val="lt1"/>
+              <a:schemeClr val="tx1"/>
             </a:fontRef>
           </p:style>
-          <p:txBody>
-            <a:bodyPr rtlCol="0" anchor="ctr"/>
-            <a:lstStyle/>
-            <a:p>
-              <a:pPr algn="ctr"/>
-              <a:endParaRPr lang="en-US"/>
-            </a:p>
-          </p:txBody>
-        </p:sp>
-        <p:sp>
-          <p:nvSpPr>
-            <p:cNvPr id="32" name="TextBox 31">
+        </p:cxnSp>
+        <p:cxnSp>
+          <p:nvCxnSpPr>
+            <p:cNvPr id="29" name="Straight Connector 28">
               <a:extLst>
                 <a:ext uri="{FF2B5EF4-FFF2-40B4-BE49-F238E27FC236}">
-                  <a16:creationId xmlns:a16="http://schemas.microsoft.com/office/drawing/2014/main" id="{BC01A90C-3DC2-24D5-7AEB-F176EB14962C}"/>
-                </a:ext>
-              </a:extLst>
-            </p:cNvPr>
-            <p:cNvSpPr txBox="1"/>
-            <p:nvPr/>
-          </p:nvSpPr>
-          <p:spPr>
-            <a:xfrm>
-              <a:off x="10596480" y="6332302"/>
-              <a:ext cx="998161" cy="230832"/>
-            </a:xfrm>
-            <a:prstGeom prst="rect">
-              <a:avLst/>
-            </a:prstGeom>
-            <a:noFill/>
-          </p:spPr>
-          <p:txBody>
-            <a:bodyPr wrap="square" rtlCol="0">
-              <a:spAutoFit/>
-            </a:bodyPr>
-            <a:lstStyle/>
-            <a:p>
-              <a:r>
-                <a:rPr lang="en-US" sz="900" dirty="0">
-                  <a:solidFill>
-                    <a:schemeClr val="tx1">
-                      <a:lumMod val="75000"/>
-                      <a:lumOff val="25000"/>
-                    </a:schemeClr>
-                  </a:solidFill>
-                </a:rPr>
-                <a:t>Feasible Region</a:t>
-              </a:r>
-            </a:p>
-          </p:txBody>
-        </p:sp>
-        <p:sp>
-          <p:nvSpPr>
-            <p:cNvPr id="34" name="TextBox 33">
-              <a:extLst>
-                <a:ext uri="{FF2B5EF4-FFF2-40B4-BE49-F238E27FC236}">
-                  <a16:creationId xmlns:a16="http://schemas.microsoft.com/office/drawing/2014/main" id="{C0F1D236-089D-C565-6073-49307F48A7FB}"/>
-                </a:ext>
-              </a:extLst>
-            </p:cNvPr>
-            <p:cNvSpPr txBox="1"/>
-            <p:nvPr/>
-          </p:nvSpPr>
-          <p:spPr>
-            <a:xfrm>
-              <a:off x="9325486" y="6316966"/>
-              <a:ext cx="998161" cy="230832"/>
-            </a:xfrm>
-            <a:prstGeom prst="rect">
-              <a:avLst/>
-            </a:prstGeom>
-            <a:noFill/>
-          </p:spPr>
-          <p:txBody>
-            <a:bodyPr wrap="square" rtlCol="0">
-              <a:spAutoFit/>
-            </a:bodyPr>
-            <a:lstStyle/>
-            <a:p>
-              <a:r>
-                <a:rPr lang="en-US" sz="900" dirty="0">
-                  <a:solidFill>
-                    <a:schemeClr val="tx1">
-                      <a:lumMod val="75000"/>
-                      <a:lumOff val="25000"/>
-                    </a:schemeClr>
-                  </a:solidFill>
-                </a:rPr>
-                <a:t>Objective</a:t>
-              </a:r>
-            </a:p>
-          </p:txBody>
-        </p:sp>
-        <p:cxnSp>
-          <p:nvCxnSpPr>
-            <p:cNvPr id="36" name="Straight Connector 35">
-              <a:extLst>
-                <a:ext uri="{FF2B5EF4-FFF2-40B4-BE49-F238E27FC236}">
-                  <a16:creationId xmlns:a16="http://schemas.microsoft.com/office/drawing/2014/main" id="{3572DEA6-FA04-75F0-4595-BF28C491920D}"/>
+                  <a16:creationId xmlns:a16="http://schemas.microsoft.com/office/drawing/2014/main" id="{23576AD0-3FF1-A836-B5DC-AC6096F7B37C}"/>
                 </a:ext>
               </a:extLst>
             </p:cNvPr>
@@ -37051,65 +38115,37 @@
             <p:nvPr/>
           </p:nvCxnSpPr>
           <p:spPr>
-            <a:xfrm>
-              <a:off x="9071568" y="6437247"/>
-              <a:ext cx="293166" cy="0"/>
+            <a:xfrm flipH="1">
+              <a:off x="9386515" y="4662280"/>
+              <a:ext cx="846995" cy="0"/>
             </a:xfrm>
             <a:prstGeom prst="line">
               <a:avLst/>
             </a:prstGeom>
-            <a:ln w="28575"/>
+            <a:ln>
+              <a:solidFill>
+                <a:schemeClr val="bg2">
+                  <a:lumMod val="75000"/>
+                </a:schemeClr>
+              </a:solidFill>
+              <a:prstDash val="sysDot"/>
+            </a:ln>
           </p:spPr>
           <p:style>
             <a:lnRef idx="2">
-              <a:schemeClr val="dk1"/>
+              <a:schemeClr val="accent1"/>
             </a:lnRef>
             <a:fillRef idx="0">
-              <a:schemeClr val="dk1"/>
+              <a:schemeClr val="accent1"/>
             </a:fillRef>
             <a:effectRef idx="1">
-              <a:schemeClr val="dk1"/>
+              <a:schemeClr val="accent1"/>
             </a:effectRef>
             <a:fontRef idx="minor">
               <a:schemeClr val="tx1"/>
             </a:fontRef>
           </p:style>
         </p:cxnSp>
-        <p:sp>
-          <p:nvSpPr>
-            <p:cNvPr id="38" name="TextBox 37">
-              <a:extLst>
-                <a:ext uri="{FF2B5EF4-FFF2-40B4-BE49-F238E27FC236}">
-                  <a16:creationId xmlns:a16="http://schemas.microsoft.com/office/drawing/2014/main" id="{FD68DB8D-17B1-E89F-6F92-76DF48399885}"/>
-                </a:ext>
-              </a:extLst>
-            </p:cNvPr>
-            <p:cNvSpPr txBox="1"/>
-            <p:nvPr/>
-          </p:nvSpPr>
-          <p:spPr>
-            <a:xfrm rot="17618624">
-              <a:off x="9784196" y="3854535"/>
-              <a:ext cx="439749" cy="261610"/>
-            </a:xfrm>
-            <a:prstGeom prst="rect">
-              <a:avLst/>
-            </a:prstGeom>
-            <a:noFill/>
-          </p:spPr>
-          <p:txBody>
-            <a:bodyPr wrap="square" rtlCol="0">
-              <a:spAutoFit/>
-            </a:bodyPr>
-            <a:lstStyle/>
-            <a:p>
-              <a:r>
-                <a:rPr lang="en-US" sz="1100" dirty="0"/>
-                <a:t>min</a:t>
-              </a:r>
-            </a:p>
-          </p:txBody>
-        </p:sp>
       </p:grpSp>
     </p:spTree>
     <p:extLst>
@@ -37346,7 +38382,7 @@
                                           </p:stCondLst>
                                         </p:cTn>
                                         <p:tgtEl>
-                                          <p:spTgt spid="39"/>
+                                          <p:spTgt spid="37"/>
                                         </p:tgtEl>
                                         <p:attrNameLst>
                                           <p:attrName>style.visibility</p:attrName>

--- a/slides/Lecture_Chapter04.pptx
+++ b/slides/Lecture_Chapter04.pptx
@@ -17,19 +17,20 @@
     <p:sldId id="389" r:id="rId11"/>
     <p:sldId id="390" r:id="rId12"/>
     <p:sldId id="371" r:id="rId13"/>
-    <p:sldId id="373" r:id="rId14"/>
-    <p:sldId id="375" r:id="rId15"/>
-    <p:sldId id="376" r:id="rId16"/>
-    <p:sldId id="377" r:id="rId17"/>
-    <p:sldId id="378" r:id="rId18"/>
-    <p:sldId id="379" r:id="rId19"/>
-    <p:sldId id="382" r:id="rId20"/>
-    <p:sldId id="479" r:id="rId21"/>
-    <p:sldId id="384" r:id="rId22"/>
-    <p:sldId id="385" r:id="rId23"/>
-    <p:sldId id="383" r:id="rId24"/>
-    <p:sldId id="386" r:id="rId25"/>
-    <p:sldId id="387" r:id="rId26"/>
+    <p:sldId id="480" r:id="rId14"/>
+    <p:sldId id="373" r:id="rId15"/>
+    <p:sldId id="375" r:id="rId16"/>
+    <p:sldId id="376" r:id="rId17"/>
+    <p:sldId id="377" r:id="rId18"/>
+    <p:sldId id="378" r:id="rId19"/>
+    <p:sldId id="379" r:id="rId20"/>
+    <p:sldId id="382" r:id="rId21"/>
+    <p:sldId id="479" r:id="rId22"/>
+    <p:sldId id="384" r:id="rId23"/>
+    <p:sldId id="385" r:id="rId24"/>
+    <p:sldId id="383" r:id="rId25"/>
+    <p:sldId id="386" r:id="rId26"/>
+    <p:sldId id="387" r:id="rId27"/>
   </p:sldIdLst>
   <p:sldSz cx="12192000" cy="6858000"/>
   <p:notesSz cx="6858000" cy="9144000"/>
@@ -153,6 +154,7 @@
             <p14:sldId id="389"/>
             <p14:sldId id="390"/>
             <p14:sldId id="371"/>
+            <p14:sldId id="480"/>
           </p14:sldIdLst>
         </p14:section>
         <p14:section name="Policy Iteration" id="{4DE153CC-8DA8-4101-A46B-0DFD73F9B57D}">
@@ -1422,9 +1424,9 @@
           <a:p>
             <a:fld id="{3E22BF2E-04DA-469E-97C5-BB68A0368813}" type="datetimeFigureOut">
               <a:rPr lang="en-US" smtClean="0"/>
-              <a:t>10/15/26</a:t>
+              <a:t>10/22/2026</a:t>
             </a:fld>
-            <a:endParaRPr lang="en-US"/>
+            <a:endParaRPr lang="en-US" dirty="0"/>
           </a:p>
         </p:txBody>
       </p:sp>
@@ -1449,7 +1451,7 @@
           <a:bodyPr/>
           <a:lstStyle/>
           <a:p>
-            <a:endParaRPr lang="en-US"/>
+            <a:endParaRPr lang="en-US" dirty="0"/>
           </a:p>
         </p:txBody>
       </p:sp>
@@ -1478,7 +1480,7 @@
               <a:rPr lang="en-US" smtClean="0"/>
               <a:t>‹#›</a:t>
             </a:fld>
-            <a:endParaRPr lang="en-US"/>
+            <a:endParaRPr lang="en-US" dirty="0"/>
           </a:p>
         </p:txBody>
       </p:sp>
@@ -1620,9 +1622,9 @@
           <a:p>
             <a:fld id="{3E22BF2E-04DA-469E-97C5-BB68A0368813}" type="datetimeFigureOut">
               <a:rPr lang="en-US" smtClean="0"/>
-              <a:t>10/15/26</a:t>
+              <a:t>10/22/2026</a:t>
             </a:fld>
-            <a:endParaRPr lang="en-US"/>
+            <a:endParaRPr lang="en-US" dirty="0"/>
           </a:p>
         </p:txBody>
       </p:sp>
@@ -1647,7 +1649,7 @@
           <a:bodyPr/>
           <a:lstStyle/>
           <a:p>
-            <a:endParaRPr lang="en-US"/>
+            <a:endParaRPr lang="en-US" dirty="0"/>
           </a:p>
         </p:txBody>
       </p:sp>
@@ -1676,7 +1678,7 @@
               <a:rPr lang="en-US" smtClean="0"/>
               <a:t>‹#›</a:t>
             </a:fld>
-            <a:endParaRPr lang="en-US"/>
+            <a:endParaRPr lang="en-US" dirty="0"/>
           </a:p>
         </p:txBody>
       </p:sp>
@@ -1828,9 +1830,9 @@
           <a:p>
             <a:fld id="{3E22BF2E-04DA-469E-97C5-BB68A0368813}" type="datetimeFigureOut">
               <a:rPr lang="en-US" smtClean="0"/>
-              <a:t>10/15/26</a:t>
+              <a:t>10/22/2026</a:t>
             </a:fld>
-            <a:endParaRPr lang="en-US"/>
+            <a:endParaRPr lang="en-US" dirty="0"/>
           </a:p>
         </p:txBody>
       </p:sp>
@@ -1855,7 +1857,7 @@
           <a:bodyPr/>
           <a:lstStyle/>
           <a:p>
-            <a:endParaRPr lang="en-US"/>
+            <a:endParaRPr lang="en-US" dirty="0"/>
           </a:p>
         </p:txBody>
       </p:sp>
@@ -1884,7 +1886,7 @@
               <a:rPr lang="en-US" smtClean="0"/>
               <a:t>‹#›</a:t>
             </a:fld>
-            <a:endParaRPr lang="en-US"/>
+            <a:endParaRPr lang="en-US" dirty="0"/>
           </a:p>
         </p:txBody>
       </p:sp>
@@ -2036,9 +2038,9 @@
           <a:p>
             <a:fld id="{3E22BF2E-04DA-469E-97C5-BB68A0368813}" type="datetimeFigureOut">
               <a:rPr lang="en-US" smtClean="0"/>
-              <a:t>10/15/26</a:t>
+              <a:t>10/22/2026</a:t>
             </a:fld>
-            <a:endParaRPr lang="en-US"/>
+            <a:endParaRPr lang="en-US" dirty="0"/>
           </a:p>
         </p:txBody>
       </p:sp>
@@ -2063,7 +2065,7 @@
           <a:bodyPr/>
           <a:lstStyle/>
           <a:p>
-            <a:endParaRPr lang="en-US"/>
+            <a:endParaRPr lang="en-US" dirty="0"/>
           </a:p>
         </p:txBody>
       </p:sp>
@@ -2092,7 +2094,7 @@
               <a:rPr lang="en-US" smtClean="0"/>
               <a:t>‹#›</a:t>
             </a:fld>
-            <a:endParaRPr lang="en-US"/>
+            <a:endParaRPr lang="en-US" dirty="0"/>
           </a:p>
         </p:txBody>
       </p:sp>
@@ -2311,9 +2313,9 @@
           <a:p>
             <a:fld id="{3E22BF2E-04DA-469E-97C5-BB68A0368813}" type="datetimeFigureOut">
               <a:rPr lang="en-US" smtClean="0"/>
-              <a:t>10/15/26</a:t>
+              <a:t>10/22/2026</a:t>
             </a:fld>
-            <a:endParaRPr lang="en-US"/>
+            <a:endParaRPr lang="en-US" dirty="0"/>
           </a:p>
         </p:txBody>
       </p:sp>
@@ -2338,7 +2340,7 @@
           <a:bodyPr/>
           <a:lstStyle/>
           <a:p>
-            <a:endParaRPr lang="en-US"/>
+            <a:endParaRPr lang="en-US" dirty="0"/>
           </a:p>
         </p:txBody>
       </p:sp>
@@ -2367,7 +2369,7 @@
               <a:rPr lang="en-US" smtClean="0"/>
               <a:t>‹#›</a:t>
             </a:fld>
-            <a:endParaRPr lang="en-US"/>
+            <a:endParaRPr lang="en-US" dirty="0"/>
           </a:p>
         </p:txBody>
       </p:sp>
@@ -2576,9 +2578,9 @@
           <a:p>
             <a:fld id="{3E22BF2E-04DA-469E-97C5-BB68A0368813}" type="datetimeFigureOut">
               <a:rPr lang="en-US" smtClean="0"/>
-              <a:t>10/15/26</a:t>
+              <a:t>10/22/2026</a:t>
             </a:fld>
-            <a:endParaRPr lang="en-US"/>
+            <a:endParaRPr lang="en-US" dirty="0"/>
           </a:p>
         </p:txBody>
       </p:sp>
@@ -2603,7 +2605,7 @@
           <a:bodyPr/>
           <a:lstStyle/>
           <a:p>
-            <a:endParaRPr lang="en-US"/>
+            <a:endParaRPr lang="en-US" dirty="0"/>
           </a:p>
         </p:txBody>
       </p:sp>
@@ -2632,7 +2634,7 @@
               <a:rPr lang="en-US" smtClean="0"/>
               <a:t>‹#›</a:t>
             </a:fld>
-            <a:endParaRPr lang="en-US"/>
+            <a:endParaRPr lang="en-US" dirty="0"/>
           </a:p>
         </p:txBody>
       </p:sp>
@@ -2988,9 +2990,9 @@
           <a:p>
             <a:fld id="{3E22BF2E-04DA-469E-97C5-BB68A0368813}" type="datetimeFigureOut">
               <a:rPr lang="en-US" smtClean="0"/>
-              <a:t>10/15/26</a:t>
+              <a:t>10/22/2026</a:t>
             </a:fld>
-            <a:endParaRPr lang="en-US"/>
+            <a:endParaRPr lang="en-US" dirty="0"/>
           </a:p>
         </p:txBody>
       </p:sp>
@@ -3015,7 +3017,7 @@
           <a:bodyPr/>
           <a:lstStyle/>
           <a:p>
-            <a:endParaRPr lang="en-US"/>
+            <a:endParaRPr lang="en-US" dirty="0"/>
           </a:p>
         </p:txBody>
       </p:sp>
@@ -3044,7 +3046,7 @@
               <a:rPr lang="en-US" smtClean="0"/>
               <a:t>‹#›</a:t>
             </a:fld>
-            <a:endParaRPr lang="en-US"/>
+            <a:endParaRPr lang="en-US" dirty="0"/>
           </a:p>
         </p:txBody>
       </p:sp>
@@ -3129,9 +3131,9 @@
           <a:p>
             <a:fld id="{3E22BF2E-04DA-469E-97C5-BB68A0368813}" type="datetimeFigureOut">
               <a:rPr lang="en-US" smtClean="0"/>
-              <a:t>10/15/26</a:t>
+              <a:t>10/22/2026</a:t>
             </a:fld>
-            <a:endParaRPr lang="en-US"/>
+            <a:endParaRPr lang="en-US" dirty="0"/>
           </a:p>
         </p:txBody>
       </p:sp>
@@ -3156,7 +3158,7 @@
           <a:bodyPr/>
           <a:lstStyle/>
           <a:p>
-            <a:endParaRPr lang="en-US"/>
+            <a:endParaRPr lang="en-US" dirty="0"/>
           </a:p>
         </p:txBody>
       </p:sp>
@@ -3185,7 +3187,7 @@
               <a:rPr lang="en-US" smtClean="0"/>
               <a:t>‹#›</a:t>
             </a:fld>
-            <a:endParaRPr lang="en-US"/>
+            <a:endParaRPr lang="en-US" dirty="0"/>
           </a:p>
         </p:txBody>
       </p:sp>
@@ -3242,9 +3244,9 @@
           <a:p>
             <a:fld id="{3E22BF2E-04DA-469E-97C5-BB68A0368813}" type="datetimeFigureOut">
               <a:rPr lang="en-US" smtClean="0"/>
-              <a:t>10/15/26</a:t>
+              <a:t>10/22/2026</a:t>
             </a:fld>
-            <a:endParaRPr lang="en-US"/>
+            <a:endParaRPr lang="en-US" dirty="0"/>
           </a:p>
         </p:txBody>
       </p:sp>
@@ -3269,7 +3271,7 @@
           <a:bodyPr/>
           <a:lstStyle/>
           <a:p>
-            <a:endParaRPr lang="en-US"/>
+            <a:endParaRPr lang="en-US" dirty="0"/>
           </a:p>
         </p:txBody>
       </p:sp>
@@ -3298,7 +3300,7 @@
               <a:rPr lang="en-US" smtClean="0"/>
               <a:t>‹#›</a:t>
             </a:fld>
-            <a:endParaRPr lang="en-US"/>
+            <a:endParaRPr lang="en-US" dirty="0"/>
           </a:p>
         </p:txBody>
       </p:sp>
@@ -3553,9 +3555,9 @@
           <a:p>
             <a:fld id="{3E22BF2E-04DA-469E-97C5-BB68A0368813}" type="datetimeFigureOut">
               <a:rPr lang="en-US" smtClean="0"/>
-              <a:t>10/15/26</a:t>
+              <a:t>10/22/2026</a:t>
             </a:fld>
-            <a:endParaRPr lang="en-US"/>
+            <a:endParaRPr lang="en-US" dirty="0"/>
           </a:p>
         </p:txBody>
       </p:sp>
@@ -3580,7 +3582,7 @@
           <a:bodyPr/>
           <a:lstStyle/>
           <a:p>
-            <a:endParaRPr lang="en-US"/>
+            <a:endParaRPr lang="en-US" dirty="0"/>
           </a:p>
         </p:txBody>
       </p:sp>
@@ -3609,7 +3611,7 @@
               <a:rPr lang="en-US" smtClean="0"/>
               <a:t>‹#›</a:t>
             </a:fld>
-            <a:endParaRPr lang="en-US"/>
+            <a:endParaRPr lang="en-US" dirty="0"/>
           </a:p>
         </p:txBody>
       </p:sp>
@@ -3743,7 +3745,7 @@
             </a:lvl9pPr>
           </a:lstStyle>
           <a:p>
-            <a:endParaRPr lang="en-US"/>
+            <a:endParaRPr lang="en-US" dirty="0"/>
           </a:p>
         </p:txBody>
       </p:sp>
@@ -3841,9 +3843,9 @@
           <a:p>
             <a:fld id="{3E22BF2E-04DA-469E-97C5-BB68A0368813}" type="datetimeFigureOut">
               <a:rPr lang="en-US" smtClean="0"/>
-              <a:t>10/15/26</a:t>
+              <a:t>10/22/2026</a:t>
             </a:fld>
-            <a:endParaRPr lang="en-US"/>
+            <a:endParaRPr lang="en-US" dirty="0"/>
           </a:p>
         </p:txBody>
       </p:sp>
@@ -3868,7 +3870,7 @@
           <a:bodyPr/>
           <a:lstStyle/>
           <a:p>
-            <a:endParaRPr lang="en-US"/>
+            <a:endParaRPr lang="en-US" dirty="0"/>
           </a:p>
         </p:txBody>
       </p:sp>
@@ -3897,7 +3899,7 @@
               <a:rPr lang="en-US" smtClean="0"/>
               <a:t>‹#›</a:t>
             </a:fld>
-            <a:endParaRPr lang="en-US"/>
+            <a:endParaRPr lang="en-US" dirty="0"/>
           </a:p>
         </p:txBody>
       </p:sp>
@@ -4082,9 +4084,9 @@
           <a:p>
             <a:fld id="{3E22BF2E-04DA-469E-97C5-BB68A0368813}" type="datetimeFigureOut">
               <a:rPr lang="en-US" smtClean="0"/>
-              <a:t>10/15/26</a:t>
+              <a:t>10/22/2026</a:t>
             </a:fld>
-            <a:endParaRPr lang="en-US"/>
+            <a:endParaRPr lang="en-US" dirty="0"/>
           </a:p>
         </p:txBody>
       </p:sp>
@@ -4127,7 +4129,7 @@
             </a:lvl1pPr>
           </a:lstStyle>
           <a:p>
-            <a:endParaRPr lang="en-US"/>
+            <a:endParaRPr lang="en-US" dirty="0"/>
           </a:p>
         </p:txBody>
       </p:sp>
@@ -4174,7 +4176,7 @@
               <a:rPr lang="en-US" smtClean="0"/>
               <a:t>‹#›</a:t>
             </a:fld>
-            <a:endParaRPr lang="en-US"/>
+            <a:endParaRPr lang="en-US" dirty="0"/>
           </a:p>
         </p:txBody>
       </p:sp>
@@ -4563,7 +4565,7 @@
           <a:lstStyle/>
           <a:p>
             <a:pPr algn="ctr"/>
-            <a:endParaRPr lang="en-US"/>
+            <a:endParaRPr lang="en-US" dirty="0"/>
           </a:p>
         </p:txBody>
       </p:sp>
@@ -4892,7 +4894,7 @@
           <a:lstStyle/>
           <a:p>
             <a:pPr algn="ctr"/>
-            <a:endParaRPr lang="en-US">
+            <a:endParaRPr lang="en-US" dirty="0">
               <a:solidFill>
                 <a:prstClr val="white"/>
               </a:solidFill>
@@ -4977,7 +4979,7 @@
               <a:tabLst/>
               <a:defRPr/>
             </a:pPr>
-            <a:endParaRPr kumimoji="0" lang="en-US" sz="1800" b="0" i="0" u="none" strike="noStrike" kern="1200" cap="none" spc="0" normalizeH="0" baseline="0" noProof="0">
+            <a:endParaRPr kumimoji="0" lang="en-US" sz="1800" b="0" i="0" u="none" strike="noStrike" kern="1200" cap="none" spc="0" normalizeH="0" baseline="0" noProof="0" dirty="0">
               <a:ln>
                 <a:noFill/>
               </a:ln>
@@ -8176,8 +8178,8 @@
           </a:p>
         </p:txBody>
       </p:sp>
-      <mc:AlternateContent xmlns:mc="http://schemas.openxmlformats.org/markup-compatibility/2006" xmlns:a14="http://schemas.microsoft.com/office/drawing/2010/main">
-        <mc:Choice Requires="a14">
+      <mc:AlternateContent xmlns:mc="http://schemas.openxmlformats.org/markup-compatibility/2006">
+        <mc:Choice xmlns:a14="http://schemas.microsoft.com/office/drawing/2010/main" Requires="a14">
           <p:sp>
             <p:nvSpPr>
               <p:cNvPr id="3" name="Content Placeholder 2" descr="The Bellman update can be rewritten as an operator: Bellman Expectation Operator T to the power pi :. (T to the power pi v) (s) equals the sum over a, of pi (a given s) the sum over s prime,r, of p (s prime,r | s,a)[r plus gamma v (s prime)]. The Fixed Point Property: The value function is unchanged if all state values are already consistent. v sub pi equals T to the power pi (v sub pi). The Contraction Property: The operator T to the power pi is gamma -contracting (see textbook for derivation): the norm of T to the power pi u minus T to the power pi v sub infinity is less than or equal to gamma the norm of u minus v sub infinity for any gamma is less than 1 I.e. : Applying T to the power pi reduces the largest difference (infinity norm) between any arbitrary value functions u and v by at least a factor of gamma. This implies: the norm of v sub pi minus T to the power pi v sub infinity is less than or equal to gamma the norm of v sub pi minus v sub infinity for any gamma is less than 1">
@@ -8196,8 +8198,8 @@
             </p:nvSpPr>
             <p:spPr>
               <a:xfrm>
-                <a:off x="838200" y="1397330"/>
-                <a:ext cx="8581869" cy="4145562"/>
+                <a:off x="838200" y="1085747"/>
+                <a:ext cx="8581869" cy="1726800"/>
               </a:xfrm>
             </p:spPr>
             <p:txBody>
@@ -8206,6 +8208,9 @@
               </a:bodyPr>
               <a:lstStyle/>
               <a:p>
+                <a:pPr marL="0" indent="0">
+                  <a:buNone/>
+                </a:pPr>
                 <a:r>
                   <a:rPr lang="en-US" dirty="0"/>
                   <a:t>The Bellman update can be rewritten as an operator:</a:t>
@@ -8595,689 +8600,13 @@
                 <a:endParaRPr lang="en-US" dirty="0"/>
               </a:p>
               <a:p>
-                <a:endParaRPr lang="en-US" dirty="0"/>
-              </a:p>
-              <a:p>
-                <a:r>
-                  <a:rPr lang="en-US" b="1" dirty="0"/>
-                  <a:t>The Fixed Point Property: </a:t>
-                </a:r>
-                <a:r>
-                  <a:rPr lang="en-US" dirty="0"/>
-                  <a:t>The value function is unchanged if all state values are already consistent.</a:t>
-                </a:r>
-              </a:p>
-              <a:p>
                 <a:pPr marL="0" indent="0">
                   <a:buNone/>
                 </a:pPr>
-                <a14:m>
-                  <m:oMathPara xmlns:m="http://schemas.openxmlformats.org/officeDocument/2006/math">
-                    <m:oMath>
-                      <m:sSub>
-                        <m:sSubPr>
-                          <m:ctrlPr>
-                            <a:rPr lang="en-US" i="1">
-                              <a:latin typeface="Cambria Math" panose="02040503050406030204" pitchFamily="18" charset="0"/>
-                            </a:rPr>
-                          </m:ctrlPr>
-                        </m:sSubPr>
-                        <m:e>
-                          <m:r>
-                            <a:rPr lang="en-US" i="1">
-                              <a:latin typeface="Cambria Math" panose="02040503050406030204" pitchFamily="18" charset="0"/>
-                            </a:rPr>
-                            <m:t>𝑣</m:t>
-                          </m:r>
-                        </m:e>
-                        <m:sub>
-                          <m:r>
-                            <a:rPr lang="en-US" i="1">
-                              <a:latin typeface="Cambria Math" panose="02040503050406030204" pitchFamily="18" charset="0"/>
-                            </a:rPr>
-                            <m:t>𝜋</m:t>
-                          </m:r>
-                        </m:sub>
-                      </m:sSub>
-                      <m:r>
-                        <a:rPr lang="en-US" i="1">
-                          <a:latin typeface="Cambria Math" panose="02040503050406030204" pitchFamily="18" charset="0"/>
-                        </a:rPr>
-                        <m:t>=</m:t>
-                      </m:r>
-                      <m:sSup>
-                        <m:sSupPr>
-                          <m:ctrlPr>
-                            <a:rPr lang="en-US" i="1">
-                              <a:latin typeface="Cambria Math" panose="02040503050406030204" pitchFamily="18" charset="0"/>
-                            </a:rPr>
-                          </m:ctrlPr>
-                        </m:sSupPr>
-                        <m:e>
-                          <m:r>
-                            <a:rPr lang="en-US" i="1">
-                              <a:latin typeface="Cambria Math" panose="02040503050406030204" pitchFamily="18" charset="0"/>
-                            </a:rPr>
-                            <m:t>𝑇</m:t>
-                          </m:r>
-                        </m:e>
-                        <m:sup>
-                          <m:r>
-                            <a:rPr lang="en-US" i="1">
-                              <a:latin typeface="Cambria Math" panose="02040503050406030204" pitchFamily="18" charset="0"/>
-                            </a:rPr>
-                            <m:t>𝜋</m:t>
-                          </m:r>
-                        </m:sup>
-                      </m:sSup>
-                      <m:d>
-                        <m:dPr>
-                          <m:ctrlPr>
-                            <a:rPr lang="en-US" i="1">
-                              <a:latin typeface="Cambria Math" panose="02040503050406030204" pitchFamily="18" charset="0"/>
-                            </a:rPr>
-                          </m:ctrlPr>
-                        </m:dPr>
-                        <m:e>
-                          <m:sSub>
-                            <m:sSubPr>
-                              <m:ctrlPr>
-                                <a:rPr lang="en-US" i="1">
-                                  <a:latin typeface="Cambria Math" panose="02040503050406030204" pitchFamily="18" charset="0"/>
-                                </a:rPr>
-                              </m:ctrlPr>
-                            </m:sSubPr>
-                            <m:e>
-                              <m:r>
-                                <a:rPr lang="en-US" i="1">
-                                  <a:latin typeface="Cambria Math" panose="02040503050406030204" pitchFamily="18" charset="0"/>
-                                </a:rPr>
-                                <m:t>𝑣</m:t>
-                              </m:r>
-                            </m:e>
-                            <m:sub>
-                              <m:r>
-                                <a:rPr lang="en-US" i="1">
-                                  <a:latin typeface="Cambria Math" panose="02040503050406030204" pitchFamily="18" charset="0"/>
-                                </a:rPr>
-                                <m:t>𝜋</m:t>
-                              </m:r>
-                            </m:sub>
-                          </m:sSub>
-                        </m:e>
-                      </m:d>
-                    </m:oMath>
-                  </m:oMathPara>
-                </a14:m>
-                <a:endParaRPr lang="en-US" dirty="0"/>
-              </a:p>
-              <a:p>
-                <a:endParaRPr lang="en-US" dirty="0"/>
-              </a:p>
-              <a:p>
-                <a:r>
-                  <a:rPr lang="en-US" b="1" dirty="0"/>
-                  <a:t>The Contraction Property</a:t>
-                </a:r>
                 <a:r>
                   <a:rPr lang="en-US" dirty="0"/>
-                  <a:t>: The operator </a:t>
+                  <a:t>The operator has several important properties:</a:t>
                 </a:r>
-                <a14:m>
-                  <m:oMath xmlns:m="http://schemas.openxmlformats.org/officeDocument/2006/math">
-                    <m:sSup>
-                      <m:sSupPr>
-                        <m:ctrlPr>
-                          <a:rPr lang="en-US" b="0" i="1" smtClean="0">
-                            <a:latin typeface="Cambria Math" panose="02040503050406030204" pitchFamily="18" charset="0"/>
-                          </a:rPr>
-                        </m:ctrlPr>
-                      </m:sSupPr>
-                      <m:e>
-                        <m:r>
-                          <a:rPr lang="en-US" b="0" i="1" smtClean="0">
-                            <a:latin typeface="Cambria Math" panose="02040503050406030204" pitchFamily="18" charset="0"/>
-                          </a:rPr>
-                          <m:t>𝑇</m:t>
-                        </m:r>
-                      </m:e>
-                      <m:sup>
-                        <m:r>
-                          <a:rPr lang="en-US" b="0" i="1" smtClean="0">
-                            <a:latin typeface="Cambria Math" panose="02040503050406030204" pitchFamily="18" charset="0"/>
-                          </a:rPr>
-                          <m:t>𝜋</m:t>
-                        </m:r>
-                      </m:sup>
-                    </m:sSup>
-                  </m:oMath>
-                </a14:m>
-                <a:r>
-                  <a:rPr lang="en-US" dirty="0"/>
-                  <a:t> is </a:t>
-                </a:r>
-                <a14:m>
-                  <m:oMath xmlns:m="http://schemas.openxmlformats.org/officeDocument/2006/math">
-                    <m:r>
-                      <a:rPr lang="en-US" b="0" i="1" smtClean="0">
-                        <a:latin typeface="Cambria Math" panose="02040503050406030204" pitchFamily="18" charset="0"/>
-                      </a:rPr>
-                      <m:t>𝛾</m:t>
-                    </m:r>
-                  </m:oMath>
-                </a14:m>
-                <a:r>
-                  <a:rPr lang="en-US" dirty="0"/>
-                  <a:t>-contracting (see textbook for derivation):</a:t>
-                </a:r>
-                <a:br>
-                  <a:rPr lang="en-US" dirty="0"/>
-                </a:br>
-                <a:br>
-                  <a:rPr lang="en-US" dirty="0"/>
-                </a:br>
-                <a14:m>
-                  <m:oMath xmlns:m="http://schemas.openxmlformats.org/officeDocument/2006/math">
-                    <m:sSub>
-                      <m:sSubPr>
-                        <m:ctrlPr>
-                          <a:rPr lang="en-US" i="1">
-                            <a:latin typeface="Cambria Math" panose="02040503050406030204" pitchFamily="18" charset="0"/>
-                          </a:rPr>
-                        </m:ctrlPr>
-                      </m:sSubPr>
-                      <m:e>
-                        <m:d>
-                          <m:dPr>
-                            <m:begChr m:val="‖"/>
-                            <m:endChr m:val="‖"/>
-                            <m:ctrlPr>
-                              <a:rPr lang="en-US" i="1">
-                                <a:latin typeface="Cambria Math" panose="02040503050406030204" pitchFamily="18" charset="0"/>
-                              </a:rPr>
-                            </m:ctrlPr>
-                          </m:dPr>
-                          <m:e>
-                            <m:sSup>
-                              <m:sSupPr>
-                                <m:ctrlPr>
-                                  <a:rPr lang="en-US" i="1">
-                                    <a:latin typeface="Cambria Math" panose="02040503050406030204" pitchFamily="18" charset="0"/>
-                                  </a:rPr>
-                                </m:ctrlPr>
-                              </m:sSupPr>
-                              <m:e>
-                                <m:r>
-                                  <a:rPr lang="en-US" i="1">
-                                    <a:latin typeface="Cambria Math" panose="02040503050406030204" pitchFamily="18" charset="0"/>
-                                  </a:rPr>
-                                  <m:t>𝑇</m:t>
-                                </m:r>
-                              </m:e>
-                              <m:sup>
-                                <m:r>
-                                  <a:rPr lang="en-US" i="1">
-                                    <a:latin typeface="Cambria Math" panose="02040503050406030204" pitchFamily="18" charset="0"/>
-                                  </a:rPr>
-                                  <m:t>𝜋</m:t>
-                                </m:r>
-                              </m:sup>
-                            </m:sSup>
-                            <m:r>
-                              <a:rPr lang="en-US" b="0" i="1" smtClean="0">
-                                <a:latin typeface="Cambria Math" panose="02040503050406030204" pitchFamily="18" charset="0"/>
-                              </a:rPr>
-                              <m:t>𝑢</m:t>
-                            </m:r>
-                            <m:r>
-                              <a:rPr lang="en-US" i="1">
-                                <a:latin typeface="Cambria Math" panose="02040503050406030204" pitchFamily="18" charset="0"/>
-                              </a:rPr>
-                              <m:t>−</m:t>
-                            </m:r>
-                            <m:sSup>
-                              <m:sSupPr>
-                                <m:ctrlPr>
-                                  <a:rPr lang="en-US" i="1">
-                                    <a:latin typeface="Cambria Math" panose="02040503050406030204" pitchFamily="18" charset="0"/>
-                                  </a:rPr>
-                                </m:ctrlPr>
-                              </m:sSupPr>
-                              <m:e>
-                                <m:r>
-                                  <a:rPr lang="en-US" i="1">
-                                    <a:latin typeface="Cambria Math" panose="02040503050406030204" pitchFamily="18" charset="0"/>
-                                  </a:rPr>
-                                  <m:t>𝑇</m:t>
-                                </m:r>
-                              </m:e>
-                              <m:sup>
-                                <m:r>
-                                  <a:rPr lang="en-US" i="1">
-                                    <a:latin typeface="Cambria Math" panose="02040503050406030204" pitchFamily="18" charset="0"/>
-                                  </a:rPr>
-                                  <m:t>𝜋</m:t>
-                                </m:r>
-                              </m:sup>
-                            </m:sSup>
-                            <m:r>
-                              <a:rPr lang="en-US" i="1">
-                                <a:latin typeface="Cambria Math" panose="02040503050406030204" pitchFamily="18" charset="0"/>
-                              </a:rPr>
-                              <m:t>𝑣</m:t>
-                            </m:r>
-                          </m:e>
-                        </m:d>
-                      </m:e>
-                      <m:sub>
-                        <m:r>
-                          <a:rPr lang="en-US" i="1">
-                            <a:latin typeface="Cambria Math" panose="02040503050406030204" pitchFamily="18" charset="0"/>
-                          </a:rPr>
-                          <m:t>∞</m:t>
-                        </m:r>
-                      </m:sub>
-                    </m:sSub>
-                    <m:r>
-                      <a:rPr lang="en-US" i="1">
-                        <a:latin typeface="Cambria Math" panose="02040503050406030204" pitchFamily="18" charset="0"/>
-                      </a:rPr>
-                      <m:t>≤ </m:t>
-                    </m:r>
-                    <m:sSub>
-                      <m:sSubPr>
-                        <m:ctrlPr>
-                          <a:rPr lang="en-US" i="1">
-                            <a:latin typeface="Cambria Math" panose="02040503050406030204" pitchFamily="18" charset="0"/>
-                          </a:rPr>
-                        </m:ctrlPr>
-                      </m:sSubPr>
-                      <m:e>
-                        <m:r>
-                          <a:rPr lang="en-US" i="1">
-                            <a:latin typeface="Cambria Math" panose="02040503050406030204" pitchFamily="18" charset="0"/>
-                          </a:rPr>
-                          <m:t>𝛾</m:t>
-                        </m:r>
-                        <m:d>
-                          <m:dPr>
-                            <m:begChr m:val="‖"/>
-                            <m:endChr m:val="‖"/>
-                            <m:ctrlPr>
-                              <a:rPr lang="en-US" b="0" i="1" smtClean="0">
-                                <a:latin typeface="Cambria Math" panose="02040503050406030204" pitchFamily="18" charset="0"/>
-                              </a:rPr>
-                            </m:ctrlPr>
-                          </m:dPr>
-                          <m:e>
-                            <m:r>
-                              <a:rPr lang="en-US" b="0" i="1" smtClean="0">
-                                <a:latin typeface="Cambria Math" panose="02040503050406030204" pitchFamily="18" charset="0"/>
-                              </a:rPr>
-                              <m:t>𝑢</m:t>
-                            </m:r>
-                            <m:r>
-                              <a:rPr lang="en-US" i="1">
-                                <a:latin typeface="Cambria Math" panose="02040503050406030204" pitchFamily="18" charset="0"/>
-                              </a:rPr>
-                              <m:t>−</m:t>
-                            </m:r>
-                            <m:r>
-                              <a:rPr lang="en-US" i="1">
-                                <a:latin typeface="Cambria Math" panose="02040503050406030204" pitchFamily="18" charset="0"/>
-                              </a:rPr>
-                              <m:t>𝑣</m:t>
-                            </m:r>
-                          </m:e>
-                        </m:d>
-                      </m:e>
-                      <m:sub>
-                        <m:r>
-                          <a:rPr lang="en-US" i="1">
-                            <a:latin typeface="Cambria Math" panose="02040503050406030204" pitchFamily="18" charset="0"/>
-                          </a:rPr>
-                          <m:t>∞</m:t>
-                        </m:r>
-                      </m:sub>
-                    </m:sSub>
-                    <m:r>
-                      <a:rPr lang="en-US" i="1">
-                        <a:latin typeface="Cambria Math" panose="02040503050406030204" pitchFamily="18" charset="0"/>
-                      </a:rPr>
-                      <m:t>  </m:t>
-                    </m:r>
-                    <m:r>
-                      <m:rPr>
-                        <m:nor/>
-                      </m:rPr>
-                      <a:rPr lang="en-US" i="0">
-                        <a:latin typeface="Cambria Math" panose="02040503050406030204" pitchFamily="18" charset="0"/>
-                      </a:rPr>
-                      <m:t> for any   </m:t>
-                    </m:r>
-                    <m:r>
-                      <a:rPr lang="en-US" i="1">
-                        <a:latin typeface="Cambria Math" panose="02040503050406030204" pitchFamily="18" charset="0"/>
-                      </a:rPr>
-                      <m:t>𝛾</m:t>
-                    </m:r>
-                    <m:r>
-                      <a:rPr lang="en-US" i="1">
-                        <a:latin typeface="Cambria Math" panose="02040503050406030204" pitchFamily="18" charset="0"/>
-                      </a:rPr>
-                      <m:t>&lt;1</m:t>
-                    </m:r>
-                  </m:oMath>
-                </a14:m>
-                <a:br>
-                  <a:rPr lang="en-US" dirty="0"/>
-                </a:br>
-                <a:br>
-                  <a:rPr lang="en-US" dirty="0"/>
-                </a:br>
-                <a:r>
-                  <a:rPr lang="en-US" dirty="0"/>
-                  <a:t>I.e. : Applying </a:t>
-                </a:r>
-                <a14:m>
-                  <m:oMath xmlns:m="http://schemas.openxmlformats.org/officeDocument/2006/math">
-                    <m:sSup>
-                      <m:sSupPr>
-                        <m:ctrlPr>
-                          <a:rPr lang="en-US" i="1">
-                            <a:latin typeface="Cambria Math" panose="02040503050406030204" pitchFamily="18" charset="0"/>
-                          </a:rPr>
-                        </m:ctrlPr>
-                      </m:sSupPr>
-                      <m:e>
-                        <m:r>
-                          <a:rPr lang="en-US" i="1">
-                            <a:latin typeface="Cambria Math" panose="02040503050406030204" pitchFamily="18" charset="0"/>
-                          </a:rPr>
-                          <m:t>𝑇</m:t>
-                        </m:r>
-                      </m:e>
-                      <m:sup>
-                        <m:r>
-                          <a:rPr lang="en-US" i="1">
-                            <a:latin typeface="Cambria Math" panose="02040503050406030204" pitchFamily="18" charset="0"/>
-                          </a:rPr>
-                          <m:t>𝜋</m:t>
-                        </m:r>
-                      </m:sup>
-                    </m:sSup>
-                    <m:r>
-                      <a:rPr lang="en-US" i="1">
-                        <a:latin typeface="Cambria Math" panose="02040503050406030204" pitchFamily="18" charset="0"/>
-                      </a:rPr>
-                      <m:t> </m:t>
-                    </m:r>
-                  </m:oMath>
-                </a14:m>
-                <a:r>
-                  <a:rPr lang="en-US" dirty="0"/>
-                  <a:t>reduces the largest difference (infinity norm) between any arbitrary value functions </a:t>
-                </a:r>
-                <a14:m>
-                  <m:oMath xmlns:m="http://schemas.openxmlformats.org/officeDocument/2006/math">
-                    <m:r>
-                      <a:rPr lang="en-US" b="0" i="1" smtClean="0">
-                        <a:latin typeface="Cambria Math" panose="02040503050406030204" pitchFamily="18" charset="0"/>
-                      </a:rPr>
-                      <m:t>𝑢</m:t>
-                    </m:r>
-                  </m:oMath>
-                </a14:m>
-                <a:r>
-                  <a:rPr lang="en-US" dirty="0"/>
-                  <a:t> and </a:t>
-                </a:r>
-                <a14:m>
-                  <m:oMath xmlns:m="http://schemas.openxmlformats.org/officeDocument/2006/math">
-                    <m:r>
-                      <a:rPr lang="en-US" b="0" i="1" smtClean="0">
-                        <a:latin typeface="Cambria Math" panose="02040503050406030204" pitchFamily="18" charset="0"/>
-                      </a:rPr>
-                      <m:t>𝑣</m:t>
-                    </m:r>
-                  </m:oMath>
-                </a14:m>
-                <a:r>
-                  <a:rPr lang="en-US" dirty="0"/>
-                  <a:t> by at least a factor of </a:t>
-                </a:r>
-                <a14:m>
-                  <m:oMath xmlns:m="http://schemas.openxmlformats.org/officeDocument/2006/math">
-                    <m:r>
-                      <a:rPr lang="en-US" i="1">
-                        <a:latin typeface="Cambria Math" panose="02040503050406030204" pitchFamily="18" charset="0"/>
-                      </a:rPr>
-                      <m:t>𝛾</m:t>
-                    </m:r>
-                  </m:oMath>
-                </a14:m>
-                <a:endParaRPr lang="en-US" dirty="0"/>
-              </a:p>
-              <a:p>
-                <a:r>
-                  <a:rPr lang="en-US" dirty="0"/>
-                  <a:t>This implies:</a:t>
-                </a:r>
-                <a:br>
-                  <a:rPr lang="en-US" dirty="0"/>
-                </a:br>
-                <a14:m>
-                  <m:oMath xmlns:m="http://schemas.openxmlformats.org/officeDocument/2006/math">
-                    <m:sSub>
-                      <m:sSubPr>
-                        <m:ctrlPr>
-                          <a:rPr lang="en-US" i="1">
-                            <a:latin typeface="Cambria Math" panose="02040503050406030204" pitchFamily="18" charset="0"/>
-                          </a:rPr>
-                        </m:ctrlPr>
-                      </m:sSubPr>
-                      <m:e>
-                        <m:d>
-                          <m:dPr>
-                            <m:begChr m:val="‖"/>
-                            <m:endChr m:val="‖"/>
-                            <m:ctrlPr>
-                              <a:rPr lang="en-US" i="1">
-                                <a:latin typeface="Cambria Math" panose="02040503050406030204" pitchFamily="18" charset="0"/>
-                              </a:rPr>
-                            </m:ctrlPr>
-                          </m:dPr>
-                          <m:e>
-                            <m:sSub>
-                              <m:sSubPr>
-                                <m:ctrlPr>
-                                  <a:rPr lang="en-US" i="1">
-                                    <a:latin typeface="Cambria Math" panose="02040503050406030204" pitchFamily="18" charset="0"/>
-                                  </a:rPr>
-                                </m:ctrlPr>
-                              </m:sSubPr>
-                              <m:e>
-                                <m:r>
-                                  <a:rPr lang="en-US" i="1">
-                                    <a:latin typeface="Cambria Math" panose="02040503050406030204" pitchFamily="18" charset="0"/>
-                                  </a:rPr>
-                                  <m:t>𝑣</m:t>
-                                </m:r>
-                              </m:e>
-                              <m:sub>
-                                <m:r>
-                                  <a:rPr lang="en-US" i="1">
-                                    <a:latin typeface="Cambria Math" panose="02040503050406030204" pitchFamily="18" charset="0"/>
-                                  </a:rPr>
-                                  <m:t>𝜋</m:t>
-                                </m:r>
-                              </m:sub>
-                            </m:sSub>
-                            <m:r>
-                              <a:rPr lang="en-US" i="1">
-                                <a:latin typeface="Cambria Math" panose="02040503050406030204" pitchFamily="18" charset="0"/>
-                              </a:rPr>
-                              <m:t>−</m:t>
-                            </m:r>
-                            <m:sSup>
-                              <m:sSupPr>
-                                <m:ctrlPr>
-                                  <a:rPr lang="en-US" i="1">
-                                    <a:latin typeface="Cambria Math" panose="02040503050406030204" pitchFamily="18" charset="0"/>
-                                  </a:rPr>
-                                </m:ctrlPr>
-                              </m:sSupPr>
-                              <m:e>
-                                <m:r>
-                                  <a:rPr lang="en-US" i="1">
-                                    <a:latin typeface="Cambria Math" panose="02040503050406030204" pitchFamily="18" charset="0"/>
-                                  </a:rPr>
-                                  <m:t>𝑇</m:t>
-                                </m:r>
-                              </m:e>
-                              <m:sup>
-                                <m:r>
-                                  <a:rPr lang="en-US" i="1">
-                                    <a:latin typeface="Cambria Math" panose="02040503050406030204" pitchFamily="18" charset="0"/>
-                                  </a:rPr>
-                                  <m:t>𝜋</m:t>
-                                </m:r>
-                              </m:sup>
-                            </m:sSup>
-                            <m:r>
-                              <a:rPr lang="en-US" i="1">
-                                <a:latin typeface="Cambria Math" panose="02040503050406030204" pitchFamily="18" charset="0"/>
-                              </a:rPr>
-                              <m:t>𝑣</m:t>
-                            </m:r>
-                          </m:e>
-                        </m:d>
-                      </m:e>
-                      <m:sub>
-                        <m:r>
-                          <a:rPr lang="en-US" i="1">
-                            <a:latin typeface="Cambria Math" panose="02040503050406030204" pitchFamily="18" charset="0"/>
-                          </a:rPr>
-                          <m:t>∞</m:t>
-                        </m:r>
-                      </m:sub>
-                    </m:sSub>
-                    <m:r>
-                      <a:rPr lang="en-US" i="1">
-                        <a:latin typeface="Cambria Math" panose="02040503050406030204" pitchFamily="18" charset="0"/>
-                      </a:rPr>
-                      <m:t>≤ </m:t>
-                    </m:r>
-                    <m:sSub>
-                      <m:sSubPr>
-                        <m:ctrlPr>
-                          <a:rPr lang="en-US" i="1">
-                            <a:latin typeface="Cambria Math" panose="02040503050406030204" pitchFamily="18" charset="0"/>
-                          </a:rPr>
-                        </m:ctrlPr>
-                      </m:sSubPr>
-                      <m:e>
-                        <m:r>
-                          <a:rPr lang="en-US" i="1">
-                            <a:latin typeface="Cambria Math" panose="02040503050406030204" pitchFamily="18" charset="0"/>
-                          </a:rPr>
-                          <m:t>𝛾</m:t>
-                        </m:r>
-                        <m:d>
-                          <m:dPr>
-                            <m:begChr m:val="‖"/>
-                            <m:endChr m:val="‖"/>
-                            <m:ctrlPr>
-                              <a:rPr lang="en-US" i="1">
-                                <a:latin typeface="Cambria Math" panose="02040503050406030204" pitchFamily="18" charset="0"/>
-                              </a:rPr>
-                            </m:ctrlPr>
-                          </m:dPr>
-                          <m:e>
-                            <m:sSub>
-                              <m:sSubPr>
-                                <m:ctrlPr>
-                                  <a:rPr lang="en-US" i="1">
-                                    <a:latin typeface="Cambria Math" panose="02040503050406030204" pitchFamily="18" charset="0"/>
-                                  </a:rPr>
-                                </m:ctrlPr>
-                              </m:sSubPr>
-                              <m:e>
-                                <m:r>
-                                  <a:rPr lang="en-US" i="1">
-                                    <a:latin typeface="Cambria Math" panose="02040503050406030204" pitchFamily="18" charset="0"/>
-                                  </a:rPr>
-                                  <m:t>𝑣</m:t>
-                                </m:r>
-                              </m:e>
-                              <m:sub>
-                                <m:r>
-                                  <a:rPr lang="en-US" i="1">
-                                    <a:latin typeface="Cambria Math" panose="02040503050406030204" pitchFamily="18" charset="0"/>
-                                  </a:rPr>
-                                  <m:t>𝜋</m:t>
-                                </m:r>
-                              </m:sub>
-                            </m:sSub>
-                            <m:r>
-                              <a:rPr lang="en-US" i="1">
-                                <a:latin typeface="Cambria Math" panose="02040503050406030204" pitchFamily="18" charset="0"/>
-                              </a:rPr>
-                              <m:t>−</m:t>
-                            </m:r>
-                            <m:r>
-                              <a:rPr lang="en-US" i="1">
-                                <a:latin typeface="Cambria Math" panose="02040503050406030204" pitchFamily="18" charset="0"/>
-                              </a:rPr>
-                              <m:t>𝑣</m:t>
-                            </m:r>
-                          </m:e>
-                        </m:d>
-                      </m:e>
-                      <m:sub>
-                        <m:r>
-                          <a:rPr lang="en-US" i="1">
-                            <a:latin typeface="Cambria Math" panose="02040503050406030204" pitchFamily="18" charset="0"/>
-                          </a:rPr>
-                          <m:t>∞</m:t>
-                        </m:r>
-                      </m:sub>
-                    </m:sSub>
-                    <m:r>
-                      <a:rPr lang="en-US" i="1">
-                        <a:latin typeface="Cambria Math" panose="02040503050406030204" pitchFamily="18" charset="0"/>
-                      </a:rPr>
-                      <m:t>  </m:t>
-                    </m:r>
-                    <m:r>
-                      <m:rPr>
-                        <m:nor/>
-                      </m:rPr>
-                      <a:rPr lang="en-US" i="0">
-                        <a:latin typeface="Cambria Math" panose="02040503050406030204" pitchFamily="18" charset="0"/>
-                      </a:rPr>
-                      <m:t> for any   </m:t>
-                    </m:r>
-                    <m:r>
-                      <a:rPr lang="en-US" i="1">
-                        <a:latin typeface="Cambria Math" panose="02040503050406030204" pitchFamily="18" charset="0"/>
-                      </a:rPr>
-                      <m:t>𝛾</m:t>
-                    </m:r>
-                    <m:r>
-                      <a:rPr lang="en-US" i="1">
-                        <a:latin typeface="Cambria Math" panose="02040503050406030204" pitchFamily="18" charset="0"/>
-                      </a:rPr>
-                      <m:t>&lt;1</m:t>
-                    </m:r>
-                  </m:oMath>
-                </a14:m>
-                <a:endParaRPr lang="en-US" dirty="0"/>
-              </a:p>
-              <a:p>
-                <a:pPr marL="0" indent="0">
-                  <a:buNone/>
-                </a:pPr>
                 <a:endParaRPr lang="en-US" b="0" i="1" dirty="0">
                   <a:latin typeface="Cambria Math" panose="02040503050406030204" pitchFamily="18" charset="0"/>
                 </a:endParaRPr>
@@ -9291,7 +8620,7 @@
             </p:txBody>
           </p:sp>
         </mc:Choice>
-        <mc:Fallback xmlns="">
+        <mc:Fallback>
           <p:sp>
             <p:nvSpPr>
               <p:cNvPr id="3" name="Content Placeholder 2" descr="The Bellman update can be rewritten as an operator: Bellman Expectation Operator T to the power pi :. (T to the power pi v) (s) equals the sum over a, of pi (a given s) the sum over s prime,r, of p (s prime,r | s,a)[r plus gamma v (s prime)]. The Fixed Point Property: The value function is unchanged if all state values are already consistent. v sub pi equals T to the power pi (v sub pi). The Contraction Property: The operator T to the power pi is gamma -contracting (see textbook for derivation): the norm of T to the power pi u minus T to the power pi v sub infinity is less than or equal to gamma the norm of u minus v sub infinity for any gamma is less than 1 I.e. : Applying T to the power pi reduces the largest difference (infinity norm) between any arbitrary value functions u and v by at least a factor of gamma. This implies: the norm of v sub pi minus T to the power pi v sub infinity is less than or equal to gamma the norm of v sub pi minus v sub infinity for any gamma is less than 1">
@@ -9310,13 +8639,13 @@
             </p:nvSpPr>
             <p:spPr>
               <a:xfrm>
-                <a:off x="838200" y="1397330"/>
-                <a:ext cx="8581869" cy="4145562"/>
+                <a:off x="838200" y="1085747"/>
+                <a:ext cx="8581869" cy="1726800"/>
               </a:xfrm>
               <a:blipFill>
                 <a:blip r:embed="rId2"/>
                 <a:stretch>
-                  <a:fillRect l="-213" t="-5147"/>
+                  <a:fillRect l="-284" t="-12367" b="-33922"/>
                 </a:stretch>
               </a:blipFill>
             </p:spPr>
@@ -9335,8 +8664,8 @@
           </p:sp>
         </mc:Fallback>
       </mc:AlternateContent>
-      <mc:AlternateContent xmlns:mc="http://schemas.openxmlformats.org/markup-compatibility/2006" xmlns:a14="http://schemas.microsoft.com/office/drawing/2010/main">
-        <mc:Choice Requires="a14">
+      <mc:AlternateContent xmlns:mc="http://schemas.openxmlformats.org/markup-compatibility/2006">
+        <mc:Choice xmlns:a14="http://schemas.microsoft.com/office/drawing/2010/main" Requires="a14">
           <p:sp>
             <p:nvSpPr>
               <p:cNvPr id="5" name="Speech Bubble: Rectangle with Corners Rounded 4" descr="Convergence if gamma is less than 1 : T to the power pi T to the power pi T to the power pi dot dot dot T to the power pi v to v sub pi for any v">
@@ -9351,13 +8680,13 @@
             </p:nvSpPr>
             <p:spPr>
               <a:xfrm>
-                <a:off x="3507303" y="5630091"/>
-                <a:ext cx="3363494" cy="718762"/>
+                <a:off x="2395348" y="6151314"/>
+                <a:ext cx="5467572" cy="327502"/>
               </a:xfrm>
               <a:prstGeom prst="wedgeRoundRectCallout">
                 <a:avLst>
-                  <a:gd name="adj1" fmla="val -17540"/>
-                  <a:gd name="adj2" fmla="val -93676"/>
+                  <a:gd name="adj1" fmla="val -25217"/>
+                  <a:gd name="adj2" fmla="val -134870"/>
                   <a:gd name="adj3" fmla="val 16667"/>
                 </a:avLst>
               </a:prstGeom>
@@ -9405,11 +8734,8 @@
                 </a14:m>
                 <a:r>
                   <a:rPr lang="en-US" b="0" dirty="0"/>
-                  <a:t>:</a:t>
+                  <a:t>: </a:t>
                 </a:r>
-                <a:br>
-                  <a:rPr lang="en-US" b="0" dirty="0"/>
-                </a:br>
                 <a14:m>
                   <m:oMath xmlns:m="http://schemas.openxmlformats.org/officeDocument/2006/math">
                     <m:sSup>
@@ -9579,7 +8905,7 @@
             </p:txBody>
           </p:sp>
         </mc:Choice>
-        <mc:Fallback xmlns="">
+        <mc:Fallback>
           <p:sp>
             <p:nvSpPr>
               <p:cNvPr id="5" name="Speech Bubble: Rectangle with Corners Rounded 4" descr="Convergence if gamma is less than 1 : T to the power pi T to the power pi T to the power pi dot dot dot T to the power pi v to v sub pi for any v">
@@ -9596,20 +8922,20 @@
             </p:nvSpPr>
             <p:spPr>
               <a:xfrm>
-                <a:off x="3507303" y="5630091"/>
-                <a:ext cx="3363494" cy="718762"/>
+                <a:off x="2395348" y="6151314"/>
+                <a:ext cx="5467572" cy="327502"/>
               </a:xfrm>
               <a:prstGeom prst="wedgeRoundRectCallout">
                 <a:avLst>
-                  <a:gd name="adj1" fmla="val -17540"/>
-                  <a:gd name="adj2" fmla="val -93676"/>
+                  <a:gd name="adj1" fmla="val -25217"/>
+                  <a:gd name="adj2" fmla="val -134870"/>
                   <a:gd name="adj3" fmla="val 16667"/>
                 </a:avLst>
               </a:prstGeom>
               <a:blipFill>
                 <a:blip r:embed="rId3"/>
                 <a:stretch>
-                  <a:fillRect b="-5233"/>
+                  <a:fillRect b="-17476"/>
                 </a:stretch>
               </a:blipFill>
             </p:spPr>
@@ -9628,8 +8954,8 @@
           </p:sp>
         </mc:Fallback>
       </mc:AlternateContent>
-      <mc:AlternateContent xmlns:mc="http://schemas.openxmlformats.org/markup-compatibility/2006" xmlns:a14="http://schemas.microsoft.com/office/drawing/2010/main">
-        <mc:Choice Requires="a14">
+      <mc:AlternateContent xmlns:mc="http://schemas.openxmlformats.org/markup-compatibility/2006">
+        <mc:Choice xmlns:a14="http://schemas.microsoft.com/office/drawing/2010/main" Requires="a14">
           <p:sp>
             <p:nvSpPr>
               <p:cNvPr id="6" name="TextBox 5" descr="Notation:. (T to the power pi v) is the new value function after applying the operator. We could write v sub k plus 1, equals T to the power pi (v sub k)">
@@ -9644,8 +8970,8 @@
             </p:nvSpPr>
             <p:spPr>
               <a:xfrm>
-                <a:off x="9229235" y="1195993"/>
-                <a:ext cx="2227288" cy="1323439"/>
+                <a:off x="9146068" y="1193653"/>
+                <a:ext cx="2590509" cy="1323439"/>
               </a:xfrm>
               <a:prstGeom prst="rect">
                 <a:avLst/>
@@ -9726,7 +9052,7 @@
                 </a14:m>
                 <a:r>
                   <a:rPr lang="en-US" sz="1600" dirty="0"/>
-                  <a:t> is the new value function after applying the operator. We could write </a:t>
+                  <a:t> is the new value function after applying the operator. We can now write </a:t>
                 </a:r>
                 <a14:m>
                   <m:oMath xmlns:m="http://schemas.openxmlformats.org/officeDocument/2006/math">
@@ -9835,7 +9161,7 @@
             </p:txBody>
           </p:sp>
         </mc:Choice>
-        <mc:Fallback xmlns="">
+        <mc:Fallback>
           <p:sp>
             <p:nvSpPr>
               <p:cNvPr id="6" name="TextBox 5" descr="Notation:. (T to the power pi v) is the new value function after applying the operator. We could write v sub k plus 1, equals T to the power pi (v sub k)">
@@ -9852,16 +9178,16 @@
             </p:nvSpPr>
             <p:spPr>
               <a:xfrm>
-                <a:off x="9229235" y="1195993"/>
-                <a:ext cx="2227288" cy="1323439"/>
+                <a:off x="9146068" y="1193653"/>
+                <a:ext cx="2590509" cy="1323439"/>
               </a:xfrm>
               <a:prstGeom prst="rect">
                 <a:avLst/>
               </a:prstGeom>
               <a:blipFill>
-                <a:blip r:embed="rId5"/>
+                <a:blip r:embed="rId4"/>
                 <a:stretch>
-                  <a:fillRect l="-1359" t="-909" b="-4091"/>
+                  <a:fillRect l="-935" t="-909" r="-935"/>
                 </a:stretch>
               </a:blipFill>
             </p:spPr>
@@ -10336,7 +9662,7 @@
                 </a:lstStyle>
                 <a:p>
                   <a:pPr algn="ctr"/>
-                  <a:endParaRPr lang="en-US"/>
+                  <a:endParaRPr lang="en-US" dirty="0"/>
                 </a:p>
               </p:txBody>
             </p:sp>
@@ -10489,7 +9815,7 @@
                 </a:lstStyle>
                 <a:p>
                   <a:pPr algn="ctr"/>
-                  <a:endParaRPr lang="en-US"/>
+                  <a:endParaRPr lang="en-US" dirty="0"/>
                 </a:p>
               </p:txBody>
             </p:sp>
@@ -10642,7 +9968,7 @@
                 </a:lstStyle>
                 <a:p>
                   <a:pPr algn="ctr"/>
-                  <a:endParaRPr lang="en-US"/>
+                  <a:endParaRPr lang="en-US" dirty="0"/>
                 </a:p>
               </p:txBody>
             </p:sp>
@@ -10795,7 +10121,7 @@
                 </a:lstStyle>
                 <a:p>
                   <a:pPr algn="ctr"/>
-                  <a:endParaRPr lang="en-US"/>
+                  <a:endParaRPr lang="en-US" dirty="0"/>
                 </a:p>
               </p:txBody>
             </p:sp>
@@ -11350,7 +10676,7 @@
                 </a:lstStyle>
                 <a:p>
                   <a:pPr algn="ctr"/>
-                  <a:endParaRPr lang="en-US"/>
+                  <a:endParaRPr lang="en-US" dirty="0"/>
                 </a:p>
               </p:txBody>
             </p:sp>
@@ -11973,6 +11299,953 @@
           </mc:Fallback>
         </mc:AlternateContent>
       </p:grpSp>
+      <mc:AlternateContent xmlns:mc="http://schemas.openxmlformats.org/markup-compatibility/2006">
+        <mc:Choice xmlns:a14="http://schemas.microsoft.com/office/drawing/2010/main" Requires="a14">
+          <p:sp>
+            <p:nvSpPr>
+              <p:cNvPr id="7" name="TextBox 6">
+                <a:extLst>
+                  <a:ext uri="{FF2B5EF4-FFF2-40B4-BE49-F238E27FC236}">
+                    <a16:creationId xmlns:a16="http://schemas.microsoft.com/office/drawing/2014/main" id="{4312A427-8C1F-743D-E432-872ABBC0ECC7}"/>
+                  </a:ext>
+                </a:extLst>
+              </p:cNvPr>
+              <p:cNvSpPr txBox="1"/>
+              <p:nvPr/>
+            </p:nvSpPr>
+            <p:spPr>
+              <a:xfrm>
+                <a:off x="925409" y="2614024"/>
+                <a:ext cx="8001000" cy="830997"/>
+              </a:xfrm>
+              <a:prstGeom prst="rect">
+                <a:avLst/>
+              </a:prstGeom>
+            </p:spPr>
+            <p:style>
+              <a:lnRef idx="2">
+                <a:schemeClr val="accent3">
+                  <a:shade val="15000"/>
+                </a:schemeClr>
+              </a:lnRef>
+              <a:fillRef idx="1">
+                <a:schemeClr val="accent3"/>
+              </a:fillRef>
+              <a:effectRef idx="0">
+                <a:schemeClr val="accent3"/>
+              </a:effectRef>
+              <a:fontRef idx="minor">
+                <a:schemeClr val="lt1"/>
+              </a:fontRef>
+            </p:style>
+            <p:txBody>
+              <a:bodyPr wrap="square">
+                <a:spAutoFit/>
+              </a:bodyPr>
+              <a:lstStyle/>
+              <a:p>
+                <a:pPr algn="ctr"/>
+                <a:r>
+                  <a:rPr lang="en-US" sz="1600" b="1" dirty="0"/>
+                  <a:t>The Fixed-Point Property</a:t>
+                </a:r>
+                <a:br>
+                  <a:rPr lang="en-US" sz="1600" b="1" dirty="0"/>
+                </a:br>
+                <a:r>
+                  <a:rPr lang="en-US" sz="1600" dirty="0"/>
+                  <a:t>The value function is unchanged if all state values are already consistent.</a:t>
+                </a:r>
+                <a:br>
+                  <a:rPr lang="en-US" sz="1600" i="1" dirty="0">
+                    <a:latin typeface="Cambria Math" panose="02040503050406030204" pitchFamily="18" charset="0"/>
+                  </a:rPr>
+                </a:br>
+                <a14:m>
+                  <m:oMathPara xmlns:m="http://schemas.openxmlformats.org/officeDocument/2006/math">
+                    <m:oMath>
+                      <m:sSub>
+                        <m:sSubPr>
+                          <m:ctrlPr>
+                            <a:rPr lang="en-US" sz="1600" i="1">
+                              <a:latin typeface="Cambria Math" panose="02040503050406030204" pitchFamily="18" charset="0"/>
+                            </a:rPr>
+                          </m:ctrlPr>
+                        </m:sSubPr>
+                        <m:e>
+                          <m:r>
+                            <a:rPr lang="en-US" sz="1600" i="1">
+                              <a:latin typeface="Cambria Math" panose="02040503050406030204" pitchFamily="18" charset="0"/>
+                            </a:rPr>
+                            <m:t>𝑣</m:t>
+                          </m:r>
+                        </m:e>
+                        <m:sub>
+                          <m:r>
+                            <a:rPr lang="en-US" sz="1600" i="1">
+                              <a:latin typeface="Cambria Math" panose="02040503050406030204" pitchFamily="18" charset="0"/>
+                            </a:rPr>
+                            <m:t>𝜋</m:t>
+                          </m:r>
+                        </m:sub>
+                      </m:sSub>
+                      <m:r>
+                        <a:rPr lang="en-US" sz="1600" i="1">
+                          <a:latin typeface="Cambria Math" panose="02040503050406030204" pitchFamily="18" charset="0"/>
+                        </a:rPr>
+                        <m:t>=</m:t>
+                      </m:r>
+                      <m:sSup>
+                        <m:sSupPr>
+                          <m:ctrlPr>
+                            <a:rPr lang="en-US" sz="1600" i="1">
+                              <a:latin typeface="Cambria Math" panose="02040503050406030204" pitchFamily="18" charset="0"/>
+                            </a:rPr>
+                          </m:ctrlPr>
+                        </m:sSupPr>
+                        <m:e>
+                          <m:r>
+                            <a:rPr lang="en-US" sz="1600" i="1">
+                              <a:latin typeface="Cambria Math" panose="02040503050406030204" pitchFamily="18" charset="0"/>
+                            </a:rPr>
+                            <m:t>𝑇</m:t>
+                          </m:r>
+                        </m:e>
+                        <m:sup>
+                          <m:r>
+                            <a:rPr lang="en-US" sz="1600" i="1">
+                              <a:latin typeface="Cambria Math" panose="02040503050406030204" pitchFamily="18" charset="0"/>
+                            </a:rPr>
+                            <m:t>𝜋</m:t>
+                          </m:r>
+                        </m:sup>
+                      </m:sSup>
+                      <m:d>
+                        <m:dPr>
+                          <m:ctrlPr>
+                            <a:rPr lang="en-US" sz="1600" i="1">
+                              <a:latin typeface="Cambria Math" panose="02040503050406030204" pitchFamily="18" charset="0"/>
+                            </a:rPr>
+                          </m:ctrlPr>
+                        </m:dPr>
+                        <m:e>
+                          <m:sSub>
+                            <m:sSubPr>
+                              <m:ctrlPr>
+                                <a:rPr lang="en-US" sz="1600" i="1">
+                                  <a:latin typeface="Cambria Math" panose="02040503050406030204" pitchFamily="18" charset="0"/>
+                                </a:rPr>
+                              </m:ctrlPr>
+                            </m:sSubPr>
+                            <m:e>
+                              <m:r>
+                                <a:rPr lang="en-US" sz="1600" i="1">
+                                  <a:latin typeface="Cambria Math" panose="02040503050406030204" pitchFamily="18" charset="0"/>
+                                </a:rPr>
+                                <m:t>𝑣</m:t>
+                              </m:r>
+                            </m:e>
+                            <m:sub>
+                              <m:r>
+                                <a:rPr lang="en-US" sz="1600" i="1">
+                                  <a:latin typeface="Cambria Math" panose="02040503050406030204" pitchFamily="18" charset="0"/>
+                                </a:rPr>
+                                <m:t>𝜋</m:t>
+                              </m:r>
+                            </m:sub>
+                          </m:sSub>
+                        </m:e>
+                      </m:d>
+                    </m:oMath>
+                  </m:oMathPara>
+                </a14:m>
+                <a:endParaRPr lang="en-US" sz="1100" dirty="0"/>
+              </a:p>
+            </p:txBody>
+          </p:sp>
+        </mc:Choice>
+        <mc:Fallback>
+          <p:sp>
+            <p:nvSpPr>
+              <p:cNvPr id="7" name="TextBox 6">
+                <a:extLst>
+                  <a:ext uri="{FF2B5EF4-FFF2-40B4-BE49-F238E27FC236}">
+                    <a16:creationId xmlns:a16="http://schemas.microsoft.com/office/drawing/2014/main" id="{4312A427-8C1F-743D-E432-872ABBC0ECC7}"/>
+                  </a:ext>
+                </a:extLst>
+              </p:cNvPr>
+              <p:cNvSpPr txBox="1">
+                <a:spLocks noRot="1" noChangeAspect="1" noMove="1" noResize="1" noEditPoints="1" noAdjustHandles="1" noChangeArrowheads="1" noChangeShapeType="1" noTextEdit="1"/>
+              </p:cNvSpPr>
+              <p:nvPr/>
+            </p:nvSpPr>
+            <p:spPr>
+              <a:xfrm>
+                <a:off x="925409" y="2614024"/>
+                <a:ext cx="8001000" cy="830997"/>
+              </a:xfrm>
+              <a:prstGeom prst="rect">
+                <a:avLst/>
+              </a:prstGeom>
+              <a:blipFill>
+                <a:blip r:embed="rId13"/>
+                <a:stretch>
+                  <a:fillRect t="-1439"/>
+                </a:stretch>
+              </a:blipFill>
+            </p:spPr>
+            <p:txBody>
+              <a:bodyPr/>
+              <a:lstStyle/>
+              <a:p>
+                <a:r>
+                  <a:rPr lang="en-US">
+                    <a:noFill/>
+                  </a:rPr>
+                  <a:t> </a:t>
+                </a:r>
+              </a:p>
+            </p:txBody>
+          </p:sp>
+        </mc:Fallback>
+      </mc:AlternateContent>
+      <mc:AlternateContent xmlns:mc="http://schemas.openxmlformats.org/markup-compatibility/2006">
+        <mc:Choice xmlns:a14="http://schemas.microsoft.com/office/drawing/2010/main" Requires="a14">
+          <p:sp>
+            <p:nvSpPr>
+              <p:cNvPr id="24" name="TextBox 23">
+                <a:extLst>
+                  <a:ext uri="{FF2B5EF4-FFF2-40B4-BE49-F238E27FC236}">
+                    <a16:creationId xmlns:a16="http://schemas.microsoft.com/office/drawing/2014/main" id="{02B42EB3-962C-0C37-D0ED-8ED842D2AB24}"/>
+                  </a:ext>
+                </a:extLst>
+              </p:cNvPr>
+              <p:cNvSpPr txBox="1"/>
+              <p:nvPr/>
+            </p:nvSpPr>
+            <p:spPr>
+              <a:xfrm>
+                <a:off x="925409" y="3577974"/>
+                <a:ext cx="8001000" cy="1815882"/>
+              </a:xfrm>
+              <a:prstGeom prst="rect">
+                <a:avLst/>
+              </a:prstGeom>
+            </p:spPr>
+            <p:style>
+              <a:lnRef idx="2">
+                <a:schemeClr val="accent3">
+                  <a:shade val="15000"/>
+                </a:schemeClr>
+              </a:lnRef>
+              <a:fillRef idx="1">
+                <a:schemeClr val="accent3"/>
+              </a:fillRef>
+              <a:effectRef idx="0">
+                <a:schemeClr val="accent3"/>
+              </a:effectRef>
+              <a:fontRef idx="minor">
+                <a:schemeClr val="lt1"/>
+              </a:fontRef>
+            </p:style>
+            <p:txBody>
+              <a:bodyPr wrap="square">
+                <a:spAutoFit/>
+              </a:bodyPr>
+              <a:lstStyle/>
+              <a:p>
+                <a:pPr algn="ctr"/>
+                <a:r>
+                  <a:rPr lang="en-US" sz="1600" b="1" dirty="0"/>
+                  <a:t>The Contraction Property</a:t>
+                </a:r>
+                <a:endParaRPr lang="en-US" sz="1600" dirty="0"/>
+              </a:p>
+              <a:p>
+                <a:pPr/>
+                <a:r>
+                  <a:rPr lang="en-US" sz="1600" dirty="0"/>
+                  <a:t>The operator </a:t>
+                </a:r>
+                <a14:m>
+                  <m:oMath xmlns:m="http://schemas.openxmlformats.org/officeDocument/2006/math">
+                    <m:sSup>
+                      <m:sSupPr>
+                        <m:ctrlPr>
+                          <a:rPr lang="en-US" sz="1600" b="0" i="1" smtClean="0">
+                            <a:latin typeface="Cambria Math" panose="02040503050406030204" pitchFamily="18" charset="0"/>
+                          </a:rPr>
+                        </m:ctrlPr>
+                      </m:sSupPr>
+                      <m:e>
+                        <m:r>
+                          <a:rPr lang="en-US" sz="1600" b="0" i="1" smtClean="0">
+                            <a:latin typeface="Cambria Math" panose="02040503050406030204" pitchFamily="18" charset="0"/>
+                          </a:rPr>
+                          <m:t>𝑇</m:t>
+                        </m:r>
+                      </m:e>
+                      <m:sup>
+                        <m:r>
+                          <a:rPr lang="en-US" sz="1600" b="0" i="1" smtClean="0">
+                            <a:latin typeface="Cambria Math" panose="02040503050406030204" pitchFamily="18" charset="0"/>
+                          </a:rPr>
+                          <m:t>𝜋</m:t>
+                        </m:r>
+                      </m:sup>
+                    </m:sSup>
+                  </m:oMath>
+                </a14:m>
+                <a:r>
+                  <a:rPr lang="en-US" sz="1600" dirty="0"/>
+                  <a:t> is </a:t>
+                </a:r>
+                <a14:m>
+                  <m:oMath xmlns:m="http://schemas.openxmlformats.org/officeDocument/2006/math">
+                    <m:r>
+                      <a:rPr lang="en-US" sz="1600" b="1" i="1" smtClean="0">
+                        <a:latin typeface="Cambria Math" panose="02040503050406030204" pitchFamily="18" charset="0"/>
+                      </a:rPr>
+                      <m:t>𝜸</m:t>
+                    </m:r>
+                  </m:oMath>
+                </a14:m>
+                <a:r>
+                  <a:rPr lang="en-US" sz="1600" b="1" dirty="0"/>
+                  <a:t>-contracting </a:t>
+                </a:r>
+                <a:r>
+                  <a:rPr lang="en-US" sz="1600" dirty="0"/>
+                  <a:t>(see textbook for derivation):</a:t>
+                </a:r>
+                <a:br>
+                  <a:rPr lang="en-US" sz="1600" dirty="0"/>
+                </a:br>
+                <a:br>
+                  <a:rPr lang="en-US" sz="1600" dirty="0"/>
+                </a:br>
+                <a14:m>
+                  <m:oMathPara xmlns:m="http://schemas.openxmlformats.org/officeDocument/2006/math">
+                    <m:oMath>
+                      <m:sSub>
+                        <m:sSubPr>
+                          <m:ctrlPr>
+                            <a:rPr lang="en-US" sz="1600" i="1">
+                              <a:latin typeface="Cambria Math" panose="02040503050406030204" pitchFamily="18" charset="0"/>
+                            </a:rPr>
+                          </m:ctrlPr>
+                        </m:sSubPr>
+                        <m:e>
+                          <m:d>
+                            <m:dPr>
+                              <m:begChr m:val="‖"/>
+                              <m:endChr m:val="‖"/>
+                              <m:ctrlPr>
+                                <a:rPr lang="en-US" sz="1600" i="1">
+                                  <a:latin typeface="Cambria Math" panose="02040503050406030204" pitchFamily="18" charset="0"/>
+                                </a:rPr>
+                              </m:ctrlPr>
+                            </m:dPr>
+                            <m:e>
+                              <m:sSup>
+                                <m:sSupPr>
+                                  <m:ctrlPr>
+                                    <a:rPr lang="en-US" sz="1600" i="1">
+                                      <a:latin typeface="Cambria Math" panose="02040503050406030204" pitchFamily="18" charset="0"/>
+                                    </a:rPr>
+                                  </m:ctrlPr>
+                                </m:sSupPr>
+                                <m:e>
+                                  <m:r>
+                                    <a:rPr lang="en-US" sz="1600" i="1">
+                                      <a:latin typeface="Cambria Math" panose="02040503050406030204" pitchFamily="18" charset="0"/>
+                                    </a:rPr>
+                                    <m:t>𝑇</m:t>
+                                  </m:r>
+                                </m:e>
+                                <m:sup>
+                                  <m:r>
+                                    <a:rPr lang="en-US" sz="1600" i="1">
+                                      <a:latin typeface="Cambria Math" panose="02040503050406030204" pitchFamily="18" charset="0"/>
+                                    </a:rPr>
+                                    <m:t>𝜋</m:t>
+                                  </m:r>
+                                </m:sup>
+                              </m:sSup>
+                              <m:r>
+                                <a:rPr lang="en-US" sz="1600" b="0" i="1" smtClean="0">
+                                  <a:latin typeface="Cambria Math" panose="02040503050406030204" pitchFamily="18" charset="0"/>
+                                </a:rPr>
+                                <m:t>𝑢</m:t>
+                              </m:r>
+                              <m:r>
+                                <a:rPr lang="en-US" sz="1600" i="1">
+                                  <a:latin typeface="Cambria Math" panose="02040503050406030204" pitchFamily="18" charset="0"/>
+                                </a:rPr>
+                                <m:t>−</m:t>
+                              </m:r>
+                              <m:sSup>
+                                <m:sSupPr>
+                                  <m:ctrlPr>
+                                    <a:rPr lang="en-US" sz="1600" i="1">
+                                      <a:latin typeface="Cambria Math" panose="02040503050406030204" pitchFamily="18" charset="0"/>
+                                    </a:rPr>
+                                  </m:ctrlPr>
+                                </m:sSupPr>
+                                <m:e>
+                                  <m:r>
+                                    <a:rPr lang="en-US" sz="1600" i="1">
+                                      <a:latin typeface="Cambria Math" panose="02040503050406030204" pitchFamily="18" charset="0"/>
+                                    </a:rPr>
+                                    <m:t>𝑇</m:t>
+                                  </m:r>
+                                </m:e>
+                                <m:sup>
+                                  <m:r>
+                                    <a:rPr lang="en-US" sz="1600" i="1">
+                                      <a:latin typeface="Cambria Math" panose="02040503050406030204" pitchFamily="18" charset="0"/>
+                                    </a:rPr>
+                                    <m:t>𝜋</m:t>
+                                  </m:r>
+                                </m:sup>
+                              </m:sSup>
+                              <m:r>
+                                <a:rPr lang="en-US" sz="1600" i="1">
+                                  <a:latin typeface="Cambria Math" panose="02040503050406030204" pitchFamily="18" charset="0"/>
+                                </a:rPr>
+                                <m:t>𝑣</m:t>
+                              </m:r>
+                            </m:e>
+                          </m:d>
+                        </m:e>
+                        <m:sub>
+                          <m:r>
+                            <a:rPr lang="en-US" sz="1600" i="1">
+                              <a:latin typeface="Cambria Math" panose="02040503050406030204" pitchFamily="18" charset="0"/>
+                            </a:rPr>
+                            <m:t>∞</m:t>
+                          </m:r>
+                        </m:sub>
+                      </m:sSub>
+                      <m:r>
+                        <a:rPr lang="en-US" sz="1600" i="1">
+                          <a:latin typeface="Cambria Math" panose="02040503050406030204" pitchFamily="18" charset="0"/>
+                        </a:rPr>
+                        <m:t>≤ </m:t>
+                      </m:r>
+                      <m:sSub>
+                        <m:sSubPr>
+                          <m:ctrlPr>
+                            <a:rPr lang="en-US" sz="1600" i="1">
+                              <a:latin typeface="Cambria Math" panose="02040503050406030204" pitchFamily="18" charset="0"/>
+                            </a:rPr>
+                          </m:ctrlPr>
+                        </m:sSubPr>
+                        <m:e>
+                          <m:r>
+                            <a:rPr lang="en-US" sz="1600" i="1">
+                              <a:latin typeface="Cambria Math" panose="02040503050406030204" pitchFamily="18" charset="0"/>
+                            </a:rPr>
+                            <m:t>𝛾</m:t>
+                          </m:r>
+                          <m:d>
+                            <m:dPr>
+                              <m:begChr m:val="‖"/>
+                              <m:endChr m:val="‖"/>
+                              <m:ctrlPr>
+                                <a:rPr lang="en-US" sz="1600" b="0" i="1" smtClean="0">
+                                  <a:latin typeface="Cambria Math" panose="02040503050406030204" pitchFamily="18" charset="0"/>
+                                </a:rPr>
+                              </m:ctrlPr>
+                            </m:dPr>
+                            <m:e>
+                              <m:r>
+                                <a:rPr lang="en-US" sz="1600" b="0" i="1" smtClean="0">
+                                  <a:latin typeface="Cambria Math" panose="02040503050406030204" pitchFamily="18" charset="0"/>
+                                </a:rPr>
+                                <m:t>𝑢</m:t>
+                              </m:r>
+                              <m:r>
+                                <a:rPr lang="en-US" sz="1600" i="1">
+                                  <a:latin typeface="Cambria Math" panose="02040503050406030204" pitchFamily="18" charset="0"/>
+                                </a:rPr>
+                                <m:t>−</m:t>
+                              </m:r>
+                              <m:r>
+                                <a:rPr lang="en-US" sz="1600" i="1">
+                                  <a:latin typeface="Cambria Math" panose="02040503050406030204" pitchFamily="18" charset="0"/>
+                                </a:rPr>
+                                <m:t>𝑣</m:t>
+                              </m:r>
+                            </m:e>
+                          </m:d>
+                        </m:e>
+                        <m:sub>
+                          <m:r>
+                            <a:rPr lang="en-US" sz="1600" i="1">
+                              <a:latin typeface="Cambria Math" panose="02040503050406030204" pitchFamily="18" charset="0"/>
+                            </a:rPr>
+                            <m:t>∞</m:t>
+                          </m:r>
+                        </m:sub>
+                      </m:sSub>
+                      <m:r>
+                        <a:rPr lang="en-US" sz="1600" i="1">
+                          <a:latin typeface="Cambria Math" panose="02040503050406030204" pitchFamily="18" charset="0"/>
+                        </a:rPr>
+                        <m:t>  </m:t>
+                      </m:r>
+                      <m:r>
+                        <m:rPr>
+                          <m:nor/>
+                        </m:rPr>
+                        <a:rPr lang="en-US" sz="1600" i="0">
+                          <a:latin typeface="Cambria Math" panose="02040503050406030204" pitchFamily="18" charset="0"/>
+                        </a:rPr>
+                        <m:t> for any   </m:t>
+                      </m:r>
+                      <m:r>
+                        <a:rPr lang="en-US" sz="1600" i="1">
+                          <a:latin typeface="Cambria Math" panose="02040503050406030204" pitchFamily="18" charset="0"/>
+                        </a:rPr>
+                        <m:t>𝛾</m:t>
+                      </m:r>
+                      <m:r>
+                        <a:rPr lang="en-US" sz="1600" i="1">
+                          <a:latin typeface="Cambria Math" panose="02040503050406030204" pitchFamily="18" charset="0"/>
+                        </a:rPr>
+                        <m:t>&lt;1</m:t>
+                      </m:r>
+                    </m:oMath>
+                  </m:oMathPara>
+                </a14:m>
+                <a:br>
+                  <a:rPr lang="en-US" sz="1600" dirty="0"/>
+                </a:br>
+                <a:br>
+                  <a:rPr lang="en-US" sz="1600" dirty="0"/>
+                </a:br>
+                <a:r>
+                  <a:rPr lang="en-US" sz="1600" dirty="0"/>
+                  <a:t>I.e. : Applying </a:t>
+                </a:r>
+                <a14:m>
+                  <m:oMath xmlns:m="http://schemas.openxmlformats.org/officeDocument/2006/math">
+                    <m:sSup>
+                      <m:sSupPr>
+                        <m:ctrlPr>
+                          <a:rPr lang="en-US" sz="1600" i="1">
+                            <a:latin typeface="Cambria Math" panose="02040503050406030204" pitchFamily="18" charset="0"/>
+                          </a:rPr>
+                        </m:ctrlPr>
+                      </m:sSupPr>
+                      <m:e>
+                        <m:r>
+                          <a:rPr lang="en-US" sz="1600" i="1">
+                            <a:latin typeface="Cambria Math" panose="02040503050406030204" pitchFamily="18" charset="0"/>
+                          </a:rPr>
+                          <m:t>𝑇</m:t>
+                        </m:r>
+                      </m:e>
+                      <m:sup>
+                        <m:r>
+                          <a:rPr lang="en-US" sz="1600" i="1">
+                            <a:latin typeface="Cambria Math" panose="02040503050406030204" pitchFamily="18" charset="0"/>
+                          </a:rPr>
+                          <m:t>𝜋</m:t>
+                        </m:r>
+                      </m:sup>
+                    </m:sSup>
+                    <m:r>
+                      <a:rPr lang="en-US" sz="1600" i="1">
+                        <a:latin typeface="Cambria Math" panose="02040503050406030204" pitchFamily="18" charset="0"/>
+                      </a:rPr>
+                      <m:t> </m:t>
+                    </m:r>
+                  </m:oMath>
+                </a14:m>
+                <a:r>
+                  <a:rPr lang="en-US" sz="1600" dirty="0"/>
+                  <a:t>reduces the largest difference (infinity norm) between any arbitrary value functions </a:t>
+                </a:r>
+                <a14:m>
+                  <m:oMath xmlns:m="http://schemas.openxmlformats.org/officeDocument/2006/math">
+                    <m:r>
+                      <a:rPr lang="en-US" sz="1600" b="0" i="1" smtClean="0">
+                        <a:latin typeface="Cambria Math" panose="02040503050406030204" pitchFamily="18" charset="0"/>
+                      </a:rPr>
+                      <m:t>𝑢</m:t>
+                    </m:r>
+                  </m:oMath>
+                </a14:m>
+                <a:r>
+                  <a:rPr lang="en-US" sz="1600" dirty="0"/>
+                  <a:t> and </a:t>
+                </a:r>
+                <a14:m>
+                  <m:oMath xmlns:m="http://schemas.openxmlformats.org/officeDocument/2006/math">
+                    <m:r>
+                      <a:rPr lang="en-US" sz="1600" b="0" i="1" smtClean="0">
+                        <a:latin typeface="Cambria Math" panose="02040503050406030204" pitchFamily="18" charset="0"/>
+                      </a:rPr>
+                      <m:t>𝑣</m:t>
+                    </m:r>
+                  </m:oMath>
+                </a14:m>
+                <a:r>
+                  <a:rPr lang="en-US" sz="1600" dirty="0"/>
+                  <a:t> by at least a factor of </a:t>
+                </a:r>
+                <a14:m>
+                  <m:oMath xmlns:m="http://schemas.openxmlformats.org/officeDocument/2006/math">
+                    <m:r>
+                      <a:rPr lang="en-US" sz="1600" i="1">
+                        <a:latin typeface="Cambria Math" panose="02040503050406030204" pitchFamily="18" charset="0"/>
+                      </a:rPr>
+                      <m:t>𝛾</m:t>
+                    </m:r>
+                  </m:oMath>
+                </a14:m>
+                <a:endParaRPr lang="en-US" sz="1100" dirty="0"/>
+              </a:p>
+            </p:txBody>
+          </p:sp>
+        </mc:Choice>
+        <mc:Fallback>
+          <p:sp>
+            <p:nvSpPr>
+              <p:cNvPr id="24" name="TextBox 23">
+                <a:extLst>
+                  <a:ext uri="{FF2B5EF4-FFF2-40B4-BE49-F238E27FC236}">
+                    <a16:creationId xmlns:a16="http://schemas.microsoft.com/office/drawing/2014/main" id="{02B42EB3-962C-0C37-D0ED-8ED842D2AB24}"/>
+                  </a:ext>
+                </a:extLst>
+              </p:cNvPr>
+              <p:cNvSpPr txBox="1">
+                <a:spLocks noRot="1" noChangeAspect="1" noMove="1" noResize="1" noEditPoints="1" noAdjustHandles="1" noChangeArrowheads="1" noChangeShapeType="1" noTextEdit="1"/>
+              </p:cNvSpPr>
+              <p:nvPr/>
+            </p:nvSpPr>
+            <p:spPr>
+              <a:xfrm>
+                <a:off x="925409" y="3577974"/>
+                <a:ext cx="8001000" cy="1815882"/>
+              </a:xfrm>
+              <a:prstGeom prst="rect">
+                <a:avLst/>
+              </a:prstGeom>
+              <a:blipFill>
+                <a:blip r:embed="rId14"/>
+                <a:stretch>
+                  <a:fillRect l="-380" t="-664" r="-380" b="-2658"/>
+                </a:stretch>
+              </a:blipFill>
+            </p:spPr>
+            <p:txBody>
+              <a:bodyPr/>
+              <a:lstStyle/>
+              <a:p>
+                <a:r>
+                  <a:rPr lang="en-US">
+                    <a:noFill/>
+                  </a:rPr>
+                  <a:t> </a:t>
+                </a:r>
+              </a:p>
+            </p:txBody>
+          </p:sp>
+        </mc:Fallback>
+      </mc:AlternateContent>
+      <mc:AlternateContent xmlns:mc="http://schemas.openxmlformats.org/markup-compatibility/2006">
+        <mc:Choice xmlns:a14="http://schemas.microsoft.com/office/drawing/2010/main" Requires="a14">
+          <p:sp>
+            <p:nvSpPr>
+              <p:cNvPr id="29" name="TextBox 28">
+                <a:extLst>
+                  <a:ext uri="{FF2B5EF4-FFF2-40B4-BE49-F238E27FC236}">
+                    <a16:creationId xmlns:a16="http://schemas.microsoft.com/office/drawing/2014/main" id="{FB4229AA-5F10-BA27-AA11-C26936347957}"/>
+                  </a:ext>
+                </a:extLst>
+              </p:cNvPr>
+              <p:cNvSpPr txBox="1"/>
+              <p:nvPr/>
+            </p:nvSpPr>
+            <p:spPr>
+              <a:xfrm>
+                <a:off x="925409" y="5522714"/>
+                <a:ext cx="7600434" cy="338554"/>
+              </a:xfrm>
+              <a:prstGeom prst="rect">
+                <a:avLst/>
+              </a:prstGeom>
+              <a:noFill/>
+            </p:spPr>
+            <p:txBody>
+              <a:bodyPr wrap="square">
+                <a:spAutoFit/>
+              </a:bodyPr>
+              <a:lstStyle/>
+              <a:p>
+                <a:r>
+                  <a:rPr lang="en-US" sz="1600" dirty="0"/>
+                  <a:t>This implies:         </a:t>
+                </a:r>
+                <a14:m>
+                  <m:oMath xmlns:m="http://schemas.openxmlformats.org/officeDocument/2006/math">
+                    <m:sSub>
+                      <m:sSubPr>
+                        <m:ctrlPr>
+                          <a:rPr lang="en-US" sz="1600" i="1">
+                            <a:latin typeface="Cambria Math" panose="02040503050406030204" pitchFamily="18" charset="0"/>
+                          </a:rPr>
+                        </m:ctrlPr>
+                      </m:sSubPr>
+                      <m:e>
+                        <m:d>
+                          <m:dPr>
+                            <m:begChr m:val="‖"/>
+                            <m:endChr m:val="‖"/>
+                            <m:ctrlPr>
+                              <a:rPr lang="en-US" sz="1600" i="1">
+                                <a:latin typeface="Cambria Math" panose="02040503050406030204" pitchFamily="18" charset="0"/>
+                              </a:rPr>
+                            </m:ctrlPr>
+                          </m:dPr>
+                          <m:e>
+                            <m:sSub>
+                              <m:sSubPr>
+                                <m:ctrlPr>
+                                  <a:rPr lang="en-US" sz="1600" i="1">
+                                    <a:latin typeface="Cambria Math" panose="02040503050406030204" pitchFamily="18" charset="0"/>
+                                  </a:rPr>
+                                </m:ctrlPr>
+                              </m:sSubPr>
+                              <m:e>
+                                <m:r>
+                                  <a:rPr lang="en-US" sz="1600" i="1">
+                                    <a:latin typeface="Cambria Math" panose="02040503050406030204" pitchFamily="18" charset="0"/>
+                                  </a:rPr>
+                                  <m:t>𝑣</m:t>
+                                </m:r>
+                              </m:e>
+                              <m:sub>
+                                <m:r>
+                                  <a:rPr lang="en-US" sz="1600" i="1">
+                                    <a:latin typeface="Cambria Math" panose="02040503050406030204" pitchFamily="18" charset="0"/>
+                                  </a:rPr>
+                                  <m:t>𝜋</m:t>
+                                </m:r>
+                              </m:sub>
+                            </m:sSub>
+                            <m:r>
+                              <a:rPr lang="en-US" sz="1600" i="1">
+                                <a:latin typeface="Cambria Math" panose="02040503050406030204" pitchFamily="18" charset="0"/>
+                              </a:rPr>
+                              <m:t>−</m:t>
+                            </m:r>
+                            <m:sSup>
+                              <m:sSupPr>
+                                <m:ctrlPr>
+                                  <a:rPr lang="en-US" sz="1600" i="1">
+                                    <a:latin typeface="Cambria Math" panose="02040503050406030204" pitchFamily="18" charset="0"/>
+                                  </a:rPr>
+                                </m:ctrlPr>
+                              </m:sSupPr>
+                              <m:e>
+                                <m:r>
+                                  <a:rPr lang="en-US" sz="1600" i="1">
+                                    <a:latin typeface="Cambria Math" panose="02040503050406030204" pitchFamily="18" charset="0"/>
+                                  </a:rPr>
+                                  <m:t>𝑇</m:t>
+                                </m:r>
+                              </m:e>
+                              <m:sup>
+                                <m:r>
+                                  <a:rPr lang="en-US" sz="1600" i="1">
+                                    <a:latin typeface="Cambria Math" panose="02040503050406030204" pitchFamily="18" charset="0"/>
+                                  </a:rPr>
+                                  <m:t>𝜋</m:t>
+                                </m:r>
+                              </m:sup>
+                            </m:sSup>
+                            <m:r>
+                              <a:rPr lang="en-US" sz="1600" i="1">
+                                <a:latin typeface="Cambria Math" panose="02040503050406030204" pitchFamily="18" charset="0"/>
+                              </a:rPr>
+                              <m:t>𝑣</m:t>
+                            </m:r>
+                          </m:e>
+                        </m:d>
+                      </m:e>
+                      <m:sub>
+                        <m:r>
+                          <a:rPr lang="en-US" sz="1600" i="1">
+                            <a:latin typeface="Cambria Math" panose="02040503050406030204" pitchFamily="18" charset="0"/>
+                          </a:rPr>
+                          <m:t>∞</m:t>
+                        </m:r>
+                      </m:sub>
+                    </m:sSub>
+                    <m:r>
+                      <a:rPr lang="en-US" sz="1600" i="1">
+                        <a:latin typeface="Cambria Math" panose="02040503050406030204" pitchFamily="18" charset="0"/>
+                      </a:rPr>
+                      <m:t>≤ </m:t>
+                    </m:r>
+                    <m:sSub>
+                      <m:sSubPr>
+                        <m:ctrlPr>
+                          <a:rPr lang="en-US" sz="1600" i="1">
+                            <a:latin typeface="Cambria Math" panose="02040503050406030204" pitchFamily="18" charset="0"/>
+                          </a:rPr>
+                        </m:ctrlPr>
+                      </m:sSubPr>
+                      <m:e>
+                        <m:r>
+                          <a:rPr lang="en-US" sz="1600" i="1">
+                            <a:latin typeface="Cambria Math" panose="02040503050406030204" pitchFamily="18" charset="0"/>
+                          </a:rPr>
+                          <m:t>𝛾</m:t>
+                        </m:r>
+                        <m:d>
+                          <m:dPr>
+                            <m:begChr m:val="‖"/>
+                            <m:endChr m:val="‖"/>
+                            <m:ctrlPr>
+                              <a:rPr lang="en-US" sz="1600" i="1">
+                                <a:latin typeface="Cambria Math" panose="02040503050406030204" pitchFamily="18" charset="0"/>
+                              </a:rPr>
+                            </m:ctrlPr>
+                          </m:dPr>
+                          <m:e>
+                            <m:sSub>
+                              <m:sSubPr>
+                                <m:ctrlPr>
+                                  <a:rPr lang="en-US" sz="1600" i="1">
+                                    <a:latin typeface="Cambria Math" panose="02040503050406030204" pitchFamily="18" charset="0"/>
+                                  </a:rPr>
+                                </m:ctrlPr>
+                              </m:sSubPr>
+                              <m:e>
+                                <m:r>
+                                  <a:rPr lang="en-US" sz="1600" i="1">
+                                    <a:latin typeface="Cambria Math" panose="02040503050406030204" pitchFamily="18" charset="0"/>
+                                  </a:rPr>
+                                  <m:t>𝑣</m:t>
+                                </m:r>
+                              </m:e>
+                              <m:sub>
+                                <m:r>
+                                  <a:rPr lang="en-US" sz="1600" i="1">
+                                    <a:latin typeface="Cambria Math" panose="02040503050406030204" pitchFamily="18" charset="0"/>
+                                  </a:rPr>
+                                  <m:t>𝜋</m:t>
+                                </m:r>
+                              </m:sub>
+                            </m:sSub>
+                            <m:r>
+                              <a:rPr lang="en-US" sz="1600" i="1">
+                                <a:latin typeface="Cambria Math" panose="02040503050406030204" pitchFamily="18" charset="0"/>
+                              </a:rPr>
+                              <m:t>−</m:t>
+                            </m:r>
+                            <m:r>
+                              <a:rPr lang="en-US" sz="1600" i="1">
+                                <a:latin typeface="Cambria Math" panose="02040503050406030204" pitchFamily="18" charset="0"/>
+                              </a:rPr>
+                              <m:t>𝑣</m:t>
+                            </m:r>
+                          </m:e>
+                        </m:d>
+                      </m:e>
+                      <m:sub>
+                        <m:r>
+                          <a:rPr lang="en-US" sz="1600" i="1">
+                            <a:latin typeface="Cambria Math" panose="02040503050406030204" pitchFamily="18" charset="0"/>
+                          </a:rPr>
+                          <m:t>∞</m:t>
+                        </m:r>
+                      </m:sub>
+                    </m:sSub>
+                    <m:r>
+                      <a:rPr lang="en-US" sz="1600" i="1">
+                        <a:latin typeface="Cambria Math" panose="02040503050406030204" pitchFamily="18" charset="0"/>
+                      </a:rPr>
+                      <m:t>  </m:t>
+                    </m:r>
+                    <m:r>
+                      <m:rPr>
+                        <m:nor/>
+                      </m:rPr>
+                      <a:rPr lang="en-US" sz="1600" i="0">
+                        <a:latin typeface="Cambria Math" panose="02040503050406030204" pitchFamily="18" charset="0"/>
+                      </a:rPr>
+                      <m:t> for any   </m:t>
+                    </m:r>
+                    <m:r>
+                      <a:rPr lang="en-US" sz="1600" i="1">
+                        <a:latin typeface="Cambria Math" panose="02040503050406030204" pitchFamily="18" charset="0"/>
+                      </a:rPr>
+                      <m:t>𝛾</m:t>
+                    </m:r>
+                    <m:r>
+                      <a:rPr lang="en-US" sz="1600" i="1">
+                        <a:latin typeface="Cambria Math" panose="02040503050406030204" pitchFamily="18" charset="0"/>
+                      </a:rPr>
+                      <m:t>&lt;1</m:t>
+                    </m:r>
+                  </m:oMath>
+                </a14:m>
+                <a:endParaRPr lang="en-US" sz="1600" dirty="0"/>
+              </a:p>
+            </p:txBody>
+          </p:sp>
+        </mc:Choice>
+        <mc:Fallback>
+          <p:sp>
+            <p:nvSpPr>
+              <p:cNvPr id="29" name="TextBox 28">
+                <a:extLst>
+                  <a:ext uri="{FF2B5EF4-FFF2-40B4-BE49-F238E27FC236}">
+                    <a16:creationId xmlns:a16="http://schemas.microsoft.com/office/drawing/2014/main" id="{FB4229AA-5F10-BA27-AA11-C26936347957}"/>
+                  </a:ext>
+                </a:extLst>
+              </p:cNvPr>
+              <p:cNvSpPr txBox="1">
+                <a:spLocks noRot="1" noChangeAspect="1" noMove="1" noResize="1" noEditPoints="1" noAdjustHandles="1" noChangeArrowheads="1" noChangeShapeType="1" noTextEdit="1"/>
+              </p:cNvSpPr>
+              <p:nvPr/>
+            </p:nvSpPr>
+            <p:spPr>
+              <a:xfrm>
+                <a:off x="925409" y="5522714"/>
+                <a:ext cx="7600434" cy="338554"/>
+              </a:xfrm>
+              <a:prstGeom prst="rect">
+                <a:avLst/>
+              </a:prstGeom>
+              <a:blipFill>
+                <a:blip r:embed="rId15"/>
+                <a:stretch>
+                  <a:fillRect l="-481" t="-5455" b="-23636"/>
+                </a:stretch>
+              </a:blipFill>
+            </p:spPr>
+            <p:txBody>
+              <a:bodyPr/>
+              <a:lstStyle/>
+              <a:p>
+                <a:r>
+                  <a:rPr lang="en-US">
+                    <a:noFill/>
+                  </a:rPr>
+                  <a:t> </a:t>
+                </a:r>
+              </a:p>
+            </p:txBody>
+          </p:sp>
+        </mc:Fallback>
+      </mc:AlternateContent>
     </p:spTree>
     <p:extLst>
       <p:ext uri="{BB962C8B-B14F-4D97-AF65-F5344CB8AC3E}">
@@ -12004,7 +12277,7 @@
                             </p:stCondLst>
                             <p:childTnLst>
                               <p:par>
-                                <p:cTn id="5" presetID="1" presetClass="entr" presetSubtype="0" fill="hold" nodeType="clickEffect">
+                                <p:cTn id="5" presetID="1" presetClass="entr" presetSubtype="0" fill="hold" grpId="0" nodeType="clickEffect">
                                   <p:stCondLst>
                                     <p:cond delay="0"/>
                                   </p:stCondLst>
@@ -12017,42 +12290,7 @@
                                           </p:stCondLst>
                                         </p:cTn>
                                         <p:tgtEl>
-                                          <p:spTgt spid="3">
-                                            <p:txEl>
-                                              <p:pRg st="4" end="4"/>
-                                            </p:txEl>
-                                          </p:spTgt>
-                                        </p:tgtEl>
-                                        <p:attrNameLst>
-                                          <p:attrName>style.visibility</p:attrName>
-                                        </p:attrNameLst>
-                                      </p:cBhvr>
-                                      <p:to>
-                                        <p:strVal val="visible"/>
-                                      </p:to>
-                                    </p:set>
-                                  </p:childTnLst>
-                                </p:cTn>
-                              </p:par>
-                              <p:par>
-                                <p:cTn id="7" presetID="1" presetClass="entr" presetSubtype="0" fill="hold" nodeType="withEffect">
-                                  <p:stCondLst>
-                                    <p:cond delay="0"/>
-                                  </p:stCondLst>
-                                  <p:childTnLst>
-                                    <p:set>
-                                      <p:cBhvr>
-                                        <p:cTn id="8" dur="1" fill="hold">
-                                          <p:stCondLst>
-                                            <p:cond delay="0"/>
-                                          </p:stCondLst>
-                                        </p:cTn>
-                                        <p:tgtEl>
-                                          <p:spTgt spid="3">
-                                            <p:txEl>
-                                              <p:pRg st="5" end="5"/>
-                                            </p:txEl>
-                                          </p:spTgt>
+                                          <p:spTgt spid="7"/>
                                         </p:tgtEl>
                                         <p:attrNameLst>
                                           <p:attrName>style.visibility</p:attrName>
@@ -12072,36 +12310,32 @@
                     </p:cTn>
                   </p:par>
                   <p:par>
-                    <p:cTn id="9" fill="hold">
+                    <p:cTn id="7" fill="hold">
                       <p:stCondLst>
                         <p:cond delay="indefinite"/>
                       </p:stCondLst>
                       <p:childTnLst>
                         <p:par>
-                          <p:cTn id="10" fill="hold">
+                          <p:cTn id="8" fill="hold">
                             <p:stCondLst>
                               <p:cond delay="0"/>
                             </p:stCondLst>
                             <p:childTnLst>
                               <p:par>
-                                <p:cTn id="11" presetID="1" presetClass="entr" presetSubtype="0" fill="hold" nodeType="clickEffect">
+                                <p:cTn id="9" presetID="1" presetClass="entr" presetSubtype="0" fill="hold" grpId="0" nodeType="clickEffect">
                                   <p:stCondLst>
                                     <p:cond delay="0"/>
                                   </p:stCondLst>
                                   <p:childTnLst>
                                     <p:set>
                                       <p:cBhvr>
-                                        <p:cTn id="12" dur="1" fill="hold">
+                                        <p:cTn id="10" dur="1" fill="hold">
                                           <p:stCondLst>
                                             <p:cond delay="0"/>
                                           </p:stCondLst>
                                         </p:cTn>
                                         <p:tgtEl>
-                                          <p:spTgt spid="3">
-                                            <p:txEl>
-                                              <p:pRg st="7" end="7"/>
-                                            </p:txEl>
-                                          </p:spTgt>
+                                          <p:spTgt spid="24"/>
                                         </p:tgtEl>
                                         <p:attrNameLst>
                                           <p:attrName>style.visibility</p:attrName>
@@ -12121,36 +12355,32 @@
                     </p:cTn>
                   </p:par>
                   <p:par>
-                    <p:cTn id="13" fill="hold">
+                    <p:cTn id="11" fill="hold">
                       <p:stCondLst>
                         <p:cond delay="indefinite"/>
                       </p:stCondLst>
                       <p:childTnLst>
                         <p:par>
-                          <p:cTn id="14" fill="hold">
+                          <p:cTn id="12" fill="hold">
                             <p:stCondLst>
                               <p:cond delay="0"/>
                             </p:stCondLst>
                             <p:childTnLst>
                               <p:par>
-                                <p:cTn id="15" presetID="1" presetClass="entr" presetSubtype="0" fill="hold" nodeType="clickEffect">
+                                <p:cTn id="13" presetID="1" presetClass="entr" presetSubtype="0" fill="hold" grpId="0" nodeType="clickEffect">
                                   <p:stCondLst>
                                     <p:cond delay="0"/>
                                   </p:stCondLst>
                                   <p:childTnLst>
                                     <p:set>
                                       <p:cBhvr>
-                                        <p:cTn id="16" dur="1" fill="hold">
+                                        <p:cTn id="14" dur="1" fill="hold">
                                           <p:stCondLst>
                                             <p:cond delay="0"/>
                                           </p:stCondLst>
                                         </p:cTn>
                                         <p:tgtEl>
-                                          <p:spTgt spid="3">
-                                            <p:txEl>
-                                              <p:pRg st="8" end="8"/>
-                                            </p:txEl>
-                                          </p:spTgt>
+                                          <p:spTgt spid="29"/>
                                         </p:tgtEl>
                                         <p:attrNameLst>
                                           <p:attrName>style.visibility</p:attrName>
@@ -12170,19 +12400,46 @@
                     </p:cTn>
                   </p:par>
                   <p:par>
-                    <p:cTn id="17" fill="hold">
+                    <p:cTn id="15" fill="hold">
                       <p:stCondLst>
                         <p:cond delay="indefinite"/>
                       </p:stCondLst>
                       <p:childTnLst>
                         <p:par>
-                          <p:cTn id="18" fill="hold">
+                          <p:cTn id="16" fill="hold">
                             <p:stCondLst>
                               <p:cond delay="0"/>
                             </p:stCondLst>
                             <p:childTnLst>
                               <p:par>
-                                <p:cTn id="19" presetID="1" presetClass="entr" presetSubtype="0" fill="hold" grpId="0" nodeType="clickEffect">
+                                <p:cTn id="17" presetID="1" presetClass="entr" presetSubtype="0" fill="hold" grpId="0" nodeType="clickEffect">
+                                  <p:stCondLst>
+                                    <p:cond delay="0"/>
+                                  </p:stCondLst>
+                                  <p:childTnLst>
+                                    <p:set>
+                                      <p:cBhvr>
+                                        <p:cTn id="18" dur="1" fill="hold">
+                                          <p:stCondLst>
+                                            <p:cond delay="0"/>
+                                          </p:stCondLst>
+                                        </p:cTn>
+                                        <p:tgtEl>
+                                          <p:spTgt spid="5"/>
+                                        </p:tgtEl>
+                                        <p:attrNameLst>
+                                          <p:attrName>style.visibility</p:attrName>
+                                        </p:attrNameLst>
+                                      </p:cBhvr>
+                                      <p:to>
+                                        <p:strVal val="visible"/>
+                                      </p:to>
+                                    </p:set>
+                                  </p:childTnLst>
+                                </p:cTn>
+                              </p:par>
+                              <p:par>
+                                <p:cTn id="19" presetID="1" presetClass="entr" presetSubtype="0" fill="hold" nodeType="withEffect">
                                   <p:stCondLst>
                                     <p:cond delay="0"/>
                                   </p:stCondLst>
@@ -12195,7 +12452,7 @@
                                           </p:stCondLst>
                                         </p:cTn>
                                         <p:tgtEl>
-                                          <p:spTgt spid="5"/>
+                                          <p:spTgt spid="28"/>
                                         </p:tgtEl>
                                         <p:attrNameLst>
                                           <p:attrName>style.visibility</p:attrName>
@@ -12237,6 +12494,9 @@
     </p:tnLst>
     <p:bldLst>
       <p:bldP spid="5" grpId="0" animBg="1"/>
+      <p:bldP spid="7" grpId="0" animBg="1"/>
+      <p:bldP spid="24" grpId="0" animBg="1"/>
+      <p:bldP spid="29" grpId="0"/>
     </p:bldLst>
   </p:timing>
 </p:sld>
@@ -13383,6 +13643,222 @@
   <p:cSld>
     <p:spTree>
       <p:nvGrpSpPr>
+        <p:cNvPr id="1" name=""/>
+        <p:cNvGrpSpPr/>
+        <p:nvPr/>
+      </p:nvGrpSpPr>
+      <p:grpSpPr>
+        <a:xfrm>
+          <a:off x="0" y="0"/>
+          <a:ext cx="0" cy="0"/>
+          <a:chOff x="0" y="0"/>
+          <a:chExt cx="0" cy="0"/>
+        </a:xfrm>
+      </p:grpSpPr>
+      <p:sp>
+        <p:nvSpPr>
+          <p:cNvPr id="2" name="Title 1">
+            <a:extLst>
+              <a:ext uri="{FF2B5EF4-FFF2-40B4-BE49-F238E27FC236}">
+                <a16:creationId xmlns:a16="http://schemas.microsoft.com/office/drawing/2014/main" id="{63AB4F15-1BAA-E34A-C756-20976A500CB1}"/>
+              </a:ext>
+            </a:extLst>
+          </p:cNvPr>
+          <p:cNvSpPr>
+            <a:spLocks noGrp="1"/>
+          </p:cNvSpPr>
+          <p:nvPr>
+            <p:ph type="title"/>
+          </p:nvPr>
+        </p:nvSpPr>
+        <p:spPr/>
+        <p:txBody>
+          <a:bodyPr/>
+          <a:lstStyle/>
+          <a:p>
+            <a:r>
+              <a:rPr lang="en-US" dirty="0"/>
+              <a:t>More on Convergence</a:t>
+            </a:r>
+          </a:p>
+        </p:txBody>
+      </p:sp>
+      <mc:AlternateContent xmlns:mc="http://schemas.openxmlformats.org/markup-compatibility/2006">
+        <mc:Choice xmlns:a14="http://schemas.microsoft.com/office/drawing/2010/main" Requires="a14">
+          <p:sp>
+            <p:nvSpPr>
+              <p:cNvPr id="3" name="Content Placeholder 2">
+                <a:extLst>
+                  <a:ext uri="{FF2B5EF4-FFF2-40B4-BE49-F238E27FC236}">
+                    <a16:creationId xmlns:a16="http://schemas.microsoft.com/office/drawing/2014/main" id="{B19B88DF-BBBD-581D-8BC9-011B1D14AED2}"/>
+                  </a:ext>
+                </a:extLst>
+              </p:cNvPr>
+              <p:cNvSpPr>
+                <a:spLocks noGrp="1"/>
+              </p:cNvSpPr>
+              <p:nvPr>
+                <p:ph idx="1"/>
+              </p:nvPr>
+            </p:nvSpPr>
+            <p:spPr/>
+            <p:txBody>
+              <a:bodyPr>
+                <a:normAutofit/>
+              </a:bodyPr>
+              <a:lstStyle/>
+              <a:p>
+                <a:pPr marL="0" indent="0">
+                  <a:buNone/>
+                </a:pPr>
+                <a:r>
+                  <a:rPr lang="en-US" dirty="0"/>
+                  <a:t>Policy evaluation and all algorithms built on the idea always converge for:</a:t>
+                </a:r>
+              </a:p>
+              <a:p>
+                <a:pPr marL="0" indent="0">
+                  <a:buNone/>
+                </a:pPr>
+                <a:endParaRPr lang="en-US" dirty="0"/>
+              </a:p>
+              <a:p>
+                <a:pPr marL="514350" indent="-514350">
+                  <a:buFont typeface="+mj-lt"/>
+                  <a:buAutoNum type="arabicPeriod"/>
+                </a:pPr>
+                <a:r>
+                  <a:rPr lang="en-US" b="0" dirty="0"/>
+                  <a:t> </a:t>
+                </a:r>
+                <a14:m>
+                  <m:oMath xmlns:m="http://schemas.openxmlformats.org/officeDocument/2006/math">
+                    <m:r>
+                      <a:rPr lang="en-US" b="0" i="1" smtClean="0">
+                        <a:latin typeface="Cambria Math" panose="02040503050406030204" pitchFamily="18" charset="0"/>
+                      </a:rPr>
+                      <m:t>𝛾</m:t>
+                    </m:r>
+                    <m:r>
+                      <a:rPr lang="en-US" b="0" i="1" smtClean="0">
+                        <a:latin typeface="Cambria Math" panose="02040503050406030204" pitchFamily="18" charset="0"/>
+                      </a:rPr>
+                      <m:t>&lt;1</m:t>
+                    </m:r>
+                  </m:oMath>
+                </a14:m>
+                <a:r>
+                  <a:rPr lang="en-US" b="0" dirty="0"/>
+                  <a:t> </a:t>
+                </a:r>
+              </a:p>
+              <a:p>
+                <a:pPr marL="514350" indent="-514350">
+                  <a:buFont typeface="+mj-lt"/>
+                  <a:buAutoNum type="arabicPeriod"/>
+                </a:pPr>
+                <a:r>
+                  <a:rPr lang="en-US" dirty="0"/>
+                  <a:t> </a:t>
+                </a:r>
+                <a14:m>
+                  <m:oMath xmlns:m="http://schemas.openxmlformats.org/officeDocument/2006/math">
+                    <m:r>
+                      <a:rPr lang="en-US" b="0" i="1" smtClean="0">
+                        <a:latin typeface="Cambria Math" panose="02040503050406030204" pitchFamily="18" charset="0"/>
+                      </a:rPr>
+                      <m:t>𝛾</m:t>
+                    </m:r>
+                    <m:r>
+                      <a:rPr lang="en-US" b="0" i="1" smtClean="0">
+                        <a:latin typeface="Cambria Math" panose="02040503050406030204" pitchFamily="18" charset="0"/>
+                      </a:rPr>
+                      <m:t>=1</m:t>
+                    </m:r>
+                  </m:oMath>
+                </a14:m>
+                <a:r>
+                  <a:rPr lang="en-US" dirty="0"/>
+                  <a:t> and a terminating policy*</a:t>
+                </a:r>
+              </a:p>
+              <a:p>
+                <a:pPr marL="514350" indent="-514350">
+                  <a:buFont typeface="+mj-lt"/>
+                  <a:buAutoNum type="arabicPeriod"/>
+                </a:pPr>
+                <a:endParaRPr lang="en-US" dirty="0"/>
+              </a:p>
+              <a:p>
+                <a:pPr marL="0" indent="0">
+                  <a:buNone/>
+                </a:pPr>
+                <a:r>
+                  <a:rPr lang="en-US" sz="2400" dirty="0"/>
+                  <a:t>* The evaluated policy must always reach a terminating state to end the episode.</a:t>
+                </a:r>
+              </a:p>
+            </p:txBody>
+          </p:sp>
+        </mc:Choice>
+        <mc:Fallback>
+          <p:sp>
+            <p:nvSpPr>
+              <p:cNvPr id="3" name="Content Placeholder 2">
+                <a:extLst>
+                  <a:ext uri="{FF2B5EF4-FFF2-40B4-BE49-F238E27FC236}">
+                    <a16:creationId xmlns:a16="http://schemas.microsoft.com/office/drawing/2014/main" id="{B19B88DF-BBBD-581D-8BC9-011B1D14AED2}"/>
+                  </a:ext>
+                </a:extLst>
+              </p:cNvPr>
+              <p:cNvSpPr>
+                <a:spLocks noGrp="1" noRot="1" noChangeAspect="1" noMove="1" noResize="1" noEditPoints="1" noAdjustHandles="1" noChangeArrowheads="1" noChangeShapeType="1" noTextEdit="1"/>
+              </p:cNvSpPr>
+              <p:nvPr>
+                <p:ph idx="1"/>
+              </p:nvPr>
+            </p:nvSpPr>
+            <p:spPr>
+              <a:blipFill>
+                <a:blip r:embed="rId2"/>
+                <a:stretch>
+                  <a:fillRect l="-1217" t="-2168"/>
+                </a:stretch>
+              </a:blipFill>
+            </p:spPr>
+            <p:txBody>
+              <a:bodyPr/>
+              <a:lstStyle/>
+              <a:p>
+                <a:r>
+                  <a:rPr lang="en-US">
+                    <a:noFill/>
+                  </a:rPr>
+                  <a:t> </a:t>
+                </a:r>
+              </a:p>
+            </p:txBody>
+          </p:sp>
+        </mc:Fallback>
+      </mc:AlternateContent>
+    </p:spTree>
+    <p:extLst>
+      <p:ext uri="{BB962C8B-B14F-4D97-AF65-F5344CB8AC3E}">
+        <p14:creationId xmlns:p14="http://schemas.microsoft.com/office/powerpoint/2010/main" val="4156439938"/>
+      </p:ext>
+    </p:extLst>
+  </p:cSld>
+  <p:clrMapOvr>
+    <a:masterClrMapping/>
+  </p:clrMapOvr>
+</p:sld>
+</file>
+
+<file path=ppt/slides/slide14.xml><?xml version="1.0" encoding="utf-8"?>
+<p:sld xmlns:a="http://schemas.openxmlformats.org/drawingml/2006/main" xmlns:r="http://schemas.openxmlformats.org/officeDocument/2006/relationships" xmlns:p="http://schemas.openxmlformats.org/presentationml/2006/main">
+  <p:cSld>
+    <p:spTree>
+      <p:nvGrpSpPr>
         <p:cNvPr id="1" name="">
           <a:extLst>
             <a:ext uri="{FF2B5EF4-FFF2-40B4-BE49-F238E27FC236}">
@@ -13470,7 +13946,7 @@
 </p:sld>
 </file>
 
-<file path=ppt/slides/slide14.xml><?xml version="1.0" encoding="utf-8"?>
+<file path=ppt/slides/slide15.xml><?xml version="1.0" encoding="utf-8"?>
 <p:sld xmlns:a="http://schemas.openxmlformats.org/drawingml/2006/main" xmlns:r="http://schemas.openxmlformats.org/officeDocument/2006/relationships" xmlns:p="http://schemas.openxmlformats.org/presentationml/2006/main">
   <p:cSld>
     <p:spTree>
@@ -15645,7 +16121,7 @@
 </p:sld>
 </file>
 
-<file path=ppt/slides/slide15.xml><?xml version="1.0" encoding="utf-8"?>
+<file path=ppt/slides/slide16.xml><?xml version="1.0" encoding="utf-8"?>
 <p:sld xmlns:a="http://schemas.openxmlformats.org/drawingml/2006/main" xmlns:r="http://schemas.openxmlformats.org/officeDocument/2006/relationships" xmlns:p="http://schemas.openxmlformats.org/presentationml/2006/main">
   <p:cSld>
     <p:spTree>
@@ -17539,7 +18015,7 @@
             </a:lstStyle>
             <a:p>
               <a:pPr algn="ctr"/>
-              <a:endParaRPr lang="en-US"/>
+              <a:endParaRPr lang="en-US" dirty="0"/>
             </a:p>
           </p:txBody>
         </p:sp>
@@ -18536,7 +19012,7 @@
 </p:sld>
 </file>
 
-<file path=ppt/slides/slide16.xml><?xml version="1.0" encoding="utf-8"?>
+<file path=ppt/slides/slide17.xml><?xml version="1.0" encoding="utf-8"?>
 <p:sld xmlns:a="http://schemas.openxmlformats.org/drawingml/2006/main" xmlns:r="http://schemas.openxmlformats.org/officeDocument/2006/relationships" xmlns:p="http://schemas.openxmlformats.org/presentationml/2006/main">
   <p:cSld>
     <p:spTree>
@@ -18739,7 +19215,7 @@
 </p:sld>
 </file>
 
-<file path=ppt/slides/slide17.xml><?xml version="1.0" encoding="utf-8"?>
+<file path=ppt/slides/slide18.xml><?xml version="1.0" encoding="utf-8"?>
 <p:sld xmlns:a="http://schemas.openxmlformats.org/drawingml/2006/main" xmlns:r="http://schemas.openxmlformats.org/officeDocument/2006/relationships" xmlns:p="http://schemas.openxmlformats.org/presentationml/2006/main">
   <p:cSld>
     <p:spTree>
@@ -18825,7 +19301,7 @@
 </p:sld>
 </file>
 
-<file path=ppt/slides/slide18.xml><?xml version="1.0" encoding="utf-8"?>
+<file path=ppt/slides/slide19.xml><?xml version="1.0" encoding="utf-8"?>
 <p:sld xmlns:a="http://schemas.openxmlformats.org/drawingml/2006/main" xmlns:r="http://schemas.openxmlformats.org/officeDocument/2006/relationships" xmlns:p="http://schemas.openxmlformats.org/presentationml/2006/main">
   <p:cSld>
     <p:spTree>
@@ -20647,7 +21123,7 @@
               </a:lstStyle>
               <a:p>
                 <a:pPr algn="ctr"/>
-                <a:endParaRPr lang="en-US"/>
+                <a:endParaRPr lang="en-US" dirty="0"/>
               </a:p>
             </p:txBody>
           </p:sp>
@@ -20800,7 +21276,7 @@
               </a:lstStyle>
               <a:p>
                 <a:pPr algn="ctr"/>
-                <a:endParaRPr lang="en-US"/>
+                <a:endParaRPr lang="en-US" dirty="0"/>
               </a:p>
             </p:txBody>
           </p:sp>
@@ -20953,7 +21429,7 @@
               </a:lstStyle>
               <a:p>
                 <a:pPr algn="ctr"/>
-                <a:endParaRPr lang="en-US"/>
+                <a:endParaRPr lang="en-US" dirty="0"/>
               </a:p>
             </p:txBody>
           </p:sp>
@@ -21106,7 +21582,7 @@
               </a:lstStyle>
               <a:p>
                 <a:pPr algn="ctr"/>
-                <a:endParaRPr lang="en-US"/>
+                <a:endParaRPr lang="en-US" dirty="0"/>
               </a:p>
             </p:txBody>
           </p:sp>
@@ -21661,7 +22137,7 @@
               </a:lstStyle>
               <a:p>
                 <a:pPr algn="ctr"/>
-                <a:endParaRPr lang="en-US"/>
+                <a:endParaRPr lang="en-US" dirty="0"/>
               </a:p>
             </p:txBody>
           </p:sp>
@@ -21937,7 +22413,7 @@
             </a:lstStyle>
             <a:p>
               <a:pPr algn="ctr"/>
-              <a:endParaRPr lang="en-US"/>
+              <a:endParaRPr lang="en-US" dirty="0"/>
             </a:p>
           </p:txBody>
         </p:sp>
@@ -22176,856 +22652,6 @@
 </p:sld>
 </file>
 
-<file path=ppt/slides/slide19.xml><?xml version="1.0" encoding="utf-8"?>
-<p:sld xmlns:a="http://schemas.openxmlformats.org/drawingml/2006/main" xmlns:r="http://schemas.openxmlformats.org/officeDocument/2006/relationships" xmlns:p="http://schemas.openxmlformats.org/presentationml/2006/main">
-  <p:cSld>
-    <p:spTree>
-      <p:nvGrpSpPr>
-        <p:cNvPr id="1" name=""/>
-        <p:cNvGrpSpPr/>
-        <p:nvPr/>
-      </p:nvGrpSpPr>
-      <p:grpSpPr>
-        <a:xfrm>
-          <a:off x="0" y="0"/>
-          <a:ext cx="0" cy="0"/>
-          <a:chOff x="0" y="0"/>
-          <a:chExt cx="0" cy="0"/>
-        </a:xfrm>
-      </p:grpSpPr>
-      <p:sp>
-        <p:nvSpPr>
-          <p:cNvPr id="2" name="Title 1">
-            <a:extLst>
-              <a:ext uri="{FF2B5EF4-FFF2-40B4-BE49-F238E27FC236}">
-                <a16:creationId xmlns:a16="http://schemas.microsoft.com/office/drawing/2014/main" id="{1D7C93B2-B8AE-DF85-EA1B-8078C4975CE1}"/>
-              </a:ext>
-            </a:extLst>
-          </p:cNvPr>
-          <p:cNvSpPr>
-            <a:spLocks noGrp="1"/>
-          </p:cNvSpPr>
-          <p:nvPr>
-            <p:ph type="title"/>
-          </p:nvPr>
-        </p:nvSpPr>
-        <p:spPr/>
-        <p:txBody>
-          <a:bodyPr/>
-          <a:lstStyle/>
-          <a:p>
-            <a:r>
-              <a:rPr lang="en-US" dirty="0"/>
-              <a:t>Alg. Value Iteration</a:t>
-            </a:r>
-          </a:p>
-        </p:txBody>
-      </p:sp>
-      <p:pic>
-        <p:nvPicPr>
-          <p:cNvPr id="7" name="Content Placeholder 4" descr="Algorithm box: Policy Iteration (using iterative policy evaluation) for estimating pi approximately pi star. 1. Initialization: V(s) in R and pi(s) in A(s) arbitrarily for all s in S; V(terminal) = 0. 2. Policy Evaluation: Loop: Delta ← 0; Loop for each s in S: v ← V(s); V(s) ← sum over s′, r of p(s′, r | s, pi(s)) [r + gamma V(s′)]; Delta ← max(Delta, |v − V(s)|); until Delta &lt; theta (a small positive number determining the accuracy of estimation). 3. Policy Improvement: policy-stable ← true; For each s in S: old-action ← pi(s); pi(s) ← argmax over a of sum over s′, r of p(s′, r | s, a) [r + gamma V(s′)]; If old-action ≠ pi(s), then policy-stable ← false. If policy-stable, then stop and return V ≈ v star and pi ≈ pi star; else go to 2.">
-            <a:extLst>
-              <a:ext uri="{FF2B5EF4-FFF2-40B4-BE49-F238E27FC236}">
-                <a16:creationId xmlns:a16="http://schemas.microsoft.com/office/drawing/2014/main" id="{76B44262-ED50-A04F-C5AA-E6A746D04708}"/>
-              </a:ext>
-            </a:extLst>
-          </p:cNvPr>
-          <p:cNvPicPr>
-            <a:picLocks noChangeAspect="1"/>
-          </p:cNvPicPr>
-          <p:nvPr/>
-        </p:nvPicPr>
-        <p:blipFill>
-          <a:blip r:embed="rId2"/>
-          <a:stretch>
-            <a:fillRect/>
-          </a:stretch>
-        </p:blipFill>
-        <p:spPr>
-          <a:xfrm>
-            <a:off x="520239" y="1039018"/>
-            <a:ext cx="6849637" cy="4779963"/>
-          </a:xfrm>
-          <a:prstGeom prst="rect">
-            <a:avLst/>
-          </a:prstGeom>
-        </p:spPr>
-      </p:pic>
-      <p:pic>
-        <p:nvPicPr>
-          <p:cNvPr id="5" name="Content Placeholder 4" descr="Algorithm box: Value Iteration, for estimating pi approximately pi star. Algorithm parameter: a small threshold theta &gt; 0 determining accuracy of estimation. Initialize V(s), for all s in S plus, arbitrarily except that V(terminal) = 0. Loop: Delta ← 0; Loop for each s in S: v ← V(s); V(s) ← max over a of sum over s′, r of p(s′, r | s, a) [r + gamma V(s′)]; Delta ← max(Delta, |v − V(s)|); until Delta &lt; theta. Output a deterministic policy, pi ≈ pi star, such that pi(s) = argmax over a of sum over s′, r of p(s′, r | s, a) [r + gamma V(s′)].">
-            <a:extLst>
-              <a:ext uri="{FF2B5EF4-FFF2-40B4-BE49-F238E27FC236}">
-                <a16:creationId xmlns:a16="http://schemas.microsoft.com/office/drawing/2014/main" id="{EA7CD4F4-7550-2FF0-26AF-786588E65B53}"/>
-              </a:ext>
-            </a:extLst>
-          </p:cNvPr>
-          <p:cNvPicPr>
-            <a:picLocks noGrp="1" noChangeAspect="1"/>
-          </p:cNvPicPr>
-          <p:nvPr>
-            <p:ph idx="1"/>
-          </p:nvPr>
-        </p:nvPicPr>
-        <p:blipFill>
-          <a:blip r:embed="rId3"/>
-          <a:srcRect l="1659" t="2281"/>
-          <a:stretch>
-            <a:fillRect/>
-          </a:stretch>
-        </p:blipFill>
-        <p:spPr>
-          <a:xfrm>
-            <a:off x="4411456" y="3092208"/>
-            <a:ext cx="7034263" cy="3307667"/>
-          </a:xfrm>
-          <a:prstGeom prst="rect">
-            <a:avLst/>
-          </a:prstGeom>
-        </p:spPr>
-      </p:pic>
-      <mc:AlternateContent xmlns:mc="http://schemas.openxmlformats.org/markup-compatibility/2006">
-        <mc:Choice xmlns:a14="http://schemas.microsoft.com/office/drawing/2010/main" Requires="a14">
-          <p:sp>
-            <p:nvSpPr>
-              <p:cNvPr id="3" name="Speech Bubble: Rectangle with Corners Rounded 2">
-                <a:extLst>
-                  <a:ext uri="{FF2B5EF4-FFF2-40B4-BE49-F238E27FC236}">
-                    <a16:creationId xmlns:a16="http://schemas.microsoft.com/office/drawing/2014/main" id="{9540CE52-AAD7-F286-13F5-1B8D753FE1D7}"/>
-                  </a:ext>
-                  <a:ext uri="{C183D7F6-B498-43B3-948B-1728B52AA6E4}">
-                    <adec:decorative xmlns:adec="http://schemas.microsoft.com/office/drawing/2017/decorative" val="1"/>
-                  </a:ext>
-                </a:extLst>
-              </p:cNvPr>
-              <p:cNvSpPr/>
-              <p:nvPr/>
-            </p:nvSpPr>
-            <p:spPr>
-              <a:xfrm>
-                <a:off x="8103956" y="4239859"/>
-                <a:ext cx="2889785" cy="569466"/>
-              </a:xfrm>
-              <a:prstGeom prst="wedgeRoundRectCallout">
-                <a:avLst>
-                  <a:gd name="adj1" fmla="val -66744"/>
-                  <a:gd name="adj2" fmla="val 62281"/>
-                  <a:gd name="adj3" fmla="val 16667"/>
-                </a:avLst>
-              </a:prstGeom>
-            </p:spPr>
-            <p:style>
-              <a:lnRef idx="2">
-                <a:schemeClr val="accent1">
-                  <a:shade val="15000"/>
-                </a:schemeClr>
-              </a:lnRef>
-              <a:fillRef idx="1">
-                <a:schemeClr val="accent1"/>
-              </a:fillRef>
-              <a:effectRef idx="0">
-                <a:schemeClr val="accent1"/>
-              </a:effectRef>
-              <a:fontRef idx="minor">
-                <a:schemeClr val="lt1"/>
-              </a:fontRef>
-            </p:style>
-            <p:txBody>
-              <a:bodyPr rtlCol="0" anchor="ctr"/>
-              <a:lstStyle/>
-              <a:p>
-                <a:pPr algn="ctr"/>
-                <a:r>
-                  <a:rPr lang="en-US" sz="1600" b="0" dirty="0"/>
-                  <a:t>Bellman optimality operator:</a:t>
-                </a:r>
-                <a:br>
-                  <a:rPr lang="en-US" sz="1600" b="0" dirty="0"/>
-                </a:br>
-                <a:r>
-                  <a:rPr lang="en-US" sz="1600" b="0" dirty="0"/>
-                  <a:t> </a:t>
-                </a:r>
-                <a14:m>
-                  <m:oMath xmlns:m="http://schemas.openxmlformats.org/officeDocument/2006/math">
-                    <m:sSub>
-                      <m:sSubPr>
-                        <m:ctrlPr>
-                          <a:rPr lang="en-US" sz="1600" b="0" i="1" smtClean="0">
-                            <a:latin typeface="Cambria Math" panose="02040503050406030204" pitchFamily="18" charset="0"/>
-                          </a:rPr>
-                        </m:ctrlPr>
-                      </m:sSubPr>
-                      <m:e>
-                        <m:r>
-                          <a:rPr lang="en-US" sz="1600" b="0" i="1" smtClean="0">
-                            <a:latin typeface="Cambria Math" panose="02040503050406030204" pitchFamily="18" charset="0"/>
-                          </a:rPr>
-                          <m:t>𝑉</m:t>
-                        </m:r>
-                      </m:e>
-                      <m:sub>
-                        <m:r>
-                          <a:rPr lang="en-US" sz="1600" b="0" i="1" smtClean="0">
-                            <a:latin typeface="Cambria Math" panose="02040503050406030204" pitchFamily="18" charset="0"/>
-                          </a:rPr>
-                          <m:t>𝑘</m:t>
-                        </m:r>
-                        <m:r>
-                          <a:rPr lang="en-US" sz="1600" b="0" i="1" smtClean="0">
-                            <a:latin typeface="Cambria Math" panose="02040503050406030204" pitchFamily="18" charset="0"/>
-                          </a:rPr>
-                          <m:t>+1</m:t>
-                        </m:r>
-                      </m:sub>
-                    </m:sSub>
-                    <m:r>
-                      <a:rPr lang="en-US" sz="1600" b="0" i="1" smtClean="0">
-                        <a:latin typeface="Cambria Math" panose="02040503050406030204" pitchFamily="18" charset="0"/>
-                      </a:rPr>
-                      <m:t>=</m:t>
-                    </m:r>
-                    <m:sSup>
-                      <m:sSupPr>
-                        <m:ctrlPr>
-                          <a:rPr lang="en-US" sz="1600" b="0" i="1" smtClean="0">
-                            <a:latin typeface="Cambria Math" panose="02040503050406030204" pitchFamily="18" charset="0"/>
-                          </a:rPr>
-                        </m:ctrlPr>
-                      </m:sSupPr>
-                      <m:e>
-                        <m:r>
-                          <a:rPr lang="en-US" sz="1600" b="0" i="1" smtClean="0">
-                            <a:latin typeface="Cambria Math" panose="02040503050406030204" pitchFamily="18" charset="0"/>
-                          </a:rPr>
-                          <m:t>𝑇</m:t>
-                        </m:r>
-                      </m:e>
-                      <m:sup>
-                        <m:r>
-                          <a:rPr lang="en-US" sz="1600" b="0" i="1" smtClean="0">
-                            <a:latin typeface="Cambria Math" panose="02040503050406030204" pitchFamily="18" charset="0"/>
-                          </a:rPr>
-                          <m:t>∗</m:t>
-                        </m:r>
-                      </m:sup>
-                    </m:sSup>
-                    <m:sSub>
-                      <m:sSubPr>
-                        <m:ctrlPr>
-                          <a:rPr lang="en-US" sz="1600" b="0" i="1" smtClean="0">
-                            <a:latin typeface="Cambria Math" panose="02040503050406030204" pitchFamily="18" charset="0"/>
-                          </a:rPr>
-                        </m:ctrlPr>
-                      </m:sSubPr>
-                      <m:e>
-                        <m:r>
-                          <a:rPr lang="en-US" sz="1600" b="0" i="1" smtClean="0">
-                            <a:latin typeface="Cambria Math" panose="02040503050406030204" pitchFamily="18" charset="0"/>
-                          </a:rPr>
-                          <m:t>𝑉</m:t>
-                        </m:r>
-                      </m:e>
-                      <m:sub>
-                        <m:r>
-                          <a:rPr lang="en-US" sz="1600" b="0" i="1" smtClean="0">
-                            <a:latin typeface="Cambria Math" panose="02040503050406030204" pitchFamily="18" charset="0"/>
-                          </a:rPr>
-                          <m:t>𝑘</m:t>
-                        </m:r>
-                      </m:sub>
-                    </m:sSub>
-                  </m:oMath>
-                </a14:m>
-                <a:endParaRPr lang="en-US" sz="1600" dirty="0"/>
-              </a:p>
-            </p:txBody>
-          </p:sp>
-        </mc:Choice>
-        <mc:Fallback>
-          <p:sp>
-            <p:nvSpPr>
-              <p:cNvPr id="3" name="Speech Bubble: Rectangle with Corners Rounded 2">
-                <a:extLst>
-                  <a:ext uri="{FF2B5EF4-FFF2-40B4-BE49-F238E27FC236}">
-                    <a16:creationId xmlns:a16="http://schemas.microsoft.com/office/drawing/2014/main" id="{9540CE52-AAD7-F286-13F5-1B8D753FE1D7}"/>
-                  </a:ext>
-                  <a:ext uri="{C183D7F6-B498-43B3-948B-1728B52AA6E4}">
-                    <adec:decorative xmlns:adec="http://schemas.microsoft.com/office/drawing/2017/decorative" val="1"/>
-                  </a:ext>
-                </a:extLst>
-              </p:cNvPr>
-              <p:cNvSpPr>
-                <a:spLocks noRot="1" noChangeAspect="1" noMove="1" noResize="1" noEditPoints="1" noAdjustHandles="1" noChangeArrowheads="1" noChangeShapeType="1" noTextEdit="1"/>
-              </p:cNvSpPr>
-              <p:nvPr/>
-            </p:nvSpPr>
-            <p:spPr>
-              <a:xfrm>
-                <a:off x="8103956" y="4239859"/>
-                <a:ext cx="2889785" cy="569466"/>
-              </a:xfrm>
-              <a:prstGeom prst="wedgeRoundRectCallout">
-                <a:avLst>
-                  <a:gd name="adj1" fmla="val -66744"/>
-                  <a:gd name="adj2" fmla="val 62281"/>
-                  <a:gd name="adj3" fmla="val 16667"/>
-                </a:avLst>
-              </a:prstGeom>
-              <a:blipFill>
-                <a:blip r:embed="rId4"/>
-                <a:stretch>
-                  <a:fillRect t="-1818"/>
-                </a:stretch>
-              </a:blipFill>
-            </p:spPr>
-            <p:txBody>
-              <a:bodyPr/>
-              <a:lstStyle/>
-              <a:p>
-                <a:r>
-                  <a:rPr lang="en-US">
-                    <a:noFill/>
-                  </a:rPr>
-                  <a:t> </a:t>
-                </a:r>
-              </a:p>
-            </p:txBody>
-          </p:sp>
-        </mc:Fallback>
-      </mc:AlternateContent>
-      <p:sp>
-        <p:nvSpPr>
-          <p:cNvPr id="6" name="Speech Bubble: Rectangle with Corners Rounded 5">
-            <a:extLst>
-              <a:ext uri="{FF2B5EF4-FFF2-40B4-BE49-F238E27FC236}">
-                <a16:creationId xmlns:a16="http://schemas.microsoft.com/office/drawing/2014/main" id="{C94FA055-A74C-A901-CCD7-6A1A7CC80DA2}"/>
-              </a:ext>
-              <a:ext uri="{C183D7F6-B498-43B3-948B-1728B52AA6E4}">
-                <adec:decorative xmlns:adec="http://schemas.microsoft.com/office/drawing/2017/decorative" val="1"/>
-              </a:ext>
-            </a:extLst>
-          </p:cNvPr>
-          <p:cNvSpPr/>
-          <p:nvPr/>
-        </p:nvSpPr>
-        <p:spPr>
-          <a:xfrm>
-            <a:off x="8577442" y="6207869"/>
-            <a:ext cx="2667583" cy="384011"/>
-          </a:xfrm>
-          <a:prstGeom prst="wedgeRoundRectCallout">
-            <a:avLst>
-              <a:gd name="adj1" fmla="val -75681"/>
-              <a:gd name="adj2" fmla="val -48428"/>
-              <a:gd name="adj3" fmla="val 16667"/>
-            </a:avLst>
-          </a:prstGeom>
-        </p:spPr>
-        <p:style>
-          <a:lnRef idx="2">
-            <a:schemeClr val="accent1">
-              <a:shade val="15000"/>
-            </a:schemeClr>
-          </a:lnRef>
-          <a:fillRef idx="1">
-            <a:schemeClr val="accent1"/>
-          </a:fillRef>
-          <a:effectRef idx="0">
-            <a:schemeClr val="accent1"/>
-          </a:effectRef>
-          <a:fontRef idx="minor">
-            <a:schemeClr val="lt1"/>
-          </a:fontRef>
-        </p:style>
-        <p:txBody>
-          <a:bodyPr rtlCol="0" anchor="ctr"/>
-          <a:lstStyle/>
-          <a:p>
-            <a:pPr algn="ctr"/>
-            <a:r>
-              <a:rPr lang="en-US" sz="1600" b="0" dirty="0"/>
-              <a:t>Extract the greedy policy.</a:t>
-            </a:r>
-            <a:endParaRPr lang="en-US" sz="1600" dirty="0"/>
-          </a:p>
-        </p:txBody>
-      </p:sp>
-      <p:sp>
-        <p:nvSpPr>
-          <p:cNvPr id="8" name="Rectangle 7">
-            <a:extLst>
-              <a:ext uri="{FF2B5EF4-FFF2-40B4-BE49-F238E27FC236}">
-                <a16:creationId xmlns:a16="http://schemas.microsoft.com/office/drawing/2014/main" id="{AAC0C2CF-3D6C-5FB5-6FAF-5A3C70799FAF}"/>
-              </a:ext>
-              <a:ext uri="{C183D7F6-B498-43B3-948B-1728B52AA6E4}">
-                <adec:decorative xmlns:adec="http://schemas.microsoft.com/office/drawing/2017/decorative" val="1"/>
-              </a:ext>
-            </a:extLst>
-          </p:cNvPr>
-          <p:cNvSpPr/>
-          <p:nvPr/>
-        </p:nvSpPr>
-        <p:spPr>
-          <a:xfrm>
-            <a:off x="1563554" y="3231811"/>
-            <a:ext cx="2847902" cy="300146"/>
-          </a:xfrm>
-          <a:prstGeom prst="rect">
-            <a:avLst/>
-          </a:prstGeom>
-          <a:noFill/>
-          <a:ln w="9525" cap="flat" cmpd="sng" algn="ctr">
-            <a:solidFill>
-              <a:schemeClr val="accent2"/>
-            </a:solidFill>
-            <a:prstDash val="solid"/>
-            <a:round/>
-            <a:headEnd type="none" w="med" len="med"/>
-            <a:tailEnd type="none" w="med" len="med"/>
-          </a:ln>
-        </p:spPr>
-        <p:style>
-          <a:lnRef idx="0">
-            <a:scrgbClr r="0" g="0" b="0"/>
-          </a:lnRef>
-          <a:fillRef idx="0">
-            <a:scrgbClr r="0" g="0" b="0"/>
-          </a:fillRef>
-          <a:effectRef idx="0">
-            <a:scrgbClr r="0" g="0" b="0"/>
-          </a:effectRef>
-          <a:fontRef idx="minor">
-            <a:schemeClr val="accent2"/>
-          </a:fontRef>
-        </p:style>
-        <p:txBody>
-          <a:bodyPr rtlCol="0" anchor="ctr"/>
-          <a:lstStyle/>
-          <a:p>
-            <a:pPr algn="ctr"/>
-            <a:endParaRPr lang="en-US"/>
-          </a:p>
-        </p:txBody>
-      </p:sp>
-      <p:sp>
-        <p:nvSpPr>
-          <p:cNvPr id="10" name="TextBox 9">
-            <a:extLst>
-              <a:ext uri="{FF2B5EF4-FFF2-40B4-BE49-F238E27FC236}">
-                <a16:creationId xmlns:a16="http://schemas.microsoft.com/office/drawing/2014/main" id="{C06B028D-DF2E-6F82-30C8-7142C1BEBEA8}"/>
-              </a:ext>
-              <a:ext uri="{C183D7F6-B498-43B3-948B-1728B52AA6E4}">
-                <adec:decorative xmlns:adec="http://schemas.microsoft.com/office/drawing/2017/decorative" val="1"/>
-              </a:ext>
-            </a:extLst>
-          </p:cNvPr>
-          <p:cNvSpPr txBox="1"/>
-          <p:nvPr/>
-        </p:nvSpPr>
-        <p:spPr>
-          <a:xfrm>
-            <a:off x="1695311" y="3678540"/>
-            <a:ext cx="2584388" cy="1200329"/>
-          </a:xfrm>
-          <a:prstGeom prst="rect">
-            <a:avLst/>
-          </a:prstGeom>
-        </p:spPr>
-        <p:style>
-          <a:lnRef idx="2">
-            <a:schemeClr val="accent2">
-              <a:shade val="15000"/>
-            </a:schemeClr>
-          </a:lnRef>
-          <a:fillRef idx="1">
-            <a:schemeClr val="accent2"/>
-          </a:fillRef>
-          <a:effectRef idx="0">
-            <a:schemeClr val="accent2"/>
-          </a:effectRef>
-          <a:fontRef idx="minor">
-            <a:schemeClr val="lt1"/>
-          </a:fontRef>
-        </p:style>
-        <p:txBody>
-          <a:bodyPr wrap="square" rtlCol="0">
-            <a:spAutoFit/>
-          </a:bodyPr>
-          <a:lstStyle/>
-          <a:p>
-            <a:r>
-              <a:rPr lang="en-US" dirty="0"/>
-              <a:t>Combine improvement and modified evaluation (1 iteration only) into a single update.</a:t>
-            </a:r>
-          </a:p>
-        </p:txBody>
-      </p:sp>
-      <p:sp>
-        <p:nvSpPr>
-          <p:cNvPr id="9" name="Rectangle 8">
-            <a:extLst>
-              <a:ext uri="{FF2B5EF4-FFF2-40B4-BE49-F238E27FC236}">
-                <a16:creationId xmlns:a16="http://schemas.microsoft.com/office/drawing/2014/main" id="{6D968F04-390C-807C-E196-34BFDCCC50A5}"/>
-              </a:ext>
-              <a:ext uri="{C183D7F6-B498-43B3-948B-1728B52AA6E4}">
-                <adec:decorative xmlns:adec="http://schemas.microsoft.com/office/drawing/2017/decorative" val="1"/>
-              </a:ext>
-            </a:extLst>
-          </p:cNvPr>
-          <p:cNvSpPr/>
-          <p:nvPr/>
-        </p:nvSpPr>
-        <p:spPr>
-          <a:xfrm>
-            <a:off x="1199213" y="4954746"/>
-            <a:ext cx="3212243" cy="300146"/>
-          </a:xfrm>
-          <a:prstGeom prst="rect">
-            <a:avLst/>
-          </a:prstGeom>
-          <a:noFill/>
-          <a:ln w="9525" cap="flat" cmpd="sng" algn="ctr">
-            <a:solidFill>
-              <a:schemeClr val="accent2"/>
-            </a:solidFill>
-            <a:prstDash val="solid"/>
-            <a:round/>
-            <a:headEnd type="none" w="med" len="med"/>
-            <a:tailEnd type="none" w="med" len="med"/>
-          </a:ln>
-        </p:spPr>
-        <p:style>
-          <a:lnRef idx="0">
-            <a:scrgbClr r="0" g="0" b="0"/>
-          </a:lnRef>
-          <a:fillRef idx="0">
-            <a:scrgbClr r="0" g="0" b="0"/>
-          </a:fillRef>
-          <a:effectRef idx="0">
-            <a:scrgbClr r="0" g="0" b="0"/>
-          </a:effectRef>
-          <a:fontRef idx="minor">
-            <a:schemeClr val="accent2"/>
-          </a:fontRef>
-        </p:style>
-        <p:txBody>
-          <a:bodyPr rtlCol="0" anchor="ctr"/>
-          <a:lstStyle/>
-          <a:p>
-            <a:pPr algn="ctr"/>
-            <a:endParaRPr lang="en-US"/>
-          </a:p>
-        </p:txBody>
-      </p:sp>
-      <p:sp>
-        <p:nvSpPr>
-          <p:cNvPr id="11" name="Rectangle 10">
-            <a:extLst>
-              <a:ext uri="{FF2B5EF4-FFF2-40B4-BE49-F238E27FC236}">
-                <a16:creationId xmlns:a16="http://schemas.microsoft.com/office/drawing/2014/main" id="{73AAE380-C886-4AD1-501B-DC3FA8D0D18B}"/>
-              </a:ext>
-              <a:ext uri="{C183D7F6-B498-43B3-948B-1728B52AA6E4}">
-                <adec:decorative xmlns:adec="http://schemas.microsoft.com/office/drawing/2017/decorative" val="1"/>
-              </a:ext>
-            </a:extLst>
-          </p:cNvPr>
-          <p:cNvSpPr/>
-          <p:nvPr/>
-        </p:nvSpPr>
-        <p:spPr>
-          <a:xfrm>
-            <a:off x="5114123" y="4899809"/>
-            <a:ext cx="3541266" cy="300146"/>
-          </a:xfrm>
-          <a:prstGeom prst="rect">
-            <a:avLst/>
-          </a:prstGeom>
-          <a:noFill/>
-          <a:ln w="9525" cap="flat" cmpd="sng" algn="ctr">
-            <a:solidFill>
-              <a:schemeClr val="accent2"/>
-            </a:solidFill>
-            <a:prstDash val="solid"/>
-            <a:round/>
-            <a:headEnd type="none" w="med" len="med"/>
-            <a:tailEnd type="none" w="med" len="med"/>
-          </a:ln>
-        </p:spPr>
-        <p:style>
-          <a:lnRef idx="0">
-            <a:scrgbClr r="0" g="0" b="0"/>
-          </a:lnRef>
-          <a:fillRef idx="0">
-            <a:scrgbClr r="0" g="0" b="0"/>
-          </a:fillRef>
-          <a:effectRef idx="0">
-            <a:scrgbClr r="0" g="0" b="0"/>
-          </a:effectRef>
-          <a:fontRef idx="minor">
-            <a:schemeClr val="accent2"/>
-          </a:fontRef>
-        </p:style>
-        <p:txBody>
-          <a:bodyPr rtlCol="0" anchor="ctr"/>
-          <a:lstStyle/>
-          <a:p>
-            <a:pPr algn="ctr"/>
-            <a:endParaRPr lang="en-US"/>
-          </a:p>
-        </p:txBody>
-      </p:sp>
-      <p:sp>
-        <p:nvSpPr>
-          <p:cNvPr id="4" name="Speech Bubble: Rectangle with Corners Rounded 3">
-            <a:extLst>
-              <a:ext uri="{FF2B5EF4-FFF2-40B4-BE49-F238E27FC236}">
-                <a16:creationId xmlns:a16="http://schemas.microsoft.com/office/drawing/2014/main" id="{7EDE205F-7A5D-E9BD-56DA-89AC4D034BAD}"/>
-              </a:ext>
-              <a:ext uri="{C183D7F6-B498-43B3-948B-1728B52AA6E4}">
-                <adec:decorative xmlns:adec="http://schemas.microsoft.com/office/drawing/2017/decorative" val="1"/>
-              </a:ext>
-            </a:extLst>
-          </p:cNvPr>
-          <p:cNvSpPr/>
-          <p:nvPr/>
-        </p:nvSpPr>
-        <p:spPr>
-          <a:xfrm>
-            <a:off x="8103956" y="5254892"/>
-            <a:ext cx="2667583" cy="474765"/>
-          </a:xfrm>
-          <a:prstGeom prst="wedgeRoundRectCallout">
-            <a:avLst>
-              <a:gd name="adj1" fmla="val -141709"/>
-              <a:gd name="adj2" fmla="val 13915"/>
-              <a:gd name="adj3" fmla="val 16667"/>
-            </a:avLst>
-          </a:prstGeom>
-        </p:spPr>
-        <p:style>
-          <a:lnRef idx="2">
-            <a:schemeClr val="accent1">
-              <a:shade val="15000"/>
-            </a:schemeClr>
-          </a:lnRef>
-          <a:fillRef idx="1">
-            <a:schemeClr val="accent1"/>
-          </a:fillRef>
-          <a:effectRef idx="0">
-            <a:schemeClr val="accent1"/>
-          </a:effectRef>
-          <a:fontRef idx="minor">
-            <a:schemeClr val="lt1"/>
-          </a:fontRef>
-        </p:style>
-        <p:txBody>
-          <a:bodyPr rtlCol="0" anchor="ctr"/>
-          <a:lstStyle/>
-          <a:p>
-            <a:pPr algn="ctr"/>
-            <a:r>
-              <a:rPr lang="en-US" sz="1600" b="0" dirty="0"/>
-              <a:t>Stopping criterion from policy evaluation</a:t>
-            </a:r>
-            <a:endParaRPr lang="en-US" sz="1600" dirty="0"/>
-          </a:p>
-        </p:txBody>
-      </p:sp>
-      <p:sp>
-        <p:nvSpPr>
-          <p:cNvPr id="12" name="Rectangle 11">
-            <a:extLst>
-              <a:ext uri="{FF2B5EF4-FFF2-40B4-BE49-F238E27FC236}">
-                <a16:creationId xmlns:a16="http://schemas.microsoft.com/office/drawing/2014/main" id="{2F357B00-C899-A34F-CC4A-48E9DDA5567A}"/>
-              </a:ext>
-              <a:ext uri="{C183D7F6-B498-43B3-948B-1728B52AA6E4}">
-                <adec:decorative xmlns:adec="http://schemas.microsoft.com/office/drawing/2017/decorative" val="1"/>
-              </a:ext>
-            </a:extLst>
-          </p:cNvPr>
-          <p:cNvSpPr/>
-          <p:nvPr/>
-        </p:nvSpPr>
-        <p:spPr>
-          <a:xfrm>
-            <a:off x="4781862" y="5914693"/>
-            <a:ext cx="3729702" cy="300146"/>
-          </a:xfrm>
-          <a:prstGeom prst="rect">
-            <a:avLst/>
-          </a:prstGeom>
-          <a:noFill/>
-          <a:ln w="9525" cap="flat" cmpd="sng" algn="ctr">
-            <a:solidFill>
-              <a:schemeClr val="accent2"/>
-            </a:solidFill>
-            <a:prstDash val="solid"/>
-            <a:round/>
-            <a:headEnd type="none" w="med" len="med"/>
-            <a:tailEnd type="none" w="med" len="med"/>
-          </a:ln>
-        </p:spPr>
-        <p:style>
-          <a:lnRef idx="0">
-            <a:scrgbClr r="0" g="0" b="0"/>
-          </a:lnRef>
-          <a:fillRef idx="0">
-            <a:scrgbClr r="0" g="0" b="0"/>
-          </a:fillRef>
-          <a:effectRef idx="0">
-            <a:scrgbClr r="0" g="0" b="0"/>
-          </a:effectRef>
-          <a:fontRef idx="minor">
-            <a:schemeClr val="accent2"/>
-          </a:fontRef>
-        </p:style>
-        <p:txBody>
-          <a:bodyPr rtlCol="0" anchor="ctr"/>
-          <a:lstStyle/>
-          <a:p>
-            <a:pPr algn="ctr"/>
-            <a:endParaRPr lang="en-US"/>
-          </a:p>
-        </p:txBody>
-      </p:sp>
-    </p:spTree>
-    <p:extLst>
-      <p:ext uri="{BB962C8B-B14F-4D97-AF65-F5344CB8AC3E}">
-        <p14:creationId xmlns:p14="http://schemas.microsoft.com/office/powerpoint/2010/main" val="2447994159"/>
-      </p:ext>
-    </p:extLst>
-  </p:cSld>
-  <p:clrMapOvr>
-    <a:masterClrMapping/>
-  </p:clrMapOvr>
-  <p:timing>
-    <p:tnLst>
-      <p:par>
-        <p:cTn id="1" dur="indefinite" restart="never" nodeType="tmRoot">
-          <p:childTnLst>
-            <p:seq concurrent="1" nextAc="seek">
-              <p:cTn id="2" dur="indefinite" nodeType="mainSeq">
-                <p:childTnLst>
-                  <p:par>
-                    <p:cTn id="3" fill="hold">
-                      <p:stCondLst>
-                        <p:cond delay="indefinite"/>
-                      </p:stCondLst>
-                      <p:childTnLst>
-                        <p:par>
-                          <p:cTn id="4" fill="hold">
-                            <p:stCondLst>
-                              <p:cond delay="0"/>
-                            </p:stCondLst>
-                            <p:childTnLst>
-                              <p:par>
-                                <p:cTn id="5" presetID="1" presetClass="entr" presetSubtype="0" fill="hold" grpId="0" nodeType="clickEffect">
-                                  <p:stCondLst>
-                                    <p:cond delay="0"/>
-                                  </p:stCondLst>
-                                  <p:childTnLst>
-                                    <p:set>
-                                      <p:cBhvr>
-                                        <p:cTn id="6" dur="1" fill="hold">
-                                          <p:stCondLst>
-                                            <p:cond delay="0"/>
-                                          </p:stCondLst>
-                                        </p:cTn>
-                                        <p:tgtEl>
-                                          <p:spTgt spid="4"/>
-                                        </p:tgtEl>
-                                        <p:attrNameLst>
-                                          <p:attrName>style.visibility</p:attrName>
-                                        </p:attrNameLst>
-                                      </p:cBhvr>
-                                      <p:to>
-                                        <p:strVal val="visible"/>
-                                      </p:to>
-                                    </p:set>
-                                  </p:childTnLst>
-                                </p:cTn>
-                              </p:par>
-                            </p:childTnLst>
-                          </p:cTn>
-                        </p:par>
-                      </p:childTnLst>
-                    </p:cTn>
-                  </p:par>
-                  <p:par>
-                    <p:cTn id="7" fill="hold">
-                      <p:stCondLst>
-                        <p:cond delay="indefinite"/>
-                      </p:stCondLst>
-                      <p:childTnLst>
-                        <p:par>
-                          <p:cTn id="8" fill="hold">
-                            <p:stCondLst>
-                              <p:cond delay="0"/>
-                            </p:stCondLst>
-                            <p:childTnLst>
-                              <p:par>
-                                <p:cTn id="9" presetID="1" presetClass="entr" presetSubtype="0" fill="hold" grpId="0" nodeType="clickEffect">
-                                  <p:stCondLst>
-                                    <p:cond delay="0"/>
-                                  </p:stCondLst>
-                                  <p:childTnLst>
-                                    <p:set>
-                                      <p:cBhvr>
-                                        <p:cTn id="10" dur="1" fill="hold">
-                                          <p:stCondLst>
-                                            <p:cond delay="0"/>
-                                          </p:stCondLst>
-                                        </p:cTn>
-                                        <p:tgtEl>
-                                          <p:spTgt spid="6"/>
-                                        </p:tgtEl>
-                                        <p:attrNameLst>
-                                          <p:attrName>style.visibility</p:attrName>
-                                        </p:attrNameLst>
-                                      </p:cBhvr>
-                                      <p:to>
-                                        <p:strVal val="visible"/>
-                                      </p:to>
-                                    </p:set>
-                                  </p:childTnLst>
-                                </p:cTn>
-                              </p:par>
-                            </p:childTnLst>
-                          </p:cTn>
-                        </p:par>
-                      </p:childTnLst>
-                    </p:cTn>
-                  </p:par>
-                </p:childTnLst>
-              </p:cTn>
-              <p:prevCondLst>
-                <p:cond evt="onPrev" delay="0">
-                  <p:tgtEl>
-                    <p:sldTgt/>
-                  </p:tgtEl>
-                </p:cond>
-              </p:prevCondLst>
-              <p:nextCondLst>
-                <p:cond evt="onNext" delay="0">
-                  <p:tgtEl>
-                    <p:sldTgt/>
-                  </p:tgtEl>
-                </p:cond>
-              </p:nextCondLst>
-            </p:seq>
-          </p:childTnLst>
-        </p:cTn>
-      </p:par>
-    </p:tnLst>
-    <p:bldLst>
-      <p:bldP spid="6" grpId="0" animBg="1"/>
-      <p:bldP spid="4" grpId="0" animBg="1"/>
-    </p:bldLst>
-  </p:timing>
-</p:sld>
-</file>
-
 <file path=ppt/slides/slide2.xml><?xml version="1.0" encoding="utf-8"?>
 <p:sld xmlns:a="http://schemas.openxmlformats.org/drawingml/2006/main" xmlns:r="http://schemas.openxmlformats.org/officeDocument/2006/relationships" xmlns:p="http://schemas.openxmlformats.org/presentationml/2006/main">
   <p:cSld>
@@ -23227,6 +22853,856 @@
       </p:grpSpPr>
       <p:sp>
         <p:nvSpPr>
+          <p:cNvPr id="2" name="Title 1">
+            <a:extLst>
+              <a:ext uri="{FF2B5EF4-FFF2-40B4-BE49-F238E27FC236}">
+                <a16:creationId xmlns:a16="http://schemas.microsoft.com/office/drawing/2014/main" id="{1D7C93B2-B8AE-DF85-EA1B-8078C4975CE1}"/>
+              </a:ext>
+            </a:extLst>
+          </p:cNvPr>
+          <p:cNvSpPr>
+            <a:spLocks noGrp="1"/>
+          </p:cNvSpPr>
+          <p:nvPr>
+            <p:ph type="title"/>
+          </p:nvPr>
+        </p:nvSpPr>
+        <p:spPr/>
+        <p:txBody>
+          <a:bodyPr/>
+          <a:lstStyle/>
+          <a:p>
+            <a:r>
+              <a:rPr lang="en-US" dirty="0"/>
+              <a:t>Alg. Value Iteration</a:t>
+            </a:r>
+          </a:p>
+        </p:txBody>
+      </p:sp>
+      <p:pic>
+        <p:nvPicPr>
+          <p:cNvPr id="7" name="Content Placeholder 4" descr="Algorithm box: Policy Iteration (using iterative policy evaluation) for estimating pi approximately pi star. 1. Initialization: V(s) in R and pi(s) in A(s) arbitrarily for all s in S; V(terminal) = 0. 2. Policy Evaluation: Loop: Delta ← 0; Loop for each s in S: v ← V(s); V(s) ← sum over s′, r of p(s′, r | s, pi(s)) [r + gamma V(s′)]; Delta ← max(Delta, |v − V(s)|); until Delta &lt; theta (a small positive number determining the accuracy of estimation). 3. Policy Improvement: policy-stable ← true; For each s in S: old-action ← pi(s); pi(s) ← argmax over a of sum over s′, r of p(s′, r | s, a) [r + gamma V(s′)]; If old-action ≠ pi(s), then policy-stable ← false. If policy-stable, then stop and return V ≈ v star and pi ≈ pi star; else go to 2.">
+            <a:extLst>
+              <a:ext uri="{FF2B5EF4-FFF2-40B4-BE49-F238E27FC236}">
+                <a16:creationId xmlns:a16="http://schemas.microsoft.com/office/drawing/2014/main" id="{76B44262-ED50-A04F-C5AA-E6A746D04708}"/>
+              </a:ext>
+            </a:extLst>
+          </p:cNvPr>
+          <p:cNvPicPr>
+            <a:picLocks noChangeAspect="1"/>
+          </p:cNvPicPr>
+          <p:nvPr/>
+        </p:nvPicPr>
+        <p:blipFill>
+          <a:blip r:embed="rId2"/>
+          <a:stretch>
+            <a:fillRect/>
+          </a:stretch>
+        </p:blipFill>
+        <p:spPr>
+          <a:xfrm>
+            <a:off x="520239" y="1039018"/>
+            <a:ext cx="6849637" cy="4779963"/>
+          </a:xfrm>
+          <a:prstGeom prst="rect">
+            <a:avLst/>
+          </a:prstGeom>
+        </p:spPr>
+      </p:pic>
+      <p:pic>
+        <p:nvPicPr>
+          <p:cNvPr id="5" name="Content Placeholder 4" descr="Algorithm box: Value Iteration, for estimating pi approximately pi star. Algorithm parameter: a small threshold theta &gt; 0 determining accuracy of estimation. Initialize V(s), for all s in S plus, arbitrarily except that V(terminal) = 0. Loop: Delta ← 0; Loop for each s in S: v ← V(s); V(s) ← max over a of sum over s′, r of p(s′, r | s, a) [r + gamma V(s′)]; Delta ← max(Delta, |v − V(s)|); until Delta &lt; theta. Output a deterministic policy, pi ≈ pi star, such that pi(s) = argmax over a of sum over s′, r of p(s′, r | s, a) [r + gamma V(s′)].">
+            <a:extLst>
+              <a:ext uri="{FF2B5EF4-FFF2-40B4-BE49-F238E27FC236}">
+                <a16:creationId xmlns:a16="http://schemas.microsoft.com/office/drawing/2014/main" id="{EA7CD4F4-7550-2FF0-26AF-786588E65B53}"/>
+              </a:ext>
+            </a:extLst>
+          </p:cNvPr>
+          <p:cNvPicPr>
+            <a:picLocks noGrp="1" noChangeAspect="1"/>
+          </p:cNvPicPr>
+          <p:nvPr>
+            <p:ph idx="1"/>
+          </p:nvPr>
+        </p:nvPicPr>
+        <p:blipFill>
+          <a:blip r:embed="rId3"/>
+          <a:srcRect l="1659" t="2281"/>
+          <a:stretch>
+            <a:fillRect/>
+          </a:stretch>
+        </p:blipFill>
+        <p:spPr>
+          <a:xfrm>
+            <a:off x="4411456" y="3092208"/>
+            <a:ext cx="7034263" cy="3307667"/>
+          </a:xfrm>
+          <a:prstGeom prst="rect">
+            <a:avLst/>
+          </a:prstGeom>
+        </p:spPr>
+      </p:pic>
+      <mc:AlternateContent xmlns:mc="http://schemas.openxmlformats.org/markup-compatibility/2006" xmlns:a14="http://schemas.microsoft.com/office/drawing/2010/main">
+        <mc:Choice Requires="a14">
+          <p:sp>
+            <p:nvSpPr>
+              <p:cNvPr id="3" name="Speech Bubble: Rectangle with Corners Rounded 2">
+                <a:extLst>
+                  <a:ext uri="{FF2B5EF4-FFF2-40B4-BE49-F238E27FC236}">
+                    <a16:creationId xmlns:a16="http://schemas.microsoft.com/office/drawing/2014/main" id="{9540CE52-AAD7-F286-13F5-1B8D753FE1D7}"/>
+                  </a:ext>
+                  <a:ext uri="{C183D7F6-B498-43B3-948B-1728B52AA6E4}">
+                    <adec:decorative xmlns:adec="http://schemas.microsoft.com/office/drawing/2017/decorative" val="1"/>
+                  </a:ext>
+                </a:extLst>
+              </p:cNvPr>
+              <p:cNvSpPr/>
+              <p:nvPr/>
+            </p:nvSpPr>
+            <p:spPr>
+              <a:xfrm>
+                <a:off x="8103956" y="4239859"/>
+                <a:ext cx="2889785" cy="569466"/>
+              </a:xfrm>
+              <a:prstGeom prst="wedgeRoundRectCallout">
+                <a:avLst>
+                  <a:gd name="adj1" fmla="val -66744"/>
+                  <a:gd name="adj2" fmla="val 62281"/>
+                  <a:gd name="adj3" fmla="val 16667"/>
+                </a:avLst>
+              </a:prstGeom>
+            </p:spPr>
+            <p:style>
+              <a:lnRef idx="2">
+                <a:schemeClr val="accent1">
+                  <a:shade val="15000"/>
+                </a:schemeClr>
+              </a:lnRef>
+              <a:fillRef idx="1">
+                <a:schemeClr val="accent1"/>
+              </a:fillRef>
+              <a:effectRef idx="0">
+                <a:schemeClr val="accent1"/>
+              </a:effectRef>
+              <a:fontRef idx="minor">
+                <a:schemeClr val="lt1"/>
+              </a:fontRef>
+            </p:style>
+            <p:txBody>
+              <a:bodyPr rtlCol="0" anchor="ctr"/>
+              <a:lstStyle/>
+              <a:p>
+                <a:pPr algn="ctr"/>
+                <a:r>
+                  <a:rPr lang="en-US" sz="1600" b="0" dirty="0"/>
+                  <a:t>Bellman optimality operator:</a:t>
+                </a:r>
+                <a:br>
+                  <a:rPr lang="en-US" sz="1600" b="0" dirty="0"/>
+                </a:br>
+                <a:r>
+                  <a:rPr lang="en-US" sz="1600" b="0" dirty="0"/>
+                  <a:t> </a:t>
+                </a:r>
+                <a14:m>
+                  <m:oMath xmlns:m="http://schemas.openxmlformats.org/officeDocument/2006/math">
+                    <m:sSub>
+                      <m:sSubPr>
+                        <m:ctrlPr>
+                          <a:rPr lang="en-US" sz="1600" b="0" i="1" smtClean="0">
+                            <a:latin typeface="Cambria Math" panose="02040503050406030204" pitchFamily="18" charset="0"/>
+                          </a:rPr>
+                        </m:ctrlPr>
+                      </m:sSubPr>
+                      <m:e>
+                        <m:r>
+                          <a:rPr lang="en-US" sz="1600" b="0" i="1" smtClean="0">
+                            <a:latin typeface="Cambria Math" panose="02040503050406030204" pitchFamily="18" charset="0"/>
+                          </a:rPr>
+                          <m:t>𝑉</m:t>
+                        </m:r>
+                      </m:e>
+                      <m:sub>
+                        <m:r>
+                          <a:rPr lang="en-US" sz="1600" b="0" i="1" smtClean="0">
+                            <a:latin typeface="Cambria Math" panose="02040503050406030204" pitchFamily="18" charset="0"/>
+                          </a:rPr>
+                          <m:t>𝑘</m:t>
+                        </m:r>
+                        <m:r>
+                          <a:rPr lang="en-US" sz="1600" b="0" i="1" smtClean="0">
+                            <a:latin typeface="Cambria Math" panose="02040503050406030204" pitchFamily="18" charset="0"/>
+                          </a:rPr>
+                          <m:t>+1</m:t>
+                        </m:r>
+                      </m:sub>
+                    </m:sSub>
+                    <m:r>
+                      <a:rPr lang="en-US" sz="1600" b="0" i="1" smtClean="0">
+                        <a:latin typeface="Cambria Math" panose="02040503050406030204" pitchFamily="18" charset="0"/>
+                      </a:rPr>
+                      <m:t>=</m:t>
+                    </m:r>
+                    <m:sSup>
+                      <m:sSupPr>
+                        <m:ctrlPr>
+                          <a:rPr lang="en-US" sz="1600" b="0" i="1" smtClean="0">
+                            <a:latin typeface="Cambria Math" panose="02040503050406030204" pitchFamily="18" charset="0"/>
+                          </a:rPr>
+                        </m:ctrlPr>
+                      </m:sSupPr>
+                      <m:e>
+                        <m:r>
+                          <a:rPr lang="en-US" sz="1600" b="0" i="1" smtClean="0">
+                            <a:latin typeface="Cambria Math" panose="02040503050406030204" pitchFamily="18" charset="0"/>
+                          </a:rPr>
+                          <m:t>𝑇</m:t>
+                        </m:r>
+                      </m:e>
+                      <m:sup>
+                        <m:r>
+                          <a:rPr lang="en-US" sz="1600" b="0" i="1" smtClean="0">
+                            <a:latin typeface="Cambria Math" panose="02040503050406030204" pitchFamily="18" charset="0"/>
+                          </a:rPr>
+                          <m:t>∗</m:t>
+                        </m:r>
+                      </m:sup>
+                    </m:sSup>
+                    <m:sSub>
+                      <m:sSubPr>
+                        <m:ctrlPr>
+                          <a:rPr lang="en-US" sz="1600" b="0" i="1" smtClean="0">
+                            <a:latin typeface="Cambria Math" panose="02040503050406030204" pitchFamily="18" charset="0"/>
+                          </a:rPr>
+                        </m:ctrlPr>
+                      </m:sSubPr>
+                      <m:e>
+                        <m:r>
+                          <a:rPr lang="en-US" sz="1600" b="0" i="1" smtClean="0">
+                            <a:latin typeface="Cambria Math" panose="02040503050406030204" pitchFamily="18" charset="0"/>
+                          </a:rPr>
+                          <m:t>𝑉</m:t>
+                        </m:r>
+                      </m:e>
+                      <m:sub>
+                        <m:r>
+                          <a:rPr lang="en-US" sz="1600" b="0" i="1" smtClean="0">
+                            <a:latin typeface="Cambria Math" panose="02040503050406030204" pitchFamily="18" charset="0"/>
+                          </a:rPr>
+                          <m:t>𝑘</m:t>
+                        </m:r>
+                      </m:sub>
+                    </m:sSub>
+                  </m:oMath>
+                </a14:m>
+                <a:endParaRPr lang="en-US" sz="1600" dirty="0"/>
+              </a:p>
+            </p:txBody>
+          </p:sp>
+        </mc:Choice>
+        <mc:Fallback xmlns="">
+          <p:sp>
+            <p:nvSpPr>
+              <p:cNvPr id="3" name="Speech Bubble: Rectangle with Corners Rounded 2">
+                <a:extLst>
+                  <a:ext uri="{FF2B5EF4-FFF2-40B4-BE49-F238E27FC236}">
+                    <a16:creationId xmlns:a16="http://schemas.microsoft.com/office/drawing/2014/main" id="{9540CE52-AAD7-F286-13F5-1B8D753FE1D7}"/>
+                  </a:ext>
+                  <a:ext uri="{C183D7F6-B498-43B3-948B-1728B52AA6E4}">
+                    <adec:decorative xmlns:adec="http://schemas.microsoft.com/office/drawing/2017/decorative" val="1"/>
+                  </a:ext>
+                </a:extLst>
+              </p:cNvPr>
+              <p:cNvSpPr>
+                <a:spLocks noRot="1" noChangeAspect="1" noMove="1" noResize="1" noEditPoints="1" noAdjustHandles="1" noChangeArrowheads="1" noChangeShapeType="1" noTextEdit="1"/>
+              </p:cNvSpPr>
+              <p:nvPr/>
+            </p:nvSpPr>
+            <p:spPr>
+              <a:xfrm>
+                <a:off x="8103956" y="4239859"/>
+                <a:ext cx="2889785" cy="569466"/>
+              </a:xfrm>
+              <a:prstGeom prst="wedgeRoundRectCallout">
+                <a:avLst>
+                  <a:gd name="adj1" fmla="val -66744"/>
+                  <a:gd name="adj2" fmla="val 62281"/>
+                  <a:gd name="adj3" fmla="val 16667"/>
+                </a:avLst>
+              </a:prstGeom>
+              <a:blipFill>
+                <a:blip r:embed="rId4"/>
+                <a:stretch>
+                  <a:fillRect t="-1818"/>
+                </a:stretch>
+              </a:blipFill>
+            </p:spPr>
+            <p:txBody>
+              <a:bodyPr/>
+              <a:lstStyle/>
+              <a:p>
+                <a:r>
+                  <a:rPr lang="en-US">
+                    <a:noFill/>
+                  </a:rPr>
+                  <a:t> </a:t>
+                </a:r>
+              </a:p>
+            </p:txBody>
+          </p:sp>
+        </mc:Fallback>
+      </mc:AlternateContent>
+      <p:sp>
+        <p:nvSpPr>
+          <p:cNvPr id="6" name="Speech Bubble: Rectangle with Corners Rounded 5">
+            <a:extLst>
+              <a:ext uri="{FF2B5EF4-FFF2-40B4-BE49-F238E27FC236}">
+                <a16:creationId xmlns:a16="http://schemas.microsoft.com/office/drawing/2014/main" id="{C94FA055-A74C-A901-CCD7-6A1A7CC80DA2}"/>
+              </a:ext>
+              <a:ext uri="{C183D7F6-B498-43B3-948B-1728B52AA6E4}">
+                <adec:decorative xmlns:adec="http://schemas.microsoft.com/office/drawing/2017/decorative" val="1"/>
+              </a:ext>
+            </a:extLst>
+          </p:cNvPr>
+          <p:cNvSpPr/>
+          <p:nvPr/>
+        </p:nvSpPr>
+        <p:spPr>
+          <a:xfrm>
+            <a:off x="8577442" y="6207869"/>
+            <a:ext cx="2667583" cy="384011"/>
+          </a:xfrm>
+          <a:prstGeom prst="wedgeRoundRectCallout">
+            <a:avLst>
+              <a:gd name="adj1" fmla="val -75681"/>
+              <a:gd name="adj2" fmla="val -48428"/>
+              <a:gd name="adj3" fmla="val 16667"/>
+            </a:avLst>
+          </a:prstGeom>
+        </p:spPr>
+        <p:style>
+          <a:lnRef idx="2">
+            <a:schemeClr val="accent1">
+              <a:shade val="15000"/>
+            </a:schemeClr>
+          </a:lnRef>
+          <a:fillRef idx="1">
+            <a:schemeClr val="accent1"/>
+          </a:fillRef>
+          <a:effectRef idx="0">
+            <a:schemeClr val="accent1"/>
+          </a:effectRef>
+          <a:fontRef idx="minor">
+            <a:schemeClr val="lt1"/>
+          </a:fontRef>
+        </p:style>
+        <p:txBody>
+          <a:bodyPr rtlCol="0" anchor="ctr"/>
+          <a:lstStyle/>
+          <a:p>
+            <a:pPr algn="ctr"/>
+            <a:r>
+              <a:rPr lang="en-US" sz="1600" b="0" dirty="0"/>
+              <a:t>Extract the greedy policy.</a:t>
+            </a:r>
+            <a:endParaRPr lang="en-US" sz="1600" dirty="0"/>
+          </a:p>
+        </p:txBody>
+      </p:sp>
+      <p:sp>
+        <p:nvSpPr>
+          <p:cNvPr id="8" name="Rectangle 7">
+            <a:extLst>
+              <a:ext uri="{FF2B5EF4-FFF2-40B4-BE49-F238E27FC236}">
+                <a16:creationId xmlns:a16="http://schemas.microsoft.com/office/drawing/2014/main" id="{AAC0C2CF-3D6C-5FB5-6FAF-5A3C70799FAF}"/>
+              </a:ext>
+              <a:ext uri="{C183D7F6-B498-43B3-948B-1728B52AA6E4}">
+                <adec:decorative xmlns:adec="http://schemas.microsoft.com/office/drawing/2017/decorative" val="1"/>
+              </a:ext>
+            </a:extLst>
+          </p:cNvPr>
+          <p:cNvSpPr/>
+          <p:nvPr/>
+        </p:nvSpPr>
+        <p:spPr>
+          <a:xfrm>
+            <a:off x="1563554" y="3231811"/>
+            <a:ext cx="2847902" cy="300146"/>
+          </a:xfrm>
+          <a:prstGeom prst="rect">
+            <a:avLst/>
+          </a:prstGeom>
+          <a:noFill/>
+          <a:ln w="9525" cap="flat" cmpd="sng" algn="ctr">
+            <a:solidFill>
+              <a:schemeClr val="accent2"/>
+            </a:solidFill>
+            <a:prstDash val="solid"/>
+            <a:round/>
+            <a:headEnd type="none" w="med" len="med"/>
+            <a:tailEnd type="none" w="med" len="med"/>
+          </a:ln>
+        </p:spPr>
+        <p:style>
+          <a:lnRef idx="0">
+            <a:scrgbClr r="0" g="0" b="0"/>
+          </a:lnRef>
+          <a:fillRef idx="0">
+            <a:scrgbClr r="0" g="0" b="0"/>
+          </a:fillRef>
+          <a:effectRef idx="0">
+            <a:scrgbClr r="0" g="0" b="0"/>
+          </a:effectRef>
+          <a:fontRef idx="minor">
+            <a:schemeClr val="accent2"/>
+          </a:fontRef>
+        </p:style>
+        <p:txBody>
+          <a:bodyPr rtlCol="0" anchor="ctr"/>
+          <a:lstStyle/>
+          <a:p>
+            <a:pPr algn="ctr"/>
+            <a:endParaRPr lang="en-US" dirty="0"/>
+          </a:p>
+        </p:txBody>
+      </p:sp>
+      <p:sp>
+        <p:nvSpPr>
+          <p:cNvPr id="10" name="TextBox 9">
+            <a:extLst>
+              <a:ext uri="{FF2B5EF4-FFF2-40B4-BE49-F238E27FC236}">
+                <a16:creationId xmlns:a16="http://schemas.microsoft.com/office/drawing/2014/main" id="{C06B028D-DF2E-6F82-30C8-7142C1BEBEA8}"/>
+              </a:ext>
+              <a:ext uri="{C183D7F6-B498-43B3-948B-1728B52AA6E4}">
+                <adec:decorative xmlns:adec="http://schemas.microsoft.com/office/drawing/2017/decorative" val="1"/>
+              </a:ext>
+            </a:extLst>
+          </p:cNvPr>
+          <p:cNvSpPr txBox="1"/>
+          <p:nvPr/>
+        </p:nvSpPr>
+        <p:spPr>
+          <a:xfrm>
+            <a:off x="1695311" y="3678540"/>
+            <a:ext cx="2584388" cy="1200329"/>
+          </a:xfrm>
+          <a:prstGeom prst="rect">
+            <a:avLst/>
+          </a:prstGeom>
+        </p:spPr>
+        <p:style>
+          <a:lnRef idx="2">
+            <a:schemeClr val="accent2">
+              <a:shade val="15000"/>
+            </a:schemeClr>
+          </a:lnRef>
+          <a:fillRef idx="1">
+            <a:schemeClr val="accent2"/>
+          </a:fillRef>
+          <a:effectRef idx="0">
+            <a:schemeClr val="accent2"/>
+          </a:effectRef>
+          <a:fontRef idx="minor">
+            <a:schemeClr val="lt1"/>
+          </a:fontRef>
+        </p:style>
+        <p:txBody>
+          <a:bodyPr wrap="square" rtlCol="0">
+            <a:spAutoFit/>
+          </a:bodyPr>
+          <a:lstStyle/>
+          <a:p>
+            <a:r>
+              <a:rPr lang="en-US" dirty="0"/>
+              <a:t>Combine improvement and modified evaluation (1 iteration only) into a single update.</a:t>
+            </a:r>
+          </a:p>
+        </p:txBody>
+      </p:sp>
+      <p:sp>
+        <p:nvSpPr>
+          <p:cNvPr id="9" name="Rectangle 8">
+            <a:extLst>
+              <a:ext uri="{FF2B5EF4-FFF2-40B4-BE49-F238E27FC236}">
+                <a16:creationId xmlns:a16="http://schemas.microsoft.com/office/drawing/2014/main" id="{6D968F04-390C-807C-E196-34BFDCCC50A5}"/>
+              </a:ext>
+              <a:ext uri="{C183D7F6-B498-43B3-948B-1728B52AA6E4}">
+                <adec:decorative xmlns:adec="http://schemas.microsoft.com/office/drawing/2017/decorative" val="1"/>
+              </a:ext>
+            </a:extLst>
+          </p:cNvPr>
+          <p:cNvSpPr/>
+          <p:nvPr/>
+        </p:nvSpPr>
+        <p:spPr>
+          <a:xfrm>
+            <a:off x="1199213" y="4954746"/>
+            <a:ext cx="3212243" cy="300146"/>
+          </a:xfrm>
+          <a:prstGeom prst="rect">
+            <a:avLst/>
+          </a:prstGeom>
+          <a:noFill/>
+          <a:ln w="9525" cap="flat" cmpd="sng" algn="ctr">
+            <a:solidFill>
+              <a:schemeClr val="accent2"/>
+            </a:solidFill>
+            <a:prstDash val="solid"/>
+            <a:round/>
+            <a:headEnd type="none" w="med" len="med"/>
+            <a:tailEnd type="none" w="med" len="med"/>
+          </a:ln>
+        </p:spPr>
+        <p:style>
+          <a:lnRef idx="0">
+            <a:scrgbClr r="0" g="0" b="0"/>
+          </a:lnRef>
+          <a:fillRef idx="0">
+            <a:scrgbClr r="0" g="0" b="0"/>
+          </a:fillRef>
+          <a:effectRef idx="0">
+            <a:scrgbClr r="0" g="0" b="0"/>
+          </a:effectRef>
+          <a:fontRef idx="minor">
+            <a:schemeClr val="accent2"/>
+          </a:fontRef>
+        </p:style>
+        <p:txBody>
+          <a:bodyPr rtlCol="0" anchor="ctr"/>
+          <a:lstStyle/>
+          <a:p>
+            <a:pPr algn="ctr"/>
+            <a:endParaRPr lang="en-US" dirty="0"/>
+          </a:p>
+        </p:txBody>
+      </p:sp>
+      <p:sp>
+        <p:nvSpPr>
+          <p:cNvPr id="11" name="Rectangle 10">
+            <a:extLst>
+              <a:ext uri="{FF2B5EF4-FFF2-40B4-BE49-F238E27FC236}">
+                <a16:creationId xmlns:a16="http://schemas.microsoft.com/office/drawing/2014/main" id="{73AAE380-C886-4AD1-501B-DC3FA8D0D18B}"/>
+              </a:ext>
+              <a:ext uri="{C183D7F6-B498-43B3-948B-1728B52AA6E4}">
+                <adec:decorative xmlns:adec="http://schemas.microsoft.com/office/drawing/2017/decorative" val="1"/>
+              </a:ext>
+            </a:extLst>
+          </p:cNvPr>
+          <p:cNvSpPr/>
+          <p:nvPr/>
+        </p:nvSpPr>
+        <p:spPr>
+          <a:xfrm>
+            <a:off x="5114123" y="4899809"/>
+            <a:ext cx="3541266" cy="300146"/>
+          </a:xfrm>
+          <a:prstGeom prst="rect">
+            <a:avLst/>
+          </a:prstGeom>
+          <a:noFill/>
+          <a:ln w="9525" cap="flat" cmpd="sng" algn="ctr">
+            <a:solidFill>
+              <a:schemeClr val="accent2"/>
+            </a:solidFill>
+            <a:prstDash val="solid"/>
+            <a:round/>
+            <a:headEnd type="none" w="med" len="med"/>
+            <a:tailEnd type="none" w="med" len="med"/>
+          </a:ln>
+        </p:spPr>
+        <p:style>
+          <a:lnRef idx="0">
+            <a:scrgbClr r="0" g="0" b="0"/>
+          </a:lnRef>
+          <a:fillRef idx="0">
+            <a:scrgbClr r="0" g="0" b="0"/>
+          </a:fillRef>
+          <a:effectRef idx="0">
+            <a:scrgbClr r="0" g="0" b="0"/>
+          </a:effectRef>
+          <a:fontRef idx="minor">
+            <a:schemeClr val="accent2"/>
+          </a:fontRef>
+        </p:style>
+        <p:txBody>
+          <a:bodyPr rtlCol="0" anchor="ctr"/>
+          <a:lstStyle/>
+          <a:p>
+            <a:pPr algn="ctr"/>
+            <a:endParaRPr lang="en-US" dirty="0"/>
+          </a:p>
+        </p:txBody>
+      </p:sp>
+      <p:sp>
+        <p:nvSpPr>
+          <p:cNvPr id="4" name="Speech Bubble: Rectangle with Corners Rounded 3">
+            <a:extLst>
+              <a:ext uri="{FF2B5EF4-FFF2-40B4-BE49-F238E27FC236}">
+                <a16:creationId xmlns:a16="http://schemas.microsoft.com/office/drawing/2014/main" id="{7EDE205F-7A5D-E9BD-56DA-89AC4D034BAD}"/>
+              </a:ext>
+              <a:ext uri="{C183D7F6-B498-43B3-948B-1728B52AA6E4}">
+                <adec:decorative xmlns:adec="http://schemas.microsoft.com/office/drawing/2017/decorative" val="1"/>
+              </a:ext>
+            </a:extLst>
+          </p:cNvPr>
+          <p:cNvSpPr/>
+          <p:nvPr/>
+        </p:nvSpPr>
+        <p:spPr>
+          <a:xfrm>
+            <a:off x="8103956" y="5254892"/>
+            <a:ext cx="2667583" cy="474765"/>
+          </a:xfrm>
+          <a:prstGeom prst="wedgeRoundRectCallout">
+            <a:avLst>
+              <a:gd name="adj1" fmla="val -141709"/>
+              <a:gd name="adj2" fmla="val 13915"/>
+              <a:gd name="adj3" fmla="val 16667"/>
+            </a:avLst>
+          </a:prstGeom>
+        </p:spPr>
+        <p:style>
+          <a:lnRef idx="2">
+            <a:schemeClr val="accent1">
+              <a:shade val="15000"/>
+            </a:schemeClr>
+          </a:lnRef>
+          <a:fillRef idx="1">
+            <a:schemeClr val="accent1"/>
+          </a:fillRef>
+          <a:effectRef idx="0">
+            <a:schemeClr val="accent1"/>
+          </a:effectRef>
+          <a:fontRef idx="minor">
+            <a:schemeClr val="lt1"/>
+          </a:fontRef>
+        </p:style>
+        <p:txBody>
+          <a:bodyPr rtlCol="0" anchor="ctr"/>
+          <a:lstStyle/>
+          <a:p>
+            <a:pPr algn="ctr"/>
+            <a:r>
+              <a:rPr lang="en-US" sz="1600" b="0" dirty="0"/>
+              <a:t>Stopping criterion from policy evaluation</a:t>
+            </a:r>
+            <a:endParaRPr lang="en-US" sz="1600" dirty="0"/>
+          </a:p>
+        </p:txBody>
+      </p:sp>
+      <p:sp>
+        <p:nvSpPr>
+          <p:cNvPr id="12" name="Rectangle 11">
+            <a:extLst>
+              <a:ext uri="{FF2B5EF4-FFF2-40B4-BE49-F238E27FC236}">
+                <a16:creationId xmlns:a16="http://schemas.microsoft.com/office/drawing/2014/main" id="{2F357B00-C899-A34F-CC4A-48E9DDA5567A}"/>
+              </a:ext>
+              <a:ext uri="{C183D7F6-B498-43B3-948B-1728B52AA6E4}">
+                <adec:decorative xmlns:adec="http://schemas.microsoft.com/office/drawing/2017/decorative" val="1"/>
+              </a:ext>
+            </a:extLst>
+          </p:cNvPr>
+          <p:cNvSpPr/>
+          <p:nvPr/>
+        </p:nvSpPr>
+        <p:spPr>
+          <a:xfrm>
+            <a:off x="4781862" y="5914693"/>
+            <a:ext cx="3729702" cy="300146"/>
+          </a:xfrm>
+          <a:prstGeom prst="rect">
+            <a:avLst/>
+          </a:prstGeom>
+          <a:noFill/>
+          <a:ln w="9525" cap="flat" cmpd="sng" algn="ctr">
+            <a:solidFill>
+              <a:schemeClr val="accent2"/>
+            </a:solidFill>
+            <a:prstDash val="solid"/>
+            <a:round/>
+            <a:headEnd type="none" w="med" len="med"/>
+            <a:tailEnd type="none" w="med" len="med"/>
+          </a:ln>
+        </p:spPr>
+        <p:style>
+          <a:lnRef idx="0">
+            <a:scrgbClr r="0" g="0" b="0"/>
+          </a:lnRef>
+          <a:fillRef idx="0">
+            <a:scrgbClr r="0" g="0" b="0"/>
+          </a:fillRef>
+          <a:effectRef idx="0">
+            <a:scrgbClr r="0" g="0" b="0"/>
+          </a:effectRef>
+          <a:fontRef idx="minor">
+            <a:schemeClr val="accent2"/>
+          </a:fontRef>
+        </p:style>
+        <p:txBody>
+          <a:bodyPr rtlCol="0" anchor="ctr"/>
+          <a:lstStyle/>
+          <a:p>
+            <a:pPr algn="ctr"/>
+            <a:endParaRPr lang="en-US" dirty="0"/>
+          </a:p>
+        </p:txBody>
+      </p:sp>
+    </p:spTree>
+    <p:extLst>
+      <p:ext uri="{BB962C8B-B14F-4D97-AF65-F5344CB8AC3E}">
+        <p14:creationId xmlns:p14="http://schemas.microsoft.com/office/powerpoint/2010/main" val="2447994159"/>
+      </p:ext>
+    </p:extLst>
+  </p:cSld>
+  <p:clrMapOvr>
+    <a:masterClrMapping/>
+  </p:clrMapOvr>
+  <p:timing>
+    <p:tnLst>
+      <p:par>
+        <p:cTn id="1" dur="indefinite" restart="never" nodeType="tmRoot">
+          <p:childTnLst>
+            <p:seq concurrent="1" nextAc="seek">
+              <p:cTn id="2" dur="indefinite" nodeType="mainSeq">
+                <p:childTnLst>
+                  <p:par>
+                    <p:cTn id="3" fill="hold">
+                      <p:stCondLst>
+                        <p:cond delay="indefinite"/>
+                      </p:stCondLst>
+                      <p:childTnLst>
+                        <p:par>
+                          <p:cTn id="4" fill="hold">
+                            <p:stCondLst>
+                              <p:cond delay="0"/>
+                            </p:stCondLst>
+                            <p:childTnLst>
+                              <p:par>
+                                <p:cTn id="5" presetID="1" presetClass="entr" presetSubtype="0" fill="hold" grpId="0" nodeType="clickEffect">
+                                  <p:stCondLst>
+                                    <p:cond delay="0"/>
+                                  </p:stCondLst>
+                                  <p:childTnLst>
+                                    <p:set>
+                                      <p:cBhvr>
+                                        <p:cTn id="6" dur="1" fill="hold">
+                                          <p:stCondLst>
+                                            <p:cond delay="0"/>
+                                          </p:stCondLst>
+                                        </p:cTn>
+                                        <p:tgtEl>
+                                          <p:spTgt spid="4"/>
+                                        </p:tgtEl>
+                                        <p:attrNameLst>
+                                          <p:attrName>style.visibility</p:attrName>
+                                        </p:attrNameLst>
+                                      </p:cBhvr>
+                                      <p:to>
+                                        <p:strVal val="visible"/>
+                                      </p:to>
+                                    </p:set>
+                                  </p:childTnLst>
+                                </p:cTn>
+                              </p:par>
+                            </p:childTnLst>
+                          </p:cTn>
+                        </p:par>
+                      </p:childTnLst>
+                    </p:cTn>
+                  </p:par>
+                  <p:par>
+                    <p:cTn id="7" fill="hold">
+                      <p:stCondLst>
+                        <p:cond delay="indefinite"/>
+                      </p:stCondLst>
+                      <p:childTnLst>
+                        <p:par>
+                          <p:cTn id="8" fill="hold">
+                            <p:stCondLst>
+                              <p:cond delay="0"/>
+                            </p:stCondLst>
+                            <p:childTnLst>
+                              <p:par>
+                                <p:cTn id="9" presetID="1" presetClass="entr" presetSubtype="0" fill="hold" grpId="0" nodeType="clickEffect">
+                                  <p:stCondLst>
+                                    <p:cond delay="0"/>
+                                  </p:stCondLst>
+                                  <p:childTnLst>
+                                    <p:set>
+                                      <p:cBhvr>
+                                        <p:cTn id="10" dur="1" fill="hold">
+                                          <p:stCondLst>
+                                            <p:cond delay="0"/>
+                                          </p:stCondLst>
+                                        </p:cTn>
+                                        <p:tgtEl>
+                                          <p:spTgt spid="6"/>
+                                        </p:tgtEl>
+                                        <p:attrNameLst>
+                                          <p:attrName>style.visibility</p:attrName>
+                                        </p:attrNameLst>
+                                      </p:cBhvr>
+                                      <p:to>
+                                        <p:strVal val="visible"/>
+                                      </p:to>
+                                    </p:set>
+                                  </p:childTnLst>
+                                </p:cTn>
+                              </p:par>
+                            </p:childTnLst>
+                          </p:cTn>
+                        </p:par>
+                      </p:childTnLst>
+                    </p:cTn>
+                  </p:par>
+                </p:childTnLst>
+              </p:cTn>
+              <p:prevCondLst>
+                <p:cond evt="onPrev" delay="0">
+                  <p:tgtEl>
+                    <p:sldTgt/>
+                  </p:tgtEl>
+                </p:cond>
+              </p:prevCondLst>
+              <p:nextCondLst>
+                <p:cond evt="onNext" delay="0">
+                  <p:tgtEl>
+                    <p:sldTgt/>
+                  </p:tgtEl>
+                </p:cond>
+              </p:nextCondLst>
+            </p:seq>
+          </p:childTnLst>
+        </p:cTn>
+      </p:par>
+    </p:tnLst>
+    <p:bldLst>
+      <p:bldP spid="6" grpId="0" animBg="1"/>
+      <p:bldP spid="4" grpId="0" animBg="1"/>
+    </p:bldLst>
+  </p:timing>
+</p:sld>
+</file>
+
+<file path=ppt/slides/slide21.xml><?xml version="1.0" encoding="utf-8"?>
+<p:sld xmlns:a="http://schemas.openxmlformats.org/drawingml/2006/main" xmlns:r="http://schemas.openxmlformats.org/officeDocument/2006/relationships" xmlns:p="http://schemas.openxmlformats.org/presentationml/2006/main">
+  <p:cSld>
+    <p:spTree>
+      <p:nvGrpSpPr>
+        <p:cNvPr id="1" name=""/>
+        <p:cNvGrpSpPr/>
+        <p:nvPr/>
+      </p:nvGrpSpPr>
+      <p:grpSpPr>
+        <a:xfrm>
+          <a:off x="0" y="0"/>
+          <a:ext cx="0" cy="0"/>
+          <a:chOff x="0" y="0"/>
+          <a:chExt cx="0" cy="0"/>
+        </a:xfrm>
+      </p:grpSpPr>
+      <p:sp>
+        <p:nvSpPr>
           <p:cNvPr id="4" name="Title 3">
             <a:extLst>
               <a:ext uri="{FF2B5EF4-FFF2-40B4-BE49-F238E27FC236}">
@@ -23277,7 +23753,7 @@
           <a:bodyPr/>
           <a:lstStyle/>
           <a:p>
-            <a:endParaRPr lang="en-US"/>
+            <a:endParaRPr lang="en-US" dirty="0"/>
           </a:p>
         </p:txBody>
       </p:sp>
@@ -23294,7 +23770,7 @@
 </p:sld>
 </file>
 
-<file path=ppt/slides/slide21.xml><?xml version="1.0" encoding="utf-8"?>
+<file path=ppt/slides/slide22.xml><?xml version="1.0" encoding="utf-8"?>
 <p:sld xmlns:a="http://schemas.openxmlformats.org/drawingml/2006/main" xmlns:r="http://schemas.openxmlformats.org/officeDocument/2006/relationships" xmlns:p="http://schemas.openxmlformats.org/presentationml/2006/main">
   <p:cSld>
     <p:spTree>
@@ -23380,7 +23856,7 @@
 </p:sld>
 </file>
 
-<file path=ppt/slides/slide22.xml><?xml version="1.0" encoding="utf-8"?>
+<file path=ppt/slides/slide23.xml><?xml version="1.0" encoding="utf-8"?>
 <p:sld xmlns:a="http://schemas.openxmlformats.org/drawingml/2006/main" xmlns:r="http://schemas.openxmlformats.org/officeDocument/2006/relationships" xmlns:p="http://schemas.openxmlformats.org/presentationml/2006/main">
   <p:cSld>
     <p:spTree>
@@ -23747,7 +24223,7 @@
 </p:sld>
 </file>
 
-<file path=ppt/slides/slide23.xml><?xml version="1.0" encoding="utf-8"?>
+<file path=ppt/slides/slide24.xml><?xml version="1.0" encoding="utf-8"?>
 <p:sld xmlns:a="http://schemas.openxmlformats.org/drawingml/2006/main" xmlns:r="http://schemas.openxmlformats.org/officeDocument/2006/relationships" xmlns:p="http://schemas.openxmlformats.org/presentationml/2006/main">
   <p:cSld>
     <p:spTree>
@@ -24004,7 +24480,7 @@
           <a:lstStyle/>
           <a:p>
             <a:pPr algn="ctr"/>
-            <a:endParaRPr lang="en-US"/>
+            <a:endParaRPr lang="en-US" dirty="0"/>
           </a:p>
         </p:txBody>
       </p:sp>
@@ -24071,7 +24547,7 @@
 </p:sld>
 </file>
 
-<file path=ppt/slides/slide24.xml><?xml version="1.0" encoding="utf-8"?>
+<file path=ppt/slides/slide25.xml><?xml version="1.0" encoding="utf-8"?>
 <p:sld xmlns:a="http://schemas.openxmlformats.org/drawingml/2006/main" xmlns:r="http://schemas.openxmlformats.org/officeDocument/2006/relationships" xmlns:p="http://schemas.openxmlformats.org/presentationml/2006/main">
   <p:cSld>
     <p:spTree>
@@ -24587,7 +25063,7 @@
 </p:sld>
 </file>
 
-<file path=ppt/slides/slide25.xml><?xml version="1.0" encoding="utf-8"?>
+<file path=ppt/slides/slide26.xml><?xml version="1.0" encoding="utf-8"?>
 <p:sld xmlns:a="http://schemas.openxmlformats.org/drawingml/2006/main" xmlns:r="http://schemas.openxmlformats.org/officeDocument/2006/relationships" xmlns:p="http://schemas.openxmlformats.org/presentationml/2006/main">
   <p:cSld>
     <p:bg>
@@ -24675,7 +25151,7 @@
           <a:lstStyle/>
           <a:p>
             <a:pPr algn="ctr"/>
-            <a:endParaRPr lang="en-US"/>
+            <a:endParaRPr lang="en-US" dirty="0"/>
           </a:p>
         </p:txBody>
       </p:sp>
@@ -29797,7 +30273,7 @@
             <a:lstStyle/>
             <a:p>
               <a:pPr algn="ctr"/>
-              <a:endParaRPr lang="en-US"/>
+              <a:endParaRPr lang="en-US" dirty="0"/>
             </a:p>
           </p:txBody>
         </p:sp>
@@ -30148,7 +30624,7 @@
             <a:lstStyle/>
             <a:p>
               <a:pPr algn="ctr"/>
-              <a:endParaRPr lang="en-US"/>
+              <a:endParaRPr lang="en-US" dirty="0"/>
             </a:p>
           </p:txBody>
         </p:sp>
@@ -34855,7 +35331,7 @@
                 <a:lstStyle/>
                 <a:p>
                   <a:pPr algn="ctr"/>
-                  <a:endParaRPr lang="en-US"/>
+                  <a:endParaRPr lang="en-US" dirty="0"/>
                 </a:p>
               </p:txBody>
             </p:sp>

--- a/slides/Lecture_Chapter04.pptx
+++ b/slides/Lecture_Chapter04.pptx
@@ -14,10 +14,10 @@
     <p:sldId id="372" r:id="rId8"/>
     <p:sldId id="369" r:id="rId9"/>
     <p:sldId id="370" r:id="rId10"/>
-    <p:sldId id="389" r:id="rId11"/>
-    <p:sldId id="390" r:id="rId12"/>
-    <p:sldId id="371" r:id="rId13"/>
-    <p:sldId id="480" r:id="rId14"/>
+    <p:sldId id="487" r:id="rId11"/>
+    <p:sldId id="389" r:id="rId12"/>
+    <p:sldId id="390" r:id="rId13"/>
+    <p:sldId id="371" r:id="rId14"/>
     <p:sldId id="373" r:id="rId15"/>
     <p:sldId id="375" r:id="rId16"/>
     <p:sldId id="376" r:id="rId17"/>
@@ -25,12 +25,15 @@
     <p:sldId id="378" r:id="rId19"/>
     <p:sldId id="379" r:id="rId20"/>
     <p:sldId id="382" r:id="rId21"/>
-    <p:sldId id="479" r:id="rId22"/>
+    <p:sldId id="486" r:id="rId22"/>
     <p:sldId id="384" r:id="rId23"/>
     <p:sldId id="385" r:id="rId24"/>
-    <p:sldId id="383" r:id="rId25"/>
-    <p:sldId id="386" r:id="rId26"/>
-    <p:sldId id="387" r:id="rId27"/>
+    <p:sldId id="480" r:id="rId25"/>
+    <p:sldId id="488" r:id="rId26"/>
+    <p:sldId id="386" r:id="rId27"/>
+    <p:sldId id="383" r:id="rId28"/>
+    <p:sldId id="489" r:id="rId29"/>
+    <p:sldId id="387" r:id="rId30"/>
   </p:sldIdLst>
   <p:sldSz cx="12192000" cy="6858000"/>
   <p:notesSz cx="6858000" cy="9144000"/>
@@ -151,10 +154,10 @@
             <p14:sldId id="372"/>
             <p14:sldId id="369"/>
             <p14:sldId id="370"/>
+            <p14:sldId id="487"/>
             <p14:sldId id="389"/>
             <p14:sldId id="390"/>
             <p14:sldId id="371"/>
-            <p14:sldId id="480"/>
           </p14:sldIdLst>
         </p14:section>
         <p14:section name="Policy Iteration" id="{4DE153CC-8DA8-4101-A46B-0DFD73F9B57D}">
@@ -170,15 +173,18 @@
             <p14:sldId id="378"/>
             <p14:sldId id="379"/>
             <p14:sldId id="382"/>
-            <p14:sldId id="479"/>
+            <p14:sldId id="486"/>
           </p14:sldIdLst>
         </p14:section>
         <p14:section name="Generalized Policy Iteration" id="{24242526-B5FF-45B4-A80E-CA85C1F5783D}">
           <p14:sldIdLst>
             <p14:sldId id="384"/>
             <p14:sldId id="385"/>
+            <p14:sldId id="480"/>
+            <p14:sldId id="488"/>
+            <p14:sldId id="386"/>
             <p14:sldId id="383"/>
-            <p14:sldId id="386"/>
+            <p14:sldId id="489"/>
           </p14:sldIdLst>
         </p14:section>
         <p14:section name="Summary" id="{6AC1C20A-A1BF-4444-80D7-F422EA17542D}">
@@ -1424,7 +1430,7 @@
           <a:p>
             <a:fld id="{3E22BF2E-04DA-469E-97C5-BB68A0368813}" type="datetimeFigureOut">
               <a:rPr lang="en-US" smtClean="0"/>
-              <a:t>10/22/2026</a:t>
+              <a:t>10/23/2026</a:t>
             </a:fld>
             <a:endParaRPr lang="en-US" dirty="0"/>
           </a:p>
@@ -1622,7 +1628,7 @@
           <a:p>
             <a:fld id="{3E22BF2E-04DA-469E-97C5-BB68A0368813}" type="datetimeFigureOut">
               <a:rPr lang="en-US" smtClean="0"/>
-              <a:t>10/22/2026</a:t>
+              <a:t>10/23/2026</a:t>
             </a:fld>
             <a:endParaRPr lang="en-US" dirty="0"/>
           </a:p>
@@ -1830,7 +1836,7 @@
           <a:p>
             <a:fld id="{3E22BF2E-04DA-469E-97C5-BB68A0368813}" type="datetimeFigureOut">
               <a:rPr lang="en-US" smtClean="0"/>
-              <a:t>10/22/2026</a:t>
+              <a:t>10/23/2026</a:t>
             </a:fld>
             <a:endParaRPr lang="en-US" dirty="0"/>
           </a:p>
@@ -2038,7 +2044,7 @@
           <a:p>
             <a:fld id="{3E22BF2E-04DA-469E-97C5-BB68A0368813}" type="datetimeFigureOut">
               <a:rPr lang="en-US" smtClean="0"/>
-              <a:t>10/22/2026</a:t>
+              <a:t>10/23/2026</a:t>
             </a:fld>
             <a:endParaRPr lang="en-US" dirty="0"/>
           </a:p>
@@ -2313,7 +2319,7 @@
           <a:p>
             <a:fld id="{3E22BF2E-04DA-469E-97C5-BB68A0368813}" type="datetimeFigureOut">
               <a:rPr lang="en-US" smtClean="0"/>
-              <a:t>10/22/2026</a:t>
+              <a:t>10/23/2026</a:t>
             </a:fld>
             <a:endParaRPr lang="en-US" dirty="0"/>
           </a:p>
@@ -2578,7 +2584,7 @@
           <a:p>
             <a:fld id="{3E22BF2E-04DA-469E-97C5-BB68A0368813}" type="datetimeFigureOut">
               <a:rPr lang="en-US" smtClean="0"/>
-              <a:t>10/22/2026</a:t>
+              <a:t>10/23/2026</a:t>
             </a:fld>
             <a:endParaRPr lang="en-US" dirty="0"/>
           </a:p>
@@ -2990,7 +2996,7 @@
           <a:p>
             <a:fld id="{3E22BF2E-04DA-469E-97C5-BB68A0368813}" type="datetimeFigureOut">
               <a:rPr lang="en-US" smtClean="0"/>
-              <a:t>10/22/2026</a:t>
+              <a:t>10/23/2026</a:t>
             </a:fld>
             <a:endParaRPr lang="en-US" dirty="0"/>
           </a:p>
@@ -3131,7 +3137,7 @@
           <a:p>
             <a:fld id="{3E22BF2E-04DA-469E-97C5-BB68A0368813}" type="datetimeFigureOut">
               <a:rPr lang="en-US" smtClean="0"/>
-              <a:t>10/22/2026</a:t>
+              <a:t>10/23/2026</a:t>
             </a:fld>
             <a:endParaRPr lang="en-US" dirty="0"/>
           </a:p>
@@ -3244,7 +3250,7 @@
           <a:p>
             <a:fld id="{3E22BF2E-04DA-469E-97C5-BB68A0368813}" type="datetimeFigureOut">
               <a:rPr lang="en-US" smtClean="0"/>
-              <a:t>10/22/2026</a:t>
+              <a:t>10/23/2026</a:t>
             </a:fld>
             <a:endParaRPr lang="en-US" dirty="0"/>
           </a:p>
@@ -3555,7 +3561,7 @@
           <a:p>
             <a:fld id="{3E22BF2E-04DA-469E-97C5-BB68A0368813}" type="datetimeFigureOut">
               <a:rPr lang="en-US" smtClean="0"/>
-              <a:t>10/22/2026</a:t>
+              <a:t>10/23/2026</a:t>
             </a:fld>
             <a:endParaRPr lang="en-US" dirty="0"/>
           </a:p>
@@ -3843,7 +3849,7 @@
           <a:p>
             <a:fld id="{3E22BF2E-04DA-469E-97C5-BB68A0368813}" type="datetimeFigureOut">
               <a:rPr lang="en-US" smtClean="0"/>
-              <a:t>10/22/2026</a:t>
+              <a:t>10/23/2026</a:t>
             </a:fld>
             <a:endParaRPr lang="en-US" dirty="0"/>
           </a:p>
@@ -4084,7 +4090,7 @@
           <a:p>
             <a:fld id="{3E22BF2E-04DA-469E-97C5-BB68A0368813}" type="datetimeFigureOut">
               <a:rPr lang="en-US" smtClean="0"/>
-              <a:t>10/22/2026</a:t>
+              <a:t>10/23/2026</a:t>
             </a:fld>
             <a:endParaRPr lang="en-US" dirty="0"/>
           </a:p>
@@ -5218,6 +5224,130 @@
 </file>
 
 <file path=ppt/slides/slide10.xml><?xml version="1.0" encoding="utf-8"?>
+<p:sld xmlns:a="http://schemas.openxmlformats.org/drawingml/2006/main" xmlns:r="http://schemas.openxmlformats.org/officeDocument/2006/relationships" xmlns:p="http://schemas.openxmlformats.org/presentationml/2006/main">
+  <p:cSld>
+    <p:spTree>
+      <p:nvGrpSpPr>
+        <p:cNvPr id="1" name="">
+          <a:extLst>
+            <a:ext uri="{FF2B5EF4-FFF2-40B4-BE49-F238E27FC236}">
+              <a16:creationId xmlns:a16="http://schemas.microsoft.com/office/drawing/2014/main" id="{CF2E4B7A-89FE-A1BC-9FBD-EB62A35EA31A}"/>
+            </a:ext>
+          </a:extLst>
+        </p:cNvPr>
+        <p:cNvGrpSpPr/>
+        <p:nvPr/>
+      </p:nvGrpSpPr>
+      <p:grpSpPr>
+        <a:xfrm>
+          <a:off x="0" y="0"/>
+          <a:ext cx="0" cy="0"/>
+          <a:chOff x="0" y="0"/>
+          <a:chExt cx="0" cy="0"/>
+        </a:xfrm>
+      </p:grpSpPr>
+      <p:sp>
+        <p:nvSpPr>
+          <p:cNvPr id="4" name="Title 3">
+            <a:extLst>
+              <a:ext uri="{FF2B5EF4-FFF2-40B4-BE49-F238E27FC236}">
+                <a16:creationId xmlns:a16="http://schemas.microsoft.com/office/drawing/2014/main" id="{C538E76F-A067-CD61-FA3C-C9181A292775}"/>
+              </a:ext>
+            </a:extLst>
+          </p:cNvPr>
+          <p:cNvSpPr>
+            <a:spLocks noGrp="1"/>
+          </p:cNvSpPr>
+          <p:nvPr>
+            <p:ph type="title"/>
+          </p:nvPr>
+        </p:nvSpPr>
+        <p:spPr>
+          <a:xfrm>
+            <a:off x="1105486" y="2766218"/>
+            <a:ext cx="10515600" cy="1168047"/>
+          </a:xfrm>
+        </p:spPr>
+        <p:txBody>
+          <a:bodyPr>
+            <a:normAutofit fontScale="90000"/>
+          </a:bodyPr>
+          <a:lstStyle/>
+          <a:p>
+            <a:r>
+              <a:rPr lang="en-US" b="1" dirty="0"/>
+              <a:t>Code example: </a:t>
+            </a:r>
+            <a:r>
+              <a:rPr lang="en-US" dirty="0"/>
+              <a:t>Policy evaluation for a 2-State MDP as a linear program in Excel.</a:t>
+            </a:r>
+            <a:br>
+              <a:rPr lang="en-US" dirty="0"/>
+            </a:br>
+            <a:endParaRPr lang="en-US" dirty="0"/>
+          </a:p>
+        </p:txBody>
+      </p:sp>
+      <p:sp>
+        <p:nvSpPr>
+          <p:cNvPr id="5" name="TextBox 4">
+            <a:extLst>
+              <a:ext uri="{FF2B5EF4-FFF2-40B4-BE49-F238E27FC236}">
+                <a16:creationId xmlns:a16="http://schemas.microsoft.com/office/drawing/2014/main" id="{708E11EA-CD06-1AFD-B88D-C29C25068BEE}"/>
+              </a:ext>
+            </a:extLst>
+          </p:cNvPr>
+          <p:cNvSpPr txBox="1"/>
+          <p:nvPr/>
+        </p:nvSpPr>
+        <p:spPr>
+          <a:xfrm>
+            <a:off x="1191065" y="6011594"/>
+            <a:ext cx="8811064" cy="307777"/>
+          </a:xfrm>
+          <a:prstGeom prst="rect">
+            <a:avLst/>
+          </a:prstGeom>
+          <a:noFill/>
+        </p:spPr>
+        <p:txBody>
+          <a:bodyPr wrap="square" rtlCol="0">
+            <a:spAutoFit/>
+          </a:bodyPr>
+          <a:lstStyle/>
+          <a:p>
+            <a:r>
+              <a:rPr lang="en-US" sz="1400" dirty="0"/>
+              <a:t>See Code on </a:t>
+            </a:r>
+            <a:r>
+              <a:rPr lang="en-US" sz="1400" dirty="0">
+                <a:hlinkClick r:id="rId2"/>
+              </a:rPr>
+              <a:t>https://michael.hahsler.net/Introduction_to_Reinforcement_Learning/</a:t>
+            </a:r>
+            <a:r>
+              <a:rPr lang="en-US" sz="1400" dirty="0"/>
+              <a:t> </a:t>
+            </a:r>
+          </a:p>
+        </p:txBody>
+      </p:sp>
+    </p:spTree>
+    <p:extLst>
+      <p:ext uri="{BB962C8B-B14F-4D97-AF65-F5344CB8AC3E}">
+        <p14:creationId xmlns:p14="http://schemas.microsoft.com/office/powerpoint/2010/main" val="3111094621"/>
+      </p:ext>
+    </p:extLst>
+  </p:cSld>
+  <p:clrMapOvr>
+    <a:masterClrMapping/>
+  </p:clrMapOvr>
+</p:sld>
+</file>
+
+<file path=ppt/slides/slide11.xml><?xml version="1.0" encoding="utf-8"?>
 <p:sld xmlns:a="http://schemas.openxmlformats.org/drawingml/2006/main" xmlns:r="http://schemas.openxmlformats.org/officeDocument/2006/relationships" xmlns:p="http://schemas.openxmlformats.org/presentationml/2006/main">
   <p:cSld>
     <p:spTree>
@@ -8133,7 +8263,7 @@
 </p:sld>
 </file>
 
-<file path=ppt/slides/slide11.xml><?xml version="1.0" encoding="utf-8"?>
+<file path=ppt/slides/slide12.xml><?xml version="1.0" encoding="utf-8"?>
 <p:sld xmlns:a="http://schemas.openxmlformats.org/drawingml/2006/main" xmlns:r="http://schemas.openxmlformats.org/officeDocument/2006/relationships" xmlns:p="http://schemas.openxmlformats.org/presentationml/2006/main">
   <p:cSld>
     <p:spTree>
@@ -8178,8 +8308,8 @@
           </a:p>
         </p:txBody>
       </p:sp>
-      <mc:AlternateContent xmlns:mc="http://schemas.openxmlformats.org/markup-compatibility/2006">
-        <mc:Choice xmlns:a14="http://schemas.microsoft.com/office/drawing/2010/main" Requires="a14">
+      <mc:AlternateContent xmlns:mc="http://schemas.openxmlformats.org/markup-compatibility/2006" xmlns:a14="http://schemas.microsoft.com/office/drawing/2010/main">
+        <mc:Choice Requires="a14">
           <p:sp>
             <p:nvSpPr>
               <p:cNvPr id="3" name="Content Placeholder 2" descr="The Bellman update can be rewritten as an operator: Bellman Expectation Operator T to the power pi :. (T to the power pi v) (s) equals the sum over a, of pi (a given s) the sum over s prime,r, of p (s prime,r | s,a)[r plus gamma v (s prime)]. The Fixed Point Property: The value function is unchanged if all state values are already consistent. v sub pi equals T to the power pi (v sub pi). The Contraction Property: The operator T to the power pi is gamma -contracting (see textbook for derivation): the norm of T to the power pi u minus T to the power pi v sub infinity is less than or equal to gamma the norm of u minus v sub infinity for any gamma is less than 1 I.e. : Applying T to the power pi reduces the largest difference (infinity norm) between any arbitrary value functions u and v by at least a factor of gamma. This implies: the norm of v sub pi minus T to the power pi v sub infinity is less than or equal to gamma the norm of v sub pi minus v sub infinity for any gamma is less than 1">
@@ -8620,7 +8750,7 @@
             </p:txBody>
           </p:sp>
         </mc:Choice>
-        <mc:Fallback>
+        <mc:Fallback xmlns="">
           <p:sp>
             <p:nvSpPr>
               <p:cNvPr id="3" name="Content Placeholder 2" descr="The Bellman update can be rewritten as an operator: Bellman Expectation Operator T to the power pi :. (T to the power pi v) (s) equals the sum over a, of pi (a given s) the sum over s prime,r, of p (s prime,r | s,a)[r plus gamma v (s prime)]. The Fixed Point Property: The value function is unchanged if all state values are already consistent. v sub pi equals T to the power pi (v sub pi). The Contraction Property: The operator T to the power pi is gamma -contracting (see textbook for derivation): the norm of T to the power pi u minus T to the power pi v sub infinity is less than or equal to gamma the norm of u minus v sub infinity for any gamma is less than 1 I.e. : Applying T to the power pi reduces the largest difference (infinity norm) between any arbitrary value functions u and v by at least a factor of gamma. This implies: the norm of v sub pi minus T to the power pi v sub infinity is less than or equal to gamma the norm of v sub pi minus v sub infinity for any gamma is less than 1">
@@ -8664,8 +8794,8 @@
           </p:sp>
         </mc:Fallback>
       </mc:AlternateContent>
-      <mc:AlternateContent xmlns:mc="http://schemas.openxmlformats.org/markup-compatibility/2006">
-        <mc:Choice xmlns:a14="http://schemas.microsoft.com/office/drawing/2010/main" Requires="a14">
+      <mc:AlternateContent xmlns:mc="http://schemas.openxmlformats.org/markup-compatibility/2006" xmlns:a14="http://schemas.microsoft.com/office/drawing/2010/main">
+        <mc:Choice Requires="a14">
           <p:sp>
             <p:nvSpPr>
               <p:cNvPr id="5" name="Speech Bubble: Rectangle with Corners Rounded 4" descr="Convergence if gamma is less than 1 : T to the power pi T to the power pi T to the power pi dot dot dot T to the power pi v to v sub pi for any v">
@@ -8905,7 +9035,7 @@
             </p:txBody>
           </p:sp>
         </mc:Choice>
-        <mc:Fallback>
+        <mc:Fallback xmlns="">
           <p:sp>
             <p:nvSpPr>
               <p:cNvPr id="5" name="Speech Bubble: Rectangle with Corners Rounded 4" descr="Convergence if gamma is less than 1 : T to the power pi T to the power pi T to the power pi dot dot dot T to the power pi v to v sub pi for any v">
@@ -8954,8 +9084,8 @@
           </p:sp>
         </mc:Fallback>
       </mc:AlternateContent>
-      <mc:AlternateContent xmlns:mc="http://schemas.openxmlformats.org/markup-compatibility/2006">
-        <mc:Choice xmlns:a14="http://schemas.microsoft.com/office/drawing/2010/main" Requires="a14">
+      <mc:AlternateContent xmlns:mc="http://schemas.openxmlformats.org/markup-compatibility/2006" xmlns:a14="http://schemas.microsoft.com/office/drawing/2010/main">
+        <mc:Choice Requires="a14">
           <p:sp>
             <p:nvSpPr>
               <p:cNvPr id="6" name="TextBox 5" descr="Notation:. (T to the power pi v) is the new value function after applying the operator. We could write v sub k plus 1, equals T to the power pi (v sub k)">
@@ -9161,7 +9291,7 @@
             </p:txBody>
           </p:sp>
         </mc:Choice>
-        <mc:Fallback>
+        <mc:Fallback xmlns="">
           <p:sp>
             <p:nvSpPr>
               <p:cNvPr id="6" name="TextBox 5" descr="Notation:. (T to the power pi v) is the new value function after applying the operator. We could write v sub k plus 1, equals T to the power pi (v sub k)">
@@ -11299,8 +11429,8 @@
           </mc:Fallback>
         </mc:AlternateContent>
       </p:grpSp>
-      <mc:AlternateContent xmlns:mc="http://schemas.openxmlformats.org/markup-compatibility/2006">
-        <mc:Choice xmlns:a14="http://schemas.microsoft.com/office/drawing/2010/main" Requires="a14">
+      <mc:AlternateContent xmlns:mc="http://schemas.openxmlformats.org/markup-compatibility/2006" xmlns:a14="http://schemas.microsoft.com/office/drawing/2010/main">
+        <mc:Choice Requires="a14">
           <p:sp>
             <p:nvSpPr>
               <p:cNvPr id="7" name="TextBox 6">
@@ -11464,7 +11594,7 @@
             </p:txBody>
           </p:sp>
         </mc:Choice>
-        <mc:Fallback>
+        <mc:Fallback xmlns="">
           <p:sp>
             <p:nvSpPr>
               <p:cNvPr id="7" name="TextBox 6">
@@ -11509,8 +11639,8 @@
           </p:sp>
         </mc:Fallback>
       </mc:AlternateContent>
-      <mc:AlternateContent xmlns:mc="http://schemas.openxmlformats.org/markup-compatibility/2006">
-        <mc:Choice xmlns:a14="http://schemas.microsoft.com/office/drawing/2010/main" Requires="a14">
+      <mc:AlternateContent xmlns:mc="http://schemas.openxmlformats.org/markup-compatibility/2006" xmlns:a14="http://schemas.microsoft.com/office/drawing/2010/main">
+        <mc:Choice Requires="a14">
           <p:sp>
             <p:nvSpPr>
               <p:cNvPr id="24" name="TextBox 23">
@@ -11911,7 +12041,7 @@
             </p:txBody>
           </p:sp>
         </mc:Choice>
-        <mc:Fallback>
+        <mc:Fallback xmlns="">
           <p:sp>
             <p:nvSpPr>
               <p:cNvPr id="24" name="TextBox 23">
@@ -11956,8 +12086,8 @@
           </p:sp>
         </mc:Fallback>
       </mc:AlternateContent>
-      <mc:AlternateContent xmlns:mc="http://schemas.openxmlformats.org/markup-compatibility/2006">
-        <mc:Choice xmlns:a14="http://schemas.microsoft.com/office/drawing/2010/main" Requires="a14">
+      <mc:AlternateContent xmlns:mc="http://schemas.openxmlformats.org/markup-compatibility/2006" xmlns:a14="http://schemas.microsoft.com/office/drawing/2010/main">
+        <mc:Choice Requires="a14">
           <p:sp>
             <p:nvSpPr>
               <p:cNvPr id="29" name="TextBox 28">
@@ -12201,7 +12331,7 @@
             </p:txBody>
           </p:sp>
         </mc:Choice>
-        <mc:Fallback>
+        <mc:Fallback xmlns="">
           <p:sp>
             <p:nvSpPr>
               <p:cNvPr id="29" name="TextBox 28">
@@ -12502,7 +12632,7 @@
 </p:sld>
 </file>
 
-<file path=ppt/slides/slide12.xml><?xml version="1.0" encoding="utf-8"?>
+<file path=ppt/slides/slide13.xml><?xml version="1.0" encoding="utf-8"?>
 <p:sld xmlns:a="http://schemas.openxmlformats.org/drawingml/2006/main" xmlns:r="http://schemas.openxmlformats.org/officeDocument/2006/relationships" xmlns:p="http://schemas.openxmlformats.org/presentationml/2006/main">
   <p:cSld>
     <p:spTree>
@@ -13635,222 +13765,6 @@
       <p:bldP spid="8" grpId="0" animBg="1"/>
     </p:bldLst>
   </p:timing>
-</p:sld>
-</file>
-
-<file path=ppt/slides/slide13.xml><?xml version="1.0" encoding="utf-8"?>
-<p:sld xmlns:a="http://schemas.openxmlformats.org/drawingml/2006/main" xmlns:r="http://schemas.openxmlformats.org/officeDocument/2006/relationships" xmlns:p="http://schemas.openxmlformats.org/presentationml/2006/main">
-  <p:cSld>
-    <p:spTree>
-      <p:nvGrpSpPr>
-        <p:cNvPr id="1" name=""/>
-        <p:cNvGrpSpPr/>
-        <p:nvPr/>
-      </p:nvGrpSpPr>
-      <p:grpSpPr>
-        <a:xfrm>
-          <a:off x="0" y="0"/>
-          <a:ext cx="0" cy="0"/>
-          <a:chOff x="0" y="0"/>
-          <a:chExt cx="0" cy="0"/>
-        </a:xfrm>
-      </p:grpSpPr>
-      <p:sp>
-        <p:nvSpPr>
-          <p:cNvPr id="2" name="Title 1">
-            <a:extLst>
-              <a:ext uri="{FF2B5EF4-FFF2-40B4-BE49-F238E27FC236}">
-                <a16:creationId xmlns:a16="http://schemas.microsoft.com/office/drawing/2014/main" id="{63AB4F15-1BAA-E34A-C756-20976A500CB1}"/>
-              </a:ext>
-            </a:extLst>
-          </p:cNvPr>
-          <p:cNvSpPr>
-            <a:spLocks noGrp="1"/>
-          </p:cNvSpPr>
-          <p:nvPr>
-            <p:ph type="title"/>
-          </p:nvPr>
-        </p:nvSpPr>
-        <p:spPr/>
-        <p:txBody>
-          <a:bodyPr/>
-          <a:lstStyle/>
-          <a:p>
-            <a:r>
-              <a:rPr lang="en-US" dirty="0"/>
-              <a:t>More on Convergence</a:t>
-            </a:r>
-          </a:p>
-        </p:txBody>
-      </p:sp>
-      <mc:AlternateContent xmlns:mc="http://schemas.openxmlformats.org/markup-compatibility/2006">
-        <mc:Choice xmlns:a14="http://schemas.microsoft.com/office/drawing/2010/main" Requires="a14">
-          <p:sp>
-            <p:nvSpPr>
-              <p:cNvPr id="3" name="Content Placeholder 2">
-                <a:extLst>
-                  <a:ext uri="{FF2B5EF4-FFF2-40B4-BE49-F238E27FC236}">
-                    <a16:creationId xmlns:a16="http://schemas.microsoft.com/office/drawing/2014/main" id="{B19B88DF-BBBD-581D-8BC9-011B1D14AED2}"/>
-                  </a:ext>
-                </a:extLst>
-              </p:cNvPr>
-              <p:cNvSpPr>
-                <a:spLocks noGrp="1"/>
-              </p:cNvSpPr>
-              <p:nvPr>
-                <p:ph idx="1"/>
-              </p:nvPr>
-            </p:nvSpPr>
-            <p:spPr/>
-            <p:txBody>
-              <a:bodyPr>
-                <a:normAutofit/>
-              </a:bodyPr>
-              <a:lstStyle/>
-              <a:p>
-                <a:pPr marL="0" indent="0">
-                  <a:buNone/>
-                </a:pPr>
-                <a:r>
-                  <a:rPr lang="en-US" dirty="0"/>
-                  <a:t>Policy evaluation and all algorithms built on the idea always converge for:</a:t>
-                </a:r>
-              </a:p>
-              <a:p>
-                <a:pPr marL="0" indent="0">
-                  <a:buNone/>
-                </a:pPr>
-                <a:endParaRPr lang="en-US" dirty="0"/>
-              </a:p>
-              <a:p>
-                <a:pPr marL="514350" indent="-514350">
-                  <a:buFont typeface="+mj-lt"/>
-                  <a:buAutoNum type="arabicPeriod"/>
-                </a:pPr>
-                <a:r>
-                  <a:rPr lang="en-US" b="0" dirty="0"/>
-                  <a:t> </a:t>
-                </a:r>
-                <a14:m>
-                  <m:oMath xmlns:m="http://schemas.openxmlformats.org/officeDocument/2006/math">
-                    <m:r>
-                      <a:rPr lang="en-US" b="0" i="1" smtClean="0">
-                        <a:latin typeface="Cambria Math" panose="02040503050406030204" pitchFamily="18" charset="0"/>
-                      </a:rPr>
-                      <m:t>𝛾</m:t>
-                    </m:r>
-                    <m:r>
-                      <a:rPr lang="en-US" b="0" i="1" smtClean="0">
-                        <a:latin typeface="Cambria Math" panose="02040503050406030204" pitchFamily="18" charset="0"/>
-                      </a:rPr>
-                      <m:t>&lt;1</m:t>
-                    </m:r>
-                  </m:oMath>
-                </a14:m>
-                <a:r>
-                  <a:rPr lang="en-US" b="0" dirty="0"/>
-                  <a:t> </a:t>
-                </a:r>
-              </a:p>
-              <a:p>
-                <a:pPr marL="514350" indent="-514350">
-                  <a:buFont typeface="+mj-lt"/>
-                  <a:buAutoNum type="arabicPeriod"/>
-                </a:pPr>
-                <a:r>
-                  <a:rPr lang="en-US" dirty="0"/>
-                  <a:t> </a:t>
-                </a:r>
-                <a14:m>
-                  <m:oMath xmlns:m="http://schemas.openxmlformats.org/officeDocument/2006/math">
-                    <m:r>
-                      <a:rPr lang="en-US" b="0" i="1" smtClean="0">
-                        <a:latin typeface="Cambria Math" panose="02040503050406030204" pitchFamily="18" charset="0"/>
-                      </a:rPr>
-                      <m:t>𝛾</m:t>
-                    </m:r>
-                    <m:r>
-                      <a:rPr lang="en-US" b="0" i="1" smtClean="0">
-                        <a:latin typeface="Cambria Math" panose="02040503050406030204" pitchFamily="18" charset="0"/>
-                      </a:rPr>
-                      <m:t>=1</m:t>
-                    </m:r>
-                  </m:oMath>
-                </a14:m>
-                <a:r>
-                  <a:rPr lang="en-US" dirty="0"/>
-                  <a:t> and a terminating policy*</a:t>
-                </a:r>
-              </a:p>
-              <a:p>
-                <a:pPr marL="514350" indent="-514350">
-                  <a:buFont typeface="+mj-lt"/>
-                  <a:buAutoNum type="arabicPeriod"/>
-                </a:pPr>
-                <a:endParaRPr lang="en-US" dirty="0"/>
-              </a:p>
-              <a:p>
-                <a:pPr marL="0" indent="0">
-                  <a:buNone/>
-                </a:pPr>
-                <a:r>
-                  <a:rPr lang="en-US" sz="2400" dirty="0"/>
-                  <a:t>* The evaluated policy must always reach a terminating state to end the episode.</a:t>
-                </a:r>
-              </a:p>
-            </p:txBody>
-          </p:sp>
-        </mc:Choice>
-        <mc:Fallback>
-          <p:sp>
-            <p:nvSpPr>
-              <p:cNvPr id="3" name="Content Placeholder 2">
-                <a:extLst>
-                  <a:ext uri="{FF2B5EF4-FFF2-40B4-BE49-F238E27FC236}">
-                    <a16:creationId xmlns:a16="http://schemas.microsoft.com/office/drawing/2014/main" id="{B19B88DF-BBBD-581D-8BC9-011B1D14AED2}"/>
-                  </a:ext>
-                </a:extLst>
-              </p:cNvPr>
-              <p:cNvSpPr>
-                <a:spLocks noGrp="1" noRot="1" noChangeAspect="1" noMove="1" noResize="1" noEditPoints="1" noAdjustHandles="1" noChangeArrowheads="1" noChangeShapeType="1" noTextEdit="1"/>
-              </p:cNvSpPr>
-              <p:nvPr>
-                <p:ph idx="1"/>
-              </p:nvPr>
-            </p:nvSpPr>
-            <p:spPr>
-              <a:blipFill>
-                <a:blip r:embed="rId2"/>
-                <a:stretch>
-                  <a:fillRect l="-1217" t="-2168"/>
-                </a:stretch>
-              </a:blipFill>
-            </p:spPr>
-            <p:txBody>
-              <a:bodyPr/>
-              <a:lstStyle/>
-              <a:p>
-                <a:r>
-                  <a:rPr lang="en-US">
-                    <a:noFill/>
-                  </a:rPr>
-                  <a:t> </a:t>
-                </a:r>
-              </a:p>
-            </p:txBody>
-          </p:sp>
-        </mc:Fallback>
-      </mc:AlternateContent>
-    </p:spTree>
-    <p:extLst>
-      <p:ext uri="{BB962C8B-B14F-4D97-AF65-F5344CB8AC3E}">
-        <p14:creationId xmlns:p14="http://schemas.microsoft.com/office/powerpoint/2010/main" val="4156439938"/>
-      </p:ext>
-    </p:extLst>
-  </p:cSld>
-  <p:clrMapOvr>
-    <a:masterClrMapping/>
-  </p:clrMapOvr>
 </p:sld>
 </file>
 
@@ -23706,7 +23620,7 @@
           <p:cNvPr id="4" name="Title 3">
             <a:extLst>
               <a:ext uri="{FF2B5EF4-FFF2-40B4-BE49-F238E27FC236}">
-                <a16:creationId xmlns:a16="http://schemas.microsoft.com/office/drawing/2014/main" id="{0930CFB0-D2B7-437F-8981-207DBA2A813F}"/>
+                <a16:creationId xmlns:a16="http://schemas.microsoft.com/office/drawing/2014/main" id="{24CD2877-1046-6123-CF1E-BE9F2D8536CB}"/>
               </a:ext>
             </a:extLst>
           </p:cNvPr>
@@ -23717,50 +23631,82 @@
             <p:ph type="title"/>
           </p:nvPr>
         </p:nvSpPr>
-        <p:spPr/>
+        <p:spPr>
+          <a:xfrm>
+            <a:off x="1105486" y="2766218"/>
+            <a:ext cx="10515600" cy="1168047"/>
+          </a:xfrm>
+        </p:spPr>
         <p:txBody>
-          <a:bodyPr/>
+          <a:bodyPr>
+            <a:normAutofit fontScale="90000"/>
+          </a:bodyPr>
           <a:lstStyle/>
           <a:p>
             <a:r>
+              <a:rPr lang="en-US" b="1" dirty="0"/>
+              <a:t>Code example: </a:t>
+            </a:r>
+            <a:r>
               <a:rPr lang="en-US" dirty="0"/>
-              <a:t>Code…</a:t>
+              <a:t>Algorithm Implementation (Policy and Value Iteration)</a:t>
             </a:r>
+            <a:br>
+              <a:rPr lang="en-US" dirty="0"/>
+            </a:br>
+            <a:endParaRPr lang="en-US" dirty="0"/>
           </a:p>
         </p:txBody>
       </p:sp>
       <p:sp>
         <p:nvSpPr>
-          <p:cNvPr id="5" name="Text Placeholder 4">
+          <p:cNvPr id="5" name="TextBox 4">
             <a:extLst>
               <a:ext uri="{FF2B5EF4-FFF2-40B4-BE49-F238E27FC236}">
-                <a16:creationId xmlns:a16="http://schemas.microsoft.com/office/drawing/2014/main" id="{6BF9353D-E2F6-5C2D-E559-4D7DA584DF5F}"/>
-              </a:ext>
-              <a:ext uri="{C183D7F6-B498-43B3-948B-1728B52AA6E4}">
-                <adec:decorative xmlns:adec="http://schemas.microsoft.com/office/drawing/2017/decorative" val="1"/>
+                <a16:creationId xmlns:a16="http://schemas.microsoft.com/office/drawing/2014/main" id="{5AA484FF-058C-4694-424C-0B3B26DF9F45}"/>
               </a:ext>
             </a:extLst>
           </p:cNvPr>
-          <p:cNvSpPr>
-            <a:spLocks noGrp="1"/>
-          </p:cNvSpPr>
-          <p:nvPr>
-            <p:ph type="body" idx="1"/>
-          </p:nvPr>
+          <p:cNvSpPr txBox="1"/>
+          <p:nvPr/>
         </p:nvSpPr>
-        <p:spPr/>
+        <p:spPr>
+          <a:xfrm>
+            <a:off x="1191065" y="6011594"/>
+            <a:ext cx="8811064" cy="307777"/>
+          </a:xfrm>
+          <a:prstGeom prst="rect">
+            <a:avLst/>
+          </a:prstGeom>
+          <a:noFill/>
+        </p:spPr>
         <p:txBody>
-          <a:bodyPr/>
+          <a:bodyPr wrap="square" rtlCol="0">
+            <a:spAutoFit/>
+          </a:bodyPr>
           <a:lstStyle/>
           <a:p>
-            <a:endParaRPr lang="en-US" dirty="0"/>
+            <a:r>
+              <a:rPr lang="en-US" sz="1400" dirty="0"/>
+              <a:t>See Code on </a:t>
+            </a:r>
+            <a:r>
+              <a:rPr lang="en-US" sz="1400" dirty="0">
+                <a:hlinkClick r:id="rId2"/>
+              </a:rPr>
+              <a:t>https://michael.hahsler.net/Introduction_to_Reinforcement_Learning/</a:t>
+            </a:r>
+            <a:r>
+              <a:rPr lang="en-US" sz="1400" dirty="0"/>
+              <a:t> </a:t>
+            </a:r>
           </a:p>
         </p:txBody>
       </p:sp>
     </p:spTree>
     <p:extLst>
       <p:ext uri="{BB962C8B-B14F-4D97-AF65-F5344CB8AC3E}">
-        <p14:creationId xmlns:p14="http://schemas.microsoft.com/office/powerpoint/2010/main" val="4164509424"/>
+        <p14:creationId xmlns:p14="http://schemas.microsoft.com/office/powerpoint/2010/main" val="190193640"/>
       </p:ext>
     </p:extLst>
   </p:cSld>
@@ -24245,7 +24191,7 @@
           <p:cNvPr id="2" name="Title 1">
             <a:extLst>
               <a:ext uri="{FF2B5EF4-FFF2-40B4-BE49-F238E27FC236}">
-                <a16:creationId xmlns:a16="http://schemas.microsoft.com/office/drawing/2014/main" id="{CE64B189-2BE7-EF8E-90AD-B8D2A5B4A30A}"/>
+                <a16:creationId xmlns:a16="http://schemas.microsoft.com/office/drawing/2014/main" id="{63AB4F15-1BAA-E34A-C756-20976A500CB1}"/>
               </a:ext>
             </a:extLst>
           </p:cNvPr>
@@ -24263,7 +24209,7 @@
           <a:p>
             <a:r>
               <a:rPr lang="en-US" dirty="0"/>
-              <a:t>Issues with DP Methods</a:t>
+              <a:t>More on Convergence</a:t>
             </a:r>
           </a:p>
         </p:txBody>
@@ -24272,10 +24218,10 @@
         <mc:Choice Requires="a14">
           <p:sp>
             <p:nvSpPr>
-              <p:cNvPr id="3" name="Content Placeholder 2" descr="Require perfect knowledge of the model!. Space Complexity. Tabular method: stores the complete value function as tables V or Q . Time Complexity. Updates repeatedly sweep over the whole state space. Wastes computation by updating states that are not relevant for the optimal behavior. I.e., the optimal policy will never visit them. Tabular methods can not generalize between similar states">
+              <p:cNvPr id="3" name="Content Placeholder 2">
                 <a:extLst>
                   <a:ext uri="{FF2B5EF4-FFF2-40B4-BE49-F238E27FC236}">
-                    <a16:creationId xmlns:a16="http://schemas.microsoft.com/office/drawing/2014/main" id="{5664E2E2-C328-F2E5-08B7-7436CBE7F52E}"/>
+                    <a16:creationId xmlns:a16="http://schemas.microsoft.com/office/drawing/2014/main" id="{B19B88DF-BBBD-581D-8BC9-011B1D14AED2}"/>
                   </a:ext>
                 </a:extLst>
               </p:cNvPr>
@@ -24286,15 +24232,10 @@
                 <p:ph idx="1"/>
               </p:nvPr>
             </p:nvSpPr>
-            <p:spPr>
-              <a:xfrm>
-                <a:off x="838200" y="1397330"/>
-                <a:ext cx="8804945" cy="4779633"/>
-              </a:xfrm>
-            </p:spPr>
+            <p:spPr/>
             <p:txBody>
               <a:bodyPr>
-                <a:normAutofit lnSpcReduction="10000"/>
+                <a:normAutofit/>
               </a:bodyPr>
               <a:lstStyle/>
               <a:p>
@@ -24302,31 +24243,24 @@
                   <a:buNone/>
                 </a:pPr>
                 <a:r>
-                  <a:rPr lang="en-US" b="1" dirty="0"/>
-                  <a:t>Require perfect knowledge of the model!</a:t>
+                  <a:rPr lang="en-US" dirty="0"/>
+                  <a:t>Policy evaluation and all algorithms built on the idea always converge for:</a:t>
                 </a:r>
               </a:p>
               <a:p>
                 <a:pPr marL="0" indent="0">
                   <a:buNone/>
                 </a:pPr>
-                <a:endParaRPr lang="en-US" b="1" dirty="0"/>
-              </a:p>
-              <a:p>
-                <a:pPr marL="0" indent="0">
-                  <a:buNone/>
-                </a:pPr>
-                <a:r>
-                  <a:rPr lang="en-US" b="1" dirty="0"/>
-                  <a:t>Space Complexity</a:t>
-                </a:r>
                 <a:endParaRPr lang="en-US" dirty="0"/>
               </a:p>
               <a:p>
-                <a:pPr lvl="1"/>
+                <a:pPr marL="514350" indent="-514350">
+                  <a:buFont typeface="+mj-lt"/>
+                  <a:buAutoNum type="arabicPeriod"/>
+                </a:pPr>
                 <a:r>
-                  <a:rPr lang="en-US" dirty="0"/>
-                  <a:t>Tabular method: stores the complete value function as tables </a:t>
+                  <a:rPr lang="en-US" b="0" dirty="0"/>
+                  <a:t> </a:t>
                 </a:r>
                 <a14:m>
                   <m:oMath xmlns:m="http://schemas.openxmlformats.org/officeDocument/2006/math">
@@ -24334,13 +24268,29 @@
                       <a:rPr lang="en-US" b="0" i="1" smtClean="0">
                         <a:latin typeface="Cambria Math" panose="02040503050406030204" pitchFamily="18" charset="0"/>
                       </a:rPr>
-                      <m:t>𝑉</m:t>
+                      <m:t>𝛾</m:t>
+                    </m:r>
+                    <m:r>
+                      <a:rPr lang="en-US" b="0" i="1" smtClean="0">
+                        <a:latin typeface="Cambria Math" panose="02040503050406030204" pitchFamily="18" charset="0"/>
+                      </a:rPr>
+                      <m:t>&lt;1</m:t>
                     </m:r>
                   </m:oMath>
                 </a14:m>
                 <a:r>
+                  <a:rPr lang="en-US" b="0" dirty="0"/>
+                  <a:t> </a:t>
+                </a:r>
+              </a:p>
+              <a:p>
+                <a:pPr marL="514350" indent="-514350">
+                  <a:buFont typeface="+mj-lt"/>
+                  <a:buAutoNum type="arabicPeriod"/>
+                </a:pPr>
+                <a:r>
                   <a:rPr lang="en-US" dirty="0"/>
-                  <a:t> or </a:t>
+                  <a:t> </a:t>
                 </a:r>
                 <a14:m>
                   <m:oMath xmlns:m="http://schemas.openxmlformats.org/officeDocument/2006/math">
@@ -24348,16 +24298,26 @@
                       <a:rPr lang="en-US" b="0" i="1" smtClean="0">
                         <a:latin typeface="Cambria Math" panose="02040503050406030204" pitchFamily="18" charset="0"/>
                       </a:rPr>
-                      <m:t>𝑄</m:t>
+                      <m:t>𝛾</m:t>
+                    </m:r>
+                    <m:r>
+                      <a:rPr lang="en-US" b="0" i="1" smtClean="0">
+                        <a:latin typeface="Cambria Math" panose="02040503050406030204" pitchFamily="18" charset="0"/>
+                      </a:rPr>
+                      <m:t>=1</m:t>
                     </m:r>
                   </m:oMath>
                 </a14:m>
                 <a:r>
                   <a:rPr lang="en-US" dirty="0"/>
-                  <a:t>. </a:t>
+                  <a:t> and a terminating policy*</a:t>
                 </a:r>
               </a:p>
               <a:p>
+                <a:pPr marL="514350" indent="-514350">
+                  <a:buFont typeface="+mj-lt"/>
+                  <a:buAutoNum type="arabicPeriod"/>
+                </a:pPr>
                 <a:endParaRPr lang="en-US" dirty="0"/>
               </a:p>
               <a:p>
@@ -24365,29 +24325,8 @@
                   <a:buNone/>
                 </a:pPr>
                 <a:r>
-                  <a:rPr lang="en-US" b="1" dirty="0"/>
-                  <a:t>Time Complexity</a:t>
-                </a:r>
-              </a:p>
-              <a:p>
-                <a:pPr lvl="1"/>
-                <a:r>
-                  <a:rPr lang="en-US" dirty="0"/>
-                  <a:t>Updates repeatedly sweep over the whole state space.</a:t>
-                </a:r>
-              </a:p>
-              <a:p>
-                <a:pPr lvl="1"/>
-                <a:r>
-                  <a:rPr lang="en-US" dirty="0"/>
-                  <a:t>Wastes computation by updating states that are not relevant for the optimal behavior. I.e., the optimal policy will never visit them.</a:t>
-                </a:r>
-              </a:p>
-              <a:p>
-                <a:pPr lvl="1"/>
-                <a:r>
-                  <a:rPr lang="en-US" dirty="0"/>
-                  <a:t>Tabular methods can not generalize between similar states.</a:t>
+                  <a:rPr lang="en-US" sz="2400" dirty="0"/>
+                  <a:t>* The evaluated policy must always reach a terminating state to end the episode.</a:t>
                 </a:r>
               </a:p>
             </p:txBody>
@@ -24396,10 +24335,10 @@
         <mc:Fallback xmlns="">
           <p:sp>
             <p:nvSpPr>
-              <p:cNvPr id="3" name="Content Placeholder 2" descr="Require perfect knowledge of the model!. Space Complexity. Tabular method: stores the complete value function as tables V or Q . Time Complexity. Updates repeatedly sweep over the whole state space. Wastes computation by updating states that are not relevant for the optimal behavior. I.e., the optimal policy will never visit them. Tabular methods can not generalize between similar states">
+              <p:cNvPr id="3" name="Content Placeholder 2">
                 <a:extLst>
                   <a:ext uri="{FF2B5EF4-FFF2-40B4-BE49-F238E27FC236}">
-                    <a16:creationId xmlns:a16="http://schemas.microsoft.com/office/drawing/2014/main" id="{5664E2E2-C328-F2E5-08B7-7436CBE7F52E}"/>
+                    <a16:creationId xmlns:a16="http://schemas.microsoft.com/office/drawing/2014/main" id="{B19B88DF-BBBD-581D-8BC9-011B1D14AED2}"/>
                   </a:ext>
                 </a:extLst>
               </p:cNvPr>
@@ -24411,14 +24350,10 @@
               </p:nvPr>
             </p:nvSpPr>
             <p:spPr>
-              <a:xfrm>
-                <a:off x="838200" y="1397330"/>
-                <a:ext cx="8804945" cy="4779633"/>
-              </a:xfrm>
               <a:blipFill>
                 <a:blip r:embed="rId2"/>
                 <a:stretch>
-                  <a:fillRect l="-1454" t="-2806" r="-1108"/>
+                  <a:fillRect l="-1217" t="-2168"/>
                 </a:stretch>
               </a:blipFill>
             </p:spPr>
@@ -24437,107 +24372,10 @@
           </p:sp>
         </mc:Fallback>
       </mc:AlternateContent>
-      <p:sp>
-        <p:nvSpPr>
-          <p:cNvPr id="4" name="Right Brace 3">
-            <a:extLst>
-              <a:ext uri="{FF2B5EF4-FFF2-40B4-BE49-F238E27FC236}">
-                <a16:creationId xmlns:a16="http://schemas.microsoft.com/office/drawing/2014/main" id="{6339C8F8-48C4-0C07-3B0E-F41FE0B782D3}"/>
-              </a:ext>
-              <a:ext uri="{C183D7F6-B498-43B3-948B-1728B52AA6E4}">
-                <adec:decorative xmlns:adec="http://schemas.microsoft.com/office/drawing/2017/decorative" val="1"/>
-              </a:ext>
-            </a:extLst>
-          </p:cNvPr>
-          <p:cNvSpPr/>
-          <p:nvPr/>
-        </p:nvSpPr>
-        <p:spPr>
-          <a:xfrm>
-            <a:off x="9582325" y="4408415"/>
-            <a:ext cx="281031" cy="1103152"/>
-          </a:xfrm>
-          <a:prstGeom prst="rightBrace">
-            <a:avLst/>
-          </a:prstGeom>
-        </p:spPr>
-        <p:style>
-          <a:lnRef idx="2">
-            <a:schemeClr val="accent1"/>
-          </a:lnRef>
-          <a:fillRef idx="0">
-            <a:schemeClr val="accent1"/>
-          </a:fillRef>
-          <a:effectRef idx="1">
-            <a:schemeClr val="accent1"/>
-          </a:effectRef>
-          <a:fontRef idx="minor">
-            <a:schemeClr val="tx1"/>
-          </a:fontRef>
-        </p:style>
-        <p:txBody>
-          <a:bodyPr rtlCol="0" anchor="ctr"/>
-          <a:lstStyle/>
-          <a:p>
-            <a:pPr algn="ctr"/>
-            <a:endParaRPr lang="en-US" dirty="0"/>
-          </a:p>
-        </p:txBody>
-      </p:sp>
-      <p:sp>
-        <p:nvSpPr>
-          <p:cNvPr id="5" name="TextBox 4">
-            <a:extLst>
-              <a:ext uri="{FF2B5EF4-FFF2-40B4-BE49-F238E27FC236}">
-                <a16:creationId xmlns:a16="http://schemas.microsoft.com/office/drawing/2014/main" id="{DC7DAF1B-95EB-22B1-1191-7C8BC9E6FAC3}"/>
-              </a:ext>
-            </a:extLst>
-          </p:cNvPr>
-          <p:cNvSpPr txBox="1"/>
-          <p:nvPr/>
-        </p:nvSpPr>
-        <p:spPr>
-          <a:xfrm>
-            <a:off x="9987094" y="4636825"/>
-            <a:ext cx="1635854" cy="646331"/>
-          </a:xfrm>
-          <a:prstGeom prst="rect">
-            <a:avLst/>
-          </a:prstGeom>
-        </p:spPr>
-        <p:style>
-          <a:lnRef idx="2">
-            <a:schemeClr val="accent1">
-              <a:shade val="15000"/>
-            </a:schemeClr>
-          </a:lnRef>
-          <a:fillRef idx="1">
-            <a:schemeClr val="accent1"/>
-          </a:fillRef>
-          <a:effectRef idx="0">
-            <a:schemeClr val="accent1"/>
-          </a:effectRef>
-          <a:fontRef idx="minor">
-            <a:schemeClr val="lt1"/>
-          </a:fontRef>
-        </p:style>
-        <p:txBody>
-          <a:bodyPr wrap="square" rtlCol="0">
-            <a:spAutoFit/>
-          </a:bodyPr>
-          <a:lstStyle/>
-          <a:p>
-            <a:r>
-              <a:rPr lang="en-US" dirty="0"/>
-              <a:t>Asynchronous DP can help</a:t>
-            </a:r>
-          </a:p>
-        </p:txBody>
-      </p:sp>
     </p:spTree>
     <p:extLst>
       <p:ext uri="{BB962C8B-B14F-4D97-AF65-F5344CB8AC3E}">
-        <p14:creationId xmlns:p14="http://schemas.microsoft.com/office/powerpoint/2010/main" val="2486968449"/>
+        <p14:creationId xmlns:p14="http://schemas.microsoft.com/office/powerpoint/2010/main" val="4156439938"/>
       </p:ext>
     </p:extLst>
   </p:cSld>
@@ -24548,6 +24386,133 @@
 </file>
 
 <file path=ppt/slides/slide25.xml><?xml version="1.0" encoding="utf-8"?>
+<p:sld xmlns:a="http://schemas.openxmlformats.org/drawingml/2006/main" xmlns:r="http://schemas.openxmlformats.org/officeDocument/2006/relationships" xmlns:p="http://schemas.openxmlformats.org/presentationml/2006/main">
+  <p:cSld>
+    <p:spTree>
+      <p:nvGrpSpPr>
+        <p:cNvPr id="1" name="">
+          <a:extLst>
+            <a:ext uri="{FF2B5EF4-FFF2-40B4-BE49-F238E27FC236}">
+              <a16:creationId xmlns:a16="http://schemas.microsoft.com/office/drawing/2014/main" id="{DE2F969D-8D6C-0B24-2FBF-153574A4FA72}"/>
+            </a:ext>
+          </a:extLst>
+        </p:cNvPr>
+        <p:cNvGrpSpPr/>
+        <p:nvPr/>
+      </p:nvGrpSpPr>
+      <p:grpSpPr>
+        <a:xfrm>
+          <a:off x="0" y="0"/>
+          <a:ext cx="0" cy="0"/>
+          <a:chOff x="0" y="0"/>
+          <a:chExt cx="0" cy="0"/>
+        </a:xfrm>
+      </p:grpSpPr>
+      <p:sp>
+        <p:nvSpPr>
+          <p:cNvPr id="4" name="Title 3">
+            <a:extLst>
+              <a:ext uri="{FF2B5EF4-FFF2-40B4-BE49-F238E27FC236}">
+                <a16:creationId xmlns:a16="http://schemas.microsoft.com/office/drawing/2014/main" id="{690557DC-CC55-03B0-D87E-1EBAB8F91AA7}"/>
+              </a:ext>
+            </a:extLst>
+          </p:cNvPr>
+          <p:cNvSpPr>
+            <a:spLocks noGrp="1"/>
+          </p:cNvSpPr>
+          <p:nvPr>
+            <p:ph type="title"/>
+          </p:nvPr>
+        </p:nvSpPr>
+        <p:spPr>
+          <a:xfrm>
+            <a:off x="1105486" y="2766218"/>
+            <a:ext cx="10515600" cy="1168047"/>
+          </a:xfrm>
+        </p:spPr>
+        <p:txBody>
+          <a:bodyPr>
+            <a:normAutofit fontScale="90000"/>
+          </a:bodyPr>
+          <a:lstStyle/>
+          <a:p>
+            <a:r>
+              <a:rPr lang="en-US" b="1" dirty="0"/>
+              <a:t>Code example: </a:t>
+            </a:r>
+            <a:br>
+              <a:rPr lang="en-US" b="1" dirty="0"/>
+            </a:br>
+            <a:r>
+              <a:rPr lang="en-US" dirty="0"/>
+              <a:t>Compare the convergence of Policy Evaluation using different versions of the L-maze</a:t>
+            </a:r>
+            <a:br>
+              <a:rPr lang="en-US" dirty="0"/>
+            </a:br>
+            <a:endParaRPr lang="en-US" dirty="0"/>
+          </a:p>
+        </p:txBody>
+      </p:sp>
+      <p:sp>
+        <p:nvSpPr>
+          <p:cNvPr id="5" name="TextBox 4">
+            <a:extLst>
+              <a:ext uri="{FF2B5EF4-FFF2-40B4-BE49-F238E27FC236}">
+                <a16:creationId xmlns:a16="http://schemas.microsoft.com/office/drawing/2014/main" id="{D51F0114-615F-945E-3B2F-658483E251E4}"/>
+              </a:ext>
+            </a:extLst>
+          </p:cNvPr>
+          <p:cNvSpPr txBox="1"/>
+          <p:nvPr/>
+        </p:nvSpPr>
+        <p:spPr>
+          <a:xfrm>
+            <a:off x="1191065" y="6011594"/>
+            <a:ext cx="8811064" cy="307777"/>
+          </a:xfrm>
+          <a:prstGeom prst="rect">
+            <a:avLst/>
+          </a:prstGeom>
+          <a:noFill/>
+        </p:spPr>
+        <p:txBody>
+          <a:bodyPr wrap="square" rtlCol="0">
+            <a:spAutoFit/>
+          </a:bodyPr>
+          <a:lstStyle/>
+          <a:p>
+            <a:r>
+              <a:rPr lang="en-US" sz="1400" dirty="0"/>
+              <a:t>See Code on </a:t>
+            </a:r>
+            <a:r>
+              <a:rPr lang="en-US" sz="1400" dirty="0">
+                <a:hlinkClick r:id="rId2"/>
+              </a:rPr>
+              <a:t>https://michael.hahsler.net/Introduction_to_Reinforcement_Learning/</a:t>
+            </a:r>
+            <a:r>
+              <a:rPr lang="en-US" sz="1400" dirty="0"/>
+              <a:t> </a:t>
+            </a:r>
+          </a:p>
+        </p:txBody>
+      </p:sp>
+    </p:spTree>
+    <p:extLst>
+      <p:ext uri="{BB962C8B-B14F-4D97-AF65-F5344CB8AC3E}">
+        <p14:creationId xmlns:p14="http://schemas.microsoft.com/office/powerpoint/2010/main" val="2349689889"/>
+      </p:ext>
+    </p:extLst>
+  </p:cSld>
+  <p:clrMapOvr>
+    <a:masterClrMapping/>
+  </p:clrMapOvr>
+</p:sld>
+</file>
+
+<file path=ppt/slides/slide26.xml><?xml version="1.0" encoding="utf-8"?>
 <p:sld xmlns:a="http://schemas.openxmlformats.org/drawingml/2006/main" xmlns:r="http://schemas.openxmlformats.org/officeDocument/2006/relationships" xmlns:p="http://schemas.openxmlformats.org/presentationml/2006/main">
   <p:cSld>
     <p:spTree>
@@ -24587,7 +24552,7 @@
           <a:p>
             <a:r>
               <a:rPr lang="en-US" dirty="0"/>
-              <a:t>Efficiency</a:t>
+              <a:t>Efficiency Comparison</a:t>
             </a:r>
           </a:p>
         </p:txBody>
@@ -25063,7 +25028,458 @@
 </p:sld>
 </file>
 
-<file path=ppt/slides/slide26.xml><?xml version="1.0" encoding="utf-8"?>
+<file path=ppt/slides/slide27.xml><?xml version="1.0" encoding="utf-8"?>
+<p:sld xmlns:a="http://schemas.openxmlformats.org/drawingml/2006/main" xmlns:r="http://schemas.openxmlformats.org/officeDocument/2006/relationships" xmlns:p="http://schemas.openxmlformats.org/presentationml/2006/main">
+  <p:cSld>
+    <p:spTree>
+      <p:nvGrpSpPr>
+        <p:cNvPr id="1" name=""/>
+        <p:cNvGrpSpPr/>
+        <p:nvPr/>
+      </p:nvGrpSpPr>
+      <p:grpSpPr>
+        <a:xfrm>
+          <a:off x="0" y="0"/>
+          <a:ext cx="0" cy="0"/>
+          <a:chOff x="0" y="0"/>
+          <a:chExt cx="0" cy="0"/>
+        </a:xfrm>
+      </p:grpSpPr>
+      <p:sp>
+        <p:nvSpPr>
+          <p:cNvPr id="2" name="Title 1">
+            <a:extLst>
+              <a:ext uri="{FF2B5EF4-FFF2-40B4-BE49-F238E27FC236}">
+                <a16:creationId xmlns:a16="http://schemas.microsoft.com/office/drawing/2014/main" id="{CE64B189-2BE7-EF8E-90AD-B8D2A5B4A30A}"/>
+              </a:ext>
+            </a:extLst>
+          </p:cNvPr>
+          <p:cNvSpPr>
+            <a:spLocks noGrp="1"/>
+          </p:cNvSpPr>
+          <p:nvPr>
+            <p:ph type="title"/>
+          </p:nvPr>
+        </p:nvSpPr>
+        <p:spPr/>
+        <p:txBody>
+          <a:bodyPr/>
+          <a:lstStyle/>
+          <a:p>
+            <a:r>
+              <a:rPr lang="en-US" dirty="0"/>
+              <a:t>Issues with DP Methods</a:t>
+            </a:r>
+          </a:p>
+        </p:txBody>
+      </p:sp>
+      <mc:AlternateContent xmlns:mc="http://schemas.openxmlformats.org/markup-compatibility/2006" xmlns:a14="http://schemas.microsoft.com/office/drawing/2010/main">
+        <mc:Choice Requires="a14">
+          <p:sp>
+            <p:nvSpPr>
+              <p:cNvPr id="3" name="Content Placeholder 2" descr="Require perfect knowledge of the model!. Space Complexity. Tabular method: stores the complete value function as tables V or Q . Time Complexity. Updates repeatedly sweep over the whole state space. Wastes computation by updating states that are not relevant for the optimal behavior. I.e., the optimal policy will never visit them. Tabular methods can not generalize between similar states">
+                <a:extLst>
+                  <a:ext uri="{FF2B5EF4-FFF2-40B4-BE49-F238E27FC236}">
+                    <a16:creationId xmlns:a16="http://schemas.microsoft.com/office/drawing/2014/main" id="{5664E2E2-C328-F2E5-08B7-7436CBE7F52E}"/>
+                  </a:ext>
+                </a:extLst>
+              </p:cNvPr>
+              <p:cNvSpPr>
+                <a:spLocks noGrp="1"/>
+              </p:cNvSpPr>
+              <p:nvPr>
+                <p:ph idx="1"/>
+              </p:nvPr>
+            </p:nvSpPr>
+            <p:spPr>
+              <a:xfrm>
+                <a:off x="838200" y="1397330"/>
+                <a:ext cx="8804945" cy="4779633"/>
+              </a:xfrm>
+            </p:spPr>
+            <p:txBody>
+              <a:bodyPr>
+                <a:normAutofit lnSpcReduction="10000"/>
+              </a:bodyPr>
+              <a:lstStyle/>
+              <a:p>
+                <a:pPr marL="0" indent="0">
+                  <a:buNone/>
+                </a:pPr>
+                <a:r>
+                  <a:rPr lang="en-US" b="1" dirty="0"/>
+                  <a:t>Require perfect knowledge of the model!</a:t>
+                </a:r>
+              </a:p>
+              <a:p>
+                <a:pPr marL="0" indent="0">
+                  <a:buNone/>
+                </a:pPr>
+                <a:endParaRPr lang="en-US" b="1" dirty="0"/>
+              </a:p>
+              <a:p>
+                <a:pPr marL="0" indent="0">
+                  <a:buNone/>
+                </a:pPr>
+                <a:r>
+                  <a:rPr lang="en-US" b="1" dirty="0"/>
+                  <a:t>Space Complexity</a:t>
+                </a:r>
+                <a:endParaRPr lang="en-US" dirty="0"/>
+              </a:p>
+              <a:p>
+                <a:pPr lvl="1"/>
+                <a:r>
+                  <a:rPr lang="en-US" dirty="0"/>
+                  <a:t>Tabular method: stores the complete value function as tables </a:t>
+                </a:r>
+                <a14:m>
+                  <m:oMath xmlns:m="http://schemas.openxmlformats.org/officeDocument/2006/math">
+                    <m:r>
+                      <a:rPr lang="en-US" b="0" i="1" smtClean="0">
+                        <a:latin typeface="Cambria Math" panose="02040503050406030204" pitchFamily="18" charset="0"/>
+                      </a:rPr>
+                      <m:t>𝑉</m:t>
+                    </m:r>
+                  </m:oMath>
+                </a14:m>
+                <a:r>
+                  <a:rPr lang="en-US" dirty="0"/>
+                  <a:t> or </a:t>
+                </a:r>
+                <a14:m>
+                  <m:oMath xmlns:m="http://schemas.openxmlformats.org/officeDocument/2006/math">
+                    <m:r>
+                      <a:rPr lang="en-US" b="0" i="1" smtClean="0">
+                        <a:latin typeface="Cambria Math" panose="02040503050406030204" pitchFamily="18" charset="0"/>
+                      </a:rPr>
+                      <m:t>𝑄</m:t>
+                    </m:r>
+                  </m:oMath>
+                </a14:m>
+                <a:r>
+                  <a:rPr lang="en-US" dirty="0"/>
+                  <a:t>. </a:t>
+                </a:r>
+              </a:p>
+              <a:p>
+                <a:endParaRPr lang="en-US" dirty="0"/>
+              </a:p>
+              <a:p>
+                <a:pPr marL="0" indent="0">
+                  <a:buNone/>
+                </a:pPr>
+                <a:r>
+                  <a:rPr lang="en-US" b="1" dirty="0"/>
+                  <a:t>Time Complexity</a:t>
+                </a:r>
+              </a:p>
+              <a:p>
+                <a:pPr lvl="1"/>
+                <a:r>
+                  <a:rPr lang="en-US" dirty="0"/>
+                  <a:t>Updates repeatedly sweep over the whole state space.</a:t>
+                </a:r>
+              </a:p>
+              <a:p>
+                <a:pPr lvl="1"/>
+                <a:r>
+                  <a:rPr lang="en-US" dirty="0"/>
+                  <a:t>Wastes computation by updating states that are not relevant for the optimal behavior. I.e., the optimal policy will never visit them.</a:t>
+                </a:r>
+              </a:p>
+              <a:p>
+                <a:pPr lvl="1"/>
+                <a:r>
+                  <a:rPr lang="en-US" dirty="0"/>
+                  <a:t>Tabular methods can not generalize between similar states.</a:t>
+                </a:r>
+              </a:p>
+            </p:txBody>
+          </p:sp>
+        </mc:Choice>
+        <mc:Fallback xmlns="">
+          <p:sp>
+            <p:nvSpPr>
+              <p:cNvPr id="3" name="Content Placeholder 2" descr="Require perfect knowledge of the model!. Space Complexity. Tabular method: stores the complete value function as tables V or Q . Time Complexity. Updates repeatedly sweep over the whole state space. Wastes computation by updating states that are not relevant for the optimal behavior. I.e., the optimal policy will never visit them. Tabular methods can not generalize between similar states">
+                <a:extLst>
+                  <a:ext uri="{FF2B5EF4-FFF2-40B4-BE49-F238E27FC236}">
+                    <a16:creationId xmlns:a16="http://schemas.microsoft.com/office/drawing/2014/main" id="{5664E2E2-C328-F2E5-08B7-7436CBE7F52E}"/>
+                  </a:ext>
+                </a:extLst>
+              </p:cNvPr>
+              <p:cNvSpPr>
+                <a:spLocks noGrp="1" noRot="1" noChangeAspect="1" noMove="1" noResize="1" noEditPoints="1" noAdjustHandles="1" noChangeArrowheads="1" noChangeShapeType="1" noTextEdit="1"/>
+              </p:cNvSpPr>
+              <p:nvPr>
+                <p:ph idx="1"/>
+              </p:nvPr>
+            </p:nvSpPr>
+            <p:spPr>
+              <a:xfrm>
+                <a:off x="838200" y="1397330"/>
+                <a:ext cx="8804945" cy="4779633"/>
+              </a:xfrm>
+              <a:blipFill>
+                <a:blip r:embed="rId2"/>
+                <a:stretch>
+                  <a:fillRect l="-1454" t="-2806" r="-1108"/>
+                </a:stretch>
+              </a:blipFill>
+            </p:spPr>
+            <p:txBody>
+              <a:bodyPr/>
+              <a:lstStyle/>
+              <a:p>
+                <a:r>
+                  <a:rPr lang="en-US">
+                    <a:noFill/>
+                  </a:rPr>
+                  <a:t> </a:t>
+                </a:r>
+              </a:p>
+            </p:txBody>
+          </p:sp>
+        </mc:Fallback>
+      </mc:AlternateContent>
+      <p:sp>
+        <p:nvSpPr>
+          <p:cNvPr id="4" name="Right Brace 3">
+            <a:extLst>
+              <a:ext uri="{FF2B5EF4-FFF2-40B4-BE49-F238E27FC236}">
+                <a16:creationId xmlns:a16="http://schemas.microsoft.com/office/drawing/2014/main" id="{6339C8F8-48C4-0C07-3B0E-F41FE0B782D3}"/>
+              </a:ext>
+              <a:ext uri="{C183D7F6-B498-43B3-948B-1728B52AA6E4}">
+                <adec:decorative xmlns:adec="http://schemas.microsoft.com/office/drawing/2017/decorative" val="1"/>
+              </a:ext>
+            </a:extLst>
+          </p:cNvPr>
+          <p:cNvSpPr/>
+          <p:nvPr/>
+        </p:nvSpPr>
+        <p:spPr>
+          <a:xfrm>
+            <a:off x="9582325" y="4408415"/>
+            <a:ext cx="281031" cy="1103152"/>
+          </a:xfrm>
+          <a:prstGeom prst="rightBrace">
+            <a:avLst/>
+          </a:prstGeom>
+        </p:spPr>
+        <p:style>
+          <a:lnRef idx="2">
+            <a:schemeClr val="accent1"/>
+          </a:lnRef>
+          <a:fillRef idx="0">
+            <a:schemeClr val="accent1"/>
+          </a:fillRef>
+          <a:effectRef idx="1">
+            <a:schemeClr val="accent1"/>
+          </a:effectRef>
+          <a:fontRef idx="minor">
+            <a:schemeClr val="tx1"/>
+          </a:fontRef>
+        </p:style>
+        <p:txBody>
+          <a:bodyPr rtlCol="0" anchor="ctr"/>
+          <a:lstStyle/>
+          <a:p>
+            <a:pPr algn="ctr"/>
+            <a:endParaRPr lang="en-US" dirty="0"/>
+          </a:p>
+        </p:txBody>
+      </p:sp>
+      <p:sp>
+        <p:nvSpPr>
+          <p:cNvPr id="5" name="TextBox 4">
+            <a:extLst>
+              <a:ext uri="{FF2B5EF4-FFF2-40B4-BE49-F238E27FC236}">
+                <a16:creationId xmlns:a16="http://schemas.microsoft.com/office/drawing/2014/main" id="{DC7DAF1B-95EB-22B1-1191-7C8BC9E6FAC3}"/>
+              </a:ext>
+            </a:extLst>
+          </p:cNvPr>
+          <p:cNvSpPr txBox="1"/>
+          <p:nvPr/>
+        </p:nvSpPr>
+        <p:spPr>
+          <a:xfrm>
+            <a:off x="9987094" y="4636825"/>
+            <a:ext cx="1635854" cy="646331"/>
+          </a:xfrm>
+          <a:prstGeom prst="rect">
+            <a:avLst/>
+          </a:prstGeom>
+        </p:spPr>
+        <p:style>
+          <a:lnRef idx="2">
+            <a:schemeClr val="accent1">
+              <a:shade val="15000"/>
+            </a:schemeClr>
+          </a:lnRef>
+          <a:fillRef idx="1">
+            <a:schemeClr val="accent1"/>
+          </a:fillRef>
+          <a:effectRef idx="0">
+            <a:schemeClr val="accent1"/>
+          </a:effectRef>
+          <a:fontRef idx="minor">
+            <a:schemeClr val="lt1"/>
+          </a:fontRef>
+        </p:style>
+        <p:txBody>
+          <a:bodyPr wrap="square" rtlCol="0">
+            <a:spAutoFit/>
+          </a:bodyPr>
+          <a:lstStyle/>
+          <a:p>
+            <a:r>
+              <a:rPr lang="en-US" dirty="0"/>
+              <a:t>Asynchronous DP can help</a:t>
+            </a:r>
+          </a:p>
+        </p:txBody>
+      </p:sp>
+    </p:spTree>
+    <p:extLst>
+      <p:ext uri="{BB962C8B-B14F-4D97-AF65-F5344CB8AC3E}">
+        <p14:creationId xmlns:p14="http://schemas.microsoft.com/office/powerpoint/2010/main" val="2486968449"/>
+      </p:ext>
+    </p:extLst>
+  </p:cSld>
+  <p:clrMapOvr>
+    <a:masterClrMapping/>
+  </p:clrMapOvr>
+</p:sld>
+</file>
+
+<file path=ppt/slides/slide28.xml><?xml version="1.0" encoding="utf-8"?>
+<p:sld xmlns:a="http://schemas.openxmlformats.org/drawingml/2006/main" xmlns:r="http://schemas.openxmlformats.org/officeDocument/2006/relationships" xmlns:p="http://schemas.openxmlformats.org/presentationml/2006/main">
+  <p:cSld>
+    <p:spTree>
+      <p:nvGrpSpPr>
+        <p:cNvPr id="1" name="">
+          <a:extLst>
+            <a:ext uri="{FF2B5EF4-FFF2-40B4-BE49-F238E27FC236}">
+              <a16:creationId xmlns:a16="http://schemas.microsoft.com/office/drawing/2014/main" id="{10DC13E8-25A8-57D6-4AD4-1C37C79F0776}"/>
+            </a:ext>
+          </a:extLst>
+        </p:cNvPr>
+        <p:cNvGrpSpPr/>
+        <p:nvPr/>
+      </p:nvGrpSpPr>
+      <p:grpSpPr>
+        <a:xfrm>
+          <a:off x="0" y="0"/>
+          <a:ext cx="0" cy="0"/>
+          <a:chOff x="0" y="0"/>
+          <a:chExt cx="0" cy="0"/>
+        </a:xfrm>
+      </p:grpSpPr>
+      <p:sp>
+        <p:nvSpPr>
+          <p:cNvPr id="4" name="Title 3">
+            <a:extLst>
+              <a:ext uri="{FF2B5EF4-FFF2-40B4-BE49-F238E27FC236}">
+                <a16:creationId xmlns:a16="http://schemas.microsoft.com/office/drawing/2014/main" id="{78DC6B0A-58EE-DD0F-9D88-8F7398E414EF}"/>
+              </a:ext>
+            </a:extLst>
+          </p:cNvPr>
+          <p:cNvSpPr>
+            <a:spLocks noGrp="1"/>
+          </p:cNvSpPr>
+          <p:nvPr>
+            <p:ph type="title"/>
+          </p:nvPr>
+        </p:nvSpPr>
+        <p:spPr>
+          <a:xfrm>
+            <a:off x="1105486" y="2766218"/>
+            <a:ext cx="10515600" cy="1168047"/>
+          </a:xfrm>
+        </p:spPr>
+        <p:txBody>
+          <a:bodyPr>
+            <a:normAutofit fontScale="90000"/>
+          </a:bodyPr>
+          <a:lstStyle/>
+          <a:p>
+            <a:r>
+              <a:rPr lang="en-US" b="1" dirty="0"/>
+              <a:t>Code example: </a:t>
+            </a:r>
+            <a:br>
+              <a:rPr lang="en-US" b="1" dirty="0"/>
+            </a:br>
+            <a:r>
+              <a:rPr lang="en-US" dirty="0"/>
+              <a:t>Modeling Tic-Tac-Toe as an MDP and applying Value Iteration</a:t>
+            </a:r>
+            <a:br>
+              <a:rPr lang="en-US" dirty="0"/>
+            </a:br>
+            <a:endParaRPr lang="en-US" dirty="0"/>
+          </a:p>
+        </p:txBody>
+      </p:sp>
+      <p:sp>
+        <p:nvSpPr>
+          <p:cNvPr id="5" name="TextBox 4">
+            <a:extLst>
+              <a:ext uri="{FF2B5EF4-FFF2-40B4-BE49-F238E27FC236}">
+                <a16:creationId xmlns:a16="http://schemas.microsoft.com/office/drawing/2014/main" id="{3357F363-9177-E385-EF6E-C3DC95694022}"/>
+              </a:ext>
+            </a:extLst>
+          </p:cNvPr>
+          <p:cNvSpPr txBox="1"/>
+          <p:nvPr/>
+        </p:nvSpPr>
+        <p:spPr>
+          <a:xfrm>
+            <a:off x="1191065" y="6011594"/>
+            <a:ext cx="8811064" cy="307777"/>
+          </a:xfrm>
+          <a:prstGeom prst="rect">
+            <a:avLst/>
+          </a:prstGeom>
+          <a:noFill/>
+        </p:spPr>
+        <p:txBody>
+          <a:bodyPr wrap="square" rtlCol="0">
+            <a:spAutoFit/>
+          </a:bodyPr>
+          <a:lstStyle/>
+          <a:p>
+            <a:r>
+              <a:rPr lang="en-US" sz="1400" dirty="0"/>
+              <a:t>See Code on </a:t>
+            </a:r>
+            <a:r>
+              <a:rPr lang="en-US" sz="1400" dirty="0">
+                <a:hlinkClick r:id="rId2"/>
+              </a:rPr>
+              <a:t>https://michael.hahsler.net/Introduction_to_Reinforcement_Learning/</a:t>
+            </a:r>
+            <a:r>
+              <a:rPr lang="en-US" sz="1400" dirty="0"/>
+              <a:t> </a:t>
+            </a:r>
+          </a:p>
+        </p:txBody>
+      </p:sp>
+    </p:spTree>
+    <p:extLst>
+      <p:ext uri="{BB962C8B-B14F-4D97-AF65-F5344CB8AC3E}">
+        <p14:creationId xmlns:p14="http://schemas.microsoft.com/office/powerpoint/2010/main" val="466949983"/>
+      </p:ext>
+    </p:extLst>
+  </p:cSld>
+  <p:clrMapOvr>
+    <a:masterClrMapping/>
+  </p:clrMapOvr>
+</p:sld>
+</file>
+
+<file path=ppt/slides/slide29.xml><?xml version="1.0" encoding="utf-8"?>
 <p:sld xmlns:a="http://schemas.openxmlformats.org/drawingml/2006/main" xmlns:r="http://schemas.openxmlformats.org/officeDocument/2006/relationships" xmlns:p="http://schemas.openxmlformats.org/presentationml/2006/main">
   <p:cSld>
     <p:bg>
